--- a/presentation/pnp_pinn_current_inference_presentation.pptx
+++ b/presentation/pnp_pinn_current_inference_presentation.pptx
@@ -2,24 +2,24 @@
 <file path=ppt/presentation.xml><?xml version="1.0" encoding="utf-8"?>
 <p:presentation xmlns:p="http://schemas.openxmlformats.org/presentationml/2006/main">
   <p:sldMasterIdLst>
-    <p:sldMasterId xmlns:r="http://schemas.openxmlformats.org/officeDocument/2006/relationships" id="2147483648" r:id="Rb76073366bce4215"/>
+    <p:sldMasterId xmlns:r="http://schemas.openxmlformats.org/officeDocument/2006/relationships" id="2147483648" r:id="Rd0d7ab9279e34f2a"/>
   </p:sldMasterIdLst>
   <p:notesMasterIdLst>
-    <p:notesMasterId xmlns:r="http://schemas.openxmlformats.org/officeDocument/2006/relationships" r:id="R180cb36984f24a45"/>
+    <p:notesMasterId xmlns:r="http://schemas.openxmlformats.org/officeDocument/2006/relationships" r:id="R17484d8ae0ab4518"/>
   </p:notesMasterIdLst>
   <p:sldIdLst>
-    <p:sldId xmlns:r="http://schemas.openxmlformats.org/officeDocument/2006/relationships" id="256" r:id="R375712ce75aa4cf2"/>
-    <p:sldId xmlns:r="http://schemas.openxmlformats.org/officeDocument/2006/relationships" id="257" r:id="R562fbc457d8e41a8"/>
-    <p:sldId xmlns:r="http://schemas.openxmlformats.org/officeDocument/2006/relationships" id="258" r:id="R75ec067cfee64b4b"/>
-    <p:sldId xmlns:r="http://schemas.openxmlformats.org/officeDocument/2006/relationships" id="259" r:id="Raa23935e964948b3"/>
-    <p:sldId xmlns:r="http://schemas.openxmlformats.org/officeDocument/2006/relationships" id="260" r:id="R149adee667bc4e86"/>
-    <p:sldId xmlns:r="http://schemas.openxmlformats.org/officeDocument/2006/relationships" id="261" r:id="R17a03d912ab348e9"/>
-    <p:sldId xmlns:r="http://schemas.openxmlformats.org/officeDocument/2006/relationships" id="262" r:id="R7ba7ffabdc4e4a39"/>
-    <p:sldId xmlns:r="http://schemas.openxmlformats.org/officeDocument/2006/relationships" id="263" r:id="R299b5892c37b4c33"/>
-    <p:sldId xmlns:r="http://schemas.openxmlformats.org/officeDocument/2006/relationships" id="264" r:id="Rfe8de09212064827"/>
-    <p:sldId xmlns:r="http://schemas.openxmlformats.org/officeDocument/2006/relationships" id="265" r:id="R1961a16dea904077"/>
-    <p:sldId xmlns:r="http://schemas.openxmlformats.org/officeDocument/2006/relationships" id="266" r:id="R5873627a39634f63"/>
-    <p:sldId xmlns:r="http://schemas.openxmlformats.org/officeDocument/2006/relationships" id="267" r:id="R3541c70c44254a7c"/>
+    <p:sldId xmlns:r="http://schemas.openxmlformats.org/officeDocument/2006/relationships" id="256" r:id="R42431e2e7e684247"/>
+    <p:sldId xmlns:r="http://schemas.openxmlformats.org/officeDocument/2006/relationships" id="257" r:id="R0adfa8f1164543ad"/>
+    <p:sldId xmlns:r="http://schemas.openxmlformats.org/officeDocument/2006/relationships" id="258" r:id="R86bb26f6092347aa"/>
+    <p:sldId xmlns:r="http://schemas.openxmlformats.org/officeDocument/2006/relationships" id="259" r:id="Re61dc3ec90b54fc1"/>
+    <p:sldId xmlns:r="http://schemas.openxmlformats.org/officeDocument/2006/relationships" id="260" r:id="R3baaeee975994dd8"/>
+    <p:sldId xmlns:r="http://schemas.openxmlformats.org/officeDocument/2006/relationships" id="261" r:id="Rcfa5a2bf35db4056"/>
+    <p:sldId xmlns:r="http://schemas.openxmlformats.org/officeDocument/2006/relationships" id="262" r:id="R61b510462c664eef"/>
+    <p:sldId xmlns:r="http://schemas.openxmlformats.org/officeDocument/2006/relationships" id="263" r:id="Rd26406ce51604d6d"/>
+    <p:sldId xmlns:r="http://schemas.openxmlformats.org/officeDocument/2006/relationships" id="264" r:id="R42d3089b51914096"/>
+    <p:sldId xmlns:r="http://schemas.openxmlformats.org/officeDocument/2006/relationships" id="265" r:id="R17ac7f4c212b4c42"/>
+    <p:sldId xmlns:r="http://schemas.openxmlformats.org/officeDocument/2006/relationships" id="266" r:id="Rfe824b9a57944470"/>
+    <p:sldId xmlns:r="http://schemas.openxmlformats.org/officeDocument/2006/relationships" id="267" r:id="R83ac0038ca104df2"/>
   </p:sldIdLst>
   <p:sldSz cx="12192000" cy="6858000"/>
   <p:notesSz cx="6858000" cy="9144000"/>
@@ -1292,7 +1292,7 @@
   </p:cSld>
   <p:clrMap bg1="lt1" tx1="dk1" bg2="lt2" tx2="dk2" accent1="accent1" accent2="accent2" accent3="accent3" accent4="accent4" accent5="accent5" accent6="accent6" hlink="hlink" folHlink="folHlink"/>
   <p:sldLayoutIdLst>
-    <p:sldLayoutId xmlns:r="http://schemas.openxmlformats.org/officeDocument/2006/relationships" id="2147483649" r:id="Rf6d66997a1d846cc"/>
+    <p:sldLayoutId xmlns:r="http://schemas.openxmlformats.org/officeDocument/2006/relationships" id="2147483649" r:id="R5989de4e657d4385"/>
   </p:sldLayoutIdLst>
   <p:txStyles>
     <p:titleStyle>
@@ -1790,7 +1790,7 @@
           <p:cNvPr id="1" name="">
             <a:extLst xmlns:a="http://schemas.openxmlformats.org/drawingml/2006/main">
               <a:ext uri="{FF2B5EF4-FFF2-40B4-BE49-F238E27FC236}">
-                <a16:creationId xmlns:a16="http://schemas.microsoft.com/office/drawing/2014/main" id="{716B83CF-82E7-43B3-A744-E8500EE8F0A5}"/>
+                <a16:creationId xmlns:a16="http://schemas.microsoft.com/office/drawing/2014/main" id="{CDE8C7A4-85D5-451D-A7E7-A6A923E80D05}"/>
               </a:ext>
             </a:extLst>
           </p:cNvPr>
@@ -1825,7 +1825,7 @@
           <p:cNvPr id="2" name="">
             <a:extLst xmlns:a="http://schemas.openxmlformats.org/drawingml/2006/main">
               <a:ext uri="{FF2B5EF4-FFF2-40B4-BE49-F238E27FC236}">
-                <a16:creationId xmlns:a16="http://schemas.microsoft.com/office/drawing/2014/main" id="{6776AF82-300F-4D15-A4BE-BFAA39231EF7}"/>
+                <a16:creationId xmlns:a16="http://schemas.microsoft.com/office/drawing/2014/main" id="{25B42E24-671E-42BF-B2C8-2143A0FA3CC7}"/>
               </a:ext>
             </a:extLst>
           </p:cNvPr>
@@ -1889,7 +1889,42 @@
           <p:cNvPr id="3" name="">
             <a:extLst xmlns:a="http://schemas.openxmlformats.org/drawingml/2006/main">
               <a:ext uri="{FF2B5EF4-FFF2-40B4-BE49-F238E27FC236}">
-                <a16:creationId xmlns:a16="http://schemas.microsoft.com/office/drawing/2014/main" id="{1E618E17-85AE-4DC5-ABB2-DB145539E4A6}"/>
+                <a16:creationId xmlns:a16="http://schemas.microsoft.com/office/drawing/2014/main" id="{3867BDC4-8128-4BA4-8344-9519DA4A3820}"/>
+              </a:ext>
+            </a:extLst>
+          </p:cNvPr>
+          <p:cNvSpPr>
+            <a:spLocks xmlns:a="http://schemas.openxmlformats.org/drawingml/2006/main" noGrp="1"/>
+          </p:cNvSpPr>
+          <p:nvPr/>
+        </p:nvSpPr>
+        <p:spPr>
+          <a:xfrm xmlns:a="http://schemas.openxmlformats.org/drawingml/2006/main">
+            <a:off x="609600" y="914400"/>
+            <a:ext cx="1714500" cy="28575"/>
+          </a:xfrm>
+          <a:prstGeom xmlns:a="http://schemas.openxmlformats.org/drawingml/2006/main" prst="rect">
+            <a:avLst/>
+          </a:prstGeom>
+          <a:solidFill xmlns:a="http://schemas.openxmlformats.org/drawingml/2006/main">
+            <a:srgbClr val="007C89"/>
+          </a:solidFill>
+          <a:ln xmlns:a="http://schemas.openxmlformats.org/drawingml/2006/main" w="0">
+            <a:solidFill>
+              <a:srgbClr val="000000">
+                <a:alpha val="0"/>
+              </a:srgbClr>
+            </a:solidFill>
+            <a:prstDash val="solid"/>
+          </a:ln>
+        </p:spPr>
+      </p:sp>
+      <p:sp>
+        <p:nvSpPr>
+          <p:cNvPr id="4" name="">
+            <a:extLst xmlns:a="http://schemas.openxmlformats.org/drawingml/2006/main">
+              <a:ext uri="{FF2B5EF4-FFF2-40B4-BE49-F238E27FC236}">
+                <a16:creationId xmlns:a16="http://schemas.microsoft.com/office/drawing/2014/main" id="{C0C82A13-191C-4449-928B-84C87ECDF638}"/>
               </a:ext>
             </a:extLst>
           </p:cNvPr>
@@ -1927,7 +1962,7 @@
             <a:pPr algn="l">
               <a:defRPr sz="2700" b="1">
                 <a:solidFill>
-                  <a:srgbClr val="111111"/>
+                  <a:srgbClr val="151515"/>
                 </a:solidFill>
                 <a:latin typeface="Aptos Display"/>
                 <a:ea typeface="Aptos Display"/>
@@ -1937,7 +1972,7 @@
             <a:r>
               <a:rPr sz="2700" b="1">
                 <a:solidFill>
-                  <a:srgbClr val="111111"/>
+                  <a:srgbClr val="151515"/>
                 </a:solidFill>
                 <a:latin typeface="Aptos Display"/>
                 <a:ea typeface="Aptos Display"/>
@@ -1950,10 +1985,10 @@
       </p:sp>
       <p:sp>
         <p:nvSpPr>
-          <p:cNvPr id="4" name="">
-            <a:extLst xmlns:a="http://schemas.openxmlformats.org/drawingml/2006/main">
-              <a:ext uri="{FF2B5EF4-FFF2-40B4-BE49-F238E27FC236}">
-                <a16:creationId xmlns:a16="http://schemas.microsoft.com/office/drawing/2014/main" id="{D318ED8F-4E50-4B2E-A837-C00A2B4EAF15}"/>
+          <p:cNvPr id="5" name="">
+            <a:extLst xmlns:a="http://schemas.openxmlformats.org/drawingml/2006/main">
+              <a:ext uri="{FF2B5EF4-FFF2-40B4-BE49-F238E27FC236}">
+                <a16:creationId xmlns:a16="http://schemas.microsoft.com/office/drawing/2014/main" id="{2D29C847-A0E2-490D-B882-81A058EAB538}"/>
               </a:ext>
             </a:extLst>
           </p:cNvPr>
@@ -2014,10 +2049,10 @@
       </p:sp>
       <p:sp>
         <p:nvSpPr>
-          <p:cNvPr id="5" name="">
-            <a:extLst xmlns:a="http://schemas.openxmlformats.org/drawingml/2006/main">
-              <a:ext uri="{FF2B5EF4-FFF2-40B4-BE49-F238E27FC236}">
-                <a16:creationId xmlns:a16="http://schemas.microsoft.com/office/drawing/2014/main" id="{E12DC21F-24BE-4D3C-A236-83C8C50B6C8A}"/>
+          <p:cNvPr id="6" name="">
+            <a:extLst xmlns:a="http://schemas.openxmlformats.org/drawingml/2006/main">
+              <a:ext uri="{FF2B5EF4-FFF2-40B4-BE49-F238E27FC236}">
+                <a16:creationId xmlns:a16="http://schemas.microsoft.com/office/drawing/2014/main" id="{05F87EE0-7BBE-4D34-A7A8-094D25693430}"/>
               </a:ext>
             </a:extLst>
           </p:cNvPr>
@@ -2035,22 +2070,22 @@
             <a:avLst/>
           </a:prstGeom>
           <a:solidFill xmlns:a="http://schemas.openxmlformats.org/drawingml/2006/main">
-            <a:srgbClr val="FFFFFF"/>
+            <a:srgbClr val="EAF2F8"/>
           </a:solidFill>
           <a:ln xmlns:a="http://schemas.openxmlformats.org/drawingml/2006/main" w="9525">
             <a:solidFill>
-              <a:srgbClr val="CFCFCF"/>
-            </a:solidFill>
-            <a:prstDash val="solid"/>
-          </a:ln>
-        </p:spPr>
-      </p:sp>
-      <p:sp>
-        <p:nvSpPr>
-          <p:cNvPr id="6" name="">
-            <a:extLst xmlns:a="http://schemas.openxmlformats.org/drawingml/2006/main">
-              <a:ext uri="{FF2B5EF4-FFF2-40B4-BE49-F238E27FC236}">
-                <a16:creationId xmlns:a16="http://schemas.microsoft.com/office/drawing/2014/main" id="{34EF5114-BB71-47AE-AE21-4B86B25BFB57}"/>
+              <a:srgbClr val="B9CAD8"/>
+            </a:solidFill>
+            <a:prstDash val="solid"/>
+          </a:ln>
+        </p:spPr>
+      </p:sp>
+      <p:sp>
+        <p:nvSpPr>
+          <p:cNvPr id="7" name="">
+            <a:extLst xmlns:a="http://schemas.openxmlformats.org/drawingml/2006/main">
+              <a:ext uri="{FF2B5EF4-FFF2-40B4-BE49-F238E27FC236}">
+                <a16:creationId xmlns:a16="http://schemas.microsoft.com/office/drawing/2014/main" id="{D44F8419-999D-45D9-A5E6-B7DE801EBEA3}"/>
               </a:ext>
             </a:extLst>
           </p:cNvPr>
@@ -2088,7 +2123,7 @@
             <a:pPr algn="l">
               <a:defRPr sz="1350" b="1">
                 <a:solidFill>
-                  <a:srgbClr val="222222"/>
+                  <a:srgbClr val="1F4E79"/>
                 </a:solidFill>
                 <a:latin typeface="Aptos"/>
                 <a:ea typeface="Aptos"/>
@@ -2098,7 +2133,7 @@
             <a:r>
               <a:rPr sz="1350" b="1">
                 <a:solidFill>
-                  <a:srgbClr val="222222"/>
+                  <a:srgbClr val="1F4E79"/>
                 </a:solidFill>
                 <a:latin typeface="Aptos"/>
                 <a:ea typeface="Aptos"/>
@@ -2111,10 +2146,10 @@
       </p:sp>
       <p:sp>
         <p:nvSpPr>
-          <p:cNvPr id="7" name="">
-            <a:extLst xmlns:a="http://schemas.openxmlformats.org/drawingml/2006/main">
-              <a:ext uri="{FF2B5EF4-FFF2-40B4-BE49-F238E27FC236}">
-                <a16:creationId xmlns:a16="http://schemas.microsoft.com/office/drawing/2014/main" id="{96F66838-8682-42F2-9341-7444CB8FDC1F}"/>
+          <p:cNvPr id="8" name="">
+            <a:extLst xmlns:a="http://schemas.openxmlformats.org/drawingml/2006/main">
+              <a:ext uri="{FF2B5EF4-FFF2-40B4-BE49-F238E27FC236}">
+                <a16:creationId xmlns:a16="http://schemas.microsoft.com/office/drawing/2014/main" id="{9C21C9B1-8B7A-49A0-8EBC-41C492AC3C33}"/>
               </a:ext>
             </a:extLst>
           </p:cNvPr>
@@ -2175,10 +2210,10 @@
       </p:sp>
       <p:sp>
         <p:nvSpPr>
-          <p:cNvPr id="8" name="">
-            <a:extLst xmlns:a="http://schemas.openxmlformats.org/drawingml/2006/main">
-              <a:ext uri="{FF2B5EF4-FFF2-40B4-BE49-F238E27FC236}">
-                <a16:creationId xmlns:a16="http://schemas.microsoft.com/office/drawing/2014/main" id="{DCECCBD1-8BAA-4AC1-A7BF-0306040513C9}"/>
+          <p:cNvPr id="9" name="">
+            <a:extLst xmlns:a="http://schemas.openxmlformats.org/drawingml/2006/main">
+              <a:ext uri="{FF2B5EF4-FFF2-40B4-BE49-F238E27FC236}">
+                <a16:creationId xmlns:a16="http://schemas.microsoft.com/office/drawing/2014/main" id="{1570DD93-EA3D-4A15-A61E-B0181A6EF7CE}"/>
               </a:ext>
             </a:extLst>
           </p:cNvPr>
@@ -2190,30 +2225,30 @@
         <p:spPr>
           <a:xfrm xmlns:a="http://schemas.openxmlformats.org/drawingml/2006/main">
             <a:off x="3476625" y="4467225"/>
-            <a:ext cx="733425" cy="14288"/>
-          </a:xfrm>
-          <a:prstGeom xmlns:a="http://schemas.openxmlformats.org/drawingml/2006/main" prst="rect">
-            <a:avLst/>
-          </a:prstGeom>
-          <a:solidFill xmlns:a="http://schemas.openxmlformats.org/drawingml/2006/main">
-            <a:srgbClr val="2F2F2F"/>
-          </a:solidFill>
-          <a:ln xmlns:a="http://schemas.openxmlformats.org/drawingml/2006/main" w="0">
-            <a:solidFill>
-              <a:srgbClr val="000000">
-                <a:alpha val="0"/>
-              </a:srgbClr>
-            </a:solidFill>
-            <a:prstDash val="solid"/>
-          </a:ln>
-        </p:spPr>
-      </p:sp>
-      <p:sp>
-        <p:nvSpPr>
-          <p:cNvPr id="9" name="">
-            <a:extLst xmlns:a="http://schemas.openxmlformats.org/drawingml/2006/main">
-              <a:ext uri="{FF2B5EF4-FFF2-40B4-BE49-F238E27FC236}">
-                <a16:creationId xmlns:a16="http://schemas.microsoft.com/office/drawing/2014/main" id="{288E62CA-FBD1-495E-9C12-68162CF8BF7B}"/>
+            <a:ext cx="733425" cy="15240"/>
+          </a:xfrm>
+          <a:prstGeom xmlns:a="http://schemas.openxmlformats.org/drawingml/2006/main" prst="rect">
+            <a:avLst/>
+          </a:prstGeom>
+          <a:solidFill xmlns:a="http://schemas.openxmlformats.org/drawingml/2006/main">
+            <a:srgbClr val="1F4E79"/>
+          </a:solidFill>
+          <a:ln xmlns:a="http://schemas.openxmlformats.org/drawingml/2006/main" w="0">
+            <a:solidFill>
+              <a:srgbClr val="000000">
+                <a:alpha val="0"/>
+              </a:srgbClr>
+            </a:solidFill>
+            <a:prstDash val="solid"/>
+          </a:ln>
+        </p:spPr>
+      </p:sp>
+      <p:sp>
+        <p:nvSpPr>
+          <p:cNvPr id="10" name="">
+            <a:extLst xmlns:a="http://schemas.openxmlformats.org/drawingml/2006/main">
+              <a:ext uri="{FF2B5EF4-FFF2-40B4-BE49-F238E27FC236}">
+                <a16:creationId xmlns:a16="http://schemas.microsoft.com/office/drawing/2014/main" id="{A3A8B3FE-C40D-413C-BABE-11070DB2D068}"/>
               </a:ext>
             </a:extLst>
           </p:cNvPr>
@@ -2251,7 +2286,7 @@
             <a:pPr algn="l">
               <a:defRPr sz="1350" b="1">
                 <a:solidFill>
-                  <a:srgbClr val="2F2F2F"/>
+                  <a:srgbClr val="1F4E79"/>
                 </a:solidFill>
                 <a:latin typeface="Aptos"/>
                 <a:ea typeface="Aptos"/>
@@ -2261,7 +2296,7 @@
             <a:r>
               <a:rPr sz="1350" b="1">
                 <a:solidFill>
-                  <a:srgbClr val="2F2F2F"/>
+                  <a:srgbClr val="1F4E79"/>
                 </a:solidFill>
                 <a:latin typeface="Aptos"/>
                 <a:ea typeface="Aptos"/>
@@ -2274,10 +2309,10 @@
       </p:sp>
       <p:sp>
         <p:nvSpPr>
-          <p:cNvPr id="10" name="">
-            <a:extLst xmlns:a="http://schemas.openxmlformats.org/drawingml/2006/main">
-              <a:ext uri="{FF2B5EF4-FFF2-40B4-BE49-F238E27FC236}">
-                <a16:creationId xmlns:a16="http://schemas.microsoft.com/office/drawing/2014/main" id="{4A4337A0-FFC7-482A-BFE5-AF0BD7CC44E0}"/>
+          <p:cNvPr id="11" name="">
+            <a:extLst xmlns:a="http://schemas.openxmlformats.org/drawingml/2006/main">
+              <a:ext uri="{FF2B5EF4-FFF2-40B4-BE49-F238E27FC236}">
+                <a16:creationId xmlns:a16="http://schemas.microsoft.com/office/drawing/2014/main" id="{A1E40C0E-69FC-4F43-B0B5-2D749F052F7C}"/>
               </a:ext>
             </a:extLst>
           </p:cNvPr>
@@ -2295,22 +2330,22 @@
             <a:avLst/>
           </a:prstGeom>
           <a:solidFill xmlns:a="http://schemas.openxmlformats.org/drawingml/2006/main">
-            <a:srgbClr val="FFFFFF"/>
+            <a:srgbClr val="E8F6F7"/>
           </a:solidFill>
           <a:ln xmlns:a="http://schemas.openxmlformats.org/drawingml/2006/main" w="9525">
             <a:solidFill>
-              <a:srgbClr val="CFCFCF"/>
-            </a:solidFill>
-            <a:prstDash val="solid"/>
-          </a:ln>
-        </p:spPr>
-      </p:sp>
-      <p:sp>
-        <p:nvSpPr>
-          <p:cNvPr id="11" name="">
-            <a:extLst xmlns:a="http://schemas.openxmlformats.org/drawingml/2006/main">
-              <a:ext uri="{FF2B5EF4-FFF2-40B4-BE49-F238E27FC236}">
-                <a16:creationId xmlns:a16="http://schemas.microsoft.com/office/drawing/2014/main" id="{1C80630D-9ED3-465E-A66F-FF76404C5371}"/>
+              <a:srgbClr val="B7D7DB"/>
+            </a:solidFill>
+            <a:prstDash val="solid"/>
+          </a:ln>
+        </p:spPr>
+      </p:sp>
+      <p:sp>
+        <p:nvSpPr>
+          <p:cNvPr id="12" name="">
+            <a:extLst xmlns:a="http://schemas.openxmlformats.org/drawingml/2006/main">
+              <a:ext uri="{FF2B5EF4-FFF2-40B4-BE49-F238E27FC236}">
+                <a16:creationId xmlns:a16="http://schemas.microsoft.com/office/drawing/2014/main" id="{46EE8240-E14E-4981-B40E-29EC7889C173}"/>
               </a:ext>
             </a:extLst>
           </p:cNvPr>
@@ -2348,7 +2383,7 @@
             <a:pPr algn="l">
               <a:defRPr sz="1350" b="1">
                 <a:solidFill>
-                  <a:srgbClr val="222222"/>
+                  <a:srgbClr val="007C89"/>
                 </a:solidFill>
                 <a:latin typeface="Aptos"/>
                 <a:ea typeface="Aptos"/>
@@ -2358,7 +2393,7 @@
             <a:r>
               <a:rPr sz="1350" b="1">
                 <a:solidFill>
-                  <a:srgbClr val="222222"/>
+                  <a:srgbClr val="007C89"/>
                 </a:solidFill>
                 <a:latin typeface="Aptos"/>
                 <a:ea typeface="Aptos"/>
@@ -2371,10 +2406,10 @@
       </p:sp>
       <p:sp>
         <p:nvSpPr>
-          <p:cNvPr id="12" name="">
-            <a:extLst xmlns:a="http://schemas.openxmlformats.org/drawingml/2006/main">
-              <a:ext uri="{FF2B5EF4-FFF2-40B4-BE49-F238E27FC236}">
-                <a16:creationId xmlns:a16="http://schemas.microsoft.com/office/drawing/2014/main" id="{B3CDAD30-73F2-490D-A4B1-C8BE3B15CE2B}"/>
+          <p:cNvPr id="13" name="">
+            <a:extLst xmlns:a="http://schemas.openxmlformats.org/drawingml/2006/main">
+              <a:ext uri="{FF2B5EF4-FFF2-40B4-BE49-F238E27FC236}">
+                <a16:creationId xmlns:a16="http://schemas.microsoft.com/office/drawing/2014/main" id="{0D03CA0D-6FE7-4821-91A4-B2EBE43CDA11}"/>
               </a:ext>
             </a:extLst>
           </p:cNvPr>
@@ -2435,10 +2470,10 @@
       </p:sp>
       <p:sp>
         <p:nvSpPr>
-          <p:cNvPr id="13" name="">
-            <a:extLst xmlns:a="http://schemas.openxmlformats.org/drawingml/2006/main">
-              <a:ext uri="{FF2B5EF4-FFF2-40B4-BE49-F238E27FC236}">
-                <a16:creationId xmlns:a16="http://schemas.microsoft.com/office/drawing/2014/main" id="{EB49605E-5E9A-4A84-92DB-3D5FF2B14ED3}"/>
+          <p:cNvPr id="14" name="">
+            <a:extLst xmlns:a="http://schemas.openxmlformats.org/drawingml/2006/main">
+              <a:ext uri="{FF2B5EF4-FFF2-40B4-BE49-F238E27FC236}">
+                <a16:creationId xmlns:a16="http://schemas.microsoft.com/office/drawing/2014/main" id="{383AEA98-C2BA-4467-97C6-68C7A45E80C2}"/>
               </a:ext>
             </a:extLst>
           </p:cNvPr>
@@ -2450,30 +2485,30 @@
         <p:spPr>
           <a:xfrm xmlns:a="http://schemas.openxmlformats.org/drawingml/2006/main">
             <a:off x="7410450" y="4467225"/>
-            <a:ext cx="733425" cy="14288"/>
-          </a:xfrm>
-          <a:prstGeom xmlns:a="http://schemas.openxmlformats.org/drawingml/2006/main" prst="rect">
-            <a:avLst/>
-          </a:prstGeom>
-          <a:solidFill xmlns:a="http://schemas.openxmlformats.org/drawingml/2006/main">
-            <a:srgbClr val="2F2F2F"/>
-          </a:solidFill>
-          <a:ln xmlns:a="http://schemas.openxmlformats.org/drawingml/2006/main" w="0">
-            <a:solidFill>
-              <a:srgbClr val="000000">
-                <a:alpha val="0"/>
-              </a:srgbClr>
-            </a:solidFill>
-            <a:prstDash val="solid"/>
-          </a:ln>
-        </p:spPr>
-      </p:sp>
-      <p:sp>
-        <p:nvSpPr>
-          <p:cNvPr id="14" name="">
-            <a:extLst xmlns:a="http://schemas.openxmlformats.org/drawingml/2006/main">
-              <a:ext uri="{FF2B5EF4-FFF2-40B4-BE49-F238E27FC236}">
-                <a16:creationId xmlns:a16="http://schemas.microsoft.com/office/drawing/2014/main" id="{63DADF5D-4C8B-4690-9733-E61753E079C7}"/>
+            <a:ext cx="733425" cy="15240"/>
+          </a:xfrm>
+          <a:prstGeom xmlns:a="http://schemas.openxmlformats.org/drawingml/2006/main" prst="rect">
+            <a:avLst/>
+          </a:prstGeom>
+          <a:solidFill xmlns:a="http://schemas.openxmlformats.org/drawingml/2006/main">
+            <a:srgbClr val="007C89"/>
+          </a:solidFill>
+          <a:ln xmlns:a="http://schemas.openxmlformats.org/drawingml/2006/main" w="0">
+            <a:solidFill>
+              <a:srgbClr val="000000">
+                <a:alpha val="0"/>
+              </a:srgbClr>
+            </a:solidFill>
+            <a:prstDash val="solid"/>
+          </a:ln>
+        </p:spPr>
+      </p:sp>
+      <p:sp>
+        <p:nvSpPr>
+          <p:cNvPr id="15" name="">
+            <a:extLst xmlns:a="http://schemas.openxmlformats.org/drawingml/2006/main">
+              <a:ext uri="{FF2B5EF4-FFF2-40B4-BE49-F238E27FC236}">
+                <a16:creationId xmlns:a16="http://schemas.microsoft.com/office/drawing/2014/main" id="{84F461EC-625C-4740-B945-454D2823C917}"/>
               </a:ext>
             </a:extLst>
           </p:cNvPr>
@@ -2511,7 +2546,7 @@
             <a:pPr algn="l">
               <a:defRPr sz="1350" b="1">
                 <a:solidFill>
-                  <a:srgbClr val="2F2F2F"/>
+                  <a:srgbClr val="007C89"/>
                 </a:solidFill>
                 <a:latin typeface="Aptos"/>
                 <a:ea typeface="Aptos"/>
@@ -2521,7 +2556,7 @@
             <a:r>
               <a:rPr sz="1350" b="1">
                 <a:solidFill>
-                  <a:srgbClr val="2F2F2F"/>
+                  <a:srgbClr val="007C89"/>
                 </a:solidFill>
                 <a:latin typeface="Aptos"/>
                 <a:ea typeface="Aptos"/>
@@ -2534,10 +2569,10 @@
       </p:sp>
       <p:sp>
         <p:nvSpPr>
-          <p:cNvPr id="15" name="">
-            <a:extLst xmlns:a="http://schemas.openxmlformats.org/drawingml/2006/main">
-              <a:ext uri="{FF2B5EF4-FFF2-40B4-BE49-F238E27FC236}">
-                <a16:creationId xmlns:a16="http://schemas.microsoft.com/office/drawing/2014/main" id="{BF1233A3-8C44-49F0-9411-80573866E977}"/>
+          <p:cNvPr id="16" name="">
+            <a:extLst xmlns:a="http://schemas.openxmlformats.org/drawingml/2006/main">
+              <a:ext uri="{FF2B5EF4-FFF2-40B4-BE49-F238E27FC236}">
+                <a16:creationId xmlns:a16="http://schemas.microsoft.com/office/drawing/2014/main" id="{78C02DDB-B922-468F-BDCC-924014330732}"/>
               </a:ext>
             </a:extLst>
           </p:cNvPr>
@@ -2555,22 +2590,22 @@
             <a:avLst/>
           </a:prstGeom>
           <a:solidFill xmlns:a="http://schemas.openxmlformats.org/drawingml/2006/main">
-            <a:srgbClr val="FFFFFF"/>
+            <a:srgbClr val="FFF1E8"/>
           </a:solidFill>
           <a:ln xmlns:a="http://schemas.openxmlformats.org/drawingml/2006/main" w="9525">
             <a:solidFill>
-              <a:srgbClr val="CFCFCF"/>
-            </a:solidFill>
-            <a:prstDash val="solid"/>
-          </a:ln>
-        </p:spPr>
-      </p:sp>
-      <p:sp>
-        <p:nvSpPr>
-          <p:cNvPr id="16" name="">
-            <a:extLst xmlns:a="http://schemas.openxmlformats.org/drawingml/2006/main">
-              <a:ext uri="{FF2B5EF4-FFF2-40B4-BE49-F238E27FC236}">
-                <a16:creationId xmlns:a16="http://schemas.microsoft.com/office/drawing/2014/main" id="{8C607C1B-9E53-4730-B5A1-3DF3EC40E7AF}"/>
+              <a:srgbClr val="E7C8B8"/>
+            </a:solidFill>
+            <a:prstDash val="solid"/>
+          </a:ln>
+        </p:spPr>
+      </p:sp>
+      <p:sp>
+        <p:nvSpPr>
+          <p:cNvPr id="17" name="">
+            <a:extLst xmlns:a="http://schemas.openxmlformats.org/drawingml/2006/main">
+              <a:ext uri="{FF2B5EF4-FFF2-40B4-BE49-F238E27FC236}">
+                <a16:creationId xmlns:a16="http://schemas.microsoft.com/office/drawing/2014/main" id="{1F350F88-A8C2-4E09-BC59-DC04946FE375}"/>
               </a:ext>
             </a:extLst>
           </p:cNvPr>
@@ -2608,7 +2643,7 @@
             <a:pPr algn="l">
               <a:defRPr sz="1350" b="1">
                 <a:solidFill>
-                  <a:srgbClr val="222222"/>
+                  <a:srgbClr val="C45A2A"/>
                 </a:solidFill>
                 <a:latin typeface="Aptos"/>
                 <a:ea typeface="Aptos"/>
@@ -2618,7 +2653,7 @@
             <a:r>
               <a:rPr sz="1350" b="1">
                 <a:solidFill>
-                  <a:srgbClr val="222222"/>
+                  <a:srgbClr val="C45A2A"/>
                 </a:solidFill>
                 <a:latin typeface="Aptos"/>
                 <a:ea typeface="Aptos"/>
@@ -2631,10 +2666,10 @@
       </p:sp>
       <p:sp>
         <p:nvSpPr>
-          <p:cNvPr id="17" name="">
-            <a:extLst xmlns:a="http://schemas.openxmlformats.org/drawingml/2006/main">
-              <a:ext uri="{FF2B5EF4-FFF2-40B4-BE49-F238E27FC236}">
-                <a16:creationId xmlns:a16="http://schemas.microsoft.com/office/drawing/2014/main" id="{26067961-188D-412E-AB49-69E6244C10F1}"/>
+          <p:cNvPr id="18" name="">
+            <a:extLst xmlns:a="http://schemas.openxmlformats.org/drawingml/2006/main">
+              <a:ext uri="{FF2B5EF4-FFF2-40B4-BE49-F238E27FC236}">
+                <a16:creationId xmlns:a16="http://schemas.microsoft.com/office/drawing/2014/main" id="{9C7D5EE8-561F-439F-B26A-F53B2D10DBB7}"/>
               </a:ext>
             </a:extLst>
           </p:cNvPr>
@@ -2695,10 +2730,10 @@
       </p:sp>
       <p:sp>
         <p:nvSpPr>
-          <p:cNvPr id="18" name="">
-            <a:extLst xmlns:a="http://schemas.openxmlformats.org/drawingml/2006/main">
-              <a:ext uri="{FF2B5EF4-FFF2-40B4-BE49-F238E27FC236}">
-                <a16:creationId xmlns:a16="http://schemas.microsoft.com/office/drawing/2014/main" id="{B050501B-7E1E-4FB2-BBBA-616B28CC525C}"/>
+          <p:cNvPr id="19" name="">
+            <a:extLst xmlns:a="http://schemas.openxmlformats.org/drawingml/2006/main">
+              <a:ext uri="{FF2B5EF4-FFF2-40B4-BE49-F238E27FC236}">
+                <a16:creationId xmlns:a16="http://schemas.microsoft.com/office/drawing/2014/main" id="{0F7B073B-E057-45E6-A425-EF27613F8660}"/>
               </a:ext>
             </a:extLst>
           </p:cNvPr>
@@ -2716,24 +2751,24 @@
             <a:avLst/>
           </a:prstGeom>
           <a:solidFill xmlns:a="http://schemas.openxmlformats.org/drawingml/2006/main">
-            <a:srgbClr val="CFCFCF"/>
-          </a:solidFill>
-          <a:ln xmlns:a="http://schemas.openxmlformats.org/drawingml/2006/main" w="0">
-            <a:solidFill>
-              <a:srgbClr val="000000">
-                <a:alpha val="0"/>
-              </a:srgbClr>
-            </a:solidFill>
-            <a:prstDash val="solid"/>
-          </a:ln>
-        </p:spPr>
-      </p:sp>
-      <p:sp>
-        <p:nvSpPr>
-          <p:cNvPr id="19" name="">
-            <a:extLst xmlns:a="http://schemas.openxmlformats.org/drawingml/2006/main">
-              <a:ext uri="{FF2B5EF4-FFF2-40B4-BE49-F238E27FC236}">
-                <a16:creationId xmlns:a16="http://schemas.microsoft.com/office/drawing/2014/main" id="{7AB33967-FABC-4C69-8D9B-857733B99DA1}"/>
+            <a:srgbClr val="D4D8DD"/>
+          </a:solidFill>
+          <a:ln xmlns:a="http://schemas.openxmlformats.org/drawingml/2006/main" w="0">
+            <a:solidFill>
+              <a:srgbClr val="000000">
+                <a:alpha val="0"/>
+              </a:srgbClr>
+            </a:solidFill>
+            <a:prstDash val="solid"/>
+          </a:ln>
+        </p:spPr>
+      </p:sp>
+      <p:sp>
+        <p:nvSpPr>
+          <p:cNvPr id="20" name="">
+            <a:extLst xmlns:a="http://schemas.openxmlformats.org/drawingml/2006/main">
+              <a:ext uri="{FF2B5EF4-FFF2-40B4-BE49-F238E27FC236}">
+                <a16:creationId xmlns:a16="http://schemas.microsoft.com/office/drawing/2014/main" id="{640DD3C2-3C33-4CCB-8DB6-2AD1ED36F547}"/>
               </a:ext>
             </a:extLst>
           </p:cNvPr>
@@ -2794,10 +2829,10 @@
       </p:sp>
       <p:sp>
         <p:nvSpPr>
-          <p:cNvPr id="20" name="">
-            <a:extLst xmlns:a="http://schemas.openxmlformats.org/drawingml/2006/main">
-              <a:ext uri="{FF2B5EF4-FFF2-40B4-BE49-F238E27FC236}">
-                <a16:creationId xmlns:a16="http://schemas.microsoft.com/office/drawing/2014/main" id="{220960FB-50C5-42EA-9387-02CB2740F0EE}"/>
+          <p:cNvPr id="21" name="">
+            <a:extLst xmlns:a="http://schemas.openxmlformats.org/drawingml/2006/main">
+              <a:ext uri="{FF2B5EF4-FFF2-40B4-BE49-F238E27FC236}">
+                <a16:creationId xmlns:a16="http://schemas.microsoft.com/office/drawing/2014/main" id="{A8F95040-F21A-46FF-8EC8-295B84EF9BD0}"/>
               </a:ext>
             </a:extLst>
           </p:cNvPr>
@@ -2815,24 +2850,24 @@
             <a:avLst/>
           </a:prstGeom>
           <a:solidFill xmlns:a="http://schemas.openxmlformats.org/drawingml/2006/main">
-            <a:srgbClr val="CFCFCF"/>
-          </a:solidFill>
-          <a:ln xmlns:a="http://schemas.openxmlformats.org/drawingml/2006/main" w="0">
-            <a:solidFill>
-              <a:srgbClr val="000000">
-                <a:alpha val="0"/>
-              </a:srgbClr>
-            </a:solidFill>
-            <a:prstDash val="solid"/>
-          </a:ln>
-        </p:spPr>
-      </p:sp>
-      <p:sp>
-        <p:nvSpPr>
-          <p:cNvPr id="21" name="">
-            <a:extLst xmlns:a="http://schemas.openxmlformats.org/drawingml/2006/main">
-              <a:ext uri="{FF2B5EF4-FFF2-40B4-BE49-F238E27FC236}">
-                <a16:creationId xmlns:a16="http://schemas.microsoft.com/office/drawing/2014/main" id="{57CFEAED-3623-456F-89EE-C8FD5C233081}"/>
+            <a:srgbClr val="D4D8DD"/>
+          </a:solidFill>
+          <a:ln xmlns:a="http://schemas.openxmlformats.org/drawingml/2006/main" w="0">
+            <a:solidFill>
+              <a:srgbClr val="000000">
+                <a:alpha val="0"/>
+              </a:srgbClr>
+            </a:solidFill>
+            <a:prstDash val="solid"/>
+          </a:ln>
+        </p:spPr>
+      </p:sp>
+      <p:sp>
+        <p:nvSpPr>
+          <p:cNvPr id="22" name="">
+            <a:extLst xmlns:a="http://schemas.openxmlformats.org/drawingml/2006/main">
+              <a:ext uri="{FF2B5EF4-FFF2-40B4-BE49-F238E27FC236}">
+                <a16:creationId xmlns:a16="http://schemas.microsoft.com/office/drawing/2014/main" id="{DD6FCD4A-879B-4FD8-826F-4CD8E3FB0CF8}"/>
               </a:ext>
             </a:extLst>
           </p:cNvPr>
@@ -2894,7 +2929,7 @@
     </p:spTree>
     <p:extLst>
       <p:ext uri="{BB962C8B-B14F-4D97-AF65-F5344CB8AC3E}">
-        <p14:creationId xmlns:p14="http://schemas.microsoft.com/office/powerpoint/2010/main" val="602278077"/>
+        <p14:creationId xmlns:p14="http://schemas.microsoft.com/office/powerpoint/2010/main" val="1224771533"/>
       </p:ext>
     </p:extLst>
   </p:cSld>
@@ -2918,7 +2953,7 @@
           <p:cNvPr id="1" name="">
             <a:extLst xmlns:a="http://schemas.openxmlformats.org/drawingml/2006/main">
               <a:ext uri="{FF2B5EF4-FFF2-40B4-BE49-F238E27FC236}">
-                <a16:creationId xmlns:a16="http://schemas.microsoft.com/office/drawing/2014/main" id="{18DE9D4F-A244-4ABE-9BF9-9F340FC5AE57}"/>
+                <a16:creationId xmlns:a16="http://schemas.microsoft.com/office/drawing/2014/main" id="{010836BC-94E6-439E-9225-211604B78902}"/>
               </a:ext>
             </a:extLst>
           </p:cNvPr>
@@ -2953,7 +2988,7 @@
           <p:cNvPr id="2" name="">
             <a:extLst xmlns:a="http://schemas.openxmlformats.org/drawingml/2006/main">
               <a:ext uri="{FF2B5EF4-FFF2-40B4-BE49-F238E27FC236}">
-                <a16:creationId xmlns:a16="http://schemas.microsoft.com/office/drawing/2014/main" id="{64961CDA-7659-4EFE-946B-7CD23E4E1076}"/>
+                <a16:creationId xmlns:a16="http://schemas.microsoft.com/office/drawing/2014/main" id="{A744EF8E-3DE4-43C2-85D9-094AFD932C1B}"/>
               </a:ext>
             </a:extLst>
           </p:cNvPr>
@@ -3017,7 +3052,7 @@
           <p:cNvPr id="3" name="">
             <a:extLst xmlns:a="http://schemas.openxmlformats.org/drawingml/2006/main">
               <a:ext uri="{FF2B5EF4-FFF2-40B4-BE49-F238E27FC236}">
-                <a16:creationId xmlns:a16="http://schemas.microsoft.com/office/drawing/2014/main" id="{A30E1AAC-9E49-4BE0-99B5-C419AFAA0A3F}"/>
+                <a16:creationId xmlns:a16="http://schemas.microsoft.com/office/drawing/2014/main" id="{47C99DA2-8B22-4106-9CCB-C30AE4E109E1}"/>
               </a:ext>
             </a:extLst>
           </p:cNvPr>
@@ -3081,7 +3116,7 @@
           <p:cNvPr id="4" name="">
             <a:extLst xmlns:a="http://schemas.openxmlformats.org/drawingml/2006/main">
               <a:ext uri="{FF2B5EF4-FFF2-40B4-BE49-F238E27FC236}">
-                <a16:creationId xmlns:a16="http://schemas.microsoft.com/office/drawing/2014/main" id="{BDC7B56A-C113-4834-8EC3-056078B213FB}"/>
+                <a16:creationId xmlns:a16="http://schemas.microsoft.com/office/drawing/2014/main" id="{426739F5-CD78-46EB-B573-7AC75E965F10}"/>
               </a:ext>
             </a:extLst>
           </p:cNvPr>
@@ -3099,7 +3134,7 @@
             <a:avLst/>
           </a:prstGeom>
           <a:solidFill xmlns:a="http://schemas.openxmlformats.org/drawingml/2006/main">
-            <a:srgbClr val="CFCFCF"/>
+            <a:srgbClr val="D4D8DD"/>
           </a:solidFill>
           <a:ln xmlns:a="http://schemas.openxmlformats.org/drawingml/2006/main" w="0">
             <a:solidFill>
@@ -3116,7 +3151,42 @@
           <p:cNvPr id="5" name="">
             <a:extLst xmlns:a="http://schemas.openxmlformats.org/drawingml/2006/main">
               <a:ext uri="{FF2B5EF4-FFF2-40B4-BE49-F238E27FC236}">
-                <a16:creationId xmlns:a16="http://schemas.microsoft.com/office/drawing/2014/main" id="{B906A0ED-363B-4846-821C-0347AB5B26C2}"/>
+                <a16:creationId xmlns:a16="http://schemas.microsoft.com/office/drawing/2014/main" id="{3580A3B5-09E0-4C04-8D30-27CDF15D79CB}"/>
+              </a:ext>
+            </a:extLst>
+          </p:cNvPr>
+          <p:cNvSpPr>
+            <a:spLocks xmlns:a="http://schemas.openxmlformats.org/drawingml/2006/main" noGrp="1"/>
+          </p:cNvSpPr>
+          <p:nvPr/>
+        </p:nvSpPr>
+        <p:spPr>
+          <a:xfrm xmlns:a="http://schemas.openxmlformats.org/drawingml/2006/main">
+            <a:off x="609600" y="609600"/>
+            <a:ext cx="1524000" cy="19050"/>
+          </a:xfrm>
+          <a:prstGeom xmlns:a="http://schemas.openxmlformats.org/drawingml/2006/main" prst="rect">
+            <a:avLst/>
+          </a:prstGeom>
+          <a:solidFill xmlns:a="http://schemas.openxmlformats.org/drawingml/2006/main">
+            <a:srgbClr val="007C89"/>
+          </a:solidFill>
+          <a:ln xmlns:a="http://schemas.openxmlformats.org/drawingml/2006/main" w="0">
+            <a:solidFill>
+              <a:srgbClr val="000000">
+                <a:alpha val="0"/>
+              </a:srgbClr>
+            </a:solidFill>
+            <a:prstDash val="solid"/>
+          </a:ln>
+        </p:spPr>
+      </p:sp>
+      <p:sp>
+        <p:nvSpPr>
+          <p:cNvPr id="6" name="">
+            <a:extLst xmlns:a="http://schemas.openxmlformats.org/drawingml/2006/main">
+              <a:ext uri="{FF2B5EF4-FFF2-40B4-BE49-F238E27FC236}">
+                <a16:creationId xmlns:a16="http://schemas.microsoft.com/office/drawing/2014/main" id="{2DEB52D4-69C1-432A-BD02-ECB8CE13DBA8}"/>
               </a:ext>
             </a:extLst>
           </p:cNvPr>
@@ -3128,7 +3198,7 @@
         <p:spPr>
           <a:xfrm xmlns:a="http://schemas.openxmlformats.org/drawingml/2006/main">
             <a:off x="609600" y="819150"/>
-            <a:ext cx="10477500" cy="723900"/>
+            <a:ext cx="10477500" cy="742950"/>
           </a:xfrm>
           <a:prstGeom xmlns:a="http://schemas.openxmlformats.org/drawingml/2006/main" prst="rect">
             <a:avLst/>
@@ -3154,7 +3224,7 @@
             <a:pPr algn="l">
               <a:defRPr sz="2475" b="1">
                 <a:solidFill>
-                  <a:srgbClr val="111111"/>
+                  <a:srgbClr val="151515"/>
                 </a:solidFill>
                 <a:latin typeface="Aptos Display"/>
                 <a:ea typeface="Aptos Display"/>
@@ -3164,7 +3234,7 @@
             <a:r>
               <a:rPr sz="2475" b="1">
                 <a:solidFill>
-                  <a:srgbClr val="111111"/>
+                  <a:srgbClr val="151515"/>
                 </a:solidFill>
                 <a:latin typeface="Aptos Display"/>
                 <a:ea typeface="Aptos Display"/>
@@ -3177,14 +3247,14 @@
       </p:sp>
       <p:pic>
         <p:nvPicPr>
-          <p:cNvPr id="6" name=""/>
+          <p:cNvPr id="7" name=""/>
           <p:cNvPicPr>
             <a:picLocks xmlns:a="http://schemas.openxmlformats.org/drawingml/2006/main" noChangeAspect="1"/>
           </p:cNvPicPr>
           <p:nvPr/>
         </p:nvPicPr>
         <p:blipFill>
-          <a:blip xmlns:r="http://schemas.openxmlformats.org/officeDocument/2006/relationships" xmlns:a="http://schemas.openxmlformats.org/drawingml/2006/main" r:embed="R8a617a87dce847c9"/>
+          <a:blip xmlns:r="http://schemas.openxmlformats.org/officeDocument/2006/relationships" xmlns:a="http://schemas.openxmlformats.org/drawingml/2006/main" r:embed="R25a205b224df4e68"/>
           <a:stretch xmlns:a="http://schemas.openxmlformats.org/drawingml/2006/main"/>
         </p:blipFill>
         <p:spPr>
@@ -3199,10 +3269,10 @@
       </p:pic>
       <p:sp>
         <p:nvSpPr>
-          <p:cNvPr id="7" name="">
-            <a:extLst xmlns:a="http://schemas.openxmlformats.org/drawingml/2006/main">
-              <a:ext uri="{FF2B5EF4-FFF2-40B4-BE49-F238E27FC236}">
-                <a16:creationId xmlns:a16="http://schemas.microsoft.com/office/drawing/2014/main" id="{6A5760FE-E75E-49E2-A084-9B4145DA1698}"/>
+          <p:cNvPr id="8" name="">
+            <a:extLst xmlns:a="http://schemas.openxmlformats.org/drawingml/2006/main">
+              <a:ext uri="{FF2B5EF4-FFF2-40B4-BE49-F238E27FC236}">
+                <a16:creationId xmlns:a16="http://schemas.microsoft.com/office/drawing/2014/main" id="{7596903E-6591-4120-BF7A-126A9B47736A}"/>
               </a:ext>
             </a:extLst>
           </p:cNvPr>
@@ -3240,7 +3310,7 @@
             <a:pPr algn="l">
               <a:defRPr sz="1125" b="1">
                 <a:solidFill>
-                  <a:srgbClr val="222222"/>
+                  <a:srgbClr val="1F4E79"/>
                 </a:solidFill>
                 <a:latin typeface="Aptos"/>
                 <a:ea typeface="Aptos"/>
@@ -3250,7 +3320,7 @@
             <a:r>
               <a:rPr sz="1125" b="1">
                 <a:solidFill>
-                  <a:srgbClr val="222222"/>
+                  <a:srgbClr val="1F4E79"/>
                 </a:solidFill>
                 <a:latin typeface="Aptos"/>
                 <a:ea typeface="Aptos"/>
@@ -3263,10 +3333,10 @@
       </p:sp>
       <p:sp>
         <p:nvSpPr>
-          <p:cNvPr id="8" name="">
-            <a:extLst xmlns:a="http://schemas.openxmlformats.org/drawingml/2006/main">
-              <a:ext uri="{FF2B5EF4-FFF2-40B4-BE49-F238E27FC236}">
-                <a16:creationId xmlns:a16="http://schemas.microsoft.com/office/drawing/2014/main" id="{5A2AB3DE-C5FF-4C8D-85CD-111BBFA44B64}"/>
+          <p:cNvPr id="9" name="">
+            <a:extLst xmlns:a="http://schemas.openxmlformats.org/drawingml/2006/main">
+              <a:ext uri="{FF2B5EF4-FFF2-40B4-BE49-F238E27FC236}">
+                <a16:creationId xmlns:a16="http://schemas.microsoft.com/office/drawing/2014/main" id="{A5A7029E-C48F-4234-8E73-D955D12E7DAD}"/>
               </a:ext>
             </a:extLst>
           </p:cNvPr>
@@ -3304,7 +3374,7 @@
             <a:pPr algn="l">
               <a:defRPr sz="1500" b="0">
                 <a:solidFill>
-                  <a:srgbClr val="222222"/>
+                  <a:srgbClr val="242424"/>
                 </a:solidFill>
                 <a:latin typeface="Aptos Mono"/>
                 <a:ea typeface="Aptos Mono"/>
@@ -3314,7 +3384,7 @@
             <a:r>
               <a:rPr sz="1500" b="0">
                 <a:solidFill>
-                  <a:srgbClr val="222222"/>
+                  <a:srgbClr val="242424"/>
                 </a:solidFill>
                 <a:latin typeface="Aptos Mono"/>
                 <a:ea typeface="Aptos Mono"/>
@@ -3327,7 +3397,7 @@
             <a:pPr algn="l">
               <a:defRPr sz="1500" b="0">
                 <a:solidFill>
-                  <a:srgbClr val="222222"/>
+                  <a:srgbClr val="242424"/>
                 </a:solidFill>
                 <a:latin typeface="Aptos Mono"/>
                 <a:ea typeface="Aptos Mono"/>
@@ -3337,7 +3407,7 @@
             <a:r>
               <a:rPr sz="1500" b="0">
                 <a:solidFill>
-                  <a:srgbClr val="222222"/>
+                  <a:srgbClr val="242424"/>
                 </a:solidFill>
                 <a:latin typeface="Aptos Mono"/>
                 <a:ea typeface="Aptos Mono"/>
@@ -3350,10 +3420,10 @@
       </p:sp>
       <p:sp>
         <p:nvSpPr>
-          <p:cNvPr id="9" name="">
-            <a:extLst xmlns:a="http://schemas.openxmlformats.org/drawingml/2006/main">
-              <a:ext uri="{FF2B5EF4-FFF2-40B4-BE49-F238E27FC236}">
-                <a16:creationId xmlns:a16="http://schemas.microsoft.com/office/drawing/2014/main" id="{5C34E361-9F99-4A5A-B7BD-D825510BF72C}"/>
+          <p:cNvPr id="10" name="">
+            <a:extLst xmlns:a="http://schemas.openxmlformats.org/drawingml/2006/main">
+              <a:ext uri="{FF2B5EF4-FFF2-40B4-BE49-F238E27FC236}">
+                <a16:creationId xmlns:a16="http://schemas.microsoft.com/office/drawing/2014/main" id="{D8122CA1-B879-4096-BDEC-584139707A65}"/>
               </a:ext>
             </a:extLst>
           </p:cNvPr>
@@ -3391,7 +3461,7 @@
             <a:pPr algn="l">
               <a:defRPr sz="1125" b="1">
                 <a:solidFill>
-                  <a:srgbClr val="222222"/>
+                  <a:srgbClr val="C45A2A"/>
                 </a:solidFill>
                 <a:latin typeface="Aptos"/>
                 <a:ea typeface="Aptos"/>
@@ -3401,7 +3471,7 @@
             <a:r>
               <a:rPr sz="1125" b="1">
                 <a:solidFill>
-                  <a:srgbClr val="222222"/>
+                  <a:srgbClr val="C45A2A"/>
                 </a:solidFill>
                 <a:latin typeface="Aptos"/>
                 <a:ea typeface="Aptos"/>
@@ -3414,10 +3484,10 @@
       </p:sp>
       <p:sp>
         <p:nvSpPr>
-          <p:cNvPr id="10" name="">
-            <a:extLst xmlns:a="http://schemas.openxmlformats.org/drawingml/2006/main">
-              <a:ext uri="{FF2B5EF4-FFF2-40B4-BE49-F238E27FC236}">
-                <a16:creationId xmlns:a16="http://schemas.microsoft.com/office/drawing/2014/main" id="{093FD64A-346C-4203-941A-DD4CB9D0314D}"/>
+          <p:cNvPr id="11" name="">
+            <a:extLst xmlns:a="http://schemas.openxmlformats.org/drawingml/2006/main">
+              <a:ext uri="{FF2B5EF4-FFF2-40B4-BE49-F238E27FC236}">
+                <a16:creationId xmlns:a16="http://schemas.microsoft.com/office/drawing/2014/main" id="{8225200B-AA37-4D14-AD0B-EB1A7E52D353}"/>
               </a:ext>
             </a:extLst>
           </p:cNvPr>
@@ -3455,7 +3525,7 @@
             <a:pPr algn="l">
               <a:defRPr sz="1350" b="0">
                 <a:solidFill>
-                  <a:srgbClr val="222222"/>
+                  <a:srgbClr val="242424"/>
                 </a:solidFill>
                 <a:latin typeface="Aptos"/>
                 <a:ea typeface="Aptos"/>
@@ -3465,7 +3535,7 @@
             <a:r>
               <a:rPr sz="1350" b="0">
                 <a:solidFill>
-                  <a:srgbClr val="222222"/>
+                  <a:srgbClr val="242424"/>
                 </a:solidFill>
                 <a:latin typeface="Aptos"/>
                 <a:ea typeface="Aptos"/>
@@ -3478,7 +3548,7 @@
             <a:pPr algn="l">
               <a:defRPr sz="1350" b="0">
                 <a:solidFill>
-                  <a:srgbClr val="222222"/>
+                  <a:srgbClr val="242424"/>
                 </a:solidFill>
                 <a:latin typeface="Aptos"/>
                 <a:ea typeface="Aptos"/>
@@ -3488,7 +3558,7 @@
             <a:r>
               <a:rPr sz="1350" b="0">
                 <a:solidFill>
-                  <a:srgbClr val="222222"/>
+                  <a:srgbClr val="242424"/>
                 </a:solidFill>
                 <a:latin typeface="Aptos"/>
                 <a:ea typeface="Aptos"/>
@@ -3501,10 +3571,10 @@
       </p:sp>
       <p:sp>
         <p:nvSpPr>
-          <p:cNvPr id="11" name="">
-            <a:extLst xmlns:a="http://schemas.openxmlformats.org/drawingml/2006/main">
-              <a:ext uri="{FF2B5EF4-FFF2-40B4-BE49-F238E27FC236}">
-                <a16:creationId xmlns:a16="http://schemas.microsoft.com/office/drawing/2014/main" id="{3C65002B-6782-44EB-BE85-4C790437442E}"/>
+          <p:cNvPr id="12" name="">
+            <a:extLst xmlns:a="http://schemas.openxmlformats.org/drawingml/2006/main">
+              <a:ext uri="{FF2B5EF4-FFF2-40B4-BE49-F238E27FC236}">
+                <a16:creationId xmlns:a16="http://schemas.microsoft.com/office/drawing/2014/main" id="{6AE4ED60-305F-4FFD-BBCE-1967FA8E525D}"/>
               </a:ext>
             </a:extLst>
           </p:cNvPr>
@@ -3522,24 +3592,24 @@
             <a:avLst/>
           </a:prstGeom>
           <a:solidFill xmlns:a="http://schemas.openxmlformats.org/drawingml/2006/main">
-            <a:srgbClr val="CFCFCF"/>
-          </a:solidFill>
-          <a:ln xmlns:a="http://schemas.openxmlformats.org/drawingml/2006/main" w="0">
-            <a:solidFill>
-              <a:srgbClr val="000000">
-                <a:alpha val="0"/>
-              </a:srgbClr>
-            </a:solidFill>
-            <a:prstDash val="solid"/>
-          </a:ln>
-        </p:spPr>
-      </p:sp>
-      <p:sp>
-        <p:nvSpPr>
-          <p:cNvPr id="12" name="">
-            <a:extLst xmlns:a="http://schemas.openxmlformats.org/drawingml/2006/main">
-              <a:ext uri="{FF2B5EF4-FFF2-40B4-BE49-F238E27FC236}">
-                <a16:creationId xmlns:a16="http://schemas.microsoft.com/office/drawing/2014/main" id="{72E23443-A041-4CDB-AA84-F21B0A396999}"/>
+            <a:srgbClr val="D4D8DD"/>
+          </a:solidFill>
+          <a:ln xmlns:a="http://schemas.openxmlformats.org/drawingml/2006/main" w="0">
+            <a:solidFill>
+              <a:srgbClr val="000000">
+                <a:alpha val="0"/>
+              </a:srgbClr>
+            </a:solidFill>
+            <a:prstDash val="solid"/>
+          </a:ln>
+        </p:spPr>
+      </p:sp>
+      <p:sp>
+        <p:nvSpPr>
+          <p:cNvPr id="13" name="">
+            <a:extLst xmlns:a="http://schemas.openxmlformats.org/drawingml/2006/main">
+              <a:ext uri="{FF2B5EF4-FFF2-40B4-BE49-F238E27FC236}">
+                <a16:creationId xmlns:a16="http://schemas.microsoft.com/office/drawing/2014/main" id="{91E4511E-8475-48F7-BFFF-B7CE7F07B863}"/>
               </a:ext>
             </a:extLst>
           </p:cNvPr>
@@ -3601,7 +3671,7 @@
     </p:spTree>
     <p:extLst>
       <p:ext uri="{BB962C8B-B14F-4D97-AF65-F5344CB8AC3E}">
-        <p14:creationId xmlns:p14="http://schemas.microsoft.com/office/powerpoint/2010/main" val="1539992739"/>
+        <p14:creationId xmlns:p14="http://schemas.microsoft.com/office/powerpoint/2010/main" val="1466104503"/>
       </p:ext>
     </p:extLst>
   </p:cSld>
@@ -3625,7 +3695,7 @@
           <p:cNvPr id="1" name="">
             <a:extLst xmlns:a="http://schemas.openxmlformats.org/drawingml/2006/main">
               <a:ext uri="{FF2B5EF4-FFF2-40B4-BE49-F238E27FC236}">
-                <a16:creationId xmlns:a16="http://schemas.microsoft.com/office/drawing/2014/main" id="{742A84A3-8D66-4617-BD78-444000222808}"/>
+                <a16:creationId xmlns:a16="http://schemas.microsoft.com/office/drawing/2014/main" id="{B9BBB901-31E6-4CAE-95B5-54237E09AE48}"/>
               </a:ext>
             </a:extLst>
           </p:cNvPr>
@@ -3660,7 +3730,7 @@
           <p:cNvPr id="2" name="">
             <a:extLst xmlns:a="http://schemas.openxmlformats.org/drawingml/2006/main">
               <a:ext uri="{FF2B5EF4-FFF2-40B4-BE49-F238E27FC236}">
-                <a16:creationId xmlns:a16="http://schemas.microsoft.com/office/drawing/2014/main" id="{C55B1269-D46C-4E8A-B568-B3B3133048AA}"/>
+                <a16:creationId xmlns:a16="http://schemas.microsoft.com/office/drawing/2014/main" id="{9A46121D-DD6D-4796-89F3-18ACE6F1C5E9}"/>
               </a:ext>
             </a:extLst>
           </p:cNvPr>
@@ -3724,7 +3794,7 @@
           <p:cNvPr id="3" name="">
             <a:extLst xmlns:a="http://schemas.openxmlformats.org/drawingml/2006/main">
               <a:ext uri="{FF2B5EF4-FFF2-40B4-BE49-F238E27FC236}">
-                <a16:creationId xmlns:a16="http://schemas.microsoft.com/office/drawing/2014/main" id="{58ABFCF9-07EF-4BA8-95F4-3EC999547B40}"/>
+                <a16:creationId xmlns:a16="http://schemas.microsoft.com/office/drawing/2014/main" id="{EA790231-AFAD-46C5-A938-C3D6CD1F8EEC}"/>
               </a:ext>
             </a:extLst>
           </p:cNvPr>
@@ -3788,7 +3858,7 @@
           <p:cNvPr id="4" name="">
             <a:extLst xmlns:a="http://schemas.openxmlformats.org/drawingml/2006/main">
               <a:ext uri="{FF2B5EF4-FFF2-40B4-BE49-F238E27FC236}">
-                <a16:creationId xmlns:a16="http://schemas.microsoft.com/office/drawing/2014/main" id="{C3B42E4F-5616-4307-8EAB-662998DC4463}"/>
+                <a16:creationId xmlns:a16="http://schemas.microsoft.com/office/drawing/2014/main" id="{57FC9628-40DF-4EEB-8786-F8AD39D66FBE}"/>
               </a:ext>
             </a:extLst>
           </p:cNvPr>
@@ -3806,7 +3876,7 @@
             <a:avLst/>
           </a:prstGeom>
           <a:solidFill xmlns:a="http://schemas.openxmlformats.org/drawingml/2006/main">
-            <a:srgbClr val="CFCFCF"/>
+            <a:srgbClr val="D4D8DD"/>
           </a:solidFill>
           <a:ln xmlns:a="http://schemas.openxmlformats.org/drawingml/2006/main" w="0">
             <a:solidFill>
@@ -3823,7 +3893,42 @@
           <p:cNvPr id="5" name="">
             <a:extLst xmlns:a="http://schemas.openxmlformats.org/drawingml/2006/main">
               <a:ext uri="{FF2B5EF4-FFF2-40B4-BE49-F238E27FC236}">
-                <a16:creationId xmlns:a16="http://schemas.microsoft.com/office/drawing/2014/main" id="{4EDD7CCD-B1CD-4375-8851-46EAE5EE167E}"/>
+                <a16:creationId xmlns:a16="http://schemas.microsoft.com/office/drawing/2014/main" id="{D4C6090A-B226-45DB-BD0B-7F9DA7A24BA9}"/>
+              </a:ext>
+            </a:extLst>
+          </p:cNvPr>
+          <p:cNvSpPr>
+            <a:spLocks xmlns:a="http://schemas.openxmlformats.org/drawingml/2006/main" noGrp="1"/>
+          </p:cNvSpPr>
+          <p:nvPr/>
+        </p:nvSpPr>
+        <p:spPr>
+          <a:xfrm xmlns:a="http://schemas.openxmlformats.org/drawingml/2006/main">
+            <a:off x="609600" y="609600"/>
+            <a:ext cx="1524000" cy="19050"/>
+          </a:xfrm>
+          <a:prstGeom xmlns:a="http://schemas.openxmlformats.org/drawingml/2006/main" prst="rect">
+            <a:avLst/>
+          </a:prstGeom>
+          <a:solidFill xmlns:a="http://schemas.openxmlformats.org/drawingml/2006/main">
+            <a:srgbClr val="C45A2A"/>
+          </a:solidFill>
+          <a:ln xmlns:a="http://schemas.openxmlformats.org/drawingml/2006/main" w="0">
+            <a:solidFill>
+              <a:srgbClr val="000000">
+                <a:alpha val="0"/>
+              </a:srgbClr>
+            </a:solidFill>
+            <a:prstDash val="solid"/>
+          </a:ln>
+        </p:spPr>
+      </p:sp>
+      <p:sp>
+        <p:nvSpPr>
+          <p:cNvPr id="6" name="">
+            <a:extLst xmlns:a="http://schemas.openxmlformats.org/drawingml/2006/main">
+              <a:ext uri="{FF2B5EF4-FFF2-40B4-BE49-F238E27FC236}">
+                <a16:creationId xmlns:a16="http://schemas.microsoft.com/office/drawing/2014/main" id="{DF2F41FC-25DE-42A7-9783-A0FC9053D2BD}"/>
               </a:ext>
             </a:extLst>
           </p:cNvPr>
@@ -3835,7 +3940,7 @@
         <p:spPr>
           <a:xfrm xmlns:a="http://schemas.openxmlformats.org/drawingml/2006/main">
             <a:off x="609600" y="819150"/>
-            <a:ext cx="10287000" cy="723900"/>
+            <a:ext cx="10287000" cy="742950"/>
           </a:xfrm>
           <a:prstGeom xmlns:a="http://schemas.openxmlformats.org/drawingml/2006/main" prst="rect">
             <a:avLst/>
@@ -3861,7 +3966,7 @@
             <a:pPr algn="l">
               <a:defRPr sz="2475" b="1">
                 <a:solidFill>
-                  <a:srgbClr val="111111"/>
+                  <a:srgbClr val="151515"/>
                 </a:solidFill>
                 <a:latin typeface="Aptos Display"/>
                 <a:ea typeface="Aptos Display"/>
@@ -3871,7 +3976,7 @@
             <a:r>
               <a:rPr sz="2475" b="1">
                 <a:solidFill>
-                  <a:srgbClr val="111111"/>
+                  <a:srgbClr val="151515"/>
                 </a:solidFill>
                 <a:latin typeface="Aptos Display"/>
                 <a:ea typeface="Aptos Display"/>
@@ -3884,14 +3989,14 @@
       </p:sp>
       <p:pic>
         <p:nvPicPr>
-          <p:cNvPr id="6" name=""/>
+          <p:cNvPr id="7" name=""/>
           <p:cNvPicPr>
             <a:picLocks xmlns:a="http://schemas.openxmlformats.org/drawingml/2006/main" noChangeAspect="1"/>
           </p:cNvPicPr>
           <p:nvPr/>
         </p:nvPicPr>
         <p:blipFill>
-          <a:blip xmlns:r="http://schemas.openxmlformats.org/officeDocument/2006/relationships" xmlns:a="http://schemas.openxmlformats.org/drawingml/2006/main" r:embed="R3cc58311ce3c4a8e"/>
+          <a:blip xmlns:r="http://schemas.openxmlformats.org/officeDocument/2006/relationships" xmlns:a="http://schemas.openxmlformats.org/drawingml/2006/main" r:embed="R80593b6fbeb74885"/>
           <a:stretch xmlns:a="http://schemas.openxmlformats.org/drawingml/2006/main"/>
         </p:blipFill>
         <p:spPr>
@@ -3906,10 +4011,10 @@
       </p:pic>
       <p:sp>
         <p:nvSpPr>
-          <p:cNvPr id="7" name="">
-            <a:extLst xmlns:a="http://schemas.openxmlformats.org/drawingml/2006/main">
-              <a:ext uri="{FF2B5EF4-FFF2-40B4-BE49-F238E27FC236}">
-                <a16:creationId xmlns:a16="http://schemas.microsoft.com/office/drawing/2014/main" id="{8BC712C3-91D3-4126-AE80-30FC6BD15F22}"/>
+          <p:cNvPr id="8" name="">
+            <a:extLst xmlns:a="http://schemas.openxmlformats.org/drawingml/2006/main">
+              <a:ext uri="{FF2B5EF4-FFF2-40B4-BE49-F238E27FC236}">
+                <a16:creationId xmlns:a16="http://schemas.microsoft.com/office/drawing/2014/main" id="{8F61085A-B729-4A0C-B27C-C74F2D8AAF24}"/>
               </a:ext>
             </a:extLst>
           </p:cNvPr>
@@ -3947,7 +4052,7 @@
             <a:pPr algn="l">
               <a:defRPr sz="1125" b="1">
                 <a:solidFill>
-                  <a:srgbClr val="222222"/>
+                  <a:srgbClr val="C45A2A"/>
                 </a:solidFill>
                 <a:latin typeface="Aptos"/>
                 <a:ea typeface="Aptos"/>
@@ -3957,7 +4062,7 @@
             <a:r>
               <a:rPr sz="1125" b="1">
                 <a:solidFill>
-                  <a:srgbClr val="222222"/>
+                  <a:srgbClr val="C45A2A"/>
                 </a:solidFill>
                 <a:latin typeface="Aptos"/>
                 <a:ea typeface="Aptos"/>
@@ -3970,10 +4075,10 @@
       </p:sp>
       <p:sp>
         <p:nvSpPr>
-          <p:cNvPr id="8" name="">
-            <a:extLst xmlns:a="http://schemas.openxmlformats.org/drawingml/2006/main">
-              <a:ext uri="{FF2B5EF4-FFF2-40B4-BE49-F238E27FC236}">
-                <a16:creationId xmlns:a16="http://schemas.microsoft.com/office/drawing/2014/main" id="{6ACB6B71-8630-4CAB-84B6-6AF648513AFC}"/>
+          <p:cNvPr id="9" name="">
+            <a:extLst xmlns:a="http://schemas.openxmlformats.org/drawingml/2006/main">
+              <a:ext uri="{FF2B5EF4-FFF2-40B4-BE49-F238E27FC236}">
+                <a16:creationId xmlns:a16="http://schemas.microsoft.com/office/drawing/2014/main" id="{F4AB60BB-9749-48B7-A985-05C4971600A0}"/>
               </a:ext>
             </a:extLst>
           </p:cNvPr>
@@ -4011,7 +4116,7 @@
             <a:pPr algn="l">
               <a:defRPr sz="1500" b="0">
                 <a:solidFill>
-                  <a:srgbClr val="222222"/>
+                  <a:srgbClr val="242424"/>
                 </a:solidFill>
                 <a:latin typeface="Aptos Mono"/>
                 <a:ea typeface="Aptos Mono"/>
@@ -4021,7 +4126,7 @@
             <a:r>
               <a:rPr sz="1500" b="0">
                 <a:solidFill>
-                  <a:srgbClr val="222222"/>
+                  <a:srgbClr val="242424"/>
                 </a:solidFill>
                 <a:latin typeface="Aptos Mono"/>
                 <a:ea typeface="Aptos Mono"/>
@@ -4034,10 +4139,10 @@
       </p:sp>
       <p:sp>
         <p:nvSpPr>
-          <p:cNvPr id="9" name="">
-            <a:extLst xmlns:a="http://schemas.openxmlformats.org/drawingml/2006/main">
-              <a:ext uri="{FF2B5EF4-FFF2-40B4-BE49-F238E27FC236}">
-                <a16:creationId xmlns:a16="http://schemas.microsoft.com/office/drawing/2014/main" id="{2D026D60-05CA-4117-87DF-CA4BC0D599AC}"/>
+          <p:cNvPr id="10" name="">
+            <a:extLst xmlns:a="http://schemas.openxmlformats.org/drawingml/2006/main">
+              <a:ext uri="{FF2B5EF4-FFF2-40B4-BE49-F238E27FC236}">
+                <a16:creationId xmlns:a16="http://schemas.microsoft.com/office/drawing/2014/main" id="{88138D87-4447-40F9-A09C-735F574949E3}"/>
               </a:ext>
             </a:extLst>
           </p:cNvPr>
@@ -4075,7 +4180,7 @@
             <a:pPr algn="l">
               <a:defRPr sz="1125" b="1">
                 <a:solidFill>
-                  <a:srgbClr val="222222"/>
+                  <a:srgbClr val="1F4E79"/>
                 </a:solidFill>
                 <a:latin typeface="Aptos"/>
                 <a:ea typeface="Aptos"/>
@@ -4085,7 +4190,7 @@
             <a:r>
               <a:rPr sz="1125" b="1">
                 <a:solidFill>
-                  <a:srgbClr val="222222"/>
+                  <a:srgbClr val="1F4E79"/>
                 </a:solidFill>
                 <a:latin typeface="Aptos"/>
                 <a:ea typeface="Aptos"/>
@@ -4098,10 +4203,10 @@
       </p:sp>
       <p:sp>
         <p:nvSpPr>
-          <p:cNvPr id="10" name="">
-            <a:extLst xmlns:a="http://schemas.openxmlformats.org/drawingml/2006/main">
-              <a:ext uri="{FF2B5EF4-FFF2-40B4-BE49-F238E27FC236}">
-                <a16:creationId xmlns:a16="http://schemas.microsoft.com/office/drawing/2014/main" id="{3A42A6D5-637A-42EC-9011-BB3AD84F74C9}"/>
+          <p:cNvPr id="11" name="">
+            <a:extLst xmlns:a="http://schemas.openxmlformats.org/drawingml/2006/main">
+              <a:ext uri="{FF2B5EF4-FFF2-40B4-BE49-F238E27FC236}">
+                <a16:creationId xmlns:a16="http://schemas.microsoft.com/office/drawing/2014/main" id="{02CA79DE-D13A-46B4-9BA9-48A8C1B5284D}"/>
               </a:ext>
             </a:extLst>
           </p:cNvPr>
@@ -4139,7 +4244,7 @@
             <a:pPr algn="l">
               <a:defRPr sz="1500" b="0">
                 <a:solidFill>
-                  <a:srgbClr val="222222"/>
+                  <a:srgbClr val="242424"/>
                 </a:solidFill>
                 <a:latin typeface="Aptos Mono"/>
                 <a:ea typeface="Aptos Mono"/>
@@ -4149,7 +4254,7 @@
             <a:r>
               <a:rPr sz="1500" b="0">
                 <a:solidFill>
-                  <a:srgbClr val="222222"/>
+                  <a:srgbClr val="242424"/>
                 </a:solidFill>
                 <a:latin typeface="Aptos Mono"/>
                 <a:ea typeface="Aptos Mono"/>
@@ -4162,7 +4267,7 @@
             <a:pPr algn="l">
               <a:defRPr sz="1500" b="0">
                 <a:solidFill>
-                  <a:srgbClr val="222222"/>
+                  <a:srgbClr val="242424"/>
                 </a:solidFill>
                 <a:latin typeface="Aptos Mono"/>
                 <a:ea typeface="Aptos Mono"/>
@@ -4172,7 +4277,7 @@
             <a:r>
               <a:rPr sz="1500" b="0">
                 <a:solidFill>
-                  <a:srgbClr val="222222"/>
+                  <a:srgbClr val="242424"/>
                 </a:solidFill>
                 <a:latin typeface="Aptos Mono"/>
                 <a:ea typeface="Aptos Mono"/>
@@ -4185,10 +4290,10 @@
       </p:sp>
       <p:sp>
         <p:nvSpPr>
-          <p:cNvPr id="11" name="">
-            <a:extLst xmlns:a="http://schemas.openxmlformats.org/drawingml/2006/main">
-              <a:ext uri="{FF2B5EF4-FFF2-40B4-BE49-F238E27FC236}">
-                <a16:creationId xmlns:a16="http://schemas.microsoft.com/office/drawing/2014/main" id="{CEF9A39D-E6DA-4DA6-A7C2-1EA3A46904D4}"/>
+          <p:cNvPr id="12" name="">
+            <a:extLst xmlns:a="http://schemas.openxmlformats.org/drawingml/2006/main">
+              <a:ext uri="{FF2B5EF4-FFF2-40B4-BE49-F238E27FC236}">
+                <a16:creationId xmlns:a16="http://schemas.microsoft.com/office/drawing/2014/main" id="{8D684DA6-34B8-435F-934F-5DC7B19DE99C}"/>
               </a:ext>
             </a:extLst>
           </p:cNvPr>
@@ -4226,7 +4331,7 @@
             <a:pPr algn="l">
               <a:defRPr sz="1125" b="1">
                 <a:solidFill>
-                  <a:srgbClr val="222222"/>
+                  <a:srgbClr val="007C89"/>
                 </a:solidFill>
                 <a:latin typeface="Aptos"/>
                 <a:ea typeface="Aptos"/>
@@ -4236,7 +4341,7 @@
             <a:r>
               <a:rPr sz="1125" b="1">
                 <a:solidFill>
-                  <a:srgbClr val="222222"/>
+                  <a:srgbClr val="007C89"/>
                 </a:solidFill>
                 <a:latin typeface="Aptos"/>
                 <a:ea typeface="Aptos"/>
@@ -4249,10 +4354,10 @@
       </p:sp>
       <p:sp>
         <p:nvSpPr>
-          <p:cNvPr id="12" name="">
-            <a:extLst xmlns:a="http://schemas.openxmlformats.org/drawingml/2006/main">
-              <a:ext uri="{FF2B5EF4-FFF2-40B4-BE49-F238E27FC236}">
-                <a16:creationId xmlns:a16="http://schemas.microsoft.com/office/drawing/2014/main" id="{5700EA43-6B6C-4861-B860-35642954EF0A}"/>
+          <p:cNvPr id="13" name="">
+            <a:extLst xmlns:a="http://schemas.openxmlformats.org/drawingml/2006/main">
+              <a:ext uri="{FF2B5EF4-FFF2-40B4-BE49-F238E27FC236}">
+                <a16:creationId xmlns:a16="http://schemas.microsoft.com/office/drawing/2014/main" id="{2EB7FB91-9FAB-4C91-B15F-75450EB2AEE6}"/>
               </a:ext>
             </a:extLst>
           </p:cNvPr>
@@ -4290,7 +4395,7 @@
             <a:pPr algn="l">
               <a:defRPr sz="1500" b="0">
                 <a:solidFill>
-                  <a:srgbClr val="222222"/>
+                  <a:srgbClr val="242424"/>
                 </a:solidFill>
                 <a:latin typeface="Aptos Mono"/>
                 <a:ea typeface="Aptos Mono"/>
@@ -4300,7 +4405,7 @@
             <a:r>
               <a:rPr sz="1500" b="0">
                 <a:solidFill>
-                  <a:srgbClr val="222222"/>
+                  <a:srgbClr val="242424"/>
                 </a:solidFill>
                 <a:latin typeface="Aptos Mono"/>
                 <a:ea typeface="Aptos Mono"/>
@@ -4313,7 +4418,7 @@
             <a:pPr algn="l">
               <a:defRPr sz="1500" b="0">
                 <a:solidFill>
-                  <a:srgbClr val="222222"/>
+                  <a:srgbClr val="242424"/>
                 </a:solidFill>
                 <a:latin typeface="Aptos Mono"/>
                 <a:ea typeface="Aptos Mono"/>
@@ -4323,7 +4428,7 @@
             <a:r>
               <a:rPr sz="1500" b="0">
                 <a:solidFill>
-                  <a:srgbClr val="222222"/>
+                  <a:srgbClr val="242424"/>
                 </a:solidFill>
                 <a:latin typeface="Aptos Mono"/>
                 <a:ea typeface="Aptos Mono"/>
@@ -4336,10 +4441,10 @@
       </p:sp>
       <p:sp>
         <p:nvSpPr>
-          <p:cNvPr id="13" name="">
-            <a:extLst xmlns:a="http://schemas.openxmlformats.org/drawingml/2006/main">
-              <a:ext uri="{FF2B5EF4-FFF2-40B4-BE49-F238E27FC236}">
-                <a16:creationId xmlns:a16="http://schemas.microsoft.com/office/drawing/2014/main" id="{988BFDDA-5C72-4D73-A822-E06015F96BB5}"/>
+          <p:cNvPr id="14" name="">
+            <a:extLst xmlns:a="http://schemas.openxmlformats.org/drawingml/2006/main">
+              <a:ext uri="{FF2B5EF4-FFF2-40B4-BE49-F238E27FC236}">
+                <a16:creationId xmlns:a16="http://schemas.microsoft.com/office/drawing/2014/main" id="{88ED75B8-A24A-46C1-A64C-D17044E8F222}"/>
               </a:ext>
             </a:extLst>
           </p:cNvPr>
@@ -4400,10 +4505,10 @@
       </p:sp>
       <p:sp>
         <p:nvSpPr>
-          <p:cNvPr id="14" name="">
-            <a:extLst xmlns:a="http://schemas.openxmlformats.org/drawingml/2006/main">
-              <a:ext uri="{FF2B5EF4-FFF2-40B4-BE49-F238E27FC236}">
-                <a16:creationId xmlns:a16="http://schemas.microsoft.com/office/drawing/2014/main" id="{D1DF0032-4AF8-4C6E-ACDB-6B1E868A3EF3}"/>
+          <p:cNvPr id="15" name="">
+            <a:extLst xmlns:a="http://schemas.openxmlformats.org/drawingml/2006/main">
+              <a:ext uri="{FF2B5EF4-FFF2-40B4-BE49-F238E27FC236}">
+                <a16:creationId xmlns:a16="http://schemas.microsoft.com/office/drawing/2014/main" id="{EADEA144-C248-4D88-B7A1-8D29409316C7}"/>
               </a:ext>
             </a:extLst>
           </p:cNvPr>
@@ -4421,24 +4526,24 @@
             <a:avLst/>
           </a:prstGeom>
           <a:solidFill xmlns:a="http://schemas.openxmlformats.org/drawingml/2006/main">
-            <a:srgbClr val="CFCFCF"/>
-          </a:solidFill>
-          <a:ln xmlns:a="http://schemas.openxmlformats.org/drawingml/2006/main" w="0">
-            <a:solidFill>
-              <a:srgbClr val="000000">
-                <a:alpha val="0"/>
-              </a:srgbClr>
-            </a:solidFill>
-            <a:prstDash val="solid"/>
-          </a:ln>
-        </p:spPr>
-      </p:sp>
-      <p:sp>
-        <p:nvSpPr>
-          <p:cNvPr id="15" name="">
-            <a:extLst xmlns:a="http://schemas.openxmlformats.org/drawingml/2006/main">
-              <a:ext uri="{FF2B5EF4-FFF2-40B4-BE49-F238E27FC236}">
-                <a16:creationId xmlns:a16="http://schemas.microsoft.com/office/drawing/2014/main" id="{4094D9A6-F39F-4403-860D-AC82B4633599}"/>
+            <a:srgbClr val="D4D8DD"/>
+          </a:solidFill>
+          <a:ln xmlns:a="http://schemas.openxmlformats.org/drawingml/2006/main" w="0">
+            <a:solidFill>
+              <a:srgbClr val="000000">
+                <a:alpha val="0"/>
+              </a:srgbClr>
+            </a:solidFill>
+            <a:prstDash val="solid"/>
+          </a:ln>
+        </p:spPr>
+      </p:sp>
+      <p:sp>
+        <p:nvSpPr>
+          <p:cNvPr id="16" name="">
+            <a:extLst xmlns:a="http://schemas.openxmlformats.org/drawingml/2006/main">
+              <a:ext uri="{FF2B5EF4-FFF2-40B4-BE49-F238E27FC236}">
+                <a16:creationId xmlns:a16="http://schemas.microsoft.com/office/drawing/2014/main" id="{F5E8A04E-E940-4B59-85D3-3333C8EB588E}"/>
               </a:ext>
             </a:extLst>
           </p:cNvPr>
@@ -4500,7 +4605,7 @@
     </p:spTree>
     <p:extLst>
       <p:ext uri="{BB962C8B-B14F-4D97-AF65-F5344CB8AC3E}">
-        <p14:creationId xmlns:p14="http://schemas.microsoft.com/office/powerpoint/2010/main" val="1449464962"/>
+        <p14:creationId xmlns:p14="http://schemas.microsoft.com/office/powerpoint/2010/main" val="721536471"/>
       </p:ext>
     </p:extLst>
   </p:cSld>
@@ -4524,7 +4629,7 @@
           <p:cNvPr id="1" name="">
             <a:extLst xmlns:a="http://schemas.openxmlformats.org/drawingml/2006/main">
               <a:ext uri="{FF2B5EF4-FFF2-40B4-BE49-F238E27FC236}">
-                <a16:creationId xmlns:a16="http://schemas.microsoft.com/office/drawing/2014/main" id="{32454152-A8E0-4D8C-97C4-C7030BE0DF7F}"/>
+                <a16:creationId xmlns:a16="http://schemas.microsoft.com/office/drawing/2014/main" id="{7D757F1D-54CD-4292-A152-53AEDE30C227}"/>
               </a:ext>
             </a:extLst>
           </p:cNvPr>
@@ -4559,7 +4664,7 @@
           <p:cNvPr id="2" name="">
             <a:extLst xmlns:a="http://schemas.openxmlformats.org/drawingml/2006/main">
               <a:ext uri="{FF2B5EF4-FFF2-40B4-BE49-F238E27FC236}">
-                <a16:creationId xmlns:a16="http://schemas.microsoft.com/office/drawing/2014/main" id="{CC7903E2-8911-432E-B85E-F4FA2A2A4A82}"/>
+                <a16:creationId xmlns:a16="http://schemas.microsoft.com/office/drawing/2014/main" id="{1406D1CD-46D4-44CA-8DD6-D623CB6A830E}"/>
               </a:ext>
             </a:extLst>
           </p:cNvPr>
@@ -4623,7 +4728,7 @@
           <p:cNvPr id="3" name="">
             <a:extLst xmlns:a="http://schemas.openxmlformats.org/drawingml/2006/main">
               <a:ext uri="{FF2B5EF4-FFF2-40B4-BE49-F238E27FC236}">
-                <a16:creationId xmlns:a16="http://schemas.microsoft.com/office/drawing/2014/main" id="{13EA0A29-54B8-4CF9-B771-EBE8585683E3}"/>
+                <a16:creationId xmlns:a16="http://schemas.microsoft.com/office/drawing/2014/main" id="{72C922CB-8ADF-413B-88D3-359C28025D06}"/>
               </a:ext>
             </a:extLst>
           </p:cNvPr>
@@ -4687,7 +4792,7 @@
           <p:cNvPr id="4" name="">
             <a:extLst xmlns:a="http://schemas.openxmlformats.org/drawingml/2006/main">
               <a:ext uri="{FF2B5EF4-FFF2-40B4-BE49-F238E27FC236}">
-                <a16:creationId xmlns:a16="http://schemas.microsoft.com/office/drawing/2014/main" id="{2D0CB345-FDFE-470F-8C71-6EEDAD16668D}"/>
+                <a16:creationId xmlns:a16="http://schemas.microsoft.com/office/drawing/2014/main" id="{79B24D33-F68F-4008-80BB-1ABBB04C2900}"/>
               </a:ext>
             </a:extLst>
           </p:cNvPr>
@@ -4705,7 +4810,7 @@
             <a:avLst/>
           </a:prstGeom>
           <a:solidFill xmlns:a="http://schemas.openxmlformats.org/drawingml/2006/main">
-            <a:srgbClr val="CFCFCF"/>
+            <a:srgbClr val="D4D8DD"/>
           </a:solidFill>
           <a:ln xmlns:a="http://schemas.openxmlformats.org/drawingml/2006/main" w="0">
             <a:solidFill>
@@ -4722,7 +4827,42 @@
           <p:cNvPr id="5" name="">
             <a:extLst xmlns:a="http://schemas.openxmlformats.org/drawingml/2006/main">
               <a:ext uri="{FF2B5EF4-FFF2-40B4-BE49-F238E27FC236}">
-                <a16:creationId xmlns:a16="http://schemas.microsoft.com/office/drawing/2014/main" id="{B17FB4DD-0A2B-4196-86FB-CA20C20D6869}"/>
+                <a16:creationId xmlns:a16="http://schemas.microsoft.com/office/drawing/2014/main" id="{52EEDA69-3ECC-4B84-ABF2-D1A604A90489}"/>
+              </a:ext>
+            </a:extLst>
+          </p:cNvPr>
+          <p:cNvSpPr>
+            <a:spLocks xmlns:a="http://schemas.openxmlformats.org/drawingml/2006/main" noGrp="1"/>
+          </p:cNvSpPr>
+          <p:nvPr/>
+        </p:nvSpPr>
+        <p:spPr>
+          <a:xfrm xmlns:a="http://schemas.openxmlformats.org/drawingml/2006/main">
+            <a:off x="609600" y="609600"/>
+            <a:ext cx="1524000" cy="19050"/>
+          </a:xfrm>
+          <a:prstGeom xmlns:a="http://schemas.openxmlformats.org/drawingml/2006/main" prst="rect">
+            <a:avLst/>
+          </a:prstGeom>
+          <a:solidFill xmlns:a="http://schemas.openxmlformats.org/drawingml/2006/main">
+            <a:srgbClr val="1F4E79"/>
+          </a:solidFill>
+          <a:ln xmlns:a="http://schemas.openxmlformats.org/drawingml/2006/main" w="0">
+            <a:solidFill>
+              <a:srgbClr val="000000">
+                <a:alpha val="0"/>
+              </a:srgbClr>
+            </a:solidFill>
+            <a:prstDash val="solid"/>
+          </a:ln>
+        </p:spPr>
+      </p:sp>
+      <p:sp>
+        <p:nvSpPr>
+          <p:cNvPr id="6" name="">
+            <a:extLst xmlns:a="http://schemas.openxmlformats.org/drawingml/2006/main">
+              <a:ext uri="{FF2B5EF4-FFF2-40B4-BE49-F238E27FC236}">
+                <a16:creationId xmlns:a16="http://schemas.microsoft.com/office/drawing/2014/main" id="{CF290DE9-C96F-4902-8F2E-230D31074579}"/>
               </a:ext>
             </a:extLst>
           </p:cNvPr>
@@ -4734,7 +4874,7 @@
         <p:spPr>
           <a:xfrm xmlns:a="http://schemas.openxmlformats.org/drawingml/2006/main">
             <a:off x="609600" y="819150"/>
-            <a:ext cx="10477500" cy="723900"/>
+            <a:ext cx="10477500" cy="742950"/>
           </a:xfrm>
           <a:prstGeom xmlns:a="http://schemas.openxmlformats.org/drawingml/2006/main" prst="rect">
             <a:avLst/>
@@ -4760,7 +4900,7 @@
             <a:pPr algn="l">
               <a:defRPr sz="2475" b="1">
                 <a:solidFill>
-                  <a:srgbClr val="111111"/>
+                  <a:srgbClr val="151515"/>
                 </a:solidFill>
                 <a:latin typeface="Aptos Display"/>
                 <a:ea typeface="Aptos Display"/>
@@ -4770,7 +4910,7 @@
             <a:r>
               <a:rPr sz="2475" b="1">
                 <a:solidFill>
-                  <a:srgbClr val="111111"/>
+                  <a:srgbClr val="151515"/>
                 </a:solidFill>
                 <a:latin typeface="Aptos Display"/>
                 <a:ea typeface="Aptos Display"/>
@@ -4783,10 +4923,10 @@
       </p:sp>
       <p:sp>
         <p:nvSpPr>
-          <p:cNvPr id="6" name="">
-            <a:extLst xmlns:a="http://schemas.openxmlformats.org/drawingml/2006/main">
-              <a:ext uri="{FF2B5EF4-FFF2-40B4-BE49-F238E27FC236}">
-                <a16:creationId xmlns:a16="http://schemas.microsoft.com/office/drawing/2014/main" id="{729B6ED4-46E4-4ED1-8C08-D2EC2024967E}"/>
+          <p:cNvPr id="7" name="">
+            <a:extLst xmlns:a="http://schemas.openxmlformats.org/drawingml/2006/main">
+              <a:ext uri="{FF2B5EF4-FFF2-40B4-BE49-F238E27FC236}">
+                <a16:creationId xmlns:a16="http://schemas.microsoft.com/office/drawing/2014/main" id="{8B307E0D-8236-4F73-B648-854BD5302773}"/>
               </a:ext>
             </a:extLst>
           </p:cNvPr>
@@ -4798,30 +4938,30 @@
         <p:spPr>
           <a:xfrm xmlns:a="http://schemas.openxmlformats.org/drawingml/2006/main">
             <a:off x="1381125" y="2409825"/>
-            <a:ext cx="38100" cy="38100"/>
-          </a:xfrm>
-          <a:prstGeom xmlns:a="http://schemas.openxmlformats.org/drawingml/2006/main" prst="rect">
-            <a:avLst/>
-          </a:prstGeom>
-          <a:solidFill xmlns:a="http://schemas.openxmlformats.org/drawingml/2006/main">
-            <a:srgbClr val="111111"/>
-          </a:solidFill>
-          <a:ln xmlns:a="http://schemas.openxmlformats.org/drawingml/2006/main" w="0">
-            <a:solidFill>
-              <a:srgbClr val="000000">
-                <a:alpha val="0"/>
-              </a:srgbClr>
-            </a:solidFill>
-            <a:prstDash val="solid"/>
-          </a:ln>
-        </p:spPr>
-      </p:sp>
-      <p:sp>
-        <p:nvSpPr>
-          <p:cNvPr id="7" name="">
-            <a:extLst xmlns:a="http://schemas.openxmlformats.org/drawingml/2006/main">
-              <a:ext uri="{FF2B5EF4-FFF2-40B4-BE49-F238E27FC236}">
-                <a16:creationId xmlns:a16="http://schemas.microsoft.com/office/drawing/2014/main" id="{710BB1EE-5FAB-48A5-A50C-7C2F095052EE}"/>
+            <a:ext cx="47625" cy="47625"/>
+          </a:xfrm>
+          <a:prstGeom xmlns:a="http://schemas.openxmlformats.org/drawingml/2006/main" prst="rect">
+            <a:avLst/>
+          </a:prstGeom>
+          <a:solidFill xmlns:a="http://schemas.openxmlformats.org/drawingml/2006/main">
+            <a:srgbClr val="007C89"/>
+          </a:solidFill>
+          <a:ln xmlns:a="http://schemas.openxmlformats.org/drawingml/2006/main" w="0">
+            <a:solidFill>
+              <a:srgbClr val="000000">
+                <a:alpha val="0"/>
+              </a:srgbClr>
+            </a:solidFill>
+            <a:prstDash val="solid"/>
+          </a:ln>
+        </p:spPr>
+      </p:sp>
+      <p:sp>
+        <p:nvSpPr>
+          <p:cNvPr id="8" name="">
+            <a:extLst xmlns:a="http://schemas.openxmlformats.org/drawingml/2006/main">
+              <a:ext uri="{FF2B5EF4-FFF2-40B4-BE49-F238E27FC236}">
+                <a16:creationId xmlns:a16="http://schemas.microsoft.com/office/drawing/2014/main" id="{A0647D09-95E9-4228-ADEE-6AA92C450D72}"/>
               </a:ext>
             </a:extLst>
           </p:cNvPr>
@@ -4859,7 +4999,7 @@
             <a:pPr algn="l">
               <a:defRPr sz="1575" b="0">
                 <a:solidFill>
-                  <a:srgbClr val="222222"/>
+                  <a:srgbClr val="242424"/>
                 </a:solidFill>
                 <a:latin typeface="Aptos"/>
                 <a:ea typeface="Aptos"/>
@@ -4869,7 +5009,7 @@
             <a:r>
               <a:rPr sz="1575" b="0">
                 <a:solidFill>
-                  <a:srgbClr val="222222"/>
+                  <a:srgbClr val="242424"/>
                 </a:solidFill>
                 <a:latin typeface="Aptos"/>
                 <a:ea typeface="Aptos"/>
@@ -4882,10 +5022,10 @@
       </p:sp>
       <p:sp>
         <p:nvSpPr>
-          <p:cNvPr id="8" name="">
-            <a:extLst xmlns:a="http://schemas.openxmlformats.org/drawingml/2006/main">
-              <a:ext uri="{FF2B5EF4-FFF2-40B4-BE49-F238E27FC236}">
-                <a16:creationId xmlns:a16="http://schemas.microsoft.com/office/drawing/2014/main" id="{66739839-B95D-4C0C-845C-69E306F2E5EE}"/>
+          <p:cNvPr id="9" name="">
+            <a:extLst xmlns:a="http://schemas.openxmlformats.org/drawingml/2006/main">
+              <a:ext uri="{FF2B5EF4-FFF2-40B4-BE49-F238E27FC236}">
+                <a16:creationId xmlns:a16="http://schemas.microsoft.com/office/drawing/2014/main" id="{429BD46D-DF7D-4B6A-B6B3-A30681293EFF}"/>
               </a:ext>
             </a:extLst>
           </p:cNvPr>
@@ -4897,30 +5037,30 @@
         <p:spPr>
           <a:xfrm xmlns:a="http://schemas.openxmlformats.org/drawingml/2006/main">
             <a:off x="1381125" y="3000375"/>
-            <a:ext cx="38100" cy="38100"/>
-          </a:xfrm>
-          <a:prstGeom xmlns:a="http://schemas.openxmlformats.org/drawingml/2006/main" prst="rect">
-            <a:avLst/>
-          </a:prstGeom>
-          <a:solidFill xmlns:a="http://schemas.openxmlformats.org/drawingml/2006/main">
-            <a:srgbClr val="111111"/>
-          </a:solidFill>
-          <a:ln xmlns:a="http://schemas.openxmlformats.org/drawingml/2006/main" w="0">
-            <a:solidFill>
-              <a:srgbClr val="000000">
-                <a:alpha val="0"/>
-              </a:srgbClr>
-            </a:solidFill>
-            <a:prstDash val="solid"/>
-          </a:ln>
-        </p:spPr>
-      </p:sp>
-      <p:sp>
-        <p:nvSpPr>
-          <p:cNvPr id="9" name="">
-            <a:extLst xmlns:a="http://schemas.openxmlformats.org/drawingml/2006/main">
-              <a:ext uri="{FF2B5EF4-FFF2-40B4-BE49-F238E27FC236}">
-                <a16:creationId xmlns:a16="http://schemas.microsoft.com/office/drawing/2014/main" id="{47AE18FC-2293-4AE9-8BEC-2F30AFCD1510}"/>
+            <a:ext cx="47625" cy="47625"/>
+          </a:xfrm>
+          <a:prstGeom xmlns:a="http://schemas.openxmlformats.org/drawingml/2006/main" prst="rect">
+            <a:avLst/>
+          </a:prstGeom>
+          <a:solidFill xmlns:a="http://schemas.openxmlformats.org/drawingml/2006/main">
+            <a:srgbClr val="007C89"/>
+          </a:solidFill>
+          <a:ln xmlns:a="http://schemas.openxmlformats.org/drawingml/2006/main" w="0">
+            <a:solidFill>
+              <a:srgbClr val="000000">
+                <a:alpha val="0"/>
+              </a:srgbClr>
+            </a:solidFill>
+            <a:prstDash val="solid"/>
+          </a:ln>
+        </p:spPr>
+      </p:sp>
+      <p:sp>
+        <p:nvSpPr>
+          <p:cNvPr id="10" name="">
+            <a:extLst xmlns:a="http://schemas.openxmlformats.org/drawingml/2006/main">
+              <a:ext uri="{FF2B5EF4-FFF2-40B4-BE49-F238E27FC236}">
+                <a16:creationId xmlns:a16="http://schemas.microsoft.com/office/drawing/2014/main" id="{A5868BEF-C112-4EB4-9D48-F7D513B35A7E}"/>
               </a:ext>
             </a:extLst>
           </p:cNvPr>
@@ -4958,7 +5098,7 @@
             <a:pPr algn="l">
               <a:defRPr sz="1575" b="0">
                 <a:solidFill>
-                  <a:srgbClr val="222222"/>
+                  <a:srgbClr val="242424"/>
                 </a:solidFill>
                 <a:latin typeface="Aptos"/>
                 <a:ea typeface="Aptos"/>
@@ -4968,7 +5108,7 @@
             <a:r>
               <a:rPr sz="1575" b="0">
                 <a:solidFill>
-                  <a:srgbClr val="222222"/>
+                  <a:srgbClr val="242424"/>
                 </a:solidFill>
                 <a:latin typeface="Aptos"/>
                 <a:ea typeface="Aptos"/>
@@ -4981,10 +5121,10 @@
       </p:sp>
       <p:sp>
         <p:nvSpPr>
-          <p:cNvPr id="10" name="">
-            <a:extLst xmlns:a="http://schemas.openxmlformats.org/drawingml/2006/main">
-              <a:ext uri="{FF2B5EF4-FFF2-40B4-BE49-F238E27FC236}">
-                <a16:creationId xmlns:a16="http://schemas.microsoft.com/office/drawing/2014/main" id="{358CED6D-7593-48FD-9F61-D784BD8C1F5F}"/>
+          <p:cNvPr id="11" name="">
+            <a:extLst xmlns:a="http://schemas.openxmlformats.org/drawingml/2006/main">
+              <a:ext uri="{FF2B5EF4-FFF2-40B4-BE49-F238E27FC236}">
+                <a16:creationId xmlns:a16="http://schemas.microsoft.com/office/drawing/2014/main" id="{712D408F-B88A-4295-B996-48C17EA1E09D}"/>
               </a:ext>
             </a:extLst>
           </p:cNvPr>
@@ -4996,30 +5136,30 @@
         <p:spPr>
           <a:xfrm xmlns:a="http://schemas.openxmlformats.org/drawingml/2006/main">
             <a:off x="1381125" y="3590925"/>
-            <a:ext cx="38100" cy="38100"/>
-          </a:xfrm>
-          <a:prstGeom xmlns:a="http://schemas.openxmlformats.org/drawingml/2006/main" prst="rect">
-            <a:avLst/>
-          </a:prstGeom>
-          <a:solidFill xmlns:a="http://schemas.openxmlformats.org/drawingml/2006/main">
-            <a:srgbClr val="111111"/>
-          </a:solidFill>
-          <a:ln xmlns:a="http://schemas.openxmlformats.org/drawingml/2006/main" w="0">
-            <a:solidFill>
-              <a:srgbClr val="000000">
-                <a:alpha val="0"/>
-              </a:srgbClr>
-            </a:solidFill>
-            <a:prstDash val="solid"/>
-          </a:ln>
-        </p:spPr>
-      </p:sp>
-      <p:sp>
-        <p:nvSpPr>
-          <p:cNvPr id="11" name="">
-            <a:extLst xmlns:a="http://schemas.openxmlformats.org/drawingml/2006/main">
-              <a:ext uri="{FF2B5EF4-FFF2-40B4-BE49-F238E27FC236}">
-                <a16:creationId xmlns:a16="http://schemas.microsoft.com/office/drawing/2014/main" id="{FAD60A23-D85F-4458-9EFB-13F8BBC549CE}"/>
+            <a:ext cx="47625" cy="47625"/>
+          </a:xfrm>
+          <a:prstGeom xmlns:a="http://schemas.openxmlformats.org/drawingml/2006/main" prst="rect">
+            <a:avLst/>
+          </a:prstGeom>
+          <a:solidFill xmlns:a="http://schemas.openxmlformats.org/drawingml/2006/main">
+            <a:srgbClr val="007C89"/>
+          </a:solidFill>
+          <a:ln xmlns:a="http://schemas.openxmlformats.org/drawingml/2006/main" w="0">
+            <a:solidFill>
+              <a:srgbClr val="000000">
+                <a:alpha val="0"/>
+              </a:srgbClr>
+            </a:solidFill>
+            <a:prstDash val="solid"/>
+          </a:ln>
+        </p:spPr>
+      </p:sp>
+      <p:sp>
+        <p:nvSpPr>
+          <p:cNvPr id="12" name="">
+            <a:extLst xmlns:a="http://schemas.openxmlformats.org/drawingml/2006/main">
+              <a:ext uri="{FF2B5EF4-FFF2-40B4-BE49-F238E27FC236}">
+                <a16:creationId xmlns:a16="http://schemas.microsoft.com/office/drawing/2014/main" id="{5F621995-E94D-45AE-AC39-82E733CC31A1}"/>
               </a:ext>
             </a:extLst>
           </p:cNvPr>
@@ -5057,7 +5197,7 @@
             <a:pPr algn="l">
               <a:defRPr sz="1575" b="0">
                 <a:solidFill>
-                  <a:srgbClr val="222222"/>
+                  <a:srgbClr val="242424"/>
                 </a:solidFill>
                 <a:latin typeface="Aptos"/>
                 <a:ea typeface="Aptos"/>
@@ -5067,7 +5207,7 @@
             <a:r>
               <a:rPr sz="1575" b="0">
                 <a:solidFill>
-                  <a:srgbClr val="222222"/>
+                  <a:srgbClr val="242424"/>
                 </a:solidFill>
                 <a:latin typeface="Aptos"/>
                 <a:ea typeface="Aptos"/>
@@ -5080,10 +5220,10 @@
       </p:sp>
       <p:sp>
         <p:nvSpPr>
-          <p:cNvPr id="12" name="">
-            <a:extLst xmlns:a="http://schemas.openxmlformats.org/drawingml/2006/main">
-              <a:ext uri="{FF2B5EF4-FFF2-40B4-BE49-F238E27FC236}">
-                <a16:creationId xmlns:a16="http://schemas.microsoft.com/office/drawing/2014/main" id="{CDF7E2BB-1BCB-4579-A67E-4B7403BDE528}"/>
+          <p:cNvPr id="13" name="">
+            <a:extLst xmlns:a="http://schemas.openxmlformats.org/drawingml/2006/main">
+              <a:ext uri="{FF2B5EF4-FFF2-40B4-BE49-F238E27FC236}">
+                <a16:creationId xmlns:a16="http://schemas.microsoft.com/office/drawing/2014/main" id="{44D440FF-EA03-487D-86E4-2F6AEFA7ED26}"/>
               </a:ext>
             </a:extLst>
           </p:cNvPr>
@@ -5121,7 +5261,7 @@
             <a:pPr algn="l">
               <a:defRPr sz="1350" b="1">
                 <a:solidFill>
-                  <a:srgbClr val="222222"/>
+                  <a:srgbClr val="1F4E79"/>
                 </a:solidFill>
                 <a:latin typeface="Aptos"/>
                 <a:ea typeface="Aptos"/>
@@ -5131,7 +5271,7 @@
             <a:r>
               <a:rPr sz="1350" b="1">
                 <a:solidFill>
-                  <a:srgbClr val="222222"/>
+                  <a:srgbClr val="1F4E79"/>
                 </a:solidFill>
                 <a:latin typeface="Aptos"/>
                 <a:ea typeface="Aptos"/>
@@ -5144,10 +5284,10 @@
       </p:sp>
       <p:sp>
         <p:nvSpPr>
-          <p:cNvPr id="13" name="">
-            <a:extLst xmlns:a="http://schemas.openxmlformats.org/drawingml/2006/main">
-              <a:ext uri="{FF2B5EF4-FFF2-40B4-BE49-F238E27FC236}">
-                <a16:creationId xmlns:a16="http://schemas.microsoft.com/office/drawing/2014/main" id="{F320FD12-4352-45BD-B549-FF8EA80F338D}"/>
+          <p:cNvPr id="14" name="">
+            <a:extLst xmlns:a="http://schemas.openxmlformats.org/drawingml/2006/main">
+              <a:ext uri="{FF2B5EF4-FFF2-40B4-BE49-F238E27FC236}">
+                <a16:creationId xmlns:a16="http://schemas.microsoft.com/office/drawing/2014/main" id="{20EE6017-C081-43DF-931A-024212E982FA}"/>
               </a:ext>
             </a:extLst>
           </p:cNvPr>
@@ -5208,10 +5348,10 @@
       </p:sp>
       <p:sp>
         <p:nvSpPr>
-          <p:cNvPr id="14" name="">
-            <a:extLst xmlns:a="http://schemas.openxmlformats.org/drawingml/2006/main">
-              <a:ext uri="{FF2B5EF4-FFF2-40B4-BE49-F238E27FC236}">
-                <a16:creationId xmlns:a16="http://schemas.microsoft.com/office/drawing/2014/main" id="{EFADF3DB-99A4-4D8C-B039-8213156CCB2B}"/>
+          <p:cNvPr id="15" name="">
+            <a:extLst xmlns:a="http://schemas.openxmlformats.org/drawingml/2006/main">
+              <a:ext uri="{FF2B5EF4-FFF2-40B4-BE49-F238E27FC236}">
+                <a16:creationId xmlns:a16="http://schemas.microsoft.com/office/drawing/2014/main" id="{31788F68-FAE0-47C6-8A8A-EDFAA9076639}"/>
               </a:ext>
             </a:extLst>
           </p:cNvPr>
@@ -5229,24 +5369,24 @@
             <a:avLst/>
           </a:prstGeom>
           <a:solidFill xmlns:a="http://schemas.openxmlformats.org/drawingml/2006/main">
-            <a:srgbClr val="CFCFCF"/>
-          </a:solidFill>
-          <a:ln xmlns:a="http://schemas.openxmlformats.org/drawingml/2006/main" w="0">
-            <a:solidFill>
-              <a:srgbClr val="000000">
-                <a:alpha val="0"/>
-              </a:srgbClr>
-            </a:solidFill>
-            <a:prstDash val="solid"/>
-          </a:ln>
-        </p:spPr>
-      </p:sp>
-      <p:sp>
-        <p:nvSpPr>
-          <p:cNvPr id="15" name="">
-            <a:extLst xmlns:a="http://schemas.openxmlformats.org/drawingml/2006/main">
-              <a:ext uri="{FF2B5EF4-FFF2-40B4-BE49-F238E27FC236}">
-                <a16:creationId xmlns:a16="http://schemas.microsoft.com/office/drawing/2014/main" id="{5D37A102-97CB-4110-B953-85D009C65518}"/>
+            <a:srgbClr val="D4D8DD"/>
+          </a:solidFill>
+          <a:ln xmlns:a="http://schemas.openxmlformats.org/drawingml/2006/main" w="0">
+            <a:solidFill>
+              <a:srgbClr val="000000">
+                <a:alpha val="0"/>
+              </a:srgbClr>
+            </a:solidFill>
+            <a:prstDash val="solid"/>
+          </a:ln>
+        </p:spPr>
+      </p:sp>
+      <p:sp>
+        <p:nvSpPr>
+          <p:cNvPr id="16" name="">
+            <a:extLst xmlns:a="http://schemas.openxmlformats.org/drawingml/2006/main">
+              <a:ext uri="{FF2B5EF4-FFF2-40B4-BE49-F238E27FC236}">
+                <a16:creationId xmlns:a16="http://schemas.microsoft.com/office/drawing/2014/main" id="{CCA977AA-9315-40A2-89EA-06C32D9FE164}"/>
               </a:ext>
             </a:extLst>
           </p:cNvPr>
@@ -5308,7 +5448,7 @@
     </p:spTree>
     <p:extLst>
       <p:ext uri="{BB962C8B-B14F-4D97-AF65-F5344CB8AC3E}">
-        <p14:creationId xmlns:p14="http://schemas.microsoft.com/office/powerpoint/2010/main" val="1743807699"/>
+        <p14:creationId xmlns:p14="http://schemas.microsoft.com/office/powerpoint/2010/main" val="1539035726"/>
       </p:ext>
     </p:extLst>
   </p:cSld>
@@ -5332,7 +5472,7 @@
           <p:cNvPr id="1" name="">
             <a:extLst xmlns:a="http://schemas.openxmlformats.org/drawingml/2006/main">
               <a:ext uri="{FF2B5EF4-FFF2-40B4-BE49-F238E27FC236}">
-                <a16:creationId xmlns:a16="http://schemas.microsoft.com/office/drawing/2014/main" id="{031ADE6C-3542-4C4C-BAAB-3BBA201BB232}"/>
+                <a16:creationId xmlns:a16="http://schemas.microsoft.com/office/drawing/2014/main" id="{8709E37A-02C7-4AAD-9623-172B3F43D628}"/>
               </a:ext>
             </a:extLst>
           </p:cNvPr>
@@ -5367,7 +5507,7 @@
           <p:cNvPr id="2" name="">
             <a:extLst xmlns:a="http://schemas.openxmlformats.org/drawingml/2006/main">
               <a:ext uri="{FF2B5EF4-FFF2-40B4-BE49-F238E27FC236}">
-                <a16:creationId xmlns:a16="http://schemas.microsoft.com/office/drawing/2014/main" id="{B7CE8191-4C6A-4986-9660-532C8232616F}"/>
+                <a16:creationId xmlns:a16="http://schemas.microsoft.com/office/drawing/2014/main" id="{C894A489-8562-49B4-B490-09674995CFFF}"/>
               </a:ext>
             </a:extLst>
           </p:cNvPr>
@@ -5431,7 +5571,7 @@
           <p:cNvPr id="3" name="">
             <a:extLst xmlns:a="http://schemas.openxmlformats.org/drawingml/2006/main">
               <a:ext uri="{FF2B5EF4-FFF2-40B4-BE49-F238E27FC236}">
-                <a16:creationId xmlns:a16="http://schemas.microsoft.com/office/drawing/2014/main" id="{FEE58A99-998A-4A50-8AEA-6F6B0AA1ED69}"/>
+                <a16:creationId xmlns:a16="http://schemas.microsoft.com/office/drawing/2014/main" id="{E67BAAF4-205E-42A8-8A44-FB41E2545BF4}"/>
               </a:ext>
             </a:extLst>
           </p:cNvPr>
@@ -5495,7 +5635,7 @@
           <p:cNvPr id="4" name="">
             <a:extLst xmlns:a="http://schemas.openxmlformats.org/drawingml/2006/main">
               <a:ext uri="{FF2B5EF4-FFF2-40B4-BE49-F238E27FC236}">
-                <a16:creationId xmlns:a16="http://schemas.microsoft.com/office/drawing/2014/main" id="{004740B0-5C72-4A2B-A608-C503A4975906}"/>
+                <a16:creationId xmlns:a16="http://schemas.microsoft.com/office/drawing/2014/main" id="{6168EB76-0D42-4D99-8DF8-A139698E3026}"/>
               </a:ext>
             </a:extLst>
           </p:cNvPr>
@@ -5513,7 +5653,7 @@
             <a:avLst/>
           </a:prstGeom>
           <a:solidFill xmlns:a="http://schemas.openxmlformats.org/drawingml/2006/main">
-            <a:srgbClr val="CFCFCF"/>
+            <a:srgbClr val="D4D8DD"/>
           </a:solidFill>
           <a:ln xmlns:a="http://schemas.openxmlformats.org/drawingml/2006/main" w="0">
             <a:solidFill>
@@ -5530,7 +5670,42 @@
           <p:cNvPr id="5" name="">
             <a:extLst xmlns:a="http://schemas.openxmlformats.org/drawingml/2006/main">
               <a:ext uri="{FF2B5EF4-FFF2-40B4-BE49-F238E27FC236}">
-                <a16:creationId xmlns:a16="http://schemas.microsoft.com/office/drawing/2014/main" id="{85FD82A1-FF39-47E5-B1C9-6C77FA383973}"/>
+                <a16:creationId xmlns:a16="http://schemas.microsoft.com/office/drawing/2014/main" id="{44243780-2076-4591-BDFD-D8291A13BDB1}"/>
+              </a:ext>
+            </a:extLst>
+          </p:cNvPr>
+          <p:cNvSpPr>
+            <a:spLocks xmlns:a="http://schemas.openxmlformats.org/drawingml/2006/main" noGrp="1"/>
+          </p:cNvSpPr>
+          <p:nvPr/>
+        </p:nvSpPr>
+        <p:spPr>
+          <a:xfrm xmlns:a="http://schemas.openxmlformats.org/drawingml/2006/main">
+            <a:off x="609600" y="609600"/>
+            <a:ext cx="1524000" cy="19050"/>
+          </a:xfrm>
+          <a:prstGeom xmlns:a="http://schemas.openxmlformats.org/drawingml/2006/main" prst="rect">
+            <a:avLst/>
+          </a:prstGeom>
+          <a:solidFill xmlns:a="http://schemas.openxmlformats.org/drawingml/2006/main">
+            <a:srgbClr val="007C89"/>
+          </a:solidFill>
+          <a:ln xmlns:a="http://schemas.openxmlformats.org/drawingml/2006/main" w="0">
+            <a:solidFill>
+              <a:srgbClr val="000000">
+                <a:alpha val="0"/>
+              </a:srgbClr>
+            </a:solidFill>
+            <a:prstDash val="solid"/>
+          </a:ln>
+        </p:spPr>
+      </p:sp>
+      <p:sp>
+        <p:nvSpPr>
+          <p:cNvPr id="6" name="">
+            <a:extLst xmlns:a="http://schemas.openxmlformats.org/drawingml/2006/main">
+              <a:ext uri="{FF2B5EF4-FFF2-40B4-BE49-F238E27FC236}">
+                <a16:creationId xmlns:a16="http://schemas.microsoft.com/office/drawing/2014/main" id="{3E4C01D9-DF50-46F5-BB47-4EFCA1667109}"/>
               </a:ext>
             </a:extLst>
           </p:cNvPr>
@@ -5542,7 +5717,7 @@
         <p:spPr>
           <a:xfrm xmlns:a="http://schemas.openxmlformats.org/drawingml/2006/main">
             <a:off x="609600" y="819150"/>
-            <a:ext cx="10096500" cy="723900"/>
+            <a:ext cx="10096500" cy="742950"/>
           </a:xfrm>
           <a:prstGeom xmlns:a="http://schemas.openxmlformats.org/drawingml/2006/main" prst="rect">
             <a:avLst/>
@@ -5568,7 +5743,7 @@
             <a:pPr algn="l">
               <a:defRPr sz="2475" b="1">
                 <a:solidFill>
-                  <a:srgbClr val="111111"/>
+                  <a:srgbClr val="151515"/>
                 </a:solidFill>
                 <a:latin typeface="Aptos Display"/>
                 <a:ea typeface="Aptos Display"/>
@@ -5578,7 +5753,7 @@
             <a:r>
               <a:rPr sz="2475" b="1">
                 <a:solidFill>
-                  <a:srgbClr val="111111"/>
+                  <a:srgbClr val="151515"/>
                 </a:solidFill>
                 <a:latin typeface="Aptos Display"/>
                 <a:ea typeface="Aptos Display"/>
@@ -5591,10 +5766,10 @@
       </p:sp>
       <p:sp>
         <p:nvSpPr>
-          <p:cNvPr id="6" name="">
-            <a:extLst xmlns:a="http://schemas.openxmlformats.org/drawingml/2006/main">
-              <a:ext uri="{FF2B5EF4-FFF2-40B4-BE49-F238E27FC236}">
-                <a16:creationId xmlns:a16="http://schemas.microsoft.com/office/drawing/2014/main" id="{784FEAED-F6C8-44FE-A97C-1B2ED85B7C33}"/>
+          <p:cNvPr id="7" name="">
+            <a:extLst xmlns:a="http://schemas.openxmlformats.org/drawingml/2006/main">
+              <a:ext uri="{FF2B5EF4-FFF2-40B4-BE49-F238E27FC236}">
+                <a16:creationId xmlns:a16="http://schemas.microsoft.com/office/drawing/2014/main" id="{210E1665-8075-44BB-9FA4-C25E1380B12D}"/>
               </a:ext>
             </a:extLst>
           </p:cNvPr>
@@ -5655,10 +5830,10 @@
       </p:sp>
       <p:sp>
         <p:nvSpPr>
-          <p:cNvPr id="7" name="">
-            <a:extLst xmlns:a="http://schemas.openxmlformats.org/drawingml/2006/main">
-              <a:ext uri="{FF2B5EF4-FFF2-40B4-BE49-F238E27FC236}">
-                <a16:creationId xmlns:a16="http://schemas.microsoft.com/office/drawing/2014/main" id="{830316EC-7CA5-43D9-9274-34831B76B154}"/>
+          <p:cNvPr id="8" name="">
+            <a:extLst xmlns:a="http://schemas.openxmlformats.org/drawingml/2006/main">
+              <a:ext uri="{FF2B5EF4-FFF2-40B4-BE49-F238E27FC236}">
+                <a16:creationId xmlns:a16="http://schemas.microsoft.com/office/drawing/2014/main" id="{A43C1A57-EECF-4253-85F4-C83AD6CDD610}"/>
               </a:ext>
             </a:extLst>
           </p:cNvPr>
@@ -5676,22 +5851,57 @@
             <a:avLst/>
           </a:prstGeom>
           <a:solidFill xmlns:a="http://schemas.openxmlformats.org/drawingml/2006/main">
-            <a:srgbClr val="FAFAFA"/>
+            <a:srgbClr val="E8F6F7"/>
           </a:solidFill>
           <a:ln xmlns:a="http://schemas.openxmlformats.org/drawingml/2006/main" w="9525">
             <a:solidFill>
-              <a:srgbClr val="CFCFCF"/>
-            </a:solidFill>
-            <a:prstDash val="solid"/>
-          </a:ln>
-        </p:spPr>
-      </p:sp>
-      <p:sp>
-        <p:nvSpPr>
-          <p:cNvPr id="8" name="">
-            <a:extLst xmlns:a="http://schemas.openxmlformats.org/drawingml/2006/main">
-              <a:ext uri="{FF2B5EF4-FFF2-40B4-BE49-F238E27FC236}">
-                <a16:creationId xmlns:a16="http://schemas.microsoft.com/office/drawing/2014/main" id="{AF3B4A24-8F77-4FDB-A9A3-592C60D9FC3F}"/>
+              <a:srgbClr val="B7D7DB"/>
+            </a:solidFill>
+            <a:prstDash val="solid"/>
+          </a:ln>
+        </p:spPr>
+      </p:sp>
+      <p:sp>
+        <p:nvSpPr>
+          <p:cNvPr id="9" name="">
+            <a:extLst xmlns:a="http://schemas.openxmlformats.org/drawingml/2006/main">
+              <a:ext uri="{FF2B5EF4-FFF2-40B4-BE49-F238E27FC236}">
+                <a16:creationId xmlns:a16="http://schemas.microsoft.com/office/drawing/2014/main" id="{49C46CC7-D4CB-40D8-9449-76A4741CC7FC}"/>
+              </a:ext>
+            </a:extLst>
+          </p:cNvPr>
+          <p:cNvSpPr>
+            <a:spLocks xmlns:a="http://schemas.openxmlformats.org/drawingml/2006/main" noGrp="1"/>
+          </p:cNvSpPr>
+          <p:nvPr/>
+        </p:nvSpPr>
+        <p:spPr>
+          <a:xfrm xmlns:a="http://schemas.openxmlformats.org/drawingml/2006/main">
+            <a:off x="1200150" y="2781300"/>
+            <a:ext cx="4810125" cy="28575"/>
+          </a:xfrm>
+          <a:prstGeom xmlns:a="http://schemas.openxmlformats.org/drawingml/2006/main" prst="rect">
+            <a:avLst/>
+          </a:prstGeom>
+          <a:solidFill xmlns:a="http://schemas.openxmlformats.org/drawingml/2006/main">
+            <a:srgbClr val="007C89"/>
+          </a:solidFill>
+          <a:ln xmlns:a="http://schemas.openxmlformats.org/drawingml/2006/main" w="0">
+            <a:solidFill>
+              <a:srgbClr val="000000">
+                <a:alpha val="0"/>
+              </a:srgbClr>
+            </a:solidFill>
+            <a:prstDash val="solid"/>
+          </a:ln>
+        </p:spPr>
+      </p:sp>
+      <p:sp>
+        <p:nvSpPr>
+          <p:cNvPr id="10" name="">
+            <a:extLst xmlns:a="http://schemas.openxmlformats.org/drawingml/2006/main">
+              <a:ext uri="{FF2B5EF4-FFF2-40B4-BE49-F238E27FC236}">
+                <a16:creationId xmlns:a16="http://schemas.microsoft.com/office/drawing/2014/main" id="{419105EA-D091-4740-A56A-4E983347F6F0}"/>
               </a:ext>
             </a:extLst>
           </p:cNvPr>
@@ -5729,7 +5939,7 @@
             <a:pPr algn="l">
               <a:defRPr sz="1650" b="0">
                 <a:solidFill>
-                  <a:srgbClr val="111111"/>
+                  <a:srgbClr val="151515"/>
                 </a:solidFill>
                 <a:latin typeface="Aptos Mono"/>
                 <a:ea typeface="Aptos Mono"/>
@@ -5739,7 +5949,7 @@
             <a:r>
               <a:rPr sz="1650" b="0">
                 <a:solidFill>
-                  <a:srgbClr val="111111"/>
+                  <a:srgbClr val="151515"/>
                 </a:solidFill>
                 <a:latin typeface="Aptos Mono"/>
                 <a:ea typeface="Aptos Mono"/>
@@ -5757,7 +5967,7 @@
             <a:pPr algn="l">
               <a:defRPr sz="1650" b="0">
                 <a:solidFill>
-                  <a:srgbClr val="111111"/>
+                  <a:srgbClr val="151515"/>
                 </a:solidFill>
                 <a:latin typeface="Aptos Mono"/>
                 <a:ea typeface="Aptos Mono"/>
@@ -5767,7 +5977,7 @@
             <a:r>
               <a:rPr sz="1650" b="0">
                 <a:solidFill>
-                  <a:srgbClr val="111111"/>
+                  <a:srgbClr val="151515"/>
                 </a:solidFill>
                 <a:latin typeface="Aptos Mono"/>
                 <a:ea typeface="Aptos Mono"/>
@@ -5780,10 +5990,10 @@
       </p:sp>
       <p:sp>
         <p:nvSpPr>
-          <p:cNvPr id="9" name="">
-            <a:extLst xmlns:a="http://schemas.openxmlformats.org/drawingml/2006/main">
-              <a:ext uri="{FF2B5EF4-FFF2-40B4-BE49-F238E27FC236}">
-                <a16:creationId xmlns:a16="http://schemas.microsoft.com/office/drawing/2014/main" id="{A39F4D47-18BD-402E-B4EB-3AEB7FCFA2DD}"/>
+          <p:cNvPr id="11" name="">
+            <a:extLst xmlns:a="http://schemas.openxmlformats.org/drawingml/2006/main">
+              <a:ext uri="{FF2B5EF4-FFF2-40B4-BE49-F238E27FC236}">
+                <a16:creationId xmlns:a16="http://schemas.microsoft.com/office/drawing/2014/main" id="{B93E0A1A-B88D-4913-9BFA-A9EBA5C5421C}"/>
               </a:ext>
             </a:extLst>
           </p:cNvPr>
@@ -5795,30 +6005,30 @@
         <p:spPr>
           <a:xfrm xmlns:a="http://schemas.openxmlformats.org/drawingml/2006/main">
             <a:off x="6858000" y="2876550"/>
-            <a:ext cx="38100" cy="38100"/>
-          </a:xfrm>
-          <a:prstGeom xmlns:a="http://schemas.openxmlformats.org/drawingml/2006/main" prst="rect">
-            <a:avLst/>
-          </a:prstGeom>
-          <a:solidFill xmlns:a="http://schemas.openxmlformats.org/drawingml/2006/main">
-            <a:srgbClr val="111111"/>
-          </a:solidFill>
-          <a:ln xmlns:a="http://schemas.openxmlformats.org/drawingml/2006/main" w="0">
-            <a:solidFill>
-              <a:srgbClr val="000000">
-                <a:alpha val="0"/>
-              </a:srgbClr>
-            </a:solidFill>
-            <a:prstDash val="solid"/>
-          </a:ln>
-        </p:spPr>
-      </p:sp>
-      <p:sp>
-        <p:nvSpPr>
-          <p:cNvPr id="10" name="">
-            <a:extLst xmlns:a="http://schemas.openxmlformats.org/drawingml/2006/main">
-              <a:ext uri="{FF2B5EF4-FFF2-40B4-BE49-F238E27FC236}">
-                <a16:creationId xmlns:a16="http://schemas.microsoft.com/office/drawing/2014/main" id="{B8DD88B9-C488-4449-A6B7-34BDC199B979}"/>
+            <a:ext cx="47625" cy="47625"/>
+          </a:xfrm>
+          <a:prstGeom xmlns:a="http://schemas.openxmlformats.org/drawingml/2006/main" prst="rect">
+            <a:avLst/>
+          </a:prstGeom>
+          <a:solidFill xmlns:a="http://schemas.openxmlformats.org/drawingml/2006/main">
+            <a:srgbClr val="007C89"/>
+          </a:solidFill>
+          <a:ln xmlns:a="http://schemas.openxmlformats.org/drawingml/2006/main" w="0">
+            <a:solidFill>
+              <a:srgbClr val="000000">
+                <a:alpha val="0"/>
+              </a:srgbClr>
+            </a:solidFill>
+            <a:prstDash val="solid"/>
+          </a:ln>
+        </p:spPr>
+      </p:sp>
+      <p:sp>
+        <p:nvSpPr>
+          <p:cNvPr id="12" name="">
+            <a:extLst xmlns:a="http://schemas.openxmlformats.org/drawingml/2006/main">
+              <a:ext uri="{FF2B5EF4-FFF2-40B4-BE49-F238E27FC236}">
+                <a16:creationId xmlns:a16="http://schemas.microsoft.com/office/drawing/2014/main" id="{143EFE23-234F-44BC-8F09-4DC8D93D924D}"/>
               </a:ext>
             </a:extLst>
           </p:cNvPr>
@@ -5856,7 +6066,7 @@
             <a:pPr algn="l">
               <a:defRPr sz="1425" b="0">
                 <a:solidFill>
-                  <a:srgbClr val="222222"/>
+                  <a:srgbClr val="242424"/>
                 </a:solidFill>
                 <a:latin typeface="Aptos"/>
                 <a:ea typeface="Aptos"/>
@@ -5866,7 +6076,7 @@
             <a:r>
               <a:rPr sz="1425" b="0">
                 <a:solidFill>
-                  <a:srgbClr val="222222"/>
+                  <a:srgbClr val="242424"/>
                 </a:solidFill>
                 <a:latin typeface="Aptos"/>
                 <a:ea typeface="Aptos"/>
@@ -5879,10 +6089,10 @@
       </p:sp>
       <p:sp>
         <p:nvSpPr>
-          <p:cNvPr id="11" name="">
-            <a:extLst xmlns:a="http://schemas.openxmlformats.org/drawingml/2006/main">
-              <a:ext uri="{FF2B5EF4-FFF2-40B4-BE49-F238E27FC236}">
-                <a16:creationId xmlns:a16="http://schemas.microsoft.com/office/drawing/2014/main" id="{3C433EAF-720D-4F51-828B-DD779C029B88}"/>
+          <p:cNvPr id="13" name="">
+            <a:extLst xmlns:a="http://schemas.openxmlformats.org/drawingml/2006/main">
+              <a:ext uri="{FF2B5EF4-FFF2-40B4-BE49-F238E27FC236}">
+                <a16:creationId xmlns:a16="http://schemas.microsoft.com/office/drawing/2014/main" id="{882C8E21-8508-4D00-8F75-1FA1D75802EE}"/>
               </a:ext>
             </a:extLst>
           </p:cNvPr>
@@ -5894,30 +6104,30 @@
         <p:spPr>
           <a:xfrm xmlns:a="http://schemas.openxmlformats.org/drawingml/2006/main">
             <a:off x="6858000" y="3390900"/>
-            <a:ext cx="38100" cy="38100"/>
-          </a:xfrm>
-          <a:prstGeom xmlns:a="http://schemas.openxmlformats.org/drawingml/2006/main" prst="rect">
-            <a:avLst/>
-          </a:prstGeom>
-          <a:solidFill xmlns:a="http://schemas.openxmlformats.org/drawingml/2006/main">
-            <a:srgbClr val="111111"/>
-          </a:solidFill>
-          <a:ln xmlns:a="http://schemas.openxmlformats.org/drawingml/2006/main" w="0">
-            <a:solidFill>
-              <a:srgbClr val="000000">
-                <a:alpha val="0"/>
-              </a:srgbClr>
-            </a:solidFill>
-            <a:prstDash val="solid"/>
-          </a:ln>
-        </p:spPr>
-      </p:sp>
-      <p:sp>
-        <p:nvSpPr>
-          <p:cNvPr id="12" name="">
-            <a:extLst xmlns:a="http://schemas.openxmlformats.org/drawingml/2006/main">
-              <a:ext uri="{FF2B5EF4-FFF2-40B4-BE49-F238E27FC236}">
-                <a16:creationId xmlns:a16="http://schemas.microsoft.com/office/drawing/2014/main" id="{E461B8A3-0564-491D-9378-B4BD8BB6E997}"/>
+            <a:ext cx="47625" cy="47625"/>
+          </a:xfrm>
+          <a:prstGeom xmlns:a="http://schemas.openxmlformats.org/drawingml/2006/main" prst="rect">
+            <a:avLst/>
+          </a:prstGeom>
+          <a:solidFill xmlns:a="http://schemas.openxmlformats.org/drawingml/2006/main">
+            <a:srgbClr val="007C89"/>
+          </a:solidFill>
+          <a:ln xmlns:a="http://schemas.openxmlformats.org/drawingml/2006/main" w="0">
+            <a:solidFill>
+              <a:srgbClr val="000000">
+                <a:alpha val="0"/>
+              </a:srgbClr>
+            </a:solidFill>
+            <a:prstDash val="solid"/>
+          </a:ln>
+        </p:spPr>
+      </p:sp>
+      <p:sp>
+        <p:nvSpPr>
+          <p:cNvPr id="14" name="">
+            <a:extLst xmlns:a="http://schemas.openxmlformats.org/drawingml/2006/main">
+              <a:ext uri="{FF2B5EF4-FFF2-40B4-BE49-F238E27FC236}">
+                <a16:creationId xmlns:a16="http://schemas.microsoft.com/office/drawing/2014/main" id="{CEDBA06F-A590-496B-A90A-02C7D597FD71}"/>
               </a:ext>
             </a:extLst>
           </p:cNvPr>
@@ -5955,7 +6165,7 @@
             <a:pPr algn="l">
               <a:defRPr sz="1425" b="0">
                 <a:solidFill>
-                  <a:srgbClr val="222222"/>
+                  <a:srgbClr val="242424"/>
                 </a:solidFill>
                 <a:latin typeface="Aptos"/>
                 <a:ea typeface="Aptos"/>
@@ -5965,7 +6175,7 @@
             <a:r>
               <a:rPr sz="1425" b="0">
                 <a:solidFill>
-                  <a:srgbClr val="222222"/>
+                  <a:srgbClr val="242424"/>
                 </a:solidFill>
                 <a:latin typeface="Aptos"/>
                 <a:ea typeface="Aptos"/>
@@ -5978,10 +6188,10 @@
       </p:sp>
       <p:sp>
         <p:nvSpPr>
-          <p:cNvPr id="13" name="">
-            <a:extLst xmlns:a="http://schemas.openxmlformats.org/drawingml/2006/main">
-              <a:ext uri="{FF2B5EF4-FFF2-40B4-BE49-F238E27FC236}">
-                <a16:creationId xmlns:a16="http://schemas.microsoft.com/office/drawing/2014/main" id="{F623E444-31FD-46AE-AEC7-3B822E6E65BC}"/>
+          <p:cNvPr id="15" name="">
+            <a:extLst xmlns:a="http://schemas.openxmlformats.org/drawingml/2006/main">
+              <a:ext uri="{FF2B5EF4-FFF2-40B4-BE49-F238E27FC236}">
+                <a16:creationId xmlns:a16="http://schemas.microsoft.com/office/drawing/2014/main" id="{F26DAB87-BE88-4E4C-B2F2-1633799DD083}"/>
               </a:ext>
             </a:extLst>
           </p:cNvPr>
@@ -5993,30 +6203,30 @@
         <p:spPr>
           <a:xfrm xmlns:a="http://schemas.openxmlformats.org/drawingml/2006/main">
             <a:off x="6858000" y="3905250"/>
-            <a:ext cx="38100" cy="38100"/>
-          </a:xfrm>
-          <a:prstGeom xmlns:a="http://schemas.openxmlformats.org/drawingml/2006/main" prst="rect">
-            <a:avLst/>
-          </a:prstGeom>
-          <a:solidFill xmlns:a="http://schemas.openxmlformats.org/drawingml/2006/main">
-            <a:srgbClr val="111111"/>
-          </a:solidFill>
-          <a:ln xmlns:a="http://schemas.openxmlformats.org/drawingml/2006/main" w="0">
-            <a:solidFill>
-              <a:srgbClr val="000000">
-                <a:alpha val="0"/>
-              </a:srgbClr>
-            </a:solidFill>
-            <a:prstDash val="solid"/>
-          </a:ln>
-        </p:spPr>
-      </p:sp>
-      <p:sp>
-        <p:nvSpPr>
-          <p:cNvPr id="14" name="">
-            <a:extLst xmlns:a="http://schemas.openxmlformats.org/drawingml/2006/main">
-              <a:ext uri="{FF2B5EF4-FFF2-40B4-BE49-F238E27FC236}">
-                <a16:creationId xmlns:a16="http://schemas.microsoft.com/office/drawing/2014/main" id="{793A2370-7589-4453-B6A5-2E42503912FA}"/>
+            <a:ext cx="47625" cy="47625"/>
+          </a:xfrm>
+          <a:prstGeom xmlns:a="http://schemas.openxmlformats.org/drawingml/2006/main" prst="rect">
+            <a:avLst/>
+          </a:prstGeom>
+          <a:solidFill xmlns:a="http://schemas.openxmlformats.org/drawingml/2006/main">
+            <a:srgbClr val="007C89"/>
+          </a:solidFill>
+          <a:ln xmlns:a="http://schemas.openxmlformats.org/drawingml/2006/main" w="0">
+            <a:solidFill>
+              <a:srgbClr val="000000">
+                <a:alpha val="0"/>
+              </a:srgbClr>
+            </a:solidFill>
+            <a:prstDash val="solid"/>
+          </a:ln>
+        </p:spPr>
+      </p:sp>
+      <p:sp>
+        <p:nvSpPr>
+          <p:cNvPr id="16" name="">
+            <a:extLst xmlns:a="http://schemas.openxmlformats.org/drawingml/2006/main">
+              <a:ext uri="{FF2B5EF4-FFF2-40B4-BE49-F238E27FC236}">
+                <a16:creationId xmlns:a16="http://schemas.microsoft.com/office/drawing/2014/main" id="{90D98E68-3394-4157-A6CD-00CA00E3A229}"/>
               </a:ext>
             </a:extLst>
           </p:cNvPr>
@@ -6054,7 +6264,7 @@
             <a:pPr algn="l">
               <a:defRPr sz="1425" b="0">
                 <a:solidFill>
-                  <a:srgbClr val="222222"/>
+                  <a:srgbClr val="242424"/>
                 </a:solidFill>
                 <a:latin typeface="Aptos"/>
                 <a:ea typeface="Aptos"/>
@@ -6064,7 +6274,7 @@
             <a:r>
               <a:rPr sz="1425" b="0">
                 <a:solidFill>
-                  <a:srgbClr val="222222"/>
+                  <a:srgbClr val="242424"/>
                 </a:solidFill>
                 <a:latin typeface="Aptos"/>
                 <a:ea typeface="Aptos"/>
@@ -6077,10 +6287,10 @@
       </p:sp>
       <p:sp>
         <p:nvSpPr>
-          <p:cNvPr id="15" name="">
-            <a:extLst xmlns:a="http://schemas.openxmlformats.org/drawingml/2006/main">
-              <a:ext uri="{FF2B5EF4-FFF2-40B4-BE49-F238E27FC236}">
-                <a16:creationId xmlns:a16="http://schemas.microsoft.com/office/drawing/2014/main" id="{4CBE6878-FF9A-4B6E-9A79-B83313998B83}"/>
+          <p:cNvPr id="17" name="">
+            <a:extLst xmlns:a="http://schemas.openxmlformats.org/drawingml/2006/main">
+              <a:ext uri="{FF2B5EF4-FFF2-40B4-BE49-F238E27FC236}">
+                <a16:creationId xmlns:a16="http://schemas.microsoft.com/office/drawing/2014/main" id="{83428EB8-84E3-4B05-B14C-E1409D9DBB41}"/>
               </a:ext>
             </a:extLst>
           </p:cNvPr>
@@ -6098,24 +6308,24 @@
             <a:avLst/>
           </a:prstGeom>
           <a:solidFill xmlns:a="http://schemas.openxmlformats.org/drawingml/2006/main">
-            <a:srgbClr val="CFCFCF"/>
-          </a:solidFill>
-          <a:ln xmlns:a="http://schemas.openxmlformats.org/drawingml/2006/main" w="0">
-            <a:solidFill>
-              <a:srgbClr val="000000">
-                <a:alpha val="0"/>
-              </a:srgbClr>
-            </a:solidFill>
-            <a:prstDash val="solid"/>
-          </a:ln>
-        </p:spPr>
-      </p:sp>
-      <p:sp>
-        <p:nvSpPr>
-          <p:cNvPr id="16" name="">
-            <a:extLst xmlns:a="http://schemas.openxmlformats.org/drawingml/2006/main">
-              <a:ext uri="{FF2B5EF4-FFF2-40B4-BE49-F238E27FC236}">
-                <a16:creationId xmlns:a16="http://schemas.microsoft.com/office/drawing/2014/main" id="{6370CC93-E97B-48DD-A9F5-81C9BA599418}"/>
+            <a:srgbClr val="D4D8DD"/>
+          </a:solidFill>
+          <a:ln xmlns:a="http://schemas.openxmlformats.org/drawingml/2006/main" w="0">
+            <a:solidFill>
+              <a:srgbClr val="000000">
+                <a:alpha val="0"/>
+              </a:srgbClr>
+            </a:solidFill>
+            <a:prstDash val="solid"/>
+          </a:ln>
+        </p:spPr>
+      </p:sp>
+      <p:sp>
+        <p:nvSpPr>
+          <p:cNvPr id="18" name="">
+            <a:extLst xmlns:a="http://schemas.openxmlformats.org/drawingml/2006/main">
+              <a:ext uri="{FF2B5EF4-FFF2-40B4-BE49-F238E27FC236}">
+                <a16:creationId xmlns:a16="http://schemas.microsoft.com/office/drawing/2014/main" id="{FE0F39DE-6419-4827-8DB5-6B611646426E}"/>
               </a:ext>
             </a:extLst>
           </p:cNvPr>
@@ -6177,7 +6387,7 @@
     </p:spTree>
     <p:extLst>
       <p:ext uri="{BB962C8B-B14F-4D97-AF65-F5344CB8AC3E}">
-        <p14:creationId xmlns:p14="http://schemas.microsoft.com/office/powerpoint/2010/main" val="492242144"/>
+        <p14:creationId xmlns:p14="http://schemas.microsoft.com/office/powerpoint/2010/main" val="1606879721"/>
       </p:ext>
     </p:extLst>
   </p:cSld>
@@ -6201,7 +6411,7 @@
           <p:cNvPr id="1" name="">
             <a:extLst xmlns:a="http://schemas.openxmlformats.org/drawingml/2006/main">
               <a:ext uri="{FF2B5EF4-FFF2-40B4-BE49-F238E27FC236}">
-                <a16:creationId xmlns:a16="http://schemas.microsoft.com/office/drawing/2014/main" id="{B26475E4-111B-44EF-B777-622DD051FF9D}"/>
+                <a16:creationId xmlns:a16="http://schemas.microsoft.com/office/drawing/2014/main" id="{289C8746-C4F1-423B-9882-D666907C8ADA}"/>
               </a:ext>
             </a:extLst>
           </p:cNvPr>
@@ -6236,7 +6446,7 @@
           <p:cNvPr id="2" name="">
             <a:extLst xmlns:a="http://schemas.openxmlformats.org/drawingml/2006/main">
               <a:ext uri="{FF2B5EF4-FFF2-40B4-BE49-F238E27FC236}">
-                <a16:creationId xmlns:a16="http://schemas.microsoft.com/office/drawing/2014/main" id="{624D59BA-9E47-4BC0-B04A-ED6D501D0B5C}"/>
+                <a16:creationId xmlns:a16="http://schemas.microsoft.com/office/drawing/2014/main" id="{D8668F56-62BB-4804-BB63-C8D363AEDF6E}"/>
               </a:ext>
             </a:extLst>
           </p:cNvPr>
@@ -6300,7 +6510,7 @@
           <p:cNvPr id="3" name="">
             <a:extLst xmlns:a="http://schemas.openxmlformats.org/drawingml/2006/main">
               <a:ext uri="{FF2B5EF4-FFF2-40B4-BE49-F238E27FC236}">
-                <a16:creationId xmlns:a16="http://schemas.microsoft.com/office/drawing/2014/main" id="{4F595742-3A6E-4E5F-AC9F-3911CE401E9E}"/>
+                <a16:creationId xmlns:a16="http://schemas.microsoft.com/office/drawing/2014/main" id="{B53EE586-F80C-4A4C-A68F-1EC0FEA49B70}"/>
               </a:ext>
             </a:extLst>
           </p:cNvPr>
@@ -6364,7 +6574,7 @@
           <p:cNvPr id="4" name="">
             <a:extLst xmlns:a="http://schemas.openxmlformats.org/drawingml/2006/main">
               <a:ext uri="{FF2B5EF4-FFF2-40B4-BE49-F238E27FC236}">
-                <a16:creationId xmlns:a16="http://schemas.microsoft.com/office/drawing/2014/main" id="{459E44C7-C6C3-4EA9-B29C-ACA42CB815A6}"/>
+                <a16:creationId xmlns:a16="http://schemas.microsoft.com/office/drawing/2014/main" id="{6DB13B53-30EF-42C5-A0A7-7AAEA6097AF8}"/>
               </a:ext>
             </a:extLst>
           </p:cNvPr>
@@ -6382,7 +6592,7 @@
             <a:avLst/>
           </a:prstGeom>
           <a:solidFill xmlns:a="http://schemas.openxmlformats.org/drawingml/2006/main">
-            <a:srgbClr val="CFCFCF"/>
+            <a:srgbClr val="D4D8DD"/>
           </a:solidFill>
           <a:ln xmlns:a="http://schemas.openxmlformats.org/drawingml/2006/main" w="0">
             <a:solidFill>
@@ -6399,7 +6609,42 @@
           <p:cNvPr id="5" name="">
             <a:extLst xmlns:a="http://schemas.openxmlformats.org/drawingml/2006/main">
               <a:ext uri="{FF2B5EF4-FFF2-40B4-BE49-F238E27FC236}">
-                <a16:creationId xmlns:a16="http://schemas.microsoft.com/office/drawing/2014/main" id="{F821CE1D-7A0F-4629-800C-592C5188FAE2}"/>
+                <a16:creationId xmlns:a16="http://schemas.microsoft.com/office/drawing/2014/main" id="{D0770743-557C-4EB4-9F97-D1B81139CB96}"/>
+              </a:ext>
+            </a:extLst>
+          </p:cNvPr>
+          <p:cNvSpPr>
+            <a:spLocks xmlns:a="http://schemas.openxmlformats.org/drawingml/2006/main" noGrp="1"/>
+          </p:cNvSpPr>
+          <p:nvPr/>
+        </p:nvSpPr>
+        <p:spPr>
+          <a:xfrm xmlns:a="http://schemas.openxmlformats.org/drawingml/2006/main">
+            <a:off x="609600" y="609600"/>
+            <a:ext cx="1524000" cy="19050"/>
+          </a:xfrm>
+          <a:prstGeom xmlns:a="http://schemas.openxmlformats.org/drawingml/2006/main" prst="rect">
+            <a:avLst/>
+          </a:prstGeom>
+          <a:solidFill xmlns:a="http://schemas.openxmlformats.org/drawingml/2006/main">
+            <a:srgbClr val="1F4E79"/>
+          </a:solidFill>
+          <a:ln xmlns:a="http://schemas.openxmlformats.org/drawingml/2006/main" w="0">
+            <a:solidFill>
+              <a:srgbClr val="000000">
+                <a:alpha val="0"/>
+              </a:srgbClr>
+            </a:solidFill>
+            <a:prstDash val="solid"/>
+          </a:ln>
+        </p:spPr>
+      </p:sp>
+      <p:sp>
+        <p:nvSpPr>
+          <p:cNvPr id="6" name="">
+            <a:extLst xmlns:a="http://schemas.openxmlformats.org/drawingml/2006/main">
+              <a:ext uri="{FF2B5EF4-FFF2-40B4-BE49-F238E27FC236}">
+                <a16:creationId xmlns:a16="http://schemas.microsoft.com/office/drawing/2014/main" id="{9E668443-6F5D-4944-8ED9-E94957F26C26}"/>
               </a:ext>
             </a:extLst>
           </p:cNvPr>
@@ -6411,7 +6656,7 @@
         <p:spPr>
           <a:xfrm xmlns:a="http://schemas.openxmlformats.org/drawingml/2006/main">
             <a:off x="609600" y="819150"/>
-            <a:ext cx="9810750" cy="723900"/>
+            <a:ext cx="9810750" cy="742950"/>
           </a:xfrm>
           <a:prstGeom xmlns:a="http://schemas.openxmlformats.org/drawingml/2006/main" prst="rect">
             <a:avLst/>
@@ -6437,7 +6682,7 @@
             <a:pPr algn="l">
               <a:defRPr sz="2475" b="1">
                 <a:solidFill>
-                  <a:srgbClr val="111111"/>
+                  <a:srgbClr val="151515"/>
                 </a:solidFill>
                 <a:latin typeface="Aptos Display"/>
                 <a:ea typeface="Aptos Display"/>
@@ -6447,7 +6692,7 @@
             <a:r>
               <a:rPr sz="2475" b="1">
                 <a:solidFill>
-                  <a:srgbClr val="111111"/>
+                  <a:srgbClr val="151515"/>
                 </a:solidFill>
                 <a:latin typeface="Aptos Display"/>
                 <a:ea typeface="Aptos Display"/>
@@ -6460,10 +6705,10 @@
       </p:sp>
       <p:sp>
         <p:nvSpPr>
-          <p:cNvPr id="6" name="">
-            <a:extLst xmlns:a="http://schemas.openxmlformats.org/drawingml/2006/main">
-              <a:ext uri="{FF2B5EF4-FFF2-40B4-BE49-F238E27FC236}">
-                <a16:creationId xmlns:a16="http://schemas.microsoft.com/office/drawing/2014/main" id="{FFFBCD40-4AC1-4DDC-8448-10B1B8B47D31}"/>
+          <p:cNvPr id="7" name="">
+            <a:extLst xmlns:a="http://schemas.openxmlformats.org/drawingml/2006/main">
+              <a:ext uri="{FF2B5EF4-FFF2-40B4-BE49-F238E27FC236}">
+                <a16:creationId xmlns:a16="http://schemas.microsoft.com/office/drawing/2014/main" id="{A41BE3CD-A648-41D8-8052-76AF7B9CBCF7}"/>
               </a:ext>
             </a:extLst>
           </p:cNvPr>
@@ -6481,22 +6726,57 @@
             <a:avLst/>
           </a:prstGeom>
           <a:solidFill xmlns:a="http://schemas.openxmlformats.org/drawingml/2006/main">
-            <a:srgbClr val="FAFAFA"/>
+            <a:srgbClr val="EAF2F8"/>
           </a:solidFill>
           <a:ln xmlns:a="http://schemas.openxmlformats.org/drawingml/2006/main" w="9525">
             <a:solidFill>
-              <a:srgbClr val="CFCFCF"/>
-            </a:solidFill>
-            <a:prstDash val="solid"/>
-          </a:ln>
-        </p:spPr>
-      </p:sp>
-      <p:sp>
-        <p:nvSpPr>
-          <p:cNvPr id="7" name="">
-            <a:extLst xmlns:a="http://schemas.openxmlformats.org/drawingml/2006/main">
-              <a:ext uri="{FF2B5EF4-FFF2-40B4-BE49-F238E27FC236}">
-                <a16:creationId xmlns:a16="http://schemas.microsoft.com/office/drawing/2014/main" id="{30F30849-4F80-4725-A878-70DFF13E96A5}"/>
+              <a:srgbClr val="B9CAD8"/>
+            </a:solidFill>
+            <a:prstDash val="solid"/>
+          </a:ln>
+        </p:spPr>
+      </p:sp>
+      <p:sp>
+        <p:nvSpPr>
+          <p:cNvPr id="8" name="">
+            <a:extLst xmlns:a="http://schemas.openxmlformats.org/drawingml/2006/main">
+              <a:ext uri="{FF2B5EF4-FFF2-40B4-BE49-F238E27FC236}">
+                <a16:creationId xmlns:a16="http://schemas.microsoft.com/office/drawing/2014/main" id="{780786D5-176C-40EC-8966-75B44AD6371A}"/>
+              </a:ext>
+            </a:extLst>
+          </p:cNvPr>
+          <p:cNvSpPr>
+            <a:spLocks xmlns:a="http://schemas.openxmlformats.org/drawingml/2006/main" noGrp="1"/>
+          </p:cNvSpPr>
+          <p:nvPr/>
+        </p:nvSpPr>
+        <p:spPr>
+          <a:xfrm xmlns:a="http://schemas.openxmlformats.org/drawingml/2006/main">
+            <a:off x="742950" y="2000250"/>
+            <a:ext cx="5143500" cy="28575"/>
+          </a:xfrm>
+          <a:prstGeom xmlns:a="http://schemas.openxmlformats.org/drawingml/2006/main" prst="rect">
+            <a:avLst/>
+          </a:prstGeom>
+          <a:solidFill xmlns:a="http://schemas.openxmlformats.org/drawingml/2006/main">
+            <a:srgbClr val="1F4E79"/>
+          </a:solidFill>
+          <a:ln xmlns:a="http://schemas.openxmlformats.org/drawingml/2006/main" w="0">
+            <a:solidFill>
+              <a:srgbClr val="000000">
+                <a:alpha val="0"/>
+              </a:srgbClr>
+            </a:solidFill>
+            <a:prstDash val="solid"/>
+          </a:ln>
+        </p:spPr>
+      </p:sp>
+      <p:sp>
+        <p:nvSpPr>
+          <p:cNvPr id="9" name="">
+            <a:extLst xmlns:a="http://schemas.openxmlformats.org/drawingml/2006/main">
+              <a:ext uri="{FF2B5EF4-FFF2-40B4-BE49-F238E27FC236}">
+                <a16:creationId xmlns:a16="http://schemas.microsoft.com/office/drawing/2014/main" id="{F28EF791-E080-4060-B035-694CE2A1FE87}"/>
               </a:ext>
             </a:extLst>
           </p:cNvPr>
@@ -6534,7 +6814,7 @@
             <a:pPr algn="l">
               <a:defRPr sz="1425" b="0">
                 <a:solidFill>
-                  <a:srgbClr val="111111"/>
+                  <a:srgbClr val="151515"/>
                 </a:solidFill>
                 <a:latin typeface="Aptos Mono"/>
                 <a:ea typeface="Aptos Mono"/>
@@ -6544,7 +6824,7 @@
             <a:r>
               <a:rPr sz="1425" b="0">
                 <a:solidFill>
-                  <a:srgbClr val="111111"/>
+                  <a:srgbClr val="151515"/>
                 </a:solidFill>
                 <a:latin typeface="Aptos Mono"/>
                 <a:ea typeface="Aptos Mono"/>
@@ -6557,7 +6837,7 @@
             <a:pPr algn="l">
               <a:defRPr sz="1425" b="0">
                 <a:solidFill>
-                  <a:srgbClr val="111111"/>
+                  <a:srgbClr val="151515"/>
                 </a:solidFill>
                 <a:latin typeface="Aptos Mono"/>
                 <a:ea typeface="Aptos Mono"/>
@@ -6567,7 +6847,7 @@
             <a:r>
               <a:rPr sz="1425" b="0">
                 <a:solidFill>
-                  <a:srgbClr val="111111"/>
+                  <a:srgbClr val="151515"/>
                 </a:solidFill>
                 <a:latin typeface="Aptos Mono"/>
                 <a:ea typeface="Aptos Mono"/>
@@ -6585,7 +6865,7 @@
             <a:pPr algn="l">
               <a:defRPr sz="1425" b="0">
                 <a:solidFill>
-                  <a:srgbClr val="111111"/>
+                  <a:srgbClr val="151515"/>
                 </a:solidFill>
                 <a:latin typeface="Aptos Mono"/>
                 <a:ea typeface="Aptos Mono"/>
@@ -6595,7 +6875,7 @@
             <a:r>
               <a:rPr sz="1425" b="0">
                 <a:solidFill>
-                  <a:srgbClr val="111111"/>
+                  <a:srgbClr val="151515"/>
                 </a:solidFill>
                 <a:latin typeface="Aptos Mono"/>
                 <a:ea typeface="Aptos Mono"/>
@@ -6608,7 +6888,7 @@
             <a:pPr algn="l">
               <a:defRPr sz="1425" b="0">
                 <a:solidFill>
-                  <a:srgbClr val="111111"/>
+                  <a:srgbClr val="151515"/>
                 </a:solidFill>
                 <a:latin typeface="Aptos Mono"/>
                 <a:ea typeface="Aptos Mono"/>
@@ -6618,7 +6898,7 @@
             <a:r>
               <a:rPr sz="1425" b="0">
                 <a:solidFill>
-                  <a:srgbClr val="111111"/>
+                  <a:srgbClr val="151515"/>
                 </a:solidFill>
                 <a:latin typeface="Aptos Mono"/>
                 <a:ea typeface="Aptos Mono"/>
@@ -6631,7 +6911,7 @@
             <a:pPr algn="l">
               <a:defRPr sz="1425" b="0">
                 <a:solidFill>
-                  <a:srgbClr val="111111"/>
+                  <a:srgbClr val="151515"/>
                 </a:solidFill>
                 <a:latin typeface="Aptos Mono"/>
                 <a:ea typeface="Aptos Mono"/>
@@ -6641,7 +6921,7 @@
             <a:r>
               <a:rPr sz="1425" b="0">
                 <a:solidFill>
-                  <a:srgbClr val="111111"/>
+                  <a:srgbClr val="151515"/>
                 </a:solidFill>
                 <a:latin typeface="Aptos Mono"/>
                 <a:ea typeface="Aptos Mono"/>
@@ -6654,10 +6934,10 @@
       </p:sp>
       <p:sp>
         <p:nvSpPr>
-          <p:cNvPr id="8" name="">
-            <a:extLst xmlns:a="http://schemas.openxmlformats.org/drawingml/2006/main">
-              <a:ext uri="{FF2B5EF4-FFF2-40B4-BE49-F238E27FC236}">
-                <a16:creationId xmlns:a16="http://schemas.microsoft.com/office/drawing/2014/main" id="{A093E4D2-F48F-43D2-AB82-0F77CE56570F}"/>
+          <p:cNvPr id="10" name="">
+            <a:extLst xmlns:a="http://schemas.openxmlformats.org/drawingml/2006/main">
+              <a:ext uri="{FF2B5EF4-FFF2-40B4-BE49-F238E27FC236}">
+                <a16:creationId xmlns:a16="http://schemas.microsoft.com/office/drawing/2014/main" id="{6A717948-3AE8-4A0D-8479-152B19D0698B}"/>
               </a:ext>
             </a:extLst>
           </p:cNvPr>
@@ -6675,22 +6955,57 @@
             <a:avLst/>
           </a:prstGeom>
           <a:solidFill xmlns:a="http://schemas.openxmlformats.org/drawingml/2006/main">
-            <a:srgbClr val="FFFFFF"/>
+            <a:srgbClr val="FFF1E8"/>
           </a:solidFill>
           <a:ln xmlns:a="http://schemas.openxmlformats.org/drawingml/2006/main" w="9525">
             <a:solidFill>
-              <a:srgbClr val="CFCFCF"/>
-            </a:solidFill>
-            <a:prstDash val="solid"/>
-          </a:ln>
-        </p:spPr>
-      </p:sp>
-      <p:sp>
-        <p:nvSpPr>
-          <p:cNvPr id="9" name="">
-            <a:extLst xmlns:a="http://schemas.openxmlformats.org/drawingml/2006/main">
-              <a:ext uri="{FF2B5EF4-FFF2-40B4-BE49-F238E27FC236}">
-                <a16:creationId xmlns:a16="http://schemas.microsoft.com/office/drawing/2014/main" id="{BFC139C6-B923-492F-A1CC-F970C4EF04DD}"/>
+              <a:srgbClr val="E7C8B8"/>
+            </a:solidFill>
+            <a:prstDash val="solid"/>
+          </a:ln>
+        </p:spPr>
+      </p:sp>
+      <p:sp>
+        <p:nvSpPr>
+          <p:cNvPr id="11" name="">
+            <a:extLst xmlns:a="http://schemas.openxmlformats.org/drawingml/2006/main">
+              <a:ext uri="{FF2B5EF4-FFF2-40B4-BE49-F238E27FC236}">
+                <a16:creationId xmlns:a16="http://schemas.microsoft.com/office/drawing/2014/main" id="{B3365693-5687-4B1E-95BA-E249D2C22C86}"/>
+              </a:ext>
+            </a:extLst>
+          </p:cNvPr>
+          <p:cNvSpPr>
+            <a:spLocks xmlns:a="http://schemas.openxmlformats.org/drawingml/2006/main" noGrp="1"/>
+          </p:cNvSpPr>
+          <p:nvPr/>
+        </p:nvSpPr>
+        <p:spPr>
+          <a:xfrm xmlns:a="http://schemas.openxmlformats.org/drawingml/2006/main">
+            <a:off x="6762750" y="2000250"/>
+            <a:ext cx="4000500" cy="28575"/>
+          </a:xfrm>
+          <a:prstGeom xmlns:a="http://schemas.openxmlformats.org/drawingml/2006/main" prst="rect">
+            <a:avLst/>
+          </a:prstGeom>
+          <a:solidFill xmlns:a="http://schemas.openxmlformats.org/drawingml/2006/main">
+            <a:srgbClr val="C45A2A"/>
+          </a:solidFill>
+          <a:ln xmlns:a="http://schemas.openxmlformats.org/drawingml/2006/main" w="0">
+            <a:solidFill>
+              <a:srgbClr val="000000">
+                <a:alpha val="0"/>
+              </a:srgbClr>
+            </a:solidFill>
+            <a:prstDash val="solid"/>
+          </a:ln>
+        </p:spPr>
+      </p:sp>
+      <p:sp>
+        <p:nvSpPr>
+          <p:cNvPr id="12" name="">
+            <a:extLst xmlns:a="http://schemas.openxmlformats.org/drawingml/2006/main">
+              <a:ext uri="{FF2B5EF4-FFF2-40B4-BE49-F238E27FC236}">
+                <a16:creationId xmlns:a16="http://schemas.microsoft.com/office/drawing/2014/main" id="{97266311-60E7-4780-899E-34ED81CE66DC}"/>
               </a:ext>
             </a:extLst>
           </p:cNvPr>
@@ -6728,7 +7043,7 @@
             <a:pPr algn="l">
               <a:defRPr sz="975" b="1">
                 <a:solidFill>
-                  <a:srgbClr val="111111"/>
+                  <a:srgbClr val="C45A2A"/>
                 </a:solidFill>
                 <a:latin typeface="Aptos"/>
                 <a:ea typeface="Aptos"/>
@@ -6738,7 +7053,7 @@
             <a:r>
               <a:rPr sz="975" b="1">
                 <a:solidFill>
-                  <a:srgbClr val="111111"/>
+                  <a:srgbClr val="C45A2A"/>
                 </a:solidFill>
                 <a:latin typeface="Aptos"/>
                 <a:ea typeface="Aptos"/>
@@ -6751,10 +7066,10 @@
       </p:sp>
       <p:sp>
         <p:nvSpPr>
-          <p:cNvPr id="10" name="">
-            <a:extLst xmlns:a="http://schemas.openxmlformats.org/drawingml/2006/main">
-              <a:ext uri="{FF2B5EF4-FFF2-40B4-BE49-F238E27FC236}">
-                <a16:creationId xmlns:a16="http://schemas.microsoft.com/office/drawing/2014/main" id="{AAF7DF82-8BD4-4341-AD9A-B57A28346CDD}"/>
+          <p:cNvPr id="13" name="">
+            <a:extLst xmlns:a="http://schemas.openxmlformats.org/drawingml/2006/main">
+              <a:ext uri="{FF2B5EF4-FFF2-40B4-BE49-F238E27FC236}">
+                <a16:creationId xmlns:a16="http://schemas.microsoft.com/office/drawing/2014/main" id="{9F527650-8C49-46A5-AB1D-E0470622D68C}"/>
               </a:ext>
             </a:extLst>
           </p:cNvPr>
@@ -6792,7 +7107,7 @@
             <a:pPr algn="l">
               <a:defRPr sz="1350" b="0">
                 <a:solidFill>
-                  <a:srgbClr val="222222"/>
+                  <a:srgbClr val="242424"/>
                 </a:solidFill>
                 <a:latin typeface="Aptos Mono"/>
                 <a:ea typeface="Aptos Mono"/>
@@ -6802,7 +7117,7 @@
             <a:r>
               <a:rPr sz="1350" b="0">
                 <a:solidFill>
-                  <a:srgbClr val="222222"/>
+                  <a:srgbClr val="242424"/>
                 </a:solidFill>
                 <a:latin typeface="Aptos Mono"/>
                 <a:ea typeface="Aptos Mono"/>
@@ -6815,7 +7130,7 @@
             <a:pPr algn="l">
               <a:defRPr sz="1350" b="0">
                 <a:solidFill>
-                  <a:srgbClr val="222222"/>
+                  <a:srgbClr val="242424"/>
                 </a:solidFill>
                 <a:latin typeface="Aptos Mono"/>
                 <a:ea typeface="Aptos Mono"/>
@@ -6825,7 +7140,7 @@
             <a:r>
               <a:rPr sz="1350" b="0">
                 <a:solidFill>
-                  <a:srgbClr val="222222"/>
+                  <a:srgbClr val="242424"/>
                 </a:solidFill>
                 <a:latin typeface="Aptos Mono"/>
                 <a:ea typeface="Aptos Mono"/>
@@ -6838,7 +7153,7 @@
             <a:pPr algn="l">
               <a:defRPr sz="1350" b="0">
                 <a:solidFill>
-                  <a:srgbClr val="222222"/>
+                  <a:srgbClr val="242424"/>
                 </a:solidFill>
                 <a:latin typeface="Aptos Mono"/>
                 <a:ea typeface="Aptos Mono"/>
@@ -6848,7 +7163,7 @@
             <a:r>
               <a:rPr sz="1350" b="0">
                 <a:solidFill>
-                  <a:srgbClr val="222222"/>
+                  <a:srgbClr val="242424"/>
                 </a:solidFill>
                 <a:latin typeface="Aptos Mono"/>
                 <a:ea typeface="Aptos Mono"/>
@@ -6861,7 +7176,7 @@
             <a:pPr algn="l">
               <a:defRPr sz="1350" b="0">
                 <a:solidFill>
-                  <a:srgbClr val="222222"/>
+                  <a:srgbClr val="242424"/>
                 </a:solidFill>
                 <a:latin typeface="Aptos Mono"/>
                 <a:ea typeface="Aptos Mono"/>
@@ -6871,7 +7186,7 @@
             <a:r>
               <a:rPr sz="1350" b="0">
                 <a:solidFill>
-                  <a:srgbClr val="222222"/>
+                  <a:srgbClr val="242424"/>
                 </a:solidFill>
                 <a:latin typeface="Aptos Mono"/>
                 <a:ea typeface="Aptos Mono"/>
@@ -6884,7 +7199,7 @@
             <a:pPr algn="l">
               <a:defRPr sz="1350" b="0">
                 <a:solidFill>
-                  <a:srgbClr val="222222"/>
+                  <a:srgbClr val="242424"/>
                 </a:solidFill>
                 <a:latin typeface="Aptos Mono"/>
                 <a:ea typeface="Aptos Mono"/>
@@ -6894,7 +7209,7 @@
             <a:r>
               <a:rPr sz="1350" b="0">
                 <a:solidFill>
-                  <a:srgbClr val="222222"/>
+                  <a:srgbClr val="242424"/>
                 </a:solidFill>
                 <a:latin typeface="Aptos Mono"/>
                 <a:ea typeface="Aptos Mono"/>
@@ -6907,10 +7222,10 @@
       </p:sp>
       <p:sp>
         <p:nvSpPr>
-          <p:cNvPr id="11" name="">
-            <a:extLst xmlns:a="http://schemas.openxmlformats.org/drawingml/2006/main">
-              <a:ext uri="{FF2B5EF4-FFF2-40B4-BE49-F238E27FC236}">
-                <a16:creationId xmlns:a16="http://schemas.microsoft.com/office/drawing/2014/main" id="{8CC05478-7A8C-4638-99B1-4C7211D6DDA9}"/>
+          <p:cNvPr id="14" name="">
+            <a:extLst xmlns:a="http://schemas.openxmlformats.org/drawingml/2006/main">
+              <a:ext uri="{FF2B5EF4-FFF2-40B4-BE49-F238E27FC236}">
+                <a16:creationId xmlns:a16="http://schemas.microsoft.com/office/drawing/2014/main" id="{7A5CE719-9B87-423D-8423-D25B445D3E5E}"/>
               </a:ext>
             </a:extLst>
           </p:cNvPr>
@@ -6971,10 +7286,10 @@
       </p:sp>
       <p:sp>
         <p:nvSpPr>
-          <p:cNvPr id="12" name="">
-            <a:extLst xmlns:a="http://schemas.openxmlformats.org/drawingml/2006/main">
-              <a:ext uri="{FF2B5EF4-FFF2-40B4-BE49-F238E27FC236}">
-                <a16:creationId xmlns:a16="http://schemas.microsoft.com/office/drawing/2014/main" id="{7D846B92-B3CE-4594-9552-D3C0174D42A3}"/>
+          <p:cNvPr id="15" name="">
+            <a:extLst xmlns:a="http://schemas.openxmlformats.org/drawingml/2006/main">
+              <a:ext uri="{FF2B5EF4-FFF2-40B4-BE49-F238E27FC236}">
+                <a16:creationId xmlns:a16="http://schemas.microsoft.com/office/drawing/2014/main" id="{2788B261-0B02-4385-9106-0F3B6BE8ED3F}"/>
               </a:ext>
             </a:extLst>
           </p:cNvPr>
@@ -6992,24 +7307,24 @@
             <a:avLst/>
           </a:prstGeom>
           <a:solidFill xmlns:a="http://schemas.openxmlformats.org/drawingml/2006/main">
-            <a:srgbClr val="CFCFCF"/>
-          </a:solidFill>
-          <a:ln xmlns:a="http://schemas.openxmlformats.org/drawingml/2006/main" w="0">
-            <a:solidFill>
-              <a:srgbClr val="000000">
-                <a:alpha val="0"/>
-              </a:srgbClr>
-            </a:solidFill>
-            <a:prstDash val="solid"/>
-          </a:ln>
-        </p:spPr>
-      </p:sp>
-      <p:sp>
-        <p:nvSpPr>
-          <p:cNvPr id="13" name="">
-            <a:extLst xmlns:a="http://schemas.openxmlformats.org/drawingml/2006/main">
-              <a:ext uri="{FF2B5EF4-FFF2-40B4-BE49-F238E27FC236}">
-                <a16:creationId xmlns:a16="http://schemas.microsoft.com/office/drawing/2014/main" id="{363B81E3-8F82-4029-A08E-9B9BC91706E8}"/>
+            <a:srgbClr val="D4D8DD"/>
+          </a:solidFill>
+          <a:ln xmlns:a="http://schemas.openxmlformats.org/drawingml/2006/main" w="0">
+            <a:solidFill>
+              <a:srgbClr val="000000">
+                <a:alpha val="0"/>
+              </a:srgbClr>
+            </a:solidFill>
+            <a:prstDash val="solid"/>
+          </a:ln>
+        </p:spPr>
+      </p:sp>
+      <p:sp>
+        <p:nvSpPr>
+          <p:cNvPr id="16" name="">
+            <a:extLst xmlns:a="http://schemas.openxmlformats.org/drawingml/2006/main">
+              <a:ext uri="{FF2B5EF4-FFF2-40B4-BE49-F238E27FC236}">
+                <a16:creationId xmlns:a16="http://schemas.microsoft.com/office/drawing/2014/main" id="{E5D8E389-733C-4858-A9BF-2579D144BB15}"/>
               </a:ext>
             </a:extLst>
           </p:cNvPr>
@@ -7071,7 +7386,7 @@
     </p:spTree>
     <p:extLst>
       <p:ext uri="{BB962C8B-B14F-4D97-AF65-F5344CB8AC3E}">
-        <p14:creationId xmlns:p14="http://schemas.microsoft.com/office/powerpoint/2010/main" val="512978240"/>
+        <p14:creationId xmlns:p14="http://schemas.microsoft.com/office/powerpoint/2010/main" val="1960467395"/>
       </p:ext>
     </p:extLst>
   </p:cSld>
@@ -7095,7 +7410,7 @@
           <p:cNvPr id="1" name="">
             <a:extLst xmlns:a="http://schemas.openxmlformats.org/drawingml/2006/main">
               <a:ext uri="{FF2B5EF4-FFF2-40B4-BE49-F238E27FC236}">
-                <a16:creationId xmlns:a16="http://schemas.microsoft.com/office/drawing/2014/main" id="{A69A0BA0-9D57-4F85-91FE-3067B269B1EE}"/>
+                <a16:creationId xmlns:a16="http://schemas.microsoft.com/office/drawing/2014/main" id="{3B72A8E1-CE5C-4357-AE37-BDB8C98356AB}"/>
               </a:ext>
             </a:extLst>
           </p:cNvPr>
@@ -7130,7 +7445,7 @@
           <p:cNvPr id="2" name="">
             <a:extLst xmlns:a="http://schemas.openxmlformats.org/drawingml/2006/main">
               <a:ext uri="{FF2B5EF4-FFF2-40B4-BE49-F238E27FC236}">
-                <a16:creationId xmlns:a16="http://schemas.microsoft.com/office/drawing/2014/main" id="{D234CFBD-4C2B-4DD5-AA5C-EBA362DC0B6F}"/>
+                <a16:creationId xmlns:a16="http://schemas.microsoft.com/office/drawing/2014/main" id="{A3E0836E-5605-4B5A-9E03-4BF426650F64}"/>
               </a:ext>
             </a:extLst>
           </p:cNvPr>
@@ -7194,7 +7509,7 @@
           <p:cNvPr id="3" name="">
             <a:extLst xmlns:a="http://schemas.openxmlformats.org/drawingml/2006/main">
               <a:ext uri="{FF2B5EF4-FFF2-40B4-BE49-F238E27FC236}">
-                <a16:creationId xmlns:a16="http://schemas.microsoft.com/office/drawing/2014/main" id="{9CA89DF5-B44B-43FF-9CFE-B0DB3060D0E9}"/>
+                <a16:creationId xmlns:a16="http://schemas.microsoft.com/office/drawing/2014/main" id="{838C7466-EF84-48B4-AF90-43711E18EEC8}"/>
               </a:ext>
             </a:extLst>
           </p:cNvPr>
@@ -7258,7 +7573,7 @@
           <p:cNvPr id="4" name="">
             <a:extLst xmlns:a="http://schemas.openxmlformats.org/drawingml/2006/main">
               <a:ext uri="{FF2B5EF4-FFF2-40B4-BE49-F238E27FC236}">
-                <a16:creationId xmlns:a16="http://schemas.microsoft.com/office/drawing/2014/main" id="{28417E97-52A2-4C98-87CF-46889EF53341}"/>
+                <a16:creationId xmlns:a16="http://schemas.microsoft.com/office/drawing/2014/main" id="{D5B84CC7-790D-4E5B-BF00-84079BA6F37F}"/>
               </a:ext>
             </a:extLst>
           </p:cNvPr>
@@ -7276,7 +7591,7 @@
             <a:avLst/>
           </a:prstGeom>
           <a:solidFill xmlns:a="http://schemas.openxmlformats.org/drawingml/2006/main">
-            <a:srgbClr val="CFCFCF"/>
+            <a:srgbClr val="D4D8DD"/>
           </a:solidFill>
           <a:ln xmlns:a="http://schemas.openxmlformats.org/drawingml/2006/main" w="0">
             <a:solidFill>
@@ -7293,7 +7608,42 @@
           <p:cNvPr id="5" name="">
             <a:extLst xmlns:a="http://schemas.openxmlformats.org/drawingml/2006/main">
               <a:ext uri="{FF2B5EF4-FFF2-40B4-BE49-F238E27FC236}">
-                <a16:creationId xmlns:a16="http://schemas.microsoft.com/office/drawing/2014/main" id="{7F930095-026B-4659-866F-2C96D9AE542B}"/>
+                <a16:creationId xmlns:a16="http://schemas.microsoft.com/office/drawing/2014/main" id="{60790AE5-44E4-4B6C-9DF7-75D994082E0C}"/>
+              </a:ext>
+            </a:extLst>
+          </p:cNvPr>
+          <p:cNvSpPr>
+            <a:spLocks xmlns:a="http://schemas.openxmlformats.org/drawingml/2006/main" noGrp="1"/>
+          </p:cNvSpPr>
+          <p:nvPr/>
+        </p:nvSpPr>
+        <p:spPr>
+          <a:xfrm xmlns:a="http://schemas.openxmlformats.org/drawingml/2006/main">
+            <a:off x="609600" y="609600"/>
+            <a:ext cx="1524000" cy="19050"/>
+          </a:xfrm>
+          <a:prstGeom xmlns:a="http://schemas.openxmlformats.org/drawingml/2006/main" prst="rect">
+            <a:avLst/>
+          </a:prstGeom>
+          <a:solidFill xmlns:a="http://schemas.openxmlformats.org/drawingml/2006/main">
+            <a:srgbClr val="1F4E79"/>
+          </a:solidFill>
+          <a:ln xmlns:a="http://schemas.openxmlformats.org/drawingml/2006/main" w="0">
+            <a:solidFill>
+              <a:srgbClr val="000000">
+                <a:alpha val="0"/>
+              </a:srgbClr>
+            </a:solidFill>
+            <a:prstDash val="solid"/>
+          </a:ln>
+        </p:spPr>
+      </p:sp>
+      <p:sp>
+        <p:nvSpPr>
+          <p:cNvPr id="6" name="">
+            <a:extLst xmlns:a="http://schemas.openxmlformats.org/drawingml/2006/main">
+              <a:ext uri="{FF2B5EF4-FFF2-40B4-BE49-F238E27FC236}">
+                <a16:creationId xmlns:a16="http://schemas.microsoft.com/office/drawing/2014/main" id="{3C657915-7DC3-4B6A-95CE-C1E46498DAB6}"/>
               </a:ext>
             </a:extLst>
           </p:cNvPr>
@@ -7305,7 +7655,7 @@
         <p:spPr>
           <a:xfrm xmlns:a="http://schemas.openxmlformats.org/drawingml/2006/main">
             <a:off x="609600" y="819150"/>
-            <a:ext cx="9715500" cy="723900"/>
+            <a:ext cx="9715500" cy="742950"/>
           </a:xfrm>
           <a:prstGeom xmlns:a="http://schemas.openxmlformats.org/drawingml/2006/main" prst="rect">
             <a:avLst/>
@@ -7331,7 +7681,7 @@
             <a:pPr algn="l">
               <a:defRPr sz="2475" b="1">
                 <a:solidFill>
-                  <a:srgbClr val="111111"/>
+                  <a:srgbClr val="151515"/>
                 </a:solidFill>
                 <a:latin typeface="Aptos Display"/>
                 <a:ea typeface="Aptos Display"/>
@@ -7341,7 +7691,7 @@
             <a:r>
               <a:rPr sz="2475" b="1">
                 <a:solidFill>
-                  <a:srgbClr val="111111"/>
+                  <a:srgbClr val="151515"/>
                 </a:solidFill>
                 <a:latin typeface="Aptos Display"/>
                 <a:ea typeface="Aptos Display"/>
@@ -7354,10 +7704,10 @@
       </p:sp>
       <p:sp>
         <p:nvSpPr>
-          <p:cNvPr id="6" name="">
-            <a:extLst xmlns:a="http://schemas.openxmlformats.org/drawingml/2006/main">
-              <a:ext uri="{FF2B5EF4-FFF2-40B4-BE49-F238E27FC236}">
-                <a16:creationId xmlns:a16="http://schemas.microsoft.com/office/drawing/2014/main" id="{9A2D0FE1-587D-4B4C-826B-765E16EA6107}"/>
+          <p:cNvPr id="7" name="">
+            <a:extLst xmlns:a="http://schemas.openxmlformats.org/drawingml/2006/main">
+              <a:ext uri="{FF2B5EF4-FFF2-40B4-BE49-F238E27FC236}">
+                <a16:creationId xmlns:a16="http://schemas.microsoft.com/office/drawing/2014/main" id="{257342E2-EBCD-4F56-A91E-7777579F2C44}"/>
               </a:ext>
             </a:extLst>
           </p:cNvPr>
@@ -7418,10 +7768,10 @@
       </p:sp>
       <p:sp>
         <p:nvSpPr>
-          <p:cNvPr id="7" name="">
-            <a:extLst xmlns:a="http://schemas.openxmlformats.org/drawingml/2006/main">
-              <a:ext uri="{FF2B5EF4-FFF2-40B4-BE49-F238E27FC236}">
-                <a16:creationId xmlns:a16="http://schemas.microsoft.com/office/drawing/2014/main" id="{1D63FDDA-EAA3-4D35-AEC2-A0837042DF1A}"/>
+          <p:cNvPr id="8" name="">
+            <a:extLst xmlns:a="http://schemas.openxmlformats.org/drawingml/2006/main">
+              <a:ext uri="{FF2B5EF4-FFF2-40B4-BE49-F238E27FC236}">
+                <a16:creationId xmlns:a16="http://schemas.microsoft.com/office/drawing/2014/main" id="{4A36C39E-52CD-4846-8D06-D99E01AED9A8}"/>
               </a:ext>
             </a:extLst>
           </p:cNvPr>
@@ -7439,22 +7789,22 @@
             <a:avLst/>
           </a:prstGeom>
           <a:solidFill xmlns:a="http://schemas.openxmlformats.org/drawingml/2006/main">
-            <a:srgbClr val="FFFFFF"/>
+            <a:srgbClr val="F7F8FA"/>
           </a:solidFill>
           <a:ln xmlns:a="http://schemas.openxmlformats.org/drawingml/2006/main" w="9525">
             <a:solidFill>
-              <a:srgbClr val="CFCFCF"/>
-            </a:solidFill>
-            <a:prstDash val="solid"/>
-          </a:ln>
-        </p:spPr>
-      </p:sp>
-      <p:sp>
-        <p:nvSpPr>
-          <p:cNvPr id="8" name="">
-            <a:extLst xmlns:a="http://schemas.openxmlformats.org/drawingml/2006/main">
-              <a:ext uri="{FF2B5EF4-FFF2-40B4-BE49-F238E27FC236}">
-                <a16:creationId xmlns:a16="http://schemas.microsoft.com/office/drawing/2014/main" id="{08805FC5-0429-49DF-9D05-8C7F88204A05}"/>
+              <a:srgbClr val="D4D8DD"/>
+            </a:solidFill>
+            <a:prstDash val="solid"/>
+          </a:ln>
+        </p:spPr>
+      </p:sp>
+      <p:sp>
+        <p:nvSpPr>
+          <p:cNvPr id="9" name="">
+            <a:extLst xmlns:a="http://schemas.openxmlformats.org/drawingml/2006/main">
+              <a:ext uri="{FF2B5EF4-FFF2-40B4-BE49-F238E27FC236}">
+                <a16:creationId xmlns:a16="http://schemas.microsoft.com/office/drawing/2014/main" id="{ECD69919-C1D5-4659-BFF0-99BA1E135327}"/>
               </a:ext>
             </a:extLst>
           </p:cNvPr>
@@ -7492,7 +7842,7 @@
             <a:pPr algn="l">
               <a:defRPr sz="1050" b="1">
                 <a:solidFill>
-                  <a:srgbClr val="222222"/>
+                  <a:srgbClr val="666666"/>
                 </a:solidFill>
                 <a:latin typeface="Aptos"/>
                 <a:ea typeface="Aptos"/>
@@ -7502,7 +7852,7 @@
             <a:r>
               <a:rPr sz="1050" b="1">
                 <a:solidFill>
-                  <a:srgbClr val="222222"/>
+                  <a:srgbClr val="666666"/>
                 </a:solidFill>
                 <a:latin typeface="Aptos"/>
                 <a:ea typeface="Aptos"/>
@@ -7515,10 +7865,10 @@
       </p:sp>
       <p:sp>
         <p:nvSpPr>
-          <p:cNvPr id="9" name="">
-            <a:extLst xmlns:a="http://schemas.openxmlformats.org/drawingml/2006/main">
-              <a:ext uri="{FF2B5EF4-FFF2-40B4-BE49-F238E27FC236}">
-                <a16:creationId xmlns:a16="http://schemas.microsoft.com/office/drawing/2014/main" id="{6C056B36-C72A-482D-A495-0642EE215E41}"/>
+          <p:cNvPr id="10" name="">
+            <a:extLst xmlns:a="http://schemas.openxmlformats.org/drawingml/2006/main">
+              <a:ext uri="{FF2B5EF4-FFF2-40B4-BE49-F238E27FC236}">
+                <a16:creationId xmlns:a16="http://schemas.microsoft.com/office/drawing/2014/main" id="{7D0F94F1-734D-4A8A-BC24-808835EAA8F1}"/>
               </a:ext>
             </a:extLst>
           </p:cNvPr>
@@ -7556,7 +7906,7 @@
             <a:pPr algn="l">
               <a:defRPr sz="1800" b="0">
                 <a:solidFill>
-                  <a:srgbClr val="222222"/>
+                  <a:srgbClr val="242424"/>
                 </a:solidFill>
                 <a:latin typeface="Aptos Mono"/>
                 <a:ea typeface="Aptos Mono"/>
@@ -7566,7 +7916,7 @@
             <a:r>
               <a:rPr sz="1800" b="0">
                 <a:solidFill>
-                  <a:srgbClr val="222222"/>
+                  <a:srgbClr val="242424"/>
                 </a:solidFill>
                 <a:latin typeface="Aptos Mono"/>
                 <a:ea typeface="Aptos Mono"/>
@@ -7579,10 +7929,10 @@
       </p:sp>
       <p:sp>
         <p:nvSpPr>
-          <p:cNvPr id="10" name="">
-            <a:extLst xmlns:a="http://schemas.openxmlformats.org/drawingml/2006/main">
-              <a:ext uri="{FF2B5EF4-FFF2-40B4-BE49-F238E27FC236}">
-                <a16:creationId xmlns:a16="http://schemas.microsoft.com/office/drawing/2014/main" id="{353310E4-72AC-448E-B085-55E946F337D6}"/>
+          <p:cNvPr id="11" name="">
+            <a:extLst xmlns:a="http://schemas.openxmlformats.org/drawingml/2006/main">
+              <a:ext uri="{FF2B5EF4-FFF2-40B4-BE49-F238E27FC236}">
+                <a16:creationId xmlns:a16="http://schemas.microsoft.com/office/drawing/2014/main" id="{47D4033E-A866-4640-8FB3-1543C6814B47}"/>
               </a:ext>
             </a:extLst>
           </p:cNvPr>
@@ -7594,30 +7944,30 @@
         <p:spPr>
           <a:xfrm xmlns:a="http://schemas.openxmlformats.org/drawingml/2006/main">
             <a:off x="3714750" y="3181350"/>
-            <a:ext cx="762000" cy="14288"/>
-          </a:xfrm>
-          <a:prstGeom xmlns:a="http://schemas.openxmlformats.org/drawingml/2006/main" prst="rect">
-            <a:avLst/>
-          </a:prstGeom>
-          <a:solidFill xmlns:a="http://schemas.openxmlformats.org/drawingml/2006/main">
-            <a:srgbClr val="2F2F2F"/>
-          </a:solidFill>
-          <a:ln xmlns:a="http://schemas.openxmlformats.org/drawingml/2006/main" w="0">
-            <a:solidFill>
-              <a:srgbClr val="000000">
-                <a:alpha val="0"/>
-              </a:srgbClr>
-            </a:solidFill>
-            <a:prstDash val="solid"/>
-          </a:ln>
-        </p:spPr>
-      </p:sp>
-      <p:sp>
-        <p:nvSpPr>
-          <p:cNvPr id="11" name="">
-            <a:extLst xmlns:a="http://schemas.openxmlformats.org/drawingml/2006/main">
-              <a:ext uri="{FF2B5EF4-FFF2-40B4-BE49-F238E27FC236}">
-                <a16:creationId xmlns:a16="http://schemas.microsoft.com/office/drawing/2014/main" id="{FFEA56F9-E12A-4989-A02E-C9E6AA7AC327}"/>
+            <a:ext cx="762000" cy="15240"/>
+          </a:xfrm>
+          <a:prstGeom xmlns:a="http://schemas.openxmlformats.org/drawingml/2006/main" prst="rect">
+            <a:avLst/>
+          </a:prstGeom>
+          <a:solidFill xmlns:a="http://schemas.openxmlformats.org/drawingml/2006/main">
+            <a:srgbClr val="1F4E79"/>
+          </a:solidFill>
+          <a:ln xmlns:a="http://schemas.openxmlformats.org/drawingml/2006/main" w="0">
+            <a:solidFill>
+              <a:srgbClr val="000000">
+                <a:alpha val="0"/>
+              </a:srgbClr>
+            </a:solidFill>
+            <a:prstDash val="solid"/>
+          </a:ln>
+        </p:spPr>
+      </p:sp>
+      <p:sp>
+        <p:nvSpPr>
+          <p:cNvPr id="12" name="">
+            <a:extLst xmlns:a="http://schemas.openxmlformats.org/drawingml/2006/main">
+              <a:ext uri="{FF2B5EF4-FFF2-40B4-BE49-F238E27FC236}">
+                <a16:creationId xmlns:a16="http://schemas.microsoft.com/office/drawing/2014/main" id="{FEBC76EB-6258-4D2B-890B-BD733254CB39}"/>
               </a:ext>
             </a:extLst>
           </p:cNvPr>
@@ -7655,7 +8005,7 @@
             <a:pPr algn="l">
               <a:defRPr sz="1350" b="1">
                 <a:solidFill>
-                  <a:srgbClr val="2F2F2F"/>
+                  <a:srgbClr val="1F4E79"/>
                 </a:solidFill>
                 <a:latin typeface="Aptos"/>
                 <a:ea typeface="Aptos"/>
@@ -7665,7 +8015,7 @@
             <a:r>
               <a:rPr sz="1350" b="1">
                 <a:solidFill>
-                  <a:srgbClr val="2F2F2F"/>
+                  <a:srgbClr val="1F4E79"/>
                 </a:solidFill>
                 <a:latin typeface="Aptos"/>
                 <a:ea typeface="Aptos"/>
@@ -7678,10 +8028,10 @@
       </p:sp>
       <p:sp>
         <p:nvSpPr>
-          <p:cNvPr id="12" name="">
-            <a:extLst xmlns:a="http://schemas.openxmlformats.org/drawingml/2006/main">
-              <a:ext uri="{FF2B5EF4-FFF2-40B4-BE49-F238E27FC236}">
-                <a16:creationId xmlns:a16="http://schemas.microsoft.com/office/drawing/2014/main" id="{FDC222D2-00A0-4E86-9D19-E5CE334BF143}"/>
+          <p:cNvPr id="13" name="">
+            <a:extLst xmlns:a="http://schemas.openxmlformats.org/drawingml/2006/main">
+              <a:ext uri="{FF2B5EF4-FFF2-40B4-BE49-F238E27FC236}">
+                <a16:creationId xmlns:a16="http://schemas.microsoft.com/office/drawing/2014/main" id="{2B32970A-5C92-4B70-ABAD-221EF8DB9833}"/>
               </a:ext>
             </a:extLst>
           </p:cNvPr>
@@ -7699,22 +8049,22 @@
             <a:avLst/>
           </a:prstGeom>
           <a:solidFill xmlns:a="http://schemas.openxmlformats.org/drawingml/2006/main">
-            <a:srgbClr val="FAFAFA"/>
+            <a:srgbClr val="EAF2F8"/>
           </a:solidFill>
           <a:ln xmlns:a="http://schemas.openxmlformats.org/drawingml/2006/main" w="9525">
             <a:solidFill>
-              <a:srgbClr val="CFCFCF"/>
-            </a:solidFill>
-            <a:prstDash val="solid"/>
-          </a:ln>
-        </p:spPr>
-      </p:sp>
-      <p:sp>
-        <p:nvSpPr>
-          <p:cNvPr id="13" name="">
-            <a:extLst xmlns:a="http://schemas.openxmlformats.org/drawingml/2006/main">
-              <a:ext uri="{FF2B5EF4-FFF2-40B4-BE49-F238E27FC236}">
-                <a16:creationId xmlns:a16="http://schemas.microsoft.com/office/drawing/2014/main" id="{3F645FE3-1B86-417E-B931-FF7DE1DECEB9}"/>
+              <a:srgbClr val="B9CAD8"/>
+            </a:solidFill>
+            <a:prstDash val="solid"/>
+          </a:ln>
+        </p:spPr>
+      </p:sp>
+      <p:sp>
+        <p:nvSpPr>
+          <p:cNvPr id="14" name="">
+            <a:extLst xmlns:a="http://schemas.openxmlformats.org/drawingml/2006/main">
+              <a:ext uri="{FF2B5EF4-FFF2-40B4-BE49-F238E27FC236}">
+                <a16:creationId xmlns:a16="http://schemas.microsoft.com/office/drawing/2014/main" id="{B79DC962-7253-4C4E-BB1A-B42DD61F0025}"/>
               </a:ext>
             </a:extLst>
           </p:cNvPr>
@@ -7752,7 +8102,7 @@
             <a:pPr algn="l">
               <a:defRPr sz="1575" b="0">
                 <a:solidFill>
-                  <a:srgbClr val="222222"/>
+                  <a:srgbClr val="1F4E79"/>
                 </a:solidFill>
                 <a:latin typeface="Aptos Mono"/>
                 <a:ea typeface="Aptos Mono"/>
@@ -7762,7 +8112,7 @@
             <a:r>
               <a:rPr sz="1575" b="0">
                 <a:solidFill>
-                  <a:srgbClr val="222222"/>
+                  <a:srgbClr val="1F4E79"/>
                 </a:solidFill>
                 <a:latin typeface="Aptos Mono"/>
                 <a:ea typeface="Aptos Mono"/>
@@ -7775,7 +8125,7 @@
             <a:pPr algn="l">
               <a:defRPr sz="1575" b="0">
                 <a:solidFill>
-                  <a:srgbClr val="222222"/>
+                  <a:srgbClr val="1F4E79"/>
                 </a:solidFill>
                 <a:latin typeface="Aptos Mono"/>
                 <a:ea typeface="Aptos Mono"/>
@@ -7785,7 +8135,7 @@
             <a:r>
               <a:rPr sz="1575" b="0">
                 <a:solidFill>
-                  <a:srgbClr val="222222"/>
+                  <a:srgbClr val="1F4E79"/>
                 </a:solidFill>
                 <a:latin typeface="Aptos Mono"/>
                 <a:ea typeface="Aptos Mono"/>
@@ -7798,7 +8148,7 @@
             <a:pPr algn="l">
               <a:defRPr sz="1575" b="0">
                 <a:solidFill>
-                  <a:srgbClr val="222222"/>
+                  <a:srgbClr val="1F4E79"/>
                 </a:solidFill>
                 <a:latin typeface="Aptos Mono"/>
                 <a:ea typeface="Aptos Mono"/>
@@ -7808,7 +8158,7 @@
             <a:r>
               <a:rPr sz="1575" b="0">
                 <a:solidFill>
-                  <a:srgbClr val="222222"/>
+                  <a:srgbClr val="1F4E79"/>
                 </a:solidFill>
                 <a:latin typeface="Aptos Mono"/>
                 <a:ea typeface="Aptos Mono"/>
@@ -7821,10 +8171,10 @@
       </p:sp>
       <p:sp>
         <p:nvSpPr>
-          <p:cNvPr id="14" name="">
-            <a:extLst xmlns:a="http://schemas.openxmlformats.org/drawingml/2006/main">
-              <a:ext uri="{FF2B5EF4-FFF2-40B4-BE49-F238E27FC236}">
-                <a16:creationId xmlns:a16="http://schemas.microsoft.com/office/drawing/2014/main" id="{4FDDE115-6418-4A61-AD49-8C29F2BDAC86}"/>
+          <p:cNvPr id="15" name="">
+            <a:extLst xmlns:a="http://schemas.openxmlformats.org/drawingml/2006/main">
+              <a:ext uri="{FF2B5EF4-FFF2-40B4-BE49-F238E27FC236}">
+                <a16:creationId xmlns:a16="http://schemas.microsoft.com/office/drawing/2014/main" id="{5040CD60-62B9-4C34-9878-7CA6431A7C46}"/>
               </a:ext>
             </a:extLst>
           </p:cNvPr>
@@ -7836,30 +8186,30 @@
         <p:spPr>
           <a:xfrm xmlns:a="http://schemas.openxmlformats.org/drawingml/2006/main">
             <a:off x="7696200" y="3181350"/>
-            <a:ext cx="762000" cy="14288"/>
-          </a:xfrm>
-          <a:prstGeom xmlns:a="http://schemas.openxmlformats.org/drawingml/2006/main" prst="rect">
-            <a:avLst/>
-          </a:prstGeom>
-          <a:solidFill xmlns:a="http://schemas.openxmlformats.org/drawingml/2006/main">
-            <a:srgbClr val="2F2F2F"/>
-          </a:solidFill>
-          <a:ln xmlns:a="http://schemas.openxmlformats.org/drawingml/2006/main" w="0">
-            <a:solidFill>
-              <a:srgbClr val="000000">
-                <a:alpha val="0"/>
-              </a:srgbClr>
-            </a:solidFill>
-            <a:prstDash val="solid"/>
-          </a:ln>
-        </p:spPr>
-      </p:sp>
-      <p:sp>
-        <p:nvSpPr>
-          <p:cNvPr id="15" name="">
-            <a:extLst xmlns:a="http://schemas.openxmlformats.org/drawingml/2006/main">
-              <a:ext uri="{FF2B5EF4-FFF2-40B4-BE49-F238E27FC236}">
-                <a16:creationId xmlns:a16="http://schemas.microsoft.com/office/drawing/2014/main" id="{0399B3A0-7BEC-4A91-A19B-2AB8F0268550}"/>
+            <a:ext cx="762000" cy="15240"/>
+          </a:xfrm>
+          <a:prstGeom xmlns:a="http://schemas.openxmlformats.org/drawingml/2006/main" prst="rect">
+            <a:avLst/>
+          </a:prstGeom>
+          <a:solidFill xmlns:a="http://schemas.openxmlformats.org/drawingml/2006/main">
+            <a:srgbClr val="007C89"/>
+          </a:solidFill>
+          <a:ln xmlns:a="http://schemas.openxmlformats.org/drawingml/2006/main" w="0">
+            <a:solidFill>
+              <a:srgbClr val="000000">
+                <a:alpha val="0"/>
+              </a:srgbClr>
+            </a:solidFill>
+            <a:prstDash val="solid"/>
+          </a:ln>
+        </p:spPr>
+      </p:sp>
+      <p:sp>
+        <p:nvSpPr>
+          <p:cNvPr id="16" name="">
+            <a:extLst xmlns:a="http://schemas.openxmlformats.org/drawingml/2006/main">
+              <a:ext uri="{FF2B5EF4-FFF2-40B4-BE49-F238E27FC236}">
+                <a16:creationId xmlns:a16="http://schemas.microsoft.com/office/drawing/2014/main" id="{2A3B9F5E-3EE7-4742-B76A-050DC1124692}"/>
               </a:ext>
             </a:extLst>
           </p:cNvPr>
@@ -7897,7 +8247,7 @@
             <a:pPr algn="l">
               <a:defRPr sz="1350" b="1">
                 <a:solidFill>
-                  <a:srgbClr val="2F2F2F"/>
+                  <a:srgbClr val="007C89"/>
                 </a:solidFill>
                 <a:latin typeface="Aptos"/>
                 <a:ea typeface="Aptos"/>
@@ -7907,7 +8257,7 @@
             <a:r>
               <a:rPr sz="1350" b="1">
                 <a:solidFill>
-                  <a:srgbClr val="2F2F2F"/>
+                  <a:srgbClr val="007C89"/>
                 </a:solidFill>
                 <a:latin typeface="Aptos"/>
                 <a:ea typeface="Aptos"/>
@@ -7920,10 +8270,10 @@
       </p:sp>
       <p:sp>
         <p:nvSpPr>
-          <p:cNvPr id="16" name="">
-            <a:extLst xmlns:a="http://schemas.openxmlformats.org/drawingml/2006/main">
-              <a:ext uri="{FF2B5EF4-FFF2-40B4-BE49-F238E27FC236}">
-                <a16:creationId xmlns:a16="http://schemas.microsoft.com/office/drawing/2014/main" id="{C759DFE7-EB1D-4D79-A1B9-488178FA13E2}"/>
+          <p:cNvPr id="17" name="">
+            <a:extLst xmlns:a="http://schemas.openxmlformats.org/drawingml/2006/main">
+              <a:ext uri="{FF2B5EF4-FFF2-40B4-BE49-F238E27FC236}">
+                <a16:creationId xmlns:a16="http://schemas.microsoft.com/office/drawing/2014/main" id="{24384DBF-10BA-48E4-8935-5A079A226977}"/>
               </a:ext>
             </a:extLst>
           </p:cNvPr>
@@ -7941,22 +8291,22 @@
             <a:avLst/>
           </a:prstGeom>
           <a:solidFill xmlns:a="http://schemas.openxmlformats.org/drawingml/2006/main">
-            <a:srgbClr val="FFFFFF"/>
+            <a:srgbClr val="E8F6F7"/>
           </a:solidFill>
           <a:ln xmlns:a="http://schemas.openxmlformats.org/drawingml/2006/main" w="9525">
             <a:solidFill>
-              <a:srgbClr val="CFCFCF"/>
-            </a:solidFill>
-            <a:prstDash val="solid"/>
-          </a:ln>
-        </p:spPr>
-      </p:sp>
-      <p:sp>
-        <p:nvSpPr>
-          <p:cNvPr id="17" name="">
-            <a:extLst xmlns:a="http://schemas.openxmlformats.org/drawingml/2006/main">
-              <a:ext uri="{FF2B5EF4-FFF2-40B4-BE49-F238E27FC236}">
-                <a16:creationId xmlns:a16="http://schemas.microsoft.com/office/drawing/2014/main" id="{4BC31118-C334-4087-8466-1DF4B49B2C15}"/>
+              <a:srgbClr val="B7D7DB"/>
+            </a:solidFill>
+            <a:prstDash val="solid"/>
+          </a:ln>
+        </p:spPr>
+      </p:sp>
+      <p:sp>
+        <p:nvSpPr>
+          <p:cNvPr id="18" name="">
+            <a:extLst xmlns:a="http://schemas.openxmlformats.org/drawingml/2006/main">
+              <a:ext uri="{FF2B5EF4-FFF2-40B4-BE49-F238E27FC236}">
+                <a16:creationId xmlns:a16="http://schemas.microsoft.com/office/drawing/2014/main" id="{39E73FBE-13F6-4C6E-A064-8C89817941FC}"/>
               </a:ext>
             </a:extLst>
           </p:cNvPr>
@@ -7994,7 +8344,7 @@
             <a:pPr algn="l">
               <a:defRPr sz="1050" b="1">
                 <a:solidFill>
-                  <a:srgbClr val="222222"/>
+                  <a:srgbClr val="007C89"/>
                 </a:solidFill>
                 <a:latin typeface="Aptos"/>
                 <a:ea typeface="Aptos"/>
@@ -8004,7 +8354,7 @@
             <a:r>
               <a:rPr sz="1050" b="1">
                 <a:solidFill>
-                  <a:srgbClr val="222222"/>
+                  <a:srgbClr val="007C89"/>
                 </a:solidFill>
                 <a:latin typeface="Aptos"/>
                 <a:ea typeface="Aptos"/>
@@ -8017,10 +8367,10 @@
       </p:sp>
       <p:sp>
         <p:nvSpPr>
-          <p:cNvPr id="18" name="">
-            <a:extLst xmlns:a="http://schemas.openxmlformats.org/drawingml/2006/main">
-              <a:ext uri="{FF2B5EF4-FFF2-40B4-BE49-F238E27FC236}">
-                <a16:creationId xmlns:a16="http://schemas.microsoft.com/office/drawing/2014/main" id="{3E75DC1F-D153-4D0B-AFC6-8C6C50D16FF8}"/>
+          <p:cNvPr id="19" name="">
+            <a:extLst xmlns:a="http://schemas.openxmlformats.org/drawingml/2006/main">
+              <a:ext uri="{FF2B5EF4-FFF2-40B4-BE49-F238E27FC236}">
+                <a16:creationId xmlns:a16="http://schemas.microsoft.com/office/drawing/2014/main" id="{6AA08AAC-590D-41FA-A532-6AC68DAD787D}"/>
               </a:ext>
             </a:extLst>
           </p:cNvPr>
@@ -8058,7 +8408,7 @@
             <a:pPr algn="l">
               <a:defRPr sz="1800" b="0">
                 <a:solidFill>
-                  <a:srgbClr val="222222"/>
+                  <a:srgbClr val="242424"/>
                 </a:solidFill>
                 <a:latin typeface="Aptos Mono"/>
                 <a:ea typeface="Aptos Mono"/>
@@ -8068,7 +8418,7 @@
             <a:r>
               <a:rPr sz="1800" b="0">
                 <a:solidFill>
-                  <a:srgbClr val="222222"/>
+                  <a:srgbClr val="242424"/>
                 </a:solidFill>
                 <a:latin typeface="Aptos Mono"/>
                 <a:ea typeface="Aptos Mono"/>
@@ -8081,10 +8431,10 @@
       </p:sp>
       <p:sp>
         <p:nvSpPr>
-          <p:cNvPr id="19" name="">
-            <a:extLst xmlns:a="http://schemas.openxmlformats.org/drawingml/2006/main">
-              <a:ext uri="{FF2B5EF4-FFF2-40B4-BE49-F238E27FC236}">
-                <a16:creationId xmlns:a16="http://schemas.microsoft.com/office/drawing/2014/main" id="{0B2728AC-9AFF-4528-97A3-8D7BB7BC861C}"/>
+          <p:cNvPr id="20" name="">
+            <a:extLst xmlns:a="http://schemas.openxmlformats.org/drawingml/2006/main">
+              <a:ext uri="{FF2B5EF4-FFF2-40B4-BE49-F238E27FC236}">
+                <a16:creationId xmlns:a16="http://schemas.microsoft.com/office/drawing/2014/main" id="{0513676D-6C69-49D3-AD9E-86B36BC3A822}"/>
               </a:ext>
             </a:extLst>
           </p:cNvPr>
@@ -8096,30 +8446,30 @@
         <p:spPr>
           <a:xfrm xmlns:a="http://schemas.openxmlformats.org/drawingml/2006/main">
             <a:off x="1619250" y="4933950"/>
-            <a:ext cx="38100" cy="38100"/>
-          </a:xfrm>
-          <a:prstGeom xmlns:a="http://schemas.openxmlformats.org/drawingml/2006/main" prst="rect">
-            <a:avLst/>
-          </a:prstGeom>
-          <a:solidFill xmlns:a="http://schemas.openxmlformats.org/drawingml/2006/main">
-            <a:srgbClr val="111111"/>
-          </a:solidFill>
-          <a:ln xmlns:a="http://schemas.openxmlformats.org/drawingml/2006/main" w="0">
-            <a:solidFill>
-              <a:srgbClr val="000000">
-                <a:alpha val="0"/>
-              </a:srgbClr>
-            </a:solidFill>
-            <a:prstDash val="solid"/>
-          </a:ln>
-        </p:spPr>
-      </p:sp>
-      <p:sp>
-        <p:nvSpPr>
-          <p:cNvPr id="20" name="">
-            <a:extLst xmlns:a="http://schemas.openxmlformats.org/drawingml/2006/main">
-              <a:ext uri="{FF2B5EF4-FFF2-40B4-BE49-F238E27FC236}">
-                <a16:creationId xmlns:a16="http://schemas.microsoft.com/office/drawing/2014/main" id="{950A2DAE-3493-4DCA-860E-D2B7B6C483CF}"/>
+            <a:ext cx="47625" cy="47625"/>
+          </a:xfrm>
+          <a:prstGeom xmlns:a="http://schemas.openxmlformats.org/drawingml/2006/main" prst="rect">
+            <a:avLst/>
+          </a:prstGeom>
+          <a:solidFill xmlns:a="http://schemas.openxmlformats.org/drawingml/2006/main">
+            <a:srgbClr val="1F4E79"/>
+          </a:solidFill>
+          <a:ln xmlns:a="http://schemas.openxmlformats.org/drawingml/2006/main" w="0">
+            <a:solidFill>
+              <a:srgbClr val="000000">
+                <a:alpha val="0"/>
+              </a:srgbClr>
+            </a:solidFill>
+            <a:prstDash val="solid"/>
+          </a:ln>
+        </p:spPr>
+      </p:sp>
+      <p:sp>
+        <p:nvSpPr>
+          <p:cNvPr id="21" name="">
+            <a:extLst xmlns:a="http://schemas.openxmlformats.org/drawingml/2006/main">
+              <a:ext uri="{FF2B5EF4-FFF2-40B4-BE49-F238E27FC236}">
+                <a16:creationId xmlns:a16="http://schemas.microsoft.com/office/drawing/2014/main" id="{361F604C-ACA6-48EC-9A97-4E4FBCBB8586}"/>
               </a:ext>
             </a:extLst>
           </p:cNvPr>
@@ -8157,7 +8507,7 @@
             <a:pPr algn="l">
               <a:defRPr sz="1350" b="0">
                 <a:solidFill>
-                  <a:srgbClr val="222222"/>
+                  <a:srgbClr val="242424"/>
                 </a:solidFill>
                 <a:latin typeface="Aptos"/>
                 <a:ea typeface="Aptos"/>
@@ -8167,7 +8517,7 @@
             <a:r>
               <a:rPr sz="1350" b="0">
                 <a:solidFill>
-                  <a:srgbClr val="222222"/>
+                  <a:srgbClr val="242424"/>
                 </a:solidFill>
                 <a:latin typeface="Aptos"/>
                 <a:ea typeface="Aptos"/>
@@ -8180,10 +8530,10 @@
       </p:sp>
       <p:sp>
         <p:nvSpPr>
-          <p:cNvPr id="21" name="">
-            <a:extLst xmlns:a="http://schemas.openxmlformats.org/drawingml/2006/main">
-              <a:ext uri="{FF2B5EF4-FFF2-40B4-BE49-F238E27FC236}">
-                <a16:creationId xmlns:a16="http://schemas.microsoft.com/office/drawing/2014/main" id="{53766962-1A8A-4767-A408-0D7043D54F1B}"/>
+          <p:cNvPr id="22" name="">
+            <a:extLst xmlns:a="http://schemas.openxmlformats.org/drawingml/2006/main">
+              <a:ext uri="{FF2B5EF4-FFF2-40B4-BE49-F238E27FC236}">
+                <a16:creationId xmlns:a16="http://schemas.microsoft.com/office/drawing/2014/main" id="{CCAFA602-ECA6-40A1-934B-6275D392F7CA}"/>
               </a:ext>
             </a:extLst>
           </p:cNvPr>
@@ -8195,30 +8545,30 @@
         <p:spPr>
           <a:xfrm xmlns:a="http://schemas.openxmlformats.org/drawingml/2006/main">
             <a:off x="1619250" y="5295900"/>
-            <a:ext cx="38100" cy="38100"/>
-          </a:xfrm>
-          <a:prstGeom xmlns:a="http://schemas.openxmlformats.org/drawingml/2006/main" prst="rect">
-            <a:avLst/>
-          </a:prstGeom>
-          <a:solidFill xmlns:a="http://schemas.openxmlformats.org/drawingml/2006/main">
-            <a:srgbClr val="111111"/>
-          </a:solidFill>
-          <a:ln xmlns:a="http://schemas.openxmlformats.org/drawingml/2006/main" w="0">
-            <a:solidFill>
-              <a:srgbClr val="000000">
-                <a:alpha val="0"/>
-              </a:srgbClr>
-            </a:solidFill>
-            <a:prstDash val="solid"/>
-          </a:ln>
-        </p:spPr>
-      </p:sp>
-      <p:sp>
-        <p:nvSpPr>
-          <p:cNvPr id="22" name="">
-            <a:extLst xmlns:a="http://schemas.openxmlformats.org/drawingml/2006/main">
-              <a:ext uri="{FF2B5EF4-FFF2-40B4-BE49-F238E27FC236}">
-                <a16:creationId xmlns:a16="http://schemas.microsoft.com/office/drawing/2014/main" id="{00568CF3-640E-44EA-B45A-F2439DF4E61F}"/>
+            <a:ext cx="47625" cy="47625"/>
+          </a:xfrm>
+          <a:prstGeom xmlns:a="http://schemas.openxmlformats.org/drawingml/2006/main" prst="rect">
+            <a:avLst/>
+          </a:prstGeom>
+          <a:solidFill xmlns:a="http://schemas.openxmlformats.org/drawingml/2006/main">
+            <a:srgbClr val="1F4E79"/>
+          </a:solidFill>
+          <a:ln xmlns:a="http://schemas.openxmlformats.org/drawingml/2006/main" w="0">
+            <a:solidFill>
+              <a:srgbClr val="000000">
+                <a:alpha val="0"/>
+              </a:srgbClr>
+            </a:solidFill>
+            <a:prstDash val="solid"/>
+          </a:ln>
+        </p:spPr>
+      </p:sp>
+      <p:sp>
+        <p:nvSpPr>
+          <p:cNvPr id="23" name="">
+            <a:extLst xmlns:a="http://schemas.openxmlformats.org/drawingml/2006/main">
+              <a:ext uri="{FF2B5EF4-FFF2-40B4-BE49-F238E27FC236}">
+                <a16:creationId xmlns:a16="http://schemas.microsoft.com/office/drawing/2014/main" id="{451A91C7-CB9B-4405-AB73-8629B61A8EB5}"/>
               </a:ext>
             </a:extLst>
           </p:cNvPr>
@@ -8256,7 +8606,7 @@
             <a:pPr algn="l">
               <a:defRPr sz="1350" b="0">
                 <a:solidFill>
-                  <a:srgbClr val="222222"/>
+                  <a:srgbClr val="242424"/>
                 </a:solidFill>
                 <a:latin typeface="Aptos"/>
                 <a:ea typeface="Aptos"/>
@@ -8266,7 +8616,7 @@
             <a:r>
               <a:rPr sz="1350" b="0">
                 <a:solidFill>
-                  <a:srgbClr val="222222"/>
+                  <a:srgbClr val="242424"/>
                 </a:solidFill>
                 <a:latin typeface="Aptos"/>
                 <a:ea typeface="Aptos"/>
@@ -8279,10 +8629,10 @@
       </p:sp>
       <p:sp>
         <p:nvSpPr>
-          <p:cNvPr id="23" name="">
-            <a:extLst xmlns:a="http://schemas.openxmlformats.org/drawingml/2006/main">
-              <a:ext uri="{FF2B5EF4-FFF2-40B4-BE49-F238E27FC236}">
-                <a16:creationId xmlns:a16="http://schemas.microsoft.com/office/drawing/2014/main" id="{DF2BCC90-9121-40F8-8F72-A083D48CE092}"/>
+          <p:cNvPr id="24" name="">
+            <a:extLst xmlns:a="http://schemas.openxmlformats.org/drawingml/2006/main">
+              <a:ext uri="{FF2B5EF4-FFF2-40B4-BE49-F238E27FC236}">
+                <a16:creationId xmlns:a16="http://schemas.microsoft.com/office/drawing/2014/main" id="{6607CD73-C378-4066-BFFF-A3CBDF566910}"/>
               </a:ext>
             </a:extLst>
           </p:cNvPr>
@@ -8294,30 +8644,30 @@
         <p:spPr>
           <a:xfrm xmlns:a="http://schemas.openxmlformats.org/drawingml/2006/main">
             <a:off x="1619250" y="5657850"/>
-            <a:ext cx="38100" cy="38100"/>
-          </a:xfrm>
-          <a:prstGeom xmlns:a="http://schemas.openxmlformats.org/drawingml/2006/main" prst="rect">
-            <a:avLst/>
-          </a:prstGeom>
-          <a:solidFill xmlns:a="http://schemas.openxmlformats.org/drawingml/2006/main">
-            <a:srgbClr val="111111"/>
-          </a:solidFill>
-          <a:ln xmlns:a="http://schemas.openxmlformats.org/drawingml/2006/main" w="0">
-            <a:solidFill>
-              <a:srgbClr val="000000">
-                <a:alpha val="0"/>
-              </a:srgbClr>
-            </a:solidFill>
-            <a:prstDash val="solid"/>
-          </a:ln>
-        </p:spPr>
-      </p:sp>
-      <p:sp>
-        <p:nvSpPr>
-          <p:cNvPr id="24" name="">
-            <a:extLst xmlns:a="http://schemas.openxmlformats.org/drawingml/2006/main">
-              <a:ext uri="{FF2B5EF4-FFF2-40B4-BE49-F238E27FC236}">
-                <a16:creationId xmlns:a16="http://schemas.microsoft.com/office/drawing/2014/main" id="{2E336CC9-A8F8-4F79-A27C-58346D18F40E}"/>
+            <a:ext cx="47625" cy="47625"/>
+          </a:xfrm>
+          <a:prstGeom xmlns:a="http://schemas.openxmlformats.org/drawingml/2006/main" prst="rect">
+            <a:avLst/>
+          </a:prstGeom>
+          <a:solidFill xmlns:a="http://schemas.openxmlformats.org/drawingml/2006/main">
+            <a:srgbClr val="1F4E79"/>
+          </a:solidFill>
+          <a:ln xmlns:a="http://schemas.openxmlformats.org/drawingml/2006/main" w="0">
+            <a:solidFill>
+              <a:srgbClr val="000000">
+                <a:alpha val="0"/>
+              </a:srgbClr>
+            </a:solidFill>
+            <a:prstDash val="solid"/>
+          </a:ln>
+        </p:spPr>
+      </p:sp>
+      <p:sp>
+        <p:nvSpPr>
+          <p:cNvPr id="25" name="">
+            <a:extLst xmlns:a="http://schemas.openxmlformats.org/drawingml/2006/main">
+              <a:ext uri="{FF2B5EF4-FFF2-40B4-BE49-F238E27FC236}">
+                <a16:creationId xmlns:a16="http://schemas.microsoft.com/office/drawing/2014/main" id="{35D088C8-8418-433F-90FB-4DA5FA0E0652}"/>
               </a:ext>
             </a:extLst>
           </p:cNvPr>
@@ -8355,7 +8705,7 @@
             <a:pPr algn="l">
               <a:defRPr sz="1350" b="0">
                 <a:solidFill>
-                  <a:srgbClr val="222222"/>
+                  <a:srgbClr val="242424"/>
                 </a:solidFill>
                 <a:latin typeface="Aptos"/>
                 <a:ea typeface="Aptos"/>
@@ -8365,7 +8715,7 @@
             <a:r>
               <a:rPr sz="1350" b="0">
                 <a:solidFill>
-                  <a:srgbClr val="222222"/>
+                  <a:srgbClr val="242424"/>
                 </a:solidFill>
                 <a:latin typeface="Aptos"/>
                 <a:ea typeface="Aptos"/>
@@ -8378,10 +8728,10 @@
       </p:sp>
       <p:sp>
         <p:nvSpPr>
-          <p:cNvPr id="25" name="">
-            <a:extLst xmlns:a="http://schemas.openxmlformats.org/drawingml/2006/main">
-              <a:ext uri="{FF2B5EF4-FFF2-40B4-BE49-F238E27FC236}">
-                <a16:creationId xmlns:a16="http://schemas.microsoft.com/office/drawing/2014/main" id="{96C1C824-1F91-4B11-9145-6413AE63FD02}"/>
+          <p:cNvPr id="26" name="">
+            <a:extLst xmlns:a="http://schemas.openxmlformats.org/drawingml/2006/main">
+              <a:ext uri="{FF2B5EF4-FFF2-40B4-BE49-F238E27FC236}">
+                <a16:creationId xmlns:a16="http://schemas.microsoft.com/office/drawing/2014/main" id="{43CB5037-0E61-434E-99B8-8B61CA9C6F3C}"/>
               </a:ext>
             </a:extLst>
           </p:cNvPr>
@@ -8399,24 +8749,24 @@
             <a:avLst/>
           </a:prstGeom>
           <a:solidFill xmlns:a="http://schemas.openxmlformats.org/drawingml/2006/main">
-            <a:srgbClr val="CFCFCF"/>
-          </a:solidFill>
-          <a:ln xmlns:a="http://schemas.openxmlformats.org/drawingml/2006/main" w="0">
-            <a:solidFill>
-              <a:srgbClr val="000000">
-                <a:alpha val="0"/>
-              </a:srgbClr>
-            </a:solidFill>
-            <a:prstDash val="solid"/>
-          </a:ln>
-        </p:spPr>
-      </p:sp>
-      <p:sp>
-        <p:nvSpPr>
-          <p:cNvPr id="26" name="">
-            <a:extLst xmlns:a="http://schemas.openxmlformats.org/drawingml/2006/main">
-              <a:ext uri="{FF2B5EF4-FFF2-40B4-BE49-F238E27FC236}">
-                <a16:creationId xmlns:a16="http://schemas.microsoft.com/office/drawing/2014/main" id="{5835B7F3-7255-4334-9CAB-C0625840D1AE}"/>
+            <a:srgbClr val="D4D8DD"/>
+          </a:solidFill>
+          <a:ln xmlns:a="http://schemas.openxmlformats.org/drawingml/2006/main" w="0">
+            <a:solidFill>
+              <a:srgbClr val="000000">
+                <a:alpha val="0"/>
+              </a:srgbClr>
+            </a:solidFill>
+            <a:prstDash val="solid"/>
+          </a:ln>
+        </p:spPr>
+      </p:sp>
+      <p:sp>
+        <p:nvSpPr>
+          <p:cNvPr id="27" name="">
+            <a:extLst xmlns:a="http://schemas.openxmlformats.org/drawingml/2006/main">
+              <a:ext uri="{FF2B5EF4-FFF2-40B4-BE49-F238E27FC236}">
+                <a16:creationId xmlns:a16="http://schemas.microsoft.com/office/drawing/2014/main" id="{92321892-C173-44C5-93B4-459F5DB9D0CD}"/>
               </a:ext>
             </a:extLst>
           </p:cNvPr>
@@ -8478,7 +8828,7 @@
     </p:spTree>
     <p:extLst>
       <p:ext uri="{BB962C8B-B14F-4D97-AF65-F5344CB8AC3E}">
-        <p14:creationId xmlns:p14="http://schemas.microsoft.com/office/powerpoint/2010/main" val="499066428"/>
+        <p14:creationId xmlns:p14="http://schemas.microsoft.com/office/powerpoint/2010/main" val="565637653"/>
       </p:ext>
     </p:extLst>
   </p:cSld>
@@ -8502,7 +8852,7 @@
           <p:cNvPr id="1" name="">
             <a:extLst xmlns:a="http://schemas.openxmlformats.org/drawingml/2006/main">
               <a:ext uri="{FF2B5EF4-FFF2-40B4-BE49-F238E27FC236}">
-                <a16:creationId xmlns:a16="http://schemas.microsoft.com/office/drawing/2014/main" id="{0B321C58-F3B2-4179-9179-5D18B69E3989}"/>
+                <a16:creationId xmlns:a16="http://schemas.microsoft.com/office/drawing/2014/main" id="{D083FAA0-8E02-43C2-8657-E7B248A0FC45}"/>
               </a:ext>
             </a:extLst>
           </p:cNvPr>
@@ -8537,7 +8887,7 @@
           <p:cNvPr id="2" name="">
             <a:extLst xmlns:a="http://schemas.openxmlformats.org/drawingml/2006/main">
               <a:ext uri="{FF2B5EF4-FFF2-40B4-BE49-F238E27FC236}">
-                <a16:creationId xmlns:a16="http://schemas.microsoft.com/office/drawing/2014/main" id="{50A2E805-A493-4482-9790-EDCA45EB507F}"/>
+                <a16:creationId xmlns:a16="http://schemas.microsoft.com/office/drawing/2014/main" id="{D88352B8-BF94-47FF-9480-AFA6F6829DE4}"/>
               </a:ext>
             </a:extLst>
           </p:cNvPr>
@@ -8601,7 +8951,7 @@
           <p:cNvPr id="3" name="">
             <a:extLst xmlns:a="http://schemas.openxmlformats.org/drawingml/2006/main">
               <a:ext uri="{FF2B5EF4-FFF2-40B4-BE49-F238E27FC236}">
-                <a16:creationId xmlns:a16="http://schemas.microsoft.com/office/drawing/2014/main" id="{F981EBBF-3B28-49FA-AF7B-619F07F64C66}"/>
+                <a16:creationId xmlns:a16="http://schemas.microsoft.com/office/drawing/2014/main" id="{96C4E9E4-135E-4160-B472-B11B531AD122}"/>
               </a:ext>
             </a:extLst>
           </p:cNvPr>
@@ -8665,7 +9015,7 @@
           <p:cNvPr id="4" name="">
             <a:extLst xmlns:a="http://schemas.openxmlformats.org/drawingml/2006/main">
               <a:ext uri="{FF2B5EF4-FFF2-40B4-BE49-F238E27FC236}">
-                <a16:creationId xmlns:a16="http://schemas.microsoft.com/office/drawing/2014/main" id="{781C1BBC-A2BA-47F1-B5C1-1FAA22BBD9ED}"/>
+                <a16:creationId xmlns:a16="http://schemas.microsoft.com/office/drawing/2014/main" id="{738D86A7-43F3-4CE0-9648-9D0024520178}"/>
               </a:ext>
             </a:extLst>
           </p:cNvPr>
@@ -8683,7 +9033,7 @@
             <a:avLst/>
           </a:prstGeom>
           <a:solidFill xmlns:a="http://schemas.openxmlformats.org/drawingml/2006/main">
-            <a:srgbClr val="CFCFCF"/>
+            <a:srgbClr val="D4D8DD"/>
           </a:solidFill>
           <a:ln xmlns:a="http://schemas.openxmlformats.org/drawingml/2006/main" w="0">
             <a:solidFill>
@@ -8700,7 +9050,42 @@
           <p:cNvPr id="5" name="">
             <a:extLst xmlns:a="http://schemas.openxmlformats.org/drawingml/2006/main">
               <a:ext uri="{FF2B5EF4-FFF2-40B4-BE49-F238E27FC236}">
-                <a16:creationId xmlns:a16="http://schemas.microsoft.com/office/drawing/2014/main" id="{4D5C578B-73F7-43BA-BA27-0AAE782FB3FB}"/>
+                <a16:creationId xmlns:a16="http://schemas.microsoft.com/office/drawing/2014/main" id="{0C1F05B5-3B8A-4F95-82D1-5664E5BFFF98}"/>
+              </a:ext>
+            </a:extLst>
+          </p:cNvPr>
+          <p:cNvSpPr>
+            <a:spLocks xmlns:a="http://schemas.openxmlformats.org/drawingml/2006/main" noGrp="1"/>
+          </p:cNvSpPr>
+          <p:nvPr/>
+        </p:nvSpPr>
+        <p:spPr>
+          <a:xfrm xmlns:a="http://schemas.openxmlformats.org/drawingml/2006/main">
+            <a:off x="609600" y="609600"/>
+            <a:ext cx="1524000" cy="19050"/>
+          </a:xfrm>
+          <a:prstGeom xmlns:a="http://schemas.openxmlformats.org/drawingml/2006/main" prst="rect">
+            <a:avLst/>
+          </a:prstGeom>
+          <a:solidFill xmlns:a="http://schemas.openxmlformats.org/drawingml/2006/main">
+            <a:srgbClr val="1F4E79"/>
+          </a:solidFill>
+          <a:ln xmlns:a="http://schemas.openxmlformats.org/drawingml/2006/main" w="0">
+            <a:solidFill>
+              <a:srgbClr val="000000">
+                <a:alpha val="0"/>
+              </a:srgbClr>
+            </a:solidFill>
+            <a:prstDash val="solid"/>
+          </a:ln>
+        </p:spPr>
+      </p:sp>
+      <p:sp>
+        <p:nvSpPr>
+          <p:cNvPr id="6" name="">
+            <a:extLst xmlns:a="http://schemas.openxmlformats.org/drawingml/2006/main">
+              <a:ext uri="{FF2B5EF4-FFF2-40B4-BE49-F238E27FC236}">
+                <a16:creationId xmlns:a16="http://schemas.microsoft.com/office/drawing/2014/main" id="{9A9EA8E1-7DD3-4A03-AB65-5F2A52985F95}"/>
               </a:ext>
             </a:extLst>
           </p:cNvPr>
@@ -8712,7 +9097,7 @@
         <p:spPr>
           <a:xfrm xmlns:a="http://schemas.openxmlformats.org/drawingml/2006/main">
             <a:off x="609600" y="819150"/>
-            <a:ext cx="10287000" cy="723900"/>
+            <a:ext cx="10287000" cy="742950"/>
           </a:xfrm>
           <a:prstGeom xmlns:a="http://schemas.openxmlformats.org/drawingml/2006/main" prst="rect">
             <a:avLst/>
@@ -8738,7 +9123,7 @@
             <a:pPr algn="l">
               <a:defRPr sz="2475" b="1">
                 <a:solidFill>
-                  <a:srgbClr val="111111"/>
+                  <a:srgbClr val="151515"/>
                 </a:solidFill>
                 <a:latin typeface="Aptos Display"/>
                 <a:ea typeface="Aptos Display"/>
@@ -8748,7 +9133,7 @@
             <a:r>
               <a:rPr sz="2475" b="1">
                 <a:solidFill>
-                  <a:srgbClr val="111111"/>
+                  <a:srgbClr val="151515"/>
                 </a:solidFill>
                 <a:latin typeface="Aptos Display"/>
                 <a:ea typeface="Aptos Display"/>
@@ -8761,10 +9146,10 @@
       </p:sp>
       <p:sp>
         <p:nvSpPr>
-          <p:cNvPr id="6" name="">
-            <a:extLst xmlns:a="http://schemas.openxmlformats.org/drawingml/2006/main">
-              <a:ext uri="{FF2B5EF4-FFF2-40B4-BE49-F238E27FC236}">
-                <a16:creationId xmlns:a16="http://schemas.microsoft.com/office/drawing/2014/main" id="{ED28D0FF-D6E1-4927-8852-2B9779B99E20}"/>
+          <p:cNvPr id="7" name="">
+            <a:extLst xmlns:a="http://schemas.openxmlformats.org/drawingml/2006/main">
+              <a:ext uri="{FF2B5EF4-FFF2-40B4-BE49-F238E27FC236}">
+                <a16:creationId xmlns:a16="http://schemas.microsoft.com/office/drawing/2014/main" id="{24882B2E-CA1C-4BD5-AB09-66C99692C0FE}"/>
               </a:ext>
             </a:extLst>
           </p:cNvPr>
@@ -8825,10 +9210,10 @@
       </p:sp>
       <p:sp>
         <p:nvSpPr>
-          <p:cNvPr id="7" name="">
-            <a:extLst xmlns:a="http://schemas.openxmlformats.org/drawingml/2006/main">
-              <a:ext uri="{FF2B5EF4-FFF2-40B4-BE49-F238E27FC236}">
-                <a16:creationId xmlns:a16="http://schemas.microsoft.com/office/drawing/2014/main" id="{80B439CD-EBF9-43CD-9711-F120D44391EA}"/>
+          <p:cNvPr id="8" name="">
+            <a:extLst xmlns:a="http://schemas.openxmlformats.org/drawingml/2006/main">
+              <a:ext uri="{FF2B5EF4-FFF2-40B4-BE49-F238E27FC236}">
+                <a16:creationId xmlns:a16="http://schemas.microsoft.com/office/drawing/2014/main" id="{4BE0E1EF-F8CF-444F-AF47-1A8EC6C1EEDD}"/>
               </a:ext>
             </a:extLst>
           </p:cNvPr>
@@ -8846,22 +9231,57 @@
             <a:avLst/>
           </a:prstGeom>
           <a:solidFill xmlns:a="http://schemas.openxmlformats.org/drawingml/2006/main">
-            <a:srgbClr val="FAFAFA"/>
+            <a:srgbClr val="EAF2F8"/>
           </a:solidFill>
           <a:ln xmlns:a="http://schemas.openxmlformats.org/drawingml/2006/main" w="9525">
             <a:solidFill>
-              <a:srgbClr val="CFCFCF"/>
-            </a:solidFill>
-            <a:prstDash val="solid"/>
-          </a:ln>
-        </p:spPr>
-      </p:sp>
-      <p:sp>
-        <p:nvSpPr>
-          <p:cNvPr id="8" name="">
-            <a:extLst xmlns:a="http://schemas.openxmlformats.org/drawingml/2006/main">
-              <a:ext uri="{FF2B5EF4-FFF2-40B4-BE49-F238E27FC236}">
-                <a16:creationId xmlns:a16="http://schemas.microsoft.com/office/drawing/2014/main" id="{513068EC-90E7-4FFD-8D8A-925FFBCFD572}"/>
+              <a:srgbClr val="B9CAD8"/>
+            </a:solidFill>
+            <a:prstDash val="solid"/>
+          </a:ln>
+        </p:spPr>
+      </p:sp>
+      <p:sp>
+        <p:nvSpPr>
+          <p:cNvPr id="9" name="">
+            <a:extLst xmlns:a="http://schemas.openxmlformats.org/drawingml/2006/main">
+              <a:ext uri="{FF2B5EF4-FFF2-40B4-BE49-F238E27FC236}">
+                <a16:creationId xmlns:a16="http://schemas.microsoft.com/office/drawing/2014/main" id="{CEDA1C23-DF7A-46DC-A102-1786C3F46D4B}"/>
+              </a:ext>
+            </a:extLst>
+          </p:cNvPr>
+          <p:cNvSpPr>
+            <a:spLocks xmlns:a="http://schemas.openxmlformats.org/drawingml/2006/main" noGrp="1"/>
+          </p:cNvSpPr>
+          <p:nvPr/>
+        </p:nvSpPr>
+        <p:spPr>
+          <a:xfrm xmlns:a="http://schemas.openxmlformats.org/drawingml/2006/main">
+            <a:off x="1066800" y="2495550"/>
+            <a:ext cx="5334000" cy="28575"/>
+          </a:xfrm>
+          <a:prstGeom xmlns:a="http://schemas.openxmlformats.org/drawingml/2006/main" prst="rect">
+            <a:avLst/>
+          </a:prstGeom>
+          <a:solidFill xmlns:a="http://schemas.openxmlformats.org/drawingml/2006/main">
+            <a:srgbClr val="1F4E79"/>
+          </a:solidFill>
+          <a:ln xmlns:a="http://schemas.openxmlformats.org/drawingml/2006/main" w="0">
+            <a:solidFill>
+              <a:srgbClr val="000000">
+                <a:alpha val="0"/>
+              </a:srgbClr>
+            </a:solidFill>
+            <a:prstDash val="solid"/>
+          </a:ln>
+        </p:spPr>
+      </p:sp>
+      <p:sp>
+        <p:nvSpPr>
+          <p:cNvPr id="10" name="">
+            <a:extLst xmlns:a="http://schemas.openxmlformats.org/drawingml/2006/main">
+              <a:ext uri="{FF2B5EF4-FFF2-40B4-BE49-F238E27FC236}">
+                <a16:creationId xmlns:a16="http://schemas.microsoft.com/office/drawing/2014/main" id="{529A7F4A-AA47-4531-92C3-01B7EAD1C07D}"/>
               </a:ext>
             </a:extLst>
           </p:cNvPr>
@@ -8899,7 +9319,7 @@
             <a:pPr algn="l">
               <a:defRPr sz="1575" b="0">
                 <a:solidFill>
-                  <a:srgbClr val="111111"/>
+                  <a:srgbClr val="151515"/>
                 </a:solidFill>
                 <a:latin typeface="Aptos Mono"/>
                 <a:ea typeface="Aptos Mono"/>
@@ -8909,7 +9329,7 @@
             <a:r>
               <a:rPr sz="1575" b="0">
                 <a:solidFill>
-                  <a:srgbClr val="111111"/>
+                  <a:srgbClr val="151515"/>
                 </a:solidFill>
                 <a:latin typeface="Aptos Mono"/>
                 <a:ea typeface="Aptos Mono"/>
@@ -8922,7 +9342,7 @@
             <a:pPr algn="l">
               <a:defRPr sz="1575" b="0">
                 <a:solidFill>
-                  <a:srgbClr val="111111"/>
+                  <a:srgbClr val="151515"/>
                 </a:solidFill>
                 <a:latin typeface="Aptos Mono"/>
                 <a:ea typeface="Aptos Mono"/>
@@ -8932,7 +9352,7 @@
             <a:r>
               <a:rPr sz="1575" b="0">
                 <a:solidFill>
-                  <a:srgbClr val="111111"/>
+                  <a:srgbClr val="151515"/>
                 </a:solidFill>
                 <a:latin typeface="Aptos Mono"/>
                 <a:ea typeface="Aptos Mono"/>
@@ -8945,7 +9365,7 @@
             <a:pPr algn="l">
               <a:defRPr sz="1575" b="0">
                 <a:solidFill>
-                  <a:srgbClr val="111111"/>
+                  <a:srgbClr val="151515"/>
                 </a:solidFill>
                 <a:latin typeface="Aptos Mono"/>
                 <a:ea typeface="Aptos Mono"/>
@@ -8955,7 +9375,7 @@
             <a:r>
               <a:rPr sz="1575" b="0">
                 <a:solidFill>
-                  <a:srgbClr val="111111"/>
+                  <a:srgbClr val="151515"/>
                 </a:solidFill>
                 <a:latin typeface="Aptos Mono"/>
                 <a:ea typeface="Aptos Mono"/>
@@ -8968,10 +9388,10 @@
       </p:sp>
       <p:sp>
         <p:nvSpPr>
-          <p:cNvPr id="9" name="">
-            <a:extLst xmlns:a="http://schemas.openxmlformats.org/drawingml/2006/main">
-              <a:ext uri="{FF2B5EF4-FFF2-40B4-BE49-F238E27FC236}">
-                <a16:creationId xmlns:a16="http://schemas.microsoft.com/office/drawing/2014/main" id="{766871C3-A857-44FE-8770-2D6687E9368D}"/>
+          <p:cNvPr id="11" name="">
+            <a:extLst xmlns:a="http://schemas.openxmlformats.org/drawingml/2006/main">
+              <a:ext uri="{FF2B5EF4-FFF2-40B4-BE49-F238E27FC236}">
+                <a16:creationId xmlns:a16="http://schemas.microsoft.com/office/drawing/2014/main" id="{F4C0F160-2DEB-4714-8B32-FD2AAA8C219A}"/>
               </a:ext>
             </a:extLst>
           </p:cNvPr>
@@ -8983,30 +9403,30 @@
         <p:spPr>
           <a:xfrm xmlns:a="http://schemas.openxmlformats.org/drawingml/2006/main">
             <a:off x="7239000" y="2552700"/>
-            <a:ext cx="38100" cy="38100"/>
-          </a:xfrm>
-          <a:prstGeom xmlns:a="http://schemas.openxmlformats.org/drawingml/2006/main" prst="rect">
-            <a:avLst/>
-          </a:prstGeom>
-          <a:solidFill xmlns:a="http://schemas.openxmlformats.org/drawingml/2006/main">
-            <a:srgbClr val="111111"/>
-          </a:solidFill>
-          <a:ln xmlns:a="http://schemas.openxmlformats.org/drawingml/2006/main" w="0">
-            <a:solidFill>
-              <a:srgbClr val="000000">
-                <a:alpha val="0"/>
-              </a:srgbClr>
-            </a:solidFill>
-            <a:prstDash val="solid"/>
-          </a:ln>
-        </p:spPr>
-      </p:sp>
-      <p:sp>
-        <p:nvSpPr>
-          <p:cNvPr id="10" name="">
-            <a:extLst xmlns:a="http://schemas.openxmlformats.org/drawingml/2006/main">
-              <a:ext uri="{FF2B5EF4-FFF2-40B4-BE49-F238E27FC236}">
-                <a16:creationId xmlns:a16="http://schemas.microsoft.com/office/drawing/2014/main" id="{9653114B-82A0-4B34-99A2-A7688773FA9A}"/>
+            <a:ext cx="47625" cy="47625"/>
+          </a:xfrm>
+          <a:prstGeom xmlns:a="http://schemas.openxmlformats.org/drawingml/2006/main" prst="rect">
+            <a:avLst/>
+          </a:prstGeom>
+          <a:solidFill xmlns:a="http://schemas.openxmlformats.org/drawingml/2006/main">
+            <a:srgbClr val="007C89"/>
+          </a:solidFill>
+          <a:ln xmlns:a="http://schemas.openxmlformats.org/drawingml/2006/main" w="0">
+            <a:solidFill>
+              <a:srgbClr val="000000">
+                <a:alpha val="0"/>
+              </a:srgbClr>
+            </a:solidFill>
+            <a:prstDash val="solid"/>
+          </a:ln>
+        </p:spPr>
+      </p:sp>
+      <p:sp>
+        <p:nvSpPr>
+          <p:cNvPr id="12" name="">
+            <a:extLst xmlns:a="http://schemas.openxmlformats.org/drawingml/2006/main">
+              <a:ext uri="{FF2B5EF4-FFF2-40B4-BE49-F238E27FC236}">
+                <a16:creationId xmlns:a16="http://schemas.microsoft.com/office/drawing/2014/main" id="{375F31D0-7A67-4BFD-B9CE-E5B6ED715758}"/>
               </a:ext>
             </a:extLst>
           </p:cNvPr>
@@ -9044,7 +9464,7 @@
             <a:pPr algn="l">
               <a:defRPr sz="1350" b="0">
                 <a:solidFill>
-                  <a:srgbClr val="222222"/>
+                  <a:srgbClr val="242424"/>
                 </a:solidFill>
                 <a:latin typeface="Aptos"/>
                 <a:ea typeface="Aptos"/>
@@ -9054,7 +9474,7 @@
             <a:r>
               <a:rPr sz="1350" b="0">
                 <a:solidFill>
-                  <a:srgbClr val="222222"/>
+                  <a:srgbClr val="242424"/>
                 </a:solidFill>
                 <a:latin typeface="Aptos"/>
                 <a:ea typeface="Aptos"/>
@@ -9067,10 +9487,10 @@
       </p:sp>
       <p:sp>
         <p:nvSpPr>
-          <p:cNvPr id="11" name="">
-            <a:extLst xmlns:a="http://schemas.openxmlformats.org/drawingml/2006/main">
-              <a:ext uri="{FF2B5EF4-FFF2-40B4-BE49-F238E27FC236}">
-                <a16:creationId xmlns:a16="http://schemas.microsoft.com/office/drawing/2014/main" id="{DB4A5251-1975-448B-AE29-1C0BE82A5A8A}"/>
+          <p:cNvPr id="13" name="">
+            <a:extLst xmlns:a="http://schemas.openxmlformats.org/drawingml/2006/main">
+              <a:ext uri="{FF2B5EF4-FFF2-40B4-BE49-F238E27FC236}">
+                <a16:creationId xmlns:a16="http://schemas.microsoft.com/office/drawing/2014/main" id="{DF9E622A-8E1B-4623-84E9-232AD5A4A8EC}"/>
               </a:ext>
             </a:extLst>
           </p:cNvPr>
@@ -9082,30 +9502,30 @@
         <p:spPr>
           <a:xfrm xmlns:a="http://schemas.openxmlformats.org/drawingml/2006/main">
             <a:off x="7239000" y="3105150"/>
-            <a:ext cx="38100" cy="38100"/>
-          </a:xfrm>
-          <a:prstGeom xmlns:a="http://schemas.openxmlformats.org/drawingml/2006/main" prst="rect">
-            <a:avLst/>
-          </a:prstGeom>
-          <a:solidFill xmlns:a="http://schemas.openxmlformats.org/drawingml/2006/main">
-            <a:srgbClr val="111111"/>
-          </a:solidFill>
-          <a:ln xmlns:a="http://schemas.openxmlformats.org/drawingml/2006/main" w="0">
-            <a:solidFill>
-              <a:srgbClr val="000000">
-                <a:alpha val="0"/>
-              </a:srgbClr>
-            </a:solidFill>
-            <a:prstDash val="solid"/>
-          </a:ln>
-        </p:spPr>
-      </p:sp>
-      <p:sp>
-        <p:nvSpPr>
-          <p:cNvPr id="12" name="">
-            <a:extLst xmlns:a="http://schemas.openxmlformats.org/drawingml/2006/main">
-              <a:ext uri="{FF2B5EF4-FFF2-40B4-BE49-F238E27FC236}">
-                <a16:creationId xmlns:a16="http://schemas.microsoft.com/office/drawing/2014/main" id="{08C36EA1-3A48-461C-B071-8F7964B582D7}"/>
+            <a:ext cx="47625" cy="47625"/>
+          </a:xfrm>
+          <a:prstGeom xmlns:a="http://schemas.openxmlformats.org/drawingml/2006/main" prst="rect">
+            <a:avLst/>
+          </a:prstGeom>
+          <a:solidFill xmlns:a="http://schemas.openxmlformats.org/drawingml/2006/main">
+            <a:srgbClr val="007C89"/>
+          </a:solidFill>
+          <a:ln xmlns:a="http://schemas.openxmlformats.org/drawingml/2006/main" w="0">
+            <a:solidFill>
+              <a:srgbClr val="000000">
+                <a:alpha val="0"/>
+              </a:srgbClr>
+            </a:solidFill>
+            <a:prstDash val="solid"/>
+          </a:ln>
+        </p:spPr>
+      </p:sp>
+      <p:sp>
+        <p:nvSpPr>
+          <p:cNvPr id="14" name="">
+            <a:extLst xmlns:a="http://schemas.openxmlformats.org/drawingml/2006/main">
+              <a:ext uri="{FF2B5EF4-FFF2-40B4-BE49-F238E27FC236}">
+                <a16:creationId xmlns:a16="http://schemas.microsoft.com/office/drawing/2014/main" id="{5A13F5A3-13A0-46FC-82DD-4DB4029B44A4}"/>
               </a:ext>
             </a:extLst>
           </p:cNvPr>
@@ -9143,7 +9563,7 @@
             <a:pPr algn="l">
               <a:defRPr sz="1350" b="0">
                 <a:solidFill>
-                  <a:srgbClr val="222222"/>
+                  <a:srgbClr val="242424"/>
                 </a:solidFill>
                 <a:latin typeface="Aptos"/>
                 <a:ea typeface="Aptos"/>
@@ -9153,7 +9573,7 @@
             <a:r>
               <a:rPr sz="1350" b="0">
                 <a:solidFill>
-                  <a:srgbClr val="222222"/>
+                  <a:srgbClr val="242424"/>
                 </a:solidFill>
                 <a:latin typeface="Aptos"/>
                 <a:ea typeface="Aptos"/>
@@ -9166,10 +9586,10 @@
       </p:sp>
       <p:sp>
         <p:nvSpPr>
-          <p:cNvPr id="13" name="">
-            <a:extLst xmlns:a="http://schemas.openxmlformats.org/drawingml/2006/main">
-              <a:ext uri="{FF2B5EF4-FFF2-40B4-BE49-F238E27FC236}">
-                <a16:creationId xmlns:a16="http://schemas.microsoft.com/office/drawing/2014/main" id="{F18C3705-E0DF-479A-B262-C43FDE4F43BD}"/>
+          <p:cNvPr id="15" name="">
+            <a:extLst xmlns:a="http://schemas.openxmlformats.org/drawingml/2006/main">
+              <a:ext uri="{FF2B5EF4-FFF2-40B4-BE49-F238E27FC236}">
+                <a16:creationId xmlns:a16="http://schemas.microsoft.com/office/drawing/2014/main" id="{DFD925A4-2D1B-49AC-B6A9-CC419FA2B9A5}"/>
               </a:ext>
             </a:extLst>
           </p:cNvPr>
@@ -9181,30 +9601,30 @@
         <p:spPr>
           <a:xfrm xmlns:a="http://schemas.openxmlformats.org/drawingml/2006/main">
             <a:off x="7239000" y="3657600"/>
-            <a:ext cx="38100" cy="38100"/>
-          </a:xfrm>
-          <a:prstGeom xmlns:a="http://schemas.openxmlformats.org/drawingml/2006/main" prst="rect">
-            <a:avLst/>
-          </a:prstGeom>
-          <a:solidFill xmlns:a="http://schemas.openxmlformats.org/drawingml/2006/main">
-            <a:srgbClr val="111111"/>
-          </a:solidFill>
-          <a:ln xmlns:a="http://schemas.openxmlformats.org/drawingml/2006/main" w="0">
-            <a:solidFill>
-              <a:srgbClr val="000000">
-                <a:alpha val="0"/>
-              </a:srgbClr>
-            </a:solidFill>
-            <a:prstDash val="solid"/>
-          </a:ln>
-        </p:spPr>
-      </p:sp>
-      <p:sp>
-        <p:nvSpPr>
-          <p:cNvPr id="14" name="">
-            <a:extLst xmlns:a="http://schemas.openxmlformats.org/drawingml/2006/main">
-              <a:ext uri="{FF2B5EF4-FFF2-40B4-BE49-F238E27FC236}">
-                <a16:creationId xmlns:a16="http://schemas.microsoft.com/office/drawing/2014/main" id="{54EC1943-466E-4CFB-8708-027C2C888128}"/>
+            <a:ext cx="47625" cy="47625"/>
+          </a:xfrm>
+          <a:prstGeom xmlns:a="http://schemas.openxmlformats.org/drawingml/2006/main" prst="rect">
+            <a:avLst/>
+          </a:prstGeom>
+          <a:solidFill xmlns:a="http://schemas.openxmlformats.org/drawingml/2006/main">
+            <a:srgbClr val="007C89"/>
+          </a:solidFill>
+          <a:ln xmlns:a="http://schemas.openxmlformats.org/drawingml/2006/main" w="0">
+            <a:solidFill>
+              <a:srgbClr val="000000">
+                <a:alpha val="0"/>
+              </a:srgbClr>
+            </a:solidFill>
+            <a:prstDash val="solid"/>
+          </a:ln>
+        </p:spPr>
+      </p:sp>
+      <p:sp>
+        <p:nvSpPr>
+          <p:cNvPr id="16" name="">
+            <a:extLst xmlns:a="http://schemas.openxmlformats.org/drawingml/2006/main">
+              <a:ext uri="{FF2B5EF4-FFF2-40B4-BE49-F238E27FC236}">
+                <a16:creationId xmlns:a16="http://schemas.microsoft.com/office/drawing/2014/main" id="{99A032DC-F8E9-437B-B466-A5025DA932C0}"/>
               </a:ext>
             </a:extLst>
           </p:cNvPr>
@@ -9242,7 +9662,7 @@
             <a:pPr algn="l">
               <a:defRPr sz="1350" b="0">
                 <a:solidFill>
-                  <a:srgbClr val="222222"/>
+                  <a:srgbClr val="242424"/>
                 </a:solidFill>
                 <a:latin typeface="Aptos"/>
                 <a:ea typeface="Aptos"/>
@@ -9252,7 +9672,7 @@
             <a:r>
               <a:rPr sz="1350" b="0">
                 <a:solidFill>
-                  <a:srgbClr val="222222"/>
+                  <a:srgbClr val="242424"/>
                 </a:solidFill>
                 <a:latin typeface="Aptos"/>
                 <a:ea typeface="Aptos"/>
@@ -9265,10 +9685,10 @@
       </p:sp>
       <p:sp>
         <p:nvSpPr>
-          <p:cNvPr id="15" name="">
-            <a:extLst xmlns:a="http://schemas.openxmlformats.org/drawingml/2006/main">
-              <a:ext uri="{FF2B5EF4-FFF2-40B4-BE49-F238E27FC236}">
-                <a16:creationId xmlns:a16="http://schemas.microsoft.com/office/drawing/2014/main" id="{0DA99749-E7E1-4698-8B17-596B7E72D2F3}"/>
+          <p:cNvPr id="17" name="">
+            <a:extLst xmlns:a="http://schemas.openxmlformats.org/drawingml/2006/main">
+              <a:ext uri="{FF2B5EF4-FFF2-40B4-BE49-F238E27FC236}">
+                <a16:creationId xmlns:a16="http://schemas.microsoft.com/office/drawing/2014/main" id="{B4476316-7E4F-4C02-9014-67D96A1E4E30}"/>
               </a:ext>
             </a:extLst>
           </p:cNvPr>
@@ -9329,10 +9749,10 @@
       </p:sp>
       <p:sp>
         <p:nvSpPr>
-          <p:cNvPr id="16" name="">
-            <a:extLst xmlns:a="http://schemas.openxmlformats.org/drawingml/2006/main">
-              <a:ext uri="{FF2B5EF4-FFF2-40B4-BE49-F238E27FC236}">
-                <a16:creationId xmlns:a16="http://schemas.microsoft.com/office/drawing/2014/main" id="{9ADF7F62-7197-4C26-B0C9-61D412138F95}"/>
+          <p:cNvPr id="18" name="">
+            <a:extLst xmlns:a="http://schemas.openxmlformats.org/drawingml/2006/main">
+              <a:ext uri="{FF2B5EF4-FFF2-40B4-BE49-F238E27FC236}">
+                <a16:creationId xmlns:a16="http://schemas.microsoft.com/office/drawing/2014/main" id="{E0A5E35D-6464-45E5-A7DC-9675362F752D}"/>
               </a:ext>
             </a:extLst>
           </p:cNvPr>
@@ -9350,24 +9770,24 @@
             <a:avLst/>
           </a:prstGeom>
           <a:solidFill xmlns:a="http://schemas.openxmlformats.org/drawingml/2006/main">
-            <a:srgbClr val="CFCFCF"/>
-          </a:solidFill>
-          <a:ln xmlns:a="http://schemas.openxmlformats.org/drawingml/2006/main" w="0">
-            <a:solidFill>
-              <a:srgbClr val="000000">
-                <a:alpha val="0"/>
-              </a:srgbClr>
-            </a:solidFill>
-            <a:prstDash val="solid"/>
-          </a:ln>
-        </p:spPr>
-      </p:sp>
-      <p:sp>
-        <p:nvSpPr>
-          <p:cNvPr id="17" name="">
-            <a:extLst xmlns:a="http://schemas.openxmlformats.org/drawingml/2006/main">
-              <a:ext uri="{FF2B5EF4-FFF2-40B4-BE49-F238E27FC236}">
-                <a16:creationId xmlns:a16="http://schemas.microsoft.com/office/drawing/2014/main" id="{2B6EE869-139F-46C8-861B-920292AFA7CC}"/>
+            <a:srgbClr val="D4D8DD"/>
+          </a:solidFill>
+          <a:ln xmlns:a="http://schemas.openxmlformats.org/drawingml/2006/main" w="0">
+            <a:solidFill>
+              <a:srgbClr val="000000">
+                <a:alpha val="0"/>
+              </a:srgbClr>
+            </a:solidFill>
+            <a:prstDash val="solid"/>
+          </a:ln>
+        </p:spPr>
+      </p:sp>
+      <p:sp>
+        <p:nvSpPr>
+          <p:cNvPr id="19" name="">
+            <a:extLst xmlns:a="http://schemas.openxmlformats.org/drawingml/2006/main">
+              <a:ext uri="{FF2B5EF4-FFF2-40B4-BE49-F238E27FC236}">
+                <a16:creationId xmlns:a16="http://schemas.microsoft.com/office/drawing/2014/main" id="{43375DDD-4978-4AE2-9EE5-7A1FCBA21F74}"/>
               </a:ext>
             </a:extLst>
           </p:cNvPr>
@@ -9429,7 +9849,7 @@
     </p:spTree>
     <p:extLst>
       <p:ext uri="{BB962C8B-B14F-4D97-AF65-F5344CB8AC3E}">
-        <p14:creationId xmlns:p14="http://schemas.microsoft.com/office/powerpoint/2010/main" val="881624430"/>
+        <p14:creationId xmlns:p14="http://schemas.microsoft.com/office/powerpoint/2010/main" val="874311106"/>
       </p:ext>
     </p:extLst>
   </p:cSld>
@@ -9453,7 +9873,7 @@
           <p:cNvPr id="1" name="">
             <a:extLst xmlns:a="http://schemas.openxmlformats.org/drawingml/2006/main">
               <a:ext uri="{FF2B5EF4-FFF2-40B4-BE49-F238E27FC236}">
-                <a16:creationId xmlns:a16="http://schemas.microsoft.com/office/drawing/2014/main" id="{D9C66993-58ED-4CB5-8F9B-B50C333015FE}"/>
+                <a16:creationId xmlns:a16="http://schemas.microsoft.com/office/drawing/2014/main" id="{7F9DB499-61CF-4050-86C1-BA9FC54EDC88}"/>
               </a:ext>
             </a:extLst>
           </p:cNvPr>
@@ -9488,7 +9908,7 @@
           <p:cNvPr id="2" name="">
             <a:extLst xmlns:a="http://schemas.openxmlformats.org/drawingml/2006/main">
               <a:ext uri="{FF2B5EF4-FFF2-40B4-BE49-F238E27FC236}">
-                <a16:creationId xmlns:a16="http://schemas.microsoft.com/office/drawing/2014/main" id="{8952A9B9-D467-44DC-96F7-CB1518B0EFD1}"/>
+                <a16:creationId xmlns:a16="http://schemas.microsoft.com/office/drawing/2014/main" id="{14B7B559-09D3-4E2C-BB9C-DF5481B19DDB}"/>
               </a:ext>
             </a:extLst>
           </p:cNvPr>
@@ -9552,7 +9972,7 @@
           <p:cNvPr id="3" name="">
             <a:extLst xmlns:a="http://schemas.openxmlformats.org/drawingml/2006/main">
               <a:ext uri="{FF2B5EF4-FFF2-40B4-BE49-F238E27FC236}">
-                <a16:creationId xmlns:a16="http://schemas.microsoft.com/office/drawing/2014/main" id="{D8025B17-A62C-486B-A3E4-A153B2080F92}"/>
+                <a16:creationId xmlns:a16="http://schemas.microsoft.com/office/drawing/2014/main" id="{15726089-F99A-48BE-8256-CAE67B8FEECC}"/>
               </a:ext>
             </a:extLst>
           </p:cNvPr>
@@ -9616,7 +10036,7 @@
           <p:cNvPr id="4" name="">
             <a:extLst xmlns:a="http://schemas.openxmlformats.org/drawingml/2006/main">
               <a:ext uri="{FF2B5EF4-FFF2-40B4-BE49-F238E27FC236}">
-                <a16:creationId xmlns:a16="http://schemas.microsoft.com/office/drawing/2014/main" id="{51DB6575-9B70-4006-99B8-36A05E374051}"/>
+                <a16:creationId xmlns:a16="http://schemas.microsoft.com/office/drawing/2014/main" id="{3BA2304F-6CFA-4CCB-839A-3D633EDF372C}"/>
               </a:ext>
             </a:extLst>
           </p:cNvPr>
@@ -9634,7 +10054,7 @@
             <a:avLst/>
           </a:prstGeom>
           <a:solidFill xmlns:a="http://schemas.openxmlformats.org/drawingml/2006/main">
-            <a:srgbClr val="CFCFCF"/>
+            <a:srgbClr val="D4D8DD"/>
           </a:solidFill>
           <a:ln xmlns:a="http://schemas.openxmlformats.org/drawingml/2006/main" w="0">
             <a:solidFill>
@@ -9651,7 +10071,42 @@
           <p:cNvPr id="5" name="">
             <a:extLst xmlns:a="http://schemas.openxmlformats.org/drawingml/2006/main">
               <a:ext uri="{FF2B5EF4-FFF2-40B4-BE49-F238E27FC236}">
-                <a16:creationId xmlns:a16="http://schemas.microsoft.com/office/drawing/2014/main" id="{B19DE331-4B0F-40F9-AC6F-19E848BC6605}"/>
+                <a16:creationId xmlns:a16="http://schemas.microsoft.com/office/drawing/2014/main" id="{F9D9B708-5FAF-44B1-9DF4-1C2E91FCEA7B}"/>
+              </a:ext>
+            </a:extLst>
+          </p:cNvPr>
+          <p:cNvSpPr>
+            <a:spLocks xmlns:a="http://schemas.openxmlformats.org/drawingml/2006/main" noGrp="1"/>
+          </p:cNvSpPr>
+          <p:nvPr/>
+        </p:nvSpPr>
+        <p:spPr>
+          <a:xfrm xmlns:a="http://schemas.openxmlformats.org/drawingml/2006/main">
+            <a:off x="609600" y="609600"/>
+            <a:ext cx="1524000" cy="19050"/>
+          </a:xfrm>
+          <a:prstGeom xmlns:a="http://schemas.openxmlformats.org/drawingml/2006/main" prst="rect">
+            <a:avLst/>
+          </a:prstGeom>
+          <a:solidFill xmlns:a="http://schemas.openxmlformats.org/drawingml/2006/main">
+            <a:srgbClr val="007C89"/>
+          </a:solidFill>
+          <a:ln xmlns:a="http://schemas.openxmlformats.org/drawingml/2006/main" w="0">
+            <a:solidFill>
+              <a:srgbClr val="000000">
+                <a:alpha val="0"/>
+              </a:srgbClr>
+            </a:solidFill>
+            <a:prstDash val="solid"/>
+          </a:ln>
+        </p:spPr>
+      </p:sp>
+      <p:sp>
+        <p:nvSpPr>
+          <p:cNvPr id="6" name="">
+            <a:extLst xmlns:a="http://schemas.openxmlformats.org/drawingml/2006/main">
+              <a:ext uri="{FF2B5EF4-FFF2-40B4-BE49-F238E27FC236}">
+                <a16:creationId xmlns:a16="http://schemas.microsoft.com/office/drawing/2014/main" id="{708B77A3-864B-4B54-85D4-6688DF4E0212}"/>
               </a:ext>
             </a:extLst>
           </p:cNvPr>
@@ -9663,7 +10118,7 @@
         <p:spPr>
           <a:xfrm xmlns:a="http://schemas.openxmlformats.org/drawingml/2006/main">
             <a:off x="609600" y="819150"/>
-            <a:ext cx="10191750" cy="723900"/>
+            <a:ext cx="10191750" cy="742950"/>
           </a:xfrm>
           <a:prstGeom xmlns:a="http://schemas.openxmlformats.org/drawingml/2006/main" prst="rect">
             <a:avLst/>
@@ -9689,7 +10144,7 @@
             <a:pPr algn="l">
               <a:defRPr sz="2475" b="1">
                 <a:solidFill>
-                  <a:srgbClr val="111111"/>
+                  <a:srgbClr val="151515"/>
                 </a:solidFill>
                 <a:latin typeface="Aptos Display"/>
                 <a:ea typeface="Aptos Display"/>
@@ -9699,7 +10154,7 @@
             <a:r>
               <a:rPr sz="2475" b="1">
                 <a:solidFill>
-                  <a:srgbClr val="111111"/>
+                  <a:srgbClr val="151515"/>
                 </a:solidFill>
                 <a:latin typeface="Aptos Display"/>
                 <a:ea typeface="Aptos Display"/>
@@ -9712,10 +10167,10 @@
       </p:sp>
       <p:sp>
         <p:nvSpPr>
-          <p:cNvPr id="6" name="">
-            <a:extLst xmlns:a="http://schemas.openxmlformats.org/drawingml/2006/main">
-              <a:ext uri="{FF2B5EF4-FFF2-40B4-BE49-F238E27FC236}">
-                <a16:creationId xmlns:a16="http://schemas.microsoft.com/office/drawing/2014/main" id="{090C274A-20AD-44FA-897D-4200C697A046}"/>
+          <p:cNvPr id="7" name="">
+            <a:extLst xmlns:a="http://schemas.openxmlformats.org/drawingml/2006/main">
+              <a:ext uri="{FF2B5EF4-FFF2-40B4-BE49-F238E27FC236}">
+                <a16:creationId xmlns:a16="http://schemas.microsoft.com/office/drawing/2014/main" id="{3260F4E2-3D9D-42B0-9C24-E93B065DA09F}"/>
               </a:ext>
             </a:extLst>
           </p:cNvPr>
@@ -9733,22 +10188,22 @@
             <a:avLst/>
           </a:prstGeom>
           <a:solidFill xmlns:a="http://schemas.openxmlformats.org/drawingml/2006/main">
-            <a:srgbClr val="FFFFFF"/>
+            <a:srgbClr val="F7F8FA"/>
           </a:solidFill>
           <a:ln xmlns:a="http://schemas.openxmlformats.org/drawingml/2006/main" w="9525">
             <a:solidFill>
-              <a:srgbClr val="CFCFCF"/>
-            </a:solidFill>
-            <a:prstDash val="solid"/>
-          </a:ln>
-        </p:spPr>
-      </p:sp>
-      <p:sp>
-        <p:nvSpPr>
-          <p:cNvPr id="7" name="">
-            <a:extLst xmlns:a="http://schemas.openxmlformats.org/drawingml/2006/main">
-              <a:ext uri="{FF2B5EF4-FFF2-40B4-BE49-F238E27FC236}">
-                <a16:creationId xmlns:a16="http://schemas.microsoft.com/office/drawing/2014/main" id="{4C4EFF9A-F092-468F-8E76-4691A2DD22E1}"/>
+              <a:srgbClr val="D4D8DD"/>
+            </a:solidFill>
+            <a:prstDash val="solid"/>
+          </a:ln>
+        </p:spPr>
+      </p:sp>
+      <p:sp>
+        <p:nvSpPr>
+          <p:cNvPr id="8" name="">
+            <a:extLst xmlns:a="http://schemas.openxmlformats.org/drawingml/2006/main">
+              <a:ext uri="{FF2B5EF4-FFF2-40B4-BE49-F238E27FC236}">
+                <a16:creationId xmlns:a16="http://schemas.microsoft.com/office/drawing/2014/main" id="{90301004-EE32-4097-B20D-7ECF283D70EE}"/>
               </a:ext>
             </a:extLst>
           </p:cNvPr>
@@ -9786,7 +10241,7 @@
             <a:pPr algn="l">
               <a:defRPr sz="1650" b="1">
                 <a:solidFill>
-                  <a:srgbClr val="222222"/>
+                  <a:srgbClr val="242424"/>
                 </a:solidFill>
                 <a:latin typeface="Aptos"/>
                 <a:ea typeface="Aptos"/>
@@ -9796,7 +10251,7 @@
             <a:r>
               <a:rPr sz="1650" b="1">
                 <a:solidFill>
-                  <a:srgbClr val="222222"/>
+                  <a:srgbClr val="242424"/>
                 </a:solidFill>
                 <a:latin typeface="Aptos"/>
                 <a:ea typeface="Aptos"/>
@@ -9809,10 +10264,10 @@
       </p:sp>
       <p:sp>
         <p:nvSpPr>
-          <p:cNvPr id="8" name="">
-            <a:extLst xmlns:a="http://schemas.openxmlformats.org/drawingml/2006/main">
-              <a:ext uri="{FF2B5EF4-FFF2-40B4-BE49-F238E27FC236}">
-                <a16:creationId xmlns:a16="http://schemas.microsoft.com/office/drawing/2014/main" id="{916D1743-9F24-47CD-B3BC-1AE19AB1A827}"/>
+          <p:cNvPr id="9" name="">
+            <a:extLst xmlns:a="http://schemas.openxmlformats.org/drawingml/2006/main">
+              <a:ext uri="{FF2B5EF4-FFF2-40B4-BE49-F238E27FC236}">
+                <a16:creationId xmlns:a16="http://schemas.microsoft.com/office/drawing/2014/main" id="{265B6334-89C5-41BE-93ED-8F0BAAB4FADD}"/>
               </a:ext>
             </a:extLst>
           </p:cNvPr>
@@ -9850,7 +10305,7 @@
             <a:pPr algn="l">
               <a:defRPr sz="1575" b="0">
                 <a:solidFill>
-                  <a:srgbClr val="222222"/>
+                  <a:srgbClr val="242424"/>
                 </a:solidFill>
                 <a:latin typeface="Aptos Mono"/>
                 <a:ea typeface="Aptos Mono"/>
@@ -9860,7 +10315,7 @@
             <a:r>
               <a:rPr sz="1575" b="0">
                 <a:solidFill>
-                  <a:srgbClr val="222222"/>
+                  <a:srgbClr val="242424"/>
                 </a:solidFill>
                 <a:latin typeface="Aptos Mono"/>
                 <a:ea typeface="Aptos Mono"/>
@@ -9873,7 +10328,7 @@
             <a:pPr algn="l">
               <a:defRPr sz="1575" b="0">
                 <a:solidFill>
-                  <a:srgbClr val="222222"/>
+                  <a:srgbClr val="242424"/>
                 </a:solidFill>
                 <a:latin typeface="Aptos Mono"/>
                 <a:ea typeface="Aptos Mono"/>
@@ -9883,7 +10338,7 @@
             <a:r>
               <a:rPr sz="1575" b="0">
                 <a:solidFill>
-                  <a:srgbClr val="222222"/>
+                  <a:srgbClr val="242424"/>
                 </a:solidFill>
                 <a:latin typeface="Aptos Mono"/>
                 <a:ea typeface="Aptos Mono"/>
@@ -9896,7 +10351,7 @@
             <a:pPr algn="l">
               <a:defRPr sz="1575" b="0">
                 <a:solidFill>
-                  <a:srgbClr val="222222"/>
+                  <a:srgbClr val="242424"/>
                 </a:solidFill>
                 <a:latin typeface="Aptos Mono"/>
                 <a:ea typeface="Aptos Mono"/>
@@ -9906,7 +10361,7 @@
             <a:r>
               <a:rPr sz="1575" b="0">
                 <a:solidFill>
-                  <a:srgbClr val="222222"/>
+                  <a:srgbClr val="242424"/>
                 </a:solidFill>
                 <a:latin typeface="Aptos Mono"/>
                 <a:ea typeface="Aptos Mono"/>
@@ -9919,10 +10374,10 @@
       </p:sp>
       <p:sp>
         <p:nvSpPr>
-          <p:cNvPr id="9" name="">
-            <a:extLst xmlns:a="http://schemas.openxmlformats.org/drawingml/2006/main">
-              <a:ext uri="{FF2B5EF4-FFF2-40B4-BE49-F238E27FC236}">
-                <a16:creationId xmlns:a16="http://schemas.microsoft.com/office/drawing/2014/main" id="{408ABB98-89C1-464A-AB57-F1FA007AB3BC}"/>
+          <p:cNvPr id="10" name="">
+            <a:extLst xmlns:a="http://schemas.openxmlformats.org/drawingml/2006/main">
+              <a:ext uri="{FF2B5EF4-FFF2-40B4-BE49-F238E27FC236}">
+                <a16:creationId xmlns:a16="http://schemas.microsoft.com/office/drawing/2014/main" id="{7C21423A-8184-45B1-9866-67DC370D519E}"/>
               </a:ext>
             </a:extLst>
           </p:cNvPr>
@@ -9940,22 +10395,22 @@
             <a:avLst/>
           </a:prstGeom>
           <a:solidFill xmlns:a="http://schemas.openxmlformats.org/drawingml/2006/main">
-            <a:srgbClr val="FFFFFF"/>
+            <a:srgbClr val="E8F6F7"/>
           </a:solidFill>
           <a:ln xmlns:a="http://schemas.openxmlformats.org/drawingml/2006/main" w="9525">
             <a:solidFill>
-              <a:srgbClr val="CFCFCF"/>
-            </a:solidFill>
-            <a:prstDash val="solid"/>
-          </a:ln>
-        </p:spPr>
-      </p:sp>
-      <p:sp>
-        <p:nvSpPr>
-          <p:cNvPr id="10" name="">
-            <a:extLst xmlns:a="http://schemas.openxmlformats.org/drawingml/2006/main">
-              <a:ext uri="{FF2B5EF4-FFF2-40B4-BE49-F238E27FC236}">
-                <a16:creationId xmlns:a16="http://schemas.microsoft.com/office/drawing/2014/main" id="{86FD0226-781A-4417-9BD3-3B403FC189BB}"/>
+              <a:srgbClr val="B7D7DB"/>
+            </a:solidFill>
+            <a:prstDash val="solid"/>
+          </a:ln>
+        </p:spPr>
+      </p:sp>
+      <p:sp>
+        <p:nvSpPr>
+          <p:cNvPr id="11" name="">
+            <a:extLst xmlns:a="http://schemas.openxmlformats.org/drawingml/2006/main">
+              <a:ext uri="{FF2B5EF4-FFF2-40B4-BE49-F238E27FC236}">
+                <a16:creationId xmlns:a16="http://schemas.microsoft.com/office/drawing/2014/main" id="{0A042F69-E5A8-4EFF-B078-60D1615B1730}"/>
               </a:ext>
             </a:extLst>
           </p:cNvPr>
@@ -9993,7 +10448,7 @@
             <a:pPr algn="l">
               <a:defRPr sz="1650" b="1">
                 <a:solidFill>
-                  <a:srgbClr val="222222"/>
+                  <a:srgbClr val="007C89"/>
                 </a:solidFill>
                 <a:latin typeface="Aptos"/>
                 <a:ea typeface="Aptos"/>
@@ -10003,7 +10458,7 @@
             <a:r>
               <a:rPr sz="1650" b="1">
                 <a:solidFill>
-                  <a:srgbClr val="222222"/>
+                  <a:srgbClr val="007C89"/>
                 </a:solidFill>
                 <a:latin typeface="Aptos"/>
                 <a:ea typeface="Aptos"/>
@@ -10016,10 +10471,10 @@
       </p:sp>
       <p:sp>
         <p:nvSpPr>
-          <p:cNvPr id="11" name="">
-            <a:extLst xmlns:a="http://schemas.openxmlformats.org/drawingml/2006/main">
-              <a:ext uri="{FF2B5EF4-FFF2-40B4-BE49-F238E27FC236}">
-                <a16:creationId xmlns:a16="http://schemas.microsoft.com/office/drawing/2014/main" id="{FF6DD9B6-1241-488A-88AF-893CD4BD8C0D}"/>
+          <p:cNvPr id="12" name="">
+            <a:extLst xmlns:a="http://schemas.openxmlformats.org/drawingml/2006/main">
+              <a:ext uri="{FF2B5EF4-FFF2-40B4-BE49-F238E27FC236}">
+                <a16:creationId xmlns:a16="http://schemas.microsoft.com/office/drawing/2014/main" id="{98FD5483-1285-49F1-9043-84482F948013}"/>
               </a:ext>
             </a:extLst>
           </p:cNvPr>
@@ -10057,7 +10512,7 @@
             <a:pPr algn="l">
               <a:defRPr sz="1575" b="0">
                 <a:solidFill>
-                  <a:srgbClr val="222222"/>
+                  <a:srgbClr val="242424"/>
                 </a:solidFill>
                 <a:latin typeface="Aptos Mono"/>
                 <a:ea typeface="Aptos Mono"/>
@@ -10067,7 +10522,7 @@
             <a:r>
               <a:rPr sz="1575" b="0">
                 <a:solidFill>
-                  <a:srgbClr val="222222"/>
+                  <a:srgbClr val="242424"/>
                 </a:solidFill>
                 <a:latin typeface="Aptos Mono"/>
                 <a:ea typeface="Aptos Mono"/>
@@ -10080,7 +10535,7 @@
             <a:pPr algn="l">
               <a:defRPr sz="1575" b="0">
                 <a:solidFill>
-                  <a:srgbClr val="222222"/>
+                  <a:srgbClr val="242424"/>
                 </a:solidFill>
                 <a:latin typeface="Aptos Mono"/>
                 <a:ea typeface="Aptos Mono"/>
@@ -10090,7 +10545,7 @@
             <a:r>
               <a:rPr sz="1575" b="0">
                 <a:solidFill>
-                  <a:srgbClr val="222222"/>
+                  <a:srgbClr val="242424"/>
                 </a:solidFill>
                 <a:latin typeface="Aptos Mono"/>
                 <a:ea typeface="Aptos Mono"/>
@@ -10103,7 +10558,7 @@
             <a:pPr algn="l">
               <a:defRPr sz="1575" b="0">
                 <a:solidFill>
-                  <a:srgbClr val="222222"/>
+                  <a:srgbClr val="242424"/>
                 </a:solidFill>
                 <a:latin typeface="Aptos Mono"/>
                 <a:ea typeface="Aptos Mono"/>
@@ -10113,7 +10568,7 @@
             <a:r>
               <a:rPr sz="1575" b="0">
                 <a:solidFill>
-                  <a:srgbClr val="222222"/>
+                  <a:srgbClr val="242424"/>
                 </a:solidFill>
                 <a:latin typeface="Aptos Mono"/>
                 <a:ea typeface="Aptos Mono"/>
@@ -10126,10 +10581,10 @@
       </p:sp>
       <p:sp>
         <p:nvSpPr>
-          <p:cNvPr id="12" name="">
-            <a:extLst xmlns:a="http://schemas.openxmlformats.org/drawingml/2006/main">
-              <a:ext uri="{FF2B5EF4-FFF2-40B4-BE49-F238E27FC236}">
-                <a16:creationId xmlns:a16="http://schemas.microsoft.com/office/drawing/2014/main" id="{76A74602-2B97-4CF9-9216-9B96B7AADE90}"/>
+          <p:cNvPr id="13" name="">
+            <a:extLst xmlns:a="http://schemas.openxmlformats.org/drawingml/2006/main">
+              <a:ext uri="{FF2B5EF4-FFF2-40B4-BE49-F238E27FC236}">
+                <a16:creationId xmlns:a16="http://schemas.microsoft.com/office/drawing/2014/main" id="{A579BB2E-A333-4E2F-B66C-214C76C0869C}"/>
               </a:ext>
             </a:extLst>
           </p:cNvPr>
@@ -10141,30 +10596,30 @@
         <p:spPr>
           <a:xfrm xmlns:a="http://schemas.openxmlformats.org/drawingml/2006/main">
             <a:off x="5276850" y="3400425"/>
-            <a:ext cx="1466850" cy="14288"/>
-          </a:xfrm>
-          <a:prstGeom xmlns:a="http://schemas.openxmlformats.org/drawingml/2006/main" prst="rect">
-            <a:avLst/>
-          </a:prstGeom>
-          <a:solidFill xmlns:a="http://schemas.openxmlformats.org/drawingml/2006/main">
-            <a:srgbClr val="2F2F2F"/>
-          </a:solidFill>
-          <a:ln xmlns:a="http://schemas.openxmlformats.org/drawingml/2006/main" w="0">
-            <a:solidFill>
-              <a:srgbClr val="000000">
-                <a:alpha val="0"/>
-              </a:srgbClr>
-            </a:solidFill>
-            <a:prstDash val="solid"/>
-          </a:ln>
-        </p:spPr>
-      </p:sp>
-      <p:sp>
-        <p:nvSpPr>
-          <p:cNvPr id="13" name="">
-            <a:extLst xmlns:a="http://schemas.openxmlformats.org/drawingml/2006/main">
-              <a:ext uri="{FF2B5EF4-FFF2-40B4-BE49-F238E27FC236}">
-                <a16:creationId xmlns:a16="http://schemas.microsoft.com/office/drawing/2014/main" id="{BE557131-9C33-4FEF-A373-00EB03E2639F}"/>
+            <a:ext cx="1466850" cy="15240"/>
+          </a:xfrm>
+          <a:prstGeom xmlns:a="http://schemas.openxmlformats.org/drawingml/2006/main" prst="rect">
+            <a:avLst/>
+          </a:prstGeom>
+          <a:solidFill xmlns:a="http://schemas.openxmlformats.org/drawingml/2006/main">
+            <a:srgbClr val="007C89"/>
+          </a:solidFill>
+          <a:ln xmlns:a="http://schemas.openxmlformats.org/drawingml/2006/main" w="0">
+            <a:solidFill>
+              <a:srgbClr val="000000">
+                <a:alpha val="0"/>
+              </a:srgbClr>
+            </a:solidFill>
+            <a:prstDash val="solid"/>
+          </a:ln>
+        </p:spPr>
+      </p:sp>
+      <p:sp>
+        <p:nvSpPr>
+          <p:cNvPr id="14" name="">
+            <a:extLst xmlns:a="http://schemas.openxmlformats.org/drawingml/2006/main">
+              <a:ext uri="{FF2B5EF4-FFF2-40B4-BE49-F238E27FC236}">
+                <a16:creationId xmlns:a16="http://schemas.microsoft.com/office/drawing/2014/main" id="{27F399BF-FF7E-4B52-B597-FBDB6F22A5D9}"/>
               </a:ext>
             </a:extLst>
           </p:cNvPr>
@@ -10202,7 +10657,7 @@
             <a:pPr algn="l">
               <a:defRPr sz="1350" b="1">
                 <a:solidFill>
-                  <a:srgbClr val="2F2F2F"/>
+                  <a:srgbClr val="007C89"/>
                 </a:solidFill>
                 <a:latin typeface="Aptos"/>
                 <a:ea typeface="Aptos"/>
@@ -10212,7 +10667,7 @@
             <a:r>
               <a:rPr sz="1350" b="1">
                 <a:solidFill>
-                  <a:srgbClr val="2F2F2F"/>
+                  <a:srgbClr val="007C89"/>
                 </a:solidFill>
                 <a:latin typeface="Aptos"/>
                 <a:ea typeface="Aptos"/>
@@ -10225,10 +10680,10 @@
       </p:sp>
       <p:sp>
         <p:nvSpPr>
-          <p:cNvPr id="14" name="">
-            <a:extLst xmlns:a="http://schemas.openxmlformats.org/drawingml/2006/main">
-              <a:ext uri="{FF2B5EF4-FFF2-40B4-BE49-F238E27FC236}">
-                <a16:creationId xmlns:a16="http://schemas.microsoft.com/office/drawing/2014/main" id="{9ED16C93-B3D0-4ADE-9EA6-16E6C1E7285B}"/>
+          <p:cNvPr id="15" name="">
+            <a:extLst xmlns:a="http://schemas.openxmlformats.org/drawingml/2006/main">
+              <a:ext uri="{FF2B5EF4-FFF2-40B4-BE49-F238E27FC236}">
+                <a16:creationId xmlns:a16="http://schemas.microsoft.com/office/drawing/2014/main" id="{DFA48E74-7CF6-44A5-800D-CE9526BF0874}"/>
               </a:ext>
             </a:extLst>
           </p:cNvPr>
@@ -10289,10 +10744,10 @@
       </p:sp>
       <p:sp>
         <p:nvSpPr>
-          <p:cNvPr id="15" name="">
-            <a:extLst xmlns:a="http://schemas.openxmlformats.org/drawingml/2006/main">
-              <a:ext uri="{FF2B5EF4-FFF2-40B4-BE49-F238E27FC236}">
-                <a16:creationId xmlns:a16="http://schemas.microsoft.com/office/drawing/2014/main" id="{77998DE5-DE9F-417C-B9FC-7C5B85551DC7}"/>
+          <p:cNvPr id="16" name="">
+            <a:extLst xmlns:a="http://schemas.openxmlformats.org/drawingml/2006/main">
+              <a:ext uri="{FF2B5EF4-FFF2-40B4-BE49-F238E27FC236}">
+                <a16:creationId xmlns:a16="http://schemas.microsoft.com/office/drawing/2014/main" id="{B00D74B8-96BB-4738-A003-A0FFB7C7D13E}"/>
               </a:ext>
             </a:extLst>
           </p:cNvPr>
@@ -10353,10 +10808,10 @@
       </p:sp>
       <p:sp>
         <p:nvSpPr>
-          <p:cNvPr id="16" name="">
-            <a:extLst xmlns:a="http://schemas.openxmlformats.org/drawingml/2006/main">
-              <a:ext uri="{FF2B5EF4-FFF2-40B4-BE49-F238E27FC236}">
-                <a16:creationId xmlns:a16="http://schemas.microsoft.com/office/drawing/2014/main" id="{D08FD0B1-0DBB-4A5A-9985-9FAE2904511B}"/>
+          <p:cNvPr id="17" name="">
+            <a:extLst xmlns:a="http://schemas.openxmlformats.org/drawingml/2006/main">
+              <a:ext uri="{FF2B5EF4-FFF2-40B4-BE49-F238E27FC236}">
+                <a16:creationId xmlns:a16="http://schemas.microsoft.com/office/drawing/2014/main" id="{562E0AD8-0B5B-40E7-A198-4E0EC3478DBA}"/>
               </a:ext>
             </a:extLst>
           </p:cNvPr>
@@ -10374,24 +10829,24 @@
             <a:avLst/>
           </a:prstGeom>
           <a:solidFill xmlns:a="http://schemas.openxmlformats.org/drawingml/2006/main">
-            <a:srgbClr val="CFCFCF"/>
-          </a:solidFill>
-          <a:ln xmlns:a="http://schemas.openxmlformats.org/drawingml/2006/main" w="0">
-            <a:solidFill>
-              <a:srgbClr val="000000">
-                <a:alpha val="0"/>
-              </a:srgbClr>
-            </a:solidFill>
-            <a:prstDash val="solid"/>
-          </a:ln>
-        </p:spPr>
-      </p:sp>
-      <p:sp>
-        <p:nvSpPr>
-          <p:cNvPr id="17" name="">
-            <a:extLst xmlns:a="http://schemas.openxmlformats.org/drawingml/2006/main">
-              <a:ext uri="{FF2B5EF4-FFF2-40B4-BE49-F238E27FC236}">
-                <a16:creationId xmlns:a16="http://schemas.microsoft.com/office/drawing/2014/main" id="{919DC2A7-72BE-4129-9C7A-ECB42CF40690}"/>
+            <a:srgbClr val="D4D8DD"/>
+          </a:solidFill>
+          <a:ln xmlns:a="http://schemas.openxmlformats.org/drawingml/2006/main" w="0">
+            <a:solidFill>
+              <a:srgbClr val="000000">
+                <a:alpha val="0"/>
+              </a:srgbClr>
+            </a:solidFill>
+            <a:prstDash val="solid"/>
+          </a:ln>
+        </p:spPr>
+      </p:sp>
+      <p:sp>
+        <p:nvSpPr>
+          <p:cNvPr id="18" name="">
+            <a:extLst xmlns:a="http://schemas.openxmlformats.org/drawingml/2006/main">
+              <a:ext uri="{FF2B5EF4-FFF2-40B4-BE49-F238E27FC236}">
+                <a16:creationId xmlns:a16="http://schemas.microsoft.com/office/drawing/2014/main" id="{1A290C4E-63F2-4ACE-A712-5CB6C4922BC9}"/>
               </a:ext>
             </a:extLst>
           </p:cNvPr>
@@ -10453,7 +10908,7 @@
     </p:spTree>
     <p:extLst>
       <p:ext uri="{BB962C8B-B14F-4D97-AF65-F5344CB8AC3E}">
-        <p14:creationId xmlns:p14="http://schemas.microsoft.com/office/powerpoint/2010/main" val="134887234"/>
+        <p14:creationId xmlns:p14="http://schemas.microsoft.com/office/powerpoint/2010/main" val="998756443"/>
       </p:ext>
     </p:extLst>
   </p:cSld>
@@ -10477,7 +10932,7 @@
           <p:cNvPr id="1" name="">
             <a:extLst xmlns:a="http://schemas.openxmlformats.org/drawingml/2006/main">
               <a:ext uri="{FF2B5EF4-FFF2-40B4-BE49-F238E27FC236}">
-                <a16:creationId xmlns:a16="http://schemas.microsoft.com/office/drawing/2014/main" id="{99BC8468-37FA-4B68-A546-BFC377189CA7}"/>
+                <a16:creationId xmlns:a16="http://schemas.microsoft.com/office/drawing/2014/main" id="{3F6D05EE-E7F1-4BD0-B124-1A380E70DB85}"/>
               </a:ext>
             </a:extLst>
           </p:cNvPr>
@@ -10512,7 +10967,7 @@
           <p:cNvPr id="2" name="">
             <a:extLst xmlns:a="http://schemas.openxmlformats.org/drawingml/2006/main">
               <a:ext uri="{FF2B5EF4-FFF2-40B4-BE49-F238E27FC236}">
-                <a16:creationId xmlns:a16="http://schemas.microsoft.com/office/drawing/2014/main" id="{B4DF6800-EE8F-435F-958E-2452AC27A6D7}"/>
+                <a16:creationId xmlns:a16="http://schemas.microsoft.com/office/drawing/2014/main" id="{5E049D3A-E5DB-4010-A404-91466F2DFB63}"/>
               </a:ext>
             </a:extLst>
           </p:cNvPr>
@@ -10576,7 +11031,7 @@
           <p:cNvPr id="3" name="">
             <a:extLst xmlns:a="http://schemas.openxmlformats.org/drawingml/2006/main">
               <a:ext uri="{FF2B5EF4-FFF2-40B4-BE49-F238E27FC236}">
-                <a16:creationId xmlns:a16="http://schemas.microsoft.com/office/drawing/2014/main" id="{F081FAC7-FF9C-4F8B-B22E-85152BC9A9AA}"/>
+                <a16:creationId xmlns:a16="http://schemas.microsoft.com/office/drawing/2014/main" id="{429B0B43-DE3E-4E2F-B7C0-0D854D17EBB7}"/>
               </a:ext>
             </a:extLst>
           </p:cNvPr>
@@ -10640,7 +11095,7 @@
           <p:cNvPr id="4" name="">
             <a:extLst xmlns:a="http://schemas.openxmlformats.org/drawingml/2006/main">
               <a:ext uri="{FF2B5EF4-FFF2-40B4-BE49-F238E27FC236}">
-                <a16:creationId xmlns:a16="http://schemas.microsoft.com/office/drawing/2014/main" id="{88278A39-0580-49C4-B592-173EB3E58264}"/>
+                <a16:creationId xmlns:a16="http://schemas.microsoft.com/office/drawing/2014/main" id="{FEEF7411-CC89-4186-A78C-E4D97E4500F2}"/>
               </a:ext>
             </a:extLst>
           </p:cNvPr>
@@ -10658,7 +11113,7 @@
             <a:avLst/>
           </a:prstGeom>
           <a:solidFill xmlns:a="http://schemas.openxmlformats.org/drawingml/2006/main">
-            <a:srgbClr val="CFCFCF"/>
+            <a:srgbClr val="D4D8DD"/>
           </a:solidFill>
           <a:ln xmlns:a="http://schemas.openxmlformats.org/drawingml/2006/main" w="0">
             <a:solidFill>
@@ -10675,7 +11130,42 @@
           <p:cNvPr id="5" name="">
             <a:extLst xmlns:a="http://schemas.openxmlformats.org/drawingml/2006/main">
               <a:ext uri="{FF2B5EF4-FFF2-40B4-BE49-F238E27FC236}">
-                <a16:creationId xmlns:a16="http://schemas.microsoft.com/office/drawing/2014/main" id="{46E7F59D-2F08-4DE5-88A3-88B1A6B84A47}"/>
+                <a16:creationId xmlns:a16="http://schemas.microsoft.com/office/drawing/2014/main" id="{12FB8480-5EF6-49CD-8884-0C2733F5B16E}"/>
+              </a:ext>
+            </a:extLst>
+          </p:cNvPr>
+          <p:cNvSpPr>
+            <a:spLocks xmlns:a="http://schemas.openxmlformats.org/drawingml/2006/main" noGrp="1"/>
+          </p:cNvSpPr>
+          <p:nvPr/>
+        </p:nvSpPr>
+        <p:spPr>
+          <a:xfrm xmlns:a="http://schemas.openxmlformats.org/drawingml/2006/main">
+            <a:off x="609600" y="609600"/>
+            <a:ext cx="1524000" cy="19050"/>
+          </a:xfrm>
+          <a:prstGeom xmlns:a="http://schemas.openxmlformats.org/drawingml/2006/main" prst="rect">
+            <a:avLst/>
+          </a:prstGeom>
+          <a:solidFill xmlns:a="http://schemas.openxmlformats.org/drawingml/2006/main">
+            <a:srgbClr val="007C89"/>
+          </a:solidFill>
+          <a:ln xmlns:a="http://schemas.openxmlformats.org/drawingml/2006/main" w="0">
+            <a:solidFill>
+              <a:srgbClr val="000000">
+                <a:alpha val="0"/>
+              </a:srgbClr>
+            </a:solidFill>
+            <a:prstDash val="solid"/>
+          </a:ln>
+        </p:spPr>
+      </p:sp>
+      <p:sp>
+        <p:nvSpPr>
+          <p:cNvPr id="6" name="">
+            <a:extLst xmlns:a="http://schemas.openxmlformats.org/drawingml/2006/main">
+              <a:ext uri="{FF2B5EF4-FFF2-40B4-BE49-F238E27FC236}">
+                <a16:creationId xmlns:a16="http://schemas.microsoft.com/office/drawing/2014/main" id="{174E4722-D69D-4B83-B422-C187A328A71F}"/>
               </a:ext>
             </a:extLst>
           </p:cNvPr>
@@ -10687,7 +11177,7 @@
         <p:spPr>
           <a:xfrm xmlns:a="http://schemas.openxmlformats.org/drawingml/2006/main">
             <a:off x="609600" y="819150"/>
-            <a:ext cx="10287000" cy="723900"/>
+            <a:ext cx="10287000" cy="742950"/>
           </a:xfrm>
           <a:prstGeom xmlns:a="http://schemas.openxmlformats.org/drawingml/2006/main" prst="rect">
             <a:avLst/>
@@ -10713,7 +11203,7 @@
             <a:pPr algn="l">
               <a:defRPr sz="2475" b="1">
                 <a:solidFill>
-                  <a:srgbClr val="111111"/>
+                  <a:srgbClr val="151515"/>
                 </a:solidFill>
                 <a:latin typeface="Aptos Display"/>
                 <a:ea typeface="Aptos Display"/>
@@ -10723,7 +11213,7 @@
             <a:r>
               <a:rPr sz="2475" b="1">
                 <a:solidFill>
-                  <a:srgbClr val="111111"/>
+                  <a:srgbClr val="151515"/>
                 </a:solidFill>
                 <a:latin typeface="Aptos Display"/>
                 <a:ea typeface="Aptos Display"/>
@@ -10736,10 +11226,10 @@
       </p:sp>
       <p:sp>
         <p:nvSpPr>
-          <p:cNvPr id="6" name="">
-            <a:extLst xmlns:a="http://schemas.openxmlformats.org/drawingml/2006/main">
-              <a:ext uri="{FF2B5EF4-FFF2-40B4-BE49-F238E27FC236}">
-                <a16:creationId xmlns:a16="http://schemas.microsoft.com/office/drawing/2014/main" id="{5BBB703B-4665-48D1-9903-391D1FF89AF2}"/>
+          <p:cNvPr id="7" name="">
+            <a:extLst xmlns:a="http://schemas.openxmlformats.org/drawingml/2006/main">
+              <a:ext uri="{FF2B5EF4-FFF2-40B4-BE49-F238E27FC236}">
+                <a16:creationId xmlns:a16="http://schemas.microsoft.com/office/drawing/2014/main" id="{78F4499D-3965-4931-8664-045B7D794BF9}"/>
               </a:ext>
             </a:extLst>
           </p:cNvPr>
@@ -10757,22 +11247,57 @@
             <a:avLst/>
           </a:prstGeom>
           <a:solidFill xmlns:a="http://schemas.openxmlformats.org/drawingml/2006/main">
-            <a:srgbClr val="FFFFFF"/>
+            <a:srgbClr val="E8F6F7"/>
           </a:solidFill>
           <a:ln xmlns:a="http://schemas.openxmlformats.org/drawingml/2006/main" w="9525">
             <a:solidFill>
-              <a:srgbClr val="CFCFCF"/>
-            </a:solidFill>
-            <a:prstDash val="solid"/>
-          </a:ln>
-        </p:spPr>
-      </p:sp>
-      <p:sp>
-        <p:nvSpPr>
-          <p:cNvPr id="7" name="">
-            <a:extLst xmlns:a="http://schemas.openxmlformats.org/drawingml/2006/main">
-              <a:ext uri="{FF2B5EF4-FFF2-40B4-BE49-F238E27FC236}">
-                <a16:creationId xmlns:a16="http://schemas.microsoft.com/office/drawing/2014/main" id="{ED2C933F-E8E6-43DF-AD01-FEDC335E9452}"/>
+              <a:srgbClr val="B7D7DB"/>
+            </a:solidFill>
+            <a:prstDash val="solid"/>
+          </a:ln>
+        </p:spPr>
+      </p:sp>
+      <p:sp>
+        <p:nvSpPr>
+          <p:cNvPr id="8" name="">
+            <a:extLst xmlns:a="http://schemas.openxmlformats.org/drawingml/2006/main">
+              <a:ext uri="{FF2B5EF4-FFF2-40B4-BE49-F238E27FC236}">
+                <a16:creationId xmlns:a16="http://schemas.microsoft.com/office/drawing/2014/main" id="{0F40B33F-53C0-4F1C-B416-8477CFC378DA}"/>
+              </a:ext>
+            </a:extLst>
+          </p:cNvPr>
+          <p:cNvSpPr>
+            <a:spLocks xmlns:a="http://schemas.openxmlformats.org/drawingml/2006/main" noGrp="1"/>
+          </p:cNvSpPr>
+          <p:nvPr/>
+        </p:nvSpPr>
+        <p:spPr>
+          <a:xfrm xmlns:a="http://schemas.openxmlformats.org/drawingml/2006/main">
+            <a:off x="876300" y="2305050"/>
+            <a:ext cx="4095750" cy="28575"/>
+          </a:xfrm>
+          <a:prstGeom xmlns:a="http://schemas.openxmlformats.org/drawingml/2006/main" prst="rect">
+            <a:avLst/>
+          </a:prstGeom>
+          <a:solidFill xmlns:a="http://schemas.openxmlformats.org/drawingml/2006/main">
+            <a:srgbClr val="007C89"/>
+          </a:solidFill>
+          <a:ln xmlns:a="http://schemas.openxmlformats.org/drawingml/2006/main" w="0">
+            <a:solidFill>
+              <a:srgbClr val="000000">
+                <a:alpha val="0"/>
+              </a:srgbClr>
+            </a:solidFill>
+            <a:prstDash val="solid"/>
+          </a:ln>
+        </p:spPr>
+      </p:sp>
+      <p:sp>
+        <p:nvSpPr>
+          <p:cNvPr id="9" name="">
+            <a:extLst xmlns:a="http://schemas.openxmlformats.org/drawingml/2006/main">
+              <a:ext uri="{FF2B5EF4-FFF2-40B4-BE49-F238E27FC236}">
+                <a16:creationId xmlns:a16="http://schemas.microsoft.com/office/drawing/2014/main" id="{8181DC75-A449-449B-AE44-C1CEF650D9DA}"/>
               </a:ext>
             </a:extLst>
           </p:cNvPr>
@@ -10810,7 +11335,7 @@
             <a:pPr algn="l">
               <a:defRPr sz="975" b="1">
                 <a:solidFill>
-                  <a:srgbClr val="111111"/>
+                  <a:srgbClr val="007C89"/>
                 </a:solidFill>
                 <a:latin typeface="Aptos"/>
                 <a:ea typeface="Aptos"/>
@@ -10820,7 +11345,7 @@
             <a:r>
               <a:rPr sz="975" b="1">
                 <a:solidFill>
-                  <a:srgbClr val="111111"/>
+                  <a:srgbClr val="007C89"/>
                 </a:solidFill>
                 <a:latin typeface="Aptos"/>
                 <a:ea typeface="Aptos"/>
@@ -10833,10 +11358,10 @@
       </p:sp>
       <p:sp>
         <p:nvSpPr>
-          <p:cNvPr id="8" name="">
-            <a:extLst xmlns:a="http://schemas.openxmlformats.org/drawingml/2006/main">
-              <a:ext uri="{FF2B5EF4-FFF2-40B4-BE49-F238E27FC236}">
-                <a16:creationId xmlns:a16="http://schemas.microsoft.com/office/drawing/2014/main" id="{8B6382DB-E422-4B79-AA9F-8D6354DC2303}"/>
+          <p:cNvPr id="10" name="">
+            <a:extLst xmlns:a="http://schemas.openxmlformats.org/drawingml/2006/main">
+              <a:ext uri="{FF2B5EF4-FFF2-40B4-BE49-F238E27FC236}">
+                <a16:creationId xmlns:a16="http://schemas.microsoft.com/office/drawing/2014/main" id="{8235AD3F-173F-40E5-B746-6C6A240CD641}"/>
               </a:ext>
             </a:extLst>
           </p:cNvPr>
@@ -10874,7 +11399,7 @@
             <a:pPr algn="l">
               <a:defRPr sz="2175" b="0">
                 <a:solidFill>
-                  <a:srgbClr val="222222"/>
+                  <a:srgbClr val="242424"/>
                 </a:solidFill>
                 <a:latin typeface="Aptos Mono"/>
                 <a:ea typeface="Aptos Mono"/>
@@ -10884,7 +11409,7 @@
             <a:r>
               <a:rPr sz="2175" b="0">
                 <a:solidFill>
-                  <a:srgbClr val="222222"/>
+                  <a:srgbClr val="242424"/>
                 </a:solidFill>
                 <a:latin typeface="Aptos Mono"/>
                 <a:ea typeface="Aptos Mono"/>
@@ -10897,7 +11422,7 @@
             <a:pPr algn="l">
               <a:defRPr sz="2175" b="0">
                 <a:solidFill>
-                  <a:srgbClr val="222222"/>
+                  <a:srgbClr val="242424"/>
                 </a:solidFill>
                 <a:latin typeface="Aptos Mono"/>
                 <a:ea typeface="Aptos Mono"/>
@@ -10907,7 +11432,7 @@
             <a:r>
               <a:rPr sz="2175" b="0">
                 <a:solidFill>
-                  <a:srgbClr val="222222"/>
+                  <a:srgbClr val="242424"/>
                 </a:solidFill>
                 <a:latin typeface="Aptos Mono"/>
                 <a:ea typeface="Aptos Mono"/>
@@ -10920,10 +11445,10 @@
       </p:sp>
       <p:sp>
         <p:nvSpPr>
-          <p:cNvPr id="9" name="">
-            <a:extLst xmlns:a="http://schemas.openxmlformats.org/drawingml/2006/main">
-              <a:ext uri="{FF2B5EF4-FFF2-40B4-BE49-F238E27FC236}">
-                <a16:creationId xmlns:a16="http://schemas.microsoft.com/office/drawing/2014/main" id="{73478349-44B7-431E-9420-D6B2C5341F60}"/>
+          <p:cNvPr id="11" name="">
+            <a:extLst xmlns:a="http://schemas.openxmlformats.org/drawingml/2006/main">
+              <a:ext uri="{FF2B5EF4-FFF2-40B4-BE49-F238E27FC236}">
+                <a16:creationId xmlns:a16="http://schemas.microsoft.com/office/drawing/2014/main" id="{0449751F-6982-4350-B82B-E0CDD6564B3A}"/>
               </a:ext>
             </a:extLst>
           </p:cNvPr>
@@ -10941,22 +11466,57 @@
             <a:avLst/>
           </a:prstGeom>
           <a:solidFill xmlns:a="http://schemas.openxmlformats.org/drawingml/2006/main">
-            <a:srgbClr val="FAFAFA"/>
+            <a:srgbClr val="EAF2F8"/>
           </a:solidFill>
           <a:ln xmlns:a="http://schemas.openxmlformats.org/drawingml/2006/main" w="9525">
             <a:solidFill>
-              <a:srgbClr val="CFCFCF"/>
-            </a:solidFill>
-            <a:prstDash val="solid"/>
-          </a:ln>
-        </p:spPr>
-      </p:sp>
-      <p:sp>
-        <p:nvSpPr>
-          <p:cNvPr id="10" name="">
-            <a:extLst xmlns:a="http://schemas.openxmlformats.org/drawingml/2006/main">
-              <a:ext uri="{FF2B5EF4-FFF2-40B4-BE49-F238E27FC236}">
-                <a16:creationId xmlns:a16="http://schemas.microsoft.com/office/drawing/2014/main" id="{64697FA4-1615-4738-AE75-B10B86717ADB}"/>
+              <a:srgbClr val="B9CAD8"/>
+            </a:solidFill>
+            <a:prstDash val="solid"/>
+          </a:ln>
+        </p:spPr>
+      </p:sp>
+      <p:sp>
+        <p:nvSpPr>
+          <p:cNvPr id="12" name="">
+            <a:extLst xmlns:a="http://schemas.openxmlformats.org/drawingml/2006/main">
+              <a:ext uri="{FF2B5EF4-FFF2-40B4-BE49-F238E27FC236}">
+                <a16:creationId xmlns:a16="http://schemas.microsoft.com/office/drawing/2014/main" id="{BE416CBA-E31D-4C12-987D-500711517E00}"/>
+              </a:ext>
+            </a:extLst>
+          </p:cNvPr>
+          <p:cNvSpPr>
+            <a:spLocks xmlns:a="http://schemas.openxmlformats.org/drawingml/2006/main" noGrp="1"/>
+          </p:cNvSpPr>
+          <p:nvPr/>
+        </p:nvSpPr>
+        <p:spPr>
+          <a:xfrm xmlns:a="http://schemas.openxmlformats.org/drawingml/2006/main">
+            <a:off x="6096000" y="2305050"/>
+            <a:ext cx="4762500" cy="28575"/>
+          </a:xfrm>
+          <a:prstGeom xmlns:a="http://schemas.openxmlformats.org/drawingml/2006/main" prst="rect">
+            <a:avLst/>
+          </a:prstGeom>
+          <a:solidFill xmlns:a="http://schemas.openxmlformats.org/drawingml/2006/main">
+            <a:srgbClr val="1F4E79"/>
+          </a:solidFill>
+          <a:ln xmlns:a="http://schemas.openxmlformats.org/drawingml/2006/main" w="0">
+            <a:solidFill>
+              <a:srgbClr val="000000">
+                <a:alpha val="0"/>
+              </a:srgbClr>
+            </a:solidFill>
+            <a:prstDash val="solid"/>
+          </a:ln>
+        </p:spPr>
+      </p:sp>
+      <p:sp>
+        <p:nvSpPr>
+          <p:cNvPr id="13" name="">
+            <a:extLst xmlns:a="http://schemas.openxmlformats.org/drawingml/2006/main">
+              <a:ext uri="{FF2B5EF4-FFF2-40B4-BE49-F238E27FC236}">
+                <a16:creationId xmlns:a16="http://schemas.microsoft.com/office/drawing/2014/main" id="{6884DBD1-A498-4E0A-A146-19A05DBADE0E}"/>
               </a:ext>
             </a:extLst>
           </p:cNvPr>
@@ -10994,7 +11554,7 @@
             <a:pPr algn="l">
               <a:defRPr sz="1350" b="0">
                 <a:solidFill>
-                  <a:srgbClr val="111111"/>
+                  <a:srgbClr val="151515"/>
                 </a:solidFill>
                 <a:latin typeface="Aptos Mono"/>
                 <a:ea typeface="Aptos Mono"/>
@@ -11004,7 +11564,7 @@
             <a:r>
               <a:rPr sz="1350" b="0">
                 <a:solidFill>
-                  <a:srgbClr val="111111"/>
+                  <a:srgbClr val="151515"/>
                 </a:solidFill>
                 <a:latin typeface="Aptos Mono"/>
                 <a:ea typeface="Aptos Mono"/>
@@ -11022,7 +11582,7 @@
             <a:pPr algn="l">
               <a:defRPr sz="1350" b="0">
                 <a:solidFill>
-                  <a:srgbClr val="111111"/>
+                  <a:srgbClr val="151515"/>
                 </a:solidFill>
                 <a:latin typeface="Aptos Mono"/>
                 <a:ea typeface="Aptos Mono"/>
@@ -11032,7 +11592,7 @@
             <a:r>
               <a:rPr sz="1350" b="0">
                 <a:solidFill>
-                  <a:srgbClr val="111111"/>
+                  <a:srgbClr val="151515"/>
                 </a:solidFill>
                 <a:latin typeface="Aptos Mono"/>
                 <a:ea typeface="Aptos Mono"/>
@@ -11045,10 +11605,10 @@
       </p:sp>
       <p:sp>
         <p:nvSpPr>
-          <p:cNvPr id="11" name="">
-            <a:extLst xmlns:a="http://schemas.openxmlformats.org/drawingml/2006/main">
-              <a:ext uri="{FF2B5EF4-FFF2-40B4-BE49-F238E27FC236}">
-                <a16:creationId xmlns:a16="http://schemas.microsoft.com/office/drawing/2014/main" id="{337A60B8-8F6A-402F-90B7-A38D8A6D135B}"/>
+          <p:cNvPr id="14" name="">
+            <a:extLst xmlns:a="http://schemas.openxmlformats.org/drawingml/2006/main">
+              <a:ext uri="{FF2B5EF4-FFF2-40B4-BE49-F238E27FC236}">
+                <a16:creationId xmlns:a16="http://schemas.microsoft.com/office/drawing/2014/main" id="{919F1365-4071-41AC-A414-BB5DD8213AFB}"/>
               </a:ext>
             </a:extLst>
           </p:cNvPr>
@@ -11109,10 +11669,10 @@
       </p:sp>
       <p:sp>
         <p:nvSpPr>
-          <p:cNvPr id="12" name="">
-            <a:extLst xmlns:a="http://schemas.openxmlformats.org/drawingml/2006/main">
-              <a:ext uri="{FF2B5EF4-FFF2-40B4-BE49-F238E27FC236}">
-                <a16:creationId xmlns:a16="http://schemas.microsoft.com/office/drawing/2014/main" id="{5F38321C-B29D-4DAF-8B89-9D63C7DEF1B0}"/>
+          <p:cNvPr id="15" name="">
+            <a:extLst xmlns:a="http://schemas.openxmlformats.org/drawingml/2006/main">
+              <a:ext uri="{FF2B5EF4-FFF2-40B4-BE49-F238E27FC236}">
+                <a16:creationId xmlns:a16="http://schemas.microsoft.com/office/drawing/2014/main" id="{8163C1FB-D143-4544-B54E-A55256309D66}"/>
               </a:ext>
             </a:extLst>
           </p:cNvPr>
@@ -11130,24 +11690,24 @@
             <a:avLst/>
           </a:prstGeom>
           <a:solidFill xmlns:a="http://schemas.openxmlformats.org/drawingml/2006/main">
-            <a:srgbClr val="CFCFCF"/>
-          </a:solidFill>
-          <a:ln xmlns:a="http://schemas.openxmlformats.org/drawingml/2006/main" w="0">
-            <a:solidFill>
-              <a:srgbClr val="000000">
-                <a:alpha val="0"/>
-              </a:srgbClr>
-            </a:solidFill>
-            <a:prstDash val="solid"/>
-          </a:ln>
-        </p:spPr>
-      </p:sp>
-      <p:sp>
-        <p:nvSpPr>
-          <p:cNvPr id="13" name="">
-            <a:extLst xmlns:a="http://schemas.openxmlformats.org/drawingml/2006/main">
-              <a:ext uri="{FF2B5EF4-FFF2-40B4-BE49-F238E27FC236}">
-                <a16:creationId xmlns:a16="http://schemas.microsoft.com/office/drawing/2014/main" id="{301013E0-4074-4EE0-9010-282158032ADE}"/>
+            <a:srgbClr val="D4D8DD"/>
+          </a:solidFill>
+          <a:ln xmlns:a="http://schemas.openxmlformats.org/drawingml/2006/main" w="0">
+            <a:solidFill>
+              <a:srgbClr val="000000">
+                <a:alpha val="0"/>
+              </a:srgbClr>
+            </a:solidFill>
+            <a:prstDash val="solid"/>
+          </a:ln>
+        </p:spPr>
+      </p:sp>
+      <p:sp>
+        <p:nvSpPr>
+          <p:cNvPr id="16" name="">
+            <a:extLst xmlns:a="http://schemas.openxmlformats.org/drawingml/2006/main">
+              <a:ext uri="{FF2B5EF4-FFF2-40B4-BE49-F238E27FC236}">
+                <a16:creationId xmlns:a16="http://schemas.microsoft.com/office/drawing/2014/main" id="{AA15E579-87A6-4B40-9B9F-A24F9A5CC896}"/>
               </a:ext>
             </a:extLst>
           </p:cNvPr>
@@ -11209,7 +11769,7 @@
     </p:spTree>
     <p:extLst>
       <p:ext uri="{BB962C8B-B14F-4D97-AF65-F5344CB8AC3E}">
-        <p14:creationId xmlns:p14="http://schemas.microsoft.com/office/powerpoint/2010/main" val="1905589913"/>
+        <p14:creationId xmlns:p14="http://schemas.microsoft.com/office/powerpoint/2010/main" val="1668037849"/>
       </p:ext>
     </p:extLst>
   </p:cSld>
@@ -11233,7 +11793,7 @@
           <p:cNvPr id="1" name="">
             <a:extLst xmlns:a="http://schemas.openxmlformats.org/drawingml/2006/main">
               <a:ext uri="{FF2B5EF4-FFF2-40B4-BE49-F238E27FC236}">
-                <a16:creationId xmlns:a16="http://schemas.microsoft.com/office/drawing/2014/main" id="{BACDEBE5-4AA9-46D2-BB1C-84A1F1323B5D}"/>
+                <a16:creationId xmlns:a16="http://schemas.microsoft.com/office/drawing/2014/main" id="{AF38B4B8-081A-4CB6-A1C5-6B4B628863AC}"/>
               </a:ext>
             </a:extLst>
           </p:cNvPr>
@@ -11268,7 +11828,7 @@
           <p:cNvPr id="2" name="">
             <a:extLst xmlns:a="http://schemas.openxmlformats.org/drawingml/2006/main">
               <a:ext uri="{FF2B5EF4-FFF2-40B4-BE49-F238E27FC236}">
-                <a16:creationId xmlns:a16="http://schemas.microsoft.com/office/drawing/2014/main" id="{3974BAE0-33E7-4820-9242-E626E75710C8}"/>
+                <a16:creationId xmlns:a16="http://schemas.microsoft.com/office/drawing/2014/main" id="{DC42DE2B-02DD-4337-8603-098F3941E570}"/>
               </a:ext>
             </a:extLst>
           </p:cNvPr>
@@ -11332,7 +11892,7 @@
           <p:cNvPr id="3" name="">
             <a:extLst xmlns:a="http://schemas.openxmlformats.org/drawingml/2006/main">
               <a:ext uri="{FF2B5EF4-FFF2-40B4-BE49-F238E27FC236}">
-                <a16:creationId xmlns:a16="http://schemas.microsoft.com/office/drawing/2014/main" id="{F7B25200-5D56-4714-AA7A-2344DC174F9D}"/>
+                <a16:creationId xmlns:a16="http://schemas.microsoft.com/office/drawing/2014/main" id="{8A282625-C13B-43E5-88A6-1BA096464FE5}"/>
               </a:ext>
             </a:extLst>
           </p:cNvPr>
@@ -11396,7 +11956,7 @@
           <p:cNvPr id="4" name="">
             <a:extLst xmlns:a="http://schemas.openxmlformats.org/drawingml/2006/main">
               <a:ext uri="{FF2B5EF4-FFF2-40B4-BE49-F238E27FC236}">
-                <a16:creationId xmlns:a16="http://schemas.microsoft.com/office/drawing/2014/main" id="{A80064C2-BA8B-40C2-BDD5-5738F8CCE45C}"/>
+                <a16:creationId xmlns:a16="http://schemas.microsoft.com/office/drawing/2014/main" id="{27588FDB-4361-4FD5-9EB6-6E9C7BAD9837}"/>
               </a:ext>
             </a:extLst>
           </p:cNvPr>
@@ -11414,7 +11974,7 @@
             <a:avLst/>
           </a:prstGeom>
           <a:solidFill xmlns:a="http://schemas.openxmlformats.org/drawingml/2006/main">
-            <a:srgbClr val="CFCFCF"/>
+            <a:srgbClr val="D4D8DD"/>
           </a:solidFill>
           <a:ln xmlns:a="http://schemas.openxmlformats.org/drawingml/2006/main" w="0">
             <a:solidFill>
@@ -11431,7 +11991,42 @@
           <p:cNvPr id="5" name="">
             <a:extLst xmlns:a="http://schemas.openxmlformats.org/drawingml/2006/main">
               <a:ext uri="{FF2B5EF4-FFF2-40B4-BE49-F238E27FC236}">
-                <a16:creationId xmlns:a16="http://schemas.microsoft.com/office/drawing/2014/main" id="{B670E053-6C6D-4284-A209-7BB5589D70B3}"/>
+                <a16:creationId xmlns:a16="http://schemas.microsoft.com/office/drawing/2014/main" id="{A2D5AB51-F4B3-4812-8DC8-6521BED68F9F}"/>
+              </a:ext>
+            </a:extLst>
+          </p:cNvPr>
+          <p:cNvSpPr>
+            <a:spLocks xmlns:a="http://schemas.openxmlformats.org/drawingml/2006/main" noGrp="1"/>
+          </p:cNvSpPr>
+          <p:nvPr/>
+        </p:nvSpPr>
+        <p:spPr>
+          <a:xfrm xmlns:a="http://schemas.openxmlformats.org/drawingml/2006/main">
+            <a:off x="609600" y="609600"/>
+            <a:ext cx="1524000" cy="19050"/>
+          </a:xfrm>
+          <a:prstGeom xmlns:a="http://schemas.openxmlformats.org/drawingml/2006/main" prst="rect">
+            <a:avLst/>
+          </a:prstGeom>
+          <a:solidFill xmlns:a="http://schemas.openxmlformats.org/drawingml/2006/main">
+            <a:srgbClr val="C45A2A"/>
+          </a:solidFill>
+          <a:ln xmlns:a="http://schemas.openxmlformats.org/drawingml/2006/main" w="0">
+            <a:solidFill>
+              <a:srgbClr val="000000">
+                <a:alpha val="0"/>
+              </a:srgbClr>
+            </a:solidFill>
+            <a:prstDash val="solid"/>
+          </a:ln>
+        </p:spPr>
+      </p:sp>
+      <p:sp>
+        <p:nvSpPr>
+          <p:cNvPr id="6" name="">
+            <a:extLst xmlns:a="http://schemas.openxmlformats.org/drawingml/2006/main">
+              <a:ext uri="{FF2B5EF4-FFF2-40B4-BE49-F238E27FC236}">
+                <a16:creationId xmlns:a16="http://schemas.microsoft.com/office/drawing/2014/main" id="{6D89BBEE-3CD5-49C4-B607-67BD597D79AB}"/>
               </a:ext>
             </a:extLst>
           </p:cNvPr>
@@ -11443,7 +12038,7 @@
         <p:spPr>
           <a:xfrm xmlns:a="http://schemas.openxmlformats.org/drawingml/2006/main">
             <a:off x="609600" y="819150"/>
-            <a:ext cx="10287000" cy="723900"/>
+            <a:ext cx="10287000" cy="742950"/>
           </a:xfrm>
           <a:prstGeom xmlns:a="http://schemas.openxmlformats.org/drawingml/2006/main" prst="rect">
             <a:avLst/>
@@ -11469,7 +12064,7 @@
             <a:pPr algn="l">
               <a:defRPr sz="2475" b="1">
                 <a:solidFill>
-                  <a:srgbClr val="111111"/>
+                  <a:srgbClr val="151515"/>
                 </a:solidFill>
                 <a:latin typeface="Aptos Display"/>
                 <a:ea typeface="Aptos Display"/>
@@ -11479,7 +12074,7 @@
             <a:r>
               <a:rPr sz="2475" b="1">
                 <a:solidFill>
-                  <a:srgbClr val="111111"/>
+                  <a:srgbClr val="151515"/>
                 </a:solidFill>
                 <a:latin typeface="Aptos Display"/>
                 <a:ea typeface="Aptos Display"/>
@@ -11492,10 +12087,10 @@
       </p:sp>
       <p:sp>
         <p:nvSpPr>
-          <p:cNvPr id="6" name="">
-            <a:extLst xmlns:a="http://schemas.openxmlformats.org/drawingml/2006/main">
-              <a:ext uri="{FF2B5EF4-FFF2-40B4-BE49-F238E27FC236}">
-                <a16:creationId xmlns:a16="http://schemas.microsoft.com/office/drawing/2014/main" id="{E00D169F-6DC2-4761-9577-7963E4E77C4E}"/>
+          <p:cNvPr id="7" name="">
+            <a:extLst xmlns:a="http://schemas.openxmlformats.org/drawingml/2006/main">
+              <a:ext uri="{FF2B5EF4-FFF2-40B4-BE49-F238E27FC236}">
+                <a16:creationId xmlns:a16="http://schemas.microsoft.com/office/drawing/2014/main" id="{4EEA5C60-AE8F-440A-98C5-629D5188374A}"/>
               </a:ext>
             </a:extLst>
           </p:cNvPr>
@@ -11556,10 +12151,10 @@
       </p:sp>
       <p:sp>
         <p:nvSpPr>
-          <p:cNvPr id="7" name="">
-            <a:extLst xmlns:a="http://schemas.openxmlformats.org/drawingml/2006/main">
-              <a:ext uri="{FF2B5EF4-FFF2-40B4-BE49-F238E27FC236}">
-                <a16:creationId xmlns:a16="http://schemas.microsoft.com/office/drawing/2014/main" id="{5AF0566A-A965-4CE0-A8EF-B64292C18F6A}"/>
+          <p:cNvPr id="8" name="">
+            <a:extLst xmlns:a="http://schemas.openxmlformats.org/drawingml/2006/main">
+              <a:ext uri="{FF2B5EF4-FFF2-40B4-BE49-F238E27FC236}">
+                <a16:creationId xmlns:a16="http://schemas.microsoft.com/office/drawing/2014/main" id="{AFB79198-F187-425B-BC0D-45D093D14790}"/>
               </a:ext>
             </a:extLst>
           </p:cNvPr>
@@ -11577,22 +12172,22 @@
             <a:avLst/>
           </a:prstGeom>
           <a:solidFill xmlns:a="http://schemas.openxmlformats.org/drawingml/2006/main">
-            <a:srgbClr val="FFFFFF"/>
+            <a:srgbClr val="FFF1E8"/>
           </a:solidFill>
           <a:ln xmlns:a="http://schemas.openxmlformats.org/drawingml/2006/main" w="9525">
             <a:solidFill>
-              <a:srgbClr val="CFCFCF"/>
-            </a:solidFill>
-            <a:prstDash val="solid"/>
-          </a:ln>
-        </p:spPr>
-      </p:sp>
-      <p:sp>
-        <p:nvSpPr>
-          <p:cNvPr id="8" name="">
-            <a:extLst xmlns:a="http://schemas.openxmlformats.org/drawingml/2006/main">
-              <a:ext uri="{FF2B5EF4-FFF2-40B4-BE49-F238E27FC236}">
-                <a16:creationId xmlns:a16="http://schemas.microsoft.com/office/drawing/2014/main" id="{9A7840AE-9802-4EE9-AF5C-1D0FB4A74BAB}"/>
+              <a:srgbClr val="E7C8B8"/>
+            </a:solidFill>
+            <a:prstDash val="solid"/>
+          </a:ln>
+        </p:spPr>
+      </p:sp>
+      <p:sp>
+        <p:nvSpPr>
+          <p:cNvPr id="9" name="">
+            <a:extLst xmlns:a="http://schemas.openxmlformats.org/drawingml/2006/main">
+              <a:ext uri="{FF2B5EF4-FFF2-40B4-BE49-F238E27FC236}">
+                <a16:creationId xmlns:a16="http://schemas.microsoft.com/office/drawing/2014/main" id="{F06CAE81-3303-4F7E-996D-D8F6791FAE8F}"/>
               </a:ext>
             </a:extLst>
           </p:cNvPr>
@@ -11630,7 +12225,7 @@
             <a:pPr algn="l">
               <a:defRPr sz="1050" b="1">
                 <a:solidFill>
-                  <a:srgbClr val="222222"/>
+                  <a:srgbClr val="C45A2A"/>
                 </a:solidFill>
                 <a:latin typeface="Aptos"/>
                 <a:ea typeface="Aptos"/>
@@ -11640,7 +12235,7 @@
             <a:r>
               <a:rPr sz="1050" b="1">
                 <a:solidFill>
-                  <a:srgbClr val="222222"/>
+                  <a:srgbClr val="C45A2A"/>
                 </a:solidFill>
                 <a:latin typeface="Aptos"/>
                 <a:ea typeface="Aptos"/>
@@ -11653,10 +12248,10 @@
       </p:sp>
       <p:sp>
         <p:nvSpPr>
-          <p:cNvPr id="9" name="">
-            <a:extLst xmlns:a="http://schemas.openxmlformats.org/drawingml/2006/main">
-              <a:ext uri="{FF2B5EF4-FFF2-40B4-BE49-F238E27FC236}">
-                <a16:creationId xmlns:a16="http://schemas.microsoft.com/office/drawing/2014/main" id="{09A5AD95-4FC7-4159-84AB-896198D52F55}"/>
+          <p:cNvPr id="10" name="">
+            <a:extLst xmlns:a="http://schemas.openxmlformats.org/drawingml/2006/main">
+              <a:ext uri="{FF2B5EF4-FFF2-40B4-BE49-F238E27FC236}">
+                <a16:creationId xmlns:a16="http://schemas.microsoft.com/office/drawing/2014/main" id="{E83152C4-E478-44E3-9B1F-F366564C1DEB}"/>
               </a:ext>
             </a:extLst>
           </p:cNvPr>
@@ -11694,7 +12289,7 @@
             <a:pPr algn="l">
               <a:defRPr sz="1350" b="0">
                 <a:solidFill>
-                  <a:srgbClr val="222222"/>
+                  <a:srgbClr val="242424"/>
                 </a:solidFill>
                 <a:latin typeface="Aptos Mono"/>
                 <a:ea typeface="Aptos Mono"/>
@@ -11704,7 +12299,7 @@
             <a:r>
               <a:rPr sz="1350" b="0">
                 <a:solidFill>
-                  <a:srgbClr val="222222"/>
+                  <a:srgbClr val="242424"/>
                 </a:solidFill>
                 <a:latin typeface="Aptos Mono"/>
                 <a:ea typeface="Aptos Mono"/>
@@ -11717,7 +12312,7 @@
             <a:pPr algn="l">
               <a:defRPr sz="1350" b="0">
                 <a:solidFill>
-                  <a:srgbClr val="222222"/>
+                  <a:srgbClr val="242424"/>
                 </a:solidFill>
                 <a:latin typeface="Aptos Mono"/>
                 <a:ea typeface="Aptos Mono"/>
@@ -11727,7 +12322,7 @@
             <a:r>
               <a:rPr sz="1350" b="0">
                 <a:solidFill>
-                  <a:srgbClr val="222222"/>
+                  <a:srgbClr val="242424"/>
                 </a:solidFill>
                 <a:latin typeface="Aptos Mono"/>
                 <a:ea typeface="Aptos Mono"/>
@@ -11740,10 +12335,10 @@
       </p:sp>
       <p:sp>
         <p:nvSpPr>
-          <p:cNvPr id="10" name="">
-            <a:extLst xmlns:a="http://schemas.openxmlformats.org/drawingml/2006/main">
-              <a:ext uri="{FF2B5EF4-FFF2-40B4-BE49-F238E27FC236}">
-                <a16:creationId xmlns:a16="http://schemas.microsoft.com/office/drawing/2014/main" id="{09064F4D-1DB2-4B8A-85CD-67385AFAD3D8}"/>
+          <p:cNvPr id="11" name="">
+            <a:extLst xmlns:a="http://schemas.openxmlformats.org/drawingml/2006/main">
+              <a:ext uri="{FF2B5EF4-FFF2-40B4-BE49-F238E27FC236}">
+                <a16:creationId xmlns:a16="http://schemas.microsoft.com/office/drawing/2014/main" id="{AAA6D056-44A0-4507-B2D0-2983E2738C1A}"/>
               </a:ext>
             </a:extLst>
           </p:cNvPr>
@@ -11755,30 +12350,30 @@
         <p:spPr>
           <a:xfrm xmlns:a="http://schemas.openxmlformats.org/drawingml/2006/main">
             <a:off x="3143250" y="3438525"/>
-            <a:ext cx="742950" cy="14288"/>
-          </a:xfrm>
-          <a:prstGeom xmlns:a="http://schemas.openxmlformats.org/drawingml/2006/main" prst="rect">
-            <a:avLst/>
-          </a:prstGeom>
-          <a:solidFill xmlns:a="http://schemas.openxmlformats.org/drawingml/2006/main">
-            <a:srgbClr val="2F2F2F"/>
-          </a:solidFill>
-          <a:ln xmlns:a="http://schemas.openxmlformats.org/drawingml/2006/main" w="0">
-            <a:solidFill>
-              <a:srgbClr val="000000">
-                <a:alpha val="0"/>
-              </a:srgbClr>
-            </a:solidFill>
-            <a:prstDash val="solid"/>
-          </a:ln>
-        </p:spPr>
-      </p:sp>
-      <p:sp>
-        <p:nvSpPr>
-          <p:cNvPr id="11" name="">
-            <a:extLst xmlns:a="http://schemas.openxmlformats.org/drawingml/2006/main">
-              <a:ext uri="{FF2B5EF4-FFF2-40B4-BE49-F238E27FC236}">
-                <a16:creationId xmlns:a16="http://schemas.microsoft.com/office/drawing/2014/main" id="{8381AD17-B3D3-49AB-B6DA-6C4CEC395F9F}"/>
+            <a:ext cx="742950" cy="15240"/>
+          </a:xfrm>
+          <a:prstGeom xmlns:a="http://schemas.openxmlformats.org/drawingml/2006/main" prst="rect">
+            <a:avLst/>
+          </a:prstGeom>
+          <a:solidFill xmlns:a="http://schemas.openxmlformats.org/drawingml/2006/main">
+            <a:srgbClr val="C45A2A"/>
+          </a:solidFill>
+          <a:ln xmlns:a="http://schemas.openxmlformats.org/drawingml/2006/main" w="0">
+            <a:solidFill>
+              <a:srgbClr val="000000">
+                <a:alpha val="0"/>
+              </a:srgbClr>
+            </a:solidFill>
+            <a:prstDash val="solid"/>
+          </a:ln>
+        </p:spPr>
+      </p:sp>
+      <p:sp>
+        <p:nvSpPr>
+          <p:cNvPr id="12" name="">
+            <a:extLst xmlns:a="http://schemas.openxmlformats.org/drawingml/2006/main">
+              <a:ext uri="{FF2B5EF4-FFF2-40B4-BE49-F238E27FC236}">
+                <a16:creationId xmlns:a16="http://schemas.microsoft.com/office/drawing/2014/main" id="{6F37DFB6-E980-4604-9302-AFCC696CA6A4}"/>
               </a:ext>
             </a:extLst>
           </p:cNvPr>
@@ -11816,7 +12411,7 @@
             <a:pPr algn="l">
               <a:defRPr sz="1350" b="1">
                 <a:solidFill>
-                  <a:srgbClr val="2F2F2F"/>
+                  <a:srgbClr val="C45A2A"/>
                 </a:solidFill>
                 <a:latin typeface="Aptos"/>
                 <a:ea typeface="Aptos"/>
@@ -11826,7 +12421,7 @@
             <a:r>
               <a:rPr sz="1350" b="1">
                 <a:solidFill>
-                  <a:srgbClr val="2F2F2F"/>
+                  <a:srgbClr val="C45A2A"/>
                 </a:solidFill>
                 <a:latin typeface="Aptos"/>
                 <a:ea typeface="Aptos"/>
@@ -11839,10 +12434,10 @@
       </p:sp>
       <p:sp>
         <p:nvSpPr>
-          <p:cNvPr id="12" name="">
-            <a:extLst xmlns:a="http://schemas.openxmlformats.org/drawingml/2006/main">
-              <a:ext uri="{FF2B5EF4-FFF2-40B4-BE49-F238E27FC236}">
-                <a16:creationId xmlns:a16="http://schemas.microsoft.com/office/drawing/2014/main" id="{6A24E66D-779A-4BEF-BBC6-41EBF8681B7B}"/>
+          <p:cNvPr id="13" name="">
+            <a:extLst xmlns:a="http://schemas.openxmlformats.org/drawingml/2006/main">
+              <a:ext uri="{FF2B5EF4-FFF2-40B4-BE49-F238E27FC236}">
+                <a16:creationId xmlns:a16="http://schemas.microsoft.com/office/drawing/2014/main" id="{C24A1C7B-B687-4DC7-949C-3C90067B564F}"/>
               </a:ext>
             </a:extLst>
           </p:cNvPr>
@@ -11860,22 +12455,22 @@
             <a:avLst/>
           </a:prstGeom>
           <a:solidFill xmlns:a="http://schemas.openxmlformats.org/drawingml/2006/main">
-            <a:srgbClr val="FFFFFF"/>
+            <a:srgbClr val="EAF2F8"/>
           </a:solidFill>
           <a:ln xmlns:a="http://schemas.openxmlformats.org/drawingml/2006/main" w="9525">
             <a:solidFill>
-              <a:srgbClr val="CFCFCF"/>
-            </a:solidFill>
-            <a:prstDash val="solid"/>
-          </a:ln>
-        </p:spPr>
-      </p:sp>
-      <p:sp>
-        <p:nvSpPr>
-          <p:cNvPr id="13" name="">
-            <a:extLst xmlns:a="http://schemas.openxmlformats.org/drawingml/2006/main">
-              <a:ext uri="{FF2B5EF4-FFF2-40B4-BE49-F238E27FC236}">
-                <a16:creationId xmlns:a16="http://schemas.microsoft.com/office/drawing/2014/main" id="{F4A5291F-31C1-4FA9-9F84-7FBFFC9E0C01}"/>
+              <a:srgbClr val="B9CAD8"/>
+            </a:solidFill>
+            <a:prstDash val="solid"/>
+          </a:ln>
+        </p:spPr>
+      </p:sp>
+      <p:sp>
+        <p:nvSpPr>
+          <p:cNvPr id="14" name="">
+            <a:extLst xmlns:a="http://schemas.openxmlformats.org/drawingml/2006/main">
+              <a:ext uri="{FF2B5EF4-FFF2-40B4-BE49-F238E27FC236}">
+                <a16:creationId xmlns:a16="http://schemas.microsoft.com/office/drawing/2014/main" id="{F25A6AC8-C69D-46AA-B0DD-FDAF07921754}"/>
               </a:ext>
             </a:extLst>
           </p:cNvPr>
@@ -11913,7 +12508,7 @@
             <a:pPr algn="l">
               <a:defRPr sz="1050" b="1">
                 <a:solidFill>
-                  <a:srgbClr val="222222"/>
+                  <a:srgbClr val="1F4E79"/>
                 </a:solidFill>
                 <a:latin typeface="Aptos"/>
                 <a:ea typeface="Aptos"/>
@@ -11923,7 +12518,7 @@
             <a:r>
               <a:rPr sz="1050" b="1">
                 <a:solidFill>
-                  <a:srgbClr val="222222"/>
+                  <a:srgbClr val="1F4E79"/>
                 </a:solidFill>
                 <a:latin typeface="Aptos"/>
                 <a:ea typeface="Aptos"/>
@@ -11936,10 +12531,10 @@
       </p:sp>
       <p:sp>
         <p:nvSpPr>
-          <p:cNvPr id="14" name="">
-            <a:extLst xmlns:a="http://schemas.openxmlformats.org/drawingml/2006/main">
-              <a:ext uri="{FF2B5EF4-FFF2-40B4-BE49-F238E27FC236}">
-                <a16:creationId xmlns:a16="http://schemas.microsoft.com/office/drawing/2014/main" id="{E5C41E65-E778-4E2B-B559-08FFF3901956}"/>
+          <p:cNvPr id="15" name="">
+            <a:extLst xmlns:a="http://schemas.openxmlformats.org/drawingml/2006/main">
+              <a:ext uri="{FF2B5EF4-FFF2-40B4-BE49-F238E27FC236}">
+                <a16:creationId xmlns:a16="http://schemas.microsoft.com/office/drawing/2014/main" id="{14D48EC3-87E9-4234-9D2B-80C5B063C00E}"/>
               </a:ext>
             </a:extLst>
           </p:cNvPr>
@@ -11977,7 +12572,7 @@
             <a:pPr algn="l">
               <a:defRPr sz="1350" b="0">
                 <a:solidFill>
-                  <a:srgbClr val="222222"/>
+                  <a:srgbClr val="242424"/>
                 </a:solidFill>
                 <a:latin typeface="Aptos"/>
                 <a:ea typeface="Aptos"/>
@@ -11987,7 +12582,7 @@
             <a:r>
               <a:rPr sz="1350" b="0">
                 <a:solidFill>
-                  <a:srgbClr val="222222"/>
+                  <a:srgbClr val="242424"/>
                 </a:solidFill>
                 <a:latin typeface="Aptos"/>
                 <a:ea typeface="Aptos"/>
@@ -12000,7 +12595,7 @@
             <a:pPr algn="l">
               <a:defRPr sz="1350" b="0">
                 <a:solidFill>
-                  <a:srgbClr val="222222"/>
+                  <a:srgbClr val="242424"/>
                 </a:solidFill>
                 <a:latin typeface="Aptos"/>
                 <a:ea typeface="Aptos"/>
@@ -12010,7 +12605,7 @@
             <a:r>
               <a:rPr sz="1350" b="0">
                 <a:solidFill>
-                  <a:srgbClr val="222222"/>
+                  <a:srgbClr val="242424"/>
                 </a:solidFill>
                 <a:latin typeface="Aptos"/>
                 <a:ea typeface="Aptos"/>
@@ -12023,10 +12618,10 @@
       </p:sp>
       <p:sp>
         <p:nvSpPr>
-          <p:cNvPr id="15" name="">
-            <a:extLst xmlns:a="http://schemas.openxmlformats.org/drawingml/2006/main">
-              <a:ext uri="{FF2B5EF4-FFF2-40B4-BE49-F238E27FC236}">
-                <a16:creationId xmlns:a16="http://schemas.microsoft.com/office/drawing/2014/main" id="{C65AAA9C-4820-4041-AC1F-C22C5B394670}"/>
+          <p:cNvPr id="16" name="">
+            <a:extLst xmlns:a="http://schemas.openxmlformats.org/drawingml/2006/main">
+              <a:ext uri="{FF2B5EF4-FFF2-40B4-BE49-F238E27FC236}">
+                <a16:creationId xmlns:a16="http://schemas.microsoft.com/office/drawing/2014/main" id="{FF1E6826-86F6-45A8-B15C-3F1010114BEC}"/>
               </a:ext>
             </a:extLst>
           </p:cNvPr>
@@ -12038,30 +12633,30 @@
         <p:spPr>
           <a:xfrm xmlns:a="http://schemas.openxmlformats.org/drawingml/2006/main">
             <a:off x="6934200" y="3438525"/>
-            <a:ext cx="742950" cy="14288"/>
-          </a:xfrm>
-          <a:prstGeom xmlns:a="http://schemas.openxmlformats.org/drawingml/2006/main" prst="rect">
-            <a:avLst/>
-          </a:prstGeom>
-          <a:solidFill xmlns:a="http://schemas.openxmlformats.org/drawingml/2006/main">
-            <a:srgbClr val="2F2F2F"/>
-          </a:solidFill>
-          <a:ln xmlns:a="http://schemas.openxmlformats.org/drawingml/2006/main" w="0">
-            <a:solidFill>
-              <a:srgbClr val="000000">
-                <a:alpha val="0"/>
-              </a:srgbClr>
-            </a:solidFill>
-            <a:prstDash val="solid"/>
-          </a:ln>
-        </p:spPr>
-      </p:sp>
-      <p:sp>
-        <p:nvSpPr>
-          <p:cNvPr id="16" name="">
-            <a:extLst xmlns:a="http://schemas.openxmlformats.org/drawingml/2006/main">
-              <a:ext uri="{FF2B5EF4-FFF2-40B4-BE49-F238E27FC236}">
-                <a16:creationId xmlns:a16="http://schemas.microsoft.com/office/drawing/2014/main" id="{6F6A9667-3D88-47DE-9FDA-4591D327FF34}"/>
+            <a:ext cx="742950" cy="15240"/>
+          </a:xfrm>
+          <a:prstGeom xmlns:a="http://schemas.openxmlformats.org/drawingml/2006/main" prst="rect">
+            <a:avLst/>
+          </a:prstGeom>
+          <a:solidFill xmlns:a="http://schemas.openxmlformats.org/drawingml/2006/main">
+            <a:srgbClr val="1F4E79"/>
+          </a:solidFill>
+          <a:ln xmlns:a="http://schemas.openxmlformats.org/drawingml/2006/main" w="0">
+            <a:solidFill>
+              <a:srgbClr val="000000">
+                <a:alpha val="0"/>
+              </a:srgbClr>
+            </a:solidFill>
+            <a:prstDash val="solid"/>
+          </a:ln>
+        </p:spPr>
+      </p:sp>
+      <p:sp>
+        <p:nvSpPr>
+          <p:cNvPr id="17" name="">
+            <a:extLst xmlns:a="http://schemas.openxmlformats.org/drawingml/2006/main">
+              <a:ext uri="{FF2B5EF4-FFF2-40B4-BE49-F238E27FC236}">
+                <a16:creationId xmlns:a16="http://schemas.microsoft.com/office/drawing/2014/main" id="{57741676-3409-4D23-AE2D-28DE17DCB11C}"/>
               </a:ext>
             </a:extLst>
           </p:cNvPr>
@@ -12099,7 +12694,7 @@
             <a:pPr algn="l">
               <a:defRPr sz="1350" b="1">
                 <a:solidFill>
-                  <a:srgbClr val="2F2F2F"/>
+                  <a:srgbClr val="1F4E79"/>
                 </a:solidFill>
                 <a:latin typeface="Aptos"/>
                 <a:ea typeface="Aptos"/>
@@ -12109,7 +12704,7 @@
             <a:r>
               <a:rPr sz="1350" b="1">
                 <a:solidFill>
-                  <a:srgbClr val="2F2F2F"/>
+                  <a:srgbClr val="1F4E79"/>
                 </a:solidFill>
                 <a:latin typeface="Aptos"/>
                 <a:ea typeface="Aptos"/>
@@ -12122,10 +12717,10 @@
       </p:sp>
       <p:sp>
         <p:nvSpPr>
-          <p:cNvPr id="17" name="">
-            <a:extLst xmlns:a="http://schemas.openxmlformats.org/drawingml/2006/main">
-              <a:ext uri="{FF2B5EF4-FFF2-40B4-BE49-F238E27FC236}">
-                <a16:creationId xmlns:a16="http://schemas.microsoft.com/office/drawing/2014/main" id="{8CAF450E-5585-4A6F-B9AE-3E16ECC8EFB2}"/>
+          <p:cNvPr id="18" name="">
+            <a:extLst xmlns:a="http://schemas.openxmlformats.org/drawingml/2006/main">
+              <a:ext uri="{FF2B5EF4-FFF2-40B4-BE49-F238E27FC236}">
+                <a16:creationId xmlns:a16="http://schemas.microsoft.com/office/drawing/2014/main" id="{B877528F-DBF4-4EEF-A4AB-24B956079B1E}"/>
               </a:ext>
             </a:extLst>
           </p:cNvPr>
@@ -12143,22 +12738,22 @@
             <a:avLst/>
           </a:prstGeom>
           <a:solidFill xmlns:a="http://schemas.openxmlformats.org/drawingml/2006/main">
-            <a:srgbClr val="FFFFFF"/>
+            <a:srgbClr val="E8F6F7"/>
           </a:solidFill>
           <a:ln xmlns:a="http://schemas.openxmlformats.org/drawingml/2006/main" w="9525">
             <a:solidFill>
-              <a:srgbClr val="CFCFCF"/>
-            </a:solidFill>
-            <a:prstDash val="solid"/>
-          </a:ln>
-        </p:spPr>
-      </p:sp>
-      <p:sp>
-        <p:nvSpPr>
-          <p:cNvPr id="18" name="">
-            <a:extLst xmlns:a="http://schemas.openxmlformats.org/drawingml/2006/main">
-              <a:ext uri="{FF2B5EF4-FFF2-40B4-BE49-F238E27FC236}">
-                <a16:creationId xmlns:a16="http://schemas.microsoft.com/office/drawing/2014/main" id="{E24694C6-6435-41DE-BC70-F7BBA88E871B}"/>
+              <a:srgbClr val="B7D7DB"/>
+            </a:solidFill>
+            <a:prstDash val="solid"/>
+          </a:ln>
+        </p:spPr>
+      </p:sp>
+      <p:sp>
+        <p:nvSpPr>
+          <p:cNvPr id="19" name="">
+            <a:extLst xmlns:a="http://schemas.openxmlformats.org/drawingml/2006/main">
+              <a:ext uri="{FF2B5EF4-FFF2-40B4-BE49-F238E27FC236}">
+                <a16:creationId xmlns:a16="http://schemas.microsoft.com/office/drawing/2014/main" id="{4EA58B83-2708-45ED-916B-E22CEFFEA665}"/>
               </a:ext>
             </a:extLst>
           </p:cNvPr>
@@ -12196,7 +12791,7 @@
             <a:pPr algn="l">
               <a:defRPr sz="1050" b="1">
                 <a:solidFill>
-                  <a:srgbClr val="222222"/>
+                  <a:srgbClr val="007C89"/>
                 </a:solidFill>
                 <a:latin typeface="Aptos"/>
                 <a:ea typeface="Aptos"/>
@@ -12206,7 +12801,7 @@
             <a:r>
               <a:rPr sz="1050" b="1">
                 <a:solidFill>
-                  <a:srgbClr val="222222"/>
+                  <a:srgbClr val="007C89"/>
                 </a:solidFill>
                 <a:latin typeface="Aptos"/>
                 <a:ea typeface="Aptos"/>
@@ -12219,10 +12814,10 @@
       </p:sp>
       <p:sp>
         <p:nvSpPr>
-          <p:cNvPr id="19" name="">
-            <a:extLst xmlns:a="http://schemas.openxmlformats.org/drawingml/2006/main">
-              <a:ext uri="{FF2B5EF4-FFF2-40B4-BE49-F238E27FC236}">
-                <a16:creationId xmlns:a16="http://schemas.microsoft.com/office/drawing/2014/main" id="{49025385-CAA0-4D22-B805-D55C9D540BF5}"/>
+          <p:cNvPr id="20" name="">
+            <a:extLst xmlns:a="http://schemas.openxmlformats.org/drawingml/2006/main">
+              <a:ext uri="{FF2B5EF4-FFF2-40B4-BE49-F238E27FC236}">
+                <a16:creationId xmlns:a16="http://schemas.microsoft.com/office/drawing/2014/main" id="{327F47C7-22A0-4D29-90AB-0ED27802CFFD}"/>
               </a:ext>
             </a:extLst>
           </p:cNvPr>
@@ -12260,7 +12855,7 @@
             <a:pPr algn="l">
               <a:defRPr sz="1425" b="0">
                 <a:solidFill>
-                  <a:srgbClr val="222222"/>
+                  <a:srgbClr val="242424"/>
                 </a:solidFill>
                 <a:latin typeface="Aptos"/>
                 <a:ea typeface="Aptos"/>
@@ -12270,7 +12865,7 @@
             <a:r>
               <a:rPr sz="1425" b="0">
                 <a:solidFill>
-                  <a:srgbClr val="222222"/>
+                  <a:srgbClr val="242424"/>
                 </a:solidFill>
                 <a:latin typeface="Aptos"/>
                 <a:ea typeface="Aptos"/>
@@ -12283,10 +12878,10 @@
       </p:sp>
       <p:sp>
         <p:nvSpPr>
-          <p:cNvPr id="20" name="">
-            <a:extLst xmlns:a="http://schemas.openxmlformats.org/drawingml/2006/main">
-              <a:ext uri="{FF2B5EF4-FFF2-40B4-BE49-F238E27FC236}">
-                <a16:creationId xmlns:a16="http://schemas.microsoft.com/office/drawing/2014/main" id="{CDDB0C61-2656-4E1B-9C65-70337A36895F}"/>
+          <p:cNvPr id="21" name="">
+            <a:extLst xmlns:a="http://schemas.openxmlformats.org/drawingml/2006/main">
+              <a:ext uri="{FF2B5EF4-FFF2-40B4-BE49-F238E27FC236}">
+                <a16:creationId xmlns:a16="http://schemas.microsoft.com/office/drawing/2014/main" id="{6012C87D-2C4F-44A8-A15C-FA675021D54F}"/>
               </a:ext>
             </a:extLst>
           </p:cNvPr>
@@ -12298,30 +12893,30 @@
         <p:spPr>
           <a:xfrm xmlns:a="http://schemas.openxmlformats.org/drawingml/2006/main">
             <a:off x="9963150" y="3438525"/>
-            <a:ext cx="638175" cy="14288"/>
-          </a:xfrm>
-          <a:prstGeom xmlns:a="http://schemas.openxmlformats.org/drawingml/2006/main" prst="rect">
-            <a:avLst/>
-          </a:prstGeom>
-          <a:solidFill xmlns:a="http://schemas.openxmlformats.org/drawingml/2006/main">
-            <a:srgbClr val="2F2F2F"/>
-          </a:solidFill>
-          <a:ln xmlns:a="http://schemas.openxmlformats.org/drawingml/2006/main" w="0">
-            <a:solidFill>
-              <a:srgbClr val="000000">
-                <a:alpha val="0"/>
-              </a:srgbClr>
-            </a:solidFill>
-            <a:prstDash val="solid"/>
-          </a:ln>
-        </p:spPr>
-      </p:sp>
-      <p:sp>
-        <p:nvSpPr>
-          <p:cNvPr id="21" name="">
-            <a:extLst xmlns:a="http://schemas.openxmlformats.org/drawingml/2006/main">
-              <a:ext uri="{FF2B5EF4-FFF2-40B4-BE49-F238E27FC236}">
-                <a16:creationId xmlns:a16="http://schemas.microsoft.com/office/drawing/2014/main" id="{4EE151F0-C7DB-4924-B44A-F818CF95E127}"/>
+            <a:ext cx="638175" cy="15240"/>
+          </a:xfrm>
+          <a:prstGeom xmlns:a="http://schemas.openxmlformats.org/drawingml/2006/main" prst="rect">
+            <a:avLst/>
+          </a:prstGeom>
+          <a:solidFill xmlns:a="http://schemas.openxmlformats.org/drawingml/2006/main">
+            <a:srgbClr val="007C89"/>
+          </a:solidFill>
+          <a:ln xmlns:a="http://schemas.openxmlformats.org/drawingml/2006/main" w="0">
+            <a:solidFill>
+              <a:srgbClr val="000000">
+                <a:alpha val="0"/>
+              </a:srgbClr>
+            </a:solidFill>
+            <a:prstDash val="solid"/>
+          </a:ln>
+        </p:spPr>
+      </p:sp>
+      <p:sp>
+        <p:nvSpPr>
+          <p:cNvPr id="22" name="">
+            <a:extLst xmlns:a="http://schemas.openxmlformats.org/drawingml/2006/main">
+              <a:ext uri="{FF2B5EF4-FFF2-40B4-BE49-F238E27FC236}">
+                <a16:creationId xmlns:a16="http://schemas.microsoft.com/office/drawing/2014/main" id="{2F4051AB-01B5-4931-9B15-87E1EC5F7965}"/>
               </a:ext>
             </a:extLst>
           </p:cNvPr>
@@ -12359,7 +12954,7 @@
             <a:pPr algn="l">
               <a:defRPr sz="1350" b="1">
                 <a:solidFill>
-                  <a:srgbClr val="2F2F2F"/>
+                  <a:srgbClr val="007C89"/>
                 </a:solidFill>
                 <a:latin typeface="Aptos"/>
                 <a:ea typeface="Aptos"/>
@@ -12369,7 +12964,7 @@
             <a:r>
               <a:rPr sz="1350" b="1">
                 <a:solidFill>
-                  <a:srgbClr val="2F2F2F"/>
+                  <a:srgbClr val="007C89"/>
                 </a:solidFill>
                 <a:latin typeface="Aptos"/>
                 <a:ea typeface="Aptos"/>
@@ -12382,10 +12977,10 @@
       </p:sp>
       <p:sp>
         <p:nvSpPr>
-          <p:cNvPr id="22" name="">
-            <a:extLst xmlns:a="http://schemas.openxmlformats.org/drawingml/2006/main">
-              <a:ext uri="{FF2B5EF4-FFF2-40B4-BE49-F238E27FC236}">
-                <a16:creationId xmlns:a16="http://schemas.microsoft.com/office/drawing/2014/main" id="{C7BE22E5-BF01-4A71-ADCB-20882F7B9B17}"/>
+          <p:cNvPr id="23" name="">
+            <a:extLst xmlns:a="http://schemas.openxmlformats.org/drawingml/2006/main">
+              <a:ext uri="{FF2B5EF4-FFF2-40B4-BE49-F238E27FC236}">
+                <a16:creationId xmlns:a16="http://schemas.microsoft.com/office/drawing/2014/main" id="{4F02A802-4135-4CD0-AA9C-F15B12F45B11}"/>
               </a:ext>
             </a:extLst>
           </p:cNvPr>
@@ -12403,22 +12998,22 @@
             <a:avLst/>
           </a:prstGeom>
           <a:solidFill xmlns:a="http://schemas.openxmlformats.org/drawingml/2006/main">
-            <a:srgbClr val="FFFFFF"/>
+            <a:srgbClr val="F7F8FA"/>
           </a:solidFill>
           <a:ln xmlns:a="http://schemas.openxmlformats.org/drawingml/2006/main" w="9525">
             <a:solidFill>
-              <a:srgbClr val="CFCFCF"/>
-            </a:solidFill>
-            <a:prstDash val="solid"/>
-          </a:ln>
-        </p:spPr>
-      </p:sp>
-      <p:sp>
-        <p:nvSpPr>
-          <p:cNvPr id="23" name="">
-            <a:extLst xmlns:a="http://schemas.openxmlformats.org/drawingml/2006/main">
-              <a:ext uri="{FF2B5EF4-FFF2-40B4-BE49-F238E27FC236}">
-                <a16:creationId xmlns:a16="http://schemas.microsoft.com/office/drawing/2014/main" id="{AAC0B38B-F269-4BCB-BB3A-0A4381710A4F}"/>
+              <a:srgbClr val="D4D8DD"/>
+            </a:solidFill>
+            <a:prstDash val="solid"/>
+          </a:ln>
+        </p:spPr>
+      </p:sp>
+      <p:sp>
+        <p:nvSpPr>
+          <p:cNvPr id="24" name="">
+            <a:extLst xmlns:a="http://schemas.openxmlformats.org/drawingml/2006/main">
+              <a:ext uri="{FF2B5EF4-FFF2-40B4-BE49-F238E27FC236}">
+                <a16:creationId xmlns:a16="http://schemas.microsoft.com/office/drawing/2014/main" id="{1C2226AD-68B3-4C52-AB69-EE287DEAA416}"/>
               </a:ext>
             </a:extLst>
           </p:cNvPr>
@@ -12456,7 +13051,7 @@
             <a:pPr algn="l">
               <a:defRPr sz="1950" b="1">
                 <a:solidFill>
-                  <a:srgbClr val="222222"/>
+                  <a:srgbClr val="242424"/>
                 </a:solidFill>
                 <a:latin typeface="Aptos"/>
                 <a:ea typeface="Aptos"/>
@@ -12466,7 +13061,7 @@
             <a:r>
               <a:rPr sz="1950" b="1">
                 <a:solidFill>
-                  <a:srgbClr val="222222"/>
+                  <a:srgbClr val="242424"/>
                 </a:solidFill>
                 <a:latin typeface="Aptos"/>
                 <a:ea typeface="Aptos"/>
@@ -12479,10 +13074,10 @@
       </p:sp>
       <p:sp>
         <p:nvSpPr>
-          <p:cNvPr id="24" name="">
-            <a:extLst xmlns:a="http://schemas.openxmlformats.org/drawingml/2006/main">
-              <a:ext uri="{FF2B5EF4-FFF2-40B4-BE49-F238E27FC236}">
-                <a16:creationId xmlns:a16="http://schemas.microsoft.com/office/drawing/2014/main" id="{84BD1B8D-A118-444F-8CAF-B6C95C76C2AE}"/>
+          <p:cNvPr id="25" name="">
+            <a:extLst xmlns:a="http://schemas.openxmlformats.org/drawingml/2006/main">
+              <a:ext uri="{FF2B5EF4-FFF2-40B4-BE49-F238E27FC236}">
+                <a16:creationId xmlns:a16="http://schemas.microsoft.com/office/drawing/2014/main" id="{3D6C11C0-EEB2-42B7-AE25-5ACA9791348A}"/>
               </a:ext>
             </a:extLst>
           </p:cNvPr>
@@ -12543,10 +13138,10 @@
       </p:sp>
       <p:sp>
         <p:nvSpPr>
-          <p:cNvPr id="25" name="">
-            <a:extLst xmlns:a="http://schemas.openxmlformats.org/drawingml/2006/main">
-              <a:ext uri="{FF2B5EF4-FFF2-40B4-BE49-F238E27FC236}">
-                <a16:creationId xmlns:a16="http://schemas.microsoft.com/office/drawing/2014/main" id="{1D28022C-2CCA-4079-B7EF-525F67FE0321}"/>
+          <p:cNvPr id="26" name="">
+            <a:extLst xmlns:a="http://schemas.openxmlformats.org/drawingml/2006/main">
+              <a:ext uri="{FF2B5EF4-FFF2-40B4-BE49-F238E27FC236}">
+                <a16:creationId xmlns:a16="http://schemas.microsoft.com/office/drawing/2014/main" id="{EEFA24F7-9D5D-412F-BDB3-EAA0CD4329C0}"/>
               </a:ext>
             </a:extLst>
           </p:cNvPr>
@@ -12607,10 +13202,10 @@
       </p:sp>
       <p:sp>
         <p:nvSpPr>
-          <p:cNvPr id="26" name="">
-            <a:extLst xmlns:a="http://schemas.openxmlformats.org/drawingml/2006/main">
-              <a:ext uri="{FF2B5EF4-FFF2-40B4-BE49-F238E27FC236}">
-                <a16:creationId xmlns:a16="http://schemas.microsoft.com/office/drawing/2014/main" id="{F0A4BB35-96A5-4719-B280-6EA3672391C2}"/>
+          <p:cNvPr id="27" name="">
+            <a:extLst xmlns:a="http://schemas.openxmlformats.org/drawingml/2006/main">
+              <a:ext uri="{FF2B5EF4-FFF2-40B4-BE49-F238E27FC236}">
+                <a16:creationId xmlns:a16="http://schemas.microsoft.com/office/drawing/2014/main" id="{320908BF-AA64-4565-88FA-7234BD4B25C0}"/>
               </a:ext>
             </a:extLst>
           </p:cNvPr>
@@ -12628,24 +13223,24 @@
             <a:avLst/>
           </a:prstGeom>
           <a:solidFill xmlns:a="http://schemas.openxmlformats.org/drawingml/2006/main">
-            <a:srgbClr val="CFCFCF"/>
-          </a:solidFill>
-          <a:ln xmlns:a="http://schemas.openxmlformats.org/drawingml/2006/main" w="0">
-            <a:solidFill>
-              <a:srgbClr val="000000">
-                <a:alpha val="0"/>
-              </a:srgbClr>
-            </a:solidFill>
-            <a:prstDash val="solid"/>
-          </a:ln>
-        </p:spPr>
-      </p:sp>
-      <p:sp>
-        <p:nvSpPr>
-          <p:cNvPr id="27" name="">
-            <a:extLst xmlns:a="http://schemas.openxmlformats.org/drawingml/2006/main">
-              <a:ext uri="{FF2B5EF4-FFF2-40B4-BE49-F238E27FC236}">
-                <a16:creationId xmlns:a16="http://schemas.microsoft.com/office/drawing/2014/main" id="{D9EDB13B-AE62-4B95-B5A7-D2AAE39C7BF9}"/>
+            <a:srgbClr val="D4D8DD"/>
+          </a:solidFill>
+          <a:ln xmlns:a="http://schemas.openxmlformats.org/drawingml/2006/main" w="0">
+            <a:solidFill>
+              <a:srgbClr val="000000">
+                <a:alpha val="0"/>
+              </a:srgbClr>
+            </a:solidFill>
+            <a:prstDash val="solid"/>
+          </a:ln>
+        </p:spPr>
+      </p:sp>
+      <p:sp>
+        <p:nvSpPr>
+          <p:cNvPr id="28" name="">
+            <a:extLst xmlns:a="http://schemas.openxmlformats.org/drawingml/2006/main">
+              <a:ext uri="{FF2B5EF4-FFF2-40B4-BE49-F238E27FC236}">
+                <a16:creationId xmlns:a16="http://schemas.microsoft.com/office/drawing/2014/main" id="{B31F60E3-B571-4430-BDFF-F30AD22B2EC3}"/>
               </a:ext>
             </a:extLst>
           </p:cNvPr>
@@ -12707,7 +13302,7 @@
     </p:spTree>
     <p:extLst>
       <p:ext uri="{BB962C8B-B14F-4D97-AF65-F5344CB8AC3E}">
-        <p14:creationId xmlns:p14="http://schemas.microsoft.com/office/powerpoint/2010/main" val="1160010360"/>
+        <p14:creationId xmlns:p14="http://schemas.microsoft.com/office/powerpoint/2010/main" val="453631623"/>
       </p:ext>
     </p:extLst>
   </p:cSld>
@@ -12731,7 +13326,7 @@
           <p:cNvPr id="1" name="">
             <a:extLst xmlns:a="http://schemas.openxmlformats.org/drawingml/2006/main">
               <a:ext uri="{FF2B5EF4-FFF2-40B4-BE49-F238E27FC236}">
-                <a16:creationId xmlns:a16="http://schemas.microsoft.com/office/drawing/2014/main" id="{5A92D4FA-DBFE-4925-9A79-3A936DB81E1A}"/>
+                <a16:creationId xmlns:a16="http://schemas.microsoft.com/office/drawing/2014/main" id="{3AB27159-FA3E-4012-AB2F-945F007DBA73}"/>
               </a:ext>
             </a:extLst>
           </p:cNvPr>
@@ -12766,7 +13361,7 @@
           <p:cNvPr id="2" name="">
             <a:extLst xmlns:a="http://schemas.openxmlformats.org/drawingml/2006/main">
               <a:ext uri="{FF2B5EF4-FFF2-40B4-BE49-F238E27FC236}">
-                <a16:creationId xmlns:a16="http://schemas.microsoft.com/office/drawing/2014/main" id="{00D9DFA4-12A8-4278-BC94-DBC939F712FA}"/>
+                <a16:creationId xmlns:a16="http://schemas.microsoft.com/office/drawing/2014/main" id="{DACD783F-F0AB-41EC-9860-9D3C5FA644B0}"/>
               </a:ext>
             </a:extLst>
           </p:cNvPr>
@@ -12830,7 +13425,7 @@
           <p:cNvPr id="3" name="">
             <a:extLst xmlns:a="http://schemas.openxmlformats.org/drawingml/2006/main">
               <a:ext uri="{FF2B5EF4-FFF2-40B4-BE49-F238E27FC236}">
-                <a16:creationId xmlns:a16="http://schemas.microsoft.com/office/drawing/2014/main" id="{FEF5BC58-76AF-4934-88B6-8BA141EF628A}"/>
+                <a16:creationId xmlns:a16="http://schemas.microsoft.com/office/drawing/2014/main" id="{25DF5299-A57C-41E7-A595-1C1E6798E9A4}"/>
               </a:ext>
             </a:extLst>
           </p:cNvPr>
@@ -12894,7 +13489,7 @@
           <p:cNvPr id="4" name="">
             <a:extLst xmlns:a="http://schemas.openxmlformats.org/drawingml/2006/main">
               <a:ext uri="{FF2B5EF4-FFF2-40B4-BE49-F238E27FC236}">
-                <a16:creationId xmlns:a16="http://schemas.microsoft.com/office/drawing/2014/main" id="{9B0F8175-82C6-4155-A0AC-A4E2F138D5FA}"/>
+                <a16:creationId xmlns:a16="http://schemas.microsoft.com/office/drawing/2014/main" id="{451BA850-D963-4A5D-8A69-3DFD62880A16}"/>
               </a:ext>
             </a:extLst>
           </p:cNvPr>
@@ -12912,7 +13507,7 @@
             <a:avLst/>
           </a:prstGeom>
           <a:solidFill xmlns:a="http://schemas.openxmlformats.org/drawingml/2006/main">
-            <a:srgbClr val="CFCFCF"/>
+            <a:srgbClr val="D4D8DD"/>
           </a:solidFill>
           <a:ln xmlns:a="http://schemas.openxmlformats.org/drawingml/2006/main" w="0">
             <a:solidFill>
@@ -12929,7 +13524,42 @@
           <p:cNvPr id="5" name="">
             <a:extLst xmlns:a="http://schemas.openxmlformats.org/drawingml/2006/main">
               <a:ext uri="{FF2B5EF4-FFF2-40B4-BE49-F238E27FC236}">
-                <a16:creationId xmlns:a16="http://schemas.microsoft.com/office/drawing/2014/main" id="{75C167E5-2FC4-4D0A-8D65-4BF5D0DA2317}"/>
+                <a16:creationId xmlns:a16="http://schemas.microsoft.com/office/drawing/2014/main" id="{55C1F93C-4D44-41D7-A45A-EE8E1ADA9472}"/>
+              </a:ext>
+            </a:extLst>
+          </p:cNvPr>
+          <p:cNvSpPr>
+            <a:spLocks xmlns:a="http://schemas.openxmlformats.org/drawingml/2006/main" noGrp="1"/>
+          </p:cNvSpPr>
+          <p:nvPr/>
+        </p:nvSpPr>
+        <p:spPr>
+          <a:xfrm xmlns:a="http://schemas.openxmlformats.org/drawingml/2006/main">
+            <a:off x="609600" y="609600"/>
+            <a:ext cx="1524000" cy="19050"/>
+          </a:xfrm>
+          <a:prstGeom xmlns:a="http://schemas.openxmlformats.org/drawingml/2006/main" prst="rect">
+            <a:avLst/>
+          </a:prstGeom>
+          <a:solidFill xmlns:a="http://schemas.openxmlformats.org/drawingml/2006/main">
+            <a:srgbClr val="C45A2A"/>
+          </a:solidFill>
+          <a:ln xmlns:a="http://schemas.openxmlformats.org/drawingml/2006/main" w="0">
+            <a:solidFill>
+              <a:srgbClr val="000000">
+                <a:alpha val="0"/>
+              </a:srgbClr>
+            </a:solidFill>
+            <a:prstDash val="solid"/>
+          </a:ln>
+        </p:spPr>
+      </p:sp>
+      <p:sp>
+        <p:nvSpPr>
+          <p:cNvPr id="6" name="">
+            <a:extLst xmlns:a="http://schemas.openxmlformats.org/drawingml/2006/main">
+              <a:ext uri="{FF2B5EF4-FFF2-40B4-BE49-F238E27FC236}">
+                <a16:creationId xmlns:a16="http://schemas.microsoft.com/office/drawing/2014/main" id="{821D0607-2106-4A5A-8E5A-5271B157E303}"/>
               </a:ext>
             </a:extLst>
           </p:cNvPr>
@@ -12941,7 +13571,7 @@
         <p:spPr>
           <a:xfrm xmlns:a="http://schemas.openxmlformats.org/drawingml/2006/main">
             <a:off x="609600" y="819150"/>
-            <a:ext cx="10477500" cy="723900"/>
+            <a:ext cx="10477500" cy="742950"/>
           </a:xfrm>
           <a:prstGeom xmlns:a="http://schemas.openxmlformats.org/drawingml/2006/main" prst="rect">
             <a:avLst/>
@@ -12967,7 +13597,7 @@
             <a:pPr algn="l">
               <a:defRPr sz="2475" b="1">
                 <a:solidFill>
-                  <a:srgbClr val="111111"/>
+                  <a:srgbClr val="151515"/>
                 </a:solidFill>
                 <a:latin typeface="Aptos Display"/>
                 <a:ea typeface="Aptos Display"/>
@@ -12977,7 +13607,7 @@
             <a:r>
               <a:rPr sz="2475" b="1">
                 <a:solidFill>
-                  <a:srgbClr val="111111"/>
+                  <a:srgbClr val="151515"/>
                 </a:solidFill>
                 <a:latin typeface="Aptos Display"/>
                 <a:ea typeface="Aptos Display"/>
@@ -12990,10 +13620,10 @@
       </p:sp>
       <p:sp>
         <p:nvSpPr>
-          <p:cNvPr id="6" name="">
-            <a:extLst xmlns:a="http://schemas.openxmlformats.org/drawingml/2006/main">
-              <a:ext uri="{FF2B5EF4-FFF2-40B4-BE49-F238E27FC236}">
-                <a16:creationId xmlns:a16="http://schemas.microsoft.com/office/drawing/2014/main" id="{CC9BA2C6-9BB3-424A-9747-31DF2514A382}"/>
+          <p:cNvPr id="7" name="">
+            <a:extLst xmlns:a="http://schemas.openxmlformats.org/drawingml/2006/main">
+              <a:ext uri="{FF2B5EF4-FFF2-40B4-BE49-F238E27FC236}">
+                <a16:creationId xmlns:a16="http://schemas.microsoft.com/office/drawing/2014/main" id="{AEAF4F5C-E490-41DE-9723-408BE7709C68}"/>
               </a:ext>
             </a:extLst>
           </p:cNvPr>
@@ -13011,22 +13641,57 @@
             <a:avLst/>
           </a:prstGeom>
           <a:solidFill xmlns:a="http://schemas.openxmlformats.org/drawingml/2006/main">
-            <a:srgbClr val="FAFAFA"/>
+            <a:srgbClr val="E8F6F7"/>
           </a:solidFill>
           <a:ln xmlns:a="http://schemas.openxmlformats.org/drawingml/2006/main" w="9525">
             <a:solidFill>
-              <a:srgbClr val="CFCFCF"/>
-            </a:solidFill>
-            <a:prstDash val="solid"/>
-          </a:ln>
-        </p:spPr>
-      </p:sp>
-      <p:sp>
-        <p:nvSpPr>
-          <p:cNvPr id="7" name="">
-            <a:extLst xmlns:a="http://schemas.openxmlformats.org/drawingml/2006/main">
-              <a:ext uri="{FF2B5EF4-FFF2-40B4-BE49-F238E27FC236}">
-                <a16:creationId xmlns:a16="http://schemas.microsoft.com/office/drawing/2014/main" id="{6AE175E6-D21C-4228-B82C-F000B43DD421}"/>
+              <a:srgbClr val="B7D7DB"/>
+            </a:solidFill>
+            <a:prstDash val="solid"/>
+          </a:ln>
+        </p:spPr>
+      </p:sp>
+      <p:sp>
+        <p:nvSpPr>
+          <p:cNvPr id="8" name="">
+            <a:extLst xmlns:a="http://schemas.openxmlformats.org/drawingml/2006/main">
+              <a:ext uri="{FF2B5EF4-FFF2-40B4-BE49-F238E27FC236}">
+                <a16:creationId xmlns:a16="http://schemas.microsoft.com/office/drawing/2014/main" id="{4D3EB92A-5A7A-4C3A-8E3F-A94C1A267135}"/>
+              </a:ext>
+            </a:extLst>
+          </p:cNvPr>
+          <p:cNvSpPr>
+            <a:spLocks xmlns:a="http://schemas.openxmlformats.org/drawingml/2006/main" noGrp="1"/>
+          </p:cNvSpPr>
+          <p:nvPr/>
+        </p:nvSpPr>
+        <p:spPr>
+          <a:xfrm xmlns:a="http://schemas.openxmlformats.org/drawingml/2006/main">
+            <a:off x="876300" y="2247900"/>
+            <a:ext cx="4762500" cy="28575"/>
+          </a:xfrm>
+          <a:prstGeom xmlns:a="http://schemas.openxmlformats.org/drawingml/2006/main" prst="rect">
+            <a:avLst/>
+          </a:prstGeom>
+          <a:solidFill xmlns:a="http://schemas.openxmlformats.org/drawingml/2006/main">
+            <a:srgbClr val="007C89"/>
+          </a:solidFill>
+          <a:ln xmlns:a="http://schemas.openxmlformats.org/drawingml/2006/main" w="0">
+            <a:solidFill>
+              <a:srgbClr val="000000">
+                <a:alpha val="0"/>
+              </a:srgbClr>
+            </a:solidFill>
+            <a:prstDash val="solid"/>
+          </a:ln>
+        </p:spPr>
+      </p:sp>
+      <p:sp>
+        <p:nvSpPr>
+          <p:cNvPr id="9" name="">
+            <a:extLst xmlns:a="http://schemas.openxmlformats.org/drawingml/2006/main">
+              <a:ext uri="{FF2B5EF4-FFF2-40B4-BE49-F238E27FC236}">
+                <a16:creationId xmlns:a16="http://schemas.microsoft.com/office/drawing/2014/main" id="{E25A2171-2C30-4E38-A021-BC667B4041AB}"/>
               </a:ext>
             </a:extLst>
           </p:cNvPr>
@@ -13064,7 +13729,7 @@
             <a:pPr algn="l">
               <a:defRPr sz="1425" b="0">
                 <a:solidFill>
-                  <a:srgbClr val="111111"/>
+                  <a:srgbClr val="151515"/>
                 </a:solidFill>
                 <a:latin typeface="Aptos Mono"/>
                 <a:ea typeface="Aptos Mono"/>
@@ -13074,7 +13739,7 @@
             <a:r>
               <a:rPr sz="1425" b="0">
                 <a:solidFill>
-                  <a:srgbClr val="111111"/>
+                  <a:srgbClr val="151515"/>
                 </a:solidFill>
                 <a:latin typeface="Aptos Mono"/>
                 <a:ea typeface="Aptos Mono"/>
@@ -13092,7 +13757,7 @@
             <a:pPr algn="l">
               <a:defRPr sz="1425" b="0">
                 <a:solidFill>
-                  <a:srgbClr val="111111"/>
+                  <a:srgbClr val="151515"/>
                 </a:solidFill>
                 <a:latin typeface="Aptos Mono"/>
                 <a:ea typeface="Aptos Mono"/>
@@ -13102,7 +13767,7 @@
             <a:r>
               <a:rPr sz="1425" b="0">
                 <a:solidFill>
-                  <a:srgbClr val="111111"/>
+                  <a:srgbClr val="151515"/>
                 </a:solidFill>
                 <a:latin typeface="Aptos Mono"/>
                 <a:ea typeface="Aptos Mono"/>
@@ -13120,7 +13785,7 @@
             <a:pPr algn="l">
               <a:defRPr sz="1425" b="0">
                 <a:solidFill>
-                  <a:srgbClr val="111111"/>
+                  <a:srgbClr val="151515"/>
                 </a:solidFill>
                 <a:latin typeface="Aptos Mono"/>
                 <a:ea typeface="Aptos Mono"/>
@@ -13130,7 +13795,7 @@
             <a:r>
               <a:rPr sz="1425" b="0">
                 <a:solidFill>
-                  <a:srgbClr val="111111"/>
+                  <a:srgbClr val="151515"/>
                 </a:solidFill>
                 <a:latin typeface="Aptos Mono"/>
                 <a:ea typeface="Aptos Mono"/>
@@ -13143,10 +13808,10 @@
       </p:sp>
       <p:sp>
         <p:nvSpPr>
-          <p:cNvPr id="8" name="">
-            <a:extLst xmlns:a="http://schemas.openxmlformats.org/drawingml/2006/main">
-              <a:ext uri="{FF2B5EF4-FFF2-40B4-BE49-F238E27FC236}">
-                <a16:creationId xmlns:a16="http://schemas.microsoft.com/office/drawing/2014/main" id="{8E409119-E640-4E1D-8A87-B5C019192963}"/>
+          <p:cNvPr id="10" name="">
+            <a:extLst xmlns:a="http://schemas.openxmlformats.org/drawingml/2006/main">
+              <a:ext uri="{FF2B5EF4-FFF2-40B4-BE49-F238E27FC236}">
+                <a16:creationId xmlns:a16="http://schemas.microsoft.com/office/drawing/2014/main" id="{E1DE3E47-717B-4E3A-94E5-09D4BBA81AAE}"/>
               </a:ext>
             </a:extLst>
           </p:cNvPr>
@@ -13164,22 +13829,57 @@
             <a:avLst/>
           </a:prstGeom>
           <a:solidFill xmlns:a="http://schemas.openxmlformats.org/drawingml/2006/main">
-            <a:srgbClr val="FAFAFA"/>
+            <a:srgbClr val="FFF1E8"/>
           </a:solidFill>
           <a:ln xmlns:a="http://schemas.openxmlformats.org/drawingml/2006/main" w="9525">
             <a:solidFill>
-              <a:srgbClr val="CFCFCF"/>
-            </a:solidFill>
-            <a:prstDash val="solid"/>
-          </a:ln>
-        </p:spPr>
-      </p:sp>
-      <p:sp>
-        <p:nvSpPr>
-          <p:cNvPr id="9" name="">
-            <a:extLst xmlns:a="http://schemas.openxmlformats.org/drawingml/2006/main">
-              <a:ext uri="{FF2B5EF4-FFF2-40B4-BE49-F238E27FC236}">
-                <a16:creationId xmlns:a16="http://schemas.microsoft.com/office/drawing/2014/main" id="{E5AEF2E4-1C43-4EBA-BA22-75912A3C0185}"/>
+              <a:srgbClr val="E7C8B8"/>
+            </a:solidFill>
+            <a:prstDash val="solid"/>
+          </a:ln>
+        </p:spPr>
+      </p:sp>
+      <p:sp>
+        <p:nvSpPr>
+          <p:cNvPr id="11" name="">
+            <a:extLst xmlns:a="http://schemas.openxmlformats.org/drawingml/2006/main">
+              <a:ext uri="{FF2B5EF4-FFF2-40B4-BE49-F238E27FC236}">
+                <a16:creationId xmlns:a16="http://schemas.microsoft.com/office/drawing/2014/main" id="{2F0CFB7A-4990-494B-9439-BB2D1A2D4E47}"/>
+              </a:ext>
+            </a:extLst>
+          </p:cNvPr>
+          <p:cNvSpPr>
+            <a:spLocks xmlns:a="http://schemas.openxmlformats.org/drawingml/2006/main" noGrp="1"/>
+          </p:cNvSpPr>
+          <p:nvPr/>
+        </p:nvSpPr>
+        <p:spPr>
+          <a:xfrm xmlns:a="http://schemas.openxmlformats.org/drawingml/2006/main">
+            <a:off x="6648450" y="2247900"/>
+            <a:ext cx="4667250" cy="28575"/>
+          </a:xfrm>
+          <a:prstGeom xmlns:a="http://schemas.openxmlformats.org/drawingml/2006/main" prst="rect">
+            <a:avLst/>
+          </a:prstGeom>
+          <a:solidFill xmlns:a="http://schemas.openxmlformats.org/drawingml/2006/main">
+            <a:srgbClr val="C45A2A"/>
+          </a:solidFill>
+          <a:ln xmlns:a="http://schemas.openxmlformats.org/drawingml/2006/main" w="0">
+            <a:solidFill>
+              <a:srgbClr val="000000">
+                <a:alpha val="0"/>
+              </a:srgbClr>
+            </a:solidFill>
+            <a:prstDash val="solid"/>
+          </a:ln>
+        </p:spPr>
+      </p:sp>
+      <p:sp>
+        <p:nvSpPr>
+          <p:cNvPr id="12" name="">
+            <a:extLst xmlns:a="http://schemas.openxmlformats.org/drawingml/2006/main">
+              <a:ext uri="{FF2B5EF4-FFF2-40B4-BE49-F238E27FC236}">
+                <a16:creationId xmlns:a16="http://schemas.microsoft.com/office/drawing/2014/main" id="{81ACCA4A-70D8-4649-A901-CFF05B524B1B}"/>
               </a:ext>
             </a:extLst>
           </p:cNvPr>
@@ -13217,7 +13917,7 @@
             <a:pPr algn="l">
               <a:defRPr sz="1425" b="0">
                 <a:solidFill>
-                  <a:srgbClr val="111111"/>
+                  <a:srgbClr val="151515"/>
                 </a:solidFill>
                 <a:latin typeface="Aptos Mono"/>
                 <a:ea typeface="Aptos Mono"/>
@@ -13227,7 +13927,7 @@
             <a:r>
               <a:rPr sz="1425" b="0">
                 <a:solidFill>
-                  <a:srgbClr val="111111"/>
+                  <a:srgbClr val="151515"/>
                 </a:solidFill>
                 <a:latin typeface="Aptos Mono"/>
                 <a:ea typeface="Aptos Mono"/>
@@ -13245,7 +13945,7 @@
             <a:pPr algn="l">
               <a:defRPr sz="1425" b="0">
                 <a:solidFill>
-                  <a:srgbClr val="111111"/>
+                  <a:srgbClr val="151515"/>
                 </a:solidFill>
                 <a:latin typeface="Aptos Mono"/>
                 <a:ea typeface="Aptos Mono"/>
@@ -13255,7 +13955,7 @@
             <a:r>
               <a:rPr sz="1425" b="0">
                 <a:solidFill>
-                  <a:srgbClr val="111111"/>
+                  <a:srgbClr val="151515"/>
                 </a:solidFill>
                 <a:latin typeface="Aptos Mono"/>
                 <a:ea typeface="Aptos Mono"/>
@@ -13273,7 +13973,7 @@
             <a:pPr algn="l">
               <a:defRPr sz="1425" b="0">
                 <a:solidFill>
-                  <a:srgbClr val="111111"/>
+                  <a:srgbClr val="151515"/>
                 </a:solidFill>
                 <a:latin typeface="Aptos Mono"/>
                 <a:ea typeface="Aptos Mono"/>
@@ -13283,7 +13983,7 @@
             <a:r>
               <a:rPr sz="1425" b="0">
                 <a:solidFill>
-                  <a:srgbClr val="111111"/>
+                  <a:srgbClr val="151515"/>
                 </a:solidFill>
                 <a:latin typeface="Aptos Mono"/>
                 <a:ea typeface="Aptos Mono"/>
@@ -13296,10 +13996,10 @@
       </p:sp>
       <p:sp>
         <p:nvSpPr>
-          <p:cNvPr id="10" name="">
-            <a:extLst xmlns:a="http://schemas.openxmlformats.org/drawingml/2006/main">
-              <a:ext uri="{FF2B5EF4-FFF2-40B4-BE49-F238E27FC236}">
-                <a16:creationId xmlns:a16="http://schemas.microsoft.com/office/drawing/2014/main" id="{B6F9577B-0CD1-4547-BBFE-5C1802D415C2}"/>
+          <p:cNvPr id="13" name="">
+            <a:extLst xmlns:a="http://schemas.openxmlformats.org/drawingml/2006/main">
+              <a:ext uri="{FF2B5EF4-FFF2-40B4-BE49-F238E27FC236}">
+                <a16:creationId xmlns:a16="http://schemas.microsoft.com/office/drawing/2014/main" id="{2D1EBB28-55E5-45E3-90D0-B04E45073D29}"/>
               </a:ext>
             </a:extLst>
           </p:cNvPr>
@@ -13311,30 +14011,30 @@
         <p:spPr>
           <a:xfrm xmlns:a="http://schemas.openxmlformats.org/drawingml/2006/main">
             <a:off x="2286000" y="5219700"/>
-            <a:ext cx="38100" cy="38100"/>
-          </a:xfrm>
-          <a:prstGeom xmlns:a="http://schemas.openxmlformats.org/drawingml/2006/main" prst="rect">
-            <a:avLst/>
-          </a:prstGeom>
-          <a:solidFill xmlns:a="http://schemas.openxmlformats.org/drawingml/2006/main">
-            <a:srgbClr val="111111"/>
-          </a:solidFill>
-          <a:ln xmlns:a="http://schemas.openxmlformats.org/drawingml/2006/main" w="0">
-            <a:solidFill>
-              <a:srgbClr val="000000">
-                <a:alpha val="0"/>
-              </a:srgbClr>
-            </a:solidFill>
-            <a:prstDash val="solid"/>
-          </a:ln>
-        </p:spPr>
-      </p:sp>
-      <p:sp>
-        <p:nvSpPr>
-          <p:cNvPr id="11" name="">
-            <a:extLst xmlns:a="http://schemas.openxmlformats.org/drawingml/2006/main">
-              <a:ext uri="{FF2B5EF4-FFF2-40B4-BE49-F238E27FC236}">
-                <a16:creationId xmlns:a16="http://schemas.microsoft.com/office/drawing/2014/main" id="{6709B7B2-FDE4-48A9-8723-5BB2DAE35AF9}"/>
+            <a:ext cx="47625" cy="47625"/>
+          </a:xfrm>
+          <a:prstGeom xmlns:a="http://schemas.openxmlformats.org/drawingml/2006/main" prst="rect">
+            <a:avLst/>
+          </a:prstGeom>
+          <a:solidFill xmlns:a="http://schemas.openxmlformats.org/drawingml/2006/main">
+            <a:srgbClr val="C45A2A"/>
+          </a:solidFill>
+          <a:ln xmlns:a="http://schemas.openxmlformats.org/drawingml/2006/main" w="0">
+            <a:solidFill>
+              <a:srgbClr val="000000">
+                <a:alpha val="0"/>
+              </a:srgbClr>
+            </a:solidFill>
+            <a:prstDash val="solid"/>
+          </a:ln>
+        </p:spPr>
+      </p:sp>
+      <p:sp>
+        <p:nvSpPr>
+          <p:cNvPr id="14" name="">
+            <a:extLst xmlns:a="http://schemas.openxmlformats.org/drawingml/2006/main">
+              <a:ext uri="{FF2B5EF4-FFF2-40B4-BE49-F238E27FC236}">
+                <a16:creationId xmlns:a16="http://schemas.microsoft.com/office/drawing/2014/main" id="{A20CF610-FCB1-4BD7-B69E-457C8306A4E7}"/>
               </a:ext>
             </a:extLst>
           </p:cNvPr>
@@ -13372,7 +14072,7 @@
             <a:pPr algn="l">
               <a:defRPr sz="1350" b="0">
                 <a:solidFill>
-                  <a:srgbClr val="222222"/>
+                  <a:srgbClr val="242424"/>
                 </a:solidFill>
                 <a:latin typeface="Aptos"/>
                 <a:ea typeface="Aptos"/>
@@ -13382,7 +14082,7 @@
             <a:r>
               <a:rPr sz="1350" b="0">
                 <a:solidFill>
-                  <a:srgbClr val="222222"/>
+                  <a:srgbClr val="242424"/>
                 </a:solidFill>
                 <a:latin typeface="Aptos"/>
                 <a:ea typeface="Aptos"/>
@@ -13395,10 +14095,10 @@
       </p:sp>
       <p:sp>
         <p:nvSpPr>
-          <p:cNvPr id="12" name="">
-            <a:extLst xmlns:a="http://schemas.openxmlformats.org/drawingml/2006/main">
-              <a:ext uri="{FF2B5EF4-FFF2-40B4-BE49-F238E27FC236}">
-                <a16:creationId xmlns:a16="http://schemas.microsoft.com/office/drawing/2014/main" id="{661AD245-E119-417E-950F-EEEB2CE04C08}"/>
+          <p:cNvPr id="15" name="">
+            <a:extLst xmlns:a="http://schemas.openxmlformats.org/drawingml/2006/main">
+              <a:ext uri="{FF2B5EF4-FFF2-40B4-BE49-F238E27FC236}">
+                <a16:creationId xmlns:a16="http://schemas.microsoft.com/office/drawing/2014/main" id="{B4C87544-DFAF-414C-B070-C8E06EF67276}"/>
               </a:ext>
             </a:extLst>
           </p:cNvPr>
@@ -13410,30 +14110,30 @@
         <p:spPr>
           <a:xfrm xmlns:a="http://schemas.openxmlformats.org/drawingml/2006/main">
             <a:off x="2286000" y="5581650"/>
-            <a:ext cx="38100" cy="38100"/>
-          </a:xfrm>
-          <a:prstGeom xmlns:a="http://schemas.openxmlformats.org/drawingml/2006/main" prst="rect">
-            <a:avLst/>
-          </a:prstGeom>
-          <a:solidFill xmlns:a="http://schemas.openxmlformats.org/drawingml/2006/main">
-            <a:srgbClr val="111111"/>
-          </a:solidFill>
-          <a:ln xmlns:a="http://schemas.openxmlformats.org/drawingml/2006/main" w="0">
-            <a:solidFill>
-              <a:srgbClr val="000000">
-                <a:alpha val="0"/>
-              </a:srgbClr>
-            </a:solidFill>
-            <a:prstDash val="solid"/>
-          </a:ln>
-        </p:spPr>
-      </p:sp>
-      <p:sp>
-        <p:nvSpPr>
-          <p:cNvPr id="13" name="">
-            <a:extLst xmlns:a="http://schemas.openxmlformats.org/drawingml/2006/main">
-              <a:ext uri="{FF2B5EF4-FFF2-40B4-BE49-F238E27FC236}">
-                <a16:creationId xmlns:a16="http://schemas.microsoft.com/office/drawing/2014/main" id="{CFD90FB9-F07C-4873-BE57-5A161D9F6590}"/>
+            <a:ext cx="47625" cy="47625"/>
+          </a:xfrm>
+          <a:prstGeom xmlns:a="http://schemas.openxmlformats.org/drawingml/2006/main" prst="rect">
+            <a:avLst/>
+          </a:prstGeom>
+          <a:solidFill xmlns:a="http://schemas.openxmlformats.org/drawingml/2006/main">
+            <a:srgbClr val="C45A2A"/>
+          </a:solidFill>
+          <a:ln xmlns:a="http://schemas.openxmlformats.org/drawingml/2006/main" w="0">
+            <a:solidFill>
+              <a:srgbClr val="000000">
+                <a:alpha val="0"/>
+              </a:srgbClr>
+            </a:solidFill>
+            <a:prstDash val="solid"/>
+          </a:ln>
+        </p:spPr>
+      </p:sp>
+      <p:sp>
+        <p:nvSpPr>
+          <p:cNvPr id="16" name="">
+            <a:extLst xmlns:a="http://schemas.openxmlformats.org/drawingml/2006/main">
+              <a:ext uri="{FF2B5EF4-FFF2-40B4-BE49-F238E27FC236}">
+                <a16:creationId xmlns:a16="http://schemas.microsoft.com/office/drawing/2014/main" id="{D28C840F-4BDE-40A1-823E-060B19D488A3}"/>
               </a:ext>
             </a:extLst>
           </p:cNvPr>
@@ -13471,7 +14171,7 @@
             <a:pPr algn="l">
               <a:defRPr sz="1350" b="0">
                 <a:solidFill>
-                  <a:srgbClr val="222222"/>
+                  <a:srgbClr val="242424"/>
                 </a:solidFill>
                 <a:latin typeface="Aptos"/>
                 <a:ea typeface="Aptos"/>
@@ -13481,7 +14181,7 @@
             <a:r>
               <a:rPr sz="1350" b="0">
                 <a:solidFill>
-                  <a:srgbClr val="222222"/>
+                  <a:srgbClr val="242424"/>
                 </a:solidFill>
                 <a:latin typeface="Aptos"/>
                 <a:ea typeface="Aptos"/>
@@ -13494,10 +14194,10 @@
       </p:sp>
       <p:sp>
         <p:nvSpPr>
-          <p:cNvPr id="14" name="">
-            <a:extLst xmlns:a="http://schemas.openxmlformats.org/drawingml/2006/main">
-              <a:ext uri="{FF2B5EF4-FFF2-40B4-BE49-F238E27FC236}">
-                <a16:creationId xmlns:a16="http://schemas.microsoft.com/office/drawing/2014/main" id="{26747A4F-F638-4CAA-BF9B-6D442ABEB974}"/>
+          <p:cNvPr id="17" name="">
+            <a:extLst xmlns:a="http://schemas.openxmlformats.org/drawingml/2006/main">
+              <a:ext uri="{FF2B5EF4-FFF2-40B4-BE49-F238E27FC236}">
+                <a16:creationId xmlns:a16="http://schemas.microsoft.com/office/drawing/2014/main" id="{EE0CCA78-CDD4-4E76-A959-9FC9B6B0E67C}"/>
               </a:ext>
             </a:extLst>
           </p:cNvPr>
@@ -13515,24 +14215,24 @@
             <a:avLst/>
           </a:prstGeom>
           <a:solidFill xmlns:a="http://schemas.openxmlformats.org/drawingml/2006/main">
-            <a:srgbClr val="CFCFCF"/>
-          </a:solidFill>
-          <a:ln xmlns:a="http://schemas.openxmlformats.org/drawingml/2006/main" w="0">
-            <a:solidFill>
-              <a:srgbClr val="000000">
-                <a:alpha val="0"/>
-              </a:srgbClr>
-            </a:solidFill>
-            <a:prstDash val="solid"/>
-          </a:ln>
-        </p:spPr>
-      </p:sp>
-      <p:sp>
-        <p:nvSpPr>
-          <p:cNvPr id="15" name="">
-            <a:extLst xmlns:a="http://schemas.openxmlformats.org/drawingml/2006/main">
-              <a:ext uri="{FF2B5EF4-FFF2-40B4-BE49-F238E27FC236}">
-                <a16:creationId xmlns:a16="http://schemas.microsoft.com/office/drawing/2014/main" id="{1557A8E8-4333-4C00-B2DC-E2EE841DD310}"/>
+            <a:srgbClr val="D4D8DD"/>
+          </a:solidFill>
+          <a:ln xmlns:a="http://schemas.openxmlformats.org/drawingml/2006/main" w="0">
+            <a:solidFill>
+              <a:srgbClr val="000000">
+                <a:alpha val="0"/>
+              </a:srgbClr>
+            </a:solidFill>
+            <a:prstDash val="solid"/>
+          </a:ln>
+        </p:spPr>
+      </p:sp>
+      <p:sp>
+        <p:nvSpPr>
+          <p:cNvPr id="18" name="">
+            <a:extLst xmlns:a="http://schemas.openxmlformats.org/drawingml/2006/main">
+              <a:ext uri="{FF2B5EF4-FFF2-40B4-BE49-F238E27FC236}">
+                <a16:creationId xmlns:a16="http://schemas.microsoft.com/office/drawing/2014/main" id="{8146CA95-8EE6-4EF9-950F-82807C095A03}"/>
               </a:ext>
             </a:extLst>
           </p:cNvPr>
@@ -13594,7 +14294,7 @@
     </p:spTree>
     <p:extLst>
       <p:ext uri="{BB962C8B-B14F-4D97-AF65-F5344CB8AC3E}">
-        <p14:creationId xmlns:p14="http://schemas.microsoft.com/office/powerpoint/2010/main" val="1288487664"/>
+        <p14:creationId xmlns:p14="http://schemas.microsoft.com/office/powerpoint/2010/main" val="273016784"/>
       </p:ext>
     </p:extLst>
   </p:cSld>

--- a/presentation/pnp_pinn_current_inference_presentation.pptx
+++ b/presentation/pnp_pinn_current_inference_presentation.pptx
@@ -1919,412 +1919,622 @@
       <p:grpSpPr>
         <a:xfrm xmlns:a="http://schemas.openxmlformats.org/drawingml/2006/main"/>
       </p:grpSpPr>
-      <p:sp>
-        <p:nvSpPr>
-          <p:cNvPr id="1" name="">
-            <a:extLst xmlns:a="http://schemas.openxmlformats.org/drawingml/2006/main">
-              <a:ext uri="{FF2B5EF4-FFF2-40B4-BE49-F238E27FC236}">
-                <a16:creationId xmlns:a16="http://schemas.microsoft.com/office/drawing/2014/main" id="{B4D54500-79B5-4365-83B4-B5821F96BCB9}"/>
-              </a:ext>
-            </a:extLst>
-          </p:cNvPr>
-          <p:cNvSpPr>
-            <a:spLocks xmlns:a="http://schemas.openxmlformats.org/drawingml/2006/main" noGrp="1"/>
-          </p:cNvSpPr>
-          <p:nvPr/>
-        </p:nvSpPr>
-        <p:spPr>
-          <a:xfrm xmlns:a="http://schemas.openxmlformats.org/drawingml/2006/main">
+      <p:sp xmlns:a="http://schemas.openxmlformats.org/drawingml/2006/main">
+        <p:nvSpPr>
+          <p:cNvPr id="2" name="Rectangle 1"/>
+          <p:cNvSpPr/>
+          <p:nvPr/>
+        </p:nvSpPr>
+        <p:spPr>
+          <a:xfrm>
             <a:off x="0" y="0"/>
             <a:ext cx="12192000" cy="6858000"/>
           </a:xfrm>
-          <a:prstGeom xmlns:a="http://schemas.openxmlformats.org/drawingml/2006/main" prst="rect">
-            <a:avLst/>
-          </a:prstGeom>
-          <a:solidFill xmlns:a="http://schemas.openxmlformats.org/drawingml/2006/main">
+          <a:prstGeom prst="rect">
+            <a:avLst/>
+          </a:prstGeom>
+          <a:solidFill>
             <a:srgbClr val="FBFAF7"/>
           </a:solidFill>
-          <a:ln xmlns:a="http://schemas.openxmlformats.org/drawingml/2006/main" w="0">
-            <a:solidFill>
-              <a:srgbClr val="000000">
-                <a:alpha val="0"/>
-              </a:srgbClr>
-            </a:solidFill>
-            <a:prstDash val="solid"/>
-          </a:ln>
-        </p:spPr>
-      </p:sp>
-      <p:sp>
-        <p:nvSpPr>
-          <p:cNvPr id="2" name="">
-            <a:extLst xmlns:a="http://schemas.openxmlformats.org/drawingml/2006/main">
-              <a:ext uri="{FF2B5EF4-FFF2-40B4-BE49-F238E27FC236}">
-                <a16:creationId xmlns:a16="http://schemas.microsoft.com/office/drawing/2014/main" id="{3A697213-76D0-4ABF-9EC9-9D9291C1FD38}"/>
-              </a:ext>
-            </a:extLst>
-          </p:cNvPr>
-          <p:cNvSpPr>
-            <a:spLocks xmlns:a="http://schemas.openxmlformats.org/drawingml/2006/main" noGrp="1"/>
-          </p:cNvSpPr>
-          <p:nvPr/>
-        </p:nvSpPr>
-        <p:spPr>
-          <a:xfrm xmlns:a="http://schemas.openxmlformats.org/drawingml/2006/main">
-            <a:off x="685800" y="704850"/>
-            <a:ext cx="1714500" cy="28575"/>
-          </a:xfrm>
-          <a:prstGeom xmlns:a="http://schemas.openxmlformats.org/drawingml/2006/main" prst="rect">
-            <a:avLst/>
-          </a:prstGeom>
-          <a:solidFill xmlns:a="http://schemas.openxmlformats.org/drawingml/2006/main">
+          <a:ln>
+            <a:noFill/>
+          </a:ln>
+        </p:spPr>
+        <p:style>
+          <a:lnRef idx="1">
+            <a:schemeClr val="accent1"/>
+          </a:lnRef>
+          <a:fillRef idx="3">
+            <a:schemeClr val="accent1"/>
+          </a:fillRef>
+          <a:effectRef idx="2">
+            <a:schemeClr val="accent1"/>
+          </a:effectRef>
+          <a:fontRef idx="minor">
+            <a:schemeClr val="lt1"/>
+          </a:fontRef>
+        </p:style>
+        <p:txBody>
+          <a:bodyPr rtlCol="0" anchor="ctr"/>
+          <a:lstStyle/>
+          <a:p>
+            <a:pPr algn="ctr"/>
+          </a:p>
+        </p:txBody>
+      </p:sp>
+      <p:sp xmlns:a="http://schemas.openxmlformats.org/drawingml/2006/main">
+        <p:nvSpPr>
+          <p:cNvPr id="3" name="TextBox 2"/>
+          <p:cNvSpPr txBox="1"/>
+          <p:nvPr/>
+        </p:nvSpPr>
+        <p:spPr>
+          <a:xfrm>
+            <a:off x="685800" y="411480"/>
+            <a:ext cx="2926080" cy="219456"/>
+          </a:xfrm>
+          <a:prstGeom prst="rect">
+            <a:avLst/>
+          </a:prstGeom>
+          <a:noFill/>
+        </p:spPr>
+        <p:txBody>
+          <a:bodyPr wrap="none" lIns="0" rIns="0" tIns="0" bIns="0">
+            <a:spAutoFit/>
+          </a:bodyPr>
+          <a:lstStyle/>
+          <a:p>
+            <a:r>
+              <a:rPr sz="1050" b="1">
+                <a:solidFill>
+                  <a:srgbClr val="6D6D6D"/>
+                </a:solidFill>
+                <a:latin typeface="Helvetica Neue"/>
+              </a:rPr>
+              <a:t>Academic presentation</a:t>
+            </a:r>
+          </a:p>
+        </p:txBody>
+      </p:sp>
+      <p:sp xmlns:a="http://schemas.openxmlformats.org/drawingml/2006/main">
+        <p:nvSpPr>
+          <p:cNvPr id="4" name="Rectangle 3"/>
+          <p:cNvSpPr/>
+          <p:nvPr/>
+        </p:nvSpPr>
+        <p:spPr>
+          <a:xfrm>
+            <a:off x="685800" y="713232"/>
+            <a:ext cx="1737360" cy="27432"/>
+          </a:xfrm>
+          <a:prstGeom prst="rect">
+            <a:avLst/>
+          </a:prstGeom>
+          <a:solidFill>
             <a:srgbClr val="008C95"/>
           </a:solidFill>
-          <a:ln xmlns:a="http://schemas.openxmlformats.org/drawingml/2006/main" w="0">
-            <a:solidFill>
-              <a:srgbClr val="000000">
-                <a:alpha val="0"/>
-              </a:srgbClr>
-            </a:solidFill>
-            <a:prstDash val="solid"/>
-          </a:ln>
-        </p:spPr>
-      </p:sp>
-      <p:sp>
-        <p:nvSpPr>
-          <p:cNvPr id="3" name="">
-            <a:extLst xmlns:a="http://schemas.openxmlformats.org/drawingml/2006/main">
-              <a:ext uri="{FF2B5EF4-FFF2-40B4-BE49-F238E27FC236}">
-                <a16:creationId xmlns:a16="http://schemas.microsoft.com/office/drawing/2014/main" id="{8C2CD9B3-98A2-47CA-8F4C-7391DFB930A5}"/>
-              </a:ext>
-            </a:extLst>
-          </p:cNvPr>
-          <p:cNvSpPr>
-            <a:spLocks xmlns:a="http://schemas.openxmlformats.org/drawingml/2006/main" noGrp="1"/>
-          </p:cNvSpPr>
-          <p:nvPr/>
-        </p:nvSpPr>
-        <p:spPr>
-          <a:xfrm xmlns:a="http://schemas.openxmlformats.org/drawingml/2006/main">
-            <a:off x="685800" y="400050"/>
-            <a:ext cx="3429000" cy="171450"/>
-          </a:xfrm>
-          <a:prstGeom xmlns:a="http://schemas.openxmlformats.org/drawingml/2006/main" prst="rect">
-            <a:avLst/>
-          </a:prstGeom>
-          <a:solidFill xmlns:a="http://schemas.openxmlformats.org/drawingml/2006/main">
-            <a:srgbClr val="000000">
-              <a:alpha val="0"/>
-            </a:srgbClr>
-          </a:solidFill>
-          <a:ln xmlns:a="http://schemas.openxmlformats.org/drawingml/2006/main" w="0">
-            <a:solidFill>
-              <a:srgbClr val="000000">
-                <a:alpha val="0"/>
-              </a:srgbClr>
-            </a:solidFill>
-            <a:prstDash val="solid"/>
-          </a:ln>
-        </p:spPr>
-        <p:txBody>
-          <a:bodyPr xmlns:a="http://schemas.openxmlformats.org/drawingml/2006/main" lIns="0" tIns="0" rIns="0" bIns="0" anchor="t"/>
-          <a:lstStyle xmlns:a="http://schemas.openxmlformats.org/drawingml/2006/main"/>
-          <a:p xmlns:a="http://schemas.openxmlformats.org/drawingml/2006/main">
-            <a:pPr algn="l">
-              <a:defRPr sz="825" b="1">
+          <a:ln>
+            <a:noFill/>
+          </a:ln>
+        </p:spPr>
+        <p:style>
+          <a:lnRef idx="1">
+            <a:schemeClr val="accent1"/>
+          </a:lnRef>
+          <a:fillRef idx="3">
+            <a:schemeClr val="accent1"/>
+          </a:fillRef>
+          <a:effectRef idx="2">
+            <a:schemeClr val="accent1"/>
+          </a:effectRef>
+          <a:fontRef idx="minor">
+            <a:schemeClr val="lt1"/>
+          </a:fontRef>
+        </p:style>
+        <p:txBody>
+          <a:bodyPr rtlCol="0" anchor="ctr"/>
+          <a:lstStyle/>
+          <a:p>
+            <a:pPr algn="ctr"/>
+          </a:p>
+        </p:txBody>
+      </p:sp>
+      <p:sp xmlns:a="http://schemas.openxmlformats.org/drawingml/2006/main">
+        <p:nvSpPr>
+          <p:cNvPr id="5" name="TextBox 4"/>
+          <p:cNvSpPr txBox="1"/>
+          <p:nvPr/>
+        </p:nvSpPr>
+        <p:spPr>
+          <a:xfrm>
+            <a:off x="685800" y="1325880"/>
+            <a:ext cx="6812280" cy="1143000"/>
+          </a:xfrm>
+          <a:prstGeom prst="rect">
+            <a:avLst/>
+          </a:prstGeom>
+          <a:noFill/>
+        </p:spPr>
+        <p:txBody>
+          <a:bodyPr wrap="none" lIns="0" rIns="0" tIns="0" bIns="0">
+            <a:spAutoFit/>
+          </a:bodyPr>
+          <a:lstStyle/>
+          <a:p>
+            <a:r>
+              <a:rPr sz="3100" b="1">
+                <a:solidFill>
+                  <a:srgbClr val="151515"/>
+                </a:solidFill>
+                <a:latin typeface="Helvetica Neue"/>
+              </a:rPr>
+              <a:t>Current-Based Inverse Inference
+for a 1D Poisson-Nernst-Planck System</a:t>
+            </a:r>
+          </a:p>
+        </p:txBody>
+      </p:sp>
+      <p:sp xmlns:a="http://schemas.openxmlformats.org/drawingml/2006/main">
+        <p:nvSpPr>
+          <p:cNvPr id="6" name="TextBox 5"/>
+          <p:cNvSpPr txBox="1"/>
+          <p:nvPr/>
+        </p:nvSpPr>
+        <p:spPr>
+          <a:xfrm>
+            <a:off x="713232" y="2788920"/>
+            <a:ext cx="6720840" cy="320040"/>
+          </a:xfrm>
+          <a:prstGeom prst="rect">
+            <a:avLst/>
+          </a:prstGeom>
+          <a:noFill/>
+        </p:spPr>
+        <p:txBody>
+          <a:bodyPr wrap="none" lIns="0" rIns="0" tIns="0" bIns="0">
+            <a:spAutoFit/>
+          </a:bodyPr>
+          <a:lstStyle/>
+          <a:p>
+            <a:r>
+              <a:rPr sz="1700" b="0">
                 <a:solidFill>
                   <a:srgbClr val="6D6D6D"/>
                 </a:solidFill>
-                <a:latin typeface="Aptos"/>
-                <a:ea typeface="Aptos"/>
-                <a:cs typeface="Aptos"/>
-              </a:defRPr>
-            </a:pPr>
-            <a:r>
-              <a:rPr sz="825" b="1">
+                <a:latin typeface="Helvetica Neue"/>
+              </a:rPr>
+              <a:t>A physics-informed neural-network surrogate for diffusion-parameter inference</a:t>
+            </a:r>
+          </a:p>
+        </p:txBody>
+      </p:sp>
+      <p:sp xmlns:a="http://schemas.openxmlformats.org/drawingml/2006/main">
+        <p:nvSpPr>
+          <p:cNvPr id="7" name="Rectangle 6"/>
+          <p:cNvSpPr/>
+          <p:nvPr/>
+        </p:nvSpPr>
+        <p:spPr>
+          <a:xfrm>
+            <a:off x="7909560" y="1261872"/>
+            <a:ext cx="3154680" cy="2880360"/>
+          </a:xfrm>
+          <a:prstGeom prst="rect">
+            <a:avLst/>
+          </a:prstGeom>
+          <a:solidFill>
+            <a:srgbClr val="FFFFFF"/>
+          </a:solidFill>
+          <a:ln w="11430">
+            <a:solidFill>
+              <a:srgbClr val="008C95"/>
+            </a:solidFill>
+          </a:ln>
+        </p:spPr>
+        <p:style>
+          <a:lnRef idx="1">
+            <a:schemeClr val="accent1"/>
+          </a:lnRef>
+          <a:fillRef idx="3">
+            <a:schemeClr val="accent1"/>
+          </a:fillRef>
+          <a:effectRef idx="2">
+            <a:schemeClr val="accent1"/>
+          </a:effectRef>
+          <a:fontRef idx="minor">
+            <a:schemeClr val="lt1"/>
+          </a:fontRef>
+        </p:style>
+        <p:txBody>
+          <a:bodyPr rtlCol="0" anchor="ctr"/>
+          <a:lstStyle/>
+          <a:p>
+            <a:pPr algn="ctr"/>
+          </a:p>
+        </p:txBody>
+      </p:sp>
+      <p:sp xmlns:a="http://schemas.openxmlformats.org/drawingml/2006/main">
+        <p:nvSpPr>
+          <p:cNvPr id="8" name="Rectangle 7"/>
+          <p:cNvSpPr/>
+          <p:nvPr/>
+        </p:nvSpPr>
+        <p:spPr>
+          <a:xfrm>
+            <a:off x="7909560" y="1261872"/>
+            <a:ext cx="3154680" cy="32004"/>
+          </a:xfrm>
+          <a:prstGeom prst="rect">
+            <a:avLst/>
+          </a:prstGeom>
+          <a:solidFill>
+            <a:srgbClr val="008C95"/>
+          </a:solidFill>
+          <a:ln>
+            <a:noFill/>
+          </a:ln>
+        </p:spPr>
+        <p:style>
+          <a:lnRef idx="1">
+            <a:schemeClr val="accent1"/>
+          </a:lnRef>
+          <a:fillRef idx="3">
+            <a:schemeClr val="accent1"/>
+          </a:fillRef>
+          <a:effectRef idx="2">
+            <a:schemeClr val="accent1"/>
+          </a:effectRef>
+          <a:fontRef idx="minor">
+            <a:schemeClr val="lt1"/>
+          </a:fontRef>
+        </p:style>
+        <p:txBody>
+          <a:bodyPr rtlCol="0" anchor="ctr"/>
+          <a:lstStyle/>
+          <a:p>
+            <a:pPr algn="ctr"/>
+          </a:p>
+        </p:txBody>
+      </p:sp>
+      <p:sp xmlns:a="http://schemas.openxmlformats.org/drawingml/2006/main">
+        <p:nvSpPr>
+          <p:cNvPr id="9" name="TextBox 8"/>
+          <p:cNvSpPr txBox="1"/>
+          <p:nvPr/>
+        </p:nvSpPr>
+        <p:spPr>
+          <a:xfrm>
+            <a:off x="8183879" y="1572768"/>
+            <a:ext cx="2103120" cy="219456"/>
+          </a:xfrm>
+          <a:prstGeom prst="rect">
+            <a:avLst/>
+          </a:prstGeom>
+          <a:noFill/>
+        </p:spPr>
+        <p:txBody>
+          <a:bodyPr wrap="none" lIns="0" rIns="0" tIns="0" bIns="0">
+            <a:spAutoFit/>
+          </a:bodyPr>
+          <a:lstStyle/>
+          <a:p>
+            <a:r>
+              <a:rPr sz="1200" b="1">
+                <a:solidFill>
+                  <a:srgbClr val="008C95"/>
+                </a:solidFill>
+                <a:latin typeface="Aptos"/>
+              </a:rPr>
+              <a:t>Research question</a:t>
+            </a:r>
+          </a:p>
+        </p:txBody>
+      </p:sp>
+      <p:sp xmlns:a="http://schemas.openxmlformats.org/drawingml/2006/main">
+        <p:nvSpPr>
+          <p:cNvPr id="10" name="TextBox 9"/>
+          <p:cNvSpPr txBox="1"/>
+          <p:nvPr/>
+        </p:nvSpPr>
+        <p:spPr>
+          <a:xfrm>
+            <a:off x="8183879" y="1920240"/>
+            <a:ext cx="2606040" cy="960120"/>
+          </a:xfrm>
+          <a:prstGeom prst="rect">
+            <a:avLst/>
+          </a:prstGeom>
+          <a:noFill/>
+        </p:spPr>
+        <p:txBody>
+          <a:bodyPr wrap="none" lIns="0" rIns="0" tIns="0" bIns="0">
+            <a:spAutoFit/>
+          </a:bodyPr>
+          <a:lstStyle/>
+          <a:p>
+            <a:r>
+              <a:rPr sz="2400" b="1">
+                <a:solidFill>
+                  <a:srgbClr val="151515"/>
+                </a:solidFill>
+                <a:latin typeface="Helvetica Neue"/>
+              </a:rPr>
+              <a:t>Can electrode
+current identify
+Dp and Dn?</a:t>
+            </a:r>
+          </a:p>
+        </p:txBody>
+      </p:sp>
+      <p:sp xmlns:a="http://schemas.openxmlformats.org/drawingml/2006/main">
+        <p:nvSpPr>
+          <p:cNvPr id="11" name="TextBox 10"/>
+          <p:cNvSpPr txBox="1"/>
+          <p:nvPr/>
+        </p:nvSpPr>
+        <p:spPr>
+          <a:xfrm>
+            <a:off x="8183879" y="3182112"/>
+            <a:ext cx="1143000" cy="201168"/>
+          </a:xfrm>
+          <a:prstGeom prst="rect">
+            <a:avLst/>
+          </a:prstGeom>
+          <a:noFill/>
+        </p:spPr>
+        <p:txBody>
+          <a:bodyPr wrap="none" lIns="0" rIns="0" tIns="0" bIns="0">
+            <a:spAutoFit/>
+          </a:bodyPr>
+          <a:lstStyle/>
+          <a:p>
+            <a:r>
+              <a:rPr sz="1050" b="1">
+                <a:solidFill>
+                  <a:srgbClr val="D05A2A"/>
+                </a:solidFill>
+                <a:latin typeface="Helvetica Neue"/>
+              </a:rPr>
+              <a:t>observation</a:t>
+            </a:r>
+          </a:p>
+        </p:txBody>
+      </p:sp>
+      <p:sp xmlns:a="http://schemas.openxmlformats.org/drawingml/2006/main">
+        <p:nvSpPr>
+          <p:cNvPr id="12" name="TextBox 11"/>
+          <p:cNvSpPr txBox="1"/>
+          <p:nvPr/>
+        </p:nvSpPr>
+        <p:spPr>
+          <a:xfrm>
+            <a:off x="8183879" y="3438144"/>
+            <a:ext cx="731520" cy="228600"/>
+          </a:xfrm>
+          <a:prstGeom prst="rect">
+            <a:avLst/>
+          </a:prstGeom>
+          <a:noFill/>
+        </p:spPr>
+        <p:txBody>
+          <a:bodyPr wrap="none" lIns="0" rIns="0" tIns="0" bIns="0">
+            <a:spAutoFit/>
+          </a:bodyPr>
+          <a:lstStyle/>
+          <a:p>
+            <a:r>
+              <a:rPr sz="1800" b="1">
+                <a:solidFill>
+                  <a:srgbClr val="D05A2A"/>
+                </a:solidFill>
+                <a:latin typeface="Helvetica Neue"/>
+              </a:rPr>
+              <a:t>I(t)</a:t>
+            </a:r>
+          </a:p>
+        </p:txBody>
+      </p:sp>
+      <p:cxnSp xmlns:a="http://schemas.openxmlformats.org/drawingml/2006/main">
+        <p:nvCxnSpPr>
+          <p:cNvPr id="13" name="Connector 12"/>
+          <p:cNvCxnSpPr/>
+          <p:nvPr/>
+        </p:nvCxnSpPr>
+        <p:spPr>
+          <a:xfrm>
+            <a:off x="8979408" y="3547872"/>
+            <a:ext cx="566928" cy="0"/>
+          </a:xfrm>
+          <a:prstGeom prst="line">
+            <a:avLst/>
+          </a:prstGeom>
+          <a:ln w="16510">
+            <a:solidFill>
+              <a:srgbClr val="6D6D6D"/>
+            </a:solidFill>
+          </a:ln>
+        </p:spPr>
+        <p:style>
+          <a:lnRef idx="2">
+            <a:schemeClr val="accent1"/>
+          </a:lnRef>
+          <a:fillRef idx="0">
+            <a:schemeClr val="accent1"/>
+          </a:fillRef>
+          <a:effectRef idx="1">
+            <a:schemeClr val="accent1"/>
+          </a:effectRef>
+          <a:fontRef idx="minor">
+            <a:schemeClr val="tx1"/>
+          </a:fontRef>
+        </p:style>
+      </p:cxnSp>
+      <p:sp xmlns:a="http://schemas.openxmlformats.org/drawingml/2006/main">
+        <p:nvSpPr>
+          <p:cNvPr id="14" name="TextBox 13"/>
+          <p:cNvSpPr txBox="1"/>
+          <p:nvPr/>
+        </p:nvSpPr>
+        <p:spPr>
+          <a:xfrm>
+            <a:off x="9674352" y="3182112"/>
+            <a:ext cx="1051560" cy="201168"/>
+          </a:xfrm>
+          <a:prstGeom prst="rect">
+            <a:avLst/>
+          </a:prstGeom>
+          <a:noFill/>
+        </p:spPr>
+        <p:txBody>
+          <a:bodyPr wrap="none" lIns="0" rIns="0" tIns="0" bIns="0">
+            <a:spAutoFit/>
+          </a:bodyPr>
+          <a:lstStyle/>
+          <a:p>
+            <a:r>
+              <a:rPr sz="1050" b="1">
+                <a:solidFill>
+                  <a:srgbClr val="3F7D55"/>
+                </a:solidFill>
+                <a:latin typeface="Helvetica Neue"/>
+              </a:rPr>
+              <a:t>output</a:t>
+            </a:r>
+          </a:p>
+        </p:txBody>
+      </p:sp>
+      <p:sp xmlns:a="http://schemas.openxmlformats.org/drawingml/2006/main">
+        <p:nvSpPr>
+          <p:cNvPr id="15" name="TextBox 14"/>
+          <p:cNvSpPr txBox="1"/>
+          <p:nvPr/>
+        </p:nvSpPr>
+        <p:spPr>
+          <a:xfrm>
+            <a:off x="9674352" y="3438144"/>
+            <a:ext cx="1188720" cy="457200"/>
+          </a:xfrm>
+          <a:prstGeom prst="rect">
+            <a:avLst/>
+          </a:prstGeom>
+          <a:noFill/>
+        </p:spPr>
+        <p:txBody>
+          <a:bodyPr wrap="none" lIns="0" rIns="0" tIns="0" bIns="0">
+            <a:spAutoFit/>
+          </a:bodyPr>
+          <a:lstStyle/>
+          <a:p>
+            <a:r>
+              <a:rPr sz="1500" b="1">
+                <a:solidFill>
+                  <a:srgbClr val="3F7D55"/>
+                </a:solidFill>
+                <a:latin typeface="Helvetica Neue"/>
+              </a:rPr>
+              <a:t>posterior over
+Dp, Dn</a:t>
+            </a:r>
+          </a:p>
+        </p:txBody>
+      </p:sp>
+      <p:sp xmlns:a="http://schemas.openxmlformats.org/drawingml/2006/main">
+        <p:nvSpPr>
+          <p:cNvPr id="16" name="TextBox 15"/>
+          <p:cNvSpPr txBox="1"/>
+          <p:nvPr/>
+        </p:nvSpPr>
+        <p:spPr>
+          <a:xfrm>
+            <a:off x="713232" y="4498848"/>
+            <a:ext cx="6492240" cy="502920"/>
+          </a:xfrm>
+          <a:prstGeom prst="rect">
+            <a:avLst/>
+          </a:prstGeom>
+          <a:noFill/>
+        </p:spPr>
+        <p:txBody>
+          <a:bodyPr wrap="none" lIns="0" rIns="0" tIns="0" bIns="0">
+            <a:spAutoFit/>
+          </a:bodyPr>
+          <a:lstStyle/>
+          <a:p>
+            <a:r>
+              <a:rPr sz="1400" b="0">
                 <a:solidFill>
                   <a:srgbClr val="6D6D6D"/>
                 </a:solidFill>
-                <a:latin typeface="Aptos"/>
-                <a:ea typeface="Aptos"/>
-                <a:cs typeface="Aptos"/>
-              </a:rPr>
-              <a:t>Academic presentation</a:t>
-            </a:r>
-          </a:p>
-        </p:txBody>
-      </p:sp>
-      <p:sp>
-        <p:nvSpPr>
-          <p:cNvPr id="4" name="">
-            <a:extLst xmlns:a="http://schemas.openxmlformats.org/drawingml/2006/main">
-              <a:ext uri="{FF2B5EF4-FFF2-40B4-BE49-F238E27FC236}">
-                <a16:creationId xmlns:a16="http://schemas.microsoft.com/office/drawing/2014/main" id="{A89D2A87-91F2-4AA6-97E1-8EAF8406B392}"/>
-              </a:ext>
-            </a:extLst>
-          </p:cNvPr>
-          <p:cNvSpPr>
-            <a:spLocks xmlns:a="http://schemas.openxmlformats.org/drawingml/2006/main" noGrp="1"/>
-          </p:cNvSpPr>
-          <p:nvPr/>
-        </p:nvSpPr>
-        <p:spPr>
-          <a:xfrm xmlns:a="http://schemas.openxmlformats.org/drawingml/2006/main">
-            <a:off x="685800" y="1257300"/>
-            <a:ext cx="9906000" cy="1257300"/>
-          </a:xfrm>
-          <a:prstGeom xmlns:a="http://schemas.openxmlformats.org/drawingml/2006/main" prst="rect">
-            <a:avLst/>
-          </a:prstGeom>
-          <a:solidFill xmlns:a="http://schemas.openxmlformats.org/drawingml/2006/main">
-            <a:srgbClr val="000000">
-              <a:alpha val="0"/>
-            </a:srgbClr>
-          </a:solidFill>
-          <a:ln xmlns:a="http://schemas.openxmlformats.org/drawingml/2006/main" w="0">
-            <a:solidFill>
-              <a:srgbClr val="000000">
-                <a:alpha val="0"/>
-              </a:srgbClr>
-            </a:solidFill>
-            <a:prstDash val="solid"/>
-          </a:ln>
-        </p:spPr>
-        <p:txBody>
-          <a:bodyPr xmlns:a="http://schemas.openxmlformats.org/drawingml/2006/main" lIns="0" tIns="0" rIns="0" bIns="0" anchor="t"/>
-          <a:lstStyle xmlns:a="http://schemas.openxmlformats.org/drawingml/2006/main"/>
-          <a:p xmlns:a="http://schemas.openxmlformats.org/drawingml/2006/main">
-            <a:pPr algn="l">
-              <a:defRPr sz="2925" b="1">
-                <a:solidFill>
-                  <a:srgbClr val="151515"/>
-                </a:solidFill>
-                <a:latin typeface="Aptos Display"/>
-                <a:ea typeface="Aptos Display"/>
-                <a:cs typeface="Aptos Display"/>
-              </a:defRPr>
-            </a:pPr>
-            <a:r>
-              <a:rPr sz="2925" b="1">
-                <a:solidFill>
-                  <a:srgbClr val="151515"/>
-                </a:solidFill>
-                <a:latin typeface="Aptos Display"/>
-                <a:ea typeface="Aptos Display"/>
-                <a:cs typeface="Aptos Display"/>
-              </a:rPr>
-              <a:t>Current-Based Inverse Inference for a 1D Poisson-Nernst-Planck System</a:t>
-            </a:r>
-          </a:p>
-        </p:txBody>
-      </p:sp>
-      <p:sp>
-        <p:nvSpPr>
-          <p:cNvPr id="5" name="">
-            <a:extLst xmlns:a="http://schemas.openxmlformats.org/drawingml/2006/main">
-              <a:ext uri="{FF2B5EF4-FFF2-40B4-BE49-F238E27FC236}">
-                <a16:creationId xmlns:a16="http://schemas.microsoft.com/office/drawing/2014/main" id="{E545157B-6B2E-4C1D-997A-8DCE5941D65F}"/>
-              </a:ext>
-            </a:extLst>
-          </p:cNvPr>
-          <p:cNvSpPr>
-            <a:spLocks xmlns:a="http://schemas.openxmlformats.org/drawingml/2006/main" noGrp="1"/>
-          </p:cNvSpPr>
-          <p:nvPr/>
-        </p:nvSpPr>
-        <p:spPr>
-          <a:xfrm xmlns:a="http://schemas.openxmlformats.org/drawingml/2006/main">
-            <a:off x="704850" y="2724150"/>
-            <a:ext cx="8572500" cy="361950"/>
-          </a:xfrm>
-          <a:prstGeom xmlns:a="http://schemas.openxmlformats.org/drawingml/2006/main" prst="rect">
-            <a:avLst/>
-          </a:prstGeom>
-          <a:solidFill xmlns:a="http://schemas.openxmlformats.org/drawingml/2006/main">
-            <a:srgbClr val="000000">
-              <a:alpha val="0"/>
-            </a:srgbClr>
-          </a:solidFill>
-          <a:ln xmlns:a="http://schemas.openxmlformats.org/drawingml/2006/main" w="0">
-            <a:solidFill>
-              <a:srgbClr val="000000">
-                <a:alpha val="0"/>
-              </a:srgbClr>
-            </a:solidFill>
-            <a:prstDash val="solid"/>
-          </a:ln>
-        </p:spPr>
-        <p:txBody>
-          <a:bodyPr xmlns:a="http://schemas.openxmlformats.org/drawingml/2006/main" lIns="0" tIns="0" rIns="0" bIns="0" anchor="t"/>
-          <a:lstStyle xmlns:a="http://schemas.openxmlformats.org/drawingml/2006/main"/>
-          <a:p xmlns:a="http://schemas.openxmlformats.org/drawingml/2006/main">
-            <a:pPr algn="l">
-              <a:defRPr sz="1500" b="0">
+                <a:latin typeface="Helvetica Neue"/>
+              </a:rPr>
+              <a:t>Measurable current -&gt; posterior uncertainty over diffusion parameters.</a:t>
+            </a:r>
+          </a:p>
+        </p:txBody>
+      </p:sp>
+      <p:sp xmlns:a="http://schemas.openxmlformats.org/drawingml/2006/main">
+        <p:nvSpPr>
+          <p:cNvPr id="17" name="TextBox 16"/>
+          <p:cNvSpPr txBox="1"/>
+          <p:nvPr/>
+        </p:nvSpPr>
+        <p:spPr>
+          <a:xfrm>
+            <a:off x="685800" y="5989320"/>
+            <a:ext cx="3108960" cy="201168"/>
+          </a:xfrm>
+          <a:prstGeom prst="rect">
+            <a:avLst/>
+          </a:prstGeom>
+          <a:noFill/>
+        </p:spPr>
+        <p:txBody>
+          <a:bodyPr wrap="none" lIns="0" rIns="0" tIns="0" bIns="0">
+            <a:spAutoFit/>
+          </a:bodyPr>
+          <a:lstStyle/>
+          <a:p>
+            <a:r>
+              <a:rPr sz="1150" b="0">
                 <a:solidFill>
                   <a:srgbClr val="6D6D6D"/>
                 </a:solidFill>
-                <a:latin typeface="Aptos"/>
-                <a:ea typeface="Aptos"/>
-                <a:cs typeface="Aptos"/>
-              </a:defRPr>
-            </a:pPr>
-            <a:r>
-              <a:rPr sz="1500" b="0">
+                <a:latin typeface="Helvetica Neue"/>
+              </a:rPr>
+              <a:t>Jack Jia | June 2026</a:t>
+            </a:r>
+          </a:p>
+        </p:txBody>
+      </p:sp>
+      <p:sp xmlns:a="http://schemas.openxmlformats.org/drawingml/2006/main">
+        <p:nvSpPr>
+          <p:cNvPr id="18" name="TextBox 17"/>
+          <p:cNvSpPr txBox="1"/>
+          <p:nvPr/>
+        </p:nvSpPr>
+        <p:spPr>
+          <a:xfrm>
+            <a:off x="7635240" y="5989320"/>
+            <a:ext cx="3429000" cy="201168"/>
+          </a:xfrm>
+          <a:prstGeom prst="rect">
+            <a:avLst/>
+          </a:prstGeom>
+          <a:noFill/>
+        </p:spPr>
+        <p:txBody>
+          <a:bodyPr wrap="none" lIns="0" rIns="0" tIns="0" bIns="0">
+            <a:spAutoFit/>
+          </a:bodyPr>
+          <a:lstStyle/>
+          <a:p>
+            <a:pPr algn="r"/>
+            <a:r>
+              <a:rPr sz="1150" b="0">
                 <a:solidFill>
                   <a:srgbClr val="6D6D6D"/>
                 </a:solidFill>
-                <a:latin typeface="Aptos"/>
-                <a:ea typeface="Aptos"/>
-                <a:cs typeface="Aptos"/>
-              </a:rPr>
-              <a:t>A physics-informed neural-network surrogate for diffusion-parameter inference</a:t>
-            </a:r>
-          </a:p>
-        </p:txBody>
-      </p:sp>
-      <p:pic>
-        <p:nvPicPr>
-          <p:cNvPr id="6" name=""/>
-          <p:cNvPicPr>
-            <a:picLocks xmlns:a="http://schemas.openxmlformats.org/drawingml/2006/main" noChangeAspect="1"/>
-          </p:cNvPicPr>
-          <p:nvPr/>
-        </p:nvPicPr>
-        <p:blipFill>
-          <a:blip xmlns:r="http://schemas.openxmlformats.org/officeDocument/2006/relationships" xmlns:a="http://schemas.openxmlformats.org/drawingml/2006/main" r:embed="Rf6fd7ae1559f4350"/>
-          <a:stretch xmlns:a="http://schemas.openxmlformats.org/drawingml/2006/main"/>
-        </p:blipFill>
-        <p:spPr>
-          <a:xfrm xmlns:a="http://schemas.openxmlformats.org/drawingml/2006/main">
-            <a:off x="2201647" y="3714750"/>
-            <a:ext cx="7617255" cy="1428750"/>
-          </a:xfrm>
-          <a:prstGeom xmlns:a="http://schemas.openxmlformats.org/drawingml/2006/main" prst="rect">
-            <a:avLst/>
-          </a:prstGeom>
-        </p:spPr>
-      </p:pic>
-      <p:sp>
-        <p:nvSpPr>
-          <p:cNvPr id="7" name="">
-            <a:extLst xmlns:a="http://schemas.openxmlformats.org/drawingml/2006/main">
-              <a:ext uri="{FF2B5EF4-FFF2-40B4-BE49-F238E27FC236}">
-                <a16:creationId xmlns:a16="http://schemas.microsoft.com/office/drawing/2014/main" id="{A91D2214-44ED-490B-9DFE-9AE2BC2281C9}"/>
-              </a:ext>
-            </a:extLst>
-          </p:cNvPr>
-          <p:cNvSpPr>
-            <a:spLocks xmlns:a="http://schemas.openxmlformats.org/drawingml/2006/main" noGrp="1"/>
-          </p:cNvSpPr>
-          <p:nvPr/>
-        </p:nvSpPr>
-        <p:spPr>
-          <a:xfrm xmlns:a="http://schemas.openxmlformats.org/drawingml/2006/main">
-            <a:off x="685800" y="5829300"/>
-            <a:ext cx="4000500" cy="209550"/>
-          </a:xfrm>
-          <a:prstGeom xmlns:a="http://schemas.openxmlformats.org/drawingml/2006/main" prst="rect">
-            <a:avLst/>
-          </a:prstGeom>
-          <a:solidFill xmlns:a="http://schemas.openxmlformats.org/drawingml/2006/main">
-            <a:srgbClr val="000000">
-              <a:alpha val="0"/>
-            </a:srgbClr>
-          </a:solidFill>
-          <a:ln xmlns:a="http://schemas.openxmlformats.org/drawingml/2006/main" w="0">
-            <a:solidFill>
-              <a:srgbClr val="000000">
-                <a:alpha val="0"/>
-              </a:srgbClr>
-            </a:solidFill>
-            <a:prstDash val="solid"/>
-          </a:ln>
-        </p:spPr>
-        <p:txBody>
-          <a:bodyPr xmlns:a="http://schemas.openxmlformats.org/drawingml/2006/main" lIns="0" tIns="0" rIns="0" bIns="0" anchor="t"/>
-          <a:lstStyle xmlns:a="http://schemas.openxmlformats.org/drawingml/2006/main"/>
-          <a:p xmlns:a="http://schemas.openxmlformats.org/drawingml/2006/main">
-            <a:pPr algn="l">
-              <a:defRPr sz="975" b="0">
-                <a:solidFill>
-                  <a:srgbClr val="6D6D6D"/>
-                </a:solidFill>
-                <a:latin typeface="Aptos"/>
-                <a:ea typeface="Aptos"/>
-                <a:cs typeface="Aptos"/>
-              </a:defRPr>
-            </a:pPr>
-            <a:r>
-              <a:rPr sz="975" b="0">
-                <a:solidFill>
-                  <a:srgbClr val="6D6D6D"/>
-                </a:solidFill>
-                <a:latin typeface="Aptos"/>
-                <a:ea typeface="Aptos"/>
-                <a:cs typeface="Aptos"/>
-              </a:rPr>
-              <a:t>Jack Jia | June 2026</a:t>
-            </a:r>
-          </a:p>
-        </p:txBody>
-      </p:sp>
-      <p:sp>
-        <p:nvSpPr>
-          <p:cNvPr id="8" name="">
-            <a:extLst xmlns:a="http://schemas.openxmlformats.org/drawingml/2006/main">
-              <a:ext uri="{FF2B5EF4-FFF2-40B4-BE49-F238E27FC236}">
-                <a16:creationId xmlns:a16="http://schemas.microsoft.com/office/drawing/2014/main" id="{B8810AC4-C042-4CC1-9F94-4EBC99B405CA}"/>
-              </a:ext>
-            </a:extLst>
-          </p:cNvPr>
-          <p:cNvSpPr>
-            <a:spLocks xmlns:a="http://schemas.openxmlformats.org/drawingml/2006/main" noGrp="1"/>
-          </p:cNvSpPr>
-          <p:nvPr/>
-        </p:nvSpPr>
-        <p:spPr>
-          <a:xfrm xmlns:a="http://schemas.openxmlformats.org/drawingml/2006/main">
-            <a:off x="7239000" y="5829300"/>
-            <a:ext cx="4095750" cy="209550"/>
-          </a:xfrm>
-          <a:prstGeom xmlns:a="http://schemas.openxmlformats.org/drawingml/2006/main" prst="rect">
-            <a:avLst/>
-          </a:prstGeom>
-          <a:solidFill xmlns:a="http://schemas.openxmlformats.org/drawingml/2006/main">
-            <a:srgbClr val="000000">
-              <a:alpha val="0"/>
-            </a:srgbClr>
-          </a:solidFill>
-          <a:ln xmlns:a="http://schemas.openxmlformats.org/drawingml/2006/main" w="0">
-            <a:solidFill>
-              <a:srgbClr val="000000">
-                <a:alpha val="0"/>
-              </a:srgbClr>
-            </a:solidFill>
-            <a:prstDash val="solid"/>
-          </a:ln>
-        </p:spPr>
-        <p:txBody>
-          <a:bodyPr xmlns:a="http://schemas.openxmlformats.org/drawingml/2006/main" lIns="0" tIns="0" rIns="0" bIns="0" anchor="t"/>
-          <a:lstStyle xmlns:a="http://schemas.openxmlformats.org/drawingml/2006/main"/>
-          <a:p xmlns:a="http://schemas.openxmlformats.org/drawingml/2006/main">
-            <a:pPr algn="r">
-              <a:defRPr sz="975" b="0">
-                <a:solidFill>
-                  <a:srgbClr val="6D6D6D"/>
-                </a:solidFill>
-                <a:latin typeface="Aptos"/>
-                <a:ea typeface="Aptos"/>
-                <a:cs typeface="Aptos"/>
-              </a:defRPr>
-            </a:pPr>
-            <a:r>
-              <a:rPr sz="975" b="0">
-                <a:solidFill>
-                  <a:srgbClr val="6D6D6D"/>
-                </a:solidFill>
-                <a:latin typeface="Aptos"/>
-                <a:ea typeface="Aptos"/>
-                <a:cs typeface="Aptos"/>
+                <a:latin typeface="Helvetica Neue"/>
               </a:rPr>
               <a:t>1D PNP PINN current-based inverse problem</a:t>
             </a:r>

--- a/presentation/pnp_pinn_current_inference_presentation.pptx
+++ b/presentation/pnp_pinn_current_inference_presentation.pptx
@@ -2,26 +2,26 @@
 <file path=ppt/presentation.xml><?xml version="1.0" encoding="utf-8"?>
 <p:presentation xmlns:p="http://schemas.openxmlformats.org/presentationml/2006/main">
   <p:sldMasterIdLst>
-    <p:sldMasterId xmlns:r="http://schemas.openxmlformats.org/officeDocument/2006/relationships" id="2147483648" r:id="Racab63bd6176404d"/>
+    <p:sldMasterId xmlns:r="http://schemas.openxmlformats.org/officeDocument/2006/relationships" id="2147483648" r:id="R3f05f70cea214c15"/>
   </p:sldMasterIdLst>
   <p:notesMasterIdLst>
-    <p:notesMasterId xmlns:r="http://schemas.openxmlformats.org/officeDocument/2006/relationships" r:id="R50242fe9431b46e2"/>
+    <p:notesMasterId xmlns:r="http://schemas.openxmlformats.org/officeDocument/2006/relationships" r:id="Ref394cb0963a4f7f"/>
   </p:notesMasterIdLst>
   <p:sldIdLst>
-    <p:sldId xmlns:r="http://schemas.openxmlformats.org/officeDocument/2006/relationships" id="256" r:id="R4e6b61d816dc4634"/>
-    <p:sldId xmlns:r="http://schemas.openxmlformats.org/officeDocument/2006/relationships" id="257" r:id="R29b598d7a1c34028"/>
-    <p:sldId xmlns:r="http://schemas.openxmlformats.org/officeDocument/2006/relationships" id="258" r:id="R8bfe3e8e76c7405c"/>
-    <p:sldId xmlns:r="http://schemas.openxmlformats.org/officeDocument/2006/relationships" id="259" r:id="R4704ee7b6b6b4fea"/>
-    <p:sldId xmlns:r="http://schemas.openxmlformats.org/officeDocument/2006/relationships" id="260" r:id="Rf3316d10945f4a51"/>
-    <p:sldId xmlns:r="http://schemas.openxmlformats.org/officeDocument/2006/relationships" id="261" r:id="R12f851cfd21f4dff"/>
-    <p:sldId xmlns:r="http://schemas.openxmlformats.org/officeDocument/2006/relationships" id="262" r:id="R4335377c96104d02"/>
-    <p:sldId xmlns:r="http://schemas.openxmlformats.org/officeDocument/2006/relationships" id="263" r:id="R661317e3f8f84159"/>
-    <p:sldId xmlns:r="http://schemas.openxmlformats.org/officeDocument/2006/relationships" id="264" r:id="Ra312cb7f907247fc"/>
-    <p:sldId xmlns:r="http://schemas.openxmlformats.org/officeDocument/2006/relationships" id="265" r:id="Rd828a352a0574b12"/>
-    <p:sldId xmlns:r="http://schemas.openxmlformats.org/officeDocument/2006/relationships" id="266" r:id="Rca48797eb11842d7"/>
-    <p:sldId xmlns:r="http://schemas.openxmlformats.org/officeDocument/2006/relationships" id="267" r:id="Rb9d25a50296845b1"/>
-    <p:sldId xmlns:r="http://schemas.openxmlformats.org/officeDocument/2006/relationships" id="268" r:id="Rc4b9947c2fcb4619"/>
-    <p:sldId xmlns:r="http://schemas.openxmlformats.org/officeDocument/2006/relationships" id="269" r:id="R6007ab5c53654aaf"/>
+    <p:sldId xmlns:r="http://schemas.openxmlformats.org/officeDocument/2006/relationships" id="256" r:id="R93a2b13e2d0544cf"/>
+    <p:sldId xmlns:r="http://schemas.openxmlformats.org/officeDocument/2006/relationships" id="257" r:id="Re27ba18f61be4e83"/>
+    <p:sldId xmlns:r="http://schemas.openxmlformats.org/officeDocument/2006/relationships" id="258" r:id="Rbe760ff899d640bf"/>
+    <p:sldId xmlns:r="http://schemas.openxmlformats.org/officeDocument/2006/relationships" id="259" r:id="R842d24466a5b4bf6"/>
+    <p:sldId xmlns:r="http://schemas.openxmlformats.org/officeDocument/2006/relationships" id="260" r:id="R6d0a7871d1644a8a"/>
+    <p:sldId xmlns:r="http://schemas.openxmlformats.org/officeDocument/2006/relationships" id="261" r:id="R80767a8c33364fc3"/>
+    <p:sldId xmlns:r="http://schemas.openxmlformats.org/officeDocument/2006/relationships" id="262" r:id="R05069fc7bb824a49"/>
+    <p:sldId xmlns:r="http://schemas.openxmlformats.org/officeDocument/2006/relationships" id="263" r:id="R5eb1076eda364e32"/>
+    <p:sldId xmlns:r="http://schemas.openxmlformats.org/officeDocument/2006/relationships" id="264" r:id="Rfd07161beb2d4754"/>
+    <p:sldId xmlns:r="http://schemas.openxmlformats.org/officeDocument/2006/relationships" id="265" r:id="Ra098f90343704c2d"/>
+    <p:sldId xmlns:r="http://schemas.openxmlformats.org/officeDocument/2006/relationships" id="266" r:id="R0d95b331b44b4283"/>
+    <p:sldId xmlns:r="http://schemas.openxmlformats.org/officeDocument/2006/relationships" id="267" r:id="Rf6b698d3dd1a4db3"/>
+    <p:sldId xmlns:r="http://schemas.openxmlformats.org/officeDocument/2006/relationships" id="268" r:id="R2afa463711c84e15"/>
+    <p:sldId xmlns:r="http://schemas.openxmlformats.org/officeDocument/2006/relationships" id="269" r:id="Rfe81899363724d2e"/>
   </p:sldIdLst>
   <p:sldSz cx="12192000" cy="6858000"/>
   <p:notesSz cx="6858000" cy="9144000"/>
@@ -1426,7 +1426,7 @@
   </p:cSld>
   <p:clrMap bg1="lt1" tx1="dk1" bg2="lt2" tx2="dk2" accent1="accent1" accent2="accent2" accent3="accent3" accent4="accent4" accent5="accent5" accent6="accent6" hlink="hlink" folHlink="folHlink"/>
   <p:sldLayoutIdLst>
-    <p:sldLayoutId xmlns:r="http://schemas.openxmlformats.org/officeDocument/2006/relationships" id="2147483649" r:id="Re31904d8ef58439c"/>
+    <p:sldLayoutId xmlns:r="http://schemas.openxmlformats.org/officeDocument/2006/relationships" id="2147483649" r:id="Ra744cb83a0d148d0"/>
   </p:sldLayoutIdLst>
   <p:txStyles>
     <p:titleStyle>
@@ -1919,632 +1919,70 @@
       <p:grpSpPr>
         <a:xfrm xmlns:a="http://schemas.openxmlformats.org/drawingml/2006/main"/>
       </p:grpSpPr>
-      <p:sp xmlns:a="http://schemas.openxmlformats.org/drawingml/2006/main">
-        <p:nvSpPr>
-          <p:cNvPr id="2" name="Rectangle 1"/>
-          <p:cNvSpPr/>
-          <p:nvPr/>
-        </p:nvSpPr>
-        <p:spPr>
-          <a:xfrm>
+      <p:sp>
+        <p:nvSpPr>
+          <p:cNvPr id="1" name="">
+            <a:extLst xmlns:a="http://schemas.openxmlformats.org/drawingml/2006/main">
+              <a:ext uri="{FF2B5EF4-FFF2-40B4-BE49-F238E27FC236}">
+                <a16:creationId xmlns:a16="http://schemas.microsoft.com/office/drawing/2014/main" id="{437D2E53-2D55-45F8-BB92-47CC4B738729}"/>
+              </a:ext>
+            </a:extLst>
+          </p:cNvPr>
+          <p:cNvSpPr>
+            <a:spLocks xmlns:a="http://schemas.openxmlformats.org/drawingml/2006/main" noGrp="1"/>
+          </p:cNvSpPr>
+          <p:nvPr/>
+        </p:nvSpPr>
+        <p:spPr>
+          <a:xfrm xmlns:a="http://schemas.openxmlformats.org/drawingml/2006/main">
             <a:off x="0" y="0"/>
             <a:ext cx="12192000" cy="6858000"/>
           </a:xfrm>
-          <a:prstGeom prst="rect">
-            <a:avLst/>
-          </a:prstGeom>
-          <a:solidFill>
+          <a:prstGeom xmlns:a="http://schemas.openxmlformats.org/drawingml/2006/main" prst="rect">
+            <a:avLst/>
+          </a:prstGeom>
+          <a:solidFill xmlns:a="http://schemas.openxmlformats.org/drawingml/2006/main">
             <a:srgbClr val="FBFAF7"/>
           </a:solidFill>
-          <a:ln>
-            <a:noFill/>
-          </a:ln>
-        </p:spPr>
-        <p:style>
-          <a:lnRef idx="1">
-            <a:schemeClr val="accent1"/>
-          </a:lnRef>
-          <a:fillRef idx="3">
-            <a:schemeClr val="accent1"/>
-          </a:fillRef>
-          <a:effectRef idx="2">
-            <a:schemeClr val="accent1"/>
-          </a:effectRef>
-          <a:fontRef idx="minor">
-            <a:schemeClr val="lt1"/>
-          </a:fontRef>
-        </p:style>
-        <p:txBody>
-          <a:bodyPr rtlCol="0" anchor="ctr"/>
-          <a:lstStyle/>
-          <a:p>
-            <a:pPr algn="ctr"/>
-          </a:p>
-        </p:txBody>
-      </p:sp>
-      <p:sp xmlns:a="http://schemas.openxmlformats.org/drawingml/2006/main">
-        <p:nvSpPr>
-          <p:cNvPr id="3" name="TextBox 2"/>
-          <p:cNvSpPr txBox="1"/>
-          <p:nvPr/>
-        </p:nvSpPr>
-        <p:spPr>
-          <a:xfrm>
-            <a:off x="685800" y="411480"/>
-            <a:ext cx="2926080" cy="219456"/>
-          </a:xfrm>
-          <a:prstGeom prst="rect">
-            <a:avLst/>
-          </a:prstGeom>
-          <a:noFill/>
-        </p:spPr>
-        <p:txBody>
-          <a:bodyPr wrap="none" lIns="0" rIns="0" tIns="0" bIns="0">
-            <a:spAutoFit/>
-          </a:bodyPr>
-          <a:lstStyle/>
-          <a:p>
-            <a:r>
-              <a:rPr sz="1050" b="1">
-                <a:solidFill>
-                  <a:srgbClr val="6D6D6D"/>
-                </a:solidFill>
-                <a:latin typeface="Helvetica Neue"/>
-              </a:rPr>
-              <a:t>Academic presentation</a:t>
-            </a:r>
-          </a:p>
-        </p:txBody>
-      </p:sp>
-      <p:sp xmlns:a="http://schemas.openxmlformats.org/drawingml/2006/main">
-        <p:nvSpPr>
-          <p:cNvPr id="4" name="Rectangle 3"/>
-          <p:cNvSpPr/>
-          <p:nvPr/>
-        </p:nvSpPr>
-        <p:spPr>
-          <a:xfrm>
-            <a:off x="685800" y="713232"/>
-            <a:ext cx="1737360" cy="27432"/>
-          </a:xfrm>
-          <a:prstGeom prst="rect">
-            <a:avLst/>
-          </a:prstGeom>
-          <a:solidFill>
-            <a:srgbClr val="008C95"/>
-          </a:solidFill>
-          <a:ln>
-            <a:noFill/>
-          </a:ln>
-        </p:spPr>
-        <p:style>
-          <a:lnRef idx="1">
-            <a:schemeClr val="accent1"/>
-          </a:lnRef>
-          <a:fillRef idx="3">
-            <a:schemeClr val="accent1"/>
-          </a:fillRef>
-          <a:effectRef idx="2">
-            <a:schemeClr val="accent1"/>
-          </a:effectRef>
-          <a:fontRef idx="minor">
-            <a:schemeClr val="lt1"/>
-          </a:fontRef>
-        </p:style>
-        <p:txBody>
-          <a:bodyPr rtlCol="0" anchor="ctr"/>
-          <a:lstStyle/>
-          <a:p>
-            <a:pPr algn="ctr"/>
-          </a:p>
-        </p:txBody>
-      </p:sp>
-      <p:sp xmlns:a="http://schemas.openxmlformats.org/drawingml/2006/main">
-        <p:nvSpPr>
-          <p:cNvPr id="5" name="TextBox 4"/>
-          <p:cNvSpPr txBox="1"/>
-          <p:nvPr/>
-        </p:nvSpPr>
-        <p:spPr>
-          <a:xfrm>
-            <a:off x="685800" y="1325880"/>
-            <a:ext cx="6812280" cy="1143000"/>
-          </a:xfrm>
-          <a:prstGeom prst="rect">
-            <a:avLst/>
-          </a:prstGeom>
-          <a:noFill/>
-        </p:spPr>
-        <p:txBody>
-          <a:bodyPr wrap="none" lIns="0" rIns="0" tIns="0" bIns="0">
-            <a:spAutoFit/>
-          </a:bodyPr>
-          <a:lstStyle/>
-          <a:p>
-            <a:r>
-              <a:rPr sz="3100" b="1">
-                <a:solidFill>
-                  <a:srgbClr val="151515"/>
-                </a:solidFill>
-                <a:latin typeface="Helvetica Neue"/>
-              </a:rPr>
-              <a:t>Current-Based Inverse Inference
-for a 1D Poisson-Nernst-Planck System</a:t>
-            </a:r>
-          </a:p>
-        </p:txBody>
-      </p:sp>
-      <p:sp xmlns:a="http://schemas.openxmlformats.org/drawingml/2006/main">
-        <p:nvSpPr>
-          <p:cNvPr id="6" name="TextBox 5"/>
-          <p:cNvSpPr txBox="1"/>
-          <p:nvPr/>
-        </p:nvSpPr>
-        <p:spPr>
-          <a:xfrm>
-            <a:off x="713232" y="2788920"/>
-            <a:ext cx="6720840" cy="320040"/>
-          </a:xfrm>
-          <a:prstGeom prst="rect">
-            <a:avLst/>
-          </a:prstGeom>
-          <a:noFill/>
-        </p:spPr>
-        <p:txBody>
-          <a:bodyPr wrap="none" lIns="0" rIns="0" tIns="0" bIns="0">
-            <a:spAutoFit/>
-          </a:bodyPr>
-          <a:lstStyle/>
-          <a:p>
-            <a:r>
-              <a:rPr sz="1700" b="0">
-                <a:solidFill>
-                  <a:srgbClr val="6D6D6D"/>
-                </a:solidFill>
-                <a:latin typeface="Helvetica Neue"/>
-              </a:rPr>
-              <a:t>A physics-informed neural-network surrogate for diffusion-parameter inference</a:t>
-            </a:r>
-          </a:p>
-        </p:txBody>
-      </p:sp>
-      <p:sp xmlns:a="http://schemas.openxmlformats.org/drawingml/2006/main">
-        <p:nvSpPr>
-          <p:cNvPr id="7" name="Rectangle 6"/>
-          <p:cNvSpPr/>
-          <p:nvPr/>
-        </p:nvSpPr>
-        <p:spPr>
-          <a:xfrm>
-            <a:off x="7909560" y="1261872"/>
-            <a:ext cx="3154680" cy="2880360"/>
-          </a:xfrm>
-          <a:prstGeom prst="rect">
-            <a:avLst/>
-          </a:prstGeom>
-          <a:solidFill>
-            <a:srgbClr val="FFFFFF"/>
-          </a:solidFill>
-          <a:ln w="11430">
-            <a:solidFill>
-              <a:srgbClr val="008C95"/>
-            </a:solidFill>
-          </a:ln>
-        </p:spPr>
-        <p:style>
-          <a:lnRef idx="1">
-            <a:schemeClr val="accent1"/>
-          </a:lnRef>
-          <a:fillRef idx="3">
-            <a:schemeClr val="accent1"/>
-          </a:fillRef>
-          <a:effectRef idx="2">
-            <a:schemeClr val="accent1"/>
-          </a:effectRef>
-          <a:fontRef idx="minor">
-            <a:schemeClr val="lt1"/>
-          </a:fontRef>
-        </p:style>
-        <p:txBody>
-          <a:bodyPr rtlCol="0" anchor="ctr"/>
-          <a:lstStyle/>
-          <a:p>
-            <a:pPr algn="ctr"/>
-          </a:p>
-        </p:txBody>
-      </p:sp>
-      <p:sp xmlns:a="http://schemas.openxmlformats.org/drawingml/2006/main">
-        <p:nvSpPr>
-          <p:cNvPr id="8" name="Rectangle 7"/>
-          <p:cNvSpPr/>
-          <p:nvPr/>
-        </p:nvSpPr>
-        <p:spPr>
-          <a:xfrm>
-            <a:off x="7909560" y="1261872"/>
-            <a:ext cx="3154680" cy="32004"/>
-          </a:xfrm>
-          <a:prstGeom prst="rect">
-            <a:avLst/>
-          </a:prstGeom>
-          <a:solidFill>
-            <a:srgbClr val="008C95"/>
-          </a:solidFill>
-          <a:ln>
-            <a:noFill/>
-          </a:ln>
-        </p:spPr>
-        <p:style>
-          <a:lnRef idx="1">
-            <a:schemeClr val="accent1"/>
-          </a:lnRef>
-          <a:fillRef idx="3">
-            <a:schemeClr val="accent1"/>
-          </a:fillRef>
-          <a:effectRef idx="2">
-            <a:schemeClr val="accent1"/>
-          </a:effectRef>
-          <a:fontRef idx="minor">
-            <a:schemeClr val="lt1"/>
-          </a:fontRef>
-        </p:style>
-        <p:txBody>
-          <a:bodyPr rtlCol="0" anchor="ctr"/>
-          <a:lstStyle/>
-          <a:p>
-            <a:pPr algn="ctr"/>
-          </a:p>
-        </p:txBody>
-      </p:sp>
-      <p:sp xmlns:a="http://schemas.openxmlformats.org/drawingml/2006/main">
-        <p:nvSpPr>
-          <p:cNvPr id="9" name="TextBox 8"/>
-          <p:cNvSpPr txBox="1"/>
-          <p:nvPr/>
-        </p:nvSpPr>
-        <p:spPr>
-          <a:xfrm>
-            <a:off x="8183879" y="1572768"/>
-            <a:ext cx="2103120" cy="219456"/>
-          </a:xfrm>
-          <a:prstGeom prst="rect">
-            <a:avLst/>
-          </a:prstGeom>
-          <a:noFill/>
-        </p:spPr>
-        <p:txBody>
-          <a:bodyPr wrap="none" lIns="0" rIns="0" tIns="0" bIns="0">
-            <a:spAutoFit/>
-          </a:bodyPr>
-          <a:lstStyle/>
-          <a:p>
-            <a:r>
-              <a:rPr sz="1200" b="1">
-                <a:solidFill>
-                  <a:srgbClr val="008C95"/>
-                </a:solidFill>
-                <a:latin typeface="Aptos"/>
-              </a:rPr>
-              <a:t>Research question</a:t>
-            </a:r>
-          </a:p>
-        </p:txBody>
-      </p:sp>
-      <p:sp xmlns:a="http://schemas.openxmlformats.org/drawingml/2006/main">
-        <p:nvSpPr>
-          <p:cNvPr id="10" name="TextBox 9"/>
-          <p:cNvSpPr txBox="1"/>
-          <p:nvPr/>
-        </p:nvSpPr>
-        <p:spPr>
-          <a:xfrm>
-            <a:off x="8183879" y="1920240"/>
-            <a:ext cx="2606040" cy="960120"/>
-          </a:xfrm>
-          <a:prstGeom prst="rect">
-            <a:avLst/>
-          </a:prstGeom>
-          <a:noFill/>
-        </p:spPr>
-        <p:txBody>
-          <a:bodyPr wrap="none" lIns="0" rIns="0" tIns="0" bIns="0">
-            <a:spAutoFit/>
-          </a:bodyPr>
-          <a:lstStyle/>
-          <a:p>
-            <a:r>
-              <a:rPr sz="2400" b="1">
-                <a:solidFill>
-                  <a:srgbClr val="151515"/>
-                </a:solidFill>
-                <a:latin typeface="Helvetica Neue"/>
-              </a:rPr>
-              <a:t>Can electrode
-current identify
-Dp and Dn?</a:t>
-            </a:r>
-          </a:p>
-        </p:txBody>
-      </p:sp>
-      <p:sp xmlns:a="http://schemas.openxmlformats.org/drawingml/2006/main">
-        <p:nvSpPr>
-          <p:cNvPr id="11" name="TextBox 10"/>
-          <p:cNvSpPr txBox="1"/>
-          <p:nvPr/>
-        </p:nvSpPr>
-        <p:spPr>
-          <a:xfrm>
-            <a:off x="8183879" y="3182112"/>
-            <a:ext cx="1143000" cy="201168"/>
-          </a:xfrm>
-          <a:prstGeom prst="rect">
-            <a:avLst/>
-          </a:prstGeom>
-          <a:noFill/>
-        </p:spPr>
-        <p:txBody>
-          <a:bodyPr wrap="none" lIns="0" rIns="0" tIns="0" bIns="0">
-            <a:spAutoFit/>
-          </a:bodyPr>
-          <a:lstStyle/>
-          <a:p>
-            <a:r>
-              <a:rPr sz="1050" b="1">
-                <a:solidFill>
-                  <a:srgbClr val="D05A2A"/>
-                </a:solidFill>
-                <a:latin typeface="Helvetica Neue"/>
-              </a:rPr>
-              <a:t>observation</a:t>
-            </a:r>
-          </a:p>
-        </p:txBody>
-      </p:sp>
-      <p:sp xmlns:a="http://schemas.openxmlformats.org/drawingml/2006/main">
-        <p:nvSpPr>
-          <p:cNvPr id="12" name="TextBox 11"/>
-          <p:cNvSpPr txBox="1"/>
-          <p:nvPr/>
-        </p:nvSpPr>
-        <p:spPr>
-          <a:xfrm>
-            <a:off x="8183879" y="3438144"/>
-            <a:ext cx="731520" cy="228600"/>
-          </a:xfrm>
-          <a:prstGeom prst="rect">
-            <a:avLst/>
-          </a:prstGeom>
-          <a:noFill/>
-        </p:spPr>
-        <p:txBody>
-          <a:bodyPr wrap="none" lIns="0" rIns="0" tIns="0" bIns="0">
-            <a:spAutoFit/>
-          </a:bodyPr>
-          <a:lstStyle/>
-          <a:p>
-            <a:r>
-              <a:rPr sz="1800" b="1">
-                <a:solidFill>
-                  <a:srgbClr val="D05A2A"/>
-                </a:solidFill>
-                <a:latin typeface="Helvetica Neue"/>
-              </a:rPr>
-              <a:t>I(t)</a:t>
-            </a:r>
-          </a:p>
-        </p:txBody>
-      </p:sp>
-      <p:cxnSp xmlns:a="http://schemas.openxmlformats.org/drawingml/2006/main">
-        <p:nvCxnSpPr>
-          <p:cNvPr id="13" name="Connector 12"/>
-          <p:cNvCxnSpPr/>
-          <p:nvPr/>
-        </p:nvCxnSpPr>
-        <p:spPr>
-          <a:xfrm>
-            <a:off x="8979408" y="3547872"/>
-            <a:ext cx="566928" cy="0"/>
-          </a:xfrm>
-          <a:prstGeom prst="line">
-            <a:avLst/>
-          </a:prstGeom>
-          <a:ln w="16510">
-            <a:solidFill>
-              <a:srgbClr val="6D6D6D"/>
-            </a:solidFill>
-          </a:ln>
-        </p:spPr>
-        <p:style>
-          <a:lnRef idx="2">
-            <a:schemeClr val="accent1"/>
-          </a:lnRef>
-          <a:fillRef idx="0">
-            <a:schemeClr val="accent1"/>
-          </a:fillRef>
-          <a:effectRef idx="1">
-            <a:schemeClr val="accent1"/>
-          </a:effectRef>
-          <a:fontRef idx="minor">
-            <a:schemeClr val="tx1"/>
-          </a:fontRef>
-        </p:style>
-      </p:cxnSp>
-      <p:sp xmlns:a="http://schemas.openxmlformats.org/drawingml/2006/main">
-        <p:nvSpPr>
-          <p:cNvPr id="14" name="TextBox 13"/>
-          <p:cNvSpPr txBox="1"/>
-          <p:nvPr/>
-        </p:nvSpPr>
-        <p:spPr>
-          <a:xfrm>
-            <a:off x="9674352" y="3182112"/>
-            <a:ext cx="1051560" cy="201168"/>
-          </a:xfrm>
-          <a:prstGeom prst="rect">
-            <a:avLst/>
-          </a:prstGeom>
-          <a:noFill/>
-        </p:spPr>
-        <p:txBody>
-          <a:bodyPr wrap="none" lIns="0" rIns="0" tIns="0" bIns="0">
-            <a:spAutoFit/>
-          </a:bodyPr>
-          <a:lstStyle/>
-          <a:p>
-            <a:r>
-              <a:rPr sz="1050" b="1">
-                <a:solidFill>
-                  <a:srgbClr val="3F7D55"/>
-                </a:solidFill>
-                <a:latin typeface="Helvetica Neue"/>
-              </a:rPr>
-              <a:t>output</a:t>
-            </a:r>
-          </a:p>
-        </p:txBody>
-      </p:sp>
-      <p:sp xmlns:a="http://schemas.openxmlformats.org/drawingml/2006/main">
-        <p:nvSpPr>
-          <p:cNvPr id="15" name="TextBox 14"/>
-          <p:cNvSpPr txBox="1"/>
-          <p:nvPr/>
-        </p:nvSpPr>
-        <p:spPr>
-          <a:xfrm>
-            <a:off x="9674352" y="3438144"/>
-            <a:ext cx="1188720" cy="457200"/>
-          </a:xfrm>
-          <a:prstGeom prst="rect">
-            <a:avLst/>
-          </a:prstGeom>
-          <a:noFill/>
-        </p:spPr>
-        <p:txBody>
-          <a:bodyPr wrap="none" lIns="0" rIns="0" tIns="0" bIns="0">
-            <a:spAutoFit/>
-          </a:bodyPr>
-          <a:lstStyle/>
-          <a:p>
-            <a:r>
-              <a:rPr sz="1500" b="1">
-                <a:solidFill>
-                  <a:srgbClr val="3F7D55"/>
-                </a:solidFill>
-                <a:latin typeface="Helvetica Neue"/>
-              </a:rPr>
-              <a:t>posterior over
-Dp, Dn</a:t>
-            </a:r>
-          </a:p>
-        </p:txBody>
-      </p:sp>
-      <p:sp xmlns:a="http://schemas.openxmlformats.org/drawingml/2006/main">
-        <p:nvSpPr>
-          <p:cNvPr id="16" name="TextBox 15"/>
-          <p:cNvSpPr txBox="1"/>
-          <p:nvPr/>
-        </p:nvSpPr>
-        <p:spPr>
-          <a:xfrm>
-            <a:off x="713232" y="4498848"/>
-            <a:ext cx="6492240" cy="502920"/>
-          </a:xfrm>
-          <a:prstGeom prst="rect">
-            <a:avLst/>
-          </a:prstGeom>
-          <a:noFill/>
-        </p:spPr>
-        <p:txBody>
-          <a:bodyPr wrap="none" lIns="0" rIns="0" tIns="0" bIns="0">
-            <a:spAutoFit/>
-          </a:bodyPr>
-          <a:lstStyle/>
-          <a:p>
-            <a:r>
-              <a:rPr sz="1400" b="0">
-                <a:solidFill>
-                  <a:srgbClr val="6D6D6D"/>
-                </a:solidFill>
-                <a:latin typeface="Helvetica Neue"/>
-              </a:rPr>
-              <a:t>Measurable current -&gt; posterior uncertainty over diffusion parameters.</a:t>
-            </a:r>
-          </a:p>
-        </p:txBody>
-      </p:sp>
-      <p:sp xmlns:a="http://schemas.openxmlformats.org/drawingml/2006/main">
-        <p:nvSpPr>
-          <p:cNvPr id="17" name="TextBox 16"/>
-          <p:cNvSpPr txBox="1"/>
-          <p:nvPr/>
-        </p:nvSpPr>
-        <p:spPr>
-          <a:xfrm>
-            <a:off x="685800" y="5989320"/>
-            <a:ext cx="3108960" cy="201168"/>
-          </a:xfrm>
-          <a:prstGeom prst="rect">
-            <a:avLst/>
-          </a:prstGeom>
-          <a:noFill/>
-        </p:spPr>
-        <p:txBody>
-          <a:bodyPr wrap="none" lIns="0" rIns="0" tIns="0" bIns="0">
-            <a:spAutoFit/>
-          </a:bodyPr>
-          <a:lstStyle/>
-          <a:p>
-            <a:r>
-              <a:rPr sz="1150" b="0">
-                <a:solidFill>
-                  <a:srgbClr val="6D6D6D"/>
-                </a:solidFill>
-                <a:latin typeface="Helvetica Neue"/>
-              </a:rPr>
-              <a:t>Jack Jia | June 2026</a:t>
-            </a:r>
-          </a:p>
-        </p:txBody>
-      </p:sp>
-      <p:sp xmlns:a="http://schemas.openxmlformats.org/drawingml/2006/main">
-        <p:nvSpPr>
-          <p:cNvPr id="18" name="TextBox 17"/>
-          <p:cNvSpPr txBox="1"/>
-          <p:nvPr/>
-        </p:nvSpPr>
-        <p:spPr>
-          <a:xfrm>
-            <a:off x="7635240" y="5989320"/>
-            <a:ext cx="3429000" cy="201168"/>
-          </a:xfrm>
-          <a:prstGeom prst="rect">
-            <a:avLst/>
-          </a:prstGeom>
-          <a:noFill/>
-        </p:spPr>
-        <p:txBody>
-          <a:bodyPr wrap="none" lIns="0" rIns="0" tIns="0" bIns="0">
-            <a:spAutoFit/>
-          </a:bodyPr>
-          <a:lstStyle/>
-          <a:p>
-            <a:pPr algn="r"/>
-            <a:r>
-              <a:rPr sz="1150" b="0">
-                <a:solidFill>
-                  <a:srgbClr val="6D6D6D"/>
-                </a:solidFill>
-                <a:latin typeface="Helvetica Neue"/>
-              </a:rPr>
-              <a:t>1D PNP PINN current-based inverse problem</a:t>
-            </a:r>
-          </a:p>
-        </p:txBody>
-      </p:sp>
+          <a:ln xmlns:a="http://schemas.openxmlformats.org/drawingml/2006/main" w="0">
+            <a:solidFill>
+              <a:srgbClr val="000000">
+                <a:alpha val="0"/>
+              </a:srgbClr>
+            </a:solidFill>
+            <a:prstDash val="solid"/>
+          </a:ln>
+        </p:spPr>
+      </p:sp>
+      <p:pic>
+        <p:nvPicPr>
+          <p:cNvPr id="2" name=""/>
+          <p:cNvPicPr>
+            <a:picLocks xmlns:a="http://schemas.openxmlformats.org/drawingml/2006/main" noChangeAspect="1"/>
+          </p:cNvPicPr>
+          <p:nvPr/>
+        </p:nvPicPr>
+        <p:blipFill>
+          <a:blip xmlns:r="http://schemas.openxmlformats.org/officeDocument/2006/relationships" xmlns:a="http://schemas.openxmlformats.org/drawingml/2006/main" r:embed="R7ab865d6404d4e7a"/>
+          <a:srcRect xmlns:a="http://schemas.openxmlformats.org/drawingml/2006/main" l="0" t="0" r="0" b="0"/>
+          <a:stretch xmlns:a="http://schemas.openxmlformats.org/drawingml/2006/main">
+            <a:fillRect l="0" t="0" r="0" b="0"/>
+          </a:stretch>
+        </p:blipFill>
+        <p:spPr>
+          <a:xfrm xmlns:a="http://schemas.openxmlformats.org/drawingml/2006/main">
+            <a:off x="0" y="0"/>
+            <a:ext cx="12192000" cy="6858000"/>
+          </a:xfrm>
+          <a:prstGeom xmlns:a="http://schemas.openxmlformats.org/drawingml/2006/main" prst="rect">
+            <a:avLst/>
+          </a:prstGeom>
+        </p:spPr>
+      </p:pic>
     </p:spTree>
     <p:extLst>
       <p:ext uri="{BB962C8B-B14F-4D97-AF65-F5344CB8AC3E}">
-        <p14:creationId xmlns:p14="http://schemas.microsoft.com/office/powerpoint/2010/main" val="769574301"/>
+        <p14:creationId xmlns:p14="http://schemas.microsoft.com/office/powerpoint/2010/main" val="2053575317"/>
       </p:ext>
     </p:extLst>
   </p:cSld>
@@ -2568,7 +2006,7 @@
           <p:cNvPr id="1" name="">
             <a:extLst xmlns:a="http://schemas.openxmlformats.org/drawingml/2006/main">
               <a:ext uri="{FF2B5EF4-FFF2-40B4-BE49-F238E27FC236}">
-                <a16:creationId xmlns:a16="http://schemas.microsoft.com/office/drawing/2014/main" id="{DDFC8FB8-AD7D-4F8F-B79C-B51A288D4B19}"/>
+                <a16:creationId xmlns:a16="http://schemas.microsoft.com/office/drawing/2014/main" id="{CDD8B76D-1634-43D7-9632-0A23B4B5C245}"/>
               </a:ext>
             </a:extLst>
           </p:cNvPr>
@@ -2603,7 +2041,7 @@
           <p:cNvPr id="2" name="">
             <a:extLst xmlns:a="http://schemas.openxmlformats.org/drawingml/2006/main">
               <a:ext uri="{FF2B5EF4-FFF2-40B4-BE49-F238E27FC236}">
-                <a16:creationId xmlns:a16="http://schemas.microsoft.com/office/drawing/2014/main" id="{E817C350-3764-4C6B-8983-79B735DD23DB}"/>
+                <a16:creationId xmlns:a16="http://schemas.microsoft.com/office/drawing/2014/main" id="{1CF2F91B-983A-4EE1-93EB-54B0A82B11A8}"/>
               </a:ext>
             </a:extLst>
           </p:cNvPr>
@@ -2615,7 +2053,7 @@
         <p:spPr>
           <a:xfrm xmlns:a="http://schemas.openxmlformats.org/drawingml/2006/main">
             <a:off x="685800" y="400050"/>
-            <a:ext cx="4953000" cy="190500"/>
+            <a:ext cx="5143500" cy="190500"/>
           </a:xfrm>
           <a:prstGeom xmlns:a="http://schemas.openxmlformats.org/drawingml/2006/main" prst="rect">
             <a:avLst/>
@@ -2643,9 +2081,9 @@
                 <a:solidFill>
                   <a:srgbClr val="6D6D6D"/>
                 </a:solidFill>
-                <a:latin typeface="Aptos"/>
-                <a:ea typeface="Aptos"/>
-                <a:cs typeface="Aptos"/>
+                <a:latin typeface="Arial"/>
+                <a:ea typeface="Arial"/>
+                <a:cs typeface="Arial"/>
               </a:defRPr>
             </a:pPr>
             <a:r>
@@ -2653,9 +2091,9 @@
                 <a:solidFill>
                   <a:srgbClr val="6D6D6D"/>
                 </a:solidFill>
-                <a:latin typeface="Aptos"/>
-                <a:ea typeface="Aptos"/>
-                <a:cs typeface="Aptos"/>
+                <a:latin typeface="Arial"/>
+                <a:ea typeface="Arial"/>
+                <a:cs typeface="Arial"/>
               </a:rPr>
               <a:t>BAYESIAN INVERSE PROBLEM</a:t>
             </a:r>
@@ -2667,7 +2105,7 @@
           <p:cNvPr id="3" name="">
             <a:extLst xmlns:a="http://schemas.openxmlformats.org/drawingml/2006/main">
               <a:ext uri="{FF2B5EF4-FFF2-40B4-BE49-F238E27FC236}">
-                <a16:creationId xmlns:a16="http://schemas.microsoft.com/office/drawing/2014/main" id="{F7ABABD9-F6BC-41D1-BB3F-32D897F54717}"/>
+                <a16:creationId xmlns:a16="http://schemas.microsoft.com/office/drawing/2014/main" id="{2C2B6D6D-2778-45AB-98E8-8261668D5BE0}"/>
               </a:ext>
             </a:extLst>
           </p:cNvPr>
@@ -2707,9 +2145,9 @@
                 <a:solidFill>
                   <a:srgbClr val="6D6D6D"/>
                 </a:solidFill>
-                <a:latin typeface="Aptos"/>
-                <a:ea typeface="Aptos"/>
-                <a:cs typeface="Aptos"/>
+                <a:latin typeface="Arial"/>
+                <a:ea typeface="Arial"/>
+                <a:cs typeface="Arial"/>
               </a:defRPr>
             </a:pPr>
             <a:r>
@@ -2717,9 +2155,9 @@
                 <a:solidFill>
                   <a:srgbClr val="6D6D6D"/>
                 </a:solidFill>
-                <a:latin typeface="Aptos"/>
-                <a:ea typeface="Aptos"/>
-                <a:cs typeface="Aptos"/>
+                <a:latin typeface="Arial"/>
+                <a:ea typeface="Arial"/>
+                <a:cs typeface="Arial"/>
               </a:rPr>
               <a:t>10</a:t>
             </a:r>
@@ -2731,7 +2169,7 @@
           <p:cNvPr id="4" name="">
             <a:extLst xmlns:a="http://schemas.openxmlformats.org/drawingml/2006/main">
               <a:ext uri="{FF2B5EF4-FFF2-40B4-BE49-F238E27FC236}">
-                <a16:creationId xmlns:a16="http://schemas.microsoft.com/office/drawing/2014/main" id="{9244AE4A-AB4C-44F3-A4F0-44EB3EA6E4A8}"/>
+                <a16:creationId xmlns:a16="http://schemas.microsoft.com/office/drawing/2014/main" id="{AD6ADE24-7291-433A-A5E3-F8423286FF73}"/>
               </a:ext>
             </a:extLst>
           </p:cNvPr>
@@ -2766,7 +2204,7 @@
           <p:cNvPr id="5" name="">
             <a:extLst xmlns:a="http://schemas.openxmlformats.org/drawingml/2006/main">
               <a:ext uri="{FF2B5EF4-FFF2-40B4-BE49-F238E27FC236}">
-                <a16:creationId xmlns:a16="http://schemas.microsoft.com/office/drawing/2014/main" id="{D10D6D6C-483D-4274-81EF-966BDE5D64CB}"/>
+                <a16:creationId xmlns:a16="http://schemas.microsoft.com/office/drawing/2014/main" id="{BDA8B071-804C-4369-93AC-46851BB8A63A}"/>
               </a:ext>
             </a:extLst>
           </p:cNvPr>
@@ -2801,7 +2239,7 @@
           <p:cNvPr id="6" name="">
             <a:extLst xmlns:a="http://schemas.openxmlformats.org/drawingml/2006/main">
               <a:ext uri="{FF2B5EF4-FFF2-40B4-BE49-F238E27FC236}">
-                <a16:creationId xmlns:a16="http://schemas.microsoft.com/office/drawing/2014/main" id="{06AAE2E7-BE80-42C4-99FE-C7AE39B65C98}"/>
+                <a16:creationId xmlns:a16="http://schemas.microsoft.com/office/drawing/2014/main" id="{44F12BED-5955-4E33-8A95-0252F5A71CD5}"/>
               </a:ext>
             </a:extLst>
           </p:cNvPr>
@@ -2813,7 +2251,7 @@
         <p:spPr>
           <a:xfrm xmlns:a="http://schemas.openxmlformats.org/drawingml/2006/main">
             <a:off x="685800" y="990600"/>
-            <a:ext cx="10477500" cy="838200"/>
+            <a:ext cx="10096500" cy="838200"/>
           </a:xfrm>
           <a:prstGeom xmlns:a="http://schemas.openxmlformats.org/drawingml/2006/main" prst="rect">
             <a:avLst/>
@@ -2841,9 +2279,9 @@
                 <a:solidFill>
                   <a:srgbClr val="151515"/>
                 </a:solidFill>
-                <a:latin typeface="Aptos Display"/>
-                <a:ea typeface="Aptos Display"/>
-                <a:cs typeface="Aptos Display"/>
+                <a:latin typeface="Arial"/>
+                <a:ea typeface="Arial"/>
+                <a:cs typeface="Arial"/>
               </a:defRPr>
             </a:pPr>
             <a:r>
@@ -2851,9 +2289,9 @@
                 <a:solidFill>
                   <a:srgbClr val="151515"/>
                 </a:solidFill>
-                <a:latin typeface="Aptos Display"/>
-                <a:ea typeface="Aptos Display"/>
-                <a:cs typeface="Aptos Display"/>
+                <a:latin typeface="Arial"/>
+                <a:ea typeface="Arial"/>
+                <a:cs typeface="Arial"/>
               </a:rPr>
               <a:t>The posterior compares observed current with PINN-predicted current.</a:t>
             </a:r>
@@ -2865,19 +2303,19 @@
           <p:cNvPr id="7" name="">
             <a:extLst xmlns:a="http://schemas.openxmlformats.org/drawingml/2006/main">
               <a:ext uri="{FF2B5EF4-FFF2-40B4-BE49-F238E27FC236}">
-                <a16:creationId xmlns:a16="http://schemas.microsoft.com/office/drawing/2014/main" id="{63B96E8F-E4FE-437C-83E7-14191E9FFEE9}"/>
-              </a:ext>
-            </a:extLst>
-          </p:cNvPr>
-          <p:cNvSpPr>
-            <a:spLocks xmlns:a="http://schemas.openxmlformats.org/drawingml/2006/main" noGrp="1"/>
-          </p:cNvSpPr>
-          <p:nvPr/>
-        </p:nvSpPr>
-        <p:spPr>
-          <a:xfrm xmlns:a="http://schemas.openxmlformats.org/drawingml/2006/main">
-            <a:off x="704850" y="1866900"/>
-            <a:ext cx="9144000" cy="419100"/>
+                <a16:creationId xmlns:a16="http://schemas.microsoft.com/office/drawing/2014/main" id="{D4FEEE83-8DFE-47D9-93F5-5960816D0128}"/>
+              </a:ext>
+            </a:extLst>
+          </p:cNvPr>
+          <p:cNvSpPr>
+            <a:spLocks xmlns:a="http://schemas.openxmlformats.org/drawingml/2006/main" noGrp="1"/>
+          </p:cNvSpPr>
+          <p:nvPr/>
+        </p:nvSpPr>
+        <p:spPr>
+          <a:xfrm xmlns:a="http://schemas.openxmlformats.org/drawingml/2006/main">
+            <a:off x="704850" y="1885950"/>
+            <a:ext cx="9334500" cy="419100"/>
           </a:xfrm>
           <a:prstGeom xmlns:a="http://schemas.openxmlformats.org/drawingml/2006/main" prst="rect">
             <a:avLst/>
@@ -2905,9 +2343,9 @@
                 <a:solidFill>
                   <a:srgbClr val="6D6D6D"/>
                 </a:solidFill>
-                <a:latin typeface="Aptos"/>
-                <a:ea typeface="Aptos"/>
-                <a:cs typeface="Aptos"/>
+                <a:latin typeface="Arial"/>
+                <a:ea typeface="Arial"/>
+                <a:cs typeface="Arial"/>
               </a:defRPr>
             </a:pPr>
             <a:r>
@@ -2915,9 +2353,9 @@
                 <a:solidFill>
                   <a:srgbClr val="6D6D6D"/>
                 </a:solidFill>
-                <a:latin typeface="Aptos"/>
-                <a:ea typeface="Aptos"/>
-                <a:cs typeface="Aptos"/>
+                <a:latin typeface="Arial"/>
+                <a:ea typeface="Arial"/>
+                <a:cs typeface="Arial"/>
               </a:rPr>
               <a:t>The current diagnostic uses a transparent 41 by 41 grid posterior.</a:t>
             </a:r>
@@ -2929,7 +2367,7 @@
           <p:cNvPr id="8" name="">
             <a:extLst xmlns:a="http://schemas.openxmlformats.org/drawingml/2006/main">
               <a:ext uri="{FF2B5EF4-FFF2-40B4-BE49-F238E27FC236}">
-                <a16:creationId xmlns:a16="http://schemas.microsoft.com/office/drawing/2014/main" id="{55A79EA8-8E8A-4763-B811-124689F1BA0B}"/>
+                <a16:creationId xmlns:a16="http://schemas.microsoft.com/office/drawing/2014/main" id="{F893FAB9-22D4-45E5-852A-CAB7726ED11E}"/>
               </a:ext>
             </a:extLst>
           </p:cNvPr>
@@ -2962,7 +2400,7 @@
           <p:cNvPr id="9" name="">
             <a:extLst xmlns:a="http://schemas.openxmlformats.org/drawingml/2006/main">
               <a:ext uri="{FF2B5EF4-FFF2-40B4-BE49-F238E27FC236}">
-                <a16:creationId xmlns:a16="http://schemas.microsoft.com/office/drawing/2014/main" id="{13B4A516-1201-4663-9EE1-4CDCEE3413DB}"/>
+                <a16:creationId xmlns:a16="http://schemas.microsoft.com/office/drawing/2014/main" id="{1253B71A-F23B-42B8-A574-C6ABCF8B2C27}"/>
               </a:ext>
             </a:extLst>
           </p:cNvPr>
@@ -3001,13 +2439,13 @@
           <p:nvPr/>
         </p:nvPicPr>
         <p:blipFill>
-          <a:blip xmlns:r="http://schemas.openxmlformats.org/officeDocument/2006/relationships" xmlns:a="http://schemas.openxmlformats.org/drawingml/2006/main" r:embed="Rbd9ab5ed5ecd448d"/>
+          <a:blip xmlns:r="http://schemas.openxmlformats.org/officeDocument/2006/relationships" xmlns:a="http://schemas.openxmlformats.org/drawingml/2006/main" r:embed="Ra8c980d234184392"/>
           <a:stretch xmlns:a="http://schemas.openxmlformats.org/drawingml/2006/main"/>
         </p:blipFill>
         <p:spPr>
           <a:xfrm xmlns:a="http://schemas.openxmlformats.org/drawingml/2006/main">
-            <a:off x="2836718" y="2800350"/>
-            <a:ext cx="6404264" cy="1638300"/>
+            <a:off x="2435257" y="2800350"/>
+            <a:ext cx="7207185" cy="1638300"/>
           </a:xfrm>
           <a:prstGeom xmlns:a="http://schemas.openxmlformats.org/drawingml/2006/main" prst="rect">
             <a:avLst/>
@@ -3019,7 +2457,7 @@
           <p:cNvPr id="11" name="">
             <a:extLst xmlns:a="http://schemas.openxmlformats.org/drawingml/2006/main">
               <a:ext uri="{FF2B5EF4-FFF2-40B4-BE49-F238E27FC236}">
-                <a16:creationId xmlns:a16="http://schemas.microsoft.com/office/drawing/2014/main" id="{DE63DBE2-11B2-4217-ABCA-EDB5C25076FD}"/>
+                <a16:creationId xmlns:a16="http://schemas.microsoft.com/office/drawing/2014/main" id="{3105079E-2E76-4F4C-B19F-EC59A3C20356}"/>
               </a:ext>
             </a:extLst>
           </p:cNvPr>
@@ -3059,9 +2497,9 @@
                 <a:solidFill>
                   <a:srgbClr val="6D6D6D"/>
                 </a:solidFill>
-                <a:latin typeface="Aptos"/>
-                <a:ea typeface="Aptos"/>
-                <a:cs typeface="Aptos"/>
+                <a:latin typeface="Arial"/>
+                <a:ea typeface="Arial"/>
+                <a:cs typeface="Arial"/>
               </a:defRPr>
             </a:pPr>
             <a:r>
@@ -3069,9 +2507,9 @@
                 <a:solidFill>
                   <a:srgbClr val="6D6D6D"/>
                 </a:solidFill>
-                <a:latin typeface="Aptos"/>
-                <a:ea typeface="Aptos"/>
-                <a:cs typeface="Aptos"/>
+                <a:latin typeface="Arial"/>
+                <a:ea typeface="Arial"/>
+                <a:cs typeface="Arial"/>
               </a:rPr>
               <a:t>Uniform prior over the grid; posterior mass is normalized after evaluating all candidates.</a:t>
             </a:r>
@@ -3083,7 +2521,7 @@
           <p:cNvPr id="12" name="">
             <a:extLst xmlns:a="http://schemas.openxmlformats.org/drawingml/2006/main">
               <a:ext uri="{FF2B5EF4-FFF2-40B4-BE49-F238E27FC236}">
-                <a16:creationId xmlns:a16="http://schemas.microsoft.com/office/drawing/2014/main" id="{9F2DC90D-DF5F-4AE4-ACFB-3098CB22F0A3}"/>
+                <a16:creationId xmlns:a16="http://schemas.microsoft.com/office/drawing/2014/main" id="{4F8139B6-B57B-48DD-8642-58E9C86E0622}"/>
               </a:ext>
             </a:extLst>
           </p:cNvPr>
@@ -3118,7 +2556,7 @@
           <p:cNvPr id="13" name="">
             <a:extLst xmlns:a="http://schemas.openxmlformats.org/drawingml/2006/main">
               <a:ext uri="{FF2B5EF4-FFF2-40B4-BE49-F238E27FC236}">
-                <a16:creationId xmlns:a16="http://schemas.microsoft.com/office/drawing/2014/main" id="{896C5E82-ECA4-4661-9C41-A8EA02FB9E1D}"/>
+                <a16:creationId xmlns:a16="http://schemas.microsoft.com/office/drawing/2014/main" id="{4E9AD53F-59EB-46AD-842E-5948CF26EFB5}"/>
               </a:ext>
             </a:extLst>
           </p:cNvPr>
@@ -3130,7 +2568,7 @@
         <p:spPr>
           <a:xfrm xmlns:a="http://schemas.openxmlformats.org/drawingml/2006/main">
             <a:off x="685800" y="6477000"/>
-            <a:ext cx="6858000" cy="152400"/>
+            <a:ext cx="7239000" cy="152400"/>
           </a:xfrm>
           <a:prstGeom xmlns:a="http://schemas.openxmlformats.org/drawingml/2006/main" prst="rect">
             <a:avLst/>
@@ -3158,9 +2596,9 @@
                 <a:solidFill>
                   <a:srgbClr val="77736D"/>
                 </a:solidFill>
-                <a:latin typeface="Aptos"/>
-                <a:ea typeface="Aptos"/>
-                <a:cs typeface="Aptos"/>
+                <a:latin typeface="Arial"/>
+                <a:ea typeface="Arial"/>
+                <a:cs typeface="Arial"/>
               </a:defRPr>
             </a:pPr>
             <a:r>
@@ -3168,9 +2606,9 @@
                 <a:solidFill>
                   <a:srgbClr val="77736D"/>
                 </a:solidFill>
-                <a:latin typeface="Aptos"/>
-                <a:ea typeface="Aptos"/>
-                <a:cs typeface="Aptos"/>
+                <a:latin typeface="Arial"/>
+                <a:ea typeface="Arial"/>
+                <a:cs typeface="Arial"/>
               </a:rPr>
               <a:t>Likelihood and posterior</a:t>
             </a:r>
@@ -3180,7 +2618,7 @@
     </p:spTree>
     <p:extLst>
       <p:ext uri="{BB962C8B-B14F-4D97-AF65-F5344CB8AC3E}">
-        <p14:creationId xmlns:p14="http://schemas.microsoft.com/office/powerpoint/2010/main" val="449129557"/>
+        <p14:creationId xmlns:p14="http://schemas.microsoft.com/office/powerpoint/2010/main" val="1180493956"/>
       </p:ext>
     </p:extLst>
   </p:cSld>
@@ -3204,7 +2642,7 @@
           <p:cNvPr id="1" name="">
             <a:extLst xmlns:a="http://schemas.openxmlformats.org/drawingml/2006/main">
               <a:ext uri="{FF2B5EF4-FFF2-40B4-BE49-F238E27FC236}">
-                <a16:creationId xmlns:a16="http://schemas.microsoft.com/office/drawing/2014/main" id="{83CEB951-C71B-4215-A26B-700F345E8FE8}"/>
+                <a16:creationId xmlns:a16="http://schemas.microsoft.com/office/drawing/2014/main" id="{43AA39FE-5048-4CFA-922B-957F0C299159}"/>
               </a:ext>
             </a:extLst>
           </p:cNvPr>
@@ -3239,7 +2677,7 @@
           <p:cNvPr id="2" name="">
             <a:extLst xmlns:a="http://schemas.openxmlformats.org/drawingml/2006/main">
               <a:ext uri="{FF2B5EF4-FFF2-40B4-BE49-F238E27FC236}">
-                <a16:creationId xmlns:a16="http://schemas.microsoft.com/office/drawing/2014/main" id="{D59EDCEC-FBC0-4DED-8E8B-86D51861B349}"/>
+                <a16:creationId xmlns:a16="http://schemas.microsoft.com/office/drawing/2014/main" id="{8FCDED00-B4CC-4D2B-8AD8-53C32B47719E}"/>
               </a:ext>
             </a:extLst>
           </p:cNvPr>
@@ -3251,7 +2689,7 @@
         <p:spPr>
           <a:xfrm xmlns:a="http://schemas.openxmlformats.org/drawingml/2006/main">
             <a:off x="685800" y="400050"/>
-            <a:ext cx="4953000" cy="190500"/>
+            <a:ext cx="5143500" cy="190500"/>
           </a:xfrm>
           <a:prstGeom xmlns:a="http://schemas.openxmlformats.org/drawingml/2006/main" prst="rect">
             <a:avLst/>
@@ -3279,9 +2717,9 @@
                 <a:solidFill>
                   <a:srgbClr val="6D6D6D"/>
                 </a:solidFill>
-                <a:latin typeface="Aptos"/>
-                <a:ea typeface="Aptos"/>
-                <a:cs typeface="Aptos"/>
+                <a:latin typeface="Arial"/>
+                <a:ea typeface="Arial"/>
+                <a:cs typeface="Arial"/>
               </a:defRPr>
             </a:pPr>
             <a:r>
@@ -3289,9 +2727,9 @@
                 <a:solidFill>
                   <a:srgbClr val="6D6D6D"/>
                 </a:solidFill>
-                <a:latin typeface="Aptos"/>
-                <a:ea typeface="Aptos"/>
-                <a:cs typeface="Aptos"/>
+                <a:latin typeface="Arial"/>
+                <a:ea typeface="Arial"/>
+                <a:cs typeface="Arial"/>
               </a:rPr>
               <a:t>CURRENT FIT</a:t>
             </a:r>
@@ -3303,7 +2741,7 @@
           <p:cNvPr id="3" name="">
             <a:extLst xmlns:a="http://schemas.openxmlformats.org/drawingml/2006/main">
               <a:ext uri="{FF2B5EF4-FFF2-40B4-BE49-F238E27FC236}">
-                <a16:creationId xmlns:a16="http://schemas.microsoft.com/office/drawing/2014/main" id="{9AFBCEAC-97C0-4A3E-A9D0-FD744FEDE88A}"/>
+                <a16:creationId xmlns:a16="http://schemas.microsoft.com/office/drawing/2014/main" id="{FF0A97F1-2981-4EC2-ACB4-6B237D8F469B}"/>
               </a:ext>
             </a:extLst>
           </p:cNvPr>
@@ -3343,9 +2781,9 @@
                 <a:solidFill>
                   <a:srgbClr val="6D6D6D"/>
                 </a:solidFill>
-                <a:latin typeface="Aptos"/>
-                <a:ea typeface="Aptos"/>
-                <a:cs typeface="Aptos"/>
+                <a:latin typeface="Arial"/>
+                <a:ea typeface="Arial"/>
+                <a:cs typeface="Arial"/>
               </a:defRPr>
             </a:pPr>
             <a:r>
@@ -3353,9 +2791,9 @@
                 <a:solidFill>
                   <a:srgbClr val="6D6D6D"/>
                 </a:solidFill>
-                <a:latin typeface="Aptos"/>
-                <a:ea typeface="Aptos"/>
-                <a:cs typeface="Aptos"/>
+                <a:latin typeface="Arial"/>
+                <a:ea typeface="Arial"/>
+                <a:cs typeface="Arial"/>
               </a:rPr>
               <a:t>11</a:t>
             </a:r>
@@ -3367,7 +2805,7 @@
           <p:cNvPr id="4" name="">
             <a:extLst xmlns:a="http://schemas.openxmlformats.org/drawingml/2006/main">
               <a:ext uri="{FF2B5EF4-FFF2-40B4-BE49-F238E27FC236}">
-                <a16:creationId xmlns:a16="http://schemas.microsoft.com/office/drawing/2014/main" id="{25E2E4D7-1C11-4777-94EB-3F9EB04D4DFF}"/>
+                <a16:creationId xmlns:a16="http://schemas.microsoft.com/office/drawing/2014/main" id="{B4388342-4264-46CD-98D8-56FD25881BFC}"/>
               </a:ext>
             </a:extLst>
           </p:cNvPr>
@@ -3402,7 +2840,7 @@
           <p:cNvPr id="5" name="">
             <a:extLst xmlns:a="http://schemas.openxmlformats.org/drawingml/2006/main">
               <a:ext uri="{FF2B5EF4-FFF2-40B4-BE49-F238E27FC236}">
-                <a16:creationId xmlns:a16="http://schemas.microsoft.com/office/drawing/2014/main" id="{3937F0C2-2D20-46C0-9F97-4C5E7A099607}"/>
+                <a16:creationId xmlns:a16="http://schemas.microsoft.com/office/drawing/2014/main" id="{39CB6D5E-1046-4668-8DBF-041D47320E1E}"/>
               </a:ext>
             </a:extLst>
           </p:cNvPr>
@@ -3437,7 +2875,7 @@
           <p:cNvPr id="6" name="">
             <a:extLst xmlns:a="http://schemas.openxmlformats.org/drawingml/2006/main">
               <a:ext uri="{FF2B5EF4-FFF2-40B4-BE49-F238E27FC236}">
-                <a16:creationId xmlns:a16="http://schemas.microsoft.com/office/drawing/2014/main" id="{BF3CF4D9-6E42-4CEF-A773-826C0DFCCC7F}"/>
+                <a16:creationId xmlns:a16="http://schemas.microsoft.com/office/drawing/2014/main" id="{1AA2A094-1A3B-4F4D-B6F7-72FABED19C02}"/>
               </a:ext>
             </a:extLst>
           </p:cNvPr>
@@ -3477,9 +2915,9 @@
                 <a:solidFill>
                   <a:srgbClr val="151515"/>
                 </a:solidFill>
-                <a:latin typeface="Aptos Display"/>
-                <a:ea typeface="Aptos Display"/>
-                <a:cs typeface="Aptos Display"/>
+                <a:latin typeface="Arial"/>
+                <a:ea typeface="Arial"/>
+                <a:cs typeface="Arial"/>
               </a:defRPr>
             </a:pPr>
             <a:r>
@@ -3487,9 +2925,9 @@
                 <a:solidFill>
                   <a:srgbClr val="151515"/>
                 </a:solidFill>
-                <a:latin typeface="Aptos Display"/>
-                <a:ea typeface="Aptos Display"/>
-                <a:cs typeface="Aptos Display"/>
+                <a:latin typeface="Arial"/>
+                <a:ea typeface="Arial"/>
+                <a:cs typeface="Arial"/>
               </a:rPr>
               <a:t>At the MAP point, the PINN matches the observed current at the noise level.</a:t>
             </a:r>
@@ -3505,13 +2943,13 @@
           <p:nvPr/>
         </p:nvPicPr>
         <p:blipFill>
-          <a:blip xmlns:r="http://schemas.openxmlformats.org/officeDocument/2006/relationships" xmlns:a="http://schemas.openxmlformats.org/drawingml/2006/main" r:embed="R9307b27a0d5740b5"/>
+          <a:blip xmlns:r="http://schemas.openxmlformats.org/officeDocument/2006/relationships" xmlns:a="http://schemas.openxmlformats.org/drawingml/2006/main" r:embed="R18fcdddd9bab42c1"/>
           <a:stretch xmlns:a="http://schemas.openxmlformats.org/drawingml/2006/main"/>
         </p:blipFill>
         <p:spPr>
           <a:xfrm xmlns:a="http://schemas.openxmlformats.org/drawingml/2006/main">
-            <a:off x="1495993" y="2209800"/>
-            <a:ext cx="6342513" cy="3714750"/>
+            <a:off x="1304671" y="2133600"/>
+            <a:ext cx="6725157" cy="3857625"/>
           </a:xfrm>
           <a:prstGeom xmlns:a="http://schemas.openxmlformats.org/drawingml/2006/main" prst="rect">
             <a:avLst/>
@@ -3523,7 +2961,7 @@
           <p:cNvPr id="8" name="">
             <a:extLst xmlns:a="http://schemas.openxmlformats.org/drawingml/2006/main">
               <a:ext uri="{FF2B5EF4-FFF2-40B4-BE49-F238E27FC236}">
-                <a16:creationId xmlns:a16="http://schemas.microsoft.com/office/drawing/2014/main" id="{A7B8E76D-439B-40D1-B1F4-F4D3B6430A71}"/>
+                <a16:creationId xmlns:a16="http://schemas.microsoft.com/office/drawing/2014/main" id="{002583DE-8CAD-4BC1-B077-09FD44806D87}"/>
               </a:ext>
             </a:extLst>
           </p:cNvPr>
@@ -3563,9 +3001,9 @@
                 <a:solidFill>
                   <a:srgbClr val="1F4E79"/>
                 </a:solidFill>
-                <a:latin typeface="Aptos"/>
-                <a:ea typeface="Aptos"/>
-                <a:cs typeface="Aptos"/>
+                <a:latin typeface="Arial"/>
+                <a:ea typeface="Arial"/>
+                <a:cs typeface="Arial"/>
               </a:defRPr>
             </a:pPr>
             <a:r>
@@ -3573,9 +3011,9 @@
                 <a:solidFill>
                   <a:srgbClr val="1F4E79"/>
                 </a:solidFill>
-                <a:latin typeface="Aptos"/>
-                <a:ea typeface="Aptos"/>
-                <a:cs typeface="Aptos"/>
+                <a:latin typeface="Arial"/>
+                <a:ea typeface="Arial"/>
+                <a:cs typeface="Arial"/>
               </a:rPr>
               <a:t>MAP</a:t>
             </a:r>
@@ -3587,7 +3025,7 @@
           <p:cNvPr id="9" name="">
             <a:extLst xmlns:a="http://schemas.openxmlformats.org/drawingml/2006/main">
               <a:ext uri="{FF2B5EF4-FFF2-40B4-BE49-F238E27FC236}">
-                <a16:creationId xmlns:a16="http://schemas.microsoft.com/office/drawing/2014/main" id="{859AC76F-BB79-4EBB-96B2-0445DE966627}"/>
+                <a16:creationId xmlns:a16="http://schemas.microsoft.com/office/drawing/2014/main" id="{E0CA4AD4-5621-414B-B234-0168928283B0}"/>
               </a:ext>
             </a:extLst>
           </p:cNvPr>
@@ -3627,9 +3065,9 @@
                 <a:solidFill>
                   <a:srgbClr val="2B2B2B"/>
                 </a:solidFill>
-                <a:latin typeface="Aptos"/>
-                <a:ea typeface="Aptos"/>
-                <a:cs typeface="Aptos"/>
+                <a:latin typeface="Arial"/>
+                <a:ea typeface="Arial"/>
+                <a:cs typeface="Arial"/>
               </a:defRPr>
             </a:pPr>
             <a:r>
@@ -3637,9 +3075,9 @@
                 <a:solidFill>
                   <a:srgbClr val="2B2B2B"/>
                 </a:solidFill>
-                <a:latin typeface="Aptos"/>
-                <a:ea typeface="Aptos"/>
-                <a:cs typeface="Aptos"/>
+                <a:latin typeface="Arial"/>
+                <a:ea typeface="Arial"/>
+                <a:cs typeface="Arial"/>
               </a:rPr>
               <a:t>Dp = 1.25</a:t>
             </a:r>
@@ -3650,9 +3088,9 @@
                 <a:solidFill>
                   <a:srgbClr val="2B2B2B"/>
                 </a:solidFill>
-                <a:latin typeface="Aptos"/>
-                <a:ea typeface="Aptos"/>
-                <a:cs typeface="Aptos"/>
+                <a:latin typeface="Arial"/>
+                <a:ea typeface="Arial"/>
+                <a:cs typeface="Arial"/>
               </a:defRPr>
             </a:pPr>
             <a:r>
@@ -3660,9 +3098,9 @@
                 <a:solidFill>
                   <a:srgbClr val="2B2B2B"/>
                 </a:solidFill>
-                <a:latin typeface="Aptos"/>
-                <a:ea typeface="Aptos"/>
-                <a:cs typeface="Aptos"/>
+                <a:latin typeface="Arial"/>
+                <a:ea typeface="Arial"/>
+                <a:cs typeface="Arial"/>
               </a:rPr>
               <a:t>Dn = 1.2125</a:t>
             </a:r>
@@ -3674,7 +3112,7 @@
           <p:cNvPr id="10" name="">
             <a:extLst xmlns:a="http://schemas.openxmlformats.org/drawingml/2006/main">
               <a:ext uri="{FF2B5EF4-FFF2-40B4-BE49-F238E27FC236}">
-                <a16:creationId xmlns:a16="http://schemas.microsoft.com/office/drawing/2014/main" id="{4F0B7359-C922-4ACC-A0B1-B7C41F180538}"/>
+                <a16:creationId xmlns:a16="http://schemas.microsoft.com/office/drawing/2014/main" id="{F3408320-0E8E-469A-BD4E-30D4C64F65C6}"/>
               </a:ext>
             </a:extLst>
           </p:cNvPr>
@@ -3714,9 +3152,9 @@
                 <a:solidFill>
                   <a:srgbClr val="D05A2A"/>
                 </a:solidFill>
-                <a:latin typeface="Aptos"/>
-                <a:ea typeface="Aptos"/>
-                <a:cs typeface="Aptos"/>
+                <a:latin typeface="Arial"/>
+                <a:ea typeface="Arial"/>
+                <a:cs typeface="Arial"/>
               </a:defRPr>
             </a:pPr>
             <a:r>
@@ -3724,9 +3162,9 @@
                 <a:solidFill>
                   <a:srgbClr val="D05A2A"/>
                 </a:solidFill>
-                <a:latin typeface="Aptos"/>
-                <a:ea typeface="Aptos"/>
-                <a:cs typeface="Aptos"/>
+                <a:latin typeface="Arial"/>
+                <a:ea typeface="Arial"/>
+                <a:cs typeface="Arial"/>
               </a:rPr>
               <a:t>Data</a:t>
             </a:r>
@@ -3738,7 +3176,7 @@
           <p:cNvPr id="11" name="">
             <a:extLst xmlns:a="http://schemas.openxmlformats.org/drawingml/2006/main">
               <a:ext uri="{FF2B5EF4-FFF2-40B4-BE49-F238E27FC236}">
-                <a16:creationId xmlns:a16="http://schemas.microsoft.com/office/drawing/2014/main" id="{3C9495FA-BDFE-4702-BC1B-E98B0CC0A970}"/>
+                <a16:creationId xmlns:a16="http://schemas.microsoft.com/office/drawing/2014/main" id="{4D58544D-D63E-47E6-BE67-66FFEA683550}"/>
               </a:ext>
             </a:extLst>
           </p:cNvPr>
@@ -3778,9 +3216,9 @@
                 <a:solidFill>
                   <a:srgbClr val="2B2B2B"/>
                 </a:solidFill>
-                <a:latin typeface="Aptos"/>
-                <a:ea typeface="Aptos"/>
-                <a:cs typeface="Aptos"/>
+                <a:latin typeface="Arial"/>
+                <a:ea typeface="Arial"/>
+                <a:cs typeface="Arial"/>
               </a:defRPr>
             </a:pPr>
             <a:r>
@@ -3788,9 +3226,9 @@
                 <a:solidFill>
                   <a:srgbClr val="2B2B2B"/>
                 </a:solidFill>
-                <a:latin typeface="Aptos"/>
-                <a:ea typeface="Aptos"/>
-                <a:cs typeface="Aptos"/>
+                <a:latin typeface="Arial"/>
+                <a:ea typeface="Arial"/>
+                <a:cs typeface="Arial"/>
               </a:rPr>
               <a:t>79 current intervals</a:t>
             </a:r>
@@ -3801,9 +3239,9 @@
                 <a:solidFill>
                   <a:srgbClr val="2B2B2B"/>
                 </a:solidFill>
-                <a:latin typeface="Aptos"/>
-                <a:ea typeface="Aptos"/>
-                <a:cs typeface="Aptos"/>
+                <a:latin typeface="Arial"/>
+                <a:ea typeface="Arial"/>
+                <a:cs typeface="Arial"/>
               </a:defRPr>
             </a:pPr>
             <a:r>
@@ -3811,9 +3249,9 @@
                 <a:solidFill>
                   <a:srgbClr val="2B2B2B"/>
                 </a:solidFill>
-                <a:latin typeface="Aptos"/>
-                <a:ea typeface="Aptos"/>
-                <a:cs typeface="Aptos"/>
+                <a:latin typeface="Arial"/>
+                <a:ea typeface="Arial"/>
+                <a:cs typeface="Arial"/>
               </a:rPr>
               <a:t>2% relative noise</a:t>
             </a:r>
@@ -3825,7 +3263,7 @@
           <p:cNvPr id="12" name="">
             <a:extLst xmlns:a="http://schemas.openxmlformats.org/drawingml/2006/main">
               <a:ext uri="{FF2B5EF4-FFF2-40B4-BE49-F238E27FC236}">
-                <a16:creationId xmlns:a16="http://schemas.microsoft.com/office/drawing/2014/main" id="{432EC5ED-E133-4A54-9742-AA524ADAC585}"/>
+                <a16:creationId xmlns:a16="http://schemas.microsoft.com/office/drawing/2014/main" id="{09ABCB79-2C44-4C66-8672-653E23D6D995}"/>
               </a:ext>
             </a:extLst>
           </p:cNvPr>
@@ -3860,7 +3298,7 @@
           <p:cNvPr id="13" name="">
             <a:extLst xmlns:a="http://schemas.openxmlformats.org/drawingml/2006/main">
               <a:ext uri="{FF2B5EF4-FFF2-40B4-BE49-F238E27FC236}">
-                <a16:creationId xmlns:a16="http://schemas.microsoft.com/office/drawing/2014/main" id="{F4018C6C-4960-48CB-BAB4-C4BDE7F29D6D}"/>
+                <a16:creationId xmlns:a16="http://schemas.microsoft.com/office/drawing/2014/main" id="{E47EF381-9F85-4EF4-8D44-280ACD9A381C}"/>
               </a:ext>
             </a:extLst>
           </p:cNvPr>
@@ -3872,7 +3310,7 @@
         <p:spPr>
           <a:xfrm xmlns:a="http://schemas.openxmlformats.org/drawingml/2006/main">
             <a:off x="685800" y="6477000"/>
-            <a:ext cx="6858000" cy="152400"/>
+            <a:ext cx="7239000" cy="152400"/>
           </a:xfrm>
           <a:prstGeom xmlns:a="http://schemas.openxmlformats.org/drawingml/2006/main" prst="rect">
             <a:avLst/>
@@ -3900,9 +3338,9 @@
                 <a:solidFill>
                   <a:srgbClr val="77736D"/>
                 </a:solidFill>
-                <a:latin typeface="Aptos"/>
-                <a:ea typeface="Aptos"/>
-                <a:cs typeface="Aptos"/>
+                <a:latin typeface="Arial"/>
+                <a:ea typeface="Arial"/>
+                <a:cs typeface="Arial"/>
               </a:defRPr>
             </a:pPr>
             <a:r>
@@ -3910,9 +3348,9 @@
                 <a:solidFill>
                   <a:srgbClr val="77736D"/>
                 </a:solidFill>
-                <a:latin typeface="Aptos"/>
-                <a:ea typeface="Aptos"/>
-                <a:cs typeface="Aptos"/>
+                <a:latin typeface="Arial"/>
+                <a:ea typeface="Arial"/>
+                <a:cs typeface="Arial"/>
               </a:rPr>
               <a:t>Fit on the likelihood signal</a:t>
             </a:r>
@@ -3922,7 +3360,7 @@
     </p:spTree>
     <p:extLst>
       <p:ext uri="{BB962C8B-B14F-4D97-AF65-F5344CB8AC3E}">
-        <p14:creationId xmlns:p14="http://schemas.microsoft.com/office/powerpoint/2010/main" val="1034746141"/>
+        <p14:creationId xmlns:p14="http://schemas.microsoft.com/office/powerpoint/2010/main" val="1968123443"/>
       </p:ext>
     </p:extLst>
   </p:cSld>
@@ -3946,7 +3384,7 @@
           <p:cNvPr id="1" name="">
             <a:extLst xmlns:a="http://schemas.openxmlformats.org/drawingml/2006/main">
               <a:ext uri="{FF2B5EF4-FFF2-40B4-BE49-F238E27FC236}">
-                <a16:creationId xmlns:a16="http://schemas.microsoft.com/office/drawing/2014/main" id="{BA82FE21-E036-4B46-BC47-1D41E58B6640}"/>
+                <a16:creationId xmlns:a16="http://schemas.microsoft.com/office/drawing/2014/main" id="{AE8C423E-91F4-4196-A035-BD582A3B10DA}"/>
               </a:ext>
             </a:extLst>
           </p:cNvPr>
@@ -3981,7 +3419,7 @@
           <p:cNvPr id="2" name="">
             <a:extLst xmlns:a="http://schemas.openxmlformats.org/drawingml/2006/main">
               <a:ext uri="{FF2B5EF4-FFF2-40B4-BE49-F238E27FC236}">
-                <a16:creationId xmlns:a16="http://schemas.microsoft.com/office/drawing/2014/main" id="{8F3618B4-1C02-4B4F-83BA-49A8D81B91E1}"/>
+                <a16:creationId xmlns:a16="http://schemas.microsoft.com/office/drawing/2014/main" id="{BF5C97AB-2E13-4A67-BC0F-92A01422CFA8}"/>
               </a:ext>
             </a:extLst>
           </p:cNvPr>
@@ -3993,7 +3431,7 @@
         <p:spPr>
           <a:xfrm xmlns:a="http://schemas.openxmlformats.org/drawingml/2006/main">
             <a:off x="685800" y="400050"/>
-            <a:ext cx="4953000" cy="190500"/>
+            <a:ext cx="5143500" cy="190500"/>
           </a:xfrm>
           <a:prstGeom xmlns:a="http://schemas.openxmlformats.org/drawingml/2006/main" prst="rect">
             <a:avLst/>
@@ -4021,9 +3459,9 @@
                 <a:solidFill>
                   <a:srgbClr val="6D6D6D"/>
                 </a:solidFill>
-                <a:latin typeface="Aptos"/>
-                <a:ea typeface="Aptos"/>
-                <a:cs typeface="Aptos"/>
+                <a:latin typeface="Arial"/>
+                <a:ea typeface="Arial"/>
+                <a:cs typeface="Arial"/>
               </a:defRPr>
             </a:pPr>
             <a:r>
@@ -4031,9 +3469,9 @@
                 <a:solidFill>
                   <a:srgbClr val="6D6D6D"/>
                 </a:solidFill>
-                <a:latin typeface="Aptos"/>
-                <a:ea typeface="Aptos"/>
-                <a:cs typeface="Aptos"/>
+                <a:latin typeface="Arial"/>
+                <a:ea typeface="Arial"/>
+                <a:cs typeface="Arial"/>
               </a:rPr>
               <a:t>POSTERIOR</a:t>
             </a:r>
@@ -4045,7 +3483,7 @@
           <p:cNvPr id="3" name="">
             <a:extLst xmlns:a="http://schemas.openxmlformats.org/drawingml/2006/main">
               <a:ext uri="{FF2B5EF4-FFF2-40B4-BE49-F238E27FC236}">
-                <a16:creationId xmlns:a16="http://schemas.microsoft.com/office/drawing/2014/main" id="{B9657B17-B1A8-4C00-95D3-8544B55DE196}"/>
+                <a16:creationId xmlns:a16="http://schemas.microsoft.com/office/drawing/2014/main" id="{0D9503C2-DDF1-431B-862D-1BE1AF792538}"/>
               </a:ext>
             </a:extLst>
           </p:cNvPr>
@@ -4085,9 +3523,9 @@
                 <a:solidFill>
                   <a:srgbClr val="6D6D6D"/>
                 </a:solidFill>
-                <a:latin typeface="Aptos"/>
-                <a:ea typeface="Aptos"/>
-                <a:cs typeface="Aptos"/>
+                <a:latin typeface="Arial"/>
+                <a:ea typeface="Arial"/>
+                <a:cs typeface="Arial"/>
               </a:defRPr>
             </a:pPr>
             <a:r>
@@ -4095,9 +3533,9 @@
                 <a:solidFill>
                   <a:srgbClr val="6D6D6D"/>
                 </a:solidFill>
-                <a:latin typeface="Aptos"/>
-                <a:ea typeface="Aptos"/>
-                <a:cs typeface="Aptos"/>
+                <a:latin typeface="Arial"/>
+                <a:ea typeface="Arial"/>
+                <a:cs typeface="Arial"/>
               </a:rPr>
               <a:t>12</a:t>
             </a:r>
@@ -4109,7 +3547,7 @@
           <p:cNvPr id="4" name="">
             <a:extLst xmlns:a="http://schemas.openxmlformats.org/drawingml/2006/main">
               <a:ext uri="{FF2B5EF4-FFF2-40B4-BE49-F238E27FC236}">
-                <a16:creationId xmlns:a16="http://schemas.microsoft.com/office/drawing/2014/main" id="{E1AEA179-4DCB-4F1B-AD9D-F117856E9421}"/>
+                <a16:creationId xmlns:a16="http://schemas.microsoft.com/office/drawing/2014/main" id="{FB72782F-F175-47D0-88DF-B214A9FC844C}"/>
               </a:ext>
             </a:extLst>
           </p:cNvPr>
@@ -4144,7 +3582,7 @@
           <p:cNvPr id="5" name="">
             <a:extLst xmlns:a="http://schemas.openxmlformats.org/drawingml/2006/main">
               <a:ext uri="{FF2B5EF4-FFF2-40B4-BE49-F238E27FC236}">
-                <a16:creationId xmlns:a16="http://schemas.microsoft.com/office/drawing/2014/main" id="{A4659694-FE74-4D1C-B1D3-020237378AB2}"/>
+                <a16:creationId xmlns:a16="http://schemas.microsoft.com/office/drawing/2014/main" id="{A15D5229-9A84-4DDE-9915-D0E207F1FE8F}"/>
               </a:ext>
             </a:extLst>
           </p:cNvPr>
@@ -4179,7 +3617,7 @@
           <p:cNvPr id="6" name="">
             <a:extLst xmlns:a="http://schemas.openxmlformats.org/drawingml/2006/main">
               <a:ext uri="{FF2B5EF4-FFF2-40B4-BE49-F238E27FC236}">
-                <a16:creationId xmlns:a16="http://schemas.microsoft.com/office/drawing/2014/main" id="{F8539171-0D5A-44ED-9BB4-4BD2FB85F772}"/>
+                <a16:creationId xmlns:a16="http://schemas.microsoft.com/office/drawing/2014/main" id="{F341C8D0-94C6-4FBA-ACB9-6C5499AA00FD}"/>
               </a:ext>
             </a:extLst>
           </p:cNvPr>
@@ -4219,9 +3657,9 @@
                 <a:solidFill>
                   <a:srgbClr val="151515"/>
                 </a:solidFill>
-                <a:latin typeface="Aptos Display"/>
-                <a:ea typeface="Aptos Display"/>
-                <a:cs typeface="Aptos Display"/>
+                <a:latin typeface="Arial"/>
+                <a:ea typeface="Arial"/>
+                <a:cs typeface="Arial"/>
               </a:defRPr>
             </a:pPr>
             <a:r>
@@ -4229,9 +3667,9 @@
                 <a:solidFill>
                   <a:srgbClr val="151515"/>
                 </a:solidFill>
-                <a:latin typeface="Aptos Display"/>
-                <a:ea typeface="Aptos Display"/>
-                <a:cs typeface="Aptos Display"/>
+                <a:latin typeface="Arial"/>
+                <a:ea typeface="Arial"/>
+                <a:cs typeface="Arial"/>
               </a:rPr>
               <a:t>The posterior covers the true parameters and shows coupled uncertainty.</a:t>
             </a:r>
@@ -4247,13 +3685,13 @@
           <p:nvPr/>
         </p:nvPicPr>
         <p:blipFill>
-          <a:blip xmlns:r="http://schemas.openxmlformats.org/officeDocument/2006/relationships" xmlns:a="http://schemas.openxmlformats.org/drawingml/2006/main" r:embed="R79a9b982878b4809"/>
+          <a:blip xmlns:r="http://schemas.openxmlformats.org/officeDocument/2006/relationships" xmlns:a="http://schemas.openxmlformats.org/drawingml/2006/main" r:embed="R40ba56f8ec5146c3"/>
           <a:stretch xmlns:a="http://schemas.openxmlformats.org/drawingml/2006/main"/>
         </p:blipFill>
         <p:spPr>
           <a:xfrm xmlns:a="http://schemas.openxmlformats.org/drawingml/2006/main">
-            <a:off x="1361515" y="2038350"/>
-            <a:ext cx="4706471" cy="4000500"/>
+            <a:off x="1209467" y="2038350"/>
+            <a:ext cx="5010567" cy="4000500"/>
           </a:xfrm>
           <a:prstGeom xmlns:a="http://schemas.openxmlformats.org/drawingml/2006/main" prst="rect">
             <a:avLst/>
@@ -4265,7 +3703,7 @@
           <p:cNvPr id="8" name="">
             <a:extLst xmlns:a="http://schemas.openxmlformats.org/drawingml/2006/main">
               <a:ext uri="{FF2B5EF4-FFF2-40B4-BE49-F238E27FC236}">
-                <a16:creationId xmlns:a16="http://schemas.microsoft.com/office/drawing/2014/main" id="{8EB55DA1-34EF-40C8-98CD-9E1E806CF3C3}"/>
+                <a16:creationId xmlns:a16="http://schemas.microsoft.com/office/drawing/2014/main" id="{8A723E8E-7976-4102-B84B-A81469DFDB05}"/>
               </a:ext>
             </a:extLst>
           </p:cNvPr>
@@ -4305,9 +3743,9 @@
                 <a:solidFill>
                   <a:srgbClr val="D05A2A"/>
                 </a:solidFill>
-                <a:latin typeface="Aptos"/>
-                <a:ea typeface="Aptos"/>
-                <a:cs typeface="Aptos"/>
+                <a:latin typeface="Arial"/>
+                <a:ea typeface="Arial"/>
+                <a:cs typeface="Arial"/>
               </a:defRPr>
             </a:pPr>
             <a:r>
@@ -4315,9 +3753,9 @@
                 <a:solidFill>
                   <a:srgbClr val="D05A2A"/>
                 </a:solidFill>
-                <a:latin typeface="Aptos"/>
-                <a:ea typeface="Aptos"/>
-                <a:cs typeface="Aptos"/>
+                <a:latin typeface="Arial"/>
+                <a:ea typeface="Arial"/>
+                <a:cs typeface="Arial"/>
               </a:rPr>
               <a:t>true</a:t>
             </a:r>
@@ -4329,7 +3767,7 @@
           <p:cNvPr id="9" name="">
             <a:extLst xmlns:a="http://schemas.openxmlformats.org/drawingml/2006/main">
               <a:ext uri="{FF2B5EF4-FFF2-40B4-BE49-F238E27FC236}">
-                <a16:creationId xmlns:a16="http://schemas.microsoft.com/office/drawing/2014/main" id="{29E276B0-38AF-4B5C-9CC2-12C5E3D42BA8}"/>
+                <a16:creationId xmlns:a16="http://schemas.microsoft.com/office/drawing/2014/main" id="{8A13E425-B9A2-4ED5-83AD-BF1D0442C868}"/>
               </a:ext>
             </a:extLst>
           </p:cNvPr>
@@ -4369,9 +3807,9 @@
                 <a:solidFill>
                   <a:srgbClr val="2B2B2B"/>
                 </a:solidFill>
-                <a:latin typeface="Aptos"/>
-                <a:ea typeface="Aptos"/>
-                <a:cs typeface="Aptos"/>
+                <a:latin typeface="Arial"/>
+                <a:ea typeface="Arial"/>
+                <a:cs typeface="Arial"/>
               </a:defRPr>
             </a:pPr>
             <a:r>
@@ -4379,9 +3817,9 @@
                 <a:solidFill>
                   <a:srgbClr val="2B2B2B"/>
                 </a:solidFill>
-                <a:latin typeface="Aptos"/>
-                <a:ea typeface="Aptos"/>
-                <a:cs typeface="Aptos"/>
+                <a:latin typeface="Arial"/>
+                <a:ea typeface="Arial"/>
+                <a:cs typeface="Arial"/>
               </a:rPr>
               <a:t>Dp = 1.25, Dn = 1.25</a:t>
             </a:r>
@@ -4393,7 +3831,7 @@
           <p:cNvPr id="10" name="">
             <a:extLst xmlns:a="http://schemas.openxmlformats.org/drawingml/2006/main">
               <a:ext uri="{FF2B5EF4-FFF2-40B4-BE49-F238E27FC236}">
-                <a16:creationId xmlns:a16="http://schemas.microsoft.com/office/drawing/2014/main" id="{A65444BE-FBA3-4F51-8CC6-1E100148C9C5}"/>
+                <a16:creationId xmlns:a16="http://schemas.microsoft.com/office/drawing/2014/main" id="{6937C775-14BF-4002-9EAB-CE3B4F1FBB74}"/>
               </a:ext>
             </a:extLst>
           </p:cNvPr>
@@ -4433,9 +3871,9 @@
                 <a:solidFill>
                   <a:srgbClr val="1F4E79"/>
                 </a:solidFill>
-                <a:latin typeface="Aptos"/>
-                <a:ea typeface="Aptos"/>
-                <a:cs typeface="Aptos"/>
+                <a:latin typeface="Arial"/>
+                <a:ea typeface="Arial"/>
+                <a:cs typeface="Arial"/>
               </a:defRPr>
             </a:pPr>
             <a:r>
@@ -4443,9 +3881,9 @@
                 <a:solidFill>
                   <a:srgbClr val="1F4E79"/>
                 </a:solidFill>
-                <a:latin typeface="Aptos"/>
-                <a:ea typeface="Aptos"/>
-                <a:cs typeface="Aptos"/>
+                <a:latin typeface="Arial"/>
+                <a:ea typeface="Arial"/>
+                <a:cs typeface="Arial"/>
               </a:rPr>
               <a:t>posterior mean</a:t>
             </a:r>
@@ -4457,7 +3895,7 @@
           <p:cNvPr id="11" name="">
             <a:extLst xmlns:a="http://schemas.openxmlformats.org/drawingml/2006/main">
               <a:ext uri="{FF2B5EF4-FFF2-40B4-BE49-F238E27FC236}">
-                <a16:creationId xmlns:a16="http://schemas.microsoft.com/office/drawing/2014/main" id="{28214A9E-38BB-4479-966F-CCB65B26AF75}"/>
+                <a16:creationId xmlns:a16="http://schemas.microsoft.com/office/drawing/2014/main" id="{29460968-5BBD-411C-8CE7-B133743B5494}"/>
               </a:ext>
             </a:extLst>
           </p:cNvPr>
@@ -4497,9 +3935,9 @@
                 <a:solidFill>
                   <a:srgbClr val="2B2B2B"/>
                 </a:solidFill>
-                <a:latin typeface="Aptos"/>
-                <a:ea typeface="Aptos"/>
-                <a:cs typeface="Aptos"/>
+                <a:latin typeface="Arial"/>
+                <a:ea typeface="Arial"/>
+                <a:cs typeface="Arial"/>
               </a:defRPr>
             </a:pPr>
             <a:r>
@@ -4507,9 +3945,9 @@
                 <a:solidFill>
                   <a:srgbClr val="2B2B2B"/>
                 </a:solidFill>
-                <a:latin typeface="Aptos"/>
-                <a:ea typeface="Aptos"/>
-                <a:cs typeface="Aptos"/>
+                <a:latin typeface="Arial"/>
+                <a:ea typeface="Arial"/>
+                <a:cs typeface="Arial"/>
               </a:rPr>
               <a:t>Dp = 1.2353</a:t>
             </a:r>
@@ -4520,9 +3958,9 @@
                 <a:solidFill>
                   <a:srgbClr val="2B2B2B"/>
                 </a:solidFill>
-                <a:latin typeface="Aptos"/>
-                <a:ea typeface="Aptos"/>
-                <a:cs typeface="Aptos"/>
+                <a:latin typeface="Arial"/>
+                <a:ea typeface="Arial"/>
+                <a:cs typeface="Arial"/>
               </a:defRPr>
             </a:pPr>
             <a:r>
@@ -4530,9 +3968,9 @@
                 <a:solidFill>
                   <a:srgbClr val="2B2B2B"/>
                 </a:solidFill>
-                <a:latin typeface="Aptos"/>
-                <a:ea typeface="Aptos"/>
-                <a:cs typeface="Aptos"/>
+                <a:latin typeface="Arial"/>
+                <a:ea typeface="Arial"/>
+                <a:cs typeface="Arial"/>
               </a:rPr>
               <a:t>Dn = 1.2368</a:t>
             </a:r>
@@ -4544,7 +3982,7 @@
           <p:cNvPr id="12" name="">
             <a:extLst xmlns:a="http://schemas.openxmlformats.org/drawingml/2006/main">
               <a:ext uri="{FF2B5EF4-FFF2-40B4-BE49-F238E27FC236}">
-                <a16:creationId xmlns:a16="http://schemas.microsoft.com/office/drawing/2014/main" id="{3EF3468E-4EE5-41D0-A483-CE6ED88FC833}"/>
+                <a16:creationId xmlns:a16="http://schemas.microsoft.com/office/drawing/2014/main" id="{89D8AC26-4C0F-4F55-8C6F-931F8012ADD0}"/>
               </a:ext>
             </a:extLst>
           </p:cNvPr>
@@ -4584,9 +4022,9 @@
                 <a:solidFill>
                   <a:srgbClr val="008C95"/>
                 </a:solidFill>
-                <a:latin typeface="Aptos"/>
-                <a:ea typeface="Aptos"/>
-                <a:cs typeface="Aptos"/>
+                <a:latin typeface="Arial"/>
+                <a:ea typeface="Arial"/>
+                <a:cs typeface="Arial"/>
               </a:defRPr>
             </a:pPr>
             <a:r>
@@ -4594,9 +4032,9 @@
                 <a:solidFill>
                   <a:srgbClr val="008C95"/>
                 </a:solidFill>
-                <a:latin typeface="Aptos"/>
-                <a:ea typeface="Aptos"/>
-                <a:cs typeface="Aptos"/>
+                <a:latin typeface="Arial"/>
+                <a:ea typeface="Arial"/>
+                <a:cs typeface="Arial"/>
               </a:rPr>
               <a:t>95% marginal intervals</a:t>
             </a:r>
@@ -4608,7 +4046,7 @@
           <p:cNvPr id="13" name="">
             <a:extLst xmlns:a="http://schemas.openxmlformats.org/drawingml/2006/main">
               <a:ext uri="{FF2B5EF4-FFF2-40B4-BE49-F238E27FC236}">
-                <a16:creationId xmlns:a16="http://schemas.microsoft.com/office/drawing/2014/main" id="{F394B090-B511-492E-98E7-FCE3DA3FFAB6}"/>
+                <a16:creationId xmlns:a16="http://schemas.microsoft.com/office/drawing/2014/main" id="{81F44CFC-420D-4978-9CB6-BCD0EAC0A777}"/>
               </a:ext>
             </a:extLst>
           </p:cNvPr>
@@ -4648,9 +4086,9 @@
                 <a:solidFill>
                   <a:srgbClr val="2B2B2B"/>
                 </a:solidFill>
-                <a:latin typeface="Aptos"/>
-                <a:ea typeface="Aptos"/>
-                <a:cs typeface="Aptos"/>
+                <a:latin typeface="Arial"/>
+                <a:ea typeface="Arial"/>
+                <a:cs typeface="Arial"/>
               </a:defRPr>
             </a:pPr>
             <a:r>
@@ -4658,9 +4096,9 @@
                 <a:solidFill>
                   <a:srgbClr val="2B2B2B"/>
                 </a:solidFill>
-                <a:latin typeface="Aptos"/>
-                <a:ea typeface="Aptos"/>
-                <a:cs typeface="Aptos"/>
+                <a:latin typeface="Arial"/>
+                <a:ea typeface="Arial"/>
+                <a:cs typeface="Arial"/>
               </a:rPr>
               <a:t>Dp: [1.0625, 1.4000]</a:t>
             </a:r>
@@ -4671,9 +4109,9 @@
                 <a:solidFill>
                   <a:srgbClr val="2B2B2B"/>
                 </a:solidFill>
-                <a:latin typeface="Aptos"/>
-                <a:ea typeface="Aptos"/>
-                <a:cs typeface="Aptos"/>
+                <a:latin typeface="Arial"/>
+                <a:ea typeface="Arial"/>
+                <a:cs typeface="Arial"/>
               </a:defRPr>
             </a:pPr>
             <a:r>
@@ -4681,9 +4119,9 @@
                 <a:solidFill>
                   <a:srgbClr val="2B2B2B"/>
                 </a:solidFill>
-                <a:latin typeface="Aptos"/>
-                <a:ea typeface="Aptos"/>
-                <a:cs typeface="Aptos"/>
+                <a:latin typeface="Arial"/>
+                <a:ea typeface="Arial"/>
+                <a:cs typeface="Arial"/>
               </a:rPr>
               <a:t>Dn: [1.0625, 1.4375]</a:t>
             </a:r>
@@ -4695,7 +4133,7 @@
           <p:cNvPr id="14" name="">
             <a:extLst xmlns:a="http://schemas.openxmlformats.org/drawingml/2006/main">
               <a:ext uri="{FF2B5EF4-FFF2-40B4-BE49-F238E27FC236}">
-                <a16:creationId xmlns:a16="http://schemas.microsoft.com/office/drawing/2014/main" id="{2C5F28C7-1673-44D1-B646-D0A544972F8C}"/>
+                <a16:creationId xmlns:a16="http://schemas.microsoft.com/office/drawing/2014/main" id="{2B71C4D9-8D27-4AD3-A45A-C054366FE841}"/>
               </a:ext>
             </a:extLst>
           </p:cNvPr>
@@ -4735,9 +4173,9 @@
                 <a:solidFill>
                   <a:srgbClr val="6D6D6D"/>
                 </a:solidFill>
-                <a:latin typeface="Aptos"/>
-                <a:ea typeface="Aptos"/>
-                <a:cs typeface="Aptos"/>
+                <a:latin typeface="Arial"/>
+                <a:ea typeface="Arial"/>
+                <a:cs typeface="Arial"/>
               </a:defRPr>
             </a:pPr>
             <a:r>
@@ -4745,9 +4183,9 @@
                 <a:solidFill>
                   <a:srgbClr val="6D6D6D"/>
                 </a:solidFill>
-                <a:latin typeface="Aptos"/>
-                <a:ea typeface="Aptos"/>
-                <a:cs typeface="Aptos"/>
+                <a:latin typeface="Arial"/>
+                <a:ea typeface="Arial"/>
+                <a:cs typeface="Arial"/>
               </a:rPr>
               <a:t>The true values are inside the reported intervals.</a:t>
             </a:r>
@@ -4759,7 +4197,7 @@
           <p:cNvPr id="15" name="">
             <a:extLst xmlns:a="http://schemas.openxmlformats.org/drawingml/2006/main">
               <a:ext uri="{FF2B5EF4-FFF2-40B4-BE49-F238E27FC236}">
-                <a16:creationId xmlns:a16="http://schemas.microsoft.com/office/drawing/2014/main" id="{B1F96F4D-9F56-413D-BEF0-F3A449D99570}"/>
+                <a16:creationId xmlns:a16="http://schemas.microsoft.com/office/drawing/2014/main" id="{8832E019-93C0-4669-B246-5FBC4074B456}"/>
               </a:ext>
             </a:extLst>
           </p:cNvPr>
@@ -4794,7 +4232,7 @@
           <p:cNvPr id="16" name="">
             <a:extLst xmlns:a="http://schemas.openxmlformats.org/drawingml/2006/main">
               <a:ext uri="{FF2B5EF4-FFF2-40B4-BE49-F238E27FC236}">
-                <a16:creationId xmlns:a16="http://schemas.microsoft.com/office/drawing/2014/main" id="{72720473-2510-4895-A16B-2DE18AA7BFE1}"/>
+                <a16:creationId xmlns:a16="http://schemas.microsoft.com/office/drawing/2014/main" id="{8095CBE0-DB8B-411A-A688-F552B00C1F36}"/>
               </a:ext>
             </a:extLst>
           </p:cNvPr>
@@ -4806,7 +4244,7 @@
         <p:spPr>
           <a:xfrm xmlns:a="http://schemas.openxmlformats.org/drawingml/2006/main">
             <a:off x="685800" y="6477000"/>
-            <a:ext cx="6858000" cy="152400"/>
+            <a:ext cx="7239000" cy="152400"/>
           </a:xfrm>
           <a:prstGeom xmlns:a="http://schemas.openxmlformats.org/drawingml/2006/main" prst="rect">
             <a:avLst/>
@@ -4834,9 +4272,9 @@
                 <a:solidFill>
                   <a:srgbClr val="77736D"/>
                 </a:solidFill>
-                <a:latin typeface="Aptos"/>
-                <a:ea typeface="Aptos"/>
-                <a:cs typeface="Aptos"/>
+                <a:latin typeface="Arial"/>
+                <a:ea typeface="Arial"/>
+                <a:cs typeface="Arial"/>
               </a:defRPr>
             </a:pPr>
             <a:r>
@@ -4844,9 +4282,9 @@
                 <a:solidFill>
                   <a:srgbClr val="77736D"/>
                 </a:solidFill>
-                <a:latin typeface="Aptos"/>
-                <a:ea typeface="Aptos"/>
-                <a:cs typeface="Aptos"/>
+                <a:latin typeface="Arial"/>
+                <a:ea typeface="Arial"/>
+                <a:cs typeface="Arial"/>
               </a:rPr>
               <a:t>Posterior over diffusion parameters</a:t>
             </a:r>
@@ -4856,7 +4294,7 @@
     </p:spTree>
     <p:extLst>
       <p:ext uri="{BB962C8B-B14F-4D97-AF65-F5344CB8AC3E}">
-        <p14:creationId xmlns:p14="http://schemas.microsoft.com/office/powerpoint/2010/main" val="1033082677"/>
+        <p14:creationId xmlns:p14="http://schemas.microsoft.com/office/powerpoint/2010/main" val="683122742"/>
       </p:ext>
     </p:extLst>
   </p:cSld>
@@ -4880,7 +4318,7 @@
           <p:cNvPr id="1" name="">
             <a:extLst xmlns:a="http://schemas.openxmlformats.org/drawingml/2006/main">
               <a:ext uri="{FF2B5EF4-FFF2-40B4-BE49-F238E27FC236}">
-                <a16:creationId xmlns:a16="http://schemas.microsoft.com/office/drawing/2014/main" id="{AAED832E-9ADC-42CA-AC13-017F83EDDFA2}"/>
+                <a16:creationId xmlns:a16="http://schemas.microsoft.com/office/drawing/2014/main" id="{01B782EA-8425-4252-9FB4-B7AD8AB4ED90}"/>
               </a:ext>
             </a:extLst>
           </p:cNvPr>
@@ -4915,7 +4353,7 @@
           <p:cNvPr id="2" name="">
             <a:extLst xmlns:a="http://schemas.openxmlformats.org/drawingml/2006/main">
               <a:ext uri="{FF2B5EF4-FFF2-40B4-BE49-F238E27FC236}">
-                <a16:creationId xmlns:a16="http://schemas.microsoft.com/office/drawing/2014/main" id="{7F2C3A13-EBB6-45AB-908C-9E7C788B6FDB}"/>
+                <a16:creationId xmlns:a16="http://schemas.microsoft.com/office/drawing/2014/main" id="{D972A254-104B-4B8B-921E-B44ECD4F0787}"/>
               </a:ext>
             </a:extLst>
           </p:cNvPr>
@@ -4927,7 +4365,7 @@
         <p:spPr>
           <a:xfrm xmlns:a="http://schemas.openxmlformats.org/drawingml/2006/main">
             <a:off x="685800" y="400050"/>
-            <a:ext cx="4953000" cy="190500"/>
+            <a:ext cx="5143500" cy="190500"/>
           </a:xfrm>
           <a:prstGeom xmlns:a="http://schemas.openxmlformats.org/drawingml/2006/main" prst="rect">
             <a:avLst/>
@@ -4955,9 +4393,9 @@
                 <a:solidFill>
                   <a:srgbClr val="6D6D6D"/>
                 </a:solidFill>
-                <a:latin typeface="Aptos"/>
-                <a:ea typeface="Aptos"/>
-                <a:cs typeface="Aptos"/>
+                <a:latin typeface="Arial"/>
+                <a:ea typeface="Arial"/>
+                <a:cs typeface="Arial"/>
               </a:defRPr>
             </a:pPr>
             <a:r>
@@ -4965,9 +4403,9 @@
                 <a:solidFill>
                   <a:srgbClr val="6D6D6D"/>
                 </a:solidFill>
-                <a:latin typeface="Aptos"/>
-                <a:ea typeface="Aptos"/>
-                <a:cs typeface="Aptos"/>
+                <a:latin typeface="Arial"/>
+                <a:ea typeface="Arial"/>
+                <a:cs typeface="Arial"/>
               </a:rPr>
               <a:t>TAKEAWAY</a:t>
             </a:r>
@@ -4979,7 +4417,7 @@
           <p:cNvPr id="3" name="">
             <a:extLst xmlns:a="http://schemas.openxmlformats.org/drawingml/2006/main">
               <a:ext uri="{FF2B5EF4-FFF2-40B4-BE49-F238E27FC236}">
-                <a16:creationId xmlns:a16="http://schemas.microsoft.com/office/drawing/2014/main" id="{62DC9ECC-26D8-4C87-BF8F-91E45C42ED45}"/>
+                <a16:creationId xmlns:a16="http://schemas.microsoft.com/office/drawing/2014/main" id="{36354DD4-601B-4DF3-8F2E-547B8D46C3D6}"/>
               </a:ext>
             </a:extLst>
           </p:cNvPr>
@@ -5019,9 +4457,9 @@
                 <a:solidFill>
                   <a:srgbClr val="6D6D6D"/>
                 </a:solidFill>
-                <a:latin typeface="Aptos"/>
-                <a:ea typeface="Aptos"/>
-                <a:cs typeface="Aptos"/>
+                <a:latin typeface="Arial"/>
+                <a:ea typeface="Arial"/>
+                <a:cs typeface="Arial"/>
               </a:defRPr>
             </a:pPr>
             <a:r>
@@ -5029,9 +4467,9 @@
                 <a:solidFill>
                   <a:srgbClr val="6D6D6D"/>
                 </a:solidFill>
-                <a:latin typeface="Aptos"/>
-                <a:ea typeface="Aptos"/>
-                <a:cs typeface="Aptos"/>
+                <a:latin typeface="Arial"/>
+                <a:ea typeface="Arial"/>
+                <a:cs typeface="Arial"/>
               </a:rPr>
               <a:t>13</a:t>
             </a:r>
@@ -5043,7 +4481,7 @@
           <p:cNvPr id="4" name="">
             <a:extLst xmlns:a="http://schemas.openxmlformats.org/drawingml/2006/main">
               <a:ext uri="{FF2B5EF4-FFF2-40B4-BE49-F238E27FC236}">
-                <a16:creationId xmlns:a16="http://schemas.microsoft.com/office/drawing/2014/main" id="{60102087-FCCC-4ECE-87E8-B45B8CBC5FD8}"/>
+                <a16:creationId xmlns:a16="http://schemas.microsoft.com/office/drawing/2014/main" id="{1355BBB3-294B-4B0A-A684-B0292CCC54C6}"/>
               </a:ext>
             </a:extLst>
           </p:cNvPr>
@@ -5078,7 +4516,7 @@
           <p:cNvPr id="5" name="">
             <a:extLst xmlns:a="http://schemas.openxmlformats.org/drawingml/2006/main">
               <a:ext uri="{FF2B5EF4-FFF2-40B4-BE49-F238E27FC236}">
-                <a16:creationId xmlns:a16="http://schemas.microsoft.com/office/drawing/2014/main" id="{32EBE090-7FDC-4161-A227-987BDAC046FB}"/>
+                <a16:creationId xmlns:a16="http://schemas.microsoft.com/office/drawing/2014/main" id="{88B49FC2-0651-4049-A968-B23DB231627A}"/>
               </a:ext>
             </a:extLst>
           </p:cNvPr>
@@ -5113,7 +4551,7 @@
           <p:cNvPr id="6" name="">
             <a:extLst xmlns:a="http://schemas.openxmlformats.org/drawingml/2006/main">
               <a:ext uri="{FF2B5EF4-FFF2-40B4-BE49-F238E27FC236}">
-                <a16:creationId xmlns:a16="http://schemas.microsoft.com/office/drawing/2014/main" id="{417CB2CD-0C6D-491F-A9BA-83970D3ED04C}"/>
+                <a16:creationId xmlns:a16="http://schemas.microsoft.com/office/drawing/2014/main" id="{738E525C-AA2B-4338-A586-C5CF23E3E1FD}"/>
               </a:ext>
             </a:extLst>
           </p:cNvPr>
@@ -5125,7 +4563,7 @@
         <p:spPr>
           <a:xfrm xmlns:a="http://schemas.openxmlformats.org/drawingml/2006/main">
             <a:off x="685800" y="990600"/>
-            <a:ext cx="10477500" cy="838200"/>
+            <a:ext cx="10096500" cy="838200"/>
           </a:xfrm>
           <a:prstGeom xmlns:a="http://schemas.openxmlformats.org/drawingml/2006/main" prst="rect">
             <a:avLst/>
@@ -5153,9 +4591,9 @@
                 <a:solidFill>
                   <a:srgbClr val="151515"/>
                 </a:solidFill>
-                <a:latin typeface="Aptos Display"/>
-                <a:ea typeface="Aptos Display"/>
-                <a:cs typeface="Aptos Display"/>
+                <a:latin typeface="Arial"/>
+                <a:ea typeface="Arial"/>
+                <a:cs typeface="Arial"/>
               </a:defRPr>
             </a:pPr>
             <a:r>
@@ -5163,9 +4601,9 @@
                 <a:solidFill>
                   <a:srgbClr val="151515"/>
                 </a:solidFill>
-                <a:latin typeface="Aptos Display"/>
-                <a:ea typeface="Aptos Display"/>
-                <a:cs typeface="Aptos Display"/>
+                <a:latin typeface="Arial"/>
+                <a:ea typeface="Arial"/>
+                <a:cs typeface="Arial"/>
               </a:rPr>
               <a:t>This is a controlled proof of concept for current-based PINN inverse inference.</a:t>
             </a:r>
@@ -5177,7 +4615,7 @@
           <p:cNvPr id="7" name="">
             <a:extLst xmlns:a="http://schemas.openxmlformats.org/drawingml/2006/main">
               <a:ext uri="{FF2B5EF4-FFF2-40B4-BE49-F238E27FC236}">
-                <a16:creationId xmlns:a16="http://schemas.microsoft.com/office/drawing/2014/main" id="{91BFF468-93DC-4D82-AB72-1977DCA89E4E}"/>
+                <a16:creationId xmlns:a16="http://schemas.microsoft.com/office/drawing/2014/main" id="{64F366EC-0378-4AB9-BF1C-DB29965185DE}"/>
               </a:ext>
             </a:extLst>
           </p:cNvPr>
@@ -5212,19 +4650,19 @@
           <p:cNvPr id="8" name="">
             <a:extLst xmlns:a="http://schemas.openxmlformats.org/drawingml/2006/main">
               <a:ext uri="{FF2B5EF4-FFF2-40B4-BE49-F238E27FC236}">
-                <a16:creationId xmlns:a16="http://schemas.microsoft.com/office/drawing/2014/main" id="{5E483337-7D61-4BEA-9BCB-3B69CA3211C8}"/>
-              </a:ext>
-            </a:extLst>
-          </p:cNvPr>
-          <p:cNvSpPr>
-            <a:spLocks xmlns:a="http://schemas.openxmlformats.org/drawingml/2006/main" noGrp="1"/>
-          </p:cNvSpPr>
-          <p:nvPr/>
-        </p:nvSpPr>
-        <p:spPr>
-          <a:xfrm xmlns:a="http://schemas.openxmlformats.org/drawingml/2006/main">
-            <a:off x="1743075" y="2619375"/>
-            <a:ext cx="8591550" cy="400050"/>
+                <a16:creationId xmlns:a16="http://schemas.microsoft.com/office/drawing/2014/main" id="{AD02F2E4-B382-4193-9264-92A695B78E73}"/>
+              </a:ext>
+            </a:extLst>
+          </p:cNvPr>
+          <p:cNvSpPr>
+            <a:spLocks xmlns:a="http://schemas.openxmlformats.org/drawingml/2006/main" noGrp="1"/>
+          </p:cNvSpPr>
+          <p:nvPr/>
+        </p:nvSpPr>
+        <p:spPr>
+          <a:xfrm xmlns:a="http://schemas.openxmlformats.org/drawingml/2006/main">
+            <a:off x="1762125" y="2619375"/>
+            <a:ext cx="8572500" cy="400050"/>
           </a:xfrm>
           <a:prstGeom xmlns:a="http://schemas.openxmlformats.org/drawingml/2006/main" prst="rect">
             <a:avLst/>
@@ -5252,9 +4690,9 @@
                 <a:solidFill>
                   <a:srgbClr val="2B2B2B"/>
                 </a:solidFill>
-                <a:latin typeface="Aptos"/>
-                <a:ea typeface="Aptos"/>
-                <a:cs typeface="Aptos"/>
+                <a:latin typeface="Arial"/>
+                <a:ea typeface="Arial"/>
+                <a:cs typeface="Arial"/>
               </a:defRPr>
             </a:pPr>
             <a:r>
@@ -5262,9 +4700,9 @@
                 <a:solidFill>
                   <a:srgbClr val="2B2B2B"/>
                 </a:solidFill>
-                <a:latin typeface="Aptos"/>
-                <a:ea typeface="Aptos"/>
-                <a:cs typeface="Aptos"/>
+                <a:latin typeface="Arial"/>
+                <a:ea typeface="Arial"/>
+                <a:cs typeface="Arial"/>
               </a:rPr>
               <a:t>The observation is experimentally meaningful current, not hidden fields.</a:t>
             </a:r>
@@ -5276,7 +4714,7 @@
           <p:cNvPr id="9" name="">
             <a:extLst xmlns:a="http://schemas.openxmlformats.org/drawingml/2006/main">
               <a:ext uri="{FF2B5EF4-FFF2-40B4-BE49-F238E27FC236}">
-                <a16:creationId xmlns:a16="http://schemas.microsoft.com/office/drawing/2014/main" id="{A689ED0A-3F41-4B63-BDED-530B3C669F9A}"/>
+                <a16:creationId xmlns:a16="http://schemas.microsoft.com/office/drawing/2014/main" id="{B1C3460D-07EF-4AB1-B610-C91242E65A51}"/>
               </a:ext>
             </a:extLst>
           </p:cNvPr>
@@ -5311,19 +4749,19 @@
           <p:cNvPr id="10" name="">
             <a:extLst xmlns:a="http://schemas.openxmlformats.org/drawingml/2006/main">
               <a:ext uri="{FF2B5EF4-FFF2-40B4-BE49-F238E27FC236}">
-                <a16:creationId xmlns:a16="http://schemas.microsoft.com/office/drawing/2014/main" id="{52FD7CEA-1019-4E37-A67A-4C1172AC8211}"/>
-              </a:ext>
-            </a:extLst>
-          </p:cNvPr>
-          <p:cNvSpPr>
-            <a:spLocks xmlns:a="http://schemas.openxmlformats.org/drawingml/2006/main" noGrp="1"/>
-          </p:cNvSpPr>
-          <p:nvPr/>
-        </p:nvSpPr>
-        <p:spPr>
-          <a:xfrm xmlns:a="http://schemas.openxmlformats.org/drawingml/2006/main">
-            <a:off x="1743075" y="3209925"/>
-            <a:ext cx="8591550" cy="400050"/>
+                <a16:creationId xmlns:a16="http://schemas.microsoft.com/office/drawing/2014/main" id="{E90E9D00-B800-422F-8F83-74FF2A42EA8B}"/>
+              </a:ext>
+            </a:extLst>
+          </p:cNvPr>
+          <p:cNvSpPr>
+            <a:spLocks xmlns:a="http://schemas.openxmlformats.org/drawingml/2006/main" noGrp="1"/>
+          </p:cNvSpPr>
+          <p:nvPr/>
+        </p:nvSpPr>
+        <p:spPr>
+          <a:xfrm xmlns:a="http://schemas.openxmlformats.org/drawingml/2006/main">
+            <a:off x="1762125" y="3209925"/>
+            <a:ext cx="8572500" cy="400050"/>
           </a:xfrm>
           <a:prstGeom xmlns:a="http://schemas.openxmlformats.org/drawingml/2006/main" prst="rect">
             <a:avLst/>
@@ -5351,9 +4789,9 @@
                 <a:solidFill>
                   <a:srgbClr val="2B2B2B"/>
                 </a:solidFill>
-                <a:latin typeface="Aptos"/>
-                <a:ea typeface="Aptos"/>
-                <a:cs typeface="Aptos"/>
+                <a:latin typeface="Arial"/>
+                <a:ea typeface="Arial"/>
+                <a:cs typeface="Arial"/>
               </a:defRPr>
             </a:pPr>
             <a:r>
@@ -5361,9 +4799,9 @@
                 <a:solidFill>
                   <a:srgbClr val="2B2B2B"/>
                 </a:solidFill>
-                <a:latin typeface="Aptos"/>
-                <a:ea typeface="Aptos"/>
-                <a:cs typeface="Aptos"/>
+                <a:latin typeface="Arial"/>
+                <a:ea typeface="Arial"/>
+                <a:cs typeface="Arial"/>
               </a:rPr>
               <a:t>The PINN acts as a reusable forward model, not as the data generator.</a:t>
             </a:r>
@@ -5375,7 +4813,7 @@
           <p:cNvPr id="11" name="">
             <a:extLst xmlns:a="http://schemas.openxmlformats.org/drawingml/2006/main">
               <a:ext uri="{FF2B5EF4-FFF2-40B4-BE49-F238E27FC236}">
-                <a16:creationId xmlns:a16="http://schemas.microsoft.com/office/drawing/2014/main" id="{BFE9CB10-A5DC-41FF-BFFC-688DB74F1A7A}"/>
+                <a16:creationId xmlns:a16="http://schemas.microsoft.com/office/drawing/2014/main" id="{5DDAD748-3E3B-44AB-9B6A-9663B59DA3EB}"/>
               </a:ext>
             </a:extLst>
           </p:cNvPr>
@@ -5410,19 +4848,19 @@
           <p:cNvPr id="12" name="">
             <a:extLst xmlns:a="http://schemas.openxmlformats.org/drawingml/2006/main">
               <a:ext uri="{FF2B5EF4-FFF2-40B4-BE49-F238E27FC236}">
-                <a16:creationId xmlns:a16="http://schemas.microsoft.com/office/drawing/2014/main" id="{BF48C4A2-125F-4B2C-96EC-9F86C731E69D}"/>
-              </a:ext>
-            </a:extLst>
-          </p:cNvPr>
-          <p:cNvSpPr>
-            <a:spLocks xmlns:a="http://schemas.openxmlformats.org/drawingml/2006/main" noGrp="1"/>
-          </p:cNvSpPr>
-          <p:nvPr/>
-        </p:nvSpPr>
-        <p:spPr>
-          <a:xfrm xmlns:a="http://schemas.openxmlformats.org/drawingml/2006/main">
-            <a:off x="1743075" y="3800475"/>
-            <a:ext cx="8591550" cy="400050"/>
+                <a16:creationId xmlns:a16="http://schemas.microsoft.com/office/drawing/2014/main" id="{B72E22E0-007C-4027-B6ED-09CE46EEC8AB}"/>
+              </a:ext>
+            </a:extLst>
+          </p:cNvPr>
+          <p:cNvSpPr>
+            <a:spLocks xmlns:a="http://schemas.openxmlformats.org/drawingml/2006/main" noGrp="1"/>
+          </p:cNvSpPr>
+          <p:nvPr/>
+        </p:nvSpPr>
+        <p:spPr>
+          <a:xfrm xmlns:a="http://schemas.openxmlformats.org/drawingml/2006/main">
+            <a:off x="1762125" y="3800475"/>
+            <a:ext cx="8572500" cy="400050"/>
           </a:xfrm>
           <a:prstGeom xmlns:a="http://schemas.openxmlformats.org/drawingml/2006/main" prst="rect">
             <a:avLst/>
@@ -5450,9 +4888,9 @@
                 <a:solidFill>
                   <a:srgbClr val="2B2B2B"/>
                 </a:solidFill>
-                <a:latin typeface="Aptos"/>
-                <a:ea typeface="Aptos"/>
-                <a:cs typeface="Aptos"/>
+                <a:latin typeface="Arial"/>
+                <a:ea typeface="Arial"/>
+                <a:cs typeface="Arial"/>
               </a:defRPr>
             </a:pPr>
             <a:r>
@@ -5460,9 +4898,9 @@
                 <a:solidFill>
                   <a:srgbClr val="2B2B2B"/>
                 </a:solidFill>
-                <a:latin typeface="Aptos"/>
-                <a:ea typeface="Aptos"/>
-                <a:cs typeface="Aptos"/>
+                <a:latin typeface="Arial"/>
+                <a:ea typeface="Arial"/>
+                <a:cs typeface="Arial"/>
               </a:rPr>
               <a:t>The output is a posterior over Dp and Dn, so uncertainty is explicit.</a:t>
             </a:r>
@@ -5474,7 +4912,7 @@
           <p:cNvPr id="13" name="">
             <a:extLst xmlns:a="http://schemas.openxmlformats.org/drawingml/2006/main">
               <a:ext uri="{FF2B5EF4-FFF2-40B4-BE49-F238E27FC236}">
-                <a16:creationId xmlns:a16="http://schemas.microsoft.com/office/drawing/2014/main" id="{C72B8281-DEAB-413E-88CC-D83A15F98B66}"/>
+                <a16:creationId xmlns:a16="http://schemas.microsoft.com/office/drawing/2014/main" id="{3A579D1F-5551-4C83-B252-344759CA33F1}"/>
               </a:ext>
             </a:extLst>
           </p:cNvPr>
@@ -5514,9 +4952,9 @@
                 <a:solidFill>
                   <a:srgbClr val="3F7D55"/>
                 </a:solidFill>
-                <a:latin typeface="Aptos"/>
-                <a:ea typeface="Aptos"/>
-                <a:cs typeface="Aptos"/>
+                <a:latin typeface="Arial"/>
+                <a:ea typeface="Arial"/>
+                <a:cs typeface="Arial"/>
               </a:defRPr>
             </a:pPr>
             <a:r>
@@ -5524,9 +4962,9 @@
                 <a:solidFill>
                   <a:srgbClr val="3F7D55"/>
                 </a:solidFill>
-                <a:latin typeface="Aptos"/>
-                <a:ea typeface="Aptos"/>
-                <a:cs typeface="Aptos"/>
+                <a:latin typeface="Arial"/>
+                <a:ea typeface="Arial"/>
+                <a:cs typeface="Arial"/>
               </a:rPr>
               <a:t>Next</a:t>
             </a:r>
@@ -5538,7 +4976,7 @@
           <p:cNvPr id="14" name="">
             <a:extLst xmlns:a="http://schemas.openxmlformats.org/drawingml/2006/main">
               <a:ext uri="{FF2B5EF4-FFF2-40B4-BE49-F238E27FC236}">
-                <a16:creationId xmlns:a16="http://schemas.microsoft.com/office/drawing/2014/main" id="{FDE636C5-B15E-4B7D-A8BB-EDEB0E7D5F11}"/>
+                <a16:creationId xmlns:a16="http://schemas.microsoft.com/office/drawing/2014/main" id="{16634FF3-D621-4C37-AF87-8C3DE9810E93}"/>
               </a:ext>
             </a:extLst>
           </p:cNvPr>
@@ -5578,9 +5016,9 @@
                 <a:solidFill>
                   <a:srgbClr val="6D6D6D"/>
                 </a:solidFill>
-                <a:latin typeface="Aptos"/>
-                <a:ea typeface="Aptos"/>
-                <a:cs typeface="Aptos"/>
+                <a:latin typeface="Arial"/>
+                <a:ea typeface="Arial"/>
+                <a:cs typeface="Arial"/>
               </a:defRPr>
             </a:pPr>
             <a:r>
@@ -5588,9 +5026,9 @@
                 <a:solidFill>
                   <a:srgbClr val="6D6D6D"/>
                 </a:solidFill>
-                <a:latin typeface="Aptos"/>
-                <a:ea typeface="Aptos"/>
-                <a:cs typeface="Aptos"/>
+                <a:latin typeface="Arial"/>
+                <a:ea typeface="Arial"/>
+                <a:cs typeface="Arial"/>
               </a:rPr>
               <a:t>Test more true parameter pairs, vary noise and time sampling, then replace the grid posterior by MCMC when the parameter space grows.</a:t>
             </a:r>
@@ -5602,7 +5040,7 @@
           <p:cNvPr id="15" name="">
             <a:extLst xmlns:a="http://schemas.openxmlformats.org/drawingml/2006/main">
               <a:ext uri="{FF2B5EF4-FFF2-40B4-BE49-F238E27FC236}">
-                <a16:creationId xmlns:a16="http://schemas.microsoft.com/office/drawing/2014/main" id="{32174F7F-8DEB-40B3-A3D1-D9310C63B91D}"/>
+                <a16:creationId xmlns:a16="http://schemas.microsoft.com/office/drawing/2014/main" id="{B9D5949A-A16E-4C04-A692-EEB0EC8A4375}"/>
               </a:ext>
             </a:extLst>
           </p:cNvPr>
@@ -5637,7 +5075,7 @@
           <p:cNvPr id="16" name="">
             <a:extLst xmlns:a="http://schemas.openxmlformats.org/drawingml/2006/main">
               <a:ext uri="{FF2B5EF4-FFF2-40B4-BE49-F238E27FC236}">
-                <a16:creationId xmlns:a16="http://schemas.microsoft.com/office/drawing/2014/main" id="{0FC6C7D4-20A5-40CE-8152-9F5AEF2235EB}"/>
+                <a16:creationId xmlns:a16="http://schemas.microsoft.com/office/drawing/2014/main" id="{7143D51A-68CC-4793-A962-9E010470B8ED}"/>
               </a:ext>
             </a:extLst>
           </p:cNvPr>
@@ -5649,7 +5087,7 @@
         <p:spPr>
           <a:xfrm xmlns:a="http://schemas.openxmlformats.org/drawingml/2006/main">
             <a:off x="685800" y="6477000"/>
-            <a:ext cx="6858000" cy="152400"/>
+            <a:ext cx="7239000" cy="152400"/>
           </a:xfrm>
           <a:prstGeom xmlns:a="http://schemas.openxmlformats.org/drawingml/2006/main" prst="rect">
             <a:avLst/>
@@ -5677,9 +5115,9 @@
                 <a:solidFill>
                   <a:srgbClr val="77736D"/>
                 </a:solidFill>
-                <a:latin typeface="Aptos"/>
-                <a:ea typeface="Aptos"/>
-                <a:cs typeface="Aptos"/>
+                <a:latin typeface="Arial"/>
+                <a:ea typeface="Arial"/>
+                <a:cs typeface="Arial"/>
               </a:defRPr>
             </a:pPr>
             <a:r>
@@ -5687,9 +5125,9 @@
                 <a:solidFill>
                   <a:srgbClr val="77736D"/>
                 </a:solidFill>
-                <a:latin typeface="Aptos"/>
-                <a:ea typeface="Aptos"/>
-                <a:cs typeface="Aptos"/>
+                <a:latin typeface="Arial"/>
+                <a:ea typeface="Arial"/>
+                <a:cs typeface="Arial"/>
               </a:rPr>
               <a:t>Conclusion</a:t>
             </a:r>
@@ -5699,7 +5137,7 @@
     </p:spTree>
     <p:extLst>
       <p:ext uri="{BB962C8B-B14F-4D97-AF65-F5344CB8AC3E}">
-        <p14:creationId xmlns:p14="http://schemas.microsoft.com/office/powerpoint/2010/main" val="1632300226"/>
+        <p14:creationId xmlns:p14="http://schemas.microsoft.com/office/powerpoint/2010/main" val="1405499675"/>
       </p:ext>
     </p:extLst>
   </p:cSld>
@@ -5723,7 +5161,7 @@
           <p:cNvPr id="1" name="">
             <a:extLst xmlns:a="http://schemas.openxmlformats.org/drawingml/2006/main">
               <a:ext uri="{FF2B5EF4-FFF2-40B4-BE49-F238E27FC236}">
-                <a16:creationId xmlns:a16="http://schemas.microsoft.com/office/drawing/2014/main" id="{74183B36-E1E2-4979-A721-E3AA1DA0A197}"/>
+                <a16:creationId xmlns:a16="http://schemas.microsoft.com/office/drawing/2014/main" id="{7F5C6BBD-AA07-4461-9EEB-7C8F984101B3}"/>
               </a:ext>
             </a:extLst>
           </p:cNvPr>
@@ -5758,42 +5196,7 @@
           <p:cNvPr id="2" name="">
             <a:extLst xmlns:a="http://schemas.openxmlformats.org/drawingml/2006/main">
               <a:ext uri="{FF2B5EF4-FFF2-40B4-BE49-F238E27FC236}">
-                <a16:creationId xmlns:a16="http://schemas.microsoft.com/office/drawing/2014/main" id="{A00FDFA1-D36C-447C-B850-5A14A7BCEDF5}"/>
-              </a:ext>
-            </a:extLst>
-          </p:cNvPr>
-          <p:cNvSpPr>
-            <a:spLocks xmlns:a="http://schemas.openxmlformats.org/drawingml/2006/main" noGrp="1"/>
-          </p:cNvSpPr>
-          <p:nvPr/>
-        </p:nvSpPr>
-        <p:spPr>
-          <a:xfrm xmlns:a="http://schemas.openxmlformats.org/drawingml/2006/main">
-            <a:off x="685800" y="742950"/>
-            <a:ext cx="1714500" cy="28575"/>
-          </a:xfrm>
-          <a:prstGeom xmlns:a="http://schemas.openxmlformats.org/drawingml/2006/main" prst="rect">
-            <a:avLst/>
-          </a:prstGeom>
-          <a:solidFill xmlns:a="http://schemas.openxmlformats.org/drawingml/2006/main">
-            <a:srgbClr val="3F7D55"/>
-          </a:solidFill>
-          <a:ln xmlns:a="http://schemas.openxmlformats.org/drawingml/2006/main" w="0">
-            <a:solidFill>
-              <a:srgbClr val="000000">
-                <a:alpha val="0"/>
-              </a:srgbClr>
-            </a:solidFill>
-            <a:prstDash val="solid"/>
-          </a:ln>
-        </p:spPr>
-      </p:sp>
-      <p:sp>
-        <p:nvSpPr>
-          <p:cNvPr id="3" name="">
-            <a:extLst xmlns:a="http://schemas.openxmlformats.org/drawingml/2006/main">
-              <a:ext uri="{FF2B5EF4-FFF2-40B4-BE49-F238E27FC236}">
-                <a16:creationId xmlns:a16="http://schemas.microsoft.com/office/drawing/2014/main" id="{2E7F3720-C1F0-4151-A381-5E5BC2D7C69E}"/>
+                <a16:creationId xmlns:a16="http://schemas.microsoft.com/office/drawing/2014/main" id="{70524CC3-5469-44C6-BC36-723643ECB5E2}"/>
               </a:ext>
             </a:extLst>
           </p:cNvPr>
@@ -5833,9 +5236,9 @@
                 <a:solidFill>
                   <a:srgbClr val="6D6D6D"/>
                 </a:solidFill>
-                <a:latin typeface="Aptos"/>
-                <a:ea typeface="Aptos"/>
-                <a:cs typeface="Aptos"/>
+                <a:latin typeface="Arial"/>
+                <a:ea typeface="Arial"/>
+                <a:cs typeface="Arial"/>
               </a:defRPr>
             </a:pPr>
             <a:r>
@@ -5843,9 +5246,9 @@
                 <a:solidFill>
                   <a:srgbClr val="6D6D6D"/>
                 </a:solidFill>
-                <a:latin typeface="Aptos"/>
-                <a:ea typeface="Aptos"/>
-                <a:cs typeface="Aptos"/>
+                <a:latin typeface="Arial"/>
+                <a:ea typeface="Arial"/>
+                <a:cs typeface="Arial"/>
               </a:rPr>
               <a:t>Q&amp;A</a:t>
             </a:r>
@@ -5854,10 +5257,45 @@
       </p:sp>
       <p:sp>
         <p:nvSpPr>
+          <p:cNvPr id="3" name="">
+            <a:extLst xmlns:a="http://schemas.openxmlformats.org/drawingml/2006/main">
+              <a:ext uri="{FF2B5EF4-FFF2-40B4-BE49-F238E27FC236}">
+                <a16:creationId xmlns:a16="http://schemas.microsoft.com/office/drawing/2014/main" id="{A3A972CD-FCE6-4615-A980-EBA8B6CA773F}"/>
+              </a:ext>
+            </a:extLst>
+          </p:cNvPr>
+          <p:cNvSpPr>
+            <a:spLocks xmlns:a="http://schemas.openxmlformats.org/drawingml/2006/main" noGrp="1"/>
+          </p:cNvSpPr>
+          <p:nvPr/>
+        </p:nvSpPr>
+        <p:spPr>
+          <a:xfrm xmlns:a="http://schemas.openxmlformats.org/drawingml/2006/main">
+            <a:off x="685800" y="742950"/>
+            <a:ext cx="1714500" cy="28575"/>
+          </a:xfrm>
+          <a:prstGeom xmlns:a="http://schemas.openxmlformats.org/drawingml/2006/main" prst="rect">
+            <a:avLst/>
+          </a:prstGeom>
+          <a:solidFill xmlns:a="http://schemas.openxmlformats.org/drawingml/2006/main">
+            <a:srgbClr val="3F7D55"/>
+          </a:solidFill>
+          <a:ln xmlns:a="http://schemas.openxmlformats.org/drawingml/2006/main" w="0">
+            <a:solidFill>
+              <a:srgbClr val="000000">
+                <a:alpha val="0"/>
+              </a:srgbClr>
+            </a:solidFill>
+            <a:prstDash val="solid"/>
+          </a:ln>
+        </p:spPr>
+      </p:sp>
+      <p:sp>
+        <p:nvSpPr>
           <p:cNvPr id="4" name="">
             <a:extLst xmlns:a="http://schemas.openxmlformats.org/drawingml/2006/main">
               <a:ext uri="{FF2B5EF4-FFF2-40B4-BE49-F238E27FC236}">
-                <a16:creationId xmlns:a16="http://schemas.microsoft.com/office/drawing/2014/main" id="{B1DB25E8-1B4C-4FEE-AE37-72482DD0D1AA}"/>
+                <a16:creationId xmlns:a16="http://schemas.microsoft.com/office/drawing/2014/main" id="{14EF52BB-8DE9-4014-9D0C-6BA945233201}"/>
               </a:ext>
             </a:extLst>
           </p:cNvPr>
@@ -5897,9 +5335,9 @@
                 <a:solidFill>
                   <a:srgbClr val="151515"/>
                 </a:solidFill>
-                <a:latin typeface="Aptos Display"/>
-                <a:ea typeface="Aptos Display"/>
-                <a:cs typeface="Aptos Display"/>
+                <a:latin typeface="Arial"/>
+                <a:ea typeface="Arial"/>
+                <a:cs typeface="Arial"/>
               </a:defRPr>
             </a:pPr>
             <a:r>
@@ -5907,9 +5345,9 @@
                 <a:solidFill>
                   <a:srgbClr val="151515"/>
                 </a:solidFill>
-                <a:latin typeface="Aptos Display"/>
-                <a:ea typeface="Aptos Display"/>
-                <a:cs typeface="Aptos Display"/>
+                <a:latin typeface="Arial"/>
+                <a:ea typeface="Arial"/>
+                <a:cs typeface="Arial"/>
               </a:rPr>
               <a:t>Any questions?</a:t>
             </a:r>
@@ -5921,7 +5359,7 @@
           <p:cNvPr id="5" name="">
             <a:extLst xmlns:a="http://schemas.openxmlformats.org/drawingml/2006/main">
               <a:ext uri="{FF2B5EF4-FFF2-40B4-BE49-F238E27FC236}">
-                <a16:creationId xmlns:a16="http://schemas.microsoft.com/office/drawing/2014/main" id="{A2005ED4-AD83-4DB0-9242-ABB5215090DF}"/>
+                <a16:creationId xmlns:a16="http://schemas.microsoft.com/office/drawing/2014/main" id="{FF2B689C-7F23-4A0F-8881-3AB45ABBC02E}"/>
               </a:ext>
             </a:extLst>
           </p:cNvPr>
@@ -5961,9 +5399,9 @@
                 <a:solidFill>
                   <a:srgbClr val="6D6D6D"/>
                 </a:solidFill>
-                <a:latin typeface="Aptos"/>
-                <a:ea typeface="Aptos"/>
-                <a:cs typeface="Aptos"/>
+                <a:latin typeface="Arial"/>
+                <a:ea typeface="Arial"/>
+                <a:cs typeface="Arial"/>
               </a:defRPr>
             </a:pPr>
             <a:r>
@@ -5971,9 +5409,9 @@
                 <a:solidFill>
                   <a:srgbClr val="6D6D6D"/>
                 </a:solidFill>
-                <a:latin typeface="Aptos"/>
-                <a:ea typeface="Aptos"/>
-                <a:cs typeface="Aptos"/>
+                <a:latin typeface="Arial"/>
+                <a:ea typeface="Arial"/>
+                <a:cs typeface="Arial"/>
               </a:rPr>
               <a:t>Current-based inverse inference for a 1D PNP system using a reusable PINN forward surrogate</a:t>
             </a:r>
@@ -5985,7 +5423,7 @@
           <p:cNvPr id="6" name="">
             <a:extLst xmlns:a="http://schemas.openxmlformats.org/drawingml/2006/main">
               <a:ext uri="{FF2B5EF4-FFF2-40B4-BE49-F238E27FC236}">
-                <a16:creationId xmlns:a16="http://schemas.microsoft.com/office/drawing/2014/main" id="{F952AE65-D89F-4A76-96C1-88B7C94BF9D8}"/>
+                <a16:creationId xmlns:a16="http://schemas.microsoft.com/office/drawing/2014/main" id="{33434747-77A5-4744-8D70-245042AC6BA5}"/>
               </a:ext>
             </a:extLst>
           </p:cNvPr>
@@ -6025,9 +5463,9 @@
                 <a:solidFill>
                   <a:srgbClr val="6D6D6D"/>
                 </a:solidFill>
-                <a:latin typeface="Aptos"/>
-                <a:ea typeface="Aptos"/>
-                <a:cs typeface="Aptos"/>
+                <a:latin typeface="Arial"/>
+                <a:ea typeface="Arial"/>
+                <a:cs typeface="Arial"/>
               </a:defRPr>
             </a:pPr>
             <a:r>
@@ -6035,9 +5473,9 @@
                 <a:solidFill>
                   <a:srgbClr val="6D6D6D"/>
                 </a:solidFill>
-                <a:latin typeface="Aptos"/>
-                <a:ea typeface="Aptos"/>
-                <a:cs typeface="Aptos"/>
+                <a:latin typeface="Arial"/>
+                <a:ea typeface="Arial"/>
+                <a:cs typeface="Arial"/>
               </a:rPr>
               <a:t>Jack Jia | June 2026</a:t>
             </a:r>
@@ -6049,7 +5487,7 @@
           <p:cNvPr id="7" name="">
             <a:extLst xmlns:a="http://schemas.openxmlformats.org/drawingml/2006/main">
               <a:ext uri="{FF2B5EF4-FFF2-40B4-BE49-F238E27FC236}">
-                <a16:creationId xmlns:a16="http://schemas.microsoft.com/office/drawing/2014/main" id="{1B509AB2-9D48-4F83-9D10-6C591A5B8919}"/>
+                <a16:creationId xmlns:a16="http://schemas.microsoft.com/office/drawing/2014/main" id="{C038C2E3-E336-4B8A-BCB2-96AB7A57FD2E}"/>
               </a:ext>
             </a:extLst>
           </p:cNvPr>
@@ -6082,7 +5520,7 @@
     </p:spTree>
     <p:extLst>
       <p:ext uri="{BB962C8B-B14F-4D97-AF65-F5344CB8AC3E}">
-        <p14:creationId xmlns:p14="http://schemas.microsoft.com/office/powerpoint/2010/main" val="865655774"/>
+        <p14:creationId xmlns:p14="http://schemas.microsoft.com/office/powerpoint/2010/main" val="919078043"/>
       </p:ext>
     </p:extLst>
   </p:cSld>
@@ -6106,7 +5544,7 @@
           <p:cNvPr id="1" name="">
             <a:extLst xmlns:a="http://schemas.openxmlformats.org/drawingml/2006/main">
               <a:ext uri="{FF2B5EF4-FFF2-40B4-BE49-F238E27FC236}">
-                <a16:creationId xmlns:a16="http://schemas.microsoft.com/office/drawing/2014/main" id="{F38A0516-2CB5-4F37-95EC-975CF73B4A42}"/>
+                <a16:creationId xmlns:a16="http://schemas.microsoft.com/office/drawing/2014/main" id="{ABC6E86C-4E98-4968-9075-D9E3F5C5F23C}"/>
               </a:ext>
             </a:extLst>
           </p:cNvPr>
@@ -6141,7 +5579,7 @@
           <p:cNvPr id="2" name="">
             <a:extLst xmlns:a="http://schemas.openxmlformats.org/drawingml/2006/main">
               <a:ext uri="{FF2B5EF4-FFF2-40B4-BE49-F238E27FC236}">
-                <a16:creationId xmlns:a16="http://schemas.microsoft.com/office/drawing/2014/main" id="{5AFE137F-6B4C-4974-BC46-0D4D1A249687}"/>
+                <a16:creationId xmlns:a16="http://schemas.microsoft.com/office/drawing/2014/main" id="{3536AB9C-83D1-4012-9EFE-939C9F74B383}"/>
               </a:ext>
             </a:extLst>
           </p:cNvPr>
@@ -6153,7 +5591,7 @@
         <p:spPr>
           <a:xfrm xmlns:a="http://schemas.openxmlformats.org/drawingml/2006/main">
             <a:off x="685800" y="400050"/>
-            <a:ext cx="4953000" cy="190500"/>
+            <a:ext cx="5143500" cy="190500"/>
           </a:xfrm>
           <a:prstGeom xmlns:a="http://schemas.openxmlformats.org/drawingml/2006/main" prst="rect">
             <a:avLst/>
@@ -6181,9 +5619,9 @@
                 <a:solidFill>
                   <a:srgbClr val="6D6D6D"/>
                 </a:solidFill>
-                <a:latin typeface="Aptos"/>
-                <a:ea typeface="Aptos"/>
-                <a:cs typeface="Aptos"/>
+                <a:latin typeface="Arial"/>
+                <a:ea typeface="Arial"/>
+                <a:cs typeface="Arial"/>
               </a:defRPr>
             </a:pPr>
             <a:r>
@@ -6191,9 +5629,9 @@
                 <a:solidFill>
                   <a:srgbClr val="6D6D6D"/>
                 </a:solidFill>
-                <a:latin typeface="Aptos"/>
-                <a:ea typeface="Aptos"/>
-                <a:cs typeface="Aptos"/>
+                <a:latin typeface="Arial"/>
+                <a:ea typeface="Arial"/>
+                <a:cs typeface="Arial"/>
               </a:rPr>
               <a:t>OPENING</a:t>
             </a:r>
@@ -6205,7 +5643,7 @@
           <p:cNvPr id="3" name="">
             <a:extLst xmlns:a="http://schemas.openxmlformats.org/drawingml/2006/main">
               <a:ext uri="{FF2B5EF4-FFF2-40B4-BE49-F238E27FC236}">
-                <a16:creationId xmlns:a16="http://schemas.microsoft.com/office/drawing/2014/main" id="{949F6A13-07E7-4A6F-A8DE-2A04A700A2B6}"/>
+                <a16:creationId xmlns:a16="http://schemas.microsoft.com/office/drawing/2014/main" id="{2A7D237D-D5A6-478C-A519-D4B913E4D993}"/>
               </a:ext>
             </a:extLst>
           </p:cNvPr>
@@ -6245,9 +5683,9 @@
                 <a:solidFill>
                   <a:srgbClr val="6D6D6D"/>
                 </a:solidFill>
-                <a:latin typeface="Aptos"/>
-                <a:ea typeface="Aptos"/>
-                <a:cs typeface="Aptos"/>
+                <a:latin typeface="Arial"/>
+                <a:ea typeface="Arial"/>
+                <a:cs typeface="Arial"/>
               </a:defRPr>
             </a:pPr>
             <a:r>
@@ -6255,9 +5693,9 @@
                 <a:solidFill>
                   <a:srgbClr val="6D6D6D"/>
                 </a:solidFill>
-                <a:latin typeface="Aptos"/>
-                <a:ea typeface="Aptos"/>
-                <a:cs typeface="Aptos"/>
+                <a:latin typeface="Arial"/>
+                <a:ea typeface="Arial"/>
+                <a:cs typeface="Arial"/>
               </a:rPr>
               <a:t>02</a:t>
             </a:r>
@@ -6269,7 +5707,7 @@
           <p:cNvPr id="4" name="">
             <a:extLst xmlns:a="http://schemas.openxmlformats.org/drawingml/2006/main">
               <a:ext uri="{FF2B5EF4-FFF2-40B4-BE49-F238E27FC236}">
-                <a16:creationId xmlns:a16="http://schemas.microsoft.com/office/drawing/2014/main" id="{6ED4263D-EB5F-49D6-8E92-3DFE70C7DF01}"/>
+                <a16:creationId xmlns:a16="http://schemas.microsoft.com/office/drawing/2014/main" id="{3C0A1177-9BDC-4450-97A5-5B35CCCB24B1}"/>
               </a:ext>
             </a:extLst>
           </p:cNvPr>
@@ -6304,7 +5742,7 @@
           <p:cNvPr id="5" name="">
             <a:extLst xmlns:a="http://schemas.openxmlformats.org/drawingml/2006/main">
               <a:ext uri="{FF2B5EF4-FFF2-40B4-BE49-F238E27FC236}">
-                <a16:creationId xmlns:a16="http://schemas.microsoft.com/office/drawing/2014/main" id="{72456816-3694-490D-A8FE-40F497432865}"/>
+                <a16:creationId xmlns:a16="http://schemas.microsoft.com/office/drawing/2014/main" id="{5F6A2131-05CE-403A-AB54-279F3414EDCE}"/>
               </a:ext>
             </a:extLst>
           </p:cNvPr>
@@ -6339,7 +5777,7 @@
           <p:cNvPr id="6" name="">
             <a:extLst xmlns:a="http://schemas.openxmlformats.org/drawingml/2006/main">
               <a:ext uri="{FF2B5EF4-FFF2-40B4-BE49-F238E27FC236}">
-                <a16:creationId xmlns:a16="http://schemas.microsoft.com/office/drawing/2014/main" id="{98EBAADD-0903-4ED2-A7D1-86EFC97BC712}"/>
+                <a16:creationId xmlns:a16="http://schemas.microsoft.com/office/drawing/2014/main" id="{3C2B407B-4F6C-461C-90C0-D0F809467939}"/>
               </a:ext>
             </a:extLst>
           </p:cNvPr>
@@ -6351,7 +5789,7 @@
         <p:spPr>
           <a:xfrm xmlns:a="http://schemas.openxmlformats.org/drawingml/2006/main">
             <a:off x="685800" y="990600"/>
-            <a:ext cx="10287000" cy="838200"/>
+            <a:ext cx="10096500" cy="838200"/>
           </a:xfrm>
           <a:prstGeom xmlns:a="http://schemas.openxmlformats.org/drawingml/2006/main" prst="rect">
             <a:avLst/>
@@ -6379,9 +5817,9 @@
                 <a:solidFill>
                   <a:srgbClr val="151515"/>
                 </a:solidFill>
-                <a:latin typeface="Aptos Display"/>
-                <a:ea typeface="Aptos Display"/>
-                <a:cs typeface="Aptos Display"/>
+                <a:latin typeface="Arial"/>
+                <a:ea typeface="Arial"/>
+                <a:cs typeface="Arial"/>
               </a:defRPr>
             </a:pPr>
             <a:r>
@@ -6389,9 +5827,9 @@
                 <a:solidFill>
                   <a:srgbClr val="151515"/>
                 </a:solidFill>
-                <a:latin typeface="Aptos Display"/>
-                <a:ea typeface="Aptos Display"/>
-                <a:cs typeface="Aptos Display"/>
+                <a:latin typeface="Arial"/>
+                <a:ea typeface="Arial"/>
+                <a:cs typeface="Arial"/>
               </a:rPr>
               <a:t>The central question is whether current identifies diffusion parameters.</a:t>
             </a:r>
@@ -6403,19 +5841,19 @@
           <p:cNvPr id="7" name="">
             <a:extLst xmlns:a="http://schemas.openxmlformats.org/drawingml/2006/main">
               <a:ext uri="{FF2B5EF4-FFF2-40B4-BE49-F238E27FC236}">
-                <a16:creationId xmlns:a16="http://schemas.microsoft.com/office/drawing/2014/main" id="{EDA3343A-1C88-484F-86B1-BC27BB05E272}"/>
-              </a:ext>
-            </a:extLst>
-          </p:cNvPr>
-          <p:cNvSpPr>
-            <a:spLocks xmlns:a="http://schemas.openxmlformats.org/drawingml/2006/main" noGrp="1"/>
-          </p:cNvSpPr>
-          <p:nvPr/>
-        </p:nvSpPr>
-        <p:spPr>
-          <a:xfrm xmlns:a="http://schemas.openxmlformats.org/drawingml/2006/main">
-            <a:off x="704850" y="1866900"/>
-            <a:ext cx="9525000" cy="419100"/>
+                <a16:creationId xmlns:a16="http://schemas.microsoft.com/office/drawing/2014/main" id="{839A92EA-D87F-44EF-A741-9B386992EC07}"/>
+              </a:ext>
+            </a:extLst>
+          </p:cNvPr>
+          <p:cNvSpPr>
+            <a:spLocks xmlns:a="http://schemas.openxmlformats.org/drawingml/2006/main" noGrp="1"/>
+          </p:cNvSpPr>
+          <p:nvPr/>
+        </p:nvSpPr>
+        <p:spPr>
+          <a:xfrm xmlns:a="http://schemas.openxmlformats.org/drawingml/2006/main">
+            <a:off x="704850" y="1885950"/>
+            <a:ext cx="9334500" cy="419100"/>
           </a:xfrm>
           <a:prstGeom xmlns:a="http://schemas.openxmlformats.org/drawingml/2006/main" prst="rect">
             <a:avLst/>
@@ -6443,9 +5881,9 @@
                 <a:solidFill>
                   <a:srgbClr val="6D6D6D"/>
                 </a:solidFill>
-                <a:latin typeface="Aptos"/>
-                <a:ea typeface="Aptos"/>
-                <a:cs typeface="Aptos"/>
+                <a:latin typeface="Arial"/>
+                <a:ea typeface="Arial"/>
+                <a:cs typeface="Arial"/>
               </a:defRPr>
             </a:pPr>
             <a:r>
@@ -6453,55 +5891,101 @@
                 <a:solidFill>
                   <a:srgbClr val="6D6D6D"/>
                 </a:solidFill>
-                <a:latin typeface="Aptos"/>
-                <a:ea typeface="Aptos"/>
-                <a:cs typeface="Aptos"/>
+                <a:latin typeface="Arial"/>
+                <a:ea typeface="Arial"/>
+                <a:cs typeface="Arial"/>
               </a:rPr>
               <a:t>The project connects a measurable signal to a Bayesian posterior over Dp and Dn.</a:t>
             </a:r>
           </a:p>
         </p:txBody>
       </p:sp>
-      <p:pic>
-        <p:nvPicPr>
-          <p:cNvPr id="8" name=""/>
-          <p:cNvPicPr>
-            <a:picLocks xmlns:a="http://schemas.openxmlformats.org/drawingml/2006/main" noChangeAspect="1"/>
-          </p:cNvPicPr>
-          <p:nvPr/>
-        </p:nvPicPr>
-        <p:blipFill>
-          <a:blip xmlns:r="http://schemas.openxmlformats.org/officeDocument/2006/relationships" xmlns:a="http://schemas.openxmlformats.org/drawingml/2006/main" r:embed="R7051c5850c724a48"/>
-          <a:stretch xmlns:a="http://schemas.openxmlformats.org/drawingml/2006/main"/>
-        </p:blipFill>
-        <p:spPr>
-          <a:xfrm xmlns:a="http://schemas.openxmlformats.org/drawingml/2006/main">
-            <a:off x="1966789" y="2724150"/>
-            <a:ext cx="8125072" cy="1524000"/>
-          </a:xfrm>
-          <a:prstGeom xmlns:a="http://schemas.openxmlformats.org/drawingml/2006/main" prst="rect">
-            <a:avLst/>
-          </a:prstGeom>
-        </p:spPr>
-      </p:pic>
+      <p:sp>
+        <p:nvSpPr>
+          <p:cNvPr id="8" name="">
+            <a:extLst xmlns:a="http://schemas.openxmlformats.org/drawingml/2006/main">
+              <a:ext uri="{FF2B5EF4-FFF2-40B4-BE49-F238E27FC236}">
+                <a16:creationId xmlns:a16="http://schemas.microsoft.com/office/drawing/2014/main" id="{9B194AFC-A3C1-49F5-B431-6D9157AB2F4F}"/>
+              </a:ext>
+            </a:extLst>
+          </p:cNvPr>
+          <p:cNvSpPr>
+            <a:spLocks xmlns:a="http://schemas.openxmlformats.org/drawingml/2006/main" noGrp="1"/>
+          </p:cNvSpPr>
+          <p:nvPr/>
+        </p:nvSpPr>
+        <p:spPr>
+          <a:xfrm xmlns:a="http://schemas.openxmlformats.org/drawingml/2006/main">
+            <a:off x="1581150" y="3143250"/>
+            <a:ext cx="1619250" cy="666750"/>
+          </a:xfrm>
+          <a:prstGeom xmlns:a="http://schemas.openxmlformats.org/drawingml/2006/main" prst="rect">
+            <a:avLst/>
+          </a:prstGeom>
+          <a:solidFill xmlns:a="http://schemas.openxmlformats.org/drawingml/2006/main">
+            <a:srgbClr val="FFFFFF"/>
+          </a:solidFill>
+          <a:ln xmlns:a="http://schemas.openxmlformats.org/drawingml/2006/main" w="9525">
+            <a:solidFill>
+              <a:srgbClr val="1F4E79"/>
+            </a:solidFill>
+            <a:prstDash val="solid"/>
+          </a:ln>
+        </p:spPr>
+      </p:sp>
       <p:sp>
         <p:nvSpPr>
           <p:cNvPr id="9" name="">
             <a:extLst xmlns:a="http://schemas.openxmlformats.org/drawingml/2006/main">
               <a:ext uri="{FF2B5EF4-FFF2-40B4-BE49-F238E27FC236}">
-                <a16:creationId xmlns:a16="http://schemas.microsoft.com/office/drawing/2014/main" id="{B990DBC7-65A8-4998-A29F-F5D8D2FE5664}"/>
-              </a:ext>
-            </a:extLst>
-          </p:cNvPr>
-          <p:cNvSpPr>
-            <a:spLocks xmlns:a="http://schemas.openxmlformats.org/drawingml/2006/main" noGrp="1"/>
-          </p:cNvSpPr>
-          <p:nvPr/>
-        </p:nvSpPr>
-        <p:spPr>
-          <a:xfrm xmlns:a="http://schemas.openxmlformats.org/drawingml/2006/main">
-            <a:off x="1924050" y="4838700"/>
-            <a:ext cx="1524000" cy="209550"/>
+                <a16:creationId xmlns:a16="http://schemas.microsoft.com/office/drawing/2014/main" id="{9EE6004A-E2B4-4019-A47D-01C2C49B444A}"/>
+              </a:ext>
+            </a:extLst>
+          </p:cNvPr>
+          <p:cNvSpPr>
+            <a:spLocks xmlns:a="http://schemas.openxmlformats.org/drawingml/2006/main" noGrp="1"/>
+          </p:cNvSpPr>
+          <p:nvPr/>
+        </p:nvSpPr>
+        <p:spPr>
+          <a:xfrm xmlns:a="http://schemas.openxmlformats.org/drawingml/2006/main">
+            <a:off x="1581150" y="3143250"/>
+            <a:ext cx="1619250" cy="28575"/>
+          </a:xfrm>
+          <a:prstGeom xmlns:a="http://schemas.openxmlformats.org/drawingml/2006/main" prst="rect">
+            <a:avLst/>
+          </a:prstGeom>
+          <a:solidFill xmlns:a="http://schemas.openxmlformats.org/drawingml/2006/main">
+            <a:srgbClr val="1F4E79"/>
+          </a:solidFill>
+          <a:ln xmlns:a="http://schemas.openxmlformats.org/drawingml/2006/main" w="0">
+            <a:solidFill>
+              <a:srgbClr val="000000">
+                <a:alpha val="0"/>
+              </a:srgbClr>
+            </a:solidFill>
+            <a:prstDash val="solid"/>
+          </a:ln>
+        </p:spPr>
+      </p:sp>
+      <p:sp>
+        <p:nvSpPr>
+          <p:cNvPr id="10" name="">
+            <a:extLst xmlns:a="http://schemas.openxmlformats.org/drawingml/2006/main">
+              <a:ext uri="{FF2B5EF4-FFF2-40B4-BE49-F238E27FC236}">
+                <a16:creationId xmlns:a16="http://schemas.microsoft.com/office/drawing/2014/main" id="{961D4B92-B874-46B3-A62D-F710ADB27FE9}"/>
+              </a:ext>
+            </a:extLst>
+          </p:cNvPr>
+          <p:cNvSpPr>
+            <a:spLocks xmlns:a="http://schemas.openxmlformats.org/drawingml/2006/main" noGrp="1"/>
+          </p:cNvSpPr>
+          <p:nvPr/>
+        </p:nvSpPr>
+        <p:spPr>
+          <a:xfrm xmlns:a="http://schemas.openxmlformats.org/drawingml/2006/main">
+            <a:off x="1714500" y="3276600"/>
+            <a:ext cx="1352550" cy="381000"/>
           </a:xfrm>
           <a:prstGeom xmlns:a="http://schemas.openxmlformats.org/drawingml/2006/main" prst="rect">
             <a:avLst/>
@@ -6521,51 +6005,119 @@
           </a:ln>
         </p:spPr>
         <p:txBody>
-          <a:bodyPr xmlns:a="http://schemas.openxmlformats.org/drawingml/2006/main" lIns="0" tIns="0" rIns="0" bIns="0" anchor="t"/>
+          <a:bodyPr xmlns:a="http://schemas.openxmlformats.org/drawingml/2006/main" lIns="0" tIns="0" rIns="0" bIns="0" anchor="ctr"/>
           <a:lstStyle xmlns:a="http://schemas.openxmlformats.org/drawingml/2006/main"/>
           <a:p xmlns:a="http://schemas.openxmlformats.org/drawingml/2006/main">
-            <a:pPr algn="l">
-              <a:defRPr sz="1050" b="1">
-                <a:solidFill>
-                  <a:srgbClr val="008C95"/>
-                </a:solidFill>
-                <a:latin typeface="Aptos"/>
-                <a:ea typeface="Aptos"/>
-                <a:cs typeface="Aptos"/>
+            <a:pPr algn="ctr">
+              <a:defRPr sz="1350" b="1">
+                <a:solidFill>
+                  <a:srgbClr val="1F4E79"/>
+                </a:solidFill>
+                <a:latin typeface="Arial"/>
+                <a:ea typeface="Arial"/>
+                <a:cs typeface="Arial"/>
               </a:defRPr>
             </a:pPr>
             <a:r>
-              <a:rPr sz="1050" b="1">
-                <a:solidFill>
-                  <a:srgbClr val="008C95"/>
-                </a:solidFill>
-                <a:latin typeface="Aptos"/>
-                <a:ea typeface="Aptos"/>
-                <a:cs typeface="Aptos"/>
+              <a:rPr sz="1350" b="1">
+                <a:solidFill>
+                  <a:srgbClr val="1F4E79"/>
+                </a:solidFill>
+                <a:latin typeface="Arial"/>
+                <a:ea typeface="Arial"/>
+                <a:cs typeface="Arial"/>
               </a:rPr>
-              <a:t>Storyline</a:t>
+              <a:t>PNP model</a:t>
             </a:r>
           </a:p>
         </p:txBody>
       </p:sp>
       <p:sp>
         <p:nvSpPr>
-          <p:cNvPr id="10" name="">
-            <a:extLst xmlns:a="http://schemas.openxmlformats.org/drawingml/2006/main">
-              <a:ext uri="{FF2B5EF4-FFF2-40B4-BE49-F238E27FC236}">
-                <a16:creationId xmlns:a16="http://schemas.microsoft.com/office/drawing/2014/main" id="{1F298068-8C1C-4BBA-9635-DAC8B0C8392E}"/>
-              </a:ext>
-            </a:extLst>
-          </p:cNvPr>
-          <p:cNvSpPr>
-            <a:spLocks xmlns:a="http://schemas.openxmlformats.org/drawingml/2006/main" noGrp="1"/>
-          </p:cNvSpPr>
-          <p:nvPr/>
-        </p:nvSpPr>
-        <p:spPr>
-          <a:xfrm xmlns:a="http://schemas.openxmlformats.org/drawingml/2006/main">
-            <a:off x="1924050" y="5124450"/>
-            <a:ext cx="8191500" cy="514350"/>
+          <p:cNvPr id="11" name="">
+            <a:extLst xmlns:a="http://schemas.openxmlformats.org/drawingml/2006/main">
+              <a:ext uri="{FF2B5EF4-FFF2-40B4-BE49-F238E27FC236}">
+                <a16:creationId xmlns:a16="http://schemas.microsoft.com/office/drawing/2014/main" id="{66342DCC-D80F-4CDA-920C-927A56CE86CA}"/>
+              </a:ext>
+            </a:extLst>
+          </p:cNvPr>
+          <p:cNvSpPr>
+            <a:spLocks xmlns:a="http://schemas.openxmlformats.org/drawingml/2006/main" noGrp="1"/>
+          </p:cNvSpPr>
+          <p:nvPr/>
+        </p:nvSpPr>
+        <p:spPr>
+          <a:xfrm xmlns:a="http://schemas.openxmlformats.org/drawingml/2006/main">
+            <a:off x="3790950" y="3143250"/>
+            <a:ext cx="1619250" cy="666750"/>
+          </a:xfrm>
+          <a:prstGeom xmlns:a="http://schemas.openxmlformats.org/drawingml/2006/main" prst="rect">
+            <a:avLst/>
+          </a:prstGeom>
+          <a:solidFill xmlns:a="http://schemas.openxmlformats.org/drawingml/2006/main">
+            <a:srgbClr val="FFFFFF"/>
+          </a:solidFill>
+          <a:ln xmlns:a="http://schemas.openxmlformats.org/drawingml/2006/main" w="9525">
+            <a:solidFill>
+              <a:srgbClr val="008C95"/>
+            </a:solidFill>
+            <a:prstDash val="solid"/>
+          </a:ln>
+        </p:spPr>
+      </p:sp>
+      <p:sp>
+        <p:nvSpPr>
+          <p:cNvPr id="12" name="">
+            <a:extLst xmlns:a="http://schemas.openxmlformats.org/drawingml/2006/main">
+              <a:ext uri="{FF2B5EF4-FFF2-40B4-BE49-F238E27FC236}">
+                <a16:creationId xmlns:a16="http://schemas.microsoft.com/office/drawing/2014/main" id="{74570100-7290-4129-8715-876B886E6240}"/>
+              </a:ext>
+            </a:extLst>
+          </p:cNvPr>
+          <p:cNvSpPr>
+            <a:spLocks xmlns:a="http://schemas.openxmlformats.org/drawingml/2006/main" noGrp="1"/>
+          </p:cNvSpPr>
+          <p:nvPr/>
+        </p:nvSpPr>
+        <p:spPr>
+          <a:xfrm xmlns:a="http://schemas.openxmlformats.org/drawingml/2006/main">
+            <a:off x="3790950" y="3143250"/>
+            <a:ext cx="1619250" cy="28575"/>
+          </a:xfrm>
+          <a:prstGeom xmlns:a="http://schemas.openxmlformats.org/drawingml/2006/main" prst="rect">
+            <a:avLst/>
+          </a:prstGeom>
+          <a:solidFill xmlns:a="http://schemas.openxmlformats.org/drawingml/2006/main">
+            <a:srgbClr val="008C95"/>
+          </a:solidFill>
+          <a:ln xmlns:a="http://schemas.openxmlformats.org/drawingml/2006/main" w="0">
+            <a:solidFill>
+              <a:srgbClr val="000000">
+                <a:alpha val="0"/>
+              </a:srgbClr>
+            </a:solidFill>
+            <a:prstDash val="solid"/>
+          </a:ln>
+        </p:spPr>
+      </p:sp>
+      <p:sp>
+        <p:nvSpPr>
+          <p:cNvPr id="13" name="">
+            <a:extLst xmlns:a="http://schemas.openxmlformats.org/drawingml/2006/main">
+              <a:ext uri="{FF2B5EF4-FFF2-40B4-BE49-F238E27FC236}">
+                <a16:creationId xmlns:a16="http://schemas.microsoft.com/office/drawing/2014/main" id="{186160A8-6A25-4DE1-9108-03D4D7EEEC83}"/>
+              </a:ext>
+            </a:extLst>
+          </p:cNvPr>
+          <p:cNvSpPr>
+            <a:spLocks xmlns:a="http://schemas.openxmlformats.org/drawingml/2006/main" noGrp="1"/>
+          </p:cNvSpPr>
+          <p:nvPr/>
+        </p:nvSpPr>
+        <p:spPr>
+          <a:xfrm xmlns:a="http://schemas.openxmlformats.org/drawingml/2006/main">
+            <a:off x="3924300" y="3276600"/>
+            <a:ext cx="1352550" cy="381000"/>
           </a:xfrm>
           <a:prstGeom xmlns:a="http://schemas.openxmlformats.org/drawingml/2006/main" prst="rect">
             <a:avLst/>
@@ -6585,6 +6137,677 @@
           </a:ln>
         </p:spPr>
         <p:txBody>
+          <a:bodyPr xmlns:a="http://schemas.openxmlformats.org/drawingml/2006/main" lIns="0" tIns="0" rIns="0" bIns="0" anchor="ctr"/>
+          <a:lstStyle xmlns:a="http://schemas.openxmlformats.org/drawingml/2006/main"/>
+          <a:p xmlns:a="http://schemas.openxmlformats.org/drawingml/2006/main">
+            <a:pPr algn="ctr">
+              <a:defRPr sz="1350" b="1">
+                <a:solidFill>
+                  <a:srgbClr val="008C95"/>
+                </a:solidFill>
+                <a:latin typeface="Arial"/>
+                <a:ea typeface="Arial"/>
+                <a:cs typeface="Arial"/>
+              </a:defRPr>
+            </a:pPr>
+            <a:r>
+              <a:rPr sz="1350" b="1">
+                <a:solidFill>
+                  <a:srgbClr val="008C95"/>
+                </a:solidFill>
+                <a:latin typeface="Arial"/>
+                <a:ea typeface="Arial"/>
+                <a:cs typeface="Arial"/>
+              </a:rPr>
+              <a:t>PINN surrogate</a:t>
+            </a:r>
+          </a:p>
+        </p:txBody>
+      </p:sp>
+      <p:sp>
+        <p:nvSpPr>
+          <p:cNvPr id="14" name="">
+            <a:extLst xmlns:a="http://schemas.openxmlformats.org/drawingml/2006/main">
+              <a:ext uri="{FF2B5EF4-FFF2-40B4-BE49-F238E27FC236}">
+                <a16:creationId xmlns:a16="http://schemas.microsoft.com/office/drawing/2014/main" id="{136E35AB-FD01-478C-BB6C-574D85C43AA0}"/>
+              </a:ext>
+            </a:extLst>
+          </p:cNvPr>
+          <p:cNvSpPr>
+            <a:spLocks xmlns:a="http://schemas.openxmlformats.org/drawingml/2006/main" noGrp="1"/>
+          </p:cNvSpPr>
+          <p:nvPr/>
+        </p:nvSpPr>
+        <p:spPr>
+          <a:xfrm xmlns:a="http://schemas.openxmlformats.org/drawingml/2006/main">
+            <a:off x="6381750" y="3143250"/>
+            <a:ext cx="1619250" cy="895350"/>
+          </a:xfrm>
+          <a:prstGeom xmlns:a="http://schemas.openxmlformats.org/drawingml/2006/main" prst="rect">
+            <a:avLst/>
+          </a:prstGeom>
+          <a:solidFill xmlns:a="http://schemas.openxmlformats.org/drawingml/2006/main">
+            <a:srgbClr val="FFFFFF"/>
+          </a:solidFill>
+          <a:ln xmlns:a="http://schemas.openxmlformats.org/drawingml/2006/main" w="9525">
+            <a:solidFill>
+              <a:srgbClr val="D05A2A"/>
+            </a:solidFill>
+            <a:prstDash val="solid"/>
+          </a:ln>
+        </p:spPr>
+      </p:sp>
+      <p:sp>
+        <p:nvSpPr>
+          <p:cNvPr id="15" name="">
+            <a:extLst xmlns:a="http://schemas.openxmlformats.org/drawingml/2006/main">
+              <a:ext uri="{FF2B5EF4-FFF2-40B4-BE49-F238E27FC236}">
+                <a16:creationId xmlns:a16="http://schemas.microsoft.com/office/drawing/2014/main" id="{0987A7CA-234B-4189-8076-DC4D58E15261}"/>
+              </a:ext>
+            </a:extLst>
+          </p:cNvPr>
+          <p:cNvSpPr>
+            <a:spLocks xmlns:a="http://schemas.openxmlformats.org/drawingml/2006/main" noGrp="1"/>
+          </p:cNvSpPr>
+          <p:nvPr/>
+        </p:nvSpPr>
+        <p:spPr>
+          <a:xfrm xmlns:a="http://schemas.openxmlformats.org/drawingml/2006/main">
+            <a:off x="6381750" y="3143250"/>
+            <a:ext cx="1619250" cy="28575"/>
+          </a:xfrm>
+          <a:prstGeom xmlns:a="http://schemas.openxmlformats.org/drawingml/2006/main" prst="rect">
+            <a:avLst/>
+          </a:prstGeom>
+          <a:solidFill xmlns:a="http://schemas.openxmlformats.org/drawingml/2006/main">
+            <a:srgbClr val="D05A2A"/>
+          </a:solidFill>
+          <a:ln xmlns:a="http://schemas.openxmlformats.org/drawingml/2006/main" w="0">
+            <a:solidFill>
+              <a:srgbClr val="000000">
+                <a:alpha val="0"/>
+              </a:srgbClr>
+            </a:solidFill>
+            <a:prstDash val="solid"/>
+          </a:ln>
+        </p:spPr>
+      </p:sp>
+      <p:sp>
+        <p:nvSpPr>
+          <p:cNvPr id="16" name="">
+            <a:extLst xmlns:a="http://schemas.openxmlformats.org/drawingml/2006/main">
+              <a:ext uri="{FF2B5EF4-FFF2-40B4-BE49-F238E27FC236}">
+                <a16:creationId xmlns:a16="http://schemas.microsoft.com/office/drawing/2014/main" id="{31F9239D-1152-4304-BE2E-9B7A588F6F21}"/>
+              </a:ext>
+            </a:extLst>
+          </p:cNvPr>
+          <p:cNvSpPr>
+            <a:spLocks xmlns:a="http://schemas.openxmlformats.org/drawingml/2006/main" noGrp="1"/>
+          </p:cNvSpPr>
+          <p:nvPr/>
+        </p:nvSpPr>
+        <p:spPr>
+          <a:xfrm xmlns:a="http://schemas.openxmlformats.org/drawingml/2006/main">
+            <a:off x="6515100" y="3276600"/>
+            <a:ext cx="1352550" cy="609600"/>
+          </a:xfrm>
+          <a:prstGeom xmlns:a="http://schemas.openxmlformats.org/drawingml/2006/main" prst="rect">
+            <a:avLst/>
+          </a:prstGeom>
+          <a:solidFill xmlns:a="http://schemas.openxmlformats.org/drawingml/2006/main">
+            <a:srgbClr val="000000">
+              <a:alpha val="0"/>
+            </a:srgbClr>
+          </a:solidFill>
+          <a:ln xmlns:a="http://schemas.openxmlformats.org/drawingml/2006/main" w="0">
+            <a:solidFill>
+              <a:srgbClr val="000000">
+                <a:alpha val="0"/>
+              </a:srgbClr>
+            </a:solidFill>
+            <a:prstDash val="solid"/>
+          </a:ln>
+        </p:spPr>
+        <p:txBody>
+          <a:bodyPr xmlns:a="http://schemas.openxmlformats.org/drawingml/2006/main" lIns="0" tIns="0" rIns="0" bIns="0" anchor="ctr"/>
+          <a:lstStyle xmlns:a="http://schemas.openxmlformats.org/drawingml/2006/main"/>
+          <a:p xmlns:a="http://schemas.openxmlformats.org/drawingml/2006/main">
+            <a:pPr algn="ctr">
+              <a:defRPr sz="1275" b="1">
+                <a:solidFill>
+                  <a:srgbClr val="D05A2A"/>
+                </a:solidFill>
+                <a:latin typeface="Arial"/>
+                <a:ea typeface="Arial"/>
+                <a:cs typeface="Arial"/>
+              </a:defRPr>
+            </a:pPr>
+            <a:r>
+              <a:rPr sz="1275" b="1">
+                <a:solidFill>
+                  <a:srgbClr val="D05A2A"/>
+                </a:solidFill>
+                <a:latin typeface="Arial"/>
+                <a:ea typeface="Arial"/>
+                <a:cs typeface="Arial"/>
+              </a:rPr>
+              <a:t>Current</a:t>
+            </a:r>
+          </a:p>
+          <a:p xmlns:a="http://schemas.openxmlformats.org/drawingml/2006/main">
+            <a:pPr algn="ctr">
+              <a:defRPr sz="1275" b="1">
+                <a:solidFill>
+                  <a:srgbClr val="D05A2A"/>
+                </a:solidFill>
+                <a:latin typeface="Arial"/>
+                <a:ea typeface="Arial"/>
+                <a:cs typeface="Arial"/>
+              </a:defRPr>
+            </a:pPr>
+            <a:r>
+              <a:rPr sz="1275" b="1">
+                <a:solidFill>
+                  <a:srgbClr val="D05A2A"/>
+                </a:solidFill>
+                <a:latin typeface="Arial"/>
+                <a:ea typeface="Arial"/>
+                <a:cs typeface="Arial"/>
+              </a:rPr>
+              <a:t>likelihood</a:t>
+            </a:r>
+          </a:p>
+        </p:txBody>
+      </p:sp>
+      <p:sp>
+        <p:nvSpPr>
+          <p:cNvPr id="17" name="">
+            <a:extLst xmlns:a="http://schemas.openxmlformats.org/drawingml/2006/main">
+              <a:ext uri="{FF2B5EF4-FFF2-40B4-BE49-F238E27FC236}">
+                <a16:creationId xmlns:a16="http://schemas.microsoft.com/office/drawing/2014/main" id="{F2753455-0C82-4D6F-AC26-DEB077FA1945}"/>
+              </a:ext>
+            </a:extLst>
+          </p:cNvPr>
+          <p:cNvSpPr>
+            <a:spLocks xmlns:a="http://schemas.openxmlformats.org/drawingml/2006/main" noGrp="1"/>
+          </p:cNvSpPr>
+          <p:nvPr/>
+        </p:nvSpPr>
+        <p:spPr>
+          <a:xfrm xmlns:a="http://schemas.openxmlformats.org/drawingml/2006/main">
+            <a:off x="9191625" y="3143250"/>
+            <a:ext cx="1619250" cy="895350"/>
+          </a:xfrm>
+          <a:prstGeom xmlns:a="http://schemas.openxmlformats.org/drawingml/2006/main" prst="rect">
+            <a:avLst/>
+          </a:prstGeom>
+          <a:solidFill xmlns:a="http://schemas.openxmlformats.org/drawingml/2006/main">
+            <a:srgbClr val="FFFFFF"/>
+          </a:solidFill>
+          <a:ln xmlns:a="http://schemas.openxmlformats.org/drawingml/2006/main" w="9525">
+            <a:solidFill>
+              <a:srgbClr val="3F7D55"/>
+            </a:solidFill>
+            <a:prstDash val="solid"/>
+          </a:ln>
+        </p:spPr>
+      </p:sp>
+      <p:sp>
+        <p:nvSpPr>
+          <p:cNvPr id="18" name="">
+            <a:extLst xmlns:a="http://schemas.openxmlformats.org/drawingml/2006/main">
+              <a:ext uri="{FF2B5EF4-FFF2-40B4-BE49-F238E27FC236}">
+                <a16:creationId xmlns:a16="http://schemas.microsoft.com/office/drawing/2014/main" id="{584F559E-A044-4D33-BE23-BF75E4B297E1}"/>
+              </a:ext>
+            </a:extLst>
+          </p:cNvPr>
+          <p:cNvSpPr>
+            <a:spLocks xmlns:a="http://schemas.openxmlformats.org/drawingml/2006/main" noGrp="1"/>
+          </p:cNvSpPr>
+          <p:nvPr/>
+        </p:nvSpPr>
+        <p:spPr>
+          <a:xfrm xmlns:a="http://schemas.openxmlformats.org/drawingml/2006/main">
+            <a:off x="9191625" y="3143250"/>
+            <a:ext cx="1619250" cy="28575"/>
+          </a:xfrm>
+          <a:prstGeom xmlns:a="http://schemas.openxmlformats.org/drawingml/2006/main" prst="rect">
+            <a:avLst/>
+          </a:prstGeom>
+          <a:solidFill xmlns:a="http://schemas.openxmlformats.org/drawingml/2006/main">
+            <a:srgbClr val="3F7D55"/>
+          </a:solidFill>
+          <a:ln xmlns:a="http://schemas.openxmlformats.org/drawingml/2006/main" w="0">
+            <a:solidFill>
+              <a:srgbClr val="000000">
+                <a:alpha val="0"/>
+              </a:srgbClr>
+            </a:solidFill>
+            <a:prstDash val="solid"/>
+          </a:ln>
+        </p:spPr>
+      </p:sp>
+      <p:sp>
+        <p:nvSpPr>
+          <p:cNvPr id="19" name="">
+            <a:extLst xmlns:a="http://schemas.openxmlformats.org/drawingml/2006/main">
+              <a:ext uri="{FF2B5EF4-FFF2-40B4-BE49-F238E27FC236}">
+                <a16:creationId xmlns:a16="http://schemas.microsoft.com/office/drawing/2014/main" id="{A5054645-24B4-4A49-A311-EFC797F8BB3A}"/>
+              </a:ext>
+            </a:extLst>
+          </p:cNvPr>
+          <p:cNvSpPr>
+            <a:spLocks xmlns:a="http://schemas.openxmlformats.org/drawingml/2006/main" noGrp="1"/>
+          </p:cNvSpPr>
+          <p:nvPr/>
+        </p:nvSpPr>
+        <p:spPr>
+          <a:xfrm xmlns:a="http://schemas.openxmlformats.org/drawingml/2006/main">
+            <a:off x="9324975" y="3276600"/>
+            <a:ext cx="1352550" cy="609600"/>
+          </a:xfrm>
+          <a:prstGeom xmlns:a="http://schemas.openxmlformats.org/drawingml/2006/main" prst="rect">
+            <a:avLst/>
+          </a:prstGeom>
+          <a:solidFill xmlns:a="http://schemas.openxmlformats.org/drawingml/2006/main">
+            <a:srgbClr val="000000">
+              <a:alpha val="0"/>
+            </a:srgbClr>
+          </a:solidFill>
+          <a:ln xmlns:a="http://schemas.openxmlformats.org/drawingml/2006/main" w="0">
+            <a:solidFill>
+              <a:srgbClr val="000000">
+                <a:alpha val="0"/>
+              </a:srgbClr>
+            </a:solidFill>
+            <a:prstDash val="solid"/>
+          </a:ln>
+        </p:spPr>
+        <p:txBody>
+          <a:bodyPr xmlns:a="http://schemas.openxmlformats.org/drawingml/2006/main" lIns="0" tIns="0" rIns="0" bIns="0" anchor="ctr"/>
+          <a:lstStyle xmlns:a="http://schemas.openxmlformats.org/drawingml/2006/main"/>
+          <a:p xmlns:a="http://schemas.openxmlformats.org/drawingml/2006/main">
+            <a:pPr algn="ctr">
+              <a:defRPr sz="1275" b="1">
+                <a:solidFill>
+                  <a:srgbClr val="3F7D55"/>
+                </a:solidFill>
+                <a:latin typeface="Arial"/>
+                <a:ea typeface="Arial"/>
+                <a:cs typeface="Arial"/>
+              </a:defRPr>
+            </a:pPr>
+            <a:r>
+              <a:rPr sz="1275" b="1">
+                <a:solidFill>
+                  <a:srgbClr val="3F7D55"/>
+                </a:solidFill>
+                <a:latin typeface="Arial"/>
+                <a:ea typeface="Arial"/>
+                <a:cs typeface="Arial"/>
+              </a:rPr>
+              <a:t>Posterior</a:t>
+            </a:r>
+          </a:p>
+          <a:p xmlns:a="http://schemas.openxmlformats.org/drawingml/2006/main">
+            <a:pPr algn="ctr">
+              <a:defRPr sz="1275" b="1">
+                <a:solidFill>
+                  <a:srgbClr val="3F7D55"/>
+                </a:solidFill>
+                <a:latin typeface="Arial"/>
+                <a:ea typeface="Arial"/>
+                <a:cs typeface="Arial"/>
+              </a:defRPr>
+            </a:pPr>
+            <a:r>
+              <a:rPr sz="1275" b="1">
+                <a:solidFill>
+                  <a:srgbClr val="3F7D55"/>
+                </a:solidFill>
+                <a:latin typeface="Arial"/>
+                <a:ea typeface="Arial"/>
+                <a:cs typeface="Arial"/>
+              </a:rPr>
+              <a:t>Dp, Dn</a:t>
+            </a:r>
+          </a:p>
+        </p:txBody>
+      </p:sp>
+      <p:sp>
+        <p:nvSpPr>
+          <p:cNvPr id="20" name="">
+            <a:extLst xmlns:a="http://schemas.openxmlformats.org/drawingml/2006/main">
+              <a:ext uri="{FF2B5EF4-FFF2-40B4-BE49-F238E27FC236}">
+                <a16:creationId xmlns:a16="http://schemas.microsoft.com/office/drawing/2014/main" id="{F2E87682-F2E4-4321-9F94-FB3A8BE02AC8}"/>
+              </a:ext>
+            </a:extLst>
+          </p:cNvPr>
+          <p:cNvSpPr>
+            <a:spLocks xmlns:a="http://schemas.openxmlformats.org/drawingml/2006/main" noGrp="1"/>
+          </p:cNvSpPr>
+          <p:nvPr/>
+        </p:nvSpPr>
+        <p:spPr>
+          <a:xfrm xmlns:a="http://schemas.openxmlformats.org/drawingml/2006/main">
+            <a:off x="3333750" y="3429000"/>
+            <a:ext cx="247650" cy="15240"/>
+          </a:xfrm>
+          <a:prstGeom xmlns:a="http://schemas.openxmlformats.org/drawingml/2006/main" prst="rect">
+            <a:avLst/>
+          </a:prstGeom>
+          <a:solidFill xmlns:a="http://schemas.openxmlformats.org/drawingml/2006/main">
+            <a:srgbClr val="1F4E79"/>
+          </a:solidFill>
+          <a:ln xmlns:a="http://schemas.openxmlformats.org/drawingml/2006/main" w="0">
+            <a:solidFill>
+              <a:srgbClr val="000000">
+                <a:alpha val="0"/>
+              </a:srgbClr>
+            </a:solidFill>
+            <a:prstDash val="solid"/>
+          </a:ln>
+        </p:spPr>
+      </p:sp>
+      <p:sp>
+        <p:nvSpPr>
+          <p:cNvPr id="21" name="">
+            <a:extLst xmlns:a="http://schemas.openxmlformats.org/drawingml/2006/main">
+              <a:ext uri="{FF2B5EF4-FFF2-40B4-BE49-F238E27FC236}">
+                <a16:creationId xmlns:a16="http://schemas.microsoft.com/office/drawing/2014/main" id="{3212C010-6023-45E3-B997-B52F82844916}"/>
+              </a:ext>
+            </a:extLst>
+          </p:cNvPr>
+          <p:cNvSpPr>
+            <a:spLocks xmlns:a="http://schemas.openxmlformats.org/drawingml/2006/main" noGrp="1"/>
+          </p:cNvSpPr>
+          <p:nvPr/>
+        </p:nvSpPr>
+        <p:spPr>
+          <a:xfrm xmlns:a="http://schemas.openxmlformats.org/drawingml/2006/main">
+            <a:off x="3562350" y="3314700"/>
+            <a:ext cx="171450" cy="228600"/>
+          </a:xfrm>
+          <a:prstGeom xmlns:a="http://schemas.openxmlformats.org/drawingml/2006/main" prst="rect">
+            <a:avLst/>
+          </a:prstGeom>
+          <a:solidFill xmlns:a="http://schemas.openxmlformats.org/drawingml/2006/main">
+            <a:srgbClr val="000000">
+              <a:alpha val="0"/>
+            </a:srgbClr>
+          </a:solidFill>
+          <a:ln xmlns:a="http://schemas.openxmlformats.org/drawingml/2006/main" w="0">
+            <a:solidFill>
+              <a:srgbClr val="000000">
+                <a:alpha val="0"/>
+              </a:srgbClr>
+            </a:solidFill>
+            <a:prstDash val="solid"/>
+          </a:ln>
+        </p:spPr>
+        <p:txBody>
+          <a:bodyPr xmlns:a="http://schemas.openxmlformats.org/drawingml/2006/main" lIns="0" tIns="0" rIns="0" bIns="0" anchor="t"/>
+          <a:lstStyle xmlns:a="http://schemas.openxmlformats.org/drawingml/2006/main"/>
+          <a:p xmlns:a="http://schemas.openxmlformats.org/drawingml/2006/main">
+            <a:pPr algn="l">
+              <a:defRPr sz="1350" b="1">
+                <a:solidFill>
+                  <a:srgbClr val="1F4E79"/>
+                </a:solidFill>
+                <a:latin typeface="Arial"/>
+                <a:ea typeface="Arial"/>
+                <a:cs typeface="Arial"/>
+              </a:defRPr>
+            </a:pPr>
+            <a:r>
+              <a:rPr sz="1350" b="1">
+                <a:solidFill>
+                  <a:srgbClr val="1F4E79"/>
+                </a:solidFill>
+                <a:latin typeface="Arial"/>
+                <a:ea typeface="Arial"/>
+                <a:cs typeface="Arial"/>
+              </a:rPr>
+              <a:t>&gt;</a:t>
+            </a:r>
+          </a:p>
+        </p:txBody>
+      </p:sp>
+      <p:sp>
+        <p:nvSpPr>
+          <p:cNvPr id="22" name="">
+            <a:extLst xmlns:a="http://schemas.openxmlformats.org/drawingml/2006/main">
+              <a:ext uri="{FF2B5EF4-FFF2-40B4-BE49-F238E27FC236}">
+                <a16:creationId xmlns:a16="http://schemas.microsoft.com/office/drawing/2014/main" id="{D16D9076-A545-44FD-B74A-5316B00C6984}"/>
+              </a:ext>
+            </a:extLst>
+          </p:cNvPr>
+          <p:cNvSpPr>
+            <a:spLocks xmlns:a="http://schemas.openxmlformats.org/drawingml/2006/main" noGrp="1"/>
+          </p:cNvSpPr>
+          <p:nvPr/>
+        </p:nvSpPr>
+        <p:spPr>
+          <a:xfrm xmlns:a="http://schemas.openxmlformats.org/drawingml/2006/main">
+            <a:off x="5619750" y="3429000"/>
+            <a:ext cx="552450" cy="15240"/>
+          </a:xfrm>
+          <a:prstGeom xmlns:a="http://schemas.openxmlformats.org/drawingml/2006/main" prst="rect">
+            <a:avLst/>
+          </a:prstGeom>
+          <a:solidFill xmlns:a="http://schemas.openxmlformats.org/drawingml/2006/main">
+            <a:srgbClr val="008C95"/>
+          </a:solidFill>
+          <a:ln xmlns:a="http://schemas.openxmlformats.org/drawingml/2006/main" w="0">
+            <a:solidFill>
+              <a:srgbClr val="000000">
+                <a:alpha val="0"/>
+              </a:srgbClr>
+            </a:solidFill>
+            <a:prstDash val="solid"/>
+          </a:ln>
+        </p:spPr>
+      </p:sp>
+      <p:sp>
+        <p:nvSpPr>
+          <p:cNvPr id="23" name="">
+            <a:extLst xmlns:a="http://schemas.openxmlformats.org/drawingml/2006/main">
+              <a:ext uri="{FF2B5EF4-FFF2-40B4-BE49-F238E27FC236}">
+                <a16:creationId xmlns:a16="http://schemas.microsoft.com/office/drawing/2014/main" id="{426A55BA-6F31-407D-B3BF-42D06DBB5625}"/>
+              </a:ext>
+            </a:extLst>
+          </p:cNvPr>
+          <p:cNvSpPr>
+            <a:spLocks xmlns:a="http://schemas.openxmlformats.org/drawingml/2006/main" noGrp="1"/>
+          </p:cNvSpPr>
+          <p:nvPr/>
+        </p:nvSpPr>
+        <p:spPr>
+          <a:xfrm xmlns:a="http://schemas.openxmlformats.org/drawingml/2006/main">
+            <a:off x="6153150" y="3314700"/>
+            <a:ext cx="171450" cy="228600"/>
+          </a:xfrm>
+          <a:prstGeom xmlns:a="http://schemas.openxmlformats.org/drawingml/2006/main" prst="rect">
+            <a:avLst/>
+          </a:prstGeom>
+          <a:solidFill xmlns:a="http://schemas.openxmlformats.org/drawingml/2006/main">
+            <a:srgbClr val="000000">
+              <a:alpha val="0"/>
+            </a:srgbClr>
+          </a:solidFill>
+          <a:ln xmlns:a="http://schemas.openxmlformats.org/drawingml/2006/main" w="0">
+            <a:solidFill>
+              <a:srgbClr val="000000">
+                <a:alpha val="0"/>
+              </a:srgbClr>
+            </a:solidFill>
+            <a:prstDash val="solid"/>
+          </a:ln>
+        </p:spPr>
+        <p:txBody>
+          <a:bodyPr xmlns:a="http://schemas.openxmlformats.org/drawingml/2006/main" lIns="0" tIns="0" rIns="0" bIns="0" anchor="t"/>
+          <a:lstStyle xmlns:a="http://schemas.openxmlformats.org/drawingml/2006/main"/>
+          <a:p xmlns:a="http://schemas.openxmlformats.org/drawingml/2006/main">
+            <a:pPr algn="l">
+              <a:defRPr sz="1350" b="1">
+                <a:solidFill>
+                  <a:srgbClr val="008C95"/>
+                </a:solidFill>
+                <a:latin typeface="Arial"/>
+                <a:ea typeface="Arial"/>
+                <a:cs typeface="Arial"/>
+              </a:defRPr>
+            </a:pPr>
+            <a:r>
+              <a:rPr sz="1350" b="1">
+                <a:solidFill>
+                  <a:srgbClr val="008C95"/>
+                </a:solidFill>
+                <a:latin typeface="Arial"/>
+                <a:ea typeface="Arial"/>
+                <a:cs typeface="Arial"/>
+              </a:rPr>
+              <a:t>&gt;</a:t>
+            </a:r>
+          </a:p>
+        </p:txBody>
+      </p:sp>
+      <p:sp>
+        <p:nvSpPr>
+          <p:cNvPr id="24" name="">
+            <a:extLst xmlns:a="http://schemas.openxmlformats.org/drawingml/2006/main">
+              <a:ext uri="{FF2B5EF4-FFF2-40B4-BE49-F238E27FC236}">
+                <a16:creationId xmlns:a16="http://schemas.microsoft.com/office/drawing/2014/main" id="{4F301902-F5AA-4D8F-9FE2-E53F4D468767}"/>
+              </a:ext>
+            </a:extLst>
+          </p:cNvPr>
+          <p:cNvSpPr>
+            <a:spLocks xmlns:a="http://schemas.openxmlformats.org/drawingml/2006/main" noGrp="1"/>
+          </p:cNvSpPr>
+          <p:nvPr/>
+        </p:nvSpPr>
+        <p:spPr>
+          <a:xfrm xmlns:a="http://schemas.openxmlformats.org/drawingml/2006/main">
+            <a:off x="8077200" y="3429000"/>
+            <a:ext cx="895350" cy="15240"/>
+          </a:xfrm>
+          <a:prstGeom xmlns:a="http://schemas.openxmlformats.org/drawingml/2006/main" prst="rect">
+            <a:avLst/>
+          </a:prstGeom>
+          <a:solidFill xmlns:a="http://schemas.openxmlformats.org/drawingml/2006/main">
+            <a:srgbClr val="D05A2A"/>
+          </a:solidFill>
+          <a:ln xmlns:a="http://schemas.openxmlformats.org/drawingml/2006/main" w="0">
+            <a:solidFill>
+              <a:srgbClr val="000000">
+                <a:alpha val="0"/>
+              </a:srgbClr>
+            </a:solidFill>
+            <a:prstDash val="solid"/>
+          </a:ln>
+        </p:spPr>
+      </p:sp>
+      <p:sp>
+        <p:nvSpPr>
+          <p:cNvPr id="25" name="">
+            <a:extLst xmlns:a="http://schemas.openxmlformats.org/drawingml/2006/main">
+              <a:ext uri="{FF2B5EF4-FFF2-40B4-BE49-F238E27FC236}">
+                <a16:creationId xmlns:a16="http://schemas.microsoft.com/office/drawing/2014/main" id="{D012BDBB-D369-426F-8052-BEDDE647B768}"/>
+              </a:ext>
+            </a:extLst>
+          </p:cNvPr>
+          <p:cNvSpPr>
+            <a:spLocks xmlns:a="http://schemas.openxmlformats.org/drawingml/2006/main" noGrp="1"/>
+          </p:cNvSpPr>
+          <p:nvPr/>
+        </p:nvSpPr>
+        <p:spPr>
+          <a:xfrm xmlns:a="http://schemas.openxmlformats.org/drawingml/2006/main">
+            <a:off x="8953500" y="3314700"/>
+            <a:ext cx="171450" cy="228600"/>
+          </a:xfrm>
+          <a:prstGeom xmlns:a="http://schemas.openxmlformats.org/drawingml/2006/main" prst="rect">
+            <a:avLst/>
+          </a:prstGeom>
+          <a:solidFill xmlns:a="http://schemas.openxmlformats.org/drawingml/2006/main">
+            <a:srgbClr val="000000">
+              <a:alpha val="0"/>
+            </a:srgbClr>
+          </a:solidFill>
+          <a:ln xmlns:a="http://schemas.openxmlformats.org/drawingml/2006/main" w="0">
+            <a:solidFill>
+              <a:srgbClr val="000000">
+                <a:alpha val="0"/>
+              </a:srgbClr>
+            </a:solidFill>
+            <a:prstDash val="solid"/>
+          </a:ln>
+        </p:spPr>
+        <p:txBody>
+          <a:bodyPr xmlns:a="http://schemas.openxmlformats.org/drawingml/2006/main" lIns="0" tIns="0" rIns="0" bIns="0" anchor="t"/>
+          <a:lstStyle xmlns:a="http://schemas.openxmlformats.org/drawingml/2006/main"/>
+          <a:p xmlns:a="http://schemas.openxmlformats.org/drawingml/2006/main">
+            <a:pPr algn="l">
+              <a:defRPr sz="1350" b="1">
+                <a:solidFill>
+                  <a:srgbClr val="D05A2A"/>
+                </a:solidFill>
+                <a:latin typeface="Arial"/>
+                <a:ea typeface="Arial"/>
+                <a:cs typeface="Arial"/>
+              </a:defRPr>
+            </a:pPr>
+            <a:r>
+              <a:rPr sz="1350" b="1">
+                <a:solidFill>
+                  <a:srgbClr val="D05A2A"/>
+                </a:solidFill>
+                <a:latin typeface="Arial"/>
+                <a:ea typeface="Arial"/>
+                <a:cs typeface="Arial"/>
+              </a:rPr>
+              <a:t>&gt;</a:t>
+            </a:r>
+          </a:p>
+        </p:txBody>
+      </p:sp>
+      <p:sp>
+        <p:nvSpPr>
+          <p:cNvPr id="26" name="">
+            <a:extLst xmlns:a="http://schemas.openxmlformats.org/drawingml/2006/main">
+              <a:ext uri="{FF2B5EF4-FFF2-40B4-BE49-F238E27FC236}">
+                <a16:creationId xmlns:a16="http://schemas.microsoft.com/office/drawing/2014/main" id="{8B73D68D-6A22-45D8-BDCC-22BF5A44D492}"/>
+              </a:ext>
+            </a:extLst>
+          </p:cNvPr>
+          <p:cNvSpPr>
+            <a:spLocks xmlns:a="http://schemas.openxmlformats.org/drawingml/2006/main" noGrp="1"/>
+          </p:cNvSpPr>
+          <p:nvPr/>
+        </p:nvSpPr>
+        <p:spPr>
+          <a:xfrm xmlns:a="http://schemas.openxmlformats.org/drawingml/2006/main">
+            <a:off x="1924050" y="5191125"/>
+            <a:ext cx="8191500" cy="514350"/>
+          </a:xfrm>
+          <a:prstGeom xmlns:a="http://schemas.openxmlformats.org/drawingml/2006/main" prst="rect">
+            <a:avLst/>
+          </a:prstGeom>
+          <a:solidFill xmlns:a="http://schemas.openxmlformats.org/drawingml/2006/main">
+            <a:srgbClr val="000000">
+              <a:alpha val="0"/>
+            </a:srgbClr>
+          </a:solidFill>
+          <a:ln xmlns:a="http://schemas.openxmlformats.org/drawingml/2006/main" w="0">
+            <a:solidFill>
+              <a:srgbClr val="000000">
+                <a:alpha val="0"/>
+              </a:srgbClr>
+            </a:solidFill>
+            <a:prstDash val="solid"/>
+          </a:ln>
+        </p:spPr>
+        <p:txBody>
           <a:bodyPr xmlns:a="http://schemas.openxmlformats.org/drawingml/2006/main" lIns="0" tIns="0" rIns="0" bIns="0" anchor="t"/>
           <a:lstStyle xmlns:a="http://schemas.openxmlformats.org/drawingml/2006/main"/>
           <a:p xmlns:a="http://schemas.openxmlformats.org/drawingml/2006/main">
@@ -6593,9 +6816,9 @@
                 <a:solidFill>
                   <a:srgbClr val="151515"/>
                 </a:solidFill>
-                <a:latin typeface="Aptos"/>
-                <a:ea typeface="Aptos"/>
-                <a:cs typeface="Aptos"/>
+                <a:latin typeface="Arial"/>
+                <a:ea typeface="Arial"/>
+                <a:cs typeface="Arial"/>
               </a:defRPr>
             </a:pPr>
             <a:r>
@@ -6603,9 +6826,9 @@
                 <a:solidFill>
                   <a:srgbClr val="151515"/>
                 </a:solidFill>
-                <a:latin typeface="Aptos"/>
-                <a:ea typeface="Aptos"/>
-                <a:cs typeface="Aptos"/>
+                <a:latin typeface="Arial"/>
+                <a:ea typeface="Arial"/>
+                <a:cs typeface="Arial"/>
               </a:rPr>
               <a:t>measurable current -&gt; forward PNP physics -&gt; PINN surrogate -&gt; posterior uncertainty</a:t>
             </a:r>
@@ -6614,10 +6837,10 @@
       </p:sp>
       <p:sp>
         <p:nvSpPr>
-          <p:cNvPr id="11" name="">
-            <a:extLst xmlns:a="http://schemas.openxmlformats.org/drawingml/2006/main">
-              <a:ext uri="{FF2B5EF4-FFF2-40B4-BE49-F238E27FC236}">
-                <a16:creationId xmlns:a16="http://schemas.microsoft.com/office/drawing/2014/main" id="{F88A8DBC-AB4D-4C66-9ABF-3B6584E3D1FA}"/>
+          <p:cNvPr id="27" name="">
+            <a:extLst xmlns:a="http://schemas.openxmlformats.org/drawingml/2006/main">
+              <a:ext uri="{FF2B5EF4-FFF2-40B4-BE49-F238E27FC236}">
+                <a16:creationId xmlns:a16="http://schemas.microsoft.com/office/drawing/2014/main" id="{5E529F21-D735-48EF-BEDE-2E56C69F6F19}"/>
               </a:ext>
             </a:extLst>
           </p:cNvPr>
@@ -6649,10 +6872,10 @@
       </p:sp>
       <p:sp>
         <p:nvSpPr>
-          <p:cNvPr id="12" name="">
-            <a:extLst xmlns:a="http://schemas.openxmlformats.org/drawingml/2006/main">
-              <a:ext uri="{FF2B5EF4-FFF2-40B4-BE49-F238E27FC236}">
-                <a16:creationId xmlns:a16="http://schemas.microsoft.com/office/drawing/2014/main" id="{2E0931B5-A7F5-4BAF-A2A1-9ACADC5E9792}"/>
+          <p:cNvPr id="28" name="">
+            <a:extLst xmlns:a="http://schemas.openxmlformats.org/drawingml/2006/main">
+              <a:ext uri="{FF2B5EF4-FFF2-40B4-BE49-F238E27FC236}">
+                <a16:creationId xmlns:a16="http://schemas.microsoft.com/office/drawing/2014/main" id="{365B7DC5-7D0D-4DF3-B6EA-62B71F13A47B}"/>
               </a:ext>
             </a:extLst>
           </p:cNvPr>
@@ -6664,7 +6887,7 @@
         <p:spPr>
           <a:xfrm xmlns:a="http://schemas.openxmlformats.org/drawingml/2006/main">
             <a:off x="685800" y="6477000"/>
-            <a:ext cx="6858000" cy="152400"/>
+            <a:ext cx="7239000" cy="152400"/>
           </a:xfrm>
           <a:prstGeom xmlns:a="http://schemas.openxmlformats.org/drawingml/2006/main" prst="rect">
             <a:avLst/>
@@ -6692,9 +6915,9 @@
                 <a:solidFill>
                   <a:srgbClr val="77736D"/>
                 </a:solidFill>
-                <a:latin typeface="Aptos"/>
-                <a:ea typeface="Aptos"/>
-                <a:cs typeface="Aptos"/>
+                <a:latin typeface="Arial"/>
+                <a:ea typeface="Arial"/>
+                <a:cs typeface="Arial"/>
               </a:defRPr>
             </a:pPr>
             <a:r>
@@ -6702,9 +6925,9 @@
                 <a:solidFill>
                   <a:srgbClr val="77736D"/>
                 </a:solidFill>
-                <a:latin typeface="Aptos"/>
-                <a:ea typeface="Aptos"/>
-                <a:cs typeface="Aptos"/>
+                <a:latin typeface="Arial"/>
+                <a:ea typeface="Arial"/>
+                <a:cs typeface="Arial"/>
               </a:rPr>
               <a:t>Talk thesis</a:t>
             </a:r>
@@ -6714,7 +6937,7 @@
     </p:spTree>
     <p:extLst>
       <p:ext uri="{BB962C8B-B14F-4D97-AF65-F5344CB8AC3E}">
-        <p14:creationId xmlns:p14="http://schemas.microsoft.com/office/powerpoint/2010/main" val="1987640780"/>
+        <p14:creationId xmlns:p14="http://schemas.microsoft.com/office/powerpoint/2010/main" val="515072951"/>
       </p:ext>
     </p:extLst>
   </p:cSld>
@@ -6738,7 +6961,7 @@
           <p:cNvPr id="1" name="">
             <a:extLst xmlns:a="http://schemas.openxmlformats.org/drawingml/2006/main">
               <a:ext uri="{FF2B5EF4-FFF2-40B4-BE49-F238E27FC236}">
-                <a16:creationId xmlns:a16="http://schemas.microsoft.com/office/drawing/2014/main" id="{4A398FBA-E6EE-4FF2-A16C-5CD63FADF4DA}"/>
+                <a16:creationId xmlns:a16="http://schemas.microsoft.com/office/drawing/2014/main" id="{56243087-DB03-4B2F-AA43-CA4FDF718285}"/>
               </a:ext>
             </a:extLst>
           </p:cNvPr>
@@ -6773,7 +6996,7 @@
           <p:cNvPr id="2" name="">
             <a:extLst xmlns:a="http://schemas.openxmlformats.org/drawingml/2006/main">
               <a:ext uri="{FF2B5EF4-FFF2-40B4-BE49-F238E27FC236}">
-                <a16:creationId xmlns:a16="http://schemas.microsoft.com/office/drawing/2014/main" id="{75B5BECC-4620-47D2-9A2E-94D0DC4D5B4C}"/>
+                <a16:creationId xmlns:a16="http://schemas.microsoft.com/office/drawing/2014/main" id="{6C8EA1AA-B715-4671-9BCA-851A4FAABCD1}"/>
               </a:ext>
             </a:extLst>
           </p:cNvPr>
@@ -6785,7 +7008,7 @@
         <p:spPr>
           <a:xfrm xmlns:a="http://schemas.openxmlformats.org/drawingml/2006/main">
             <a:off x="685800" y="400050"/>
-            <a:ext cx="4953000" cy="190500"/>
+            <a:ext cx="5143500" cy="190500"/>
           </a:xfrm>
           <a:prstGeom xmlns:a="http://schemas.openxmlformats.org/drawingml/2006/main" prst="rect">
             <a:avLst/>
@@ -6813,9 +7036,9 @@
                 <a:solidFill>
                   <a:srgbClr val="6D6D6D"/>
                 </a:solidFill>
-                <a:latin typeface="Aptos"/>
-                <a:ea typeface="Aptos"/>
-                <a:cs typeface="Aptos"/>
+                <a:latin typeface="Arial"/>
+                <a:ea typeface="Arial"/>
+                <a:cs typeface="Arial"/>
               </a:defRPr>
             </a:pPr>
             <a:r>
@@ -6823,9 +7046,9 @@
                 <a:solidFill>
                   <a:srgbClr val="6D6D6D"/>
                 </a:solidFill>
-                <a:latin typeface="Aptos"/>
-                <a:ea typeface="Aptos"/>
-                <a:cs typeface="Aptos"/>
+                <a:latin typeface="Arial"/>
+                <a:ea typeface="Arial"/>
+                <a:cs typeface="Arial"/>
               </a:rPr>
               <a:t>MOTIVATION</a:t>
             </a:r>
@@ -6837,7 +7060,7 @@
           <p:cNvPr id="3" name="">
             <a:extLst xmlns:a="http://schemas.openxmlformats.org/drawingml/2006/main">
               <a:ext uri="{FF2B5EF4-FFF2-40B4-BE49-F238E27FC236}">
-                <a16:creationId xmlns:a16="http://schemas.microsoft.com/office/drawing/2014/main" id="{CC9B073D-8722-4858-AC75-62A58BDD680A}"/>
+                <a16:creationId xmlns:a16="http://schemas.microsoft.com/office/drawing/2014/main" id="{14A9E0C2-ECDA-48EF-9EA9-AE39A2AF45FA}"/>
               </a:ext>
             </a:extLst>
           </p:cNvPr>
@@ -6877,9 +7100,9 @@
                 <a:solidFill>
                   <a:srgbClr val="6D6D6D"/>
                 </a:solidFill>
-                <a:latin typeface="Aptos"/>
-                <a:ea typeface="Aptos"/>
-                <a:cs typeface="Aptos"/>
+                <a:latin typeface="Arial"/>
+                <a:ea typeface="Arial"/>
+                <a:cs typeface="Arial"/>
               </a:defRPr>
             </a:pPr>
             <a:r>
@@ -6887,9 +7110,9 @@
                 <a:solidFill>
                   <a:srgbClr val="6D6D6D"/>
                 </a:solidFill>
-                <a:latin typeface="Aptos"/>
-                <a:ea typeface="Aptos"/>
-                <a:cs typeface="Aptos"/>
+                <a:latin typeface="Arial"/>
+                <a:ea typeface="Arial"/>
+                <a:cs typeface="Arial"/>
               </a:rPr>
               <a:t>03</a:t>
             </a:r>
@@ -6901,7 +7124,7 @@
           <p:cNvPr id="4" name="">
             <a:extLst xmlns:a="http://schemas.openxmlformats.org/drawingml/2006/main">
               <a:ext uri="{FF2B5EF4-FFF2-40B4-BE49-F238E27FC236}">
-                <a16:creationId xmlns:a16="http://schemas.microsoft.com/office/drawing/2014/main" id="{C3EF9CE3-FAB0-4AB2-ABCB-B3CEA4E6B4B6}"/>
+                <a16:creationId xmlns:a16="http://schemas.microsoft.com/office/drawing/2014/main" id="{BF35B9E6-4564-4AAB-897B-8E6FB71410D3}"/>
               </a:ext>
             </a:extLst>
           </p:cNvPr>
@@ -6936,7 +7159,7 @@
           <p:cNvPr id="5" name="">
             <a:extLst xmlns:a="http://schemas.openxmlformats.org/drawingml/2006/main">
               <a:ext uri="{FF2B5EF4-FFF2-40B4-BE49-F238E27FC236}">
-                <a16:creationId xmlns:a16="http://schemas.microsoft.com/office/drawing/2014/main" id="{E26F5133-2C28-4314-A576-9D0C42C9FF51}"/>
+                <a16:creationId xmlns:a16="http://schemas.microsoft.com/office/drawing/2014/main" id="{1E795FFD-86EB-4C45-9625-A9679F91BA6C}"/>
               </a:ext>
             </a:extLst>
           </p:cNvPr>
@@ -6971,7 +7194,7 @@
           <p:cNvPr id="6" name="">
             <a:extLst xmlns:a="http://schemas.openxmlformats.org/drawingml/2006/main">
               <a:ext uri="{FF2B5EF4-FFF2-40B4-BE49-F238E27FC236}">
-                <a16:creationId xmlns:a16="http://schemas.microsoft.com/office/drawing/2014/main" id="{D0CDC5B6-339C-4FD5-9B84-D03298150376}"/>
+                <a16:creationId xmlns:a16="http://schemas.microsoft.com/office/drawing/2014/main" id="{85717DDE-E34D-4BE5-9423-791CC022B213}"/>
               </a:ext>
             </a:extLst>
           </p:cNvPr>
@@ -6983,7 +7206,7 @@
         <p:spPr>
           <a:xfrm xmlns:a="http://schemas.openxmlformats.org/drawingml/2006/main">
             <a:off x="685800" y="990600"/>
-            <a:ext cx="10287000" cy="838200"/>
+            <a:ext cx="10096500" cy="838200"/>
           </a:xfrm>
           <a:prstGeom xmlns:a="http://schemas.openxmlformats.org/drawingml/2006/main" prst="rect">
             <a:avLst/>
@@ -7011,9 +7234,9 @@
                 <a:solidFill>
                   <a:srgbClr val="151515"/>
                 </a:solidFill>
-                <a:latin typeface="Aptos Display"/>
-                <a:ea typeface="Aptos Display"/>
-                <a:cs typeface="Aptos Display"/>
+                <a:latin typeface="Arial"/>
+                <a:ea typeface="Arial"/>
+                <a:cs typeface="Arial"/>
               </a:defRPr>
             </a:pPr>
             <a:r>
@@ -7021,9 +7244,9 @@
                 <a:solidFill>
                   <a:srgbClr val="151515"/>
                 </a:solidFill>
-                <a:latin typeface="Aptos Display"/>
-                <a:ea typeface="Aptos Display"/>
-                <a:cs typeface="Aptos Display"/>
+                <a:latin typeface="Arial"/>
+                <a:ea typeface="Arial"/>
+                <a:cs typeface="Arial"/>
               </a:rPr>
               <a:t>The inverse problem must start from what the experiment measures.</a:t>
             </a:r>
@@ -7035,19 +7258,19 @@
           <p:cNvPr id="7" name="">
             <a:extLst xmlns:a="http://schemas.openxmlformats.org/drawingml/2006/main">
               <a:ext uri="{FF2B5EF4-FFF2-40B4-BE49-F238E27FC236}">
-                <a16:creationId xmlns:a16="http://schemas.microsoft.com/office/drawing/2014/main" id="{BCEEFA7E-EC3C-4855-BBF6-6661D41CAD94}"/>
-              </a:ext>
-            </a:extLst>
-          </p:cNvPr>
-          <p:cNvSpPr>
-            <a:spLocks xmlns:a="http://schemas.openxmlformats.org/drawingml/2006/main" noGrp="1"/>
-          </p:cNvSpPr>
-          <p:nvPr/>
-        </p:nvSpPr>
-        <p:spPr>
-          <a:xfrm xmlns:a="http://schemas.openxmlformats.org/drawingml/2006/main">
-            <a:off x="704850" y="1866900"/>
-            <a:ext cx="9144000" cy="419100"/>
+                <a16:creationId xmlns:a16="http://schemas.microsoft.com/office/drawing/2014/main" id="{39555782-30BC-48E4-A9FA-50B1CCC60BE9}"/>
+              </a:ext>
+            </a:extLst>
+          </p:cNvPr>
+          <p:cNvSpPr>
+            <a:spLocks xmlns:a="http://schemas.openxmlformats.org/drawingml/2006/main" noGrp="1"/>
+          </p:cNvSpPr>
+          <p:nvPr/>
+        </p:nvSpPr>
+        <p:spPr>
+          <a:xfrm xmlns:a="http://schemas.openxmlformats.org/drawingml/2006/main">
+            <a:off x="704850" y="1885950"/>
+            <a:ext cx="9334500" cy="419100"/>
           </a:xfrm>
           <a:prstGeom xmlns:a="http://schemas.openxmlformats.org/drawingml/2006/main" prst="rect">
             <a:avLst/>
@@ -7075,9 +7298,9 @@
                 <a:solidFill>
                   <a:srgbClr val="6D6D6D"/>
                 </a:solidFill>
-                <a:latin typeface="Aptos"/>
-                <a:ea typeface="Aptos"/>
-                <a:cs typeface="Aptos"/>
+                <a:latin typeface="Arial"/>
+                <a:ea typeface="Arial"/>
+                <a:cs typeface="Arial"/>
               </a:defRPr>
             </a:pPr>
             <a:r>
@@ -7085,9 +7308,9 @@
                 <a:solidFill>
                   <a:srgbClr val="6D6D6D"/>
                 </a:solidFill>
-                <a:latin typeface="Aptos"/>
-                <a:ea typeface="Aptos"/>
-                <a:cs typeface="Aptos"/>
+                <a:latin typeface="Arial"/>
+                <a:ea typeface="Arial"/>
+                <a:cs typeface="Arial"/>
               </a:rPr>
               <a:t>The PINN may predict fields, but the likelihood should be built from current.</a:t>
             </a:r>
@@ -7099,7 +7322,7 @@
           <p:cNvPr id="8" name="">
             <a:extLst xmlns:a="http://schemas.openxmlformats.org/drawingml/2006/main">
               <a:ext uri="{FF2B5EF4-FFF2-40B4-BE49-F238E27FC236}">
-                <a16:creationId xmlns:a16="http://schemas.microsoft.com/office/drawing/2014/main" id="{EB45F490-0753-410A-AB1E-EAEE3DF5A4AC}"/>
+                <a16:creationId xmlns:a16="http://schemas.microsoft.com/office/drawing/2014/main" id="{633D9B21-FDE0-49FB-A118-DC8F3E0BE7BE}"/>
               </a:ext>
             </a:extLst>
           </p:cNvPr>
@@ -7132,7 +7355,7 @@
           <p:cNvPr id="9" name="">
             <a:extLst xmlns:a="http://schemas.openxmlformats.org/drawingml/2006/main">
               <a:ext uri="{FF2B5EF4-FFF2-40B4-BE49-F238E27FC236}">
-                <a16:creationId xmlns:a16="http://schemas.microsoft.com/office/drawing/2014/main" id="{17A7080E-58D3-49C3-A4A1-F7B1534751DC}"/>
+                <a16:creationId xmlns:a16="http://schemas.microsoft.com/office/drawing/2014/main" id="{4D5162BF-CBDB-4DDE-8F2C-0B740B5DA18C}"/>
               </a:ext>
             </a:extLst>
           </p:cNvPr>
@@ -7172,9 +7395,9 @@
                 <a:solidFill>
                   <a:srgbClr val="6D6D6D"/>
                 </a:solidFill>
-                <a:latin typeface="Aptos"/>
-                <a:ea typeface="Aptos"/>
-                <a:cs typeface="Aptos"/>
+                <a:latin typeface="Arial"/>
+                <a:ea typeface="Arial"/>
+                <a:cs typeface="Arial"/>
               </a:defRPr>
             </a:pPr>
             <a:r>
@@ -7182,9 +7405,9 @@
                 <a:solidFill>
                   <a:srgbClr val="6D6D6D"/>
                 </a:solidFill>
-                <a:latin typeface="Aptos"/>
-                <a:ea typeface="Aptos"/>
-                <a:cs typeface="Aptos"/>
+                <a:latin typeface="Arial"/>
+                <a:ea typeface="Arial"/>
+                <a:cs typeface="Arial"/>
               </a:rPr>
               <a:t>Hidden state</a:t>
             </a:r>
@@ -7196,7 +7419,7 @@
           <p:cNvPr id="10" name="">
             <a:extLst xmlns:a="http://schemas.openxmlformats.org/drawingml/2006/main">
               <a:ext uri="{FF2B5EF4-FFF2-40B4-BE49-F238E27FC236}">
-                <a16:creationId xmlns:a16="http://schemas.microsoft.com/office/drawing/2014/main" id="{8BEDB486-5F01-4281-A7F0-0888E174FE1B}"/>
+                <a16:creationId xmlns:a16="http://schemas.microsoft.com/office/drawing/2014/main" id="{0455DE83-3E4D-4B3F-B360-3E6A9BB398BE}"/>
               </a:ext>
             </a:extLst>
           </p:cNvPr>
@@ -7236,9 +7459,9 @@
                 <a:solidFill>
                   <a:srgbClr val="2B2B2B"/>
                 </a:solidFill>
-                <a:latin typeface="Aptos"/>
-                <a:ea typeface="Aptos"/>
-                <a:cs typeface="Aptos"/>
+                <a:latin typeface="Arial"/>
+                <a:ea typeface="Arial"/>
+                <a:cs typeface="Arial"/>
               </a:defRPr>
             </a:pPr>
             <a:r>
@@ -7246,9 +7469,9 @@
                 <a:solidFill>
                   <a:srgbClr val="2B2B2B"/>
                 </a:solidFill>
-                <a:latin typeface="Aptos"/>
-                <a:ea typeface="Aptos"/>
-                <a:cs typeface="Aptos"/>
+                <a:latin typeface="Arial"/>
+                <a:ea typeface="Arial"/>
+                <a:cs typeface="Arial"/>
               </a:rPr>
               <a:t>cp(x,t), cn(x,t), phi(x,t)</a:t>
             </a:r>
@@ -7260,7 +7483,7 @@
           <p:cNvPr id="11" name="">
             <a:extLst xmlns:a="http://schemas.openxmlformats.org/drawingml/2006/main">
               <a:ext uri="{FF2B5EF4-FFF2-40B4-BE49-F238E27FC236}">
-                <a16:creationId xmlns:a16="http://schemas.microsoft.com/office/drawing/2014/main" id="{1ECF7E83-F378-40DC-B3F1-12E44320E35E}"/>
+                <a16:creationId xmlns:a16="http://schemas.microsoft.com/office/drawing/2014/main" id="{767F50CD-F7F6-4795-BEC1-C2E56A51F7B5}"/>
               </a:ext>
             </a:extLst>
           </p:cNvPr>
@@ -7300,9 +7523,9 @@
                 <a:solidFill>
                   <a:srgbClr val="6D6D6D"/>
                 </a:solidFill>
-                <a:latin typeface="Aptos"/>
-                <a:ea typeface="Aptos"/>
-                <a:cs typeface="Aptos"/>
+                <a:latin typeface="Arial"/>
+                <a:ea typeface="Arial"/>
+                <a:cs typeface="Arial"/>
               </a:defRPr>
             </a:pPr>
             <a:r>
@@ -7310,9 +7533,9 @@
                 <a:solidFill>
                   <a:srgbClr val="6D6D6D"/>
                 </a:solidFill>
-                <a:latin typeface="Aptos"/>
-                <a:ea typeface="Aptos"/>
-                <a:cs typeface="Aptos"/>
+                <a:latin typeface="Arial"/>
+                <a:ea typeface="Arial"/>
+                <a:cs typeface="Arial"/>
               </a:rPr>
               <a:t>useful for validation</a:t>
             </a:r>
@@ -7324,7 +7547,7 @@
           <p:cNvPr id="12" name="">
             <a:extLst xmlns:a="http://schemas.openxmlformats.org/drawingml/2006/main">
               <a:ext uri="{FF2B5EF4-FFF2-40B4-BE49-F238E27FC236}">
-                <a16:creationId xmlns:a16="http://schemas.microsoft.com/office/drawing/2014/main" id="{B6024048-7683-4699-BF78-73C5260ED6E3}"/>
+                <a16:creationId xmlns:a16="http://schemas.microsoft.com/office/drawing/2014/main" id="{DEDFD255-A535-487F-AB43-B5E985788BFE}"/>
               </a:ext>
             </a:extLst>
           </p:cNvPr>
@@ -7357,7 +7580,7 @@
           <p:cNvPr id="13" name="">
             <a:extLst xmlns:a="http://schemas.openxmlformats.org/drawingml/2006/main">
               <a:ext uri="{FF2B5EF4-FFF2-40B4-BE49-F238E27FC236}">
-                <a16:creationId xmlns:a16="http://schemas.microsoft.com/office/drawing/2014/main" id="{3E819C48-122B-4DEF-8055-62F74C04C272}"/>
+                <a16:creationId xmlns:a16="http://schemas.microsoft.com/office/drawing/2014/main" id="{A5BB93E3-6ED6-46AB-B872-E746AD089392}"/>
               </a:ext>
             </a:extLst>
           </p:cNvPr>
@@ -7392,7 +7615,7 @@
           <p:cNvPr id="14" name="">
             <a:extLst xmlns:a="http://schemas.openxmlformats.org/drawingml/2006/main">
               <a:ext uri="{FF2B5EF4-FFF2-40B4-BE49-F238E27FC236}">
-                <a16:creationId xmlns:a16="http://schemas.microsoft.com/office/drawing/2014/main" id="{F53E52CA-15AF-4AFD-B6FC-79492A4D429B}"/>
+                <a16:creationId xmlns:a16="http://schemas.microsoft.com/office/drawing/2014/main" id="{664C1D4F-FF95-46E8-B5D6-699C1DD8F151}"/>
               </a:ext>
             </a:extLst>
           </p:cNvPr>
@@ -7432,9 +7655,9 @@
                 <a:solidFill>
                   <a:srgbClr val="008C95"/>
                 </a:solidFill>
-                <a:latin typeface="Aptos"/>
-                <a:ea typeface="Aptos"/>
-                <a:cs typeface="Aptos"/>
+                <a:latin typeface="Arial"/>
+                <a:ea typeface="Arial"/>
+                <a:cs typeface="Arial"/>
               </a:defRPr>
             </a:pPr>
             <a:r>
@@ -7442,9 +7665,9 @@
                 <a:solidFill>
                   <a:srgbClr val="008C95"/>
                 </a:solidFill>
-                <a:latin typeface="Aptos"/>
-                <a:ea typeface="Aptos"/>
-                <a:cs typeface="Aptos"/>
+                <a:latin typeface="Arial"/>
+                <a:ea typeface="Arial"/>
+                <a:cs typeface="Arial"/>
               </a:rPr>
               <a:t>Measured signal</a:t>
             </a:r>
@@ -7456,7 +7679,7 @@
           <p:cNvPr id="15" name="">
             <a:extLst xmlns:a="http://schemas.openxmlformats.org/drawingml/2006/main">
               <a:ext uri="{FF2B5EF4-FFF2-40B4-BE49-F238E27FC236}">
-                <a16:creationId xmlns:a16="http://schemas.microsoft.com/office/drawing/2014/main" id="{79597CCB-FAA2-4DBA-B716-6D921F10D225}"/>
+                <a16:creationId xmlns:a16="http://schemas.microsoft.com/office/drawing/2014/main" id="{F7EFD750-CE4A-468C-8C9E-BD40229B16A4}"/>
               </a:ext>
             </a:extLst>
           </p:cNvPr>
@@ -7496,9 +7719,9 @@
                 <a:solidFill>
                   <a:srgbClr val="008C95"/>
                 </a:solidFill>
-                <a:latin typeface="Aptos"/>
-                <a:ea typeface="Aptos"/>
-                <a:cs typeface="Aptos"/>
+                <a:latin typeface="Arial"/>
+                <a:ea typeface="Arial"/>
+                <a:cs typeface="Arial"/>
               </a:defRPr>
             </a:pPr>
             <a:r>
@@ -7506,9 +7729,9 @@
                 <a:solidFill>
                   <a:srgbClr val="008C95"/>
                 </a:solidFill>
-                <a:latin typeface="Aptos"/>
-                <a:ea typeface="Aptos"/>
-                <a:cs typeface="Aptos"/>
+                <a:latin typeface="Arial"/>
+                <a:ea typeface="Arial"/>
+                <a:cs typeface="Arial"/>
               </a:rPr>
               <a:t>electrode current I(t)</a:t>
             </a:r>
@@ -7520,7 +7743,7 @@
           <p:cNvPr id="16" name="">
             <a:extLst xmlns:a="http://schemas.openxmlformats.org/drawingml/2006/main">
               <a:ext uri="{FF2B5EF4-FFF2-40B4-BE49-F238E27FC236}">
-                <a16:creationId xmlns:a16="http://schemas.microsoft.com/office/drawing/2014/main" id="{2BB76393-48D4-4A4B-BA6A-9404A42CB8EE}"/>
+                <a16:creationId xmlns:a16="http://schemas.microsoft.com/office/drawing/2014/main" id="{797A7FE6-E999-4915-80C5-0B3C30D981DD}"/>
               </a:ext>
             </a:extLst>
           </p:cNvPr>
@@ -7560,9 +7783,9 @@
                 <a:solidFill>
                   <a:srgbClr val="6D6D6D"/>
                 </a:solidFill>
-                <a:latin typeface="Aptos"/>
-                <a:ea typeface="Aptos"/>
-                <a:cs typeface="Aptos"/>
+                <a:latin typeface="Arial"/>
+                <a:ea typeface="Arial"/>
+                <a:cs typeface="Arial"/>
               </a:defRPr>
             </a:pPr>
             <a:r>
@@ -7570,9 +7793,9 @@
                 <a:solidFill>
                   <a:srgbClr val="6D6D6D"/>
                 </a:solidFill>
-                <a:latin typeface="Aptos"/>
-                <a:ea typeface="Aptos"/>
-                <a:cs typeface="Aptos"/>
+                <a:latin typeface="Arial"/>
+                <a:ea typeface="Arial"/>
+                <a:cs typeface="Arial"/>
               </a:rPr>
               <a:t>used for inference</a:t>
             </a:r>
@@ -7584,7 +7807,7 @@
           <p:cNvPr id="17" name="">
             <a:extLst xmlns:a="http://schemas.openxmlformats.org/drawingml/2006/main">
               <a:ext uri="{FF2B5EF4-FFF2-40B4-BE49-F238E27FC236}">
-                <a16:creationId xmlns:a16="http://schemas.microsoft.com/office/drawing/2014/main" id="{6FCC4445-8C5D-4F04-B6CA-804D97E19ADD}"/>
+                <a16:creationId xmlns:a16="http://schemas.microsoft.com/office/drawing/2014/main" id="{DEA6665E-3477-46F2-8154-EE44076F3F1D}"/>
               </a:ext>
             </a:extLst>
           </p:cNvPr>
@@ -7619,19 +7842,19 @@
           <p:cNvPr id="18" name="">
             <a:extLst xmlns:a="http://schemas.openxmlformats.org/drawingml/2006/main">
               <a:ext uri="{FF2B5EF4-FFF2-40B4-BE49-F238E27FC236}">
-                <a16:creationId xmlns:a16="http://schemas.microsoft.com/office/drawing/2014/main" id="{5741C196-5CE9-4CCD-A3CE-0ED34C30F1B8}"/>
-              </a:ext>
-            </a:extLst>
-          </p:cNvPr>
-          <p:cNvSpPr>
-            <a:spLocks xmlns:a="http://schemas.openxmlformats.org/drawingml/2006/main" noGrp="1"/>
-          </p:cNvSpPr>
-          <p:nvPr/>
-        </p:nvSpPr>
-        <p:spPr>
-          <a:xfrm xmlns:a="http://schemas.openxmlformats.org/drawingml/2006/main">
-            <a:off x="3505200" y="5286375"/>
-            <a:ext cx="5543550" cy="342900"/>
+                <a16:creationId xmlns:a16="http://schemas.microsoft.com/office/drawing/2014/main" id="{D52DEFFB-2C83-4E55-95E8-8A76AFBBE1F1}"/>
+              </a:ext>
+            </a:extLst>
+          </p:cNvPr>
+          <p:cNvSpPr>
+            <a:spLocks xmlns:a="http://schemas.openxmlformats.org/drawingml/2006/main" noGrp="1"/>
+          </p:cNvSpPr>
+          <p:nvPr/>
+        </p:nvSpPr>
+        <p:spPr>
+          <a:xfrm xmlns:a="http://schemas.openxmlformats.org/drawingml/2006/main">
+            <a:off x="3524250" y="5286375"/>
+            <a:ext cx="5524500" cy="381000"/>
           </a:xfrm>
           <a:prstGeom xmlns:a="http://schemas.openxmlformats.org/drawingml/2006/main" prst="rect">
             <a:avLst/>
@@ -7659,9 +7882,9 @@
                 <a:solidFill>
                   <a:srgbClr val="2B2B2B"/>
                 </a:solidFill>
-                <a:latin typeface="Aptos"/>
-                <a:ea typeface="Aptos"/>
-                <a:cs typeface="Aptos"/>
+                <a:latin typeface="Arial"/>
+                <a:ea typeface="Arial"/>
+                <a:cs typeface="Arial"/>
               </a:defRPr>
             </a:pPr>
             <a:r>
@@ -7669,9 +7892,9 @@
                 <a:solidFill>
                   <a:srgbClr val="2B2B2B"/>
                 </a:solidFill>
-                <a:latin typeface="Aptos"/>
-                <a:ea typeface="Aptos"/>
-                <a:cs typeface="Aptos"/>
+                <a:latin typeface="Arial"/>
+                <a:ea typeface="Arial"/>
+                <a:cs typeface="Arial"/>
               </a:rPr>
               <a:t>Unknowns: Dp and Dn.</a:t>
             </a:r>
@@ -7683,18 +7906,18 @@
           <p:cNvPr id="19" name="">
             <a:extLst xmlns:a="http://schemas.openxmlformats.org/drawingml/2006/main">
               <a:ext uri="{FF2B5EF4-FFF2-40B4-BE49-F238E27FC236}">
-                <a16:creationId xmlns:a16="http://schemas.microsoft.com/office/drawing/2014/main" id="{DB13FCD7-F578-4831-9763-DA7F49646CC4}"/>
-              </a:ext>
-            </a:extLst>
-          </p:cNvPr>
-          <p:cNvSpPr>
-            <a:spLocks xmlns:a="http://schemas.openxmlformats.org/drawingml/2006/main" noGrp="1"/>
-          </p:cNvSpPr>
-          <p:nvPr/>
-        </p:nvSpPr>
-        <p:spPr>
-          <a:xfrm xmlns:a="http://schemas.openxmlformats.org/drawingml/2006/main">
-            <a:off x="3333750" y="5724525"/>
+                <a16:creationId xmlns:a16="http://schemas.microsoft.com/office/drawing/2014/main" id="{A910593D-ACBB-4BA6-9118-CDBE11093F90}"/>
+              </a:ext>
+            </a:extLst>
+          </p:cNvPr>
+          <p:cNvSpPr>
+            <a:spLocks xmlns:a="http://schemas.openxmlformats.org/drawingml/2006/main" noGrp="1"/>
+          </p:cNvSpPr>
+          <p:nvPr/>
+        </p:nvSpPr>
+        <p:spPr>
+          <a:xfrm xmlns:a="http://schemas.openxmlformats.org/drawingml/2006/main">
+            <a:off x="3333750" y="5762625"/>
             <a:ext cx="47625" cy="47625"/>
           </a:xfrm>
           <a:prstGeom xmlns:a="http://schemas.openxmlformats.org/drawingml/2006/main" prst="rect">
@@ -7718,19 +7941,19 @@
           <p:cNvPr id="20" name="">
             <a:extLst xmlns:a="http://schemas.openxmlformats.org/drawingml/2006/main">
               <a:ext uri="{FF2B5EF4-FFF2-40B4-BE49-F238E27FC236}">
-                <a16:creationId xmlns:a16="http://schemas.microsoft.com/office/drawing/2014/main" id="{D3F17EEC-76EF-4E35-98EB-65BEC6969CB4}"/>
-              </a:ext>
-            </a:extLst>
-          </p:cNvPr>
-          <p:cNvSpPr>
-            <a:spLocks xmlns:a="http://schemas.openxmlformats.org/drawingml/2006/main" noGrp="1"/>
-          </p:cNvSpPr>
-          <p:nvPr/>
-        </p:nvSpPr>
-        <p:spPr>
-          <a:xfrm xmlns:a="http://schemas.openxmlformats.org/drawingml/2006/main">
-            <a:off x="3505200" y="5629275"/>
-            <a:ext cx="5543550" cy="342900"/>
+                <a16:creationId xmlns:a16="http://schemas.microsoft.com/office/drawing/2014/main" id="{6CD26BD6-7E93-4360-8FF1-A1759C0F62FF}"/>
+              </a:ext>
+            </a:extLst>
+          </p:cNvPr>
+          <p:cNvSpPr>
+            <a:spLocks xmlns:a="http://schemas.openxmlformats.org/drawingml/2006/main" noGrp="1"/>
+          </p:cNvSpPr>
+          <p:nvPr/>
+        </p:nvSpPr>
+        <p:spPr>
+          <a:xfrm xmlns:a="http://schemas.openxmlformats.org/drawingml/2006/main">
+            <a:off x="3524250" y="5667375"/>
+            <a:ext cx="5524500" cy="381000"/>
           </a:xfrm>
           <a:prstGeom xmlns:a="http://schemas.openxmlformats.org/drawingml/2006/main" prst="rect">
             <a:avLst/>
@@ -7758,9 +7981,9 @@
                 <a:solidFill>
                   <a:srgbClr val="2B2B2B"/>
                 </a:solidFill>
-                <a:latin typeface="Aptos"/>
-                <a:ea typeface="Aptos"/>
-                <a:cs typeface="Aptos"/>
+                <a:latin typeface="Arial"/>
+                <a:ea typeface="Arial"/>
+                <a:cs typeface="Arial"/>
               </a:defRPr>
             </a:pPr>
             <a:r>
@@ -7768,9 +7991,9 @@
                 <a:solidFill>
                   <a:srgbClr val="2B2B2B"/>
                 </a:solidFill>
-                <a:latin typeface="Aptos"/>
-                <a:ea typeface="Aptos"/>
-                <a:cs typeface="Aptos"/>
+                <a:latin typeface="Arial"/>
+                <a:ea typeface="Arial"/>
+                <a:cs typeface="Arial"/>
               </a:rPr>
               <a:t>Data: noisy current observations.</a:t>
             </a:r>
@@ -7782,7 +8005,7 @@
           <p:cNvPr id="21" name="">
             <a:extLst xmlns:a="http://schemas.openxmlformats.org/drawingml/2006/main">
               <a:ext uri="{FF2B5EF4-FFF2-40B4-BE49-F238E27FC236}">
-                <a16:creationId xmlns:a16="http://schemas.microsoft.com/office/drawing/2014/main" id="{7CBA4BFF-C1A7-4E53-9BF5-427B16631850}"/>
+                <a16:creationId xmlns:a16="http://schemas.microsoft.com/office/drawing/2014/main" id="{46C6B35A-5AE1-40D8-A491-DE84EBF624B7}"/>
               </a:ext>
             </a:extLst>
           </p:cNvPr>
@@ -7817,7 +8040,7 @@
           <p:cNvPr id="22" name="">
             <a:extLst xmlns:a="http://schemas.openxmlformats.org/drawingml/2006/main">
               <a:ext uri="{FF2B5EF4-FFF2-40B4-BE49-F238E27FC236}">
-                <a16:creationId xmlns:a16="http://schemas.microsoft.com/office/drawing/2014/main" id="{944BA525-1C7A-4278-8AAE-96E654DF8470}"/>
+                <a16:creationId xmlns:a16="http://schemas.microsoft.com/office/drawing/2014/main" id="{99C660E6-F762-449D-8EF6-5E25C81D9811}"/>
               </a:ext>
             </a:extLst>
           </p:cNvPr>
@@ -7829,7 +8052,7 @@
         <p:spPr>
           <a:xfrm xmlns:a="http://schemas.openxmlformats.org/drawingml/2006/main">
             <a:off x="685800" y="6477000"/>
-            <a:ext cx="6858000" cy="152400"/>
+            <a:ext cx="7239000" cy="152400"/>
           </a:xfrm>
           <a:prstGeom xmlns:a="http://schemas.openxmlformats.org/drawingml/2006/main" prst="rect">
             <a:avLst/>
@@ -7857,9 +8080,9 @@
                 <a:solidFill>
                   <a:srgbClr val="77736D"/>
                 </a:solidFill>
-                <a:latin typeface="Aptos"/>
-                <a:ea typeface="Aptos"/>
-                <a:cs typeface="Aptos"/>
+                <a:latin typeface="Arial"/>
+                <a:ea typeface="Arial"/>
+                <a:cs typeface="Arial"/>
               </a:defRPr>
             </a:pPr>
             <a:r>
@@ -7867,9 +8090,9 @@
                 <a:solidFill>
                   <a:srgbClr val="77736D"/>
                 </a:solidFill>
-                <a:latin typeface="Aptos"/>
-                <a:ea typeface="Aptos"/>
-                <a:cs typeface="Aptos"/>
+                <a:latin typeface="Arial"/>
+                <a:ea typeface="Arial"/>
+                <a:cs typeface="Arial"/>
               </a:rPr>
               <a:t>Observation model</a:t>
             </a:r>
@@ -7879,7 +8102,7 @@
     </p:spTree>
     <p:extLst>
       <p:ext uri="{BB962C8B-B14F-4D97-AF65-F5344CB8AC3E}">
-        <p14:creationId xmlns:p14="http://schemas.microsoft.com/office/powerpoint/2010/main" val="460794241"/>
+        <p14:creationId xmlns:p14="http://schemas.microsoft.com/office/powerpoint/2010/main" val="1643272969"/>
       </p:ext>
     </p:extLst>
   </p:cSld>
@@ -7903,7 +8126,7 @@
           <p:cNvPr id="1" name="">
             <a:extLst xmlns:a="http://schemas.openxmlformats.org/drawingml/2006/main">
               <a:ext uri="{FF2B5EF4-FFF2-40B4-BE49-F238E27FC236}">
-                <a16:creationId xmlns:a16="http://schemas.microsoft.com/office/drawing/2014/main" id="{45E5037C-B778-443C-8D78-1F5688B5106B}"/>
+                <a16:creationId xmlns:a16="http://schemas.microsoft.com/office/drawing/2014/main" id="{1DE1D4C7-175E-4D52-B952-FC129ABD0C2E}"/>
               </a:ext>
             </a:extLst>
           </p:cNvPr>
@@ -7938,7 +8161,7 @@
           <p:cNvPr id="2" name="">
             <a:extLst xmlns:a="http://schemas.openxmlformats.org/drawingml/2006/main">
               <a:ext uri="{FF2B5EF4-FFF2-40B4-BE49-F238E27FC236}">
-                <a16:creationId xmlns:a16="http://schemas.microsoft.com/office/drawing/2014/main" id="{AAF45B06-029B-4291-B9AA-5B5C61A25A6B}"/>
+                <a16:creationId xmlns:a16="http://schemas.microsoft.com/office/drawing/2014/main" id="{71EC682B-ED2C-4D51-A845-144BB9096ACF}"/>
               </a:ext>
             </a:extLst>
           </p:cNvPr>
@@ -7950,7 +8173,7 @@
         <p:spPr>
           <a:xfrm xmlns:a="http://schemas.openxmlformats.org/drawingml/2006/main">
             <a:off x="685800" y="400050"/>
-            <a:ext cx="4953000" cy="190500"/>
+            <a:ext cx="5143500" cy="190500"/>
           </a:xfrm>
           <a:prstGeom xmlns:a="http://schemas.openxmlformats.org/drawingml/2006/main" prst="rect">
             <a:avLst/>
@@ -7978,9 +8201,9 @@
                 <a:solidFill>
                   <a:srgbClr val="6D6D6D"/>
                 </a:solidFill>
-                <a:latin typeface="Aptos"/>
-                <a:ea typeface="Aptos"/>
-                <a:cs typeface="Aptos"/>
+                <a:latin typeface="Arial"/>
+                <a:ea typeface="Arial"/>
+                <a:cs typeface="Arial"/>
               </a:defRPr>
             </a:pPr>
             <a:r>
@@ -7988,9 +8211,9 @@
                 <a:solidFill>
                   <a:srgbClr val="6D6D6D"/>
                 </a:solidFill>
-                <a:latin typeface="Aptos"/>
-                <a:ea typeface="Aptos"/>
-                <a:cs typeface="Aptos"/>
+                <a:latin typeface="Arial"/>
+                <a:ea typeface="Arial"/>
+                <a:cs typeface="Arial"/>
               </a:rPr>
               <a:t>FORWARD MODEL</a:t>
             </a:r>
@@ -8002,7 +8225,7 @@
           <p:cNvPr id="3" name="">
             <a:extLst xmlns:a="http://schemas.openxmlformats.org/drawingml/2006/main">
               <a:ext uri="{FF2B5EF4-FFF2-40B4-BE49-F238E27FC236}">
-                <a16:creationId xmlns:a16="http://schemas.microsoft.com/office/drawing/2014/main" id="{74E5C132-C494-4E7D-8FA9-8DBDDDC62B3B}"/>
+                <a16:creationId xmlns:a16="http://schemas.microsoft.com/office/drawing/2014/main" id="{81A99EE4-5ABD-445C-A912-516E3D37475A}"/>
               </a:ext>
             </a:extLst>
           </p:cNvPr>
@@ -8042,9 +8265,9 @@
                 <a:solidFill>
                   <a:srgbClr val="6D6D6D"/>
                 </a:solidFill>
-                <a:latin typeface="Aptos"/>
-                <a:ea typeface="Aptos"/>
-                <a:cs typeface="Aptos"/>
+                <a:latin typeface="Arial"/>
+                <a:ea typeface="Arial"/>
+                <a:cs typeface="Arial"/>
               </a:defRPr>
             </a:pPr>
             <a:r>
@@ -8052,9 +8275,9 @@
                 <a:solidFill>
                   <a:srgbClr val="6D6D6D"/>
                 </a:solidFill>
-                <a:latin typeface="Aptos"/>
-                <a:ea typeface="Aptos"/>
-                <a:cs typeface="Aptos"/>
+                <a:latin typeface="Arial"/>
+                <a:ea typeface="Arial"/>
+                <a:cs typeface="Arial"/>
               </a:rPr>
               <a:t>04</a:t>
             </a:r>
@@ -8066,7 +8289,7 @@
           <p:cNvPr id="4" name="">
             <a:extLst xmlns:a="http://schemas.openxmlformats.org/drawingml/2006/main">
               <a:ext uri="{FF2B5EF4-FFF2-40B4-BE49-F238E27FC236}">
-                <a16:creationId xmlns:a16="http://schemas.microsoft.com/office/drawing/2014/main" id="{89DDD043-7BE0-4B92-96C6-9C8FFE4EFF56}"/>
+                <a16:creationId xmlns:a16="http://schemas.microsoft.com/office/drawing/2014/main" id="{834CEA58-076B-408E-B0C7-60F118013ED8}"/>
               </a:ext>
             </a:extLst>
           </p:cNvPr>
@@ -8101,7 +8324,7 @@
           <p:cNvPr id="5" name="">
             <a:extLst xmlns:a="http://schemas.openxmlformats.org/drawingml/2006/main">
               <a:ext uri="{FF2B5EF4-FFF2-40B4-BE49-F238E27FC236}">
-                <a16:creationId xmlns:a16="http://schemas.microsoft.com/office/drawing/2014/main" id="{DE714D1C-CFC9-4A7E-807B-EBA9DAA0F24E}"/>
+                <a16:creationId xmlns:a16="http://schemas.microsoft.com/office/drawing/2014/main" id="{C9DC5C09-B4C4-4F8B-9E09-A9816096E53F}"/>
               </a:ext>
             </a:extLst>
           </p:cNvPr>
@@ -8136,7 +8359,7 @@
           <p:cNvPr id="6" name="">
             <a:extLst xmlns:a="http://schemas.openxmlformats.org/drawingml/2006/main">
               <a:ext uri="{FF2B5EF4-FFF2-40B4-BE49-F238E27FC236}">
-                <a16:creationId xmlns:a16="http://schemas.microsoft.com/office/drawing/2014/main" id="{2709EB1A-4211-4F04-92AD-243ABFD08918}"/>
+                <a16:creationId xmlns:a16="http://schemas.microsoft.com/office/drawing/2014/main" id="{3BE3CE2A-6BD8-44D7-B9DC-9E594C1B7527}"/>
               </a:ext>
             </a:extLst>
           </p:cNvPr>
@@ -8148,7 +8371,7 @@
         <p:spPr>
           <a:xfrm xmlns:a="http://schemas.openxmlformats.org/drawingml/2006/main">
             <a:off x="685800" y="990600"/>
-            <a:ext cx="10477500" cy="704850"/>
+            <a:ext cx="10096500" cy="704850"/>
           </a:xfrm>
           <a:prstGeom xmlns:a="http://schemas.openxmlformats.org/drawingml/2006/main" prst="rect">
             <a:avLst/>
@@ -8176,9 +8399,9 @@
                 <a:solidFill>
                   <a:srgbClr val="151515"/>
                 </a:solidFill>
-                <a:latin typeface="Aptos Display"/>
-                <a:ea typeface="Aptos Display"/>
-                <a:cs typeface="Aptos Display"/>
+                <a:latin typeface="Arial"/>
+                <a:ea typeface="Arial"/>
+                <a:cs typeface="Arial"/>
               </a:defRPr>
             </a:pPr>
             <a:r>
@@ -8186,9 +8409,9 @@
                 <a:solidFill>
                   <a:srgbClr val="151515"/>
                 </a:solidFill>
-                <a:latin typeface="Aptos Display"/>
-                <a:ea typeface="Aptos Display"/>
-                <a:cs typeface="Aptos Display"/>
+                <a:latin typeface="Arial"/>
+                <a:ea typeface="Arial"/>
+                <a:cs typeface="Arial"/>
               </a:rPr>
               <a:t>The controlled benchmark is a blocking-electrode PNP system.</a:t>
             </a:r>
@@ -8200,7 +8423,7 @@
           <p:cNvPr id="7" name="">
             <a:extLst xmlns:a="http://schemas.openxmlformats.org/drawingml/2006/main">
               <a:ext uri="{FF2B5EF4-FFF2-40B4-BE49-F238E27FC236}">
-                <a16:creationId xmlns:a16="http://schemas.microsoft.com/office/drawing/2014/main" id="{E9C8651B-25F1-4B6C-BA43-9A51C818274B}"/>
+                <a16:creationId xmlns:a16="http://schemas.microsoft.com/office/drawing/2014/main" id="{6C01FB6B-A1FC-4479-8A3B-CAA33FD910A7}"/>
               </a:ext>
             </a:extLst>
           </p:cNvPr>
@@ -8233,7 +8456,7 @@
           <p:cNvPr id="8" name="">
             <a:extLst xmlns:a="http://schemas.openxmlformats.org/drawingml/2006/main">
               <a:ext uri="{FF2B5EF4-FFF2-40B4-BE49-F238E27FC236}">
-                <a16:creationId xmlns:a16="http://schemas.microsoft.com/office/drawing/2014/main" id="{105C861B-7DA0-4DC1-B062-7E555A0E8D96}"/>
+                <a16:creationId xmlns:a16="http://schemas.microsoft.com/office/drawing/2014/main" id="{396471E0-DCC8-4488-B376-E60B9EA6BE4C}"/>
               </a:ext>
             </a:extLst>
           </p:cNvPr>
@@ -8272,13 +8495,13 @@
           <p:nvPr/>
         </p:nvPicPr>
         <p:blipFill>
-          <a:blip xmlns:r="http://schemas.openxmlformats.org/officeDocument/2006/relationships" xmlns:a="http://schemas.openxmlformats.org/drawingml/2006/main" r:embed="Rb71bd17f2b894329"/>
+          <a:blip xmlns:r="http://schemas.openxmlformats.org/officeDocument/2006/relationships" xmlns:a="http://schemas.openxmlformats.org/drawingml/2006/main" r:embed="Rf80ac70086974935"/>
           <a:stretch xmlns:a="http://schemas.openxmlformats.org/drawingml/2006/main"/>
         </p:blipFill>
         <p:spPr>
           <a:xfrm xmlns:a="http://schemas.openxmlformats.org/drawingml/2006/main">
-            <a:off x="1123950" y="2280179"/>
-            <a:ext cx="5334000" cy="1926167"/>
+            <a:off x="1123950" y="2348414"/>
+            <a:ext cx="5334000" cy="1789697"/>
           </a:xfrm>
           <a:prstGeom xmlns:a="http://schemas.openxmlformats.org/drawingml/2006/main" prst="rect">
             <a:avLst/>
@@ -8290,7 +8513,7 @@
           <p:cNvPr id="10" name="">
             <a:extLst xmlns:a="http://schemas.openxmlformats.org/drawingml/2006/main">
               <a:ext uri="{FF2B5EF4-FFF2-40B4-BE49-F238E27FC236}">
-                <a16:creationId xmlns:a16="http://schemas.microsoft.com/office/drawing/2014/main" id="{4A39FE55-54CC-4708-9D1D-57371CEA2184}"/>
+                <a16:creationId xmlns:a16="http://schemas.microsoft.com/office/drawing/2014/main" id="{1471AB32-D39C-46B0-9534-2083A97ECB07}"/>
               </a:ext>
             </a:extLst>
           </p:cNvPr>
@@ -8323,7 +8546,7 @@
           <p:cNvPr id="11" name="">
             <a:extLst xmlns:a="http://schemas.openxmlformats.org/drawingml/2006/main">
               <a:ext uri="{FF2B5EF4-FFF2-40B4-BE49-F238E27FC236}">
-                <a16:creationId xmlns:a16="http://schemas.microsoft.com/office/drawing/2014/main" id="{29E06D88-F425-4432-9D01-1FE1CB0186DC}"/>
+                <a16:creationId xmlns:a16="http://schemas.microsoft.com/office/drawing/2014/main" id="{75A58C4E-DF95-4349-920B-8A5D93823E47}"/>
               </a:ext>
             </a:extLst>
           </p:cNvPr>
@@ -8363,9 +8586,9 @@
                 <a:solidFill>
                   <a:srgbClr val="D05A2A"/>
                 </a:solidFill>
-                <a:latin typeface="Aptos"/>
-                <a:ea typeface="Aptos"/>
-                <a:cs typeface="Aptos"/>
+                <a:latin typeface="Arial"/>
+                <a:ea typeface="Arial"/>
+                <a:cs typeface="Arial"/>
               </a:defRPr>
             </a:pPr>
             <a:r>
@@ -8373,9 +8596,9 @@
                 <a:solidFill>
                   <a:srgbClr val="D05A2A"/>
                 </a:solidFill>
-                <a:latin typeface="Aptos"/>
-                <a:ea typeface="Aptos"/>
-                <a:cs typeface="Aptos"/>
+                <a:latin typeface="Arial"/>
+                <a:ea typeface="Arial"/>
+                <a:cs typeface="Arial"/>
               </a:rPr>
               <a:t>Parameter box</a:t>
             </a:r>
@@ -8387,7 +8610,7 @@
           <p:cNvPr id="12" name="">
             <a:extLst xmlns:a="http://schemas.openxmlformats.org/drawingml/2006/main">
               <a:ext uri="{FF2B5EF4-FFF2-40B4-BE49-F238E27FC236}">
-                <a16:creationId xmlns:a16="http://schemas.microsoft.com/office/drawing/2014/main" id="{74EE579C-8F0F-44F5-BEB6-9BFF13985168}"/>
+                <a16:creationId xmlns:a16="http://schemas.microsoft.com/office/drawing/2014/main" id="{98FEAB75-E7BB-4869-8DC0-6BA031531C63}"/>
               </a:ext>
             </a:extLst>
           </p:cNvPr>
@@ -8427,9 +8650,9 @@
                 <a:solidFill>
                   <a:srgbClr val="2B2B2B"/>
                 </a:solidFill>
-                <a:latin typeface="Aptos"/>
-                <a:ea typeface="Aptos"/>
-                <a:cs typeface="Aptos"/>
+                <a:latin typeface="Arial"/>
+                <a:ea typeface="Arial"/>
+                <a:cs typeface="Arial"/>
               </a:defRPr>
             </a:pPr>
             <a:r>
@@ -8437,9 +8660,9 @@
                 <a:solidFill>
                   <a:srgbClr val="2B2B2B"/>
                 </a:solidFill>
-                <a:latin typeface="Aptos"/>
-                <a:ea typeface="Aptos"/>
-                <a:cs typeface="Aptos"/>
+                <a:latin typeface="Arial"/>
+                <a:ea typeface="Arial"/>
+                <a:cs typeface="Arial"/>
               </a:rPr>
               <a:t>x in [0,1],  t in [0,0.2]</a:t>
             </a:r>
@@ -8450,9 +8673,9 @@
                 <a:solidFill>
                   <a:srgbClr val="2B2B2B"/>
                 </a:solidFill>
-                <a:latin typeface="Aptos"/>
-                <a:ea typeface="Aptos"/>
-                <a:cs typeface="Aptos"/>
+                <a:latin typeface="Arial"/>
+                <a:ea typeface="Arial"/>
+                <a:cs typeface="Arial"/>
               </a:defRPr>
             </a:pPr>
             <a:r>
@@ -8460,9 +8683,9 @@
                 <a:solidFill>
                   <a:srgbClr val="2B2B2B"/>
                 </a:solidFill>
-                <a:latin typeface="Aptos"/>
-                <a:ea typeface="Aptos"/>
-                <a:cs typeface="Aptos"/>
+                <a:latin typeface="Arial"/>
+                <a:ea typeface="Arial"/>
+                <a:cs typeface="Arial"/>
               </a:rPr>
               <a:t>Dp, Dn in [0.5,2.0]</a:t>
             </a:r>
@@ -8473,9 +8696,9 @@
                 <a:solidFill>
                   <a:srgbClr val="2B2B2B"/>
                 </a:solidFill>
-                <a:latin typeface="Aptos"/>
-                <a:ea typeface="Aptos"/>
-                <a:cs typeface="Aptos"/>
+                <a:latin typeface="Arial"/>
+                <a:ea typeface="Arial"/>
+                <a:cs typeface="Arial"/>
               </a:defRPr>
             </a:pPr>
             <a:r>
@@ -8483,9 +8706,9 @@
                 <a:solidFill>
                   <a:srgbClr val="2B2B2B"/>
                 </a:solidFill>
-                <a:latin typeface="Aptos"/>
-                <a:ea typeface="Aptos"/>
-                <a:cs typeface="Aptos"/>
+                <a:latin typeface="Arial"/>
+                <a:ea typeface="Arial"/>
+                <a:cs typeface="Arial"/>
               </a:rPr>
               <a:t>true case: Dp = Dn = 1.25</a:t>
             </a:r>
@@ -8496,9 +8719,9 @@
                 <a:solidFill>
                   <a:srgbClr val="2B2B2B"/>
                 </a:solidFill>
-                <a:latin typeface="Aptos"/>
-                <a:ea typeface="Aptos"/>
-                <a:cs typeface="Aptos"/>
+                <a:latin typeface="Arial"/>
+                <a:ea typeface="Arial"/>
+                <a:cs typeface="Arial"/>
               </a:defRPr>
             </a:pPr>
             <a:r>
@@ -8506,9 +8729,9 @@
                 <a:solidFill>
                   <a:srgbClr val="2B2B2B"/>
                 </a:solidFill>
-                <a:latin typeface="Aptos"/>
-                <a:ea typeface="Aptos"/>
-                <a:cs typeface="Aptos"/>
+                <a:latin typeface="Arial"/>
+                <a:ea typeface="Arial"/>
+                <a:cs typeface="Arial"/>
               </a:rPr>
               <a:t>phi(0) = -0.5, phi(1) = 0.5</a:t>
             </a:r>
@@ -8520,7 +8743,7 @@
           <p:cNvPr id="13" name="">
             <a:extLst xmlns:a="http://schemas.openxmlformats.org/drawingml/2006/main">
               <a:ext uri="{FF2B5EF4-FFF2-40B4-BE49-F238E27FC236}">
-                <a16:creationId xmlns:a16="http://schemas.microsoft.com/office/drawing/2014/main" id="{B2755B63-32D3-4819-8EDE-B69E7A4D7B8E}"/>
+                <a16:creationId xmlns:a16="http://schemas.microsoft.com/office/drawing/2014/main" id="{A0B74667-8B4A-48DE-B397-8214B191C460}"/>
               </a:ext>
             </a:extLst>
           </p:cNvPr>
@@ -8560,9 +8783,9 @@
                 <a:solidFill>
                   <a:srgbClr val="6D6D6D"/>
                 </a:solidFill>
-                <a:latin typeface="Aptos"/>
-                <a:ea typeface="Aptos"/>
-                <a:cs typeface="Aptos"/>
+                <a:latin typeface="Arial"/>
+                <a:ea typeface="Arial"/>
+                <a:cs typeface="Arial"/>
               </a:defRPr>
             </a:pPr>
             <a:r>
@@ -8570,9 +8793,9 @@
                 <a:solidFill>
                   <a:srgbClr val="6D6D6D"/>
                 </a:solidFill>
-                <a:latin typeface="Aptos"/>
-                <a:ea typeface="Aptos"/>
-                <a:cs typeface="Aptos"/>
+                <a:latin typeface="Arial"/>
+                <a:ea typeface="Arial"/>
+                <a:cs typeface="Arial"/>
               </a:rPr>
               <a:t>Blocking boundary: ions do not cross the electrode, but charging current can still be measured.</a:t>
             </a:r>
@@ -8584,7 +8807,7 @@
           <p:cNvPr id="14" name="">
             <a:extLst xmlns:a="http://schemas.openxmlformats.org/drawingml/2006/main">
               <a:ext uri="{FF2B5EF4-FFF2-40B4-BE49-F238E27FC236}">
-                <a16:creationId xmlns:a16="http://schemas.microsoft.com/office/drawing/2014/main" id="{91254CC8-32ED-4C11-8447-8A76C614C404}"/>
+                <a16:creationId xmlns:a16="http://schemas.microsoft.com/office/drawing/2014/main" id="{C4B20E8A-D43B-4A93-8632-B21777A0A95C}"/>
               </a:ext>
             </a:extLst>
           </p:cNvPr>
@@ -8619,7 +8842,7 @@
           <p:cNvPr id="15" name="">
             <a:extLst xmlns:a="http://schemas.openxmlformats.org/drawingml/2006/main">
               <a:ext uri="{FF2B5EF4-FFF2-40B4-BE49-F238E27FC236}">
-                <a16:creationId xmlns:a16="http://schemas.microsoft.com/office/drawing/2014/main" id="{D452A096-96A4-4838-A44D-C50EC51F66B2}"/>
+                <a16:creationId xmlns:a16="http://schemas.microsoft.com/office/drawing/2014/main" id="{0007D101-4CBB-46CA-BB1A-C9700F813A80}"/>
               </a:ext>
             </a:extLst>
           </p:cNvPr>
@@ -8631,7 +8854,7 @@
         <p:spPr>
           <a:xfrm xmlns:a="http://schemas.openxmlformats.org/drawingml/2006/main">
             <a:off x="685800" y="6477000"/>
-            <a:ext cx="6858000" cy="152400"/>
+            <a:ext cx="7239000" cy="152400"/>
           </a:xfrm>
           <a:prstGeom xmlns:a="http://schemas.openxmlformats.org/drawingml/2006/main" prst="rect">
             <a:avLst/>
@@ -8659,9 +8882,9 @@
                 <a:solidFill>
                   <a:srgbClr val="77736D"/>
                 </a:solidFill>
-                <a:latin typeface="Aptos"/>
-                <a:ea typeface="Aptos"/>
-                <a:cs typeface="Aptos"/>
+                <a:latin typeface="Arial"/>
+                <a:ea typeface="Arial"/>
+                <a:cs typeface="Arial"/>
               </a:defRPr>
             </a:pPr>
             <a:r>
@@ -8669,9 +8892,9 @@
                 <a:solidFill>
                   <a:srgbClr val="77736D"/>
                 </a:solidFill>
-                <a:latin typeface="Aptos"/>
-                <a:ea typeface="Aptos"/>
-                <a:cs typeface="Aptos"/>
+                <a:latin typeface="Arial"/>
+                <a:ea typeface="Arial"/>
+                <a:cs typeface="Arial"/>
               </a:rPr>
               <a:t>Physical setup and assumptions</a:t>
             </a:r>
@@ -8681,7 +8904,7 @@
     </p:spTree>
     <p:extLst>
       <p:ext uri="{BB962C8B-B14F-4D97-AF65-F5344CB8AC3E}">
-        <p14:creationId xmlns:p14="http://schemas.microsoft.com/office/powerpoint/2010/main" val="33555166"/>
+        <p14:creationId xmlns:p14="http://schemas.microsoft.com/office/powerpoint/2010/main" val="424497099"/>
       </p:ext>
     </p:extLst>
   </p:cSld>
@@ -8705,7 +8928,7 @@
           <p:cNvPr id="1" name="">
             <a:extLst xmlns:a="http://schemas.openxmlformats.org/drawingml/2006/main">
               <a:ext uri="{FF2B5EF4-FFF2-40B4-BE49-F238E27FC236}">
-                <a16:creationId xmlns:a16="http://schemas.microsoft.com/office/drawing/2014/main" id="{6F42B730-CACA-47FC-AC08-789F5B762A21}"/>
+                <a16:creationId xmlns:a16="http://schemas.microsoft.com/office/drawing/2014/main" id="{C30C3717-B295-4795-A9CE-4FF0E13E3C70}"/>
               </a:ext>
             </a:extLst>
           </p:cNvPr>
@@ -8740,7 +8963,7 @@
           <p:cNvPr id="2" name="">
             <a:extLst xmlns:a="http://schemas.openxmlformats.org/drawingml/2006/main">
               <a:ext uri="{FF2B5EF4-FFF2-40B4-BE49-F238E27FC236}">
-                <a16:creationId xmlns:a16="http://schemas.microsoft.com/office/drawing/2014/main" id="{139CE8C6-4FD3-455A-BEB7-2F2DF2F9E0EE}"/>
+                <a16:creationId xmlns:a16="http://schemas.microsoft.com/office/drawing/2014/main" id="{2172CD61-AF9C-45BE-9FED-BE41804677B2}"/>
               </a:ext>
             </a:extLst>
           </p:cNvPr>
@@ -8752,7 +8975,7 @@
         <p:spPr>
           <a:xfrm xmlns:a="http://schemas.openxmlformats.org/drawingml/2006/main">
             <a:off x="685800" y="400050"/>
-            <a:ext cx="4953000" cy="190500"/>
+            <a:ext cx="5143500" cy="190500"/>
           </a:xfrm>
           <a:prstGeom xmlns:a="http://schemas.openxmlformats.org/drawingml/2006/main" prst="rect">
             <a:avLst/>
@@ -8780,9 +9003,9 @@
                 <a:solidFill>
                   <a:srgbClr val="6D6D6D"/>
                 </a:solidFill>
-                <a:latin typeface="Aptos"/>
-                <a:ea typeface="Aptos"/>
-                <a:cs typeface="Aptos"/>
+                <a:latin typeface="Arial"/>
+                <a:ea typeface="Arial"/>
+                <a:cs typeface="Arial"/>
               </a:defRPr>
             </a:pPr>
             <a:r>
@@ -8790,9 +9013,9 @@
                 <a:solidFill>
                   <a:srgbClr val="6D6D6D"/>
                 </a:solidFill>
-                <a:latin typeface="Aptos"/>
-                <a:ea typeface="Aptos"/>
-                <a:cs typeface="Aptos"/>
+                <a:latin typeface="Arial"/>
+                <a:ea typeface="Arial"/>
+                <a:cs typeface="Arial"/>
               </a:rPr>
               <a:t>PINN SURROGATE</a:t>
             </a:r>
@@ -8804,7 +9027,7 @@
           <p:cNvPr id="3" name="">
             <a:extLst xmlns:a="http://schemas.openxmlformats.org/drawingml/2006/main">
               <a:ext uri="{FF2B5EF4-FFF2-40B4-BE49-F238E27FC236}">
-                <a16:creationId xmlns:a16="http://schemas.microsoft.com/office/drawing/2014/main" id="{6D84EC01-EA01-454B-A3FC-D0EAAC975F6D}"/>
+                <a16:creationId xmlns:a16="http://schemas.microsoft.com/office/drawing/2014/main" id="{A1240711-5051-4500-BD58-5C6C296B8CE3}"/>
               </a:ext>
             </a:extLst>
           </p:cNvPr>
@@ -8844,9 +9067,9 @@
                 <a:solidFill>
                   <a:srgbClr val="6D6D6D"/>
                 </a:solidFill>
-                <a:latin typeface="Aptos"/>
-                <a:ea typeface="Aptos"/>
-                <a:cs typeface="Aptos"/>
+                <a:latin typeface="Arial"/>
+                <a:ea typeface="Arial"/>
+                <a:cs typeface="Arial"/>
               </a:defRPr>
             </a:pPr>
             <a:r>
@@ -8854,9 +9077,9 @@
                 <a:solidFill>
                   <a:srgbClr val="6D6D6D"/>
                 </a:solidFill>
-                <a:latin typeface="Aptos"/>
-                <a:ea typeface="Aptos"/>
-                <a:cs typeface="Aptos"/>
+                <a:latin typeface="Arial"/>
+                <a:ea typeface="Arial"/>
+                <a:cs typeface="Arial"/>
               </a:rPr>
               <a:t>05</a:t>
             </a:r>
@@ -8868,7 +9091,7 @@
           <p:cNvPr id="4" name="">
             <a:extLst xmlns:a="http://schemas.openxmlformats.org/drawingml/2006/main">
               <a:ext uri="{FF2B5EF4-FFF2-40B4-BE49-F238E27FC236}">
-                <a16:creationId xmlns:a16="http://schemas.microsoft.com/office/drawing/2014/main" id="{31F06777-DC37-47C6-A826-64A7B8FC3E6C}"/>
+                <a16:creationId xmlns:a16="http://schemas.microsoft.com/office/drawing/2014/main" id="{4DC4D6C0-9FD7-494C-87D6-909AAC4D35C9}"/>
               </a:ext>
             </a:extLst>
           </p:cNvPr>
@@ -8903,7 +9126,7 @@
           <p:cNvPr id="5" name="">
             <a:extLst xmlns:a="http://schemas.openxmlformats.org/drawingml/2006/main">
               <a:ext uri="{FF2B5EF4-FFF2-40B4-BE49-F238E27FC236}">
-                <a16:creationId xmlns:a16="http://schemas.microsoft.com/office/drawing/2014/main" id="{D3719681-2661-4CB5-B428-C6093B6A5A3F}"/>
+                <a16:creationId xmlns:a16="http://schemas.microsoft.com/office/drawing/2014/main" id="{1A5F76A4-2CBF-4520-A983-A61D3B098C82}"/>
               </a:ext>
             </a:extLst>
           </p:cNvPr>
@@ -8938,7 +9161,7 @@
           <p:cNvPr id="6" name="">
             <a:extLst xmlns:a="http://schemas.openxmlformats.org/drawingml/2006/main">
               <a:ext uri="{FF2B5EF4-FFF2-40B4-BE49-F238E27FC236}">
-                <a16:creationId xmlns:a16="http://schemas.microsoft.com/office/drawing/2014/main" id="{B5A4D7BB-0805-4EB3-B032-182D4FAB2D39}"/>
+                <a16:creationId xmlns:a16="http://schemas.microsoft.com/office/drawing/2014/main" id="{6B1B0471-4577-4346-A32A-5BF9226F55E7}"/>
               </a:ext>
             </a:extLst>
           </p:cNvPr>
@@ -8950,7 +9173,7 @@
         <p:spPr>
           <a:xfrm xmlns:a="http://schemas.openxmlformats.org/drawingml/2006/main">
             <a:off x="685800" y="990600"/>
-            <a:ext cx="10001250" cy="838200"/>
+            <a:ext cx="10096500" cy="838200"/>
           </a:xfrm>
           <a:prstGeom xmlns:a="http://schemas.openxmlformats.org/drawingml/2006/main" prst="rect">
             <a:avLst/>
@@ -8978,9 +9201,9 @@
                 <a:solidFill>
                   <a:srgbClr val="151515"/>
                 </a:solidFill>
-                <a:latin typeface="Aptos Display"/>
-                <a:ea typeface="Aptos Display"/>
-                <a:cs typeface="Aptos Display"/>
+                <a:latin typeface="Arial"/>
+                <a:ea typeface="Arial"/>
+                <a:cs typeface="Arial"/>
               </a:defRPr>
             </a:pPr>
             <a:r>
@@ -8988,9 +9211,9 @@
                 <a:solidFill>
                   <a:srgbClr val="151515"/>
                 </a:solidFill>
-                <a:latin typeface="Aptos Display"/>
-                <a:ea typeface="Aptos Display"/>
-                <a:cs typeface="Aptos Display"/>
+                <a:latin typeface="Arial"/>
+                <a:ea typeface="Arial"/>
+                <a:cs typeface="Arial"/>
               </a:rPr>
               <a:t>The PINN learns the forward map, not the inverse answer.</a:t>
             </a:r>
@@ -9002,19 +9225,19 @@
           <p:cNvPr id="7" name="">
             <a:extLst xmlns:a="http://schemas.openxmlformats.org/drawingml/2006/main">
               <a:ext uri="{FF2B5EF4-FFF2-40B4-BE49-F238E27FC236}">
-                <a16:creationId xmlns:a16="http://schemas.microsoft.com/office/drawing/2014/main" id="{70E7C052-C7FC-42A7-BB89-0FFE301F3CFF}"/>
-              </a:ext>
-            </a:extLst>
-          </p:cNvPr>
-          <p:cNvSpPr>
-            <a:spLocks xmlns:a="http://schemas.openxmlformats.org/drawingml/2006/main" noGrp="1"/>
-          </p:cNvSpPr>
-          <p:nvPr/>
-        </p:nvSpPr>
-        <p:spPr>
-          <a:xfrm xmlns:a="http://schemas.openxmlformats.org/drawingml/2006/main">
-            <a:off x="704850" y="1866900"/>
-            <a:ext cx="9144000" cy="419100"/>
+                <a16:creationId xmlns:a16="http://schemas.microsoft.com/office/drawing/2014/main" id="{82019B09-B714-4229-B769-F6791275CAE5}"/>
+              </a:ext>
+            </a:extLst>
+          </p:cNvPr>
+          <p:cNvSpPr>
+            <a:spLocks xmlns:a="http://schemas.openxmlformats.org/drawingml/2006/main" noGrp="1"/>
+          </p:cNvSpPr>
+          <p:nvPr/>
+        </p:nvSpPr>
+        <p:spPr>
+          <a:xfrm xmlns:a="http://schemas.openxmlformats.org/drawingml/2006/main">
+            <a:off x="704850" y="1885950"/>
+            <a:ext cx="9334500" cy="419100"/>
           </a:xfrm>
           <a:prstGeom xmlns:a="http://schemas.openxmlformats.org/drawingml/2006/main" prst="rect">
             <a:avLst/>
@@ -9042,9 +9265,9 @@
                 <a:solidFill>
                   <a:srgbClr val="6D6D6D"/>
                 </a:solidFill>
-                <a:latin typeface="Aptos"/>
-                <a:ea typeface="Aptos"/>
-                <a:cs typeface="Aptos"/>
+                <a:latin typeface="Arial"/>
+                <a:ea typeface="Arial"/>
+                <a:cs typeface="Arial"/>
               </a:defRPr>
             </a:pPr>
             <a:r>
@@ -9052,9 +9275,9 @@
                 <a:solidFill>
                   <a:srgbClr val="6D6D6D"/>
                 </a:solidFill>
-                <a:latin typeface="Aptos"/>
-                <a:ea typeface="Aptos"/>
-                <a:cs typeface="Aptos"/>
+                <a:latin typeface="Arial"/>
+                <a:ea typeface="Arial"/>
+                <a:cs typeface="Arial"/>
               </a:rPr>
               <a:t>This distinction is the core role of the neural network.</a:t>
             </a:r>
@@ -9066,7 +9289,7 @@
           <p:cNvPr id="8" name="">
             <a:extLst xmlns:a="http://schemas.openxmlformats.org/drawingml/2006/main">
               <a:ext uri="{FF2B5EF4-FFF2-40B4-BE49-F238E27FC236}">
-                <a16:creationId xmlns:a16="http://schemas.microsoft.com/office/drawing/2014/main" id="{CF2A1BED-5D70-4E80-B207-F4AB238BF948}"/>
+                <a16:creationId xmlns:a16="http://schemas.microsoft.com/office/drawing/2014/main" id="{D0FF2CF2-712E-44D5-8230-0E7ED9F20B28}"/>
               </a:ext>
             </a:extLst>
           </p:cNvPr>
@@ -9099,7 +9322,7 @@
           <p:cNvPr id="9" name="">
             <a:extLst xmlns:a="http://schemas.openxmlformats.org/drawingml/2006/main">
               <a:ext uri="{FF2B5EF4-FFF2-40B4-BE49-F238E27FC236}">
-                <a16:creationId xmlns:a16="http://schemas.microsoft.com/office/drawing/2014/main" id="{C8C70EAA-358B-44CF-9B47-5B3E3EED2755}"/>
+                <a16:creationId xmlns:a16="http://schemas.microsoft.com/office/drawing/2014/main" id="{709CE6C1-1B3F-4857-A0CF-B2EC878523A4}"/>
               </a:ext>
             </a:extLst>
           </p:cNvPr>
@@ -9139,9 +9362,9 @@
                 <a:solidFill>
                   <a:srgbClr val="6D6D6D"/>
                 </a:solidFill>
-                <a:latin typeface="Aptos"/>
-                <a:ea typeface="Aptos"/>
-                <a:cs typeface="Aptos"/>
+                <a:latin typeface="Arial"/>
+                <a:ea typeface="Arial"/>
+                <a:cs typeface="Arial"/>
               </a:defRPr>
             </a:pPr>
             <a:r>
@@ -9149,9 +9372,9 @@
                 <a:solidFill>
                   <a:srgbClr val="6D6D6D"/>
                 </a:solidFill>
-                <a:latin typeface="Aptos"/>
-                <a:ea typeface="Aptos"/>
-                <a:cs typeface="Aptos"/>
+                <a:latin typeface="Arial"/>
+                <a:ea typeface="Arial"/>
+                <a:cs typeface="Arial"/>
               </a:rPr>
               <a:t>input</a:t>
             </a:r>
@@ -9163,7 +9386,7 @@
           <p:cNvPr id="10" name="">
             <a:extLst xmlns:a="http://schemas.openxmlformats.org/drawingml/2006/main">
               <a:ext uri="{FF2B5EF4-FFF2-40B4-BE49-F238E27FC236}">
-                <a16:creationId xmlns:a16="http://schemas.microsoft.com/office/drawing/2014/main" id="{257DB19B-50E7-4FDA-941B-AEC2428DD84E}"/>
+                <a16:creationId xmlns:a16="http://schemas.microsoft.com/office/drawing/2014/main" id="{4B769AC3-411F-43F6-A211-1D120E62BBCE}"/>
               </a:ext>
             </a:extLst>
           </p:cNvPr>
@@ -9203,9 +9426,9 @@
                 <a:solidFill>
                   <a:srgbClr val="2B2B2B"/>
                 </a:solidFill>
-                <a:latin typeface="Aptos"/>
-                <a:ea typeface="Aptos"/>
-                <a:cs typeface="Aptos"/>
+                <a:latin typeface="Arial"/>
+                <a:ea typeface="Arial"/>
+                <a:cs typeface="Arial"/>
               </a:defRPr>
             </a:pPr>
             <a:r>
@@ -9213,9 +9436,9 @@
                 <a:solidFill>
                   <a:srgbClr val="2B2B2B"/>
                 </a:solidFill>
-                <a:latin typeface="Aptos"/>
-                <a:ea typeface="Aptos"/>
-                <a:cs typeface="Aptos"/>
+                <a:latin typeface="Arial"/>
+                <a:ea typeface="Arial"/>
+                <a:cs typeface="Arial"/>
               </a:rPr>
               <a:t>(x, t, Dp, Dn)</a:t>
             </a:r>
@@ -9227,7 +9450,7 @@
           <p:cNvPr id="11" name="">
             <a:extLst xmlns:a="http://schemas.openxmlformats.org/drawingml/2006/main">
               <a:ext uri="{FF2B5EF4-FFF2-40B4-BE49-F238E27FC236}">
-                <a16:creationId xmlns:a16="http://schemas.microsoft.com/office/drawing/2014/main" id="{94571A4B-5406-4477-BC72-C33306EBA619}"/>
+                <a16:creationId xmlns:a16="http://schemas.microsoft.com/office/drawing/2014/main" id="{38E719C3-21C3-4C4F-81FE-2864CA06D47C}"/>
               </a:ext>
             </a:extLst>
           </p:cNvPr>
@@ -9239,7 +9462,7 @@
         <p:spPr>
           <a:xfrm xmlns:a="http://schemas.openxmlformats.org/drawingml/2006/main">
             <a:off x="3857625" y="3429000"/>
-            <a:ext cx="809625" cy="16193"/>
+            <a:ext cx="809625" cy="15240"/>
           </a:xfrm>
           <a:prstGeom xmlns:a="http://schemas.openxmlformats.org/drawingml/2006/main" prst="rect">
             <a:avLst/>
@@ -9262,7 +9485,7 @@
           <p:cNvPr id="12" name="">
             <a:extLst xmlns:a="http://schemas.openxmlformats.org/drawingml/2006/main">
               <a:ext uri="{FF2B5EF4-FFF2-40B4-BE49-F238E27FC236}">
-                <a16:creationId xmlns:a16="http://schemas.microsoft.com/office/drawing/2014/main" id="{9A28F948-F237-41D9-914F-77702C6BA4FA}"/>
+                <a16:creationId xmlns:a16="http://schemas.microsoft.com/office/drawing/2014/main" id="{5F4748EC-B3C6-47BF-B016-C60E62F868E3}"/>
               </a:ext>
             </a:extLst>
           </p:cNvPr>
@@ -9302,9 +9525,9 @@
                 <a:solidFill>
                   <a:srgbClr val="1F4E79"/>
                 </a:solidFill>
-                <a:latin typeface="Aptos"/>
-                <a:ea typeface="Aptos"/>
-                <a:cs typeface="Aptos"/>
+                <a:latin typeface="Arial"/>
+                <a:ea typeface="Arial"/>
+                <a:cs typeface="Arial"/>
               </a:defRPr>
             </a:pPr>
             <a:r>
@@ -9312,9 +9535,9 @@
                 <a:solidFill>
                   <a:srgbClr val="1F4E79"/>
                 </a:solidFill>
-                <a:latin typeface="Aptos"/>
-                <a:ea typeface="Aptos"/>
-                <a:cs typeface="Aptos"/>
+                <a:latin typeface="Arial"/>
+                <a:ea typeface="Arial"/>
+                <a:cs typeface="Arial"/>
               </a:rPr>
               <a:t>&gt;</a:t>
             </a:r>
@@ -9326,7 +9549,7 @@
           <p:cNvPr id="13" name="">
             <a:extLst xmlns:a="http://schemas.openxmlformats.org/drawingml/2006/main">
               <a:ext uri="{FF2B5EF4-FFF2-40B4-BE49-F238E27FC236}">
-                <a16:creationId xmlns:a16="http://schemas.microsoft.com/office/drawing/2014/main" id="{8BC1466D-FD96-4353-9B33-60BC2733FA1D}"/>
+                <a16:creationId xmlns:a16="http://schemas.microsoft.com/office/drawing/2014/main" id="{EFABDFDE-7134-4261-9127-A55CB9A57060}"/>
               </a:ext>
             </a:extLst>
           </p:cNvPr>
@@ -9359,7 +9582,7 @@
           <p:cNvPr id="14" name="">
             <a:extLst xmlns:a="http://schemas.openxmlformats.org/drawingml/2006/main">
               <a:ext uri="{FF2B5EF4-FFF2-40B4-BE49-F238E27FC236}">
-                <a16:creationId xmlns:a16="http://schemas.microsoft.com/office/drawing/2014/main" id="{CC5631F6-498F-498F-8488-32B2B8CCDD5A}"/>
+                <a16:creationId xmlns:a16="http://schemas.microsoft.com/office/drawing/2014/main" id="{14734F45-A283-430D-BEF2-48EE6EA62492}"/>
               </a:ext>
             </a:extLst>
           </p:cNvPr>
@@ -9394,7 +9617,7 @@
           <p:cNvPr id="15" name="">
             <a:extLst xmlns:a="http://schemas.openxmlformats.org/drawingml/2006/main">
               <a:ext uri="{FF2B5EF4-FFF2-40B4-BE49-F238E27FC236}">
-                <a16:creationId xmlns:a16="http://schemas.microsoft.com/office/drawing/2014/main" id="{14605085-84A3-4697-BBFD-D71F97EE0DE4}"/>
+                <a16:creationId xmlns:a16="http://schemas.microsoft.com/office/drawing/2014/main" id="{D7191435-B7F6-4E5B-BAED-25CD350A6A38}"/>
               </a:ext>
             </a:extLst>
           </p:cNvPr>
@@ -9434,9 +9657,9 @@
                 <a:solidFill>
                   <a:srgbClr val="1F4E79"/>
                 </a:solidFill>
-                <a:latin typeface="Aptos"/>
-                <a:ea typeface="Aptos"/>
-                <a:cs typeface="Aptos"/>
+                <a:latin typeface="Arial"/>
+                <a:ea typeface="Arial"/>
+                <a:cs typeface="Arial"/>
               </a:defRPr>
             </a:pPr>
             <a:r>
@@ -9444,9 +9667,9 @@
                 <a:solidFill>
                   <a:srgbClr val="1F4E79"/>
                 </a:solidFill>
-                <a:latin typeface="Aptos"/>
-                <a:ea typeface="Aptos"/>
-                <a:cs typeface="Aptos"/>
+                <a:latin typeface="Arial"/>
+                <a:ea typeface="Arial"/>
+                <a:cs typeface="Arial"/>
               </a:rPr>
               <a:t>PINN</a:t>
             </a:r>
@@ -9458,7 +9681,7 @@
           <p:cNvPr id="16" name="">
             <a:extLst xmlns:a="http://schemas.openxmlformats.org/drawingml/2006/main">
               <a:ext uri="{FF2B5EF4-FFF2-40B4-BE49-F238E27FC236}">
-                <a16:creationId xmlns:a16="http://schemas.microsoft.com/office/drawing/2014/main" id="{D9657CB0-9858-4B7D-98B6-B0B397F17717}"/>
+                <a16:creationId xmlns:a16="http://schemas.microsoft.com/office/drawing/2014/main" id="{142151A1-C924-4D04-9294-36AFDD1A2AE1}"/>
               </a:ext>
             </a:extLst>
           </p:cNvPr>
@@ -9498,9 +9721,9 @@
                 <a:solidFill>
                   <a:srgbClr val="2B2B2B"/>
                 </a:solidFill>
-                <a:latin typeface="Aptos"/>
-                <a:ea typeface="Aptos"/>
-                <a:cs typeface="Aptos"/>
+                <a:latin typeface="Arial"/>
+                <a:ea typeface="Arial"/>
+                <a:cs typeface="Arial"/>
               </a:defRPr>
             </a:pPr>
             <a:r>
@@ -9508,9 +9731,9 @@
                 <a:solidFill>
                   <a:srgbClr val="2B2B2B"/>
                 </a:solidFill>
-                <a:latin typeface="Aptos"/>
-                <a:ea typeface="Aptos"/>
-                <a:cs typeface="Aptos"/>
+                <a:latin typeface="Arial"/>
+                <a:ea typeface="Arial"/>
+                <a:cs typeface="Arial"/>
               </a:rPr>
               <a:t>8-layer tanh MLP</a:t>
             </a:r>
@@ -9521,9 +9744,9 @@
                 <a:solidFill>
                   <a:srgbClr val="2B2B2B"/>
                 </a:solidFill>
-                <a:latin typeface="Aptos"/>
-                <a:ea typeface="Aptos"/>
-                <a:cs typeface="Aptos"/>
+                <a:latin typeface="Arial"/>
+                <a:ea typeface="Arial"/>
+                <a:cs typeface="Arial"/>
               </a:defRPr>
             </a:pPr>
             <a:r>
@@ -9531,9 +9754,9 @@
                 <a:solidFill>
                   <a:srgbClr val="2B2B2B"/>
                 </a:solidFill>
-                <a:latin typeface="Aptos"/>
-                <a:ea typeface="Aptos"/>
-                <a:cs typeface="Aptos"/>
+                <a:latin typeface="Arial"/>
+                <a:ea typeface="Arial"/>
+                <a:cs typeface="Arial"/>
               </a:rPr>
               <a:t>width 256</a:t>
             </a:r>
@@ -9544,9 +9767,9 @@
                 <a:solidFill>
                   <a:srgbClr val="2B2B2B"/>
                 </a:solidFill>
-                <a:latin typeface="Aptos"/>
-                <a:ea typeface="Aptos"/>
-                <a:cs typeface="Aptos"/>
+                <a:latin typeface="Arial"/>
+                <a:ea typeface="Arial"/>
+                <a:cs typeface="Arial"/>
               </a:defRPr>
             </a:pPr>
             <a:r>
@@ -9554,9 +9777,9 @@
                 <a:solidFill>
                   <a:srgbClr val="2B2B2B"/>
                 </a:solidFill>
-                <a:latin typeface="Aptos"/>
-                <a:ea typeface="Aptos"/>
-                <a:cs typeface="Aptos"/>
+                <a:latin typeface="Arial"/>
+                <a:ea typeface="Arial"/>
+                <a:cs typeface="Arial"/>
               </a:rPr>
               <a:t>JAX / Equinox</a:t>
             </a:r>
@@ -9568,7 +9791,7 @@
           <p:cNvPr id="17" name="">
             <a:extLst xmlns:a="http://schemas.openxmlformats.org/drawingml/2006/main">
               <a:ext uri="{FF2B5EF4-FFF2-40B4-BE49-F238E27FC236}">
-                <a16:creationId xmlns:a16="http://schemas.microsoft.com/office/drawing/2014/main" id="{A04D8C31-6733-45AC-A347-C8B3D79E1AD6}"/>
+                <a16:creationId xmlns:a16="http://schemas.microsoft.com/office/drawing/2014/main" id="{7A7AC317-AF1D-4AA4-B8AC-8E2C883E44D4}"/>
               </a:ext>
             </a:extLst>
           </p:cNvPr>
@@ -9580,7 +9803,7 @@
         <p:spPr>
           <a:xfrm xmlns:a="http://schemas.openxmlformats.org/drawingml/2006/main">
             <a:off x="7715250" y="3429000"/>
-            <a:ext cx="809625" cy="16193"/>
+            <a:ext cx="809625" cy="15240"/>
           </a:xfrm>
           <a:prstGeom xmlns:a="http://schemas.openxmlformats.org/drawingml/2006/main" prst="rect">
             <a:avLst/>
@@ -9603,7 +9826,7 @@
           <p:cNvPr id="18" name="">
             <a:extLst xmlns:a="http://schemas.openxmlformats.org/drawingml/2006/main">
               <a:ext uri="{FF2B5EF4-FFF2-40B4-BE49-F238E27FC236}">
-                <a16:creationId xmlns:a16="http://schemas.microsoft.com/office/drawing/2014/main" id="{9D12DE60-5CFE-4636-9841-83F51C1A0611}"/>
+                <a16:creationId xmlns:a16="http://schemas.microsoft.com/office/drawing/2014/main" id="{8ADBB8C3-1A51-48DA-90A6-4B9C4CB6ED93}"/>
               </a:ext>
             </a:extLst>
           </p:cNvPr>
@@ -9643,9 +9866,9 @@
                 <a:solidFill>
                   <a:srgbClr val="008C95"/>
                 </a:solidFill>
-                <a:latin typeface="Aptos"/>
-                <a:ea typeface="Aptos"/>
-                <a:cs typeface="Aptos"/>
+                <a:latin typeface="Arial"/>
+                <a:ea typeface="Arial"/>
+                <a:cs typeface="Arial"/>
               </a:defRPr>
             </a:pPr>
             <a:r>
@@ -9653,9 +9876,9 @@
                 <a:solidFill>
                   <a:srgbClr val="008C95"/>
                 </a:solidFill>
-                <a:latin typeface="Aptos"/>
-                <a:ea typeface="Aptos"/>
-                <a:cs typeface="Aptos"/>
+                <a:latin typeface="Arial"/>
+                <a:ea typeface="Arial"/>
+                <a:cs typeface="Arial"/>
               </a:rPr>
               <a:t>&gt;</a:t>
             </a:r>
@@ -9667,7 +9890,7 @@
           <p:cNvPr id="19" name="">
             <a:extLst xmlns:a="http://schemas.openxmlformats.org/drawingml/2006/main">
               <a:ext uri="{FF2B5EF4-FFF2-40B4-BE49-F238E27FC236}">
-                <a16:creationId xmlns:a16="http://schemas.microsoft.com/office/drawing/2014/main" id="{BBA6DD00-8A3D-4654-BAAA-9C040A8A88D5}"/>
+                <a16:creationId xmlns:a16="http://schemas.microsoft.com/office/drawing/2014/main" id="{54083241-9BD1-4513-A6DE-8D78DC28C359}"/>
               </a:ext>
             </a:extLst>
           </p:cNvPr>
@@ -9700,7 +9923,7 @@
           <p:cNvPr id="20" name="">
             <a:extLst xmlns:a="http://schemas.openxmlformats.org/drawingml/2006/main">
               <a:ext uri="{FF2B5EF4-FFF2-40B4-BE49-F238E27FC236}">
-                <a16:creationId xmlns:a16="http://schemas.microsoft.com/office/drawing/2014/main" id="{AA708310-9247-4111-93D5-EA38F36CDCA4}"/>
+                <a16:creationId xmlns:a16="http://schemas.microsoft.com/office/drawing/2014/main" id="{6CEF9646-B233-4043-92A8-10D3589EE947}"/>
               </a:ext>
             </a:extLst>
           </p:cNvPr>
@@ -9735,7 +9958,7 @@
           <p:cNvPr id="21" name="">
             <a:extLst xmlns:a="http://schemas.openxmlformats.org/drawingml/2006/main">
               <a:ext uri="{FF2B5EF4-FFF2-40B4-BE49-F238E27FC236}">
-                <a16:creationId xmlns:a16="http://schemas.microsoft.com/office/drawing/2014/main" id="{0EC03C69-63CE-4252-80FA-B3C361CC4200}"/>
+                <a16:creationId xmlns:a16="http://schemas.microsoft.com/office/drawing/2014/main" id="{15D95BBF-EFAB-41FA-9D86-F5EA4646E7B2}"/>
               </a:ext>
             </a:extLst>
           </p:cNvPr>
@@ -9775,9 +9998,9 @@
                 <a:solidFill>
                   <a:srgbClr val="008C95"/>
                 </a:solidFill>
-                <a:latin typeface="Aptos"/>
-                <a:ea typeface="Aptos"/>
-                <a:cs typeface="Aptos"/>
+                <a:latin typeface="Arial"/>
+                <a:ea typeface="Arial"/>
+                <a:cs typeface="Arial"/>
               </a:defRPr>
             </a:pPr>
             <a:r>
@@ -9785,9 +10008,9 @@
                 <a:solidFill>
                   <a:srgbClr val="008C95"/>
                 </a:solidFill>
-                <a:latin typeface="Aptos"/>
-                <a:ea typeface="Aptos"/>
-                <a:cs typeface="Aptos"/>
+                <a:latin typeface="Arial"/>
+                <a:ea typeface="Arial"/>
+                <a:cs typeface="Arial"/>
               </a:rPr>
               <a:t>output</a:t>
             </a:r>
@@ -9799,7 +10022,7 @@
           <p:cNvPr id="22" name="">
             <a:extLst xmlns:a="http://schemas.openxmlformats.org/drawingml/2006/main">
               <a:ext uri="{FF2B5EF4-FFF2-40B4-BE49-F238E27FC236}">
-                <a16:creationId xmlns:a16="http://schemas.microsoft.com/office/drawing/2014/main" id="{608F1199-232B-4A82-B69B-2E00DFBD09E8}"/>
+                <a16:creationId xmlns:a16="http://schemas.microsoft.com/office/drawing/2014/main" id="{DD8709E8-9C8C-4886-989F-A304DBE3BBCB}"/>
               </a:ext>
             </a:extLst>
           </p:cNvPr>
@@ -9839,9 +10062,9 @@
                 <a:solidFill>
                   <a:srgbClr val="2B2B2B"/>
                 </a:solidFill>
-                <a:latin typeface="Aptos"/>
-                <a:ea typeface="Aptos"/>
-                <a:cs typeface="Aptos"/>
+                <a:latin typeface="Arial"/>
+                <a:ea typeface="Arial"/>
+                <a:cs typeface="Arial"/>
               </a:defRPr>
             </a:pPr>
             <a:r>
@@ -9849,9 +10072,9 @@
                 <a:solidFill>
                   <a:srgbClr val="2B2B2B"/>
                 </a:solidFill>
-                <a:latin typeface="Aptos"/>
-                <a:ea typeface="Aptos"/>
-                <a:cs typeface="Aptos"/>
+                <a:latin typeface="Arial"/>
+                <a:ea typeface="Arial"/>
+                <a:cs typeface="Arial"/>
               </a:rPr>
               <a:t>(cp, cn, phi)</a:t>
             </a:r>
@@ -9863,7 +10086,7 @@
           <p:cNvPr id="23" name="">
             <a:extLst xmlns:a="http://schemas.openxmlformats.org/drawingml/2006/main">
               <a:ext uri="{FF2B5EF4-FFF2-40B4-BE49-F238E27FC236}">
-                <a16:creationId xmlns:a16="http://schemas.microsoft.com/office/drawing/2014/main" id="{66D83825-C202-446C-8A33-8E3B86F97F05}"/>
+                <a16:creationId xmlns:a16="http://schemas.microsoft.com/office/drawing/2014/main" id="{511711B1-C231-4A74-88A7-11923DE349D5}"/>
               </a:ext>
             </a:extLst>
           </p:cNvPr>
@@ -9898,19 +10121,19 @@
           <p:cNvPr id="24" name="">
             <a:extLst xmlns:a="http://schemas.openxmlformats.org/drawingml/2006/main">
               <a:ext uri="{FF2B5EF4-FFF2-40B4-BE49-F238E27FC236}">
-                <a16:creationId xmlns:a16="http://schemas.microsoft.com/office/drawing/2014/main" id="{91FAE163-E471-4137-86B2-80DC5796A1BA}"/>
-              </a:ext>
-            </a:extLst>
-          </p:cNvPr>
-          <p:cNvSpPr>
-            <a:spLocks xmlns:a="http://schemas.openxmlformats.org/drawingml/2006/main" noGrp="1"/>
-          </p:cNvSpPr>
-          <p:nvPr/>
-        </p:nvSpPr>
-        <p:spPr>
-          <a:xfrm xmlns:a="http://schemas.openxmlformats.org/drawingml/2006/main">
-            <a:off x="2124075" y="5095875"/>
-            <a:ext cx="7877175" cy="342900"/>
+                <a16:creationId xmlns:a16="http://schemas.microsoft.com/office/drawing/2014/main" id="{EDE699BF-2072-4C8B-B1EB-400ECE98DB82}"/>
+              </a:ext>
+            </a:extLst>
+          </p:cNvPr>
+          <p:cNvSpPr>
+            <a:spLocks xmlns:a="http://schemas.openxmlformats.org/drawingml/2006/main" noGrp="1"/>
+          </p:cNvSpPr>
+          <p:nvPr/>
+        </p:nvSpPr>
+        <p:spPr>
+          <a:xfrm xmlns:a="http://schemas.openxmlformats.org/drawingml/2006/main">
+            <a:off x="2143125" y="5095875"/>
+            <a:ext cx="7858125" cy="381000"/>
           </a:xfrm>
           <a:prstGeom xmlns:a="http://schemas.openxmlformats.org/drawingml/2006/main" prst="rect">
             <a:avLst/>
@@ -9938,9 +10161,9 @@
                 <a:solidFill>
                   <a:srgbClr val="2B2B2B"/>
                 </a:solidFill>
-                <a:latin typeface="Aptos"/>
-                <a:ea typeface="Aptos"/>
-                <a:cs typeface="Aptos"/>
+                <a:latin typeface="Arial"/>
+                <a:ea typeface="Arial"/>
+                <a:cs typeface="Arial"/>
               </a:defRPr>
             </a:pPr>
             <a:r>
@@ -9948,9 +10171,9 @@
                 <a:solidFill>
                   <a:srgbClr val="2B2B2B"/>
                 </a:solidFill>
-                <a:latin typeface="Aptos"/>
-                <a:ea typeface="Aptos"/>
-                <a:cs typeface="Aptos"/>
+                <a:latin typeface="Arial"/>
+                <a:ea typeface="Arial"/>
+                <a:cs typeface="Arial"/>
               </a:rPr>
               <a:t>One trained model can be evaluated at many candidate parameter pairs.</a:t>
             </a:r>
@@ -9962,18 +10185,18 @@
           <p:cNvPr id="25" name="">
             <a:extLst xmlns:a="http://schemas.openxmlformats.org/drawingml/2006/main">
               <a:ext uri="{FF2B5EF4-FFF2-40B4-BE49-F238E27FC236}">
-                <a16:creationId xmlns:a16="http://schemas.microsoft.com/office/drawing/2014/main" id="{506A0064-31E3-4165-BEEA-863A594F5C4E}"/>
-              </a:ext>
-            </a:extLst>
-          </p:cNvPr>
-          <p:cNvSpPr>
-            <a:spLocks xmlns:a="http://schemas.openxmlformats.org/drawingml/2006/main" noGrp="1"/>
-          </p:cNvSpPr>
-          <p:nvPr/>
-        </p:nvSpPr>
-        <p:spPr>
-          <a:xfrm xmlns:a="http://schemas.openxmlformats.org/drawingml/2006/main">
-            <a:off x="1952625" y="5553075"/>
+                <a16:creationId xmlns:a16="http://schemas.microsoft.com/office/drawing/2014/main" id="{6906A35F-E1FD-44F8-A54C-74AD618866CD}"/>
+              </a:ext>
+            </a:extLst>
+          </p:cNvPr>
+          <p:cNvSpPr>
+            <a:spLocks xmlns:a="http://schemas.openxmlformats.org/drawingml/2006/main" noGrp="1"/>
+          </p:cNvSpPr>
+          <p:nvPr/>
+        </p:nvSpPr>
+        <p:spPr>
+          <a:xfrm xmlns:a="http://schemas.openxmlformats.org/drawingml/2006/main">
+            <a:off x="1952625" y="5572125"/>
             <a:ext cx="47625" cy="47625"/>
           </a:xfrm>
           <a:prstGeom xmlns:a="http://schemas.openxmlformats.org/drawingml/2006/main" prst="rect">
@@ -9997,19 +10220,19 @@
           <p:cNvPr id="26" name="">
             <a:extLst xmlns:a="http://schemas.openxmlformats.org/drawingml/2006/main">
               <a:ext uri="{FF2B5EF4-FFF2-40B4-BE49-F238E27FC236}">
-                <a16:creationId xmlns:a16="http://schemas.microsoft.com/office/drawing/2014/main" id="{CBECEBE8-9901-4C3C-A72C-DE215678D258}"/>
-              </a:ext>
-            </a:extLst>
-          </p:cNvPr>
-          <p:cNvSpPr>
-            <a:spLocks xmlns:a="http://schemas.openxmlformats.org/drawingml/2006/main" noGrp="1"/>
-          </p:cNvSpPr>
-          <p:nvPr/>
-        </p:nvSpPr>
-        <p:spPr>
-          <a:xfrm xmlns:a="http://schemas.openxmlformats.org/drawingml/2006/main">
-            <a:off x="2124075" y="5457825"/>
-            <a:ext cx="7877175" cy="342900"/>
+                <a16:creationId xmlns:a16="http://schemas.microsoft.com/office/drawing/2014/main" id="{B37DF7A7-1AED-4A83-8EE6-46CC05E05A90}"/>
+              </a:ext>
+            </a:extLst>
+          </p:cNvPr>
+          <p:cNvSpPr>
+            <a:spLocks xmlns:a="http://schemas.openxmlformats.org/drawingml/2006/main" noGrp="1"/>
+          </p:cNvSpPr>
+          <p:nvPr/>
+        </p:nvSpPr>
+        <p:spPr>
+          <a:xfrm xmlns:a="http://schemas.openxmlformats.org/drawingml/2006/main">
+            <a:off x="2143125" y="5476875"/>
+            <a:ext cx="7858125" cy="381000"/>
           </a:xfrm>
           <a:prstGeom xmlns:a="http://schemas.openxmlformats.org/drawingml/2006/main" prst="rect">
             <a:avLst/>
@@ -10037,9 +10260,9 @@
                 <a:solidFill>
                   <a:srgbClr val="2B2B2B"/>
                 </a:solidFill>
-                <a:latin typeface="Aptos"/>
-                <a:ea typeface="Aptos"/>
-                <a:cs typeface="Aptos"/>
+                <a:latin typeface="Arial"/>
+                <a:ea typeface="Arial"/>
+                <a:cs typeface="Arial"/>
               </a:defRPr>
             </a:pPr>
             <a:r>
@@ -10047,9 +10270,9 @@
                 <a:solidFill>
                   <a:srgbClr val="2B2B2B"/>
                 </a:solidFill>
-                <a:latin typeface="Aptos"/>
-                <a:ea typeface="Aptos"/>
-                <a:cs typeface="Aptos"/>
+                <a:latin typeface="Arial"/>
+                <a:ea typeface="Arial"/>
+                <a:cs typeface="Arial"/>
               </a:rPr>
               <a:t>The inverse problem compares current predicted from this state map.</a:t>
             </a:r>
@@ -10061,7 +10284,7 @@
           <p:cNvPr id="27" name="">
             <a:extLst xmlns:a="http://schemas.openxmlformats.org/drawingml/2006/main">
               <a:ext uri="{FF2B5EF4-FFF2-40B4-BE49-F238E27FC236}">
-                <a16:creationId xmlns:a16="http://schemas.microsoft.com/office/drawing/2014/main" id="{897E3DEB-210B-47D7-8A9D-A8F81A7AC8A8}"/>
+                <a16:creationId xmlns:a16="http://schemas.microsoft.com/office/drawing/2014/main" id="{ECBB05AC-DB84-4FE2-BB43-79ED2A366D85}"/>
               </a:ext>
             </a:extLst>
           </p:cNvPr>
@@ -10096,7 +10319,7 @@
           <p:cNvPr id="28" name="">
             <a:extLst xmlns:a="http://schemas.openxmlformats.org/drawingml/2006/main">
               <a:ext uri="{FF2B5EF4-FFF2-40B4-BE49-F238E27FC236}">
-                <a16:creationId xmlns:a16="http://schemas.microsoft.com/office/drawing/2014/main" id="{D458CDFC-32EB-4341-BA23-8BC45E899A57}"/>
+                <a16:creationId xmlns:a16="http://schemas.microsoft.com/office/drawing/2014/main" id="{13E48B3E-A7CB-49E1-A67B-84C9EBB65135}"/>
               </a:ext>
             </a:extLst>
           </p:cNvPr>
@@ -10108,7 +10331,7 @@
         <p:spPr>
           <a:xfrm xmlns:a="http://schemas.openxmlformats.org/drawingml/2006/main">
             <a:off x="685800" y="6477000"/>
-            <a:ext cx="6858000" cy="152400"/>
+            <a:ext cx="7239000" cy="152400"/>
           </a:xfrm>
           <a:prstGeom xmlns:a="http://schemas.openxmlformats.org/drawingml/2006/main" prst="rect">
             <a:avLst/>
@@ -10136,9 +10359,9 @@
                 <a:solidFill>
                   <a:srgbClr val="77736D"/>
                 </a:solidFill>
-                <a:latin typeface="Aptos"/>
-                <a:ea typeface="Aptos"/>
-                <a:cs typeface="Aptos"/>
+                <a:latin typeface="Arial"/>
+                <a:ea typeface="Arial"/>
+                <a:cs typeface="Arial"/>
               </a:defRPr>
             </a:pPr>
             <a:r>
@@ -10146,9 +10369,9 @@
                 <a:solidFill>
                   <a:srgbClr val="77736D"/>
                 </a:solidFill>
-                <a:latin typeface="Aptos"/>
-                <a:ea typeface="Aptos"/>
-                <a:cs typeface="Aptos"/>
+                <a:latin typeface="Arial"/>
+                <a:ea typeface="Arial"/>
+                <a:cs typeface="Arial"/>
               </a:rPr>
               <a:t>What the neural network represents</a:t>
             </a:r>
@@ -10158,7 +10381,7 @@
     </p:spTree>
     <p:extLst>
       <p:ext uri="{BB962C8B-B14F-4D97-AF65-F5344CB8AC3E}">
-        <p14:creationId xmlns:p14="http://schemas.microsoft.com/office/powerpoint/2010/main" val="1428849304"/>
+        <p14:creationId xmlns:p14="http://schemas.microsoft.com/office/powerpoint/2010/main" val="2115769868"/>
       </p:ext>
     </p:extLst>
   </p:cSld>
@@ -10182,7 +10405,7 @@
           <p:cNvPr id="1" name="">
             <a:extLst xmlns:a="http://schemas.openxmlformats.org/drawingml/2006/main">
               <a:ext uri="{FF2B5EF4-FFF2-40B4-BE49-F238E27FC236}">
-                <a16:creationId xmlns:a16="http://schemas.microsoft.com/office/drawing/2014/main" id="{2D46D360-34E0-4976-9B71-E1A804F4E1A3}"/>
+                <a16:creationId xmlns:a16="http://schemas.microsoft.com/office/drawing/2014/main" id="{38511BBC-E6ED-4F3F-86AD-59732D074D6B}"/>
               </a:ext>
             </a:extLst>
           </p:cNvPr>
@@ -10217,7 +10440,7 @@
           <p:cNvPr id="2" name="">
             <a:extLst xmlns:a="http://schemas.openxmlformats.org/drawingml/2006/main">
               <a:ext uri="{FF2B5EF4-FFF2-40B4-BE49-F238E27FC236}">
-                <a16:creationId xmlns:a16="http://schemas.microsoft.com/office/drawing/2014/main" id="{14B23291-ED93-40D5-B859-FA3334A13FB2}"/>
+                <a16:creationId xmlns:a16="http://schemas.microsoft.com/office/drawing/2014/main" id="{0302CCED-D64E-45EE-968D-D0778EA59A11}"/>
               </a:ext>
             </a:extLst>
           </p:cNvPr>
@@ -10229,7 +10452,7 @@
         <p:spPr>
           <a:xfrm xmlns:a="http://schemas.openxmlformats.org/drawingml/2006/main">
             <a:off x="685800" y="400050"/>
-            <a:ext cx="4953000" cy="190500"/>
+            <a:ext cx="5143500" cy="190500"/>
           </a:xfrm>
           <a:prstGeom xmlns:a="http://schemas.openxmlformats.org/drawingml/2006/main" prst="rect">
             <a:avLst/>
@@ -10257,9 +10480,9 @@
                 <a:solidFill>
                   <a:srgbClr val="6D6D6D"/>
                 </a:solidFill>
-                <a:latin typeface="Aptos"/>
-                <a:ea typeface="Aptos"/>
-                <a:cs typeface="Aptos"/>
+                <a:latin typeface="Arial"/>
+                <a:ea typeface="Arial"/>
+                <a:cs typeface="Arial"/>
               </a:defRPr>
             </a:pPr>
             <a:r>
@@ -10267,9 +10490,9 @@
                 <a:solidFill>
                   <a:srgbClr val="6D6D6D"/>
                 </a:solidFill>
-                <a:latin typeface="Aptos"/>
-                <a:ea typeface="Aptos"/>
-                <a:cs typeface="Aptos"/>
+                <a:latin typeface="Arial"/>
+                <a:ea typeface="Arial"/>
+                <a:cs typeface="Arial"/>
               </a:rPr>
               <a:t>TRAINING</a:t>
             </a:r>
@@ -10281,7 +10504,7 @@
           <p:cNvPr id="3" name="">
             <a:extLst xmlns:a="http://schemas.openxmlformats.org/drawingml/2006/main">
               <a:ext uri="{FF2B5EF4-FFF2-40B4-BE49-F238E27FC236}">
-                <a16:creationId xmlns:a16="http://schemas.microsoft.com/office/drawing/2014/main" id="{9DE0F05F-5989-49E0-BDA9-0DCB82408E75}"/>
+                <a16:creationId xmlns:a16="http://schemas.microsoft.com/office/drawing/2014/main" id="{C8D08B0B-A51E-478B-BF0A-B26D0770C3EF}"/>
               </a:ext>
             </a:extLst>
           </p:cNvPr>
@@ -10321,9 +10544,9 @@
                 <a:solidFill>
                   <a:srgbClr val="6D6D6D"/>
                 </a:solidFill>
-                <a:latin typeface="Aptos"/>
-                <a:ea typeface="Aptos"/>
-                <a:cs typeface="Aptos"/>
+                <a:latin typeface="Arial"/>
+                <a:ea typeface="Arial"/>
+                <a:cs typeface="Arial"/>
               </a:defRPr>
             </a:pPr>
             <a:r>
@@ -10331,9 +10554,9 @@
                 <a:solidFill>
                   <a:srgbClr val="6D6D6D"/>
                 </a:solidFill>
-                <a:latin typeface="Aptos"/>
-                <a:ea typeface="Aptos"/>
-                <a:cs typeface="Aptos"/>
+                <a:latin typeface="Arial"/>
+                <a:ea typeface="Arial"/>
+                <a:cs typeface="Arial"/>
               </a:rPr>
               <a:t>06</a:t>
             </a:r>
@@ -10345,7 +10568,7 @@
           <p:cNvPr id="4" name="">
             <a:extLst xmlns:a="http://schemas.openxmlformats.org/drawingml/2006/main">
               <a:ext uri="{FF2B5EF4-FFF2-40B4-BE49-F238E27FC236}">
-                <a16:creationId xmlns:a16="http://schemas.microsoft.com/office/drawing/2014/main" id="{6A50212A-A20B-4AF7-8CA1-52EFBE72127F}"/>
+                <a16:creationId xmlns:a16="http://schemas.microsoft.com/office/drawing/2014/main" id="{D729A3B7-0B79-4FF0-A4B7-7EDA20A8A193}"/>
               </a:ext>
             </a:extLst>
           </p:cNvPr>
@@ -10380,7 +10603,7 @@
           <p:cNvPr id="5" name="">
             <a:extLst xmlns:a="http://schemas.openxmlformats.org/drawingml/2006/main">
               <a:ext uri="{FF2B5EF4-FFF2-40B4-BE49-F238E27FC236}">
-                <a16:creationId xmlns:a16="http://schemas.microsoft.com/office/drawing/2014/main" id="{0D5676EB-2ECF-48F7-B7B5-C3D94A9A9041}"/>
+                <a16:creationId xmlns:a16="http://schemas.microsoft.com/office/drawing/2014/main" id="{004ABE74-77C5-4910-B647-C26329242C72}"/>
               </a:ext>
             </a:extLst>
           </p:cNvPr>
@@ -10415,7 +10638,7 @@
           <p:cNvPr id="6" name="">
             <a:extLst xmlns:a="http://schemas.openxmlformats.org/drawingml/2006/main">
               <a:ext uri="{FF2B5EF4-FFF2-40B4-BE49-F238E27FC236}">
-                <a16:creationId xmlns:a16="http://schemas.microsoft.com/office/drawing/2014/main" id="{A907CD94-2AA5-4630-B007-105EECC51212}"/>
+                <a16:creationId xmlns:a16="http://schemas.microsoft.com/office/drawing/2014/main" id="{621D6983-CAE9-4C89-BC6D-745D66AFBCEC}"/>
               </a:ext>
             </a:extLst>
           </p:cNvPr>
@@ -10427,7 +10650,7 @@
         <p:spPr>
           <a:xfrm xmlns:a="http://schemas.openxmlformats.org/drawingml/2006/main">
             <a:off x="685800" y="990600"/>
-            <a:ext cx="10477500" cy="838200"/>
+            <a:ext cx="10096500" cy="838200"/>
           </a:xfrm>
           <a:prstGeom xmlns:a="http://schemas.openxmlformats.org/drawingml/2006/main" prst="rect">
             <a:avLst/>
@@ -10455,9 +10678,9 @@
                 <a:solidFill>
                   <a:srgbClr val="151515"/>
                 </a:solidFill>
-                <a:latin typeface="Aptos Display"/>
-                <a:ea typeface="Aptos Display"/>
-                <a:cs typeface="Aptos Display"/>
+                <a:latin typeface="Arial"/>
+                <a:ea typeface="Arial"/>
+                <a:cs typeface="Arial"/>
               </a:defRPr>
             </a:pPr>
             <a:r>
@@ -10465,9 +10688,9 @@
                 <a:solidFill>
                   <a:srgbClr val="151515"/>
                 </a:solidFill>
-                <a:latin typeface="Aptos Display"/>
-                <a:ea typeface="Aptos Display"/>
-                <a:cs typeface="Aptos Display"/>
+                <a:latin typeface="Arial"/>
+                <a:ea typeface="Arial"/>
+                <a:cs typeface="Arial"/>
               </a:rPr>
               <a:t>Training makes the network satisfy the PNP equations over parameter space.</a:t>
             </a:r>
@@ -10479,7 +10702,7 @@
           <p:cNvPr id="7" name="">
             <a:extLst xmlns:a="http://schemas.openxmlformats.org/drawingml/2006/main">
               <a:ext uri="{FF2B5EF4-FFF2-40B4-BE49-F238E27FC236}">
-                <a16:creationId xmlns:a16="http://schemas.microsoft.com/office/drawing/2014/main" id="{C0184DEE-E36D-4BCF-91F8-CBAAB42836A3}"/>
+                <a16:creationId xmlns:a16="http://schemas.microsoft.com/office/drawing/2014/main" id="{401F3BE5-5D54-4931-853B-F22BA0765D86}"/>
               </a:ext>
             </a:extLst>
           </p:cNvPr>
@@ -10519,9 +10742,9 @@
                 <a:solidFill>
                   <a:srgbClr val="6D6D6D"/>
                 </a:solidFill>
-                <a:latin typeface="Aptos"/>
-                <a:ea typeface="Aptos"/>
-                <a:cs typeface="Aptos"/>
+                <a:latin typeface="Arial"/>
+                <a:ea typeface="Arial"/>
+                <a:cs typeface="Arial"/>
               </a:defRPr>
             </a:pPr>
             <a:r>
@@ -10529,9 +10752,9 @@
                 <a:solidFill>
                   <a:srgbClr val="6D6D6D"/>
                 </a:solidFill>
-                <a:latin typeface="Aptos"/>
-                <a:ea typeface="Aptos"/>
-                <a:cs typeface="Aptos"/>
+                <a:latin typeface="Arial"/>
+                <a:ea typeface="Arial"/>
+                <a:cs typeface="Arial"/>
               </a:rPr>
               <a:t>The reference solver is used later for validation and synthetic observations, not as pointwise training labels.</a:t>
             </a:r>
@@ -10543,7 +10766,7 @@
           <p:cNvPr id="8" name="">
             <a:extLst xmlns:a="http://schemas.openxmlformats.org/drawingml/2006/main">
               <a:ext uri="{FF2B5EF4-FFF2-40B4-BE49-F238E27FC236}">
-                <a16:creationId xmlns:a16="http://schemas.microsoft.com/office/drawing/2014/main" id="{18AC521E-1CC0-4A31-89AA-80DD33124AAD}"/>
+                <a16:creationId xmlns:a16="http://schemas.microsoft.com/office/drawing/2014/main" id="{61F8F7C0-DBBB-4D87-9099-9C1C6B95466E}"/>
               </a:ext>
             </a:extLst>
           </p:cNvPr>
@@ -10576,7 +10799,7 @@
           <p:cNvPr id="9" name="">
             <a:extLst xmlns:a="http://schemas.openxmlformats.org/drawingml/2006/main">
               <a:ext uri="{FF2B5EF4-FFF2-40B4-BE49-F238E27FC236}">
-                <a16:creationId xmlns:a16="http://schemas.microsoft.com/office/drawing/2014/main" id="{5F227AB9-587E-4473-92A9-06126627A39E}"/>
+                <a16:creationId xmlns:a16="http://schemas.microsoft.com/office/drawing/2014/main" id="{4A289B01-9B9C-4E99-B958-89438FB2C6DE}"/>
               </a:ext>
             </a:extLst>
           </p:cNvPr>
@@ -10611,7 +10834,7 @@
           <p:cNvPr id="10" name="">
             <a:extLst xmlns:a="http://schemas.openxmlformats.org/drawingml/2006/main">
               <a:ext uri="{FF2B5EF4-FFF2-40B4-BE49-F238E27FC236}">
-                <a16:creationId xmlns:a16="http://schemas.microsoft.com/office/drawing/2014/main" id="{63F87427-E7B9-4AD0-BFF8-ACD3A07CDE54}"/>
+                <a16:creationId xmlns:a16="http://schemas.microsoft.com/office/drawing/2014/main" id="{1529631B-3812-4DEA-988D-25F68D3F9444}"/>
               </a:ext>
             </a:extLst>
           </p:cNvPr>
@@ -10651,9 +10874,9 @@
                 <a:solidFill>
                   <a:srgbClr val="1F4E79"/>
                 </a:solidFill>
-                <a:latin typeface="Aptos"/>
-                <a:ea typeface="Aptos"/>
-                <a:cs typeface="Aptos"/>
+                <a:latin typeface="Arial"/>
+                <a:ea typeface="Arial"/>
+                <a:cs typeface="Arial"/>
               </a:defRPr>
             </a:pPr>
             <a:r>
@@ -10661,9 +10884,9 @@
                 <a:solidFill>
                   <a:srgbClr val="1F4E79"/>
                 </a:solidFill>
-                <a:latin typeface="Aptos"/>
-                <a:ea typeface="Aptos"/>
-                <a:cs typeface="Aptos"/>
+                <a:latin typeface="Arial"/>
+                <a:ea typeface="Arial"/>
+                <a:cs typeface="Arial"/>
               </a:rPr>
               <a:t>PDE residuals</a:t>
             </a:r>
@@ -10675,7 +10898,7 @@
           <p:cNvPr id="11" name="">
             <a:extLst xmlns:a="http://schemas.openxmlformats.org/drawingml/2006/main">
               <a:ext uri="{FF2B5EF4-FFF2-40B4-BE49-F238E27FC236}">
-                <a16:creationId xmlns:a16="http://schemas.microsoft.com/office/drawing/2014/main" id="{F8A46BF9-7000-4CC1-AF46-D04E4AA7EF79}"/>
+                <a16:creationId xmlns:a16="http://schemas.microsoft.com/office/drawing/2014/main" id="{8DCA6E14-C590-4334-9CD3-C89C8DC2DCB0}"/>
               </a:ext>
             </a:extLst>
           </p:cNvPr>
@@ -10708,7 +10931,7 @@
           <p:cNvPr id="12" name="">
             <a:extLst xmlns:a="http://schemas.openxmlformats.org/drawingml/2006/main">
               <a:ext uri="{FF2B5EF4-FFF2-40B4-BE49-F238E27FC236}">
-                <a16:creationId xmlns:a16="http://schemas.microsoft.com/office/drawing/2014/main" id="{9B3C8772-10BB-43D4-8E08-5E64A56630F1}"/>
+                <a16:creationId xmlns:a16="http://schemas.microsoft.com/office/drawing/2014/main" id="{FBFD1886-C5D3-49ED-852A-FF748E8EE299}"/>
               </a:ext>
             </a:extLst>
           </p:cNvPr>
@@ -10743,7 +10966,7 @@
           <p:cNvPr id="13" name="">
             <a:extLst xmlns:a="http://schemas.openxmlformats.org/drawingml/2006/main">
               <a:ext uri="{FF2B5EF4-FFF2-40B4-BE49-F238E27FC236}">
-                <a16:creationId xmlns:a16="http://schemas.microsoft.com/office/drawing/2014/main" id="{421F8C76-906D-4277-ADD2-F1BC5ED3AFA6}"/>
+                <a16:creationId xmlns:a16="http://schemas.microsoft.com/office/drawing/2014/main" id="{AB6F1E57-804B-4C02-B401-993A96FEDD4C}"/>
               </a:ext>
             </a:extLst>
           </p:cNvPr>
@@ -10783,9 +11006,9 @@
                 <a:solidFill>
                   <a:srgbClr val="008C95"/>
                 </a:solidFill>
-                <a:latin typeface="Aptos"/>
-                <a:ea typeface="Aptos"/>
-                <a:cs typeface="Aptos"/>
+                <a:latin typeface="Arial"/>
+                <a:ea typeface="Arial"/>
+                <a:cs typeface="Arial"/>
               </a:defRPr>
             </a:pPr>
             <a:r>
@@ -10793,9 +11016,9 @@
                 <a:solidFill>
                   <a:srgbClr val="008C95"/>
                 </a:solidFill>
-                <a:latin typeface="Aptos"/>
-                <a:ea typeface="Aptos"/>
-                <a:cs typeface="Aptos"/>
+                <a:latin typeface="Arial"/>
+                <a:ea typeface="Arial"/>
+                <a:cs typeface="Arial"/>
               </a:rPr>
               <a:t>Initial and boundary</a:t>
             </a:r>
@@ -10806,9 +11029,9 @@
                 <a:solidFill>
                   <a:srgbClr val="008C95"/>
                 </a:solidFill>
-                <a:latin typeface="Aptos"/>
-                <a:ea typeface="Aptos"/>
-                <a:cs typeface="Aptos"/>
+                <a:latin typeface="Arial"/>
+                <a:ea typeface="Arial"/>
+                <a:cs typeface="Arial"/>
               </a:defRPr>
             </a:pPr>
             <a:r>
@@ -10816,9 +11039,9 @@
                 <a:solidFill>
                   <a:srgbClr val="008C95"/>
                 </a:solidFill>
-                <a:latin typeface="Aptos"/>
-                <a:ea typeface="Aptos"/>
-                <a:cs typeface="Aptos"/>
+                <a:latin typeface="Arial"/>
+                <a:ea typeface="Arial"/>
+                <a:cs typeface="Arial"/>
               </a:rPr>
               <a:t>conditions</a:t>
             </a:r>
@@ -10830,7 +11053,7 @@
           <p:cNvPr id="14" name="">
             <a:extLst xmlns:a="http://schemas.openxmlformats.org/drawingml/2006/main">
               <a:ext uri="{FF2B5EF4-FFF2-40B4-BE49-F238E27FC236}">
-                <a16:creationId xmlns:a16="http://schemas.microsoft.com/office/drawing/2014/main" id="{B5D0F345-A43C-418F-BB26-062EFA5BC852}"/>
+                <a16:creationId xmlns:a16="http://schemas.microsoft.com/office/drawing/2014/main" id="{07AD2799-CC19-404E-A49A-2E66DDED050A}"/>
               </a:ext>
             </a:extLst>
           </p:cNvPr>
@@ -10863,7 +11086,7 @@
           <p:cNvPr id="15" name="">
             <a:extLst xmlns:a="http://schemas.openxmlformats.org/drawingml/2006/main">
               <a:ext uri="{FF2B5EF4-FFF2-40B4-BE49-F238E27FC236}">
-                <a16:creationId xmlns:a16="http://schemas.microsoft.com/office/drawing/2014/main" id="{F9D9AD76-AC75-487D-B293-3A20AD0A9E60}"/>
+                <a16:creationId xmlns:a16="http://schemas.microsoft.com/office/drawing/2014/main" id="{AC63748B-BF3D-4303-A06F-5D0B8BD1F6A0}"/>
               </a:ext>
             </a:extLst>
           </p:cNvPr>
@@ -10898,7 +11121,7 @@
           <p:cNvPr id="16" name="">
             <a:extLst xmlns:a="http://schemas.openxmlformats.org/drawingml/2006/main">
               <a:ext uri="{FF2B5EF4-FFF2-40B4-BE49-F238E27FC236}">
-                <a16:creationId xmlns:a16="http://schemas.microsoft.com/office/drawing/2014/main" id="{15834EF6-C1FF-4809-B198-DDE55F69C543}"/>
+                <a16:creationId xmlns:a16="http://schemas.microsoft.com/office/drawing/2014/main" id="{6D8C50E1-68CD-4251-B9A5-29A5A7479D03}"/>
               </a:ext>
             </a:extLst>
           </p:cNvPr>
@@ -10938,9 +11161,9 @@
                 <a:solidFill>
                   <a:srgbClr val="D05A2A"/>
                 </a:solidFill>
-                <a:latin typeface="Aptos"/>
-                <a:ea typeface="Aptos"/>
-                <a:cs typeface="Aptos"/>
+                <a:latin typeface="Arial"/>
+                <a:ea typeface="Arial"/>
+                <a:cs typeface="Arial"/>
               </a:defRPr>
             </a:pPr>
             <a:r>
@@ -10948,9 +11171,9 @@
                 <a:solidFill>
                   <a:srgbClr val="D05A2A"/>
                 </a:solidFill>
-                <a:latin typeface="Aptos"/>
-                <a:ea typeface="Aptos"/>
-                <a:cs typeface="Aptos"/>
+                <a:latin typeface="Arial"/>
+                <a:ea typeface="Arial"/>
+                <a:cs typeface="Arial"/>
               </a:rPr>
               <a:t>Parameter-domain</a:t>
             </a:r>
@@ -10961,9 +11184,9 @@
                 <a:solidFill>
                   <a:srgbClr val="D05A2A"/>
                 </a:solidFill>
-                <a:latin typeface="Aptos"/>
-                <a:ea typeface="Aptos"/>
-                <a:cs typeface="Aptos"/>
+                <a:latin typeface="Arial"/>
+                <a:ea typeface="Arial"/>
+                <a:cs typeface="Arial"/>
               </a:defRPr>
             </a:pPr>
             <a:r>
@@ -10971,9 +11194,9 @@
                 <a:solidFill>
                   <a:srgbClr val="D05A2A"/>
                 </a:solidFill>
-                <a:latin typeface="Aptos"/>
-                <a:ea typeface="Aptos"/>
-                <a:cs typeface="Aptos"/>
+                <a:latin typeface="Arial"/>
+                <a:ea typeface="Arial"/>
+                <a:cs typeface="Arial"/>
               </a:rPr>
               <a:t>sampling</a:t>
             </a:r>
@@ -10985,7 +11208,7 @@
           <p:cNvPr id="17" name="">
             <a:extLst xmlns:a="http://schemas.openxmlformats.org/drawingml/2006/main">
               <a:ext uri="{FF2B5EF4-FFF2-40B4-BE49-F238E27FC236}">
-                <a16:creationId xmlns:a16="http://schemas.microsoft.com/office/drawing/2014/main" id="{4BF6B3E0-2F94-4348-BE4F-C26B2CB5AB9B}"/>
+                <a16:creationId xmlns:a16="http://schemas.microsoft.com/office/drawing/2014/main" id="{7D04617C-894D-4097-A33F-1EFBABBA8E4C}"/>
               </a:ext>
             </a:extLst>
           </p:cNvPr>
@@ -11022,13 +11245,13 @@
           <p:nvPr/>
         </p:nvPicPr>
         <p:blipFill>
-          <a:blip xmlns:r="http://schemas.openxmlformats.org/officeDocument/2006/relationships" xmlns:a="http://schemas.openxmlformats.org/drawingml/2006/main" r:embed="R422df9fb6e9249aa"/>
+          <a:blip xmlns:r="http://schemas.openxmlformats.org/officeDocument/2006/relationships" xmlns:a="http://schemas.openxmlformats.org/drawingml/2006/main" r:embed="R256bb700af724516"/>
           <a:stretch xmlns:a="http://schemas.openxmlformats.org/drawingml/2006/main"/>
         </p:blipFill>
         <p:spPr>
           <a:xfrm xmlns:a="http://schemas.openxmlformats.org/drawingml/2006/main">
-            <a:off x="4265049" y="4572000"/>
-            <a:ext cx="3642852" cy="723900"/>
+            <a:off x="4139434" y="4572000"/>
+            <a:ext cx="3894083" cy="723900"/>
           </a:xfrm>
           <a:prstGeom xmlns:a="http://schemas.openxmlformats.org/drawingml/2006/main" prst="rect">
             <a:avLst/>
@@ -11040,7 +11263,7 @@
           <p:cNvPr id="19" name="">
             <a:extLst xmlns:a="http://schemas.openxmlformats.org/drawingml/2006/main">
               <a:ext uri="{FF2B5EF4-FFF2-40B4-BE49-F238E27FC236}">
-                <a16:creationId xmlns:a16="http://schemas.microsoft.com/office/drawing/2014/main" id="{C551156F-A178-448D-9906-C5989941DA4E}"/>
+                <a16:creationId xmlns:a16="http://schemas.microsoft.com/office/drawing/2014/main" id="{A3F05839-EF0B-42B2-8E51-1DA5700E8D1E}"/>
               </a:ext>
             </a:extLst>
           </p:cNvPr>
@@ -11080,9 +11303,9 @@
                 <a:solidFill>
                   <a:srgbClr val="6D6D6D"/>
                 </a:solidFill>
-                <a:latin typeface="Aptos"/>
-                <a:ea typeface="Aptos"/>
-                <a:cs typeface="Aptos"/>
+                <a:latin typeface="Arial"/>
+                <a:ea typeface="Arial"/>
+                <a:cs typeface="Arial"/>
               </a:defRPr>
             </a:pPr>
             <a:r>
@@ -11090,9 +11313,9 @@
                 <a:solidFill>
                   <a:srgbClr val="6D6D6D"/>
                 </a:solidFill>
-                <a:latin typeface="Aptos"/>
-                <a:ea typeface="Aptos"/>
-                <a:cs typeface="Aptos"/>
+                <a:latin typeface="Arial"/>
+                <a:ea typeface="Arial"/>
+                <a:cs typeface="Arial"/>
               </a:rPr>
               <a:t>Current completed run: 500000 Adam steps.</a:t>
             </a:r>
@@ -11104,7 +11327,7 @@
           <p:cNvPr id="20" name="">
             <a:extLst xmlns:a="http://schemas.openxmlformats.org/drawingml/2006/main">
               <a:ext uri="{FF2B5EF4-FFF2-40B4-BE49-F238E27FC236}">
-                <a16:creationId xmlns:a16="http://schemas.microsoft.com/office/drawing/2014/main" id="{39C7265E-64D2-40C0-9537-159AABF52E3B}"/>
+                <a16:creationId xmlns:a16="http://schemas.microsoft.com/office/drawing/2014/main" id="{A41352A3-D346-446F-B9EA-C700C1061F83}"/>
               </a:ext>
             </a:extLst>
           </p:cNvPr>
@@ -11139,7 +11362,7 @@
           <p:cNvPr id="21" name="">
             <a:extLst xmlns:a="http://schemas.openxmlformats.org/drawingml/2006/main">
               <a:ext uri="{FF2B5EF4-FFF2-40B4-BE49-F238E27FC236}">
-                <a16:creationId xmlns:a16="http://schemas.microsoft.com/office/drawing/2014/main" id="{175BEB25-2F48-4786-B203-FDAE929BDC99}"/>
+                <a16:creationId xmlns:a16="http://schemas.microsoft.com/office/drawing/2014/main" id="{25E9EE85-4A03-4C62-9AF3-FA9CC30B32F3}"/>
               </a:ext>
             </a:extLst>
           </p:cNvPr>
@@ -11151,7 +11374,7 @@
         <p:spPr>
           <a:xfrm xmlns:a="http://schemas.openxmlformats.org/drawingml/2006/main">
             <a:off x="685800" y="6477000"/>
-            <a:ext cx="6858000" cy="152400"/>
+            <a:ext cx="7239000" cy="152400"/>
           </a:xfrm>
           <a:prstGeom xmlns:a="http://schemas.openxmlformats.org/drawingml/2006/main" prst="rect">
             <a:avLst/>
@@ -11179,9 +11402,9 @@
                 <a:solidFill>
                   <a:srgbClr val="77736D"/>
                 </a:solidFill>
-                <a:latin typeface="Aptos"/>
-                <a:ea typeface="Aptos"/>
-                <a:cs typeface="Aptos"/>
+                <a:latin typeface="Arial"/>
+                <a:ea typeface="Arial"/>
+                <a:cs typeface="Arial"/>
               </a:defRPr>
             </a:pPr>
             <a:r>
@@ -11189,9 +11412,9 @@
                 <a:solidFill>
                   <a:srgbClr val="77736D"/>
                 </a:solidFill>
-                <a:latin typeface="Aptos"/>
-                <a:ea typeface="Aptos"/>
-                <a:cs typeface="Aptos"/>
+                <a:latin typeface="Arial"/>
+                <a:ea typeface="Arial"/>
+                <a:cs typeface="Arial"/>
               </a:rPr>
               <a:t>Training objective</a:t>
             </a:r>
@@ -11201,7 +11424,7 @@
     </p:spTree>
     <p:extLst>
       <p:ext uri="{BB962C8B-B14F-4D97-AF65-F5344CB8AC3E}">
-        <p14:creationId xmlns:p14="http://schemas.microsoft.com/office/powerpoint/2010/main" val="2099908435"/>
+        <p14:creationId xmlns:p14="http://schemas.microsoft.com/office/powerpoint/2010/main" val="1557562230"/>
       </p:ext>
     </p:extLst>
   </p:cSld>
@@ -11225,7 +11448,7 @@
           <p:cNvPr id="1" name="">
             <a:extLst xmlns:a="http://schemas.openxmlformats.org/drawingml/2006/main">
               <a:ext uri="{FF2B5EF4-FFF2-40B4-BE49-F238E27FC236}">
-                <a16:creationId xmlns:a16="http://schemas.microsoft.com/office/drawing/2014/main" id="{2C9062CB-76B2-4408-9323-23FD978146F2}"/>
+                <a16:creationId xmlns:a16="http://schemas.microsoft.com/office/drawing/2014/main" id="{0C125A7D-9C5D-49C3-8B8A-1D859E4F8688}"/>
               </a:ext>
             </a:extLst>
           </p:cNvPr>
@@ -11260,7 +11483,7 @@
           <p:cNvPr id="2" name="">
             <a:extLst xmlns:a="http://schemas.openxmlformats.org/drawingml/2006/main">
               <a:ext uri="{FF2B5EF4-FFF2-40B4-BE49-F238E27FC236}">
-                <a16:creationId xmlns:a16="http://schemas.microsoft.com/office/drawing/2014/main" id="{4886BE20-32F2-4001-BBCA-3FE83FE97E99}"/>
+                <a16:creationId xmlns:a16="http://schemas.microsoft.com/office/drawing/2014/main" id="{CF977A71-E7A0-4F1C-AFCB-4C6ED1F77BA3}"/>
               </a:ext>
             </a:extLst>
           </p:cNvPr>
@@ -11272,7 +11495,7 @@
         <p:spPr>
           <a:xfrm xmlns:a="http://schemas.openxmlformats.org/drawingml/2006/main">
             <a:off x="685800" y="400050"/>
-            <a:ext cx="4953000" cy="190500"/>
+            <a:ext cx="5143500" cy="190500"/>
           </a:xfrm>
           <a:prstGeom xmlns:a="http://schemas.openxmlformats.org/drawingml/2006/main" prst="rect">
             <a:avLst/>
@@ -11300,9 +11523,9 @@
                 <a:solidFill>
                   <a:srgbClr val="6D6D6D"/>
                 </a:solidFill>
-                <a:latin typeface="Aptos"/>
-                <a:ea typeface="Aptos"/>
-                <a:cs typeface="Aptos"/>
+                <a:latin typeface="Arial"/>
+                <a:ea typeface="Arial"/>
+                <a:cs typeface="Arial"/>
               </a:defRPr>
             </a:pPr>
             <a:r>
@@ -11310,9 +11533,9 @@
                 <a:solidFill>
                   <a:srgbClr val="6D6D6D"/>
                 </a:solidFill>
-                <a:latin typeface="Aptos"/>
-                <a:ea typeface="Aptos"/>
-                <a:cs typeface="Aptos"/>
+                <a:latin typeface="Arial"/>
+                <a:ea typeface="Arial"/>
+                <a:cs typeface="Arial"/>
               </a:rPr>
               <a:t>AMORTIZATION</a:t>
             </a:r>
@@ -11324,7 +11547,7 @@
           <p:cNvPr id="3" name="">
             <a:extLst xmlns:a="http://schemas.openxmlformats.org/drawingml/2006/main">
               <a:ext uri="{FF2B5EF4-FFF2-40B4-BE49-F238E27FC236}">
-                <a16:creationId xmlns:a16="http://schemas.microsoft.com/office/drawing/2014/main" id="{429BB500-4AA7-4542-BA37-12A526FDECF4}"/>
+                <a16:creationId xmlns:a16="http://schemas.microsoft.com/office/drawing/2014/main" id="{CD699DD7-F11D-4291-A429-46D6F7FB0EA6}"/>
               </a:ext>
             </a:extLst>
           </p:cNvPr>
@@ -11364,9 +11587,9 @@
                 <a:solidFill>
                   <a:srgbClr val="6D6D6D"/>
                 </a:solidFill>
-                <a:latin typeface="Aptos"/>
-                <a:ea typeface="Aptos"/>
-                <a:cs typeface="Aptos"/>
+                <a:latin typeface="Arial"/>
+                <a:ea typeface="Arial"/>
+                <a:cs typeface="Arial"/>
               </a:defRPr>
             </a:pPr>
             <a:r>
@@ -11374,9 +11597,9 @@
                 <a:solidFill>
                   <a:srgbClr val="6D6D6D"/>
                 </a:solidFill>
-                <a:latin typeface="Aptos"/>
-                <a:ea typeface="Aptos"/>
-                <a:cs typeface="Aptos"/>
+                <a:latin typeface="Arial"/>
+                <a:ea typeface="Arial"/>
+                <a:cs typeface="Arial"/>
               </a:rPr>
               <a:t>07</a:t>
             </a:r>
@@ -11388,7 +11611,7 @@
           <p:cNvPr id="4" name="">
             <a:extLst xmlns:a="http://schemas.openxmlformats.org/drawingml/2006/main">
               <a:ext uri="{FF2B5EF4-FFF2-40B4-BE49-F238E27FC236}">
-                <a16:creationId xmlns:a16="http://schemas.microsoft.com/office/drawing/2014/main" id="{173542EB-509A-4045-A573-75E7FC0BE8AE}"/>
+                <a16:creationId xmlns:a16="http://schemas.microsoft.com/office/drawing/2014/main" id="{A7FEB97B-BF51-4406-B58A-8DEE1E7733F1}"/>
               </a:ext>
             </a:extLst>
           </p:cNvPr>
@@ -11423,7 +11646,7 @@
           <p:cNvPr id="5" name="">
             <a:extLst xmlns:a="http://schemas.openxmlformats.org/drawingml/2006/main">
               <a:ext uri="{FF2B5EF4-FFF2-40B4-BE49-F238E27FC236}">
-                <a16:creationId xmlns:a16="http://schemas.microsoft.com/office/drawing/2014/main" id="{D317B86E-9F44-4B69-8E05-A76972818619}"/>
+                <a16:creationId xmlns:a16="http://schemas.microsoft.com/office/drawing/2014/main" id="{EF38FA8C-FFEF-4B18-B283-4F69A612B057}"/>
               </a:ext>
             </a:extLst>
           </p:cNvPr>
@@ -11458,7 +11681,7 @@
           <p:cNvPr id="6" name="">
             <a:extLst xmlns:a="http://schemas.openxmlformats.org/drawingml/2006/main">
               <a:ext uri="{FF2B5EF4-FFF2-40B4-BE49-F238E27FC236}">
-                <a16:creationId xmlns:a16="http://schemas.microsoft.com/office/drawing/2014/main" id="{18FD3099-4FD7-4F02-8FD6-F3767ED7DF2A}"/>
+                <a16:creationId xmlns:a16="http://schemas.microsoft.com/office/drawing/2014/main" id="{2BB74B09-5F0E-434C-B8DF-6AF595047A09}"/>
               </a:ext>
             </a:extLst>
           </p:cNvPr>
@@ -11470,7 +11693,7 @@
         <p:spPr>
           <a:xfrm xmlns:a="http://schemas.openxmlformats.org/drawingml/2006/main">
             <a:off x="685800" y="990600"/>
-            <a:ext cx="10572750" cy="723900"/>
+            <a:ext cx="10096500" cy="723900"/>
           </a:xfrm>
           <a:prstGeom xmlns:a="http://schemas.openxmlformats.org/drawingml/2006/main" prst="rect">
             <a:avLst/>
@@ -11498,9 +11721,9 @@
                 <a:solidFill>
                   <a:srgbClr val="151515"/>
                 </a:solidFill>
-                <a:latin typeface="Aptos Display"/>
-                <a:ea typeface="Aptos Display"/>
-                <a:cs typeface="Aptos Display"/>
+                <a:latin typeface="Arial"/>
+                <a:ea typeface="Arial"/>
+                <a:cs typeface="Arial"/>
               </a:defRPr>
             </a:pPr>
             <a:r>
@@ -11508,9 +11731,9 @@
                 <a:solidFill>
                   <a:srgbClr val="151515"/>
                 </a:solidFill>
-                <a:latin typeface="Aptos Display"/>
-                <a:ea typeface="Aptos Display"/>
-                <a:cs typeface="Aptos Display"/>
+                <a:latin typeface="Arial"/>
+                <a:ea typeface="Arial"/>
+                <a:cs typeface="Arial"/>
               </a:rPr>
               <a:t>The computational benefit is reuse across many likelihood evaluations.</a:t>
             </a:r>
@@ -11522,7 +11745,7 @@
           <p:cNvPr id="7" name="">
             <a:extLst xmlns:a="http://schemas.openxmlformats.org/drawingml/2006/main">
               <a:ext uri="{FF2B5EF4-FFF2-40B4-BE49-F238E27FC236}">
-                <a16:creationId xmlns:a16="http://schemas.microsoft.com/office/drawing/2014/main" id="{0F053ADB-2816-46C1-9FFB-BD70C0572AFA}"/>
+                <a16:creationId xmlns:a16="http://schemas.microsoft.com/office/drawing/2014/main" id="{593CF1A8-2FDE-4885-830C-3802119C937D}"/>
               </a:ext>
             </a:extLst>
           </p:cNvPr>
@@ -11555,7 +11778,7 @@
           <p:cNvPr id="8" name="">
             <a:extLst xmlns:a="http://schemas.openxmlformats.org/drawingml/2006/main">
               <a:ext uri="{FF2B5EF4-FFF2-40B4-BE49-F238E27FC236}">
-                <a16:creationId xmlns:a16="http://schemas.microsoft.com/office/drawing/2014/main" id="{A03C3F8C-EEF5-46B1-ACB1-B853731A431D}"/>
+                <a16:creationId xmlns:a16="http://schemas.microsoft.com/office/drawing/2014/main" id="{14F0AD70-F1E4-42AA-9E59-F6EF2C02DA16}"/>
               </a:ext>
             </a:extLst>
           </p:cNvPr>
@@ -11595,9 +11818,9 @@
                 <a:solidFill>
                   <a:srgbClr val="2B2B2B"/>
                 </a:solidFill>
-                <a:latin typeface="Aptos"/>
-                <a:ea typeface="Aptos"/>
-                <a:cs typeface="Aptos"/>
+                <a:latin typeface="Arial"/>
+                <a:ea typeface="Arial"/>
+                <a:cs typeface="Arial"/>
               </a:defRPr>
             </a:pPr>
             <a:r>
@@ -11605,9 +11828,9 @@
                 <a:solidFill>
                   <a:srgbClr val="2B2B2B"/>
                 </a:solidFill>
-                <a:latin typeface="Aptos"/>
-                <a:ea typeface="Aptos"/>
-                <a:cs typeface="Aptos"/>
+                <a:latin typeface="Arial"/>
+                <a:ea typeface="Arial"/>
+                <a:cs typeface="Arial"/>
               </a:rPr>
               <a:t>Benchmark-only inference</a:t>
             </a:r>
@@ -11619,7 +11842,7 @@
           <p:cNvPr id="9" name="">
             <a:extLst xmlns:a="http://schemas.openxmlformats.org/drawingml/2006/main">
               <a:ext uri="{FF2B5EF4-FFF2-40B4-BE49-F238E27FC236}">
-                <a16:creationId xmlns:a16="http://schemas.microsoft.com/office/drawing/2014/main" id="{792B4959-7B69-4470-92AA-7C6A2B2A5A9E}"/>
+                <a16:creationId xmlns:a16="http://schemas.microsoft.com/office/drawing/2014/main" id="{B9420974-FF0B-4CC0-BF31-A514D5043E20}"/>
               </a:ext>
             </a:extLst>
           </p:cNvPr>
@@ -11659,9 +11882,9 @@
                 <a:solidFill>
                   <a:srgbClr val="2B2B2B"/>
                 </a:solidFill>
-                <a:latin typeface="Aptos"/>
-                <a:ea typeface="Aptos"/>
-                <a:cs typeface="Aptos"/>
+                <a:latin typeface="Arial"/>
+                <a:ea typeface="Arial"/>
+                <a:cs typeface="Arial"/>
               </a:defRPr>
             </a:pPr>
             <a:r>
@@ -11669,9 +11892,9 @@
                 <a:solidFill>
                   <a:srgbClr val="2B2B2B"/>
                 </a:solidFill>
-                <a:latin typeface="Aptos"/>
-                <a:ea typeface="Aptos"/>
-                <a:cs typeface="Aptos"/>
+                <a:latin typeface="Arial"/>
+                <a:ea typeface="Arial"/>
+                <a:cs typeface="Arial"/>
               </a:rPr>
               <a:t>candidate parameters</a:t>
             </a:r>
@@ -11682,9 +11905,9 @@
                 <a:solidFill>
                   <a:srgbClr val="2B2B2B"/>
                 </a:solidFill>
-                <a:latin typeface="Aptos"/>
-                <a:ea typeface="Aptos"/>
-                <a:cs typeface="Aptos"/>
+                <a:latin typeface="Arial"/>
+                <a:ea typeface="Arial"/>
+                <a:cs typeface="Arial"/>
               </a:defRPr>
             </a:pPr>
             <a:r>
@@ -11692,9 +11915,9 @@
                 <a:solidFill>
                   <a:srgbClr val="2B2B2B"/>
                 </a:solidFill>
-                <a:latin typeface="Aptos"/>
-                <a:ea typeface="Aptos"/>
-                <a:cs typeface="Aptos"/>
+                <a:latin typeface="Arial"/>
+                <a:ea typeface="Arial"/>
+                <a:cs typeface="Arial"/>
               </a:rPr>
               <a:t>-&gt; numerical PDE solve</a:t>
             </a:r>
@@ -11705,9 +11928,9 @@
                 <a:solidFill>
                   <a:srgbClr val="2B2B2B"/>
                 </a:solidFill>
-                <a:latin typeface="Aptos"/>
-                <a:ea typeface="Aptos"/>
-                <a:cs typeface="Aptos"/>
+                <a:latin typeface="Arial"/>
+                <a:ea typeface="Arial"/>
+                <a:cs typeface="Arial"/>
               </a:defRPr>
             </a:pPr>
             <a:r>
@@ -11715,9 +11938,9 @@
                 <a:solidFill>
                   <a:srgbClr val="2B2B2B"/>
                 </a:solidFill>
-                <a:latin typeface="Aptos"/>
-                <a:ea typeface="Aptos"/>
-                <a:cs typeface="Aptos"/>
+                <a:latin typeface="Arial"/>
+                <a:ea typeface="Arial"/>
+                <a:cs typeface="Arial"/>
               </a:rPr>
               <a:t>-&gt; current prediction</a:t>
             </a:r>
@@ -11729,7 +11952,7 @@
           <p:cNvPr id="10" name="">
             <a:extLst xmlns:a="http://schemas.openxmlformats.org/drawingml/2006/main">
               <a:ext uri="{FF2B5EF4-FFF2-40B4-BE49-F238E27FC236}">
-                <a16:creationId xmlns:a16="http://schemas.microsoft.com/office/drawing/2014/main" id="{D00E7740-6C38-4662-8E97-B2E8C9F3741F}"/>
+                <a16:creationId xmlns:a16="http://schemas.microsoft.com/office/drawing/2014/main" id="{04115130-B8B2-4F95-94DF-6B7DD02DA6D3}"/>
               </a:ext>
             </a:extLst>
           </p:cNvPr>
@@ -11741,7 +11964,7 @@
         <p:spPr>
           <a:xfrm xmlns:a="http://schemas.openxmlformats.org/drawingml/2006/main">
             <a:off x="5238750" y="3600450"/>
-            <a:ext cx="1571625" cy="16193"/>
+            <a:ext cx="1571625" cy="15240"/>
           </a:xfrm>
           <a:prstGeom xmlns:a="http://schemas.openxmlformats.org/drawingml/2006/main" prst="rect">
             <a:avLst/>
@@ -11764,7 +11987,7 @@
           <p:cNvPr id="11" name="">
             <a:extLst xmlns:a="http://schemas.openxmlformats.org/drawingml/2006/main">
               <a:ext uri="{FF2B5EF4-FFF2-40B4-BE49-F238E27FC236}">
-                <a16:creationId xmlns:a16="http://schemas.microsoft.com/office/drawing/2014/main" id="{F1CA64B9-70F6-4999-8B7A-3CC01D6F67E6}"/>
+                <a16:creationId xmlns:a16="http://schemas.microsoft.com/office/drawing/2014/main" id="{456A5263-9AD0-41E3-8F0C-B8D4CC6254A4}"/>
               </a:ext>
             </a:extLst>
           </p:cNvPr>
@@ -11804,9 +12027,9 @@
                 <a:solidFill>
                   <a:srgbClr val="008C95"/>
                 </a:solidFill>
-                <a:latin typeface="Aptos"/>
-                <a:ea typeface="Aptos"/>
-                <a:cs typeface="Aptos"/>
+                <a:latin typeface="Arial"/>
+                <a:ea typeface="Arial"/>
+                <a:cs typeface="Arial"/>
               </a:defRPr>
             </a:pPr>
             <a:r>
@@ -11814,9 +12037,9 @@
                 <a:solidFill>
                   <a:srgbClr val="008C95"/>
                 </a:solidFill>
-                <a:latin typeface="Aptos"/>
-                <a:ea typeface="Aptos"/>
-                <a:cs typeface="Aptos"/>
+                <a:latin typeface="Arial"/>
+                <a:ea typeface="Arial"/>
+                <a:cs typeface="Arial"/>
               </a:rPr>
               <a:t>&gt;</a:t>
             </a:r>
@@ -11828,7 +12051,7 @@
           <p:cNvPr id="12" name="">
             <a:extLst xmlns:a="http://schemas.openxmlformats.org/drawingml/2006/main">
               <a:ext uri="{FF2B5EF4-FFF2-40B4-BE49-F238E27FC236}">
-                <a16:creationId xmlns:a16="http://schemas.microsoft.com/office/drawing/2014/main" id="{B858CE4A-785C-40A0-A261-B9E52C0238AE}"/>
+                <a16:creationId xmlns:a16="http://schemas.microsoft.com/office/drawing/2014/main" id="{AB438E5E-840D-4C2A-A8C7-E629A7D7EBF0}"/>
               </a:ext>
             </a:extLst>
           </p:cNvPr>
@@ -11868,9 +12091,9 @@
                 <a:solidFill>
                   <a:srgbClr val="6D6D6D"/>
                 </a:solidFill>
-                <a:latin typeface="Aptos"/>
-                <a:ea typeface="Aptos"/>
-                <a:cs typeface="Aptos"/>
+                <a:latin typeface="Arial"/>
+                <a:ea typeface="Arial"/>
+                <a:cs typeface="Arial"/>
               </a:defRPr>
             </a:pPr>
             <a:r>
@@ -11878,9 +12101,9 @@
                 <a:solidFill>
                   <a:srgbClr val="6D6D6D"/>
                 </a:solidFill>
-                <a:latin typeface="Aptos"/>
-                <a:ea typeface="Aptos"/>
-                <a:cs typeface="Aptos"/>
+                <a:latin typeface="Arial"/>
+                <a:ea typeface="Arial"/>
+                <a:cs typeface="Arial"/>
               </a:rPr>
               <a:t>many times</a:t>
             </a:r>
@@ -11892,7 +12115,7 @@
           <p:cNvPr id="13" name="">
             <a:extLst xmlns:a="http://schemas.openxmlformats.org/drawingml/2006/main">
               <a:ext uri="{FF2B5EF4-FFF2-40B4-BE49-F238E27FC236}">
-                <a16:creationId xmlns:a16="http://schemas.microsoft.com/office/drawing/2014/main" id="{95863A13-3F98-4B3E-8F79-DD8F20B56C47}"/>
+                <a16:creationId xmlns:a16="http://schemas.microsoft.com/office/drawing/2014/main" id="{431CC979-6343-4D37-BE72-5E24D6DD2D43}"/>
               </a:ext>
             </a:extLst>
           </p:cNvPr>
@@ -11925,7 +12148,7 @@
           <p:cNvPr id="14" name="">
             <a:extLst xmlns:a="http://schemas.openxmlformats.org/drawingml/2006/main">
               <a:ext uri="{FF2B5EF4-FFF2-40B4-BE49-F238E27FC236}">
-                <a16:creationId xmlns:a16="http://schemas.microsoft.com/office/drawing/2014/main" id="{4FA65D93-0371-461E-90C4-F365EB0AB5D9}"/>
+                <a16:creationId xmlns:a16="http://schemas.microsoft.com/office/drawing/2014/main" id="{8BBA091B-2FF8-48DF-A5DC-6ED4B6C5BD63}"/>
               </a:ext>
             </a:extLst>
           </p:cNvPr>
@@ -11960,7 +12183,7 @@
           <p:cNvPr id="15" name="">
             <a:extLst xmlns:a="http://schemas.openxmlformats.org/drawingml/2006/main">
               <a:ext uri="{FF2B5EF4-FFF2-40B4-BE49-F238E27FC236}">
-                <a16:creationId xmlns:a16="http://schemas.microsoft.com/office/drawing/2014/main" id="{A7B12FED-40AE-4515-BA57-F0C21C1BC6B3}"/>
+                <a16:creationId xmlns:a16="http://schemas.microsoft.com/office/drawing/2014/main" id="{5D9A2907-633A-43A7-90A6-C5F8C9ED0E56}"/>
               </a:ext>
             </a:extLst>
           </p:cNvPr>
@@ -12000,9 +12223,9 @@
                 <a:solidFill>
                   <a:srgbClr val="008C95"/>
                 </a:solidFill>
-                <a:latin typeface="Aptos"/>
-                <a:ea typeface="Aptos"/>
-                <a:cs typeface="Aptos"/>
+                <a:latin typeface="Arial"/>
+                <a:ea typeface="Arial"/>
+                <a:cs typeface="Arial"/>
               </a:defRPr>
             </a:pPr>
             <a:r>
@@ -12010,9 +12233,9 @@
                 <a:solidFill>
                   <a:srgbClr val="008C95"/>
                 </a:solidFill>
-                <a:latin typeface="Aptos"/>
-                <a:ea typeface="Aptos"/>
-                <a:cs typeface="Aptos"/>
+                <a:latin typeface="Arial"/>
+                <a:ea typeface="Arial"/>
+                <a:cs typeface="Arial"/>
               </a:rPr>
               <a:t>PINN-based inference</a:t>
             </a:r>
@@ -12024,7 +12247,7 @@
           <p:cNvPr id="16" name="">
             <a:extLst xmlns:a="http://schemas.openxmlformats.org/drawingml/2006/main">
               <a:ext uri="{FF2B5EF4-FFF2-40B4-BE49-F238E27FC236}">
-                <a16:creationId xmlns:a16="http://schemas.microsoft.com/office/drawing/2014/main" id="{FD17A781-81BE-4A3B-84A3-FED033F62C75}"/>
+                <a16:creationId xmlns:a16="http://schemas.microsoft.com/office/drawing/2014/main" id="{83D49D83-8098-48A1-B055-E7461F80E06B}"/>
               </a:ext>
             </a:extLst>
           </p:cNvPr>
@@ -12064,9 +12287,9 @@
                 <a:solidFill>
                   <a:srgbClr val="2B2B2B"/>
                 </a:solidFill>
-                <a:latin typeface="Aptos"/>
-                <a:ea typeface="Aptos"/>
-                <a:cs typeface="Aptos"/>
+                <a:latin typeface="Arial"/>
+                <a:ea typeface="Arial"/>
+                <a:cs typeface="Arial"/>
               </a:defRPr>
             </a:pPr>
             <a:r>
@@ -12074,9 +12297,9 @@
                 <a:solidFill>
                   <a:srgbClr val="2B2B2B"/>
                 </a:solidFill>
-                <a:latin typeface="Aptos"/>
-                <a:ea typeface="Aptos"/>
-                <a:cs typeface="Aptos"/>
+                <a:latin typeface="Arial"/>
+                <a:ea typeface="Arial"/>
+                <a:cs typeface="Arial"/>
               </a:rPr>
               <a:t>candidate parameters</a:t>
             </a:r>
@@ -12087,9 +12310,9 @@
                 <a:solidFill>
                   <a:srgbClr val="2B2B2B"/>
                 </a:solidFill>
-                <a:latin typeface="Aptos"/>
-                <a:ea typeface="Aptos"/>
-                <a:cs typeface="Aptos"/>
+                <a:latin typeface="Arial"/>
+                <a:ea typeface="Arial"/>
+                <a:cs typeface="Arial"/>
               </a:defRPr>
             </a:pPr>
             <a:r>
@@ -12097,9 +12320,9 @@
                 <a:solidFill>
                   <a:srgbClr val="2B2B2B"/>
                 </a:solidFill>
-                <a:latin typeface="Aptos"/>
-                <a:ea typeface="Aptos"/>
-                <a:cs typeface="Aptos"/>
+                <a:latin typeface="Arial"/>
+                <a:ea typeface="Arial"/>
+                <a:cs typeface="Arial"/>
               </a:rPr>
               <a:t>-&gt; trained PINN evaluation</a:t>
             </a:r>
@@ -12110,9 +12333,9 @@
                 <a:solidFill>
                   <a:srgbClr val="2B2B2B"/>
                 </a:solidFill>
-                <a:latin typeface="Aptos"/>
-                <a:ea typeface="Aptos"/>
-                <a:cs typeface="Aptos"/>
+                <a:latin typeface="Arial"/>
+                <a:ea typeface="Arial"/>
+                <a:cs typeface="Arial"/>
               </a:defRPr>
             </a:pPr>
             <a:r>
@@ -12120,9 +12343,9 @@
                 <a:solidFill>
                   <a:srgbClr val="2B2B2B"/>
                 </a:solidFill>
-                <a:latin typeface="Aptos"/>
-                <a:ea typeface="Aptos"/>
-                <a:cs typeface="Aptos"/>
+                <a:latin typeface="Arial"/>
+                <a:ea typeface="Arial"/>
+                <a:cs typeface="Arial"/>
               </a:rPr>
               <a:t>-&gt; current prediction</a:t>
             </a:r>
@@ -12134,7 +12357,7 @@
           <p:cNvPr id="17" name="">
             <a:extLst xmlns:a="http://schemas.openxmlformats.org/drawingml/2006/main">
               <a:ext uri="{FF2B5EF4-FFF2-40B4-BE49-F238E27FC236}">
-                <a16:creationId xmlns:a16="http://schemas.microsoft.com/office/drawing/2014/main" id="{7EEC12D2-C97A-431C-830F-2562AD016A78}"/>
+                <a16:creationId xmlns:a16="http://schemas.microsoft.com/office/drawing/2014/main" id="{745EB0A9-F584-4FE7-AE2E-AD9229BAF09E}"/>
               </a:ext>
             </a:extLst>
           </p:cNvPr>
@@ -12174,9 +12397,9 @@
                 <a:solidFill>
                   <a:srgbClr val="6D6D6D"/>
                 </a:solidFill>
-                <a:latin typeface="Aptos"/>
-                <a:ea typeface="Aptos"/>
-                <a:cs typeface="Aptos"/>
+                <a:latin typeface="Arial"/>
+                <a:ea typeface="Arial"/>
+                <a:cs typeface="Arial"/>
               </a:defRPr>
             </a:pPr>
             <a:r>
@@ -12184,9 +12407,9 @@
                 <a:solidFill>
                   <a:srgbClr val="6D6D6D"/>
                 </a:solidFill>
-                <a:latin typeface="Aptos"/>
-                <a:ea typeface="Aptos"/>
-                <a:cs typeface="Aptos"/>
+                <a:latin typeface="Arial"/>
+                <a:ea typeface="Arial"/>
+                <a:cs typeface="Arial"/>
               </a:rPr>
               <a:t>Training is expensive once; inference becomes useful when the forward surrogate is reused many times.</a:t>
             </a:r>
@@ -12198,7 +12421,7 @@
           <p:cNvPr id="18" name="">
             <a:extLst xmlns:a="http://schemas.openxmlformats.org/drawingml/2006/main">
               <a:ext uri="{FF2B5EF4-FFF2-40B4-BE49-F238E27FC236}">
-                <a16:creationId xmlns:a16="http://schemas.microsoft.com/office/drawing/2014/main" id="{663A0AC3-86F3-4AF6-8C26-5D0224540546}"/>
+                <a16:creationId xmlns:a16="http://schemas.microsoft.com/office/drawing/2014/main" id="{F0570C13-6AE0-4BA4-807B-9F6ADE8B3B7A}"/>
               </a:ext>
             </a:extLst>
           </p:cNvPr>
@@ -12233,7 +12456,7 @@
           <p:cNvPr id="19" name="">
             <a:extLst xmlns:a="http://schemas.openxmlformats.org/drawingml/2006/main">
               <a:ext uri="{FF2B5EF4-FFF2-40B4-BE49-F238E27FC236}">
-                <a16:creationId xmlns:a16="http://schemas.microsoft.com/office/drawing/2014/main" id="{D3CB49D9-7BA1-46F3-BC71-6B839950A39D}"/>
+                <a16:creationId xmlns:a16="http://schemas.microsoft.com/office/drawing/2014/main" id="{405BE8FA-9D21-4F93-B26C-B162A66047AB}"/>
               </a:ext>
             </a:extLst>
           </p:cNvPr>
@@ -12245,7 +12468,7 @@
         <p:spPr>
           <a:xfrm xmlns:a="http://schemas.openxmlformats.org/drawingml/2006/main">
             <a:off x="685800" y="6477000"/>
-            <a:ext cx="6858000" cy="152400"/>
+            <a:ext cx="7239000" cy="152400"/>
           </a:xfrm>
           <a:prstGeom xmlns:a="http://schemas.openxmlformats.org/drawingml/2006/main" prst="rect">
             <a:avLst/>
@@ -12273,9 +12496,9 @@
                 <a:solidFill>
                   <a:srgbClr val="77736D"/>
                 </a:solidFill>
-                <a:latin typeface="Aptos"/>
-                <a:ea typeface="Aptos"/>
-                <a:cs typeface="Aptos"/>
+                <a:latin typeface="Arial"/>
+                <a:ea typeface="Arial"/>
+                <a:cs typeface="Arial"/>
               </a:defRPr>
             </a:pPr>
             <a:r>
@@ -12283,9 +12506,9 @@
                 <a:solidFill>
                   <a:srgbClr val="77736D"/>
                 </a:solidFill>
-                <a:latin typeface="Aptos"/>
-                <a:ea typeface="Aptos"/>
-                <a:cs typeface="Aptos"/>
+                <a:latin typeface="Arial"/>
+                <a:ea typeface="Arial"/>
+                <a:cs typeface="Arial"/>
               </a:rPr>
               <a:t>Why a PINN is useful here</a:t>
             </a:r>
@@ -12295,7 +12518,7 @@
     </p:spTree>
     <p:extLst>
       <p:ext uri="{BB962C8B-B14F-4D97-AF65-F5344CB8AC3E}">
-        <p14:creationId xmlns:p14="http://schemas.microsoft.com/office/powerpoint/2010/main" val="876891448"/>
+        <p14:creationId xmlns:p14="http://schemas.microsoft.com/office/powerpoint/2010/main" val="1606377978"/>
       </p:ext>
     </p:extLst>
   </p:cSld>
@@ -12319,7 +12542,7 @@
           <p:cNvPr id="1" name="">
             <a:extLst xmlns:a="http://schemas.openxmlformats.org/drawingml/2006/main">
               <a:ext uri="{FF2B5EF4-FFF2-40B4-BE49-F238E27FC236}">
-                <a16:creationId xmlns:a16="http://schemas.microsoft.com/office/drawing/2014/main" id="{6DAC57CE-E433-4740-BD60-8E2ED184DC97}"/>
+                <a16:creationId xmlns:a16="http://schemas.microsoft.com/office/drawing/2014/main" id="{584EE93C-34F9-404A-8587-889F421EE759}"/>
               </a:ext>
             </a:extLst>
           </p:cNvPr>
@@ -12354,7 +12577,7 @@
           <p:cNvPr id="2" name="">
             <a:extLst xmlns:a="http://schemas.openxmlformats.org/drawingml/2006/main">
               <a:ext uri="{FF2B5EF4-FFF2-40B4-BE49-F238E27FC236}">
-                <a16:creationId xmlns:a16="http://schemas.microsoft.com/office/drawing/2014/main" id="{8444715F-BF63-499A-BC8A-B7C02847B7A3}"/>
+                <a16:creationId xmlns:a16="http://schemas.microsoft.com/office/drawing/2014/main" id="{A7492087-E215-426D-B57D-2FD792F18F0A}"/>
               </a:ext>
             </a:extLst>
           </p:cNvPr>
@@ -12366,7 +12589,7 @@
         <p:spPr>
           <a:xfrm xmlns:a="http://schemas.openxmlformats.org/drawingml/2006/main">
             <a:off x="685800" y="400050"/>
-            <a:ext cx="4953000" cy="190500"/>
+            <a:ext cx="5143500" cy="190500"/>
           </a:xfrm>
           <a:prstGeom xmlns:a="http://schemas.openxmlformats.org/drawingml/2006/main" prst="rect">
             <a:avLst/>
@@ -12394,9 +12617,9 @@
                 <a:solidFill>
                   <a:srgbClr val="6D6D6D"/>
                 </a:solidFill>
-                <a:latin typeface="Aptos"/>
-                <a:ea typeface="Aptos"/>
-                <a:cs typeface="Aptos"/>
+                <a:latin typeface="Arial"/>
+                <a:ea typeface="Arial"/>
+                <a:cs typeface="Arial"/>
               </a:defRPr>
             </a:pPr>
             <a:r>
@@ -12404,9 +12627,9 @@
                 <a:solidFill>
                   <a:srgbClr val="6D6D6D"/>
                 </a:solidFill>
-                <a:latin typeface="Aptos"/>
-                <a:ea typeface="Aptos"/>
-                <a:cs typeface="Aptos"/>
+                <a:latin typeface="Arial"/>
+                <a:ea typeface="Arial"/>
+                <a:cs typeface="Arial"/>
               </a:rPr>
               <a:t>SYNTHETIC EXPERIMENT</a:t>
             </a:r>
@@ -12418,7 +12641,7 @@
           <p:cNvPr id="3" name="">
             <a:extLst xmlns:a="http://schemas.openxmlformats.org/drawingml/2006/main">
               <a:ext uri="{FF2B5EF4-FFF2-40B4-BE49-F238E27FC236}">
-                <a16:creationId xmlns:a16="http://schemas.microsoft.com/office/drawing/2014/main" id="{CE25D70D-1D08-412B-B481-2B6B8562F9EF}"/>
+                <a16:creationId xmlns:a16="http://schemas.microsoft.com/office/drawing/2014/main" id="{895EC075-DC1C-477F-B52A-A7254E2AFCB3}"/>
               </a:ext>
             </a:extLst>
           </p:cNvPr>
@@ -12458,9 +12681,9 @@
                 <a:solidFill>
                   <a:srgbClr val="6D6D6D"/>
                 </a:solidFill>
-                <a:latin typeface="Aptos"/>
-                <a:ea typeface="Aptos"/>
-                <a:cs typeface="Aptos"/>
+                <a:latin typeface="Arial"/>
+                <a:ea typeface="Arial"/>
+                <a:cs typeface="Arial"/>
               </a:defRPr>
             </a:pPr>
             <a:r>
@@ -12468,9 +12691,9 @@
                 <a:solidFill>
                   <a:srgbClr val="6D6D6D"/>
                 </a:solidFill>
-                <a:latin typeface="Aptos"/>
-                <a:ea typeface="Aptos"/>
-                <a:cs typeface="Aptos"/>
+                <a:latin typeface="Arial"/>
+                <a:ea typeface="Arial"/>
+                <a:cs typeface="Arial"/>
               </a:rPr>
               <a:t>08</a:t>
             </a:r>
@@ -12482,7 +12705,7 @@
           <p:cNvPr id="4" name="">
             <a:extLst xmlns:a="http://schemas.openxmlformats.org/drawingml/2006/main">
               <a:ext uri="{FF2B5EF4-FFF2-40B4-BE49-F238E27FC236}">
-                <a16:creationId xmlns:a16="http://schemas.microsoft.com/office/drawing/2014/main" id="{375A3478-8FE7-49D3-9ED7-1A28AEA5E8E7}"/>
+                <a16:creationId xmlns:a16="http://schemas.microsoft.com/office/drawing/2014/main" id="{EA529EF3-ACDC-4E61-BB20-8ACB0E7BB64E}"/>
               </a:ext>
             </a:extLst>
           </p:cNvPr>
@@ -12517,7 +12740,7 @@
           <p:cNvPr id="5" name="">
             <a:extLst xmlns:a="http://schemas.openxmlformats.org/drawingml/2006/main">
               <a:ext uri="{FF2B5EF4-FFF2-40B4-BE49-F238E27FC236}">
-                <a16:creationId xmlns:a16="http://schemas.microsoft.com/office/drawing/2014/main" id="{32C56EA8-0397-43EF-B8CA-222C68C79896}"/>
+                <a16:creationId xmlns:a16="http://schemas.microsoft.com/office/drawing/2014/main" id="{1E7237E7-8806-4086-B989-FC1179F2C66F}"/>
               </a:ext>
             </a:extLst>
           </p:cNvPr>
@@ -12552,7 +12775,7 @@
           <p:cNvPr id="6" name="">
             <a:extLst xmlns:a="http://schemas.openxmlformats.org/drawingml/2006/main">
               <a:ext uri="{FF2B5EF4-FFF2-40B4-BE49-F238E27FC236}">
-                <a16:creationId xmlns:a16="http://schemas.microsoft.com/office/drawing/2014/main" id="{CC01488E-0ABF-4609-A506-90CE43B5887B}"/>
+                <a16:creationId xmlns:a16="http://schemas.microsoft.com/office/drawing/2014/main" id="{FEB0E761-66B7-444C-AE94-63E90D549725}"/>
               </a:ext>
             </a:extLst>
           </p:cNvPr>
@@ -12564,7 +12787,7 @@
         <p:spPr>
           <a:xfrm xmlns:a="http://schemas.openxmlformats.org/drawingml/2006/main">
             <a:off x="685800" y="990600"/>
-            <a:ext cx="10477500" cy="838200"/>
+            <a:ext cx="10096500" cy="838200"/>
           </a:xfrm>
           <a:prstGeom xmlns:a="http://schemas.openxmlformats.org/drawingml/2006/main" prst="rect">
             <a:avLst/>
@@ -12592,9 +12815,9 @@
                 <a:solidFill>
                   <a:srgbClr val="151515"/>
                 </a:solidFill>
-                <a:latin typeface="Aptos Display"/>
-                <a:ea typeface="Aptos Display"/>
-                <a:cs typeface="Aptos Display"/>
+                <a:latin typeface="Arial"/>
+                <a:ea typeface="Arial"/>
+                <a:cs typeface="Arial"/>
               </a:defRPr>
             </a:pPr>
             <a:r>
@@ -12602,9 +12825,9 @@
                 <a:solidFill>
                   <a:srgbClr val="151515"/>
                 </a:solidFill>
-                <a:latin typeface="Aptos Display"/>
-                <a:ea typeface="Aptos Display"/>
-                <a:cs typeface="Aptos Display"/>
+                <a:latin typeface="Arial"/>
+                <a:ea typeface="Arial"/>
+                <a:cs typeface="Arial"/>
               </a:rPr>
               <a:t>The current data are generated independently of the PINN.</a:t>
             </a:r>
@@ -12616,18 +12839,18 @@
           <p:cNvPr id="7" name="">
             <a:extLst xmlns:a="http://schemas.openxmlformats.org/drawingml/2006/main">
               <a:ext uri="{FF2B5EF4-FFF2-40B4-BE49-F238E27FC236}">
-                <a16:creationId xmlns:a16="http://schemas.microsoft.com/office/drawing/2014/main" id="{B8079818-9785-4683-8544-C63A997C1274}"/>
-              </a:ext>
-            </a:extLst>
-          </p:cNvPr>
-          <p:cNvSpPr>
-            <a:spLocks xmlns:a="http://schemas.openxmlformats.org/drawingml/2006/main" noGrp="1"/>
-          </p:cNvSpPr>
-          <p:nvPr/>
-        </p:nvSpPr>
-        <p:spPr>
-          <a:xfrm xmlns:a="http://schemas.openxmlformats.org/drawingml/2006/main">
-            <a:off x="704850" y="1866900"/>
+                <a16:creationId xmlns:a16="http://schemas.microsoft.com/office/drawing/2014/main" id="{FDA4C2A7-CCB3-4065-BAFF-0E3821CD81E4}"/>
+              </a:ext>
+            </a:extLst>
+          </p:cNvPr>
+          <p:cNvSpPr>
+            <a:spLocks xmlns:a="http://schemas.openxmlformats.org/drawingml/2006/main" noGrp="1"/>
+          </p:cNvSpPr>
+          <p:nvPr/>
+        </p:nvSpPr>
+        <p:spPr>
+          <a:xfrm xmlns:a="http://schemas.openxmlformats.org/drawingml/2006/main">
+            <a:off x="704850" y="1885950"/>
             <a:ext cx="9429750" cy="419100"/>
           </a:xfrm>
           <a:prstGeom xmlns:a="http://schemas.openxmlformats.org/drawingml/2006/main" prst="rect">
@@ -12656,9 +12879,9 @@
                 <a:solidFill>
                   <a:srgbClr val="6D6D6D"/>
                 </a:solidFill>
-                <a:latin typeface="Aptos"/>
-                <a:ea typeface="Aptos"/>
-                <a:cs typeface="Aptos"/>
+                <a:latin typeface="Arial"/>
+                <a:ea typeface="Arial"/>
+                <a:cs typeface="Arial"/>
               </a:defRPr>
             </a:pPr>
             <a:r>
@@ -12666,9 +12889,9 @@
                 <a:solidFill>
                   <a:srgbClr val="6D6D6D"/>
                 </a:solidFill>
-                <a:latin typeface="Aptos"/>
-                <a:ea typeface="Aptos"/>
-                <a:cs typeface="Aptos"/>
+                <a:latin typeface="Arial"/>
+                <a:ea typeface="Arial"/>
+                <a:cs typeface="Arial"/>
               </a:rPr>
               <a:t>This keeps the inverse test honest: the surrogate is tested against a separate numerical model.</a:t>
             </a:r>
@@ -12680,7 +12903,7 @@
           <p:cNvPr id="8" name="">
             <a:extLst xmlns:a="http://schemas.openxmlformats.org/drawingml/2006/main">
               <a:ext uri="{FF2B5EF4-FFF2-40B4-BE49-F238E27FC236}">
-                <a16:creationId xmlns:a16="http://schemas.microsoft.com/office/drawing/2014/main" id="{7567AAEC-31C7-443D-9F87-8A6E1D94427D}"/>
+                <a16:creationId xmlns:a16="http://schemas.microsoft.com/office/drawing/2014/main" id="{564D05D3-7C7C-4DF0-AD3E-25AF2E732F0A}"/>
               </a:ext>
             </a:extLst>
           </p:cNvPr>
@@ -12713,7 +12936,7 @@
           <p:cNvPr id="9" name="">
             <a:extLst xmlns:a="http://schemas.openxmlformats.org/drawingml/2006/main">
               <a:ext uri="{FF2B5EF4-FFF2-40B4-BE49-F238E27FC236}">
-                <a16:creationId xmlns:a16="http://schemas.microsoft.com/office/drawing/2014/main" id="{34B2C464-50EA-4024-BEB5-CA69CAA9E600}"/>
+                <a16:creationId xmlns:a16="http://schemas.microsoft.com/office/drawing/2014/main" id="{451D9B2D-1E5B-42E4-9DB7-379C87143B63}"/>
               </a:ext>
             </a:extLst>
           </p:cNvPr>
@@ -12748,7 +12971,7 @@
           <p:cNvPr id="10" name="">
             <a:extLst xmlns:a="http://schemas.openxmlformats.org/drawingml/2006/main">
               <a:ext uri="{FF2B5EF4-FFF2-40B4-BE49-F238E27FC236}">
-                <a16:creationId xmlns:a16="http://schemas.microsoft.com/office/drawing/2014/main" id="{6F1E4DD0-7330-4A56-BE66-28DF2D1C77F7}"/>
+                <a16:creationId xmlns:a16="http://schemas.microsoft.com/office/drawing/2014/main" id="{37DE2335-D5F9-46C2-89E6-D0B42E14E586}"/>
               </a:ext>
             </a:extLst>
           </p:cNvPr>
@@ -12788,9 +13011,9 @@
                 <a:solidFill>
                   <a:srgbClr val="D05A2A"/>
                 </a:solidFill>
-                <a:latin typeface="Aptos"/>
-                <a:ea typeface="Aptos"/>
-                <a:cs typeface="Aptos"/>
+                <a:latin typeface="Arial"/>
+                <a:ea typeface="Arial"/>
+                <a:cs typeface="Arial"/>
               </a:defRPr>
             </a:pPr>
             <a:r>
@@ -12798,9 +13021,9 @@
                 <a:solidFill>
                   <a:srgbClr val="D05A2A"/>
                 </a:solidFill>
-                <a:latin typeface="Aptos"/>
-                <a:ea typeface="Aptos"/>
-                <a:cs typeface="Aptos"/>
+                <a:latin typeface="Arial"/>
+                <a:ea typeface="Arial"/>
+                <a:cs typeface="Arial"/>
               </a:rPr>
               <a:t>true case</a:t>
             </a:r>
@@ -12812,7 +13035,7 @@
           <p:cNvPr id="11" name="">
             <a:extLst xmlns:a="http://schemas.openxmlformats.org/drawingml/2006/main">
               <a:ext uri="{FF2B5EF4-FFF2-40B4-BE49-F238E27FC236}">
-                <a16:creationId xmlns:a16="http://schemas.microsoft.com/office/drawing/2014/main" id="{F36CB056-6716-448D-88C9-D9BCA4B3C1C3}"/>
+                <a16:creationId xmlns:a16="http://schemas.microsoft.com/office/drawing/2014/main" id="{4CD0974E-2006-4DD5-841B-69E49870991B}"/>
               </a:ext>
             </a:extLst>
           </p:cNvPr>
@@ -12852,9 +13075,9 @@
                 <a:solidFill>
                   <a:srgbClr val="2B2B2B"/>
                 </a:solidFill>
-                <a:latin typeface="Aptos"/>
-                <a:ea typeface="Aptos"/>
-                <a:cs typeface="Aptos"/>
+                <a:latin typeface="Arial"/>
+                <a:ea typeface="Arial"/>
+                <a:cs typeface="Arial"/>
               </a:defRPr>
             </a:pPr>
             <a:r>
@@ -12862,9 +13085,9 @@
                 <a:solidFill>
                   <a:srgbClr val="2B2B2B"/>
                 </a:solidFill>
-                <a:latin typeface="Aptos"/>
-                <a:ea typeface="Aptos"/>
-                <a:cs typeface="Aptos"/>
+                <a:latin typeface="Arial"/>
+                <a:ea typeface="Arial"/>
+                <a:cs typeface="Arial"/>
               </a:rPr>
               <a:t>Dp = 1.25</a:t>
             </a:r>
@@ -12875,9 +13098,9 @@
                 <a:solidFill>
                   <a:srgbClr val="2B2B2B"/>
                 </a:solidFill>
-                <a:latin typeface="Aptos"/>
-                <a:ea typeface="Aptos"/>
-                <a:cs typeface="Aptos"/>
+                <a:latin typeface="Arial"/>
+                <a:ea typeface="Arial"/>
+                <a:cs typeface="Arial"/>
               </a:defRPr>
             </a:pPr>
             <a:r>
@@ -12885,9 +13108,9 @@
                 <a:solidFill>
                   <a:srgbClr val="2B2B2B"/>
                 </a:solidFill>
-                <a:latin typeface="Aptos"/>
-                <a:ea typeface="Aptos"/>
-                <a:cs typeface="Aptos"/>
+                <a:latin typeface="Arial"/>
+                <a:ea typeface="Arial"/>
+                <a:cs typeface="Arial"/>
               </a:rPr>
               <a:t>Dn = 1.25</a:t>
             </a:r>
@@ -12899,7 +13122,7 @@
           <p:cNvPr id="12" name="">
             <a:extLst xmlns:a="http://schemas.openxmlformats.org/drawingml/2006/main">
               <a:ext uri="{FF2B5EF4-FFF2-40B4-BE49-F238E27FC236}">
-                <a16:creationId xmlns:a16="http://schemas.microsoft.com/office/drawing/2014/main" id="{CD0594EE-E3B8-41D3-B42A-4EDB5341C033}"/>
+                <a16:creationId xmlns:a16="http://schemas.microsoft.com/office/drawing/2014/main" id="{F02D4521-C6F7-41E6-A8AB-8BE06BB1F1D6}"/>
               </a:ext>
             </a:extLst>
           </p:cNvPr>
@@ -12911,7 +13134,7 @@
         <p:spPr>
           <a:xfrm xmlns:a="http://schemas.openxmlformats.org/drawingml/2006/main">
             <a:off x="3286125" y="3695700"/>
-            <a:ext cx="714375" cy="16193"/>
+            <a:ext cx="714375" cy="15240"/>
           </a:xfrm>
           <a:prstGeom xmlns:a="http://schemas.openxmlformats.org/drawingml/2006/main" prst="rect">
             <a:avLst/>
@@ -12934,7 +13157,7 @@
           <p:cNvPr id="13" name="">
             <a:extLst xmlns:a="http://schemas.openxmlformats.org/drawingml/2006/main">
               <a:ext uri="{FF2B5EF4-FFF2-40B4-BE49-F238E27FC236}">
-                <a16:creationId xmlns:a16="http://schemas.microsoft.com/office/drawing/2014/main" id="{B8C187F4-470E-4BBA-B9FD-E2A772101890}"/>
+                <a16:creationId xmlns:a16="http://schemas.microsoft.com/office/drawing/2014/main" id="{82F7B2F0-668C-4EF0-BD8C-56A2B34B0511}"/>
               </a:ext>
             </a:extLst>
           </p:cNvPr>
@@ -12974,9 +13197,9 @@
                 <a:solidFill>
                   <a:srgbClr val="D05A2A"/>
                 </a:solidFill>
-                <a:latin typeface="Aptos"/>
-                <a:ea typeface="Aptos"/>
-                <a:cs typeface="Aptos"/>
+                <a:latin typeface="Arial"/>
+                <a:ea typeface="Arial"/>
+                <a:cs typeface="Arial"/>
               </a:defRPr>
             </a:pPr>
             <a:r>
@@ -12984,9 +13207,9 @@
                 <a:solidFill>
                   <a:srgbClr val="D05A2A"/>
                 </a:solidFill>
-                <a:latin typeface="Aptos"/>
-                <a:ea typeface="Aptos"/>
-                <a:cs typeface="Aptos"/>
+                <a:latin typeface="Arial"/>
+                <a:ea typeface="Arial"/>
+                <a:cs typeface="Arial"/>
               </a:rPr>
               <a:t>&gt;</a:t>
             </a:r>
@@ -12998,7 +13221,7 @@
           <p:cNvPr id="14" name="">
             <a:extLst xmlns:a="http://schemas.openxmlformats.org/drawingml/2006/main">
               <a:ext uri="{FF2B5EF4-FFF2-40B4-BE49-F238E27FC236}">
-                <a16:creationId xmlns:a16="http://schemas.microsoft.com/office/drawing/2014/main" id="{435C6938-8382-4AA3-9E7C-3E28B05E3F4F}"/>
+                <a16:creationId xmlns:a16="http://schemas.microsoft.com/office/drawing/2014/main" id="{C68F2DA1-E3B3-4B14-8B71-9BB398839FD6}"/>
               </a:ext>
             </a:extLst>
           </p:cNvPr>
@@ -13031,7 +13254,7 @@
           <p:cNvPr id="15" name="">
             <a:extLst xmlns:a="http://schemas.openxmlformats.org/drawingml/2006/main">
               <a:ext uri="{FF2B5EF4-FFF2-40B4-BE49-F238E27FC236}">
-                <a16:creationId xmlns:a16="http://schemas.microsoft.com/office/drawing/2014/main" id="{21140016-988C-4D85-B9C3-ABDBFF1FCCFF}"/>
+                <a16:creationId xmlns:a16="http://schemas.microsoft.com/office/drawing/2014/main" id="{7577E77D-5F44-4675-B77C-4ACA62F94989}"/>
               </a:ext>
             </a:extLst>
           </p:cNvPr>
@@ -13066,7 +13289,7 @@
           <p:cNvPr id="16" name="">
             <a:extLst xmlns:a="http://schemas.openxmlformats.org/drawingml/2006/main">
               <a:ext uri="{FF2B5EF4-FFF2-40B4-BE49-F238E27FC236}">
-                <a16:creationId xmlns:a16="http://schemas.microsoft.com/office/drawing/2014/main" id="{F667C40F-E0BE-463B-83FD-06BFA7B3BD3B}"/>
+                <a16:creationId xmlns:a16="http://schemas.microsoft.com/office/drawing/2014/main" id="{D4661A18-1C4D-48E2-B6F4-26BA516E17B7}"/>
               </a:ext>
             </a:extLst>
           </p:cNvPr>
@@ -13106,9 +13329,9 @@
                 <a:solidFill>
                   <a:srgbClr val="1F4E79"/>
                 </a:solidFill>
-                <a:latin typeface="Aptos"/>
-                <a:ea typeface="Aptos"/>
-                <a:cs typeface="Aptos"/>
+                <a:latin typeface="Arial"/>
+                <a:ea typeface="Arial"/>
+                <a:cs typeface="Arial"/>
               </a:defRPr>
             </a:pPr>
             <a:r>
@@ -13116,9 +13339,9 @@
                 <a:solidFill>
                   <a:srgbClr val="1F4E79"/>
                 </a:solidFill>
-                <a:latin typeface="Aptos"/>
-                <a:ea typeface="Aptos"/>
-                <a:cs typeface="Aptos"/>
+                <a:latin typeface="Arial"/>
+                <a:ea typeface="Arial"/>
+                <a:cs typeface="Arial"/>
               </a:rPr>
               <a:t>reference solver</a:t>
             </a:r>
@@ -13130,7 +13353,7 @@
           <p:cNvPr id="17" name="">
             <a:extLst xmlns:a="http://schemas.openxmlformats.org/drawingml/2006/main">
               <a:ext uri="{FF2B5EF4-FFF2-40B4-BE49-F238E27FC236}">
-                <a16:creationId xmlns:a16="http://schemas.microsoft.com/office/drawing/2014/main" id="{3F6CB367-C99E-448D-B68B-4CADC9BAC779}"/>
+                <a16:creationId xmlns:a16="http://schemas.microsoft.com/office/drawing/2014/main" id="{7682476B-17C5-405F-90C6-D13BFF2C4EB7}"/>
               </a:ext>
             </a:extLst>
           </p:cNvPr>
@@ -13170,9 +13393,9 @@
                 <a:solidFill>
                   <a:srgbClr val="2B2B2B"/>
                 </a:solidFill>
-                <a:latin typeface="Aptos"/>
-                <a:ea typeface="Aptos"/>
-                <a:cs typeface="Aptos"/>
+                <a:latin typeface="Arial"/>
+                <a:ea typeface="Arial"/>
+                <a:cs typeface="Arial"/>
               </a:defRPr>
             </a:pPr>
             <a:r>
@@ -13180,9 +13403,9 @@
                 <a:solidFill>
                   <a:srgbClr val="2B2B2B"/>
                 </a:solidFill>
-                <a:latin typeface="Aptos"/>
-                <a:ea typeface="Aptos"/>
-                <a:cs typeface="Aptos"/>
+                <a:latin typeface="Arial"/>
+                <a:ea typeface="Arial"/>
+                <a:cs typeface="Arial"/>
               </a:rPr>
               <a:t>finite difference</a:t>
             </a:r>
@@ -13193,9 +13416,9 @@
                 <a:solidFill>
                   <a:srgbClr val="2B2B2B"/>
                 </a:solidFill>
-                <a:latin typeface="Aptos"/>
-                <a:ea typeface="Aptos"/>
-                <a:cs typeface="Aptos"/>
+                <a:latin typeface="Arial"/>
+                <a:ea typeface="Arial"/>
+                <a:cs typeface="Arial"/>
               </a:defRPr>
             </a:pPr>
             <a:r>
@@ -13203,9 +13426,9 @@
                 <a:solidFill>
                   <a:srgbClr val="2B2B2B"/>
                 </a:solidFill>
-                <a:latin typeface="Aptos"/>
-                <a:ea typeface="Aptos"/>
-                <a:cs typeface="Aptos"/>
+                <a:latin typeface="Arial"/>
+                <a:ea typeface="Arial"/>
+                <a:cs typeface="Arial"/>
               </a:rPr>
               <a:t>BDF integration</a:t>
             </a:r>
@@ -13217,7 +13440,7 @@
           <p:cNvPr id="18" name="">
             <a:extLst xmlns:a="http://schemas.openxmlformats.org/drawingml/2006/main">
               <a:ext uri="{FF2B5EF4-FFF2-40B4-BE49-F238E27FC236}">
-                <a16:creationId xmlns:a16="http://schemas.microsoft.com/office/drawing/2014/main" id="{E9808C35-EAFD-45F6-99DB-C3E2DB78477E}"/>
+                <a16:creationId xmlns:a16="http://schemas.microsoft.com/office/drawing/2014/main" id="{E48AFCCE-9273-43F4-AE2B-8280A657342D}"/>
               </a:ext>
             </a:extLst>
           </p:cNvPr>
@@ -13229,7 +13452,7 @@
         <p:spPr>
           <a:xfrm xmlns:a="http://schemas.openxmlformats.org/drawingml/2006/main">
             <a:off x="7029450" y="3695700"/>
-            <a:ext cx="714375" cy="16193"/>
+            <a:ext cx="714375" cy="15240"/>
           </a:xfrm>
           <a:prstGeom xmlns:a="http://schemas.openxmlformats.org/drawingml/2006/main" prst="rect">
             <a:avLst/>
@@ -13252,7 +13475,7 @@
           <p:cNvPr id="19" name="">
             <a:extLst xmlns:a="http://schemas.openxmlformats.org/drawingml/2006/main">
               <a:ext uri="{FF2B5EF4-FFF2-40B4-BE49-F238E27FC236}">
-                <a16:creationId xmlns:a16="http://schemas.microsoft.com/office/drawing/2014/main" id="{C0CC6384-F518-46EE-B8AA-19920E096BE8}"/>
+                <a16:creationId xmlns:a16="http://schemas.microsoft.com/office/drawing/2014/main" id="{DA3D3118-89BD-4EFD-AC51-31A958987846}"/>
               </a:ext>
             </a:extLst>
           </p:cNvPr>
@@ -13292,9 +13515,9 @@
                 <a:solidFill>
                   <a:srgbClr val="1F4E79"/>
                 </a:solidFill>
-                <a:latin typeface="Aptos"/>
-                <a:ea typeface="Aptos"/>
-                <a:cs typeface="Aptos"/>
+                <a:latin typeface="Arial"/>
+                <a:ea typeface="Arial"/>
+                <a:cs typeface="Arial"/>
               </a:defRPr>
             </a:pPr>
             <a:r>
@@ -13302,9 +13525,9 @@
                 <a:solidFill>
                   <a:srgbClr val="1F4E79"/>
                 </a:solidFill>
-                <a:latin typeface="Aptos"/>
-                <a:ea typeface="Aptos"/>
-                <a:cs typeface="Aptos"/>
+                <a:latin typeface="Arial"/>
+                <a:ea typeface="Arial"/>
+                <a:cs typeface="Arial"/>
               </a:rPr>
               <a:t>&gt;</a:t>
             </a:r>
@@ -13316,7 +13539,7 @@
           <p:cNvPr id="20" name="">
             <a:extLst xmlns:a="http://schemas.openxmlformats.org/drawingml/2006/main">
               <a:ext uri="{FF2B5EF4-FFF2-40B4-BE49-F238E27FC236}">
-                <a16:creationId xmlns:a16="http://schemas.microsoft.com/office/drawing/2014/main" id="{567D3BCE-6D7C-484D-A9EB-0DB999CD3887}"/>
+                <a16:creationId xmlns:a16="http://schemas.microsoft.com/office/drawing/2014/main" id="{242DE570-D1FA-4BDC-96FD-77A7F4857E1D}"/>
               </a:ext>
             </a:extLst>
           </p:cNvPr>
@@ -13349,7 +13572,7 @@
           <p:cNvPr id="21" name="">
             <a:extLst xmlns:a="http://schemas.openxmlformats.org/drawingml/2006/main">
               <a:ext uri="{FF2B5EF4-FFF2-40B4-BE49-F238E27FC236}">
-                <a16:creationId xmlns:a16="http://schemas.microsoft.com/office/drawing/2014/main" id="{913E232A-012E-47CF-A095-033ED46FE1E6}"/>
+                <a16:creationId xmlns:a16="http://schemas.microsoft.com/office/drawing/2014/main" id="{C42F9C5F-79E3-4DDE-B288-E05F09E310F6}"/>
               </a:ext>
             </a:extLst>
           </p:cNvPr>
@@ -13384,7 +13607,7 @@
           <p:cNvPr id="22" name="">
             <a:extLst xmlns:a="http://schemas.openxmlformats.org/drawingml/2006/main">
               <a:ext uri="{FF2B5EF4-FFF2-40B4-BE49-F238E27FC236}">
-                <a16:creationId xmlns:a16="http://schemas.microsoft.com/office/drawing/2014/main" id="{BFE6A85D-E77B-4072-9532-3D92FE1E6574}"/>
+                <a16:creationId xmlns:a16="http://schemas.microsoft.com/office/drawing/2014/main" id="{44DA4504-BA86-4D23-8276-008E0B18B8B7}"/>
               </a:ext>
             </a:extLst>
           </p:cNvPr>
@@ -13424,9 +13647,9 @@
                 <a:solidFill>
                   <a:srgbClr val="008C95"/>
                 </a:solidFill>
-                <a:latin typeface="Aptos"/>
-                <a:ea typeface="Aptos"/>
-                <a:cs typeface="Aptos"/>
+                <a:latin typeface="Arial"/>
+                <a:ea typeface="Arial"/>
+                <a:cs typeface="Arial"/>
               </a:defRPr>
             </a:pPr>
             <a:r>
@@ -13434,9 +13657,9 @@
                 <a:solidFill>
                   <a:srgbClr val="008C95"/>
                 </a:solidFill>
-                <a:latin typeface="Aptos"/>
-                <a:ea typeface="Aptos"/>
-                <a:cs typeface="Aptos"/>
+                <a:latin typeface="Arial"/>
+                <a:ea typeface="Arial"/>
+                <a:cs typeface="Arial"/>
               </a:rPr>
               <a:t>observation noise</a:t>
             </a:r>
@@ -13448,7 +13671,7 @@
           <p:cNvPr id="23" name="">
             <a:extLst xmlns:a="http://schemas.openxmlformats.org/drawingml/2006/main">
               <a:ext uri="{FF2B5EF4-FFF2-40B4-BE49-F238E27FC236}">
-                <a16:creationId xmlns:a16="http://schemas.microsoft.com/office/drawing/2014/main" id="{2102E249-1AAD-4E1F-A39C-45AEFCD32633}"/>
+                <a16:creationId xmlns:a16="http://schemas.microsoft.com/office/drawing/2014/main" id="{A79C91D5-C035-4734-AFF7-5C39741DADE0}"/>
               </a:ext>
             </a:extLst>
           </p:cNvPr>
@@ -13488,9 +13711,9 @@
                 <a:solidFill>
                   <a:srgbClr val="2B2B2B"/>
                 </a:solidFill>
-                <a:latin typeface="Aptos"/>
-                <a:ea typeface="Aptos"/>
-                <a:cs typeface="Aptos"/>
+                <a:latin typeface="Arial"/>
+                <a:ea typeface="Arial"/>
+                <a:cs typeface="Arial"/>
               </a:defRPr>
             </a:pPr>
             <a:r>
@@ -13498,9 +13721,9 @@
                 <a:solidFill>
                   <a:srgbClr val="2B2B2B"/>
                 </a:solidFill>
-                <a:latin typeface="Aptos"/>
-                <a:ea typeface="Aptos"/>
-                <a:cs typeface="Aptos"/>
+                <a:latin typeface="Arial"/>
+                <a:ea typeface="Arial"/>
+                <a:cs typeface="Arial"/>
               </a:rPr>
               <a:t>2% Gaussian</a:t>
             </a:r>
@@ -13512,7 +13735,7 @@
           <p:cNvPr id="24" name="">
             <a:extLst xmlns:a="http://schemas.openxmlformats.org/drawingml/2006/main">
               <a:ext uri="{FF2B5EF4-FFF2-40B4-BE49-F238E27FC236}">
-                <a16:creationId xmlns:a16="http://schemas.microsoft.com/office/drawing/2014/main" id="{45EE241B-040F-48FA-8E62-E97D6B0F99F0}"/>
+                <a16:creationId xmlns:a16="http://schemas.microsoft.com/office/drawing/2014/main" id="{90C22B3E-90F4-4405-99DE-4F2CF16E26FD}"/>
               </a:ext>
             </a:extLst>
           </p:cNvPr>
@@ -13524,7 +13747,7 @@
         <p:spPr>
           <a:xfrm xmlns:a="http://schemas.openxmlformats.org/drawingml/2006/main">
             <a:off x="10115550" y="3695700"/>
-            <a:ext cx="400050" cy="16193"/>
+            <a:ext cx="400050" cy="15240"/>
           </a:xfrm>
           <a:prstGeom xmlns:a="http://schemas.openxmlformats.org/drawingml/2006/main" prst="rect">
             <a:avLst/>
@@ -13547,7 +13770,7 @@
           <p:cNvPr id="25" name="">
             <a:extLst xmlns:a="http://schemas.openxmlformats.org/drawingml/2006/main">
               <a:ext uri="{FF2B5EF4-FFF2-40B4-BE49-F238E27FC236}">
-                <a16:creationId xmlns:a16="http://schemas.microsoft.com/office/drawing/2014/main" id="{27CDA4BF-9C76-49EB-A08F-4F5B44B1DD8C}"/>
+                <a16:creationId xmlns:a16="http://schemas.microsoft.com/office/drawing/2014/main" id="{AF3187BC-A836-4465-8D08-82CDEF437346}"/>
               </a:ext>
             </a:extLst>
           </p:cNvPr>
@@ -13587,9 +13810,9 @@
                 <a:solidFill>
                   <a:srgbClr val="008C95"/>
                 </a:solidFill>
-                <a:latin typeface="Aptos"/>
-                <a:ea typeface="Aptos"/>
-                <a:cs typeface="Aptos"/>
+                <a:latin typeface="Arial"/>
+                <a:ea typeface="Arial"/>
+                <a:cs typeface="Arial"/>
               </a:defRPr>
             </a:pPr>
             <a:r>
@@ -13597,9 +13820,9 @@
                 <a:solidFill>
                   <a:srgbClr val="008C95"/>
                 </a:solidFill>
-                <a:latin typeface="Aptos"/>
-                <a:ea typeface="Aptos"/>
-                <a:cs typeface="Aptos"/>
+                <a:latin typeface="Arial"/>
+                <a:ea typeface="Arial"/>
+                <a:cs typeface="Arial"/>
               </a:rPr>
               <a:t>&gt;</a:t>
             </a:r>
@@ -13611,7 +13834,7 @@
           <p:cNvPr id="26" name="">
             <a:extLst xmlns:a="http://schemas.openxmlformats.org/drawingml/2006/main">
               <a:ext uri="{FF2B5EF4-FFF2-40B4-BE49-F238E27FC236}">
-                <a16:creationId xmlns:a16="http://schemas.microsoft.com/office/drawing/2014/main" id="{DAB2A010-3F2E-4A7B-9740-1AD39684A051}"/>
+                <a16:creationId xmlns:a16="http://schemas.microsoft.com/office/drawing/2014/main" id="{FE3D49CF-8DA6-40D8-88B9-FC87F17A3F79}"/>
               </a:ext>
             </a:extLst>
           </p:cNvPr>
@@ -13651,9 +13874,9 @@
                 <a:solidFill>
                   <a:srgbClr val="2B2B2B"/>
                 </a:solidFill>
-                <a:latin typeface="Aptos"/>
-                <a:ea typeface="Aptos"/>
-                <a:cs typeface="Aptos"/>
+                <a:latin typeface="Arial"/>
+                <a:ea typeface="Arial"/>
+                <a:cs typeface="Arial"/>
               </a:defRPr>
             </a:pPr>
             <a:r>
@@ -13661,9 +13884,9 @@
                 <a:solidFill>
                   <a:srgbClr val="2B2B2B"/>
                 </a:solidFill>
-                <a:latin typeface="Aptos"/>
-                <a:ea typeface="Aptos"/>
-                <a:cs typeface="Aptos"/>
+                <a:latin typeface="Arial"/>
+                <a:ea typeface="Arial"/>
+                <a:cs typeface="Arial"/>
               </a:rPr>
               <a:t>79</a:t>
             </a:r>
@@ -13674,9 +13897,9 @@
                 <a:solidFill>
                   <a:srgbClr val="2B2B2B"/>
                 </a:solidFill>
-                <a:latin typeface="Aptos"/>
-                <a:ea typeface="Aptos"/>
-                <a:cs typeface="Aptos"/>
+                <a:latin typeface="Arial"/>
+                <a:ea typeface="Arial"/>
+                <a:cs typeface="Arial"/>
               </a:defRPr>
             </a:pPr>
             <a:r>
@@ -13684,9 +13907,9 @@
                 <a:solidFill>
                   <a:srgbClr val="2B2B2B"/>
                 </a:solidFill>
-                <a:latin typeface="Aptos"/>
-                <a:ea typeface="Aptos"/>
-                <a:cs typeface="Aptos"/>
+                <a:latin typeface="Arial"/>
+                <a:ea typeface="Arial"/>
+                <a:cs typeface="Arial"/>
               </a:rPr>
               <a:t>current</a:t>
             </a:r>
@@ -13697,9 +13920,9 @@
                 <a:solidFill>
                   <a:srgbClr val="2B2B2B"/>
                 </a:solidFill>
-                <a:latin typeface="Aptos"/>
-                <a:ea typeface="Aptos"/>
-                <a:cs typeface="Aptos"/>
+                <a:latin typeface="Arial"/>
+                <a:ea typeface="Arial"/>
+                <a:cs typeface="Arial"/>
               </a:defRPr>
             </a:pPr>
             <a:r>
@@ -13707,9 +13930,9 @@
                 <a:solidFill>
                   <a:srgbClr val="2B2B2B"/>
                 </a:solidFill>
-                <a:latin typeface="Aptos"/>
-                <a:ea typeface="Aptos"/>
-                <a:cs typeface="Aptos"/>
+                <a:latin typeface="Arial"/>
+                <a:ea typeface="Arial"/>
+                <a:cs typeface="Arial"/>
               </a:rPr>
               <a:t>intervals</a:t>
             </a:r>
@@ -13721,7 +13944,7 @@
           <p:cNvPr id="27" name="">
             <a:extLst xmlns:a="http://schemas.openxmlformats.org/drawingml/2006/main">
               <a:ext uri="{FF2B5EF4-FFF2-40B4-BE49-F238E27FC236}">
-                <a16:creationId xmlns:a16="http://schemas.microsoft.com/office/drawing/2014/main" id="{C7631D91-87BF-42AB-BB12-C96A73D8EC91}"/>
+                <a16:creationId xmlns:a16="http://schemas.microsoft.com/office/drawing/2014/main" id="{E7661A44-A2E2-4170-8BD5-001E3B17681A}"/>
               </a:ext>
             </a:extLst>
           </p:cNvPr>
@@ -13756,7 +13979,7 @@
           <p:cNvPr id="28" name="">
             <a:extLst xmlns:a="http://schemas.openxmlformats.org/drawingml/2006/main">
               <a:ext uri="{FF2B5EF4-FFF2-40B4-BE49-F238E27FC236}">
-                <a16:creationId xmlns:a16="http://schemas.microsoft.com/office/drawing/2014/main" id="{66780D93-DA6C-4FE4-AA9A-2278958CB584}"/>
+                <a16:creationId xmlns:a16="http://schemas.microsoft.com/office/drawing/2014/main" id="{3579DE24-DB66-48A7-B3D4-8EB583338E72}"/>
               </a:ext>
             </a:extLst>
           </p:cNvPr>
@@ -13768,7 +13991,7 @@
         <p:spPr>
           <a:xfrm xmlns:a="http://schemas.openxmlformats.org/drawingml/2006/main">
             <a:off x="685800" y="6477000"/>
-            <a:ext cx="6858000" cy="152400"/>
+            <a:ext cx="7239000" cy="152400"/>
           </a:xfrm>
           <a:prstGeom xmlns:a="http://schemas.openxmlformats.org/drawingml/2006/main" prst="rect">
             <a:avLst/>
@@ -13796,9 +14019,9 @@
                 <a:solidFill>
                   <a:srgbClr val="77736D"/>
                 </a:solidFill>
-                <a:latin typeface="Aptos"/>
-                <a:ea typeface="Aptos"/>
-                <a:cs typeface="Aptos"/>
+                <a:latin typeface="Arial"/>
+                <a:ea typeface="Arial"/>
+                <a:cs typeface="Arial"/>
               </a:defRPr>
             </a:pPr>
             <a:r>
@@ -13806,9 +14029,9 @@
                 <a:solidFill>
                   <a:srgbClr val="77736D"/>
                 </a:solidFill>
-                <a:latin typeface="Aptos"/>
-                <a:ea typeface="Aptos"/>
-                <a:cs typeface="Aptos"/>
+                <a:latin typeface="Arial"/>
+                <a:ea typeface="Arial"/>
+                <a:cs typeface="Arial"/>
               </a:rPr>
               <a:t>Reference solver to synthetic current observations</a:t>
             </a:r>
@@ -13818,7 +14041,7 @@
     </p:spTree>
     <p:extLst>
       <p:ext uri="{BB962C8B-B14F-4D97-AF65-F5344CB8AC3E}">
-        <p14:creationId xmlns:p14="http://schemas.microsoft.com/office/powerpoint/2010/main" val="405211810"/>
+        <p14:creationId xmlns:p14="http://schemas.microsoft.com/office/powerpoint/2010/main" val="757844060"/>
       </p:ext>
     </p:extLst>
   </p:cSld>
@@ -13842,7 +14065,7 @@
           <p:cNvPr id="1" name="">
             <a:extLst xmlns:a="http://schemas.openxmlformats.org/drawingml/2006/main">
               <a:ext uri="{FF2B5EF4-FFF2-40B4-BE49-F238E27FC236}">
-                <a16:creationId xmlns:a16="http://schemas.microsoft.com/office/drawing/2014/main" id="{8041D0D5-117A-4A74-A31D-804210F6D4A3}"/>
+                <a16:creationId xmlns:a16="http://schemas.microsoft.com/office/drawing/2014/main" id="{8A80CE44-4A81-464B-8C6C-AD3235AB904F}"/>
               </a:ext>
             </a:extLst>
           </p:cNvPr>
@@ -13877,7 +14100,7 @@
           <p:cNvPr id="2" name="">
             <a:extLst xmlns:a="http://schemas.openxmlformats.org/drawingml/2006/main">
               <a:ext uri="{FF2B5EF4-FFF2-40B4-BE49-F238E27FC236}">
-                <a16:creationId xmlns:a16="http://schemas.microsoft.com/office/drawing/2014/main" id="{B0A252AC-10EA-4237-96CD-4D52B5F6A36C}"/>
+                <a16:creationId xmlns:a16="http://schemas.microsoft.com/office/drawing/2014/main" id="{DC004F00-3FFF-4AC1-A45C-25620EC03750}"/>
               </a:ext>
             </a:extLst>
           </p:cNvPr>
@@ -13889,7 +14112,7 @@
         <p:spPr>
           <a:xfrm xmlns:a="http://schemas.openxmlformats.org/drawingml/2006/main">
             <a:off x="685800" y="400050"/>
-            <a:ext cx="4953000" cy="190500"/>
+            <a:ext cx="5143500" cy="190500"/>
           </a:xfrm>
           <a:prstGeom xmlns:a="http://schemas.openxmlformats.org/drawingml/2006/main" prst="rect">
             <a:avLst/>
@@ -13917,9 +14140,9 @@
                 <a:solidFill>
                   <a:srgbClr val="6D6D6D"/>
                 </a:solidFill>
-                <a:latin typeface="Aptos"/>
-                <a:ea typeface="Aptos"/>
-                <a:cs typeface="Aptos"/>
+                <a:latin typeface="Arial"/>
+                <a:ea typeface="Arial"/>
+                <a:cs typeface="Arial"/>
               </a:defRPr>
             </a:pPr>
             <a:r>
@@ -13927,9 +14150,9 @@
                 <a:solidFill>
                   <a:srgbClr val="6D6D6D"/>
                 </a:solidFill>
-                <a:latin typeface="Aptos"/>
-                <a:ea typeface="Aptos"/>
-                <a:cs typeface="Aptos"/>
+                <a:latin typeface="Arial"/>
+                <a:ea typeface="Arial"/>
+                <a:cs typeface="Arial"/>
               </a:rPr>
               <a:t>CURRENT OBSERVABLE</a:t>
             </a:r>
@@ -13941,7 +14164,7 @@
           <p:cNvPr id="3" name="">
             <a:extLst xmlns:a="http://schemas.openxmlformats.org/drawingml/2006/main">
               <a:ext uri="{FF2B5EF4-FFF2-40B4-BE49-F238E27FC236}">
-                <a16:creationId xmlns:a16="http://schemas.microsoft.com/office/drawing/2014/main" id="{42A9050D-FFC8-41B1-8516-5856FF1B99E3}"/>
+                <a16:creationId xmlns:a16="http://schemas.microsoft.com/office/drawing/2014/main" id="{AD71882C-743E-4AED-A46B-B8387FD59D94}"/>
               </a:ext>
             </a:extLst>
           </p:cNvPr>
@@ -13981,9 +14204,9 @@
                 <a:solidFill>
                   <a:srgbClr val="6D6D6D"/>
                 </a:solidFill>
-                <a:latin typeface="Aptos"/>
-                <a:ea typeface="Aptos"/>
-                <a:cs typeface="Aptos"/>
+                <a:latin typeface="Arial"/>
+                <a:ea typeface="Arial"/>
+                <a:cs typeface="Arial"/>
               </a:defRPr>
             </a:pPr>
             <a:r>
@@ -13991,9 +14214,9 @@
                 <a:solidFill>
                   <a:srgbClr val="6D6D6D"/>
                 </a:solidFill>
-                <a:latin typeface="Aptos"/>
-                <a:ea typeface="Aptos"/>
-                <a:cs typeface="Aptos"/>
+                <a:latin typeface="Arial"/>
+                <a:ea typeface="Arial"/>
+                <a:cs typeface="Arial"/>
               </a:rPr>
               <a:t>09</a:t>
             </a:r>
@@ -14005,7 +14228,7 @@
           <p:cNvPr id="4" name="">
             <a:extLst xmlns:a="http://schemas.openxmlformats.org/drawingml/2006/main">
               <a:ext uri="{FF2B5EF4-FFF2-40B4-BE49-F238E27FC236}">
-                <a16:creationId xmlns:a16="http://schemas.microsoft.com/office/drawing/2014/main" id="{09124E54-CC5E-44A8-A492-2FDA3A8C35DD}"/>
+                <a16:creationId xmlns:a16="http://schemas.microsoft.com/office/drawing/2014/main" id="{2D534F14-9392-4BF5-9907-670DC016AB62}"/>
               </a:ext>
             </a:extLst>
           </p:cNvPr>
@@ -14040,7 +14263,7 @@
           <p:cNvPr id="5" name="">
             <a:extLst xmlns:a="http://schemas.openxmlformats.org/drawingml/2006/main">
               <a:ext uri="{FF2B5EF4-FFF2-40B4-BE49-F238E27FC236}">
-                <a16:creationId xmlns:a16="http://schemas.microsoft.com/office/drawing/2014/main" id="{5C22BC53-9839-486E-AC3B-D574B348D549}"/>
+                <a16:creationId xmlns:a16="http://schemas.microsoft.com/office/drawing/2014/main" id="{AFFBCBAC-4250-441F-82CE-2B0FD8597876}"/>
               </a:ext>
             </a:extLst>
           </p:cNvPr>
@@ -14075,7 +14298,7 @@
           <p:cNvPr id="6" name="">
             <a:extLst xmlns:a="http://schemas.openxmlformats.org/drawingml/2006/main">
               <a:ext uri="{FF2B5EF4-FFF2-40B4-BE49-F238E27FC236}">
-                <a16:creationId xmlns:a16="http://schemas.microsoft.com/office/drawing/2014/main" id="{8773E424-F127-4781-90AD-8AA74F20C9BE}"/>
+                <a16:creationId xmlns:a16="http://schemas.microsoft.com/office/drawing/2014/main" id="{8B6C1EBE-9F73-43EF-AA36-46AEE7A42694}"/>
               </a:ext>
             </a:extLst>
           </p:cNvPr>
@@ -14087,7 +14310,7 @@
         <p:spPr>
           <a:xfrm xmlns:a="http://schemas.openxmlformats.org/drawingml/2006/main">
             <a:off x="685800" y="990600"/>
-            <a:ext cx="10668000" cy="723900"/>
+            <a:ext cx="10096500" cy="723900"/>
           </a:xfrm>
           <a:prstGeom xmlns:a="http://schemas.openxmlformats.org/drawingml/2006/main" prst="rect">
             <a:avLst/>
@@ -14115,9 +14338,9 @@
                 <a:solidFill>
                   <a:srgbClr val="151515"/>
                 </a:solidFill>
-                <a:latin typeface="Aptos Display"/>
-                <a:ea typeface="Aptos Display"/>
-                <a:cs typeface="Aptos Display"/>
+                <a:latin typeface="Arial"/>
+                <a:ea typeface="Arial"/>
+                <a:cs typeface="Arial"/>
               </a:defRPr>
             </a:pPr>
             <a:r>
@@ -14125,9 +14348,9 @@
                 <a:solidFill>
                   <a:srgbClr val="151515"/>
                 </a:solidFill>
-                <a:latin typeface="Aptos Display"/>
-                <a:ea typeface="Aptos Display"/>
-                <a:cs typeface="Aptos Display"/>
+                <a:latin typeface="Arial"/>
+                <a:ea typeface="Arial"/>
+                <a:cs typeface="Arial"/>
               </a:rPr>
               <a:t>Q(t) is a simulator construction; the observation is current I(t).</a:t>
             </a:r>
@@ -14139,7 +14362,7 @@
           <p:cNvPr id="7" name="">
             <a:extLst xmlns:a="http://schemas.openxmlformats.org/drawingml/2006/main">
               <a:ext uri="{FF2B5EF4-FFF2-40B4-BE49-F238E27FC236}">
-                <a16:creationId xmlns:a16="http://schemas.microsoft.com/office/drawing/2014/main" id="{17254C52-4A1D-43BD-97A2-927EDA8DF1E1}"/>
+                <a16:creationId xmlns:a16="http://schemas.microsoft.com/office/drawing/2014/main" id="{756EC44F-FD2A-4C41-B4F1-5B1AE8AEFEBF}"/>
               </a:ext>
             </a:extLst>
           </p:cNvPr>
@@ -14172,7 +14395,7 @@
           <p:cNvPr id="8" name="">
             <a:extLst xmlns:a="http://schemas.openxmlformats.org/drawingml/2006/main">
               <a:ext uri="{FF2B5EF4-FFF2-40B4-BE49-F238E27FC236}">
-                <a16:creationId xmlns:a16="http://schemas.microsoft.com/office/drawing/2014/main" id="{F0A7B524-C628-4302-8740-ACCCD6A0C0ED}"/>
+                <a16:creationId xmlns:a16="http://schemas.microsoft.com/office/drawing/2014/main" id="{DA4477B9-579A-407B-BC34-730E81188DCD}"/>
               </a:ext>
             </a:extLst>
           </p:cNvPr>
@@ -14207,7 +14430,7 @@
           <p:cNvPr id="9" name="">
             <a:extLst xmlns:a="http://schemas.openxmlformats.org/drawingml/2006/main">
               <a:ext uri="{FF2B5EF4-FFF2-40B4-BE49-F238E27FC236}">
-                <a16:creationId xmlns:a16="http://schemas.microsoft.com/office/drawing/2014/main" id="{30F12A91-56C5-4E75-84AD-CB5A93EC0453}"/>
+                <a16:creationId xmlns:a16="http://schemas.microsoft.com/office/drawing/2014/main" id="{0541B7FF-E592-46D7-9753-F59D7C8CD4BE}"/>
               </a:ext>
             </a:extLst>
           </p:cNvPr>
@@ -14247,9 +14470,9 @@
                 <a:solidFill>
                   <a:srgbClr val="008C95"/>
                 </a:solidFill>
-                <a:latin typeface="Aptos"/>
-                <a:ea typeface="Aptos"/>
-                <a:cs typeface="Aptos"/>
+                <a:latin typeface="Arial"/>
+                <a:ea typeface="Arial"/>
+                <a:cs typeface="Arial"/>
               </a:defRPr>
             </a:pPr>
             <a:r>
@@ -14257,9 +14480,9 @@
                 <a:solidFill>
                   <a:srgbClr val="008C95"/>
                 </a:solidFill>
-                <a:latin typeface="Aptos"/>
-                <a:ea typeface="Aptos"/>
-                <a:cs typeface="Aptos"/>
+                <a:latin typeface="Arial"/>
+                <a:ea typeface="Arial"/>
+                <a:cs typeface="Arial"/>
               </a:rPr>
               <a:t>experiment</a:t>
             </a:r>
@@ -14271,7 +14494,7 @@
           <p:cNvPr id="10" name="">
             <a:extLst xmlns:a="http://schemas.openxmlformats.org/drawingml/2006/main">
               <a:ext uri="{FF2B5EF4-FFF2-40B4-BE49-F238E27FC236}">
-                <a16:creationId xmlns:a16="http://schemas.microsoft.com/office/drawing/2014/main" id="{A9D74204-DE63-4BD1-9234-78B3C364E5AC}"/>
+                <a16:creationId xmlns:a16="http://schemas.microsoft.com/office/drawing/2014/main" id="{F9C8D293-FC5A-479F-91EF-FCAC36DD1697}"/>
               </a:ext>
             </a:extLst>
           </p:cNvPr>
@@ -14311,9 +14534,9 @@
                 <a:solidFill>
                   <a:srgbClr val="2B2B2B"/>
                 </a:solidFill>
-                <a:latin typeface="Aptos"/>
-                <a:ea typeface="Aptos"/>
-                <a:cs typeface="Aptos"/>
+                <a:latin typeface="Arial"/>
+                <a:ea typeface="Arial"/>
+                <a:cs typeface="Arial"/>
               </a:defRPr>
             </a:pPr>
             <a:r>
@@ -14321,9 +14544,9 @@
                 <a:solidFill>
                   <a:srgbClr val="2B2B2B"/>
                 </a:solidFill>
-                <a:latin typeface="Aptos"/>
-                <a:ea typeface="Aptos"/>
-                <a:cs typeface="Aptos"/>
+                <a:latin typeface="Arial"/>
+                <a:ea typeface="Arial"/>
+                <a:cs typeface="Arial"/>
               </a:rPr>
               <a:t>external circuit</a:t>
             </a:r>
@@ -14334,9 +14557,9 @@
                 <a:solidFill>
                   <a:srgbClr val="2B2B2B"/>
                 </a:solidFill>
-                <a:latin typeface="Aptos"/>
-                <a:ea typeface="Aptos"/>
-                <a:cs typeface="Aptos"/>
+                <a:latin typeface="Arial"/>
+                <a:ea typeface="Arial"/>
+                <a:cs typeface="Arial"/>
               </a:defRPr>
             </a:pPr>
             <a:r>
@@ -14344,9 +14567,9 @@
                 <a:solidFill>
                   <a:srgbClr val="2B2B2B"/>
                 </a:solidFill>
-                <a:latin typeface="Aptos"/>
-                <a:ea typeface="Aptos"/>
-                <a:cs typeface="Aptos"/>
+                <a:latin typeface="Arial"/>
+                <a:ea typeface="Arial"/>
+                <a:cs typeface="Arial"/>
               </a:rPr>
               <a:t>measures I(t)</a:t>
             </a:r>
@@ -14358,7 +14581,7 @@
           <p:cNvPr id="11" name="">
             <a:extLst xmlns:a="http://schemas.openxmlformats.org/drawingml/2006/main">
               <a:ext uri="{FF2B5EF4-FFF2-40B4-BE49-F238E27FC236}">
-                <a16:creationId xmlns:a16="http://schemas.microsoft.com/office/drawing/2014/main" id="{21460F27-2964-4386-AC53-B5223B2DDB95}"/>
+                <a16:creationId xmlns:a16="http://schemas.microsoft.com/office/drawing/2014/main" id="{C26C0624-45AD-4B97-8CE2-D06BBC4032D8}"/>
               </a:ext>
             </a:extLst>
           </p:cNvPr>
@@ -14391,7 +14614,7 @@
           <p:cNvPr id="12" name="">
             <a:extLst xmlns:a="http://schemas.openxmlformats.org/drawingml/2006/main">
               <a:ext uri="{FF2B5EF4-FFF2-40B4-BE49-F238E27FC236}">
-                <a16:creationId xmlns:a16="http://schemas.microsoft.com/office/drawing/2014/main" id="{7DDC54F3-2FF7-4C8E-BBA6-E9126CFB4D47}"/>
+                <a16:creationId xmlns:a16="http://schemas.microsoft.com/office/drawing/2014/main" id="{E664B857-0105-4C4F-ADD8-D15CDEDBE190}"/>
               </a:ext>
             </a:extLst>
           </p:cNvPr>
@@ -14430,13 +14653,13 @@
           <p:nvPr/>
         </p:nvPicPr>
         <p:blipFill>
-          <a:blip xmlns:r="http://schemas.openxmlformats.org/officeDocument/2006/relationships" xmlns:a="http://schemas.openxmlformats.org/drawingml/2006/main" r:embed="R4e9ad9b447784625"/>
+          <a:blip xmlns:r="http://schemas.openxmlformats.org/officeDocument/2006/relationships" xmlns:a="http://schemas.openxmlformats.org/drawingml/2006/main" r:embed="Ra065f9ddff15449d"/>
           <a:stretch xmlns:a="http://schemas.openxmlformats.org/drawingml/2006/main"/>
         </p:blipFill>
         <p:spPr>
           <a:xfrm xmlns:a="http://schemas.openxmlformats.org/drawingml/2006/main">
-            <a:off x="6038850" y="2782313"/>
-            <a:ext cx="4524375" cy="1331474"/>
+            <a:off x="6038850" y="2825948"/>
+            <a:ext cx="4524375" cy="1244203"/>
           </a:xfrm>
           <a:prstGeom xmlns:a="http://schemas.openxmlformats.org/drawingml/2006/main" prst="rect">
             <a:avLst/>
@@ -14448,7 +14671,7 @@
           <p:cNvPr id="14" name="">
             <a:extLst xmlns:a="http://schemas.openxmlformats.org/drawingml/2006/main">
               <a:ext uri="{FF2B5EF4-FFF2-40B4-BE49-F238E27FC236}">
-                <a16:creationId xmlns:a16="http://schemas.microsoft.com/office/drawing/2014/main" id="{695FE25C-12CC-4BB6-A790-AA9F10BDE610}"/>
+                <a16:creationId xmlns:a16="http://schemas.microsoft.com/office/drawing/2014/main" id="{3D71E234-175A-49A1-8FB8-B82C2D1FA701}"/>
               </a:ext>
             </a:extLst>
           </p:cNvPr>
@@ -14488,9 +14711,9 @@
                 <a:solidFill>
                   <a:srgbClr val="6D6D6D"/>
                 </a:solidFill>
-                <a:latin typeface="Aptos"/>
-                <a:ea typeface="Aptos"/>
-                <a:cs typeface="Aptos"/>
+                <a:latin typeface="Arial"/>
+                <a:ea typeface="Arial"/>
+                <a:cs typeface="Arial"/>
               </a:defRPr>
             </a:pPr>
             <a:r>
@@ -14498,9 +14721,9 @@
                 <a:solidFill>
                   <a:srgbClr val="6D6D6D"/>
                 </a:solidFill>
-                <a:latin typeface="Aptos"/>
-                <a:ea typeface="Aptos"/>
-                <a:cs typeface="Aptos"/>
+                <a:latin typeface="Arial"/>
+                <a:ea typeface="Arial"/>
+                <a:cs typeface="Arial"/>
               </a:rPr>
               <a:t>The Q(t) route avoids unstable boundary derivatives when computing the current from a learned field.</a:t>
             </a:r>
@@ -14512,7 +14735,7 @@
           <p:cNvPr id="15" name="">
             <a:extLst xmlns:a="http://schemas.openxmlformats.org/drawingml/2006/main">
               <a:ext uri="{FF2B5EF4-FFF2-40B4-BE49-F238E27FC236}">
-                <a16:creationId xmlns:a16="http://schemas.microsoft.com/office/drawing/2014/main" id="{5EA3CE3B-CB3F-451F-A41A-33894F4825C8}"/>
+                <a16:creationId xmlns:a16="http://schemas.microsoft.com/office/drawing/2014/main" id="{573187EC-86DD-41EF-8D04-DBD9A9F52477}"/>
               </a:ext>
             </a:extLst>
           </p:cNvPr>
@@ -14547,7 +14770,7 @@
           <p:cNvPr id="16" name="">
             <a:extLst xmlns:a="http://schemas.openxmlformats.org/drawingml/2006/main">
               <a:ext uri="{FF2B5EF4-FFF2-40B4-BE49-F238E27FC236}">
-                <a16:creationId xmlns:a16="http://schemas.microsoft.com/office/drawing/2014/main" id="{2B3D314F-B91B-4FFF-898F-9352886D25A4}"/>
+                <a16:creationId xmlns:a16="http://schemas.microsoft.com/office/drawing/2014/main" id="{28DDCE72-66EB-4044-AD03-6EA1E1F2874A}"/>
               </a:ext>
             </a:extLst>
           </p:cNvPr>
@@ -14559,7 +14782,7 @@
         <p:spPr>
           <a:xfrm xmlns:a="http://schemas.openxmlformats.org/drawingml/2006/main">
             <a:off x="685800" y="6477000"/>
-            <a:ext cx="6858000" cy="152400"/>
+            <a:ext cx="7239000" cy="152400"/>
           </a:xfrm>
           <a:prstGeom xmlns:a="http://schemas.openxmlformats.org/drawingml/2006/main" prst="rect">
             <a:avLst/>
@@ -14587,9 +14810,9 @@
                 <a:solidFill>
                   <a:srgbClr val="77736D"/>
                 </a:solidFill>
-                <a:latin typeface="Aptos"/>
-                <a:ea typeface="Aptos"/>
-                <a:cs typeface="Aptos"/>
+                <a:latin typeface="Arial"/>
+                <a:ea typeface="Arial"/>
+                <a:cs typeface="Arial"/>
               </a:defRPr>
             </a:pPr>
             <a:r>
@@ -14597,9 +14820,9 @@
                 <a:solidFill>
                   <a:srgbClr val="77736D"/>
                 </a:solidFill>
-                <a:latin typeface="Aptos"/>
-                <a:ea typeface="Aptos"/>
-                <a:cs typeface="Aptos"/>
+                <a:latin typeface="Arial"/>
+                <a:ea typeface="Arial"/>
+                <a:cs typeface="Arial"/>
               </a:rPr>
               <a:t>Current measurement and simulation-side construction</a:t>
             </a:r>
@@ -14609,7 +14832,7 @@
     </p:spTree>
     <p:extLst>
       <p:ext uri="{BB962C8B-B14F-4D97-AF65-F5344CB8AC3E}">
-        <p14:creationId xmlns:p14="http://schemas.microsoft.com/office/powerpoint/2010/main" val="677192456"/>
+        <p14:creationId xmlns:p14="http://schemas.microsoft.com/office/powerpoint/2010/main" val="689716918"/>
       </p:ext>
     </p:extLst>
   </p:cSld>
